--- a/docs/presentation/KAOP_Customer_Pitch.pptx
+++ b/docs/presentation/KAOP_Customer_Pitch.pptx
@@ -7720,7 +7720,7 @@
                 </a:solidFill>
                 <a:latin typeface="Arial"/>
               </a:rPr>
-              <a:t>•  An owner who drives it day to day</a:t>
+              <a:t>•  A driver who owns it day to day</a:t>
             </a:r>
           </a:p>
           <a:p>
@@ -7736,7 +7736,23 @@
                 </a:solidFill>
                 <a:latin typeface="Arial"/>
               </a:rPr>
-              <a:t>•  A sponsor who decides when to expand</a:t>
+              <a:t>•  The budget owner, who decides when to expand</a:t>
+            </a:r>
+          </a:p>
+          <a:p>
+            <a:pPr algn="l">
+              <a:lnSpc>
+                <a:spcPct val="110000"/>
+              </a:lnSpc>
+            </a:pPr>
+            <a:r>
+              <a:rPr sz="1500" b="0">
+                <a:solidFill>
+                  <a:srgbClr val="0F172A"/>
+                </a:solidFill>
+                <a:latin typeface="Arial"/>
+              </a:rPr>
+              <a:t>•  Two or three dates for the scoping session</a:t>
             </a:r>
           </a:p>
         </p:txBody>
@@ -7962,7 +7978,7 @@
                 </a:solidFill>
                 <a:latin typeface="Arial"/>
               </a:rPr>
-              <a:t>A scoping session with your workflow owner.</a:t>
+              <a:t>Pick a date for the scoping session with your driver and budget owner.</a:t>
             </a:r>
           </a:p>
         </p:txBody>
@@ -9299,7 +9315,7 @@
                 </a:solidFill>
                 <a:latin typeface="Arial"/>
               </a:rPr>
-              <a:t>A scoping session with your workflow owner.</a:t>
+              <a:t>A scoping session with your driver and budget owner.</a:t>
             </a:r>
           </a:p>
         </p:txBody>

--- a/docs/presentation/KAOP_Customer_Pitch.pptx
+++ b/docs/presentation/KAOP_Customer_Pitch.pptx
@@ -21,6 +21,7 @@
     <p:sldId id="269" r:id="rId20"/>
     <p:sldId id="270" r:id="rId21"/>
     <p:sldId id="271" r:id="rId22"/>
+    <p:sldId id="272" r:id="rId23"/>
   </p:sldIdLst>
   <p:sldSz cx="12191695" cy="6858000" type="screen4x3"/>
   <p:notesSz cx="6858000" cy="9144000"/>
@@ -3860,7 +3861,7 @@
                 </a:solidFill>
                 <a:latin typeface="Arial"/>
               </a:rPr>
-              <a:t>10 / 12</a:t>
+              <a:t>10 / 13</a:t>
             </a:r>
           </a:p>
         </p:txBody>
@@ -4343,7 +4344,7 @@
                 </a:solidFill>
                 <a:latin typeface="Arial"/>
               </a:rPr>
-              <a:t>Readiness fails. Correct.</a:t>
+              <a:t>Started when we began.</a:t>
             </a:r>
           </a:p>
         </p:txBody>
@@ -4970,7 +4971,7 @@
                 </a:solidFill>
                 <a:latin typeface="Arial"/>
               </a:rPr>
-              <a:t>FIX</a:t>
+              <a:t>DECIDE AND FIX</a:t>
             </a:r>
           </a:p>
         </p:txBody>
@@ -5153,7 +5154,7 @@
                 </a:solidFill>
                 <a:latin typeface="Arial"/>
               </a:rPr>
-              <a:t>I approve a one-line PR.</a:t>
+              <a:t>I approve, then apply.</a:t>
             </a:r>
           </a:p>
         </p:txBody>
@@ -5297,7 +5298,7 @@
                 </a:solidFill>
                 <a:latin typeface="Arial"/>
               </a:rPr>
-              <a:t>Review</a:t>
+              <a:t>Prevent</a:t>
             </a:r>
           </a:p>
         </p:txBody>
@@ -5336,7 +5337,7 @@
                 </a:solidFill>
                 <a:latin typeface="Arial"/>
               </a:rPr>
-              <a:t>A second agent reviews it.</a:t>
+              <a:t>One-line PR, reviewed by an agent.</a:t>
             </a:r>
           </a:p>
         </p:txBody>
@@ -6801,7 +6802,1855 @@
                 </a:solidFill>
                 <a:latin typeface="Arial"/>
               </a:rPr>
-              <a:t>11 / 12</a:t>
+              <a:t>11 / 13</a:t>
+            </a:r>
+          </a:p>
+        </p:txBody>
+      </p:sp>
+      <p:sp>
+        <p:nvSpPr>
+          <p:cNvPr id="4" name="TextBox 3"/>
+          <p:cNvSpPr txBox="1"/>
+          <p:nvPr/>
+        </p:nvSpPr>
+        <p:spPr>
+          <a:xfrm>
+            <a:off x="548640" y="658368"/>
+            <a:ext cx="11064240" cy="731520"/>
+          </a:xfrm>
+          <a:prstGeom prst="rect">
+            <a:avLst/>
+          </a:prstGeom>
+          <a:noFill/>
+        </p:spPr>
+        <p:txBody>
+          <a:bodyPr wrap="square" lIns="73152" rIns="73152" tIns="36576" bIns="36576" anchor="t">
+            <a:spAutoFit/>
+          </a:bodyPr>
+          <a:lstStyle/>
+          <a:p>
+            <a:pPr algn="l">
+              <a:lnSpc>
+                <a:spcPct val="110000"/>
+              </a:lnSpc>
+            </a:pPr>
+            <a:r>
+              <a:rPr sz="3200" b="1">
+                <a:solidFill>
+                  <a:srgbClr val="0F172A"/>
+                </a:solidFill>
+                <a:latin typeface="Arial"/>
+              </a:rPr>
+              <a:t>Autonomy, earned one step at a time</a:t>
+            </a:r>
+          </a:p>
+        </p:txBody>
+      </p:sp>
+      <p:sp>
+        <p:nvSpPr>
+          <p:cNvPr id="5" name="TextBox 4"/>
+          <p:cNvSpPr txBox="1"/>
+          <p:nvPr/>
+        </p:nvSpPr>
+        <p:spPr>
+          <a:xfrm>
+            <a:off x="548640" y="1371600"/>
+            <a:ext cx="11064240" cy="457200"/>
+          </a:xfrm>
+          <a:prstGeom prst="rect">
+            <a:avLst/>
+          </a:prstGeom>
+          <a:noFill/>
+        </p:spPr>
+        <p:txBody>
+          <a:bodyPr wrap="square" lIns="73152" rIns="73152" tIns="36576" bIns="36576" anchor="t">
+            <a:spAutoFit/>
+          </a:bodyPr>
+          <a:lstStyle/>
+          <a:p>
+            <a:pPr algn="l">
+              <a:lnSpc>
+                <a:spcPct val="110000"/>
+              </a:lnSpc>
+            </a:pPr>
+            <a:r>
+              <a:rPr sz="1700" b="0">
+                <a:solidFill>
+                  <a:srgbClr val="475569"/>
+                </a:solidFill>
+                <a:latin typeface="Arial"/>
+              </a:rPr>
+              <a:t>From human in the loop to human on the loop. Each step is a permission you grant.</a:t>
+            </a:r>
+          </a:p>
+        </p:txBody>
+      </p:sp>
+      <p:sp>
+        <p:nvSpPr>
+          <p:cNvPr id="6" name="Rounded Rectangle 5"/>
+          <p:cNvSpPr/>
+          <p:nvPr/>
+        </p:nvSpPr>
+        <p:spPr>
+          <a:xfrm>
+            <a:off x="548640" y="3429000"/>
+            <a:ext cx="2670048" cy="2194560"/>
+          </a:xfrm>
+          <a:prstGeom prst="roundRect">
+            <a:avLst>
+              <a:gd name="adj" fmla="val 8000"/>
+            </a:avLst>
+          </a:prstGeom>
+          <a:solidFill>
+            <a:srgbClr val="E6F6F4"/>
+          </a:solidFill>
+          <a:ln>
+            <a:noFill/>
+          </a:ln>
+          <a:effectLst/>
+        </p:spPr>
+        <p:style>
+          <a:lnRef idx="1">
+            <a:schemeClr val="accent1"/>
+          </a:lnRef>
+          <a:fillRef idx="3">
+            <a:schemeClr val="accent1"/>
+          </a:fillRef>
+          <a:effectRef idx="2">
+            <a:schemeClr val="accent1"/>
+          </a:effectRef>
+          <a:fontRef idx="minor">
+            <a:schemeClr val="lt1"/>
+          </a:fontRef>
+        </p:style>
+        <p:txBody>
+          <a:bodyPr rtlCol="0" anchor="ctr"/>
+          <a:lstStyle/>
+          <a:p>
+            <a:pPr algn="ctr"/>
+          </a:p>
+        </p:txBody>
+      </p:sp>
+      <p:sp>
+        <p:nvSpPr>
+          <p:cNvPr id="7" name="Rounded Rectangle 6"/>
+          <p:cNvSpPr/>
+          <p:nvPr/>
+        </p:nvSpPr>
+        <p:spPr>
+          <a:xfrm>
+            <a:off x="731520" y="3611880"/>
+            <a:ext cx="384048" cy="384048"/>
+          </a:xfrm>
+          <a:prstGeom prst="roundRect">
+            <a:avLst>
+              <a:gd name="adj" fmla="val 50000"/>
+            </a:avLst>
+          </a:prstGeom>
+          <a:solidFill>
+            <a:srgbClr val="0F766E"/>
+          </a:solidFill>
+          <a:ln>
+            <a:noFill/>
+          </a:ln>
+          <a:effectLst/>
+        </p:spPr>
+        <p:style>
+          <a:lnRef idx="1">
+            <a:schemeClr val="accent1"/>
+          </a:lnRef>
+          <a:fillRef idx="3">
+            <a:schemeClr val="accent1"/>
+          </a:fillRef>
+          <a:effectRef idx="2">
+            <a:schemeClr val="accent1"/>
+          </a:effectRef>
+          <a:fontRef idx="minor">
+            <a:schemeClr val="lt1"/>
+          </a:fontRef>
+        </p:style>
+        <p:txBody>
+          <a:bodyPr rtlCol="0" anchor="ctr" wrap="square" lIns="73152" rIns="73152" tIns="36576" bIns="36576"/>
+          <a:lstStyle/>
+          <a:p>
+            <a:pPr algn="ctr">
+              <a:lnSpc>
+                <a:spcPct val="110000"/>
+              </a:lnSpc>
+            </a:pPr>
+            <a:r>
+              <a:rPr sz="1300" b="1">
+                <a:solidFill>
+                  <a:srgbClr val="FFFFFF"/>
+                </a:solidFill>
+                <a:latin typeface="Arial"/>
+              </a:rPr>
+              <a:t>1</a:t>
+            </a:r>
+          </a:p>
+        </p:txBody>
+      </p:sp>
+      <p:sp>
+        <p:nvSpPr>
+          <p:cNvPr id="8" name="TextBox 7"/>
+          <p:cNvSpPr txBox="1"/>
+          <p:nvPr/>
+        </p:nvSpPr>
+        <p:spPr>
+          <a:xfrm>
+            <a:off x="2103120" y="3648456"/>
+            <a:ext cx="960120" cy="274320"/>
+          </a:xfrm>
+          <a:prstGeom prst="rect">
+            <a:avLst/>
+          </a:prstGeom>
+          <a:noFill/>
+        </p:spPr>
+        <p:txBody>
+          <a:bodyPr wrap="square" lIns="73152" rIns="73152" tIns="36576" bIns="36576" anchor="t">
+            <a:spAutoFit/>
+          </a:bodyPr>
+          <a:lstStyle/>
+          <a:p>
+            <a:pPr algn="r">
+              <a:lnSpc>
+                <a:spcPct val="110000"/>
+              </a:lnSpc>
+            </a:pPr>
+            <a:r>
+              <a:rPr sz="1100" b="1">
+                <a:solidFill>
+                  <a:srgbClr val="0F766E"/>
+                </a:solidFill>
+                <a:latin typeface="Arial"/>
+              </a:rPr>
+              <a:t>TODAY</a:t>
+            </a:r>
+          </a:p>
+        </p:txBody>
+      </p:sp>
+      <p:sp>
+        <p:nvSpPr>
+          <p:cNvPr id="9" name="TextBox 8"/>
+          <p:cNvSpPr txBox="1"/>
+          <p:nvPr/>
+        </p:nvSpPr>
+        <p:spPr>
+          <a:xfrm>
+            <a:off x="731520" y="4114800"/>
+            <a:ext cx="2377440" cy="457200"/>
+          </a:xfrm>
+          <a:prstGeom prst="rect">
+            <a:avLst/>
+          </a:prstGeom>
+          <a:noFill/>
+        </p:spPr>
+        <p:txBody>
+          <a:bodyPr wrap="square" lIns="73152" rIns="73152" tIns="36576" bIns="36576" anchor="t">
+            <a:spAutoFit/>
+          </a:bodyPr>
+          <a:lstStyle/>
+          <a:p>
+            <a:pPr algn="l">
+              <a:lnSpc>
+                <a:spcPct val="100000"/>
+              </a:lnSpc>
+            </a:pPr>
+            <a:r>
+              <a:rPr sz="1700" b="1">
+                <a:solidFill>
+                  <a:srgbClr val="0F172A"/>
+                </a:solidFill>
+                <a:latin typeface="Arial"/>
+              </a:rPr>
+              <a:t>Investigate</a:t>
+            </a:r>
+          </a:p>
+        </p:txBody>
+      </p:sp>
+      <p:sp>
+        <p:nvSpPr>
+          <p:cNvPr id="10" name="TextBox 9"/>
+          <p:cNvSpPr txBox="1"/>
+          <p:nvPr/>
+        </p:nvSpPr>
+        <p:spPr>
+          <a:xfrm>
+            <a:off x="731520" y="4572000"/>
+            <a:ext cx="2331720" cy="868680"/>
+          </a:xfrm>
+          <a:prstGeom prst="rect">
+            <a:avLst/>
+          </a:prstGeom>
+          <a:noFill/>
+        </p:spPr>
+        <p:txBody>
+          <a:bodyPr wrap="square" lIns="73152" rIns="73152" tIns="36576" bIns="36576" anchor="t">
+            <a:spAutoFit/>
+          </a:bodyPr>
+          <a:lstStyle/>
+          <a:p>
+            <a:pPr algn="l">
+              <a:lnSpc>
+                <a:spcPct val="112000"/>
+              </a:lnSpc>
+            </a:pPr>
+            <a:r>
+              <a:rPr sz="1350" b="0">
+                <a:solidFill>
+                  <a:srgbClr val="475569"/>
+                </a:solidFill>
+                <a:latin typeface="Arial"/>
+              </a:rPr>
+              <a:t>Root cause, confidence and evidence, minutes after the alert.</a:t>
+            </a:r>
+          </a:p>
+        </p:txBody>
+      </p:sp>
+      <p:sp>
+        <p:nvSpPr>
+          <p:cNvPr id="11" name="Rounded Rectangle 10"/>
+          <p:cNvSpPr/>
+          <p:nvPr/>
+        </p:nvSpPr>
+        <p:spPr>
+          <a:xfrm>
+            <a:off x="3355848" y="3017520"/>
+            <a:ext cx="2670048" cy="2606040"/>
+          </a:xfrm>
+          <a:prstGeom prst="roundRect">
+            <a:avLst>
+              <a:gd name="adj" fmla="val 8000"/>
+            </a:avLst>
+          </a:prstGeom>
+          <a:solidFill>
+            <a:srgbClr val="E6F6F4"/>
+          </a:solidFill>
+          <a:ln>
+            <a:noFill/>
+          </a:ln>
+          <a:effectLst/>
+        </p:spPr>
+        <p:style>
+          <a:lnRef idx="1">
+            <a:schemeClr val="accent1"/>
+          </a:lnRef>
+          <a:fillRef idx="3">
+            <a:schemeClr val="accent1"/>
+          </a:fillRef>
+          <a:effectRef idx="2">
+            <a:schemeClr val="accent1"/>
+          </a:effectRef>
+          <a:fontRef idx="minor">
+            <a:schemeClr val="lt1"/>
+          </a:fontRef>
+        </p:style>
+        <p:txBody>
+          <a:bodyPr rtlCol="0" anchor="ctr"/>
+          <a:lstStyle/>
+          <a:p>
+            <a:pPr algn="ctr"/>
+          </a:p>
+        </p:txBody>
+      </p:sp>
+      <p:sp>
+        <p:nvSpPr>
+          <p:cNvPr id="12" name="Rounded Rectangle 11"/>
+          <p:cNvSpPr/>
+          <p:nvPr/>
+        </p:nvSpPr>
+        <p:spPr>
+          <a:xfrm>
+            <a:off x="3538728" y="3200400"/>
+            <a:ext cx="384048" cy="384048"/>
+          </a:xfrm>
+          <a:prstGeom prst="roundRect">
+            <a:avLst>
+              <a:gd name="adj" fmla="val 50000"/>
+            </a:avLst>
+          </a:prstGeom>
+          <a:solidFill>
+            <a:srgbClr val="0F766E"/>
+          </a:solidFill>
+          <a:ln>
+            <a:noFill/>
+          </a:ln>
+          <a:effectLst/>
+        </p:spPr>
+        <p:style>
+          <a:lnRef idx="1">
+            <a:schemeClr val="accent1"/>
+          </a:lnRef>
+          <a:fillRef idx="3">
+            <a:schemeClr val="accent1"/>
+          </a:fillRef>
+          <a:effectRef idx="2">
+            <a:schemeClr val="accent1"/>
+          </a:effectRef>
+          <a:fontRef idx="minor">
+            <a:schemeClr val="lt1"/>
+          </a:fontRef>
+        </p:style>
+        <p:txBody>
+          <a:bodyPr rtlCol="0" anchor="ctr" wrap="square" lIns="73152" rIns="73152" tIns="36576" bIns="36576"/>
+          <a:lstStyle/>
+          <a:p>
+            <a:pPr algn="ctr">
+              <a:lnSpc>
+                <a:spcPct val="110000"/>
+              </a:lnSpc>
+            </a:pPr>
+            <a:r>
+              <a:rPr sz="1300" b="1">
+                <a:solidFill>
+                  <a:srgbClr val="FFFFFF"/>
+                </a:solidFill>
+                <a:latin typeface="Arial"/>
+              </a:rPr>
+              <a:t>2</a:t>
+            </a:r>
+          </a:p>
+        </p:txBody>
+      </p:sp>
+      <p:sp>
+        <p:nvSpPr>
+          <p:cNvPr id="13" name="TextBox 12"/>
+          <p:cNvSpPr txBox="1"/>
+          <p:nvPr/>
+        </p:nvSpPr>
+        <p:spPr>
+          <a:xfrm>
+            <a:off x="4910328" y="3236976"/>
+            <a:ext cx="960120" cy="274320"/>
+          </a:xfrm>
+          <a:prstGeom prst="rect">
+            <a:avLst/>
+          </a:prstGeom>
+          <a:noFill/>
+        </p:spPr>
+        <p:txBody>
+          <a:bodyPr wrap="square" lIns="73152" rIns="73152" tIns="36576" bIns="36576" anchor="t">
+            <a:spAutoFit/>
+          </a:bodyPr>
+          <a:lstStyle/>
+          <a:p>
+            <a:pPr algn="r">
+              <a:lnSpc>
+                <a:spcPct val="110000"/>
+              </a:lnSpc>
+            </a:pPr>
+            <a:r>
+              <a:rPr sz="1100" b="1">
+                <a:solidFill>
+                  <a:srgbClr val="0F766E"/>
+                </a:solidFill>
+                <a:latin typeface="Arial"/>
+              </a:rPr>
+              <a:t>TODAY</a:t>
+            </a:r>
+          </a:p>
+        </p:txBody>
+      </p:sp>
+      <p:sp>
+        <p:nvSpPr>
+          <p:cNvPr id="14" name="TextBox 13"/>
+          <p:cNvSpPr txBox="1"/>
+          <p:nvPr/>
+        </p:nvSpPr>
+        <p:spPr>
+          <a:xfrm>
+            <a:off x="3538728" y="3703320"/>
+            <a:ext cx="2377440" cy="457200"/>
+          </a:xfrm>
+          <a:prstGeom prst="rect">
+            <a:avLst/>
+          </a:prstGeom>
+          <a:noFill/>
+        </p:spPr>
+        <p:txBody>
+          <a:bodyPr wrap="square" lIns="73152" rIns="73152" tIns="36576" bIns="36576" anchor="t">
+            <a:spAutoFit/>
+          </a:bodyPr>
+          <a:lstStyle/>
+          <a:p>
+            <a:pPr algn="l">
+              <a:lnSpc>
+                <a:spcPct val="100000"/>
+              </a:lnSpc>
+            </a:pPr>
+            <a:r>
+              <a:rPr sz="1700" b="1">
+                <a:solidFill>
+                  <a:srgbClr val="0F172A"/>
+                </a:solidFill>
+                <a:latin typeface="Arial"/>
+              </a:rPr>
+              <a:t>Propose</a:t>
+            </a:r>
+          </a:p>
+        </p:txBody>
+      </p:sp>
+      <p:sp>
+        <p:nvSpPr>
+          <p:cNvPr id="15" name="TextBox 14"/>
+          <p:cNvSpPr txBox="1"/>
+          <p:nvPr/>
+        </p:nvSpPr>
+        <p:spPr>
+          <a:xfrm>
+            <a:off x="3538728" y="4160520"/>
+            <a:ext cx="2331720" cy="1280160"/>
+          </a:xfrm>
+          <a:prstGeom prst="rect">
+            <a:avLst/>
+          </a:prstGeom>
+          <a:noFill/>
+        </p:spPr>
+        <p:txBody>
+          <a:bodyPr wrap="square" lIns="73152" rIns="73152" tIns="36576" bIns="36576" anchor="t">
+            <a:spAutoFit/>
+          </a:bodyPr>
+          <a:lstStyle/>
+          <a:p>
+            <a:pPr algn="l">
+              <a:lnSpc>
+                <a:spcPct val="112000"/>
+              </a:lnSpc>
+            </a:pPr>
+            <a:r>
+              <a:rPr sz="1350" b="0">
+                <a:solidFill>
+                  <a:srgbClr val="475569"/>
+                </a:solidFill>
+                <a:latin typeface="Arial"/>
+              </a:rPr>
+              <a:t>The fix, with the command, an undo plan and a check that it worked.</a:t>
+            </a:r>
+          </a:p>
+        </p:txBody>
+      </p:sp>
+      <p:sp>
+        <p:nvSpPr>
+          <p:cNvPr id="16" name="Rounded Rectangle 15"/>
+          <p:cNvSpPr/>
+          <p:nvPr/>
+        </p:nvSpPr>
+        <p:spPr>
+          <a:xfrm>
+            <a:off x="6163055" y="2606040"/>
+            <a:ext cx="2670048" cy="3017520"/>
+          </a:xfrm>
+          <a:prstGeom prst="roundRect">
+            <a:avLst>
+              <a:gd name="adj" fmla="val 8000"/>
+            </a:avLst>
+          </a:prstGeom>
+          <a:solidFill>
+            <a:srgbClr val="EEF2FF"/>
+          </a:solidFill>
+          <a:ln>
+            <a:noFill/>
+          </a:ln>
+          <a:effectLst/>
+        </p:spPr>
+        <p:style>
+          <a:lnRef idx="1">
+            <a:schemeClr val="accent1"/>
+          </a:lnRef>
+          <a:fillRef idx="3">
+            <a:schemeClr val="accent1"/>
+          </a:fillRef>
+          <a:effectRef idx="2">
+            <a:schemeClr val="accent1"/>
+          </a:effectRef>
+          <a:fontRef idx="minor">
+            <a:schemeClr val="lt1"/>
+          </a:fontRef>
+        </p:style>
+        <p:txBody>
+          <a:bodyPr rtlCol="0" anchor="ctr"/>
+          <a:lstStyle/>
+          <a:p>
+            <a:pPr algn="ctr"/>
+          </a:p>
+        </p:txBody>
+      </p:sp>
+      <p:sp>
+        <p:nvSpPr>
+          <p:cNvPr id="17" name="Rounded Rectangle 16"/>
+          <p:cNvSpPr/>
+          <p:nvPr/>
+        </p:nvSpPr>
+        <p:spPr>
+          <a:xfrm>
+            <a:off x="6345936" y="2788920"/>
+            <a:ext cx="384048" cy="384048"/>
+          </a:xfrm>
+          <a:prstGeom prst="roundRect">
+            <a:avLst>
+              <a:gd name="adj" fmla="val 50000"/>
+            </a:avLst>
+          </a:prstGeom>
+          <a:solidFill>
+            <a:srgbClr val="4F46E5"/>
+          </a:solidFill>
+          <a:ln>
+            <a:noFill/>
+          </a:ln>
+          <a:effectLst/>
+        </p:spPr>
+        <p:style>
+          <a:lnRef idx="1">
+            <a:schemeClr val="accent1"/>
+          </a:lnRef>
+          <a:fillRef idx="3">
+            <a:schemeClr val="accent1"/>
+          </a:fillRef>
+          <a:effectRef idx="2">
+            <a:schemeClr val="accent1"/>
+          </a:effectRef>
+          <a:fontRef idx="minor">
+            <a:schemeClr val="lt1"/>
+          </a:fontRef>
+        </p:style>
+        <p:txBody>
+          <a:bodyPr rtlCol="0" anchor="ctr" wrap="square" lIns="73152" rIns="73152" tIns="36576" bIns="36576"/>
+          <a:lstStyle/>
+          <a:p>
+            <a:pPr algn="ctr">
+              <a:lnSpc>
+                <a:spcPct val="110000"/>
+              </a:lnSpc>
+            </a:pPr>
+            <a:r>
+              <a:rPr sz="1300" b="1">
+                <a:solidFill>
+                  <a:srgbClr val="FFFFFF"/>
+                </a:solidFill>
+                <a:latin typeface="Arial"/>
+              </a:rPr>
+              <a:t>3</a:t>
+            </a:r>
+          </a:p>
+        </p:txBody>
+      </p:sp>
+      <p:sp>
+        <p:nvSpPr>
+          <p:cNvPr id="18" name="TextBox 17"/>
+          <p:cNvSpPr txBox="1"/>
+          <p:nvPr/>
+        </p:nvSpPr>
+        <p:spPr>
+          <a:xfrm>
+            <a:off x="7717536" y="2825496"/>
+            <a:ext cx="960120" cy="274320"/>
+          </a:xfrm>
+          <a:prstGeom prst="rect">
+            <a:avLst/>
+          </a:prstGeom>
+          <a:noFill/>
+        </p:spPr>
+        <p:txBody>
+          <a:bodyPr wrap="square" lIns="73152" rIns="73152" tIns="36576" bIns="36576" anchor="t">
+            <a:spAutoFit/>
+          </a:bodyPr>
+          <a:lstStyle/>
+          <a:p>
+            <a:pPr algn="r">
+              <a:lnSpc>
+                <a:spcPct val="110000"/>
+              </a:lnSpc>
+            </a:pPr>
+            <a:r>
+              <a:rPr sz="1100" b="1">
+                <a:solidFill>
+                  <a:srgbClr val="4F46E5"/>
+                </a:solidFill>
+                <a:latin typeface="Arial"/>
+              </a:rPr>
+              <a:t>NEXT</a:t>
+            </a:r>
+          </a:p>
+        </p:txBody>
+      </p:sp>
+      <p:sp>
+        <p:nvSpPr>
+          <p:cNvPr id="19" name="TextBox 18"/>
+          <p:cNvSpPr txBox="1"/>
+          <p:nvPr/>
+        </p:nvSpPr>
+        <p:spPr>
+          <a:xfrm>
+            <a:off x="6345936" y="3291840"/>
+            <a:ext cx="2377440" cy="457200"/>
+          </a:xfrm>
+          <a:prstGeom prst="rect">
+            <a:avLst/>
+          </a:prstGeom>
+          <a:noFill/>
+        </p:spPr>
+        <p:txBody>
+          <a:bodyPr wrap="square" lIns="73152" rIns="73152" tIns="36576" bIns="36576" anchor="t">
+            <a:spAutoFit/>
+          </a:bodyPr>
+          <a:lstStyle/>
+          <a:p>
+            <a:pPr algn="l">
+              <a:lnSpc>
+                <a:spcPct val="100000"/>
+              </a:lnSpc>
+            </a:pPr>
+            <a:r>
+              <a:rPr sz="1700" b="1">
+                <a:solidFill>
+                  <a:srgbClr val="0F172A"/>
+                </a:solidFill>
+                <a:latin typeface="Arial"/>
+              </a:rPr>
+              <a:t>Approve to execute</a:t>
+            </a:r>
+          </a:p>
+        </p:txBody>
+      </p:sp>
+      <p:sp>
+        <p:nvSpPr>
+          <p:cNvPr id="20" name="TextBox 19"/>
+          <p:cNvSpPr txBox="1"/>
+          <p:nvPr/>
+        </p:nvSpPr>
+        <p:spPr>
+          <a:xfrm>
+            <a:off x="6345936" y="3749039"/>
+            <a:ext cx="2331720" cy="1691639"/>
+          </a:xfrm>
+          <a:prstGeom prst="rect">
+            <a:avLst/>
+          </a:prstGeom>
+          <a:noFill/>
+        </p:spPr>
+        <p:txBody>
+          <a:bodyPr wrap="square" lIns="73152" rIns="73152" tIns="36576" bIns="36576" anchor="t">
+            <a:spAutoFit/>
+          </a:bodyPr>
+          <a:lstStyle/>
+          <a:p>
+            <a:pPr algn="l">
+              <a:lnSpc>
+                <a:spcPct val="112000"/>
+              </a:lnSpc>
+            </a:pPr>
+            <a:r>
+              <a:rPr sz="1350" b="0">
+                <a:solidFill>
+                  <a:srgbClr val="475569"/>
+                </a:solidFill>
+                <a:latin typeface="Arial"/>
+              </a:rPr>
+              <a:t>A person approves; an agent applies it under its own identity.</a:t>
+            </a:r>
+          </a:p>
+        </p:txBody>
+      </p:sp>
+      <p:sp>
+        <p:nvSpPr>
+          <p:cNvPr id="21" name="Rounded Rectangle 20"/>
+          <p:cNvSpPr/>
+          <p:nvPr/>
+        </p:nvSpPr>
+        <p:spPr>
+          <a:xfrm>
+            <a:off x="8970263" y="2194560"/>
+            <a:ext cx="2670048" cy="3429000"/>
+          </a:xfrm>
+          <a:prstGeom prst="roundRect">
+            <a:avLst>
+              <a:gd name="adj" fmla="val 8000"/>
+            </a:avLst>
+          </a:prstGeom>
+          <a:solidFill>
+            <a:srgbClr val="FFF7E6"/>
+          </a:solidFill>
+          <a:ln>
+            <a:noFill/>
+          </a:ln>
+          <a:effectLst/>
+        </p:spPr>
+        <p:style>
+          <a:lnRef idx="1">
+            <a:schemeClr val="accent1"/>
+          </a:lnRef>
+          <a:fillRef idx="3">
+            <a:schemeClr val="accent1"/>
+          </a:fillRef>
+          <a:effectRef idx="2">
+            <a:schemeClr val="accent1"/>
+          </a:effectRef>
+          <a:fontRef idx="minor">
+            <a:schemeClr val="lt1"/>
+          </a:fontRef>
+        </p:style>
+        <p:txBody>
+          <a:bodyPr rtlCol="0" anchor="ctr"/>
+          <a:lstStyle/>
+          <a:p>
+            <a:pPr algn="ctr"/>
+          </a:p>
+        </p:txBody>
+      </p:sp>
+      <p:sp>
+        <p:nvSpPr>
+          <p:cNvPr id="22" name="Rounded Rectangle 21"/>
+          <p:cNvSpPr/>
+          <p:nvPr/>
+        </p:nvSpPr>
+        <p:spPr>
+          <a:xfrm>
+            <a:off x="9153143" y="2377440"/>
+            <a:ext cx="384048" cy="384048"/>
+          </a:xfrm>
+          <a:prstGeom prst="roundRect">
+            <a:avLst>
+              <a:gd name="adj" fmla="val 50000"/>
+            </a:avLst>
+          </a:prstGeom>
+          <a:solidFill>
+            <a:srgbClr val="B45309"/>
+          </a:solidFill>
+          <a:ln>
+            <a:noFill/>
+          </a:ln>
+          <a:effectLst/>
+        </p:spPr>
+        <p:style>
+          <a:lnRef idx="1">
+            <a:schemeClr val="accent1"/>
+          </a:lnRef>
+          <a:fillRef idx="3">
+            <a:schemeClr val="accent1"/>
+          </a:fillRef>
+          <a:effectRef idx="2">
+            <a:schemeClr val="accent1"/>
+          </a:effectRef>
+          <a:fontRef idx="minor">
+            <a:schemeClr val="lt1"/>
+          </a:fontRef>
+        </p:style>
+        <p:txBody>
+          <a:bodyPr rtlCol="0" anchor="ctr" wrap="square" lIns="73152" rIns="73152" tIns="36576" bIns="36576"/>
+          <a:lstStyle/>
+          <a:p>
+            <a:pPr algn="ctr">
+              <a:lnSpc>
+                <a:spcPct val="110000"/>
+              </a:lnSpc>
+            </a:pPr>
+            <a:r>
+              <a:rPr sz="1300" b="1">
+                <a:solidFill>
+                  <a:srgbClr val="FFFFFF"/>
+                </a:solidFill>
+                <a:latin typeface="Arial"/>
+              </a:rPr>
+              <a:t>4</a:t>
+            </a:r>
+          </a:p>
+        </p:txBody>
+      </p:sp>
+      <p:sp>
+        <p:nvSpPr>
+          <p:cNvPr id="23" name="TextBox 22"/>
+          <p:cNvSpPr txBox="1"/>
+          <p:nvPr/>
+        </p:nvSpPr>
+        <p:spPr>
+          <a:xfrm>
+            <a:off x="10524743" y="2414015"/>
+            <a:ext cx="960120" cy="274320"/>
+          </a:xfrm>
+          <a:prstGeom prst="rect">
+            <a:avLst/>
+          </a:prstGeom>
+          <a:noFill/>
+        </p:spPr>
+        <p:txBody>
+          <a:bodyPr wrap="square" lIns="73152" rIns="73152" tIns="36576" bIns="36576" anchor="t">
+            <a:spAutoFit/>
+          </a:bodyPr>
+          <a:lstStyle/>
+          <a:p>
+            <a:pPr algn="r">
+              <a:lnSpc>
+                <a:spcPct val="110000"/>
+              </a:lnSpc>
+            </a:pPr>
+            <a:r>
+              <a:rPr sz="1100" b="1">
+                <a:solidFill>
+                  <a:srgbClr val="B45309"/>
+                </a:solidFill>
+                <a:latin typeface="Arial"/>
+              </a:rPr>
+              <a:t>LATER</a:t>
+            </a:r>
+          </a:p>
+        </p:txBody>
+      </p:sp>
+      <p:sp>
+        <p:nvSpPr>
+          <p:cNvPr id="24" name="TextBox 23"/>
+          <p:cNvSpPr txBox="1"/>
+          <p:nvPr/>
+        </p:nvSpPr>
+        <p:spPr>
+          <a:xfrm>
+            <a:off x="9153143" y="2880360"/>
+            <a:ext cx="2377440" cy="457200"/>
+          </a:xfrm>
+          <a:prstGeom prst="rect">
+            <a:avLst/>
+          </a:prstGeom>
+          <a:noFill/>
+        </p:spPr>
+        <p:txBody>
+          <a:bodyPr wrap="square" lIns="73152" rIns="73152" tIns="36576" bIns="36576" anchor="t">
+            <a:spAutoFit/>
+          </a:bodyPr>
+          <a:lstStyle/>
+          <a:p>
+            <a:pPr algn="l">
+              <a:lnSpc>
+                <a:spcPct val="100000"/>
+              </a:lnSpc>
+            </a:pPr>
+            <a:r>
+              <a:rPr sz="1700" b="1">
+                <a:solidFill>
+                  <a:srgbClr val="0F172A"/>
+                </a:solidFill>
+                <a:latin typeface="Arial"/>
+              </a:rPr>
+              <a:t>Pre-approved actions</a:t>
+            </a:r>
+          </a:p>
+        </p:txBody>
+      </p:sp>
+      <p:sp>
+        <p:nvSpPr>
+          <p:cNvPr id="25" name="TextBox 24"/>
+          <p:cNvSpPr txBox="1"/>
+          <p:nvPr/>
+        </p:nvSpPr>
+        <p:spPr>
+          <a:xfrm>
+            <a:off x="9153143" y="3337560"/>
+            <a:ext cx="2331720" cy="2103120"/>
+          </a:xfrm>
+          <a:prstGeom prst="rect">
+            <a:avLst/>
+          </a:prstGeom>
+          <a:noFill/>
+        </p:spPr>
+        <p:txBody>
+          <a:bodyPr wrap="square" lIns="73152" rIns="73152" tIns="36576" bIns="36576" anchor="t">
+            <a:spAutoFit/>
+          </a:bodyPr>
+          <a:lstStyle/>
+          <a:p>
+            <a:pPr algn="l">
+              <a:lnSpc>
+                <a:spcPct val="112000"/>
+              </a:lnSpc>
+            </a:pPr>
+            <a:r>
+              <a:rPr sz="1350" b="0">
+                <a:solidFill>
+                  <a:srgbClr val="475569"/>
+                </a:solidFill>
+                <a:latin typeface="Arial"/>
+              </a:rPr>
+              <a:t>Low-risk, reversible fixes run inside guardrails. People review the record.</a:t>
+            </a:r>
+          </a:p>
+        </p:txBody>
+      </p:sp>
+      <p:sp>
+        <p:nvSpPr>
+          <p:cNvPr id="26" name="Rounded Rectangle 25"/>
+          <p:cNvSpPr/>
+          <p:nvPr/>
+        </p:nvSpPr>
+        <p:spPr>
+          <a:xfrm>
+            <a:off x="548640" y="5852160"/>
+            <a:ext cx="11091672" cy="603504"/>
+          </a:xfrm>
+          <a:prstGeom prst="roundRect">
+            <a:avLst>
+              <a:gd name="adj" fmla="val 12000"/>
+            </a:avLst>
+          </a:prstGeom>
+          <a:solidFill>
+            <a:srgbClr val="0B1220"/>
+          </a:solidFill>
+          <a:ln>
+            <a:noFill/>
+          </a:ln>
+          <a:effectLst/>
+        </p:spPr>
+        <p:style>
+          <a:lnRef idx="1">
+            <a:schemeClr val="accent1"/>
+          </a:lnRef>
+          <a:fillRef idx="3">
+            <a:schemeClr val="accent1"/>
+          </a:fillRef>
+          <a:effectRef idx="2">
+            <a:schemeClr val="accent1"/>
+          </a:effectRef>
+          <a:fontRef idx="minor">
+            <a:schemeClr val="lt1"/>
+          </a:fontRef>
+        </p:style>
+        <p:txBody>
+          <a:bodyPr rtlCol="0" anchor="ctr" wrap="square" lIns="292608" rIns="73152" tIns="36576" bIns="36576"/>
+          <a:lstStyle/>
+          <a:p>
+            <a:pPr algn="l">
+              <a:lnSpc>
+                <a:spcPct val="110000"/>
+              </a:lnSpc>
+            </a:pPr>
+            <a:r>
+              <a:rPr sz="1200" b="1">
+                <a:solidFill>
+                  <a:srgbClr val="A5B4FC"/>
+                </a:solidFill>
+                <a:latin typeface="Arial"/>
+              </a:rPr>
+              <a:t>GOAL   </a:t>
+            </a:r>
+            <a:r>
+              <a:rPr sz="1600" b="0">
+                <a:solidFill>
+                  <a:srgbClr val="FFFFFF"/>
+                </a:solidFill>
+                <a:latin typeface="Arial"/>
+              </a:rPr>
+              <a:t>Lower time to resolution, fewer 3 a.m. pages, engineers back on the roadmap.</a:t>
+            </a:r>
+          </a:p>
+        </p:txBody>
+      </p:sp>
+    </p:spTree>
+  </p:cSld>
+  <p:clrMapOvr>
+    <a:masterClrMapping/>
+  </p:clrMapOvr>
+  <p:timing>
+    <p:tnLst>
+      <p:par>
+        <p:cTn id="1" dur="indefinite" restart="never" nodeType="tmRoot">
+          <p:childTnLst>
+            <p:seq concurrent="1" nextAc="seek">
+              <p:cTn id="2" dur="indefinite" nodeType="mainSeq">
+                <p:childTnLst>
+                  <p:par>
+                    <p:cTn id="13" fill="hold">
+                      <p:stCondLst>
+                        <p:cond delay="indefinite"/>
+                      </p:stCondLst>
+                      <p:childTnLst>
+                        <p:par>
+                          <p:cTn id="14" fill="hold">
+                            <p:stCondLst>
+                              <p:cond delay="0"/>
+                            </p:stCondLst>
+                            <p:childTnLst>
+                              <p:par>
+                                <p:cTn id="3" presetID="1" presetClass="entr" presetSubtype="0" fill="hold" nodeType="clickEffect">
+                                  <p:stCondLst>
+                                    <p:cond delay="0"/>
+                                  </p:stCondLst>
+                                  <p:childTnLst>
+                                    <p:set>
+                                      <p:cBhvr>
+                                        <p:cTn id="4" dur="1" fill="hold">
+                                          <p:stCondLst>
+                                            <p:cond delay="0"/>
+                                          </p:stCondLst>
+                                        </p:cTn>
+                                        <p:tgtEl>
+                                          <p:spTgt spid="6"/>
+                                        </p:tgtEl>
+                                        <p:attrNameLst>
+                                          <p:attrName>style.visibility</p:attrName>
+                                        </p:attrNameLst>
+                                      </p:cBhvr>
+                                      <p:to>
+                                        <p:strVal val="visible"/>
+                                      </p:to>
+                                    </p:set>
+                                  </p:childTnLst>
+                                </p:cTn>
+                              </p:par>
+                              <p:par>
+                                <p:cTn id="5" presetID="1" presetClass="entr" presetSubtype="0" fill="hold" nodeType="withEffect">
+                                  <p:stCondLst>
+                                    <p:cond delay="0"/>
+                                  </p:stCondLst>
+                                  <p:childTnLst>
+                                    <p:set>
+                                      <p:cBhvr>
+                                        <p:cTn id="6" dur="1" fill="hold">
+                                          <p:stCondLst>
+                                            <p:cond delay="0"/>
+                                          </p:stCondLst>
+                                        </p:cTn>
+                                        <p:tgtEl>
+                                          <p:spTgt spid="7"/>
+                                        </p:tgtEl>
+                                        <p:attrNameLst>
+                                          <p:attrName>style.visibility</p:attrName>
+                                        </p:attrNameLst>
+                                      </p:cBhvr>
+                                      <p:to>
+                                        <p:strVal val="visible"/>
+                                      </p:to>
+                                    </p:set>
+                                  </p:childTnLst>
+                                </p:cTn>
+                              </p:par>
+                              <p:par>
+                                <p:cTn id="7" presetID="1" presetClass="entr" presetSubtype="0" fill="hold" nodeType="withEffect">
+                                  <p:stCondLst>
+                                    <p:cond delay="0"/>
+                                  </p:stCondLst>
+                                  <p:childTnLst>
+                                    <p:set>
+                                      <p:cBhvr>
+                                        <p:cTn id="8" dur="1" fill="hold">
+                                          <p:stCondLst>
+                                            <p:cond delay="0"/>
+                                          </p:stCondLst>
+                                        </p:cTn>
+                                        <p:tgtEl>
+                                          <p:spTgt spid="8"/>
+                                        </p:tgtEl>
+                                        <p:attrNameLst>
+                                          <p:attrName>style.visibility</p:attrName>
+                                        </p:attrNameLst>
+                                      </p:cBhvr>
+                                      <p:to>
+                                        <p:strVal val="visible"/>
+                                      </p:to>
+                                    </p:set>
+                                  </p:childTnLst>
+                                </p:cTn>
+                              </p:par>
+                              <p:par>
+                                <p:cTn id="9" presetID="1" presetClass="entr" presetSubtype="0" fill="hold" nodeType="withEffect">
+                                  <p:stCondLst>
+                                    <p:cond delay="0"/>
+                                  </p:stCondLst>
+                                  <p:childTnLst>
+                                    <p:set>
+                                      <p:cBhvr>
+                                        <p:cTn id="10" dur="1" fill="hold">
+                                          <p:stCondLst>
+                                            <p:cond delay="0"/>
+                                          </p:stCondLst>
+                                        </p:cTn>
+                                        <p:tgtEl>
+                                          <p:spTgt spid="9"/>
+                                        </p:tgtEl>
+                                        <p:attrNameLst>
+                                          <p:attrName>style.visibility</p:attrName>
+                                        </p:attrNameLst>
+                                      </p:cBhvr>
+                                      <p:to>
+                                        <p:strVal val="visible"/>
+                                      </p:to>
+                                    </p:set>
+                                  </p:childTnLst>
+                                </p:cTn>
+                              </p:par>
+                              <p:par>
+                                <p:cTn id="11" presetID="1" presetClass="entr" presetSubtype="0" fill="hold" nodeType="withEffect">
+                                  <p:stCondLst>
+                                    <p:cond delay="0"/>
+                                  </p:stCondLst>
+                                  <p:childTnLst>
+                                    <p:set>
+                                      <p:cBhvr>
+                                        <p:cTn id="12" dur="1" fill="hold">
+                                          <p:stCondLst>
+                                            <p:cond delay="0"/>
+                                          </p:stCondLst>
+                                        </p:cTn>
+                                        <p:tgtEl>
+                                          <p:spTgt spid="10"/>
+                                        </p:tgtEl>
+                                        <p:attrNameLst>
+                                          <p:attrName>style.visibility</p:attrName>
+                                        </p:attrNameLst>
+                                      </p:cBhvr>
+                                      <p:to>
+                                        <p:strVal val="visible"/>
+                                      </p:to>
+                                    </p:set>
+                                  </p:childTnLst>
+                                </p:cTn>
+                              </p:par>
+                            </p:childTnLst>
+                          </p:cTn>
+                        </p:par>
+                      </p:childTnLst>
+                    </p:cTn>
+                  </p:par>
+                  <p:par>
+                    <p:cTn id="25" fill="hold">
+                      <p:stCondLst>
+                        <p:cond delay="indefinite"/>
+                      </p:stCondLst>
+                      <p:childTnLst>
+                        <p:par>
+                          <p:cTn id="26" fill="hold">
+                            <p:stCondLst>
+                              <p:cond delay="0"/>
+                            </p:stCondLst>
+                            <p:childTnLst>
+                              <p:par>
+                                <p:cTn id="15" presetID="1" presetClass="entr" presetSubtype="0" fill="hold" nodeType="clickEffect">
+                                  <p:stCondLst>
+                                    <p:cond delay="0"/>
+                                  </p:stCondLst>
+                                  <p:childTnLst>
+                                    <p:set>
+                                      <p:cBhvr>
+                                        <p:cTn id="16" dur="1" fill="hold">
+                                          <p:stCondLst>
+                                            <p:cond delay="0"/>
+                                          </p:stCondLst>
+                                        </p:cTn>
+                                        <p:tgtEl>
+                                          <p:spTgt spid="11"/>
+                                        </p:tgtEl>
+                                        <p:attrNameLst>
+                                          <p:attrName>style.visibility</p:attrName>
+                                        </p:attrNameLst>
+                                      </p:cBhvr>
+                                      <p:to>
+                                        <p:strVal val="visible"/>
+                                      </p:to>
+                                    </p:set>
+                                  </p:childTnLst>
+                                </p:cTn>
+                              </p:par>
+                              <p:par>
+                                <p:cTn id="17" presetID="1" presetClass="entr" presetSubtype="0" fill="hold" nodeType="withEffect">
+                                  <p:stCondLst>
+                                    <p:cond delay="0"/>
+                                  </p:stCondLst>
+                                  <p:childTnLst>
+                                    <p:set>
+                                      <p:cBhvr>
+                                        <p:cTn id="18" dur="1" fill="hold">
+                                          <p:stCondLst>
+                                            <p:cond delay="0"/>
+                                          </p:stCondLst>
+                                        </p:cTn>
+                                        <p:tgtEl>
+                                          <p:spTgt spid="12"/>
+                                        </p:tgtEl>
+                                        <p:attrNameLst>
+                                          <p:attrName>style.visibility</p:attrName>
+                                        </p:attrNameLst>
+                                      </p:cBhvr>
+                                      <p:to>
+                                        <p:strVal val="visible"/>
+                                      </p:to>
+                                    </p:set>
+                                  </p:childTnLst>
+                                </p:cTn>
+                              </p:par>
+                              <p:par>
+                                <p:cTn id="19" presetID="1" presetClass="entr" presetSubtype="0" fill="hold" nodeType="withEffect">
+                                  <p:stCondLst>
+                                    <p:cond delay="0"/>
+                                  </p:stCondLst>
+                                  <p:childTnLst>
+                                    <p:set>
+                                      <p:cBhvr>
+                                        <p:cTn id="20" dur="1" fill="hold">
+                                          <p:stCondLst>
+                                            <p:cond delay="0"/>
+                                          </p:stCondLst>
+                                        </p:cTn>
+                                        <p:tgtEl>
+                                          <p:spTgt spid="13"/>
+                                        </p:tgtEl>
+                                        <p:attrNameLst>
+                                          <p:attrName>style.visibility</p:attrName>
+                                        </p:attrNameLst>
+                                      </p:cBhvr>
+                                      <p:to>
+                                        <p:strVal val="visible"/>
+                                      </p:to>
+                                    </p:set>
+                                  </p:childTnLst>
+                                </p:cTn>
+                              </p:par>
+                              <p:par>
+                                <p:cTn id="21" presetID="1" presetClass="entr" presetSubtype="0" fill="hold" nodeType="withEffect">
+                                  <p:stCondLst>
+                                    <p:cond delay="0"/>
+                                  </p:stCondLst>
+                                  <p:childTnLst>
+                                    <p:set>
+                                      <p:cBhvr>
+                                        <p:cTn id="22" dur="1" fill="hold">
+                                          <p:stCondLst>
+                                            <p:cond delay="0"/>
+                                          </p:stCondLst>
+                                        </p:cTn>
+                                        <p:tgtEl>
+                                          <p:spTgt spid="14"/>
+                                        </p:tgtEl>
+                                        <p:attrNameLst>
+                                          <p:attrName>style.visibility</p:attrName>
+                                        </p:attrNameLst>
+                                      </p:cBhvr>
+                                      <p:to>
+                                        <p:strVal val="visible"/>
+                                      </p:to>
+                                    </p:set>
+                                  </p:childTnLst>
+                                </p:cTn>
+                              </p:par>
+                              <p:par>
+                                <p:cTn id="23" presetID="1" presetClass="entr" presetSubtype="0" fill="hold" nodeType="withEffect">
+                                  <p:stCondLst>
+                                    <p:cond delay="0"/>
+                                  </p:stCondLst>
+                                  <p:childTnLst>
+                                    <p:set>
+                                      <p:cBhvr>
+                                        <p:cTn id="24" dur="1" fill="hold">
+                                          <p:stCondLst>
+                                            <p:cond delay="0"/>
+                                          </p:stCondLst>
+                                        </p:cTn>
+                                        <p:tgtEl>
+                                          <p:spTgt spid="15"/>
+                                        </p:tgtEl>
+                                        <p:attrNameLst>
+                                          <p:attrName>style.visibility</p:attrName>
+                                        </p:attrNameLst>
+                                      </p:cBhvr>
+                                      <p:to>
+                                        <p:strVal val="visible"/>
+                                      </p:to>
+                                    </p:set>
+                                  </p:childTnLst>
+                                </p:cTn>
+                              </p:par>
+                            </p:childTnLst>
+                          </p:cTn>
+                        </p:par>
+                      </p:childTnLst>
+                    </p:cTn>
+                  </p:par>
+                  <p:par>
+                    <p:cTn id="37" fill="hold">
+                      <p:stCondLst>
+                        <p:cond delay="indefinite"/>
+                      </p:stCondLst>
+                      <p:childTnLst>
+                        <p:par>
+                          <p:cTn id="38" fill="hold">
+                            <p:stCondLst>
+                              <p:cond delay="0"/>
+                            </p:stCondLst>
+                            <p:childTnLst>
+                              <p:par>
+                                <p:cTn id="27" presetID="1" presetClass="entr" presetSubtype="0" fill="hold" nodeType="clickEffect">
+                                  <p:stCondLst>
+                                    <p:cond delay="0"/>
+                                  </p:stCondLst>
+                                  <p:childTnLst>
+                                    <p:set>
+                                      <p:cBhvr>
+                                        <p:cTn id="28" dur="1" fill="hold">
+                                          <p:stCondLst>
+                                            <p:cond delay="0"/>
+                                          </p:stCondLst>
+                                        </p:cTn>
+                                        <p:tgtEl>
+                                          <p:spTgt spid="16"/>
+                                        </p:tgtEl>
+                                        <p:attrNameLst>
+                                          <p:attrName>style.visibility</p:attrName>
+                                        </p:attrNameLst>
+                                      </p:cBhvr>
+                                      <p:to>
+                                        <p:strVal val="visible"/>
+                                      </p:to>
+                                    </p:set>
+                                  </p:childTnLst>
+                                </p:cTn>
+                              </p:par>
+                              <p:par>
+                                <p:cTn id="29" presetID="1" presetClass="entr" presetSubtype="0" fill="hold" nodeType="withEffect">
+                                  <p:stCondLst>
+                                    <p:cond delay="0"/>
+                                  </p:stCondLst>
+                                  <p:childTnLst>
+                                    <p:set>
+                                      <p:cBhvr>
+                                        <p:cTn id="30" dur="1" fill="hold">
+                                          <p:stCondLst>
+                                            <p:cond delay="0"/>
+                                          </p:stCondLst>
+                                        </p:cTn>
+                                        <p:tgtEl>
+                                          <p:spTgt spid="17"/>
+                                        </p:tgtEl>
+                                        <p:attrNameLst>
+                                          <p:attrName>style.visibility</p:attrName>
+                                        </p:attrNameLst>
+                                      </p:cBhvr>
+                                      <p:to>
+                                        <p:strVal val="visible"/>
+                                      </p:to>
+                                    </p:set>
+                                  </p:childTnLst>
+                                </p:cTn>
+                              </p:par>
+                              <p:par>
+                                <p:cTn id="31" presetID="1" presetClass="entr" presetSubtype="0" fill="hold" nodeType="withEffect">
+                                  <p:stCondLst>
+                                    <p:cond delay="0"/>
+                                  </p:stCondLst>
+                                  <p:childTnLst>
+                                    <p:set>
+                                      <p:cBhvr>
+                                        <p:cTn id="32" dur="1" fill="hold">
+                                          <p:stCondLst>
+                                            <p:cond delay="0"/>
+                                          </p:stCondLst>
+                                        </p:cTn>
+                                        <p:tgtEl>
+                                          <p:spTgt spid="18"/>
+                                        </p:tgtEl>
+                                        <p:attrNameLst>
+                                          <p:attrName>style.visibility</p:attrName>
+                                        </p:attrNameLst>
+                                      </p:cBhvr>
+                                      <p:to>
+                                        <p:strVal val="visible"/>
+                                      </p:to>
+                                    </p:set>
+                                  </p:childTnLst>
+                                </p:cTn>
+                              </p:par>
+                              <p:par>
+                                <p:cTn id="33" presetID="1" presetClass="entr" presetSubtype="0" fill="hold" nodeType="withEffect">
+                                  <p:stCondLst>
+                                    <p:cond delay="0"/>
+                                  </p:stCondLst>
+                                  <p:childTnLst>
+                                    <p:set>
+                                      <p:cBhvr>
+                                        <p:cTn id="34" dur="1" fill="hold">
+                                          <p:stCondLst>
+                                            <p:cond delay="0"/>
+                                          </p:stCondLst>
+                                        </p:cTn>
+                                        <p:tgtEl>
+                                          <p:spTgt spid="19"/>
+                                        </p:tgtEl>
+                                        <p:attrNameLst>
+                                          <p:attrName>style.visibility</p:attrName>
+                                        </p:attrNameLst>
+                                      </p:cBhvr>
+                                      <p:to>
+                                        <p:strVal val="visible"/>
+                                      </p:to>
+                                    </p:set>
+                                  </p:childTnLst>
+                                </p:cTn>
+                              </p:par>
+                              <p:par>
+                                <p:cTn id="35" presetID="1" presetClass="entr" presetSubtype="0" fill="hold" nodeType="withEffect">
+                                  <p:stCondLst>
+                                    <p:cond delay="0"/>
+                                  </p:stCondLst>
+                                  <p:childTnLst>
+                                    <p:set>
+                                      <p:cBhvr>
+                                        <p:cTn id="36" dur="1" fill="hold">
+                                          <p:stCondLst>
+                                            <p:cond delay="0"/>
+                                          </p:stCondLst>
+                                        </p:cTn>
+                                        <p:tgtEl>
+                                          <p:spTgt spid="20"/>
+                                        </p:tgtEl>
+                                        <p:attrNameLst>
+                                          <p:attrName>style.visibility</p:attrName>
+                                        </p:attrNameLst>
+                                      </p:cBhvr>
+                                      <p:to>
+                                        <p:strVal val="visible"/>
+                                      </p:to>
+                                    </p:set>
+                                  </p:childTnLst>
+                                </p:cTn>
+                              </p:par>
+                            </p:childTnLst>
+                          </p:cTn>
+                        </p:par>
+                      </p:childTnLst>
+                    </p:cTn>
+                  </p:par>
+                  <p:par>
+                    <p:cTn id="49" fill="hold">
+                      <p:stCondLst>
+                        <p:cond delay="indefinite"/>
+                      </p:stCondLst>
+                      <p:childTnLst>
+                        <p:par>
+                          <p:cTn id="50" fill="hold">
+                            <p:stCondLst>
+                              <p:cond delay="0"/>
+                            </p:stCondLst>
+                            <p:childTnLst>
+                              <p:par>
+                                <p:cTn id="39" presetID="1" presetClass="entr" presetSubtype="0" fill="hold" nodeType="clickEffect">
+                                  <p:stCondLst>
+                                    <p:cond delay="0"/>
+                                  </p:stCondLst>
+                                  <p:childTnLst>
+                                    <p:set>
+                                      <p:cBhvr>
+                                        <p:cTn id="40" dur="1" fill="hold">
+                                          <p:stCondLst>
+                                            <p:cond delay="0"/>
+                                          </p:stCondLst>
+                                        </p:cTn>
+                                        <p:tgtEl>
+                                          <p:spTgt spid="21"/>
+                                        </p:tgtEl>
+                                        <p:attrNameLst>
+                                          <p:attrName>style.visibility</p:attrName>
+                                        </p:attrNameLst>
+                                      </p:cBhvr>
+                                      <p:to>
+                                        <p:strVal val="visible"/>
+                                      </p:to>
+                                    </p:set>
+                                  </p:childTnLst>
+                                </p:cTn>
+                              </p:par>
+                              <p:par>
+                                <p:cTn id="41" presetID="1" presetClass="entr" presetSubtype="0" fill="hold" nodeType="withEffect">
+                                  <p:stCondLst>
+                                    <p:cond delay="0"/>
+                                  </p:stCondLst>
+                                  <p:childTnLst>
+                                    <p:set>
+                                      <p:cBhvr>
+                                        <p:cTn id="42" dur="1" fill="hold">
+                                          <p:stCondLst>
+                                            <p:cond delay="0"/>
+                                          </p:stCondLst>
+                                        </p:cTn>
+                                        <p:tgtEl>
+                                          <p:spTgt spid="22"/>
+                                        </p:tgtEl>
+                                        <p:attrNameLst>
+                                          <p:attrName>style.visibility</p:attrName>
+                                        </p:attrNameLst>
+                                      </p:cBhvr>
+                                      <p:to>
+                                        <p:strVal val="visible"/>
+                                      </p:to>
+                                    </p:set>
+                                  </p:childTnLst>
+                                </p:cTn>
+                              </p:par>
+                              <p:par>
+                                <p:cTn id="43" presetID="1" presetClass="entr" presetSubtype="0" fill="hold" nodeType="withEffect">
+                                  <p:stCondLst>
+                                    <p:cond delay="0"/>
+                                  </p:stCondLst>
+                                  <p:childTnLst>
+                                    <p:set>
+                                      <p:cBhvr>
+                                        <p:cTn id="44" dur="1" fill="hold">
+                                          <p:stCondLst>
+                                            <p:cond delay="0"/>
+                                          </p:stCondLst>
+                                        </p:cTn>
+                                        <p:tgtEl>
+                                          <p:spTgt spid="23"/>
+                                        </p:tgtEl>
+                                        <p:attrNameLst>
+                                          <p:attrName>style.visibility</p:attrName>
+                                        </p:attrNameLst>
+                                      </p:cBhvr>
+                                      <p:to>
+                                        <p:strVal val="visible"/>
+                                      </p:to>
+                                    </p:set>
+                                  </p:childTnLst>
+                                </p:cTn>
+                              </p:par>
+                              <p:par>
+                                <p:cTn id="45" presetID="1" presetClass="entr" presetSubtype="0" fill="hold" nodeType="withEffect">
+                                  <p:stCondLst>
+                                    <p:cond delay="0"/>
+                                  </p:stCondLst>
+                                  <p:childTnLst>
+                                    <p:set>
+                                      <p:cBhvr>
+                                        <p:cTn id="46" dur="1" fill="hold">
+                                          <p:stCondLst>
+                                            <p:cond delay="0"/>
+                                          </p:stCondLst>
+                                        </p:cTn>
+                                        <p:tgtEl>
+                                          <p:spTgt spid="24"/>
+                                        </p:tgtEl>
+                                        <p:attrNameLst>
+                                          <p:attrName>style.visibility</p:attrName>
+                                        </p:attrNameLst>
+                                      </p:cBhvr>
+                                      <p:to>
+                                        <p:strVal val="visible"/>
+                                      </p:to>
+                                    </p:set>
+                                  </p:childTnLst>
+                                </p:cTn>
+                              </p:par>
+                              <p:par>
+                                <p:cTn id="47" presetID="1" presetClass="entr" presetSubtype="0" fill="hold" nodeType="withEffect">
+                                  <p:stCondLst>
+                                    <p:cond delay="0"/>
+                                  </p:stCondLst>
+                                  <p:childTnLst>
+                                    <p:set>
+                                      <p:cBhvr>
+                                        <p:cTn id="48" dur="1" fill="hold">
+                                          <p:stCondLst>
+                                            <p:cond delay="0"/>
+                                          </p:stCondLst>
+                                        </p:cTn>
+                                        <p:tgtEl>
+                                          <p:spTgt spid="25"/>
+                                        </p:tgtEl>
+                                        <p:attrNameLst>
+                                          <p:attrName>style.visibility</p:attrName>
+                                        </p:attrNameLst>
+                                      </p:cBhvr>
+                                      <p:to>
+                                        <p:strVal val="visible"/>
+                                      </p:to>
+                                    </p:set>
+                                  </p:childTnLst>
+                                </p:cTn>
+                              </p:par>
+                            </p:childTnLst>
+                          </p:cTn>
+                        </p:par>
+                      </p:childTnLst>
+                    </p:cTn>
+                  </p:par>
+                  <p:par>
+                    <p:cTn id="53" fill="hold">
+                      <p:stCondLst>
+                        <p:cond delay="indefinite"/>
+                      </p:stCondLst>
+                      <p:childTnLst>
+                        <p:par>
+                          <p:cTn id="54" fill="hold">
+                            <p:stCondLst>
+                              <p:cond delay="0"/>
+                            </p:stCondLst>
+                            <p:childTnLst>
+                              <p:par>
+                                <p:cTn id="51" presetID="1" presetClass="entr" presetSubtype="0" fill="hold" nodeType="clickEffect">
+                                  <p:stCondLst>
+                                    <p:cond delay="0"/>
+                                  </p:stCondLst>
+                                  <p:childTnLst>
+                                    <p:set>
+                                      <p:cBhvr>
+                                        <p:cTn id="52" dur="1" fill="hold">
+                                          <p:stCondLst>
+                                            <p:cond delay="0"/>
+                                          </p:stCondLst>
+                                        </p:cTn>
+                                        <p:tgtEl>
+                                          <p:spTgt spid="26"/>
+                                        </p:tgtEl>
+                                        <p:attrNameLst>
+                                          <p:attrName>style.visibility</p:attrName>
+                                        </p:attrNameLst>
+                                      </p:cBhvr>
+                                      <p:to>
+                                        <p:strVal val="visible"/>
+                                      </p:to>
+                                    </p:set>
+                                  </p:childTnLst>
+                                </p:cTn>
+                              </p:par>
+                            </p:childTnLst>
+                          </p:cTn>
+                        </p:par>
+                      </p:childTnLst>
+                    </p:cTn>
+                  </p:par>
+                </p:childTnLst>
+              </p:cTn>
+              <p:prevCondLst>
+                <p:cond evt="onPrev" delay="0">
+                  <p:tgtEl>
+                    <p:sldTgt/>
+                  </p:tgtEl>
+                </p:cond>
+              </p:prevCondLst>
+              <p:nextCondLst>
+                <p:cond evt="onNext" delay="0">
+                  <p:tgtEl>
+                    <p:sldTgt/>
+                  </p:tgtEl>
+                </p:cond>
+              </p:nextCondLst>
+            </p:seq>
+          </p:childTnLst>
+        </p:cTn>
+      </p:par>
+    </p:tnLst>
+    <p:bldLst>
+      <p:bldP spid="6" grpId="0" animBg="1"/>
+      <p:bldP spid="7" grpId="0" animBg="1"/>
+      <p:bldP spid="8" grpId="0" animBg="1"/>
+      <p:bldP spid="9" grpId="0" animBg="1"/>
+      <p:bldP spid="10" grpId="0" animBg="1"/>
+      <p:bldP spid="11" grpId="0" animBg="1"/>
+      <p:bldP spid="12" grpId="0" animBg="1"/>
+      <p:bldP spid="13" grpId="0" animBg="1"/>
+      <p:bldP spid="14" grpId="0" animBg="1"/>
+      <p:bldP spid="15" grpId="0" animBg="1"/>
+      <p:bldP spid="16" grpId="0" animBg="1"/>
+      <p:bldP spid="17" grpId="0" animBg="1"/>
+      <p:bldP spid="18" grpId="0" animBg="1"/>
+      <p:bldP spid="19" grpId="0" animBg="1"/>
+      <p:bldP spid="20" grpId="0" animBg="1"/>
+      <p:bldP spid="21" grpId="0" animBg="1"/>
+      <p:bldP spid="22" grpId="0" animBg="1"/>
+      <p:bldP spid="23" grpId="0" animBg="1"/>
+      <p:bldP spid="24" grpId="0" animBg="1"/>
+      <p:bldP spid="25" grpId="0" animBg="1"/>
+      <p:bldP spid="26" grpId="0" animBg="1"/>
+    </p:bldLst>
+  </p:timing>
+</p:sld>
+</file>
+
+<file path=ppt/slides/slide12.xml><?xml version="1.0" encoding="utf-8"?>
+<p:sld xmlns:a="http://schemas.openxmlformats.org/drawingml/2006/main" xmlns:p="http://schemas.openxmlformats.org/presentationml/2006/main" xmlns:r="http://schemas.openxmlformats.org/officeDocument/2006/relationships">
+  <p:cSld>
+    <p:bg>
+      <p:bgPr>
+        <a:solidFill>
+          <a:srgbClr val="F8FAFC"/>
+        </a:solidFill>
+        <a:effectLst/>
+      </p:bgPr>
+    </p:bg>
+    <p:spTree>
+      <p:nvGrpSpPr>
+        <p:cNvPr id="1" name=""/>
+        <p:cNvGrpSpPr/>
+        <p:nvPr/>
+      </p:nvGrpSpPr>
+      <p:grpSpPr/>
+      <p:sp>
+        <p:nvSpPr>
+          <p:cNvPr id="2" name="TextBox 1"/>
+          <p:cNvSpPr txBox="1"/>
+          <p:nvPr/>
+        </p:nvSpPr>
+        <p:spPr>
+          <a:xfrm>
+            <a:off x="548640" y="320040"/>
+            <a:ext cx="7315200" cy="274320"/>
+          </a:xfrm>
+          <a:prstGeom prst="rect">
+            <a:avLst/>
+          </a:prstGeom>
+          <a:noFill/>
+        </p:spPr>
+        <p:txBody>
+          <a:bodyPr wrap="square" lIns="73152" rIns="73152" tIns="36576" bIns="36576" anchor="t">
+            <a:spAutoFit/>
+          </a:bodyPr>
+          <a:lstStyle/>
+          <a:p>
+            <a:pPr algn="l">
+              <a:lnSpc>
+                <a:spcPct val="110000"/>
+              </a:lnSpc>
+            </a:pPr>
+            <a:r>
+              <a:rPr sz="1000" b="1">
+                <a:solidFill>
+                  <a:srgbClr val="4F46E5"/>
+                </a:solidFill>
+                <a:latin typeface="Arial"/>
+              </a:rPr>
+              <a:t>KAOP  ·  PLATFORM ENGINEERING</a:t>
+            </a:r>
+          </a:p>
+        </p:txBody>
+      </p:sp>
+      <p:sp>
+        <p:nvSpPr>
+          <p:cNvPr id="3" name="TextBox 2"/>
+          <p:cNvSpPr txBox="1"/>
+          <p:nvPr/>
+        </p:nvSpPr>
+        <p:spPr>
+          <a:xfrm>
+            <a:off x="9784080" y="320040"/>
+            <a:ext cx="1828800" cy="274320"/>
+          </a:xfrm>
+          <a:prstGeom prst="rect">
+            <a:avLst/>
+          </a:prstGeom>
+          <a:noFill/>
+        </p:spPr>
+        <p:txBody>
+          <a:bodyPr wrap="square" lIns="73152" rIns="73152" tIns="36576" bIns="36576" anchor="t">
+            <a:spAutoFit/>
+          </a:bodyPr>
+          <a:lstStyle/>
+          <a:p>
+            <a:pPr algn="r">
+              <a:lnSpc>
+                <a:spcPct val="110000"/>
+              </a:lnSpc>
+            </a:pPr>
+            <a:r>
+              <a:rPr sz="1000" b="0">
+                <a:solidFill>
+                  <a:srgbClr val="94A3B8"/>
+                </a:solidFill>
+                <a:latin typeface="Arial"/>
+              </a:rPr>
+              <a:t>12 / 13</a:t>
             </a:r>
           </a:p>
         </p:txBody>
@@ -7594,7 +9443,7 @@
                 </a:solidFill>
                 <a:latin typeface="Arial"/>
               </a:rPr>
-              <a:t>More workflows and teams, once the results hold.</a:t>
+              <a:t>More workflows, teams and autonomy, once the results hold.</a:t>
             </a:r>
           </a:p>
         </p:txBody>
@@ -8767,7 +10616,7 @@
 </p:sld>
 </file>
 
-<file path=ppt/slides/slide12.xml><?xml version="1.0" encoding="utf-8"?>
+<file path=ppt/slides/slide13.xml><?xml version="1.0" encoding="utf-8"?>
 <p:sld xmlns:a="http://schemas.openxmlformats.org/drawingml/2006/main" xmlns:p="http://schemas.openxmlformats.org/presentationml/2006/main" xmlns:r="http://schemas.openxmlformats.org/officeDocument/2006/relationships">
   <p:cSld>
     <p:bg>
@@ -9191,7 +11040,7 @@
                 </a:solidFill>
                 <a:latin typeface="Arial"/>
               </a:rPr>
-              <a:t>Start with one workflow and one owner, and agree how you'll measure success.</a:t>
+              <a:t>Autonomy is earned. Start with one workflow and one owner.</a:t>
             </a:r>
           </a:p>
         </p:txBody>
@@ -9834,7 +11683,7 @@
 </p:sld>
 </file>
 
-<file path=ppt/slides/slide13.xml><?xml version="1.0" encoding="utf-8"?>
+<file path=ppt/slides/slide14.xml><?xml version="1.0" encoding="utf-8"?>
 <p:sld xmlns:a="http://schemas.openxmlformats.org/drawingml/2006/main" xmlns:p="http://schemas.openxmlformats.org/presentationml/2006/main" xmlns:r="http://schemas.openxmlformats.org/officeDocument/2006/relationships">
   <p:cSld>
     <p:bg>
@@ -10082,886 +11931,6 @@
                 <a:latin typeface="Arial"/>
               </a:rPr>
               <a:t>C   Measured results</a:t>
-            </a:r>
-          </a:p>
-        </p:txBody>
-      </p:sp>
-    </p:spTree>
-  </p:cSld>
-  <p:clrMapOvr>
-    <a:masterClrMapping/>
-  </p:clrMapOvr>
-</p:sld>
-</file>
-
-<file path=ppt/slides/slide14.xml><?xml version="1.0" encoding="utf-8"?>
-<p:sld xmlns:a="http://schemas.openxmlformats.org/drawingml/2006/main" xmlns:p="http://schemas.openxmlformats.org/presentationml/2006/main" xmlns:r="http://schemas.openxmlformats.org/officeDocument/2006/relationships">
-  <p:cSld>
-    <p:bg>
-      <p:bgPr>
-        <a:solidFill>
-          <a:srgbClr val="F8FAFC"/>
-        </a:solidFill>
-        <a:effectLst/>
-      </p:bgPr>
-    </p:bg>
-    <p:spTree>
-      <p:nvGrpSpPr>
-        <p:cNvPr id="1" name=""/>
-        <p:cNvGrpSpPr/>
-        <p:nvPr/>
-      </p:nvGrpSpPr>
-      <p:grpSpPr/>
-      <p:sp>
-        <p:nvSpPr>
-          <p:cNvPr id="2" name="TextBox 1"/>
-          <p:cNvSpPr txBox="1"/>
-          <p:nvPr/>
-        </p:nvSpPr>
-        <p:spPr>
-          <a:xfrm>
-            <a:off x="548640" y="320040"/>
-            <a:ext cx="7315200" cy="274320"/>
-          </a:xfrm>
-          <a:prstGeom prst="rect">
-            <a:avLst/>
-          </a:prstGeom>
-          <a:noFill/>
-        </p:spPr>
-        <p:txBody>
-          <a:bodyPr wrap="square" lIns="73152" rIns="73152" tIns="36576" bIns="36576" anchor="t">
-            <a:spAutoFit/>
-          </a:bodyPr>
-          <a:lstStyle/>
-          <a:p>
-            <a:pPr algn="l">
-              <a:lnSpc>
-                <a:spcPct val="110000"/>
-              </a:lnSpc>
-            </a:pPr>
-            <a:r>
-              <a:rPr sz="1000" b="1">
-                <a:solidFill>
-                  <a:srgbClr val="4F46E5"/>
-                </a:solidFill>
-                <a:latin typeface="Arial"/>
-              </a:rPr>
-              <a:t>APPENDIX</a:t>
-            </a:r>
-          </a:p>
-        </p:txBody>
-      </p:sp>
-      <p:sp>
-        <p:nvSpPr>
-          <p:cNvPr id="3" name="TextBox 2"/>
-          <p:cNvSpPr txBox="1"/>
-          <p:nvPr/>
-        </p:nvSpPr>
-        <p:spPr>
-          <a:xfrm>
-            <a:off x="9784080" y="320040"/>
-            <a:ext cx="1828800" cy="274320"/>
-          </a:xfrm>
-          <a:prstGeom prst="rect">
-            <a:avLst/>
-          </a:prstGeom>
-          <a:noFill/>
-        </p:spPr>
-        <p:txBody>
-          <a:bodyPr wrap="square" lIns="73152" rIns="73152" tIns="36576" bIns="36576" anchor="t">
-            <a:spAutoFit/>
-          </a:bodyPr>
-          <a:lstStyle/>
-          <a:p>
-            <a:pPr algn="r">
-              <a:lnSpc>
-                <a:spcPct val="110000"/>
-              </a:lnSpc>
-            </a:pPr>
-            <a:r>
-              <a:rPr sz="1000" b="0">
-                <a:solidFill>
-                  <a:srgbClr val="94A3B8"/>
-                </a:solidFill>
-                <a:latin typeface="Arial"/>
-              </a:rPr>
-              <a:t>APPENDIX A</a:t>
-            </a:r>
-          </a:p>
-        </p:txBody>
-      </p:sp>
-      <p:sp>
-        <p:nvSpPr>
-          <p:cNvPr id="4" name="TextBox 3"/>
-          <p:cNvSpPr txBox="1"/>
-          <p:nvPr/>
-        </p:nvSpPr>
-        <p:spPr>
-          <a:xfrm>
-            <a:off x="548640" y="658368"/>
-            <a:ext cx="11064240" cy="731520"/>
-          </a:xfrm>
-          <a:prstGeom prst="rect">
-            <a:avLst/>
-          </a:prstGeom>
-          <a:noFill/>
-        </p:spPr>
-        <p:txBody>
-          <a:bodyPr wrap="square" lIns="73152" rIns="73152" tIns="36576" bIns="36576" anchor="t">
-            <a:spAutoFit/>
-          </a:bodyPr>
-          <a:lstStyle/>
-          <a:p>
-            <a:pPr algn="l">
-              <a:lnSpc>
-                <a:spcPct val="110000"/>
-              </a:lnSpc>
-            </a:pPr>
-            <a:r>
-              <a:rPr sz="3200" b="1">
-                <a:solidFill>
-                  <a:srgbClr val="0F172A"/>
-                </a:solidFill>
-                <a:latin typeface="Arial"/>
-              </a:rPr>
-              <a:t>Sources for this presentation</a:t>
-            </a:r>
-          </a:p>
-        </p:txBody>
-      </p:sp>
-      <p:sp>
-        <p:nvSpPr>
-          <p:cNvPr id="5" name="TextBox 4"/>
-          <p:cNvSpPr txBox="1"/>
-          <p:nvPr/>
-        </p:nvSpPr>
-        <p:spPr>
-          <a:xfrm>
-            <a:off x="548640" y="1371600"/>
-            <a:ext cx="11064240" cy="457200"/>
-          </a:xfrm>
-          <a:prstGeom prst="rect">
-            <a:avLst/>
-          </a:prstGeom>
-          <a:noFill/>
-        </p:spPr>
-        <p:txBody>
-          <a:bodyPr wrap="square" lIns="73152" rIns="73152" tIns="36576" bIns="36576" anchor="t">
-            <a:spAutoFit/>
-          </a:bodyPr>
-          <a:lstStyle/>
-          <a:p>
-            <a:pPr algn="l">
-              <a:lnSpc>
-                <a:spcPct val="110000"/>
-              </a:lnSpc>
-            </a:pPr>
-            <a:r>
-              <a:rPr sz="1700" b="0">
-                <a:solidFill>
-                  <a:srgbClr val="475569"/>
-                </a:solidFill>
-                <a:latin typeface="Arial"/>
-              </a:rPr>
-              <a:t>Every claim traces to Komodor's material or to this lab.</a:t>
-            </a:r>
-          </a:p>
-        </p:txBody>
-      </p:sp>
-      <p:sp>
-        <p:nvSpPr>
-          <p:cNvPr id="6" name="Rounded Rectangle 5"/>
-          <p:cNvSpPr/>
-          <p:nvPr/>
-        </p:nvSpPr>
-        <p:spPr>
-          <a:xfrm>
-            <a:off x="548640" y="2011680"/>
-            <a:ext cx="11091672" cy="621792"/>
-          </a:xfrm>
-          <a:prstGeom prst="roundRect">
-            <a:avLst>
-              <a:gd name="adj" fmla="val 6000"/>
-            </a:avLst>
-          </a:prstGeom>
-          <a:solidFill>
-            <a:srgbClr val="FFFFFF"/>
-          </a:solidFill>
-          <a:ln w="12700">
-            <a:solidFill>
-              <a:srgbClr val="E2E8F0"/>
-            </a:solidFill>
-          </a:ln>
-          <a:effectLst/>
-        </p:spPr>
-        <p:style>
-          <a:lnRef idx="1">
-            <a:schemeClr val="accent1"/>
-          </a:lnRef>
-          <a:fillRef idx="3">
-            <a:schemeClr val="accent1"/>
-          </a:fillRef>
-          <a:effectRef idx="2">
-            <a:schemeClr val="accent1"/>
-          </a:effectRef>
-          <a:fontRef idx="minor">
-            <a:schemeClr val="lt1"/>
-          </a:fontRef>
-        </p:style>
-        <p:txBody>
-          <a:bodyPr rtlCol="0" anchor="ctr"/>
-          <a:lstStyle/>
-          <a:p>
-            <a:pPr algn="ctr"/>
-          </a:p>
-        </p:txBody>
-      </p:sp>
-      <p:sp>
-        <p:nvSpPr>
-          <p:cNvPr id="7" name="TextBox 6"/>
-          <p:cNvSpPr txBox="1"/>
-          <p:nvPr/>
-        </p:nvSpPr>
-        <p:spPr>
-          <a:xfrm>
-            <a:off x="777240" y="2057400"/>
-            <a:ext cx="3931920" cy="530352"/>
-          </a:xfrm>
-          <a:prstGeom prst="rect">
-            <a:avLst/>
-          </a:prstGeom>
-          <a:noFill/>
-        </p:spPr>
-        <p:txBody>
-          <a:bodyPr wrap="square" lIns="73152" rIns="73152" tIns="36576" bIns="36576" anchor="ctr">
-            <a:spAutoFit/>
-          </a:bodyPr>
-          <a:lstStyle/>
-          <a:p>
-            <a:pPr algn="l">
-              <a:lnSpc>
-                <a:spcPct val="110000"/>
-              </a:lnSpc>
-            </a:pPr>
-            <a:r>
-              <a:rPr sz="1500" b="1">
-                <a:solidFill>
-                  <a:srgbClr val="0F172A"/>
-                </a:solidFill>
-                <a:latin typeface="Arial"/>
-              </a:rPr>
-              <a:t>Komodor website and KAOP launch</a:t>
-            </a:r>
-          </a:p>
-        </p:txBody>
-      </p:sp>
-      <p:sp>
-        <p:nvSpPr>
-          <p:cNvPr id="8" name="TextBox 7"/>
-          <p:cNvSpPr txBox="1"/>
-          <p:nvPr/>
-        </p:nvSpPr>
-        <p:spPr>
-          <a:xfrm>
-            <a:off x="4754880" y="2057400"/>
-            <a:ext cx="6766560" cy="530352"/>
-          </a:xfrm>
-          <a:prstGeom prst="rect">
-            <a:avLst/>
-          </a:prstGeom>
-          <a:noFill/>
-        </p:spPr>
-        <p:txBody>
-          <a:bodyPr wrap="square" lIns="73152" rIns="73152" tIns="36576" bIns="36576" anchor="ctr">
-            <a:spAutoFit/>
-          </a:bodyPr>
-          <a:lstStyle/>
-          <a:p>
-            <a:pPr algn="l">
-              <a:lnSpc>
-                <a:spcPct val="110000"/>
-              </a:lnSpc>
-            </a:pPr>
-            <a:r>
-              <a:rPr sz="1500" b="0">
-                <a:solidFill>
-                  <a:srgbClr val="475569"/>
-                </a:solidFill>
-                <a:latin typeface="Arial"/>
-              </a:rPr>
-              <a:t>Positioning: build, run, govern, optimize. The Gartner figure.</a:t>
-            </a:r>
-          </a:p>
-        </p:txBody>
-      </p:sp>
-      <p:sp>
-        <p:nvSpPr>
-          <p:cNvPr id="9" name="Rounded Rectangle 8"/>
-          <p:cNvSpPr/>
-          <p:nvPr/>
-        </p:nvSpPr>
-        <p:spPr>
-          <a:xfrm>
-            <a:off x="548640" y="2724912"/>
-            <a:ext cx="11091672" cy="621792"/>
-          </a:xfrm>
-          <a:prstGeom prst="roundRect">
-            <a:avLst>
-              <a:gd name="adj" fmla="val 6000"/>
-            </a:avLst>
-          </a:prstGeom>
-          <a:solidFill>
-            <a:srgbClr val="FFFFFF"/>
-          </a:solidFill>
-          <a:ln w="12700">
-            <a:solidFill>
-              <a:srgbClr val="E2E8F0"/>
-            </a:solidFill>
-          </a:ln>
-          <a:effectLst/>
-        </p:spPr>
-        <p:style>
-          <a:lnRef idx="1">
-            <a:schemeClr val="accent1"/>
-          </a:lnRef>
-          <a:fillRef idx="3">
-            <a:schemeClr val="accent1"/>
-          </a:fillRef>
-          <a:effectRef idx="2">
-            <a:schemeClr val="accent1"/>
-          </a:effectRef>
-          <a:fontRef idx="minor">
-            <a:schemeClr val="lt1"/>
-          </a:fontRef>
-        </p:style>
-        <p:txBody>
-          <a:bodyPr rtlCol="0" anchor="ctr"/>
-          <a:lstStyle/>
-          <a:p>
-            <a:pPr algn="ctr"/>
-          </a:p>
-        </p:txBody>
-      </p:sp>
-      <p:sp>
-        <p:nvSpPr>
-          <p:cNvPr id="10" name="TextBox 9"/>
-          <p:cNvSpPr txBox="1"/>
-          <p:nvPr/>
-        </p:nvSpPr>
-        <p:spPr>
-          <a:xfrm>
-            <a:off x="777240" y="2770632"/>
-            <a:ext cx="3931920" cy="530352"/>
-          </a:xfrm>
-          <a:prstGeom prst="rect">
-            <a:avLst/>
-          </a:prstGeom>
-          <a:noFill/>
-        </p:spPr>
-        <p:txBody>
-          <a:bodyPr wrap="square" lIns="73152" rIns="73152" tIns="36576" bIns="36576" anchor="ctr">
-            <a:spAutoFit/>
-          </a:bodyPr>
-          <a:lstStyle/>
-          <a:p>
-            <a:pPr algn="l">
-              <a:lnSpc>
-                <a:spcPct val="110000"/>
-              </a:lnSpc>
-            </a:pPr>
-            <a:r>
-              <a:rPr sz="1500" b="1">
-                <a:solidFill>
-                  <a:srgbClr val="0F172A"/>
-                </a:solidFill>
-                <a:latin typeface="Arial"/>
-              </a:rPr>
-              <a:t>KAOP docs: security and governance</a:t>
-            </a:r>
-          </a:p>
-        </p:txBody>
-      </p:sp>
-      <p:sp>
-        <p:nvSpPr>
-          <p:cNvPr id="11" name="TextBox 10"/>
-          <p:cNvSpPr txBox="1"/>
-          <p:nvPr/>
-        </p:nvSpPr>
-        <p:spPr>
-          <a:xfrm>
-            <a:off x="4754880" y="2770632"/>
-            <a:ext cx="6766560" cy="530352"/>
-          </a:xfrm>
-          <a:prstGeom prst="rect">
-            <a:avLst/>
-          </a:prstGeom>
-          <a:noFill/>
-        </p:spPr>
-        <p:txBody>
-          <a:bodyPr wrap="square" lIns="73152" rIns="73152" tIns="36576" bIns="36576" anchor="ctr">
-            <a:spAutoFit/>
-          </a:bodyPr>
-          <a:lstStyle/>
-          <a:p>
-            <a:pPr algn="l">
-              <a:lnSpc>
-                <a:spcPct val="110000"/>
-              </a:lnSpc>
-            </a:pPr>
-            <a:r>
-              <a:rPr sz="1500" b="0">
-                <a:solidFill>
-                  <a:srgbClr val="475569"/>
-                </a:solidFill>
-                <a:latin typeface="Arial"/>
-              </a:rPr>
-              <a:t>The six layers, approvals, audit log, Access explorer.</a:t>
-            </a:r>
-          </a:p>
-        </p:txBody>
-      </p:sp>
-      <p:sp>
-        <p:nvSpPr>
-          <p:cNvPr id="12" name="Rounded Rectangle 11"/>
-          <p:cNvSpPr/>
-          <p:nvPr/>
-        </p:nvSpPr>
-        <p:spPr>
-          <a:xfrm>
-            <a:off x="548640" y="3438144"/>
-            <a:ext cx="11091672" cy="621792"/>
-          </a:xfrm>
-          <a:prstGeom prst="roundRect">
-            <a:avLst>
-              <a:gd name="adj" fmla="val 6000"/>
-            </a:avLst>
-          </a:prstGeom>
-          <a:solidFill>
-            <a:srgbClr val="FFFFFF"/>
-          </a:solidFill>
-          <a:ln w="12700">
-            <a:solidFill>
-              <a:srgbClr val="E2E8F0"/>
-            </a:solidFill>
-          </a:ln>
-          <a:effectLst/>
-        </p:spPr>
-        <p:style>
-          <a:lnRef idx="1">
-            <a:schemeClr val="accent1"/>
-          </a:lnRef>
-          <a:fillRef idx="3">
-            <a:schemeClr val="accent1"/>
-          </a:fillRef>
-          <a:effectRef idx="2">
-            <a:schemeClr val="accent1"/>
-          </a:effectRef>
-          <a:fontRef idx="minor">
-            <a:schemeClr val="lt1"/>
-          </a:fontRef>
-        </p:style>
-        <p:txBody>
-          <a:bodyPr rtlCol="0" anchor="ctr"/>
-          <a:lstStyle/>
-          <a:p>
-            <a:pPr algn="ctr"/>
-          </a:p>
-        </p:txBody>
-      </p:sp>
-      <p:sp>
-        <p:nvSpPr>
-          <p:cNvPr id="13" name="TextBox 12"/>
-          <p:cNvSpPr txBox="1"/>
-          <p:nvPr/>
-        </p:nvSpPr>
-        <p:spPr>
-          <a:xfrm>
-            <a:off x="777240" y="3483864"/>
-            <a:ext cx="3931920" cy="530352"/>
-          </a:xfrm>
-          <a:prstGeom prst="rect">
-            <a:avLst/>
-          </a:prstGeom>
-          <a:noFill/>
-        </p:spPr>
-        <p:txBody>
-          <a:bodyPr wrap="square" lIns="73152" rIns="73152" tIns="36576" bIns="36576" anchor="ctr">
-            <a:spAutoFit/>
-          </a:bodyPr>
-          <a:lstStyle/>
-          <a:p>
-            <a:pPr algn="l">
-              <a:lnSpc>
-                <a:spcPct val="110000"/>
-              </a:lnSpc>
-            </a:pPr>
-            <a:r>
-              <a:rPr sz="1500" b="1">
-                <a:solidFill>
-                  <a:srgbClr val="0F172A"/>
-                </a:solidFill>
-                <a:latin typeface="Arial"/>
-              </a:rPr>
-              <a:t>KAOP docs: agent catalog</a:t>
-            </a:r>
-          </a:p>
-        </p:txBody>
-      </p:sp>
-      <p:sp>
-        <p:nvSpPr>
-          <p:cNvPr id="14" name="TextBox 13"/>
-          <p:cNvSpPr txBox="1"/>
-          <p:nvPr/>
-        </p:nvSpPr>
-        <p:spPr>
-          <a:xfrm>
-            <a:off x="4754880" y="3483864"/>
-            <a:ext cx="6766560" cy="530352"/>
-          </a:xfrm>
-          <a:prstGeom prst="rect">
-            <a:avLst/>
-          </a:prstGeom>
-          <a:noFill/>
-        </p:spPr>
-        <p:txBody>
-          <a:bodyPr wrap="square" lIns="73152" rIns="73152" tIns="36576" bIns="36576" anchor="ctr">
-            <a:spAutoFit/>
-          </a:bodyPr>
-          <a:lstStyle/>
-          <a:p>
-            <a:pPr algn="l">
-              <a:lnSpc>
-                <a:spcPct val="110000"/>
-              </a:lnSpc>
-            </a:pPr>
-            <a:r>
-              <a:rPr sz="1500" b="0">
-                <a:solidFill>
-                  <a:srgbClr val="475569"/>
-                </a:solidFill>
-                <a:latin typeface="Arial"/>
-              </a:rPr>
-              <a:t>What each agent reads, changes, and where it stops.</a:t>
-            </a:r>
-          </a:p>
-        </p:txBody>
-      </p:sp>
-      <p:sp>
-        <p:nvSpPr>
-          <p:cNvPr id="15" name="Rounded Rectangle 14"/>
-          <p:cNvSpPr/>
-          <p:nvPr/>
-        </p:nvSpPr>
-        <p:spPr>
-          <a:xfrm>
-            <a:off x="548640" y="4151376"/>
-            <a:ext cx="11091672" cy="621792"/>
-          </a:xfrm>
-          <a:prstGeom prst="roundRect">
-            <a:avLst>
-              <a:gd name="adj" fmla="val 6000"/>
-            </a:avLst>
-          </a:prstGeom>
-          <a:solidFill>
-            <a:srgbClr val="FFFFFF"/>
-          </a:solidFill>
-          <a:ln w="12700">
-            <a:solidFill>
-              <a:srgbClr val="E2E8F0"/>
-            </a:solidFill>
-          </a:ln>
-          <a:effectLst/>
-        </p:spPr>
-        <p:style>
-          <a:lnRef idx="1">
-            <a:schemeClr val="accent1"/>
-          </a:lnRef>
-          <a:fillRef idx="3">
-            <a:schemeClr val="accent1"/>
-          </a:fillRef>
-          <a:effectRef idx="2">
-            <a:schemeClr val="accent1"/>
-          </a:effectRef>
-          <a:fontRef idx="minor">
-            <a:schemeClr val="lt1"/>
-          </a:fontRef>
-        </p:style>
-        <p:txBody>
-          <a:bodyPr rtlCol="0" anchor="ctr"/>
-          <a:lstStyle/>
-          <a:p>
-            <a:pPr algn="ctr"/>
-          </a:p>
-        </p:txBody>
-      </p:sp>
-      <p:sp>
-        <p:nvSpPr>
-          <p:cNvPr id="16" name="TextBox 15"/>
-          <p:cNvSpPr txBox="1"/>
-          <p:nvPr/>
-        </p:nvSpPr>
-        <p:spPr>
-          <a:xfrm>
-            <a:off x="777240" y="4197096"/>
-            <a:ext cx="3931920" cy="530352"/>
-          </a:xfrm>
-          <a:prstGeom prst="rect">
-            <a:avLst/>
-          </a:prstGeom>
-          <a:noFill/>
-        </p:spPr>
-        <p:txBody>
-          <a:bodyPr wrap="square" lIns="73152" rIns="73152" tIns="36576" bIns="36576" anchor="ctr">
-            <a:spAutoFit/>
-          </a:bodyPr>
-          <a:lstStyle/>
-          <a:p>
-            <a:pPr algn="l">
-              <a:lnSpc>
-                <a:spcPct val="110000"/>
-              </a:lnSpc>
-            </a:pPr>
-            <a:r>
-              <a:rPr sz="1500" b="1">
-                <a:solidFill>
-                  <a:srgbClr val="0F172A"/>
-                </a:solidFill>
-                <a:latin typeface="Arial"/>
-              </a:rPr>
-              <a:t>KAOP docs: incident module</a:t>
-            </a:r>
-          </a:p>
-        </p:txBody>
-      </p:sp>
-      <p:sp>
-        <p:nvSpPr>
-          <p:cNvPr id="17" name="TextBox 16"/>
-          <p:cNvSpPr txBox="1"/>
-          <p:nvPr/>
-        </p:nvSpPr>
-        <p:spPr>
-          <a:xfrm>
-            <a:off x="4754880" y="4197096"/>
-            <a:ext cx="6766560" cy="530352"/>
-          </a:xfrm>
-          <a:prstGeom prst="rect">
-            <a:avLst/>
-          </a:prstGeom>
-          <a:noFill/>
-        </p:spPr>
-        <p:txBody>
-          <a:bodyPr wrap="square" lIns="73152" rIns="73152" tIns="36576" bIns="36576" anchor="ctr">
-            <a:spAutoFit/>
-          </a:bodyPr>
-          <a:lstStyle/>
-          <a:p>
-            <a:pPr algn="l">
-              <a:lnSpc>
-                <a:spcPct val="110000"/>
-              </a:lnSpc>
-            </a:pPr>
-            <a:r>
-              <a:rPr sz="1500" b="0">
-                <a:solidFill>
-                  <a:srgbClr val="475569"/>
-                </a:solidFill>
-                <a:latin typeface="Arial"/>
-              </a:rPr>
-              <a:t>The alert-to-remediation workflow.</a:t>
-            </a:r>
-          </a:p>
-        </p:txBody>
-      </p:sp>
-      <p:sp>
-        <p:nvSpPr>
-          <p:cNvPr id="18" name="Rounded Rectangle 17"/>
-          <p:cNvSpPr/>
-          <p:nvPr/>
-        </p:nvSpPr>
-        <p:spPr>
-          <a:xfrm>
-            <a:off x="548640" y="4864608"/>
-            <a:ext cx="11091672" cy="621792"/>
-          </a:xfrm>
-          <a:prstGeom prst="roundRect">
-            <a:avLst>
-              <a:gd name="adj" fmla="val 6000"/>
-            </a:avLst>
-          </a:prstGeom>
-          <a:solidFill>
-            <a:srgbClr val="FFFFFF"/>
-          </a:solidFill>
-          <a:ln w="12700">
-            <a:solidFill>
-              <a:srgbClr val="E2E8F0"/>
-            </a:solidFill>
-          </a:ln>
-          <a:effectLst/>
-        </p:spPr>
-        <p:style>
-          <a:lnRef idx="1">
-            <a:schemeClr val="accent1"/>
-          </a:lnRef>
-          <a:fillRef idx="3">
-            <a:schemeClr val="accent1"/>
-          </a:fillRef>
-          <a:effectRef idx="2">
-            <a:schemeClr val="accent1"/>
-          </a:effectRef>
-          <a:fontRef idx="minor">
-            <a:schemeClr val="lt1"/>
-          </a:fontRef>
-        </p:style>
-        <p:txBody>
-          <a:bodyPr rtlCol="0" anchor="ctr"/>
-          <a:lstStyle/>
-          <a:p>
-            <a:pPr algn="ctr"/>
-          </a:p>
-        </p:txBody>
-      </p:sp>
-      <p:sp>
-        <p:nvSpPr>
-          <p:cNvPr id="19" name="TextBox 18"/>
-          <p:cNvSpPr txBox="1"/>
-          <p:nvPr/>
-        </p:nvSpPr>
-        <p:spPr>
-          <a:xfrm>
-            <a:off x="777240" y="4910328"/>
-            <a:ext cx="3931920" cy="530352"/>
-          </a:xfrm>
-          <a:prstGeom prst="rect">
-            <a:avLst/>
-          </a:prstGeom>
-          <a:noFill/>
-        </p:spPr>
-        <p:txBody>
-          <a:bodyPr wrap="square" lIns="73152" rIns="73152" tIns="36576" bIns="36576" anchor="ctr">
-            <a:spAutoFit/>
-          </a:bodyPr>
-          <a:lstStyle/>
-          <a:p>
-            <a:pPr algn="l">
-              <a:lnSpc>
-                <a:spcPct val="110000"/>
-              </a:lnSpc>
-            </a:pPr>
-            <a:r>
-              <a:rPr sz="1500" b="1">
-                <a:solidFill>
-                  <a:srgbClr val="0F172A"/>
-                </a:solidFill>
-                <a:latin typeface="Arial"/>
-              </a:rPr>
-              <a:t>This lab</a:t>
-            </a:r>
-          </a:p>
-        </p:txBody>
-      </p:sp>
-      <p:sp>
-        <p:nvSpPr>
-          <p:cNvPr id="20" name="TextBox 19"/>
-          <p:cNvSpPr txBox="1"/>
-          <p:nvPr/>
-        </p:nvSpPr>
-        <p:spPr>
-          <a:xfrm>
-            <a:off x="4754880" y="4910328"/>
-            <a:ext cx="6766560" cy="530352"/>
-          </a:xfrm>
-          <a:prstGeom prst="rect">
-            <a:avLst/>
-          </a:prstGeom>
-          <a:noFill/>
-        </p:spPr>
-        <p:txBody>
-          <a:bodyPr wrap="square" lIns="73152" rIns="73152" tIns="36576" bIns="36576" anchor="ctr">
-            <a:spAutoFit/>
-          </a:bodyPr>
-          <a:lstStyle/>
-          <a:p>
-            <a:pPr algn="l">
-              <a:lnSpc>
-                <a:spcPct val="110000"/>
-              </a:lnSpc>
-            </a:pPr>
-            <a:r>
-              <a:rPr sz="1500" b="0">
-                <a:solidFill>
-                  <a:srgbClr val="475569"/>
-                </a:solidFill>
-                <a:latin typeface="Arial"/>
-              </a:rPr>
-              <a:t>A real fault, a real alert, permissions verified, fix measured.</a:t>
-            </a:r>
-          </a:p>
-        </p:txBody>
-      </p:sp>
-      <p:sp>
-        <p:nvSpPr>
-          <p:cNvPr id="21" name="Rounded Rectangle 20"/>
-          <p:cNvSpPr/>
-          <p:nvPr/>
-        </p:nvSpPr>
-        <p:spPr>
-          <a:xfrm>
-            <a:off x="548640" y="5852160"/>
-            <a:ext cx="11091672" cy="603504"/>
-          </a:xfrm>
-          <a:prstGeom prst="roundRect">
-            <a:avLst>
-              <a:gd name="adj" fmla="val 12000"/>
-            </a:avLst>
-          </a:prstGeom>
-          <a:solidFill>
-            <a:srgbClr val="0B1220"/>
-          </a:solidFill>
-          <a:ln>
-            <a:noFill/>
-          </a:ln>
-          <a:effectLst/>
-        </p:spPr>
-        <p:style>
-          <a:lnRef idx="1">
-            <a:schemeClr val="accent1"/>
-          </a:lnRef>
-          <a:fillRef idx="3">
-            <a:schemeClr val="accent1"/>
-          </a:fillRef>
-          <a:effectRef idx="2">
-            <a:schemeClr val="accent1"/>
-          </a:effectRef>
-          <a:fontRef idx="minor">
-            <a:schemeClr val="lt1"/>
-          </a:fontRef>
-        </p:style>
-        <p:txBody>
-          <a:bodyPr rtlCol="0" anchor="ctr" wrap="square" lIns="292608" rIns="73152" tIns="36576" bIns="36576"/>
-          <a:lstStyle/>
-          <a:p>
-            <a:pPr algn="l">
-              <a:lnSpc>
-                <a:spcPct val="110000"/>
-              </a:lnSpc>
-            </a:pPr>
-            <a:r>
-              <a:rPr sz="1200" b="1">
-                <a:solidFill>
-                  <a:srgbClr val="A5B4FC"/>
-                </a:solidFill>
-                <a:latin typeface="Arial"/>
-              </a:rPr>
-              <a:t>APPROACH   </a:t>
-            </a:r>
-            <a:r>
-              <a:rPr sz="1600" b="0">
-                <a:solidFill>
-                  <a:srgbClr val="FFFFFF"/>
-                </a:solidFill>
-                <a:latin typeface="Arial"/>
-              </a:rPr>
-              <a:t>Start from your challenges, prove it on a real incident, then agree the first step together.</a:t>
             </a:r>
           </a:p>
         </p:txBody>
@@ -11065,7 +12034,7 @@
                 </a:solidFill>
                 <a:latin typeface="Arial"/>
               </a:rPr>
-              <a:t>APPENDIX B</a:t>
+              <a:t>APPENDIX A</a:t>
             </a:r>
           </a:p>
         </p:txBody>
@@ -11104,21 +12073,60 @@
                 </a:solidFill>
                 <a:latin typeface="Arial"/>
               </a:rPr>
-              <a:t>Common questions</a:t>
-            </a:r>
-          </a:p>
-        </p:txBody>
-      </p:sp>
-      <p:sp>
-        <p:nvSpPr>
-          <p:cNvPr id="5" name="Rounded Rectangle 4"/>
+              <a:t>Sources for this presentation</a:t>
+            </a:r>
+          </a:p>
+        </p:txBody>
+      </p:sp>
+      <p:sp>
+        <p:nvSpPr>
+          <p:cNvPr id="5" name="TextBox 4"/>
+          <p:cNvSpPr txBox="1"/>
+          <p:nvPr/>
+        </p:nvSpPr>
+        <p:spPr>
+          <a:xfrm>
+            <a:off x="548640" y="1371600"/>
+            <a:ext cx="11064240" cy="457200"/>
+          </a:xfrm>
+          <a:prstGeom prst="rect">
+            <a:avLst/>
+          </a:prstGeom>
+          <a:noFill/>
+        </p:spPr>
+        <p:txBody>
+          <a:bodyPr wrap="square" lIns="73152" rIns="73152" tIns="36576" bIns="36576" anchor="t">
+            <a:spAutoFit/>
+          </a:bodyPr>
+          <a:lstStyle/>
+          <a:p>
+            <a:pPr algn="l">
+              <a:lnSpc>
+                <a:spcPct val="110000"/>
+              </a:lnSpc>
+            </a:pPr>
+            <a:r>
+              <a:rPr sz="1700" b="0">
+                <a:solidFill>
+                  <a:srgbClr val="475569"/>
+                </a:solidFill>
+                <a:latin typeface="Arial"/>
+              </a:rPr>
+              <a:t>Every claim traces to Komodor's material or to this lab.</a:t>
+            </a:r>
+          </a:p>
+        </p:txBody>
+      </p:sp>
+      <p:sp>
+        <p:nvSpPr>
+          <p:cNvPr id="6" name="Rounded Rectangle 5"/>
           <p:cNvSpPr/>
           <p:nvPr/>
         </p:nvSpPr>
         <p:spPr>
           <a:xfrm>
-            <a:off x="548640" y="1463040"/>
-            <a:ext cx="11091672" cy="804672"/>
+            <a:off x="548640" y="2011680"/>
+            <a:ext cx="11091672" cy="621792"/>
           </a:xfrm>
           <a:prstGeom prst="roundRect">
             <a:avLst>
@@ -11159,14 +12167,14 @@
       </p:sp>
       <p:sp>
         <p:nvSpPr>
-          <p:cNvPr id="6" name="TextBox 5"/>
+          <p:cNvPr id="7" name="TextBox 6"/>
           <p:cNvSpPr txBox="1"/>
           <p:nvPr/>
         </p:nvSpPr>
         <p:spPr>
           <a:xfrm>
-            <a:off x="777240" y="1508760"/>
-            <a:ext cx="3931920" cy="713232"/>
+            <a:off x="777240" y="2057400"/>
+            <a:ext cx="3931920" cy="530352"/>
           </a:xfrm>
           <a:prstGeom prst="rect">
             <a:avLst/>
@@ -11191,21 +12199,21 @@
                 </a:solidFill>
                 <a:latin typeface="Arial"/>
               </a:rPr>
-              <a:t>“We'll build this ourselves.”</a:t>
-            </a:r>
-          </a:p>
-        </p:txBody>
-      </p:sp>
-      <p:sp>
-        <p:nvSpPr>
-          <p:cNvPr id="7" name="TextBox 6"/>
+              <a:t>Komodor website and KAOP launch</a:t>
+            </a:r>
+          </a:p>
+        </p:txBody>
+      </p:sp>
+      <p:sp>
+        <p:nvSpPr>
+          <p:cNvPr id="8" name="TextBox 7"/>
           <p:cNvSpPr txBox="1"/>
           <p:nvPr/>
         </p:nvSpPr>
         <p:spPr>
           <a:xfrm>
-            <a:off x="4754880" y="1508760"/>
-            <a:ext cx="6766560" cy="713232"/>
+            <a:off x="4754880" y="2057400"/>
+            <a:ext cx="6766560" cy="530352"/>
           </a:xfrm>
           <a:prstGeom prst="rect">
             <a:avLst/>
@@ -11224,27 +12232,27 @@
               </a:lnSpc>
             </a:pPr>
             <a:r>
-              <a:rPr sz="1400" b="0">
+              <a:rPr sz="1500" b="0">
                 <a:solidFill>
                   <a:srgbClr val="475569"/>
                 </a:solidFill>
                 <a:latin typeface="Arial"/>
               </a:rPr>
-              <a:t>You can build an agent. The hard part is identity, approvals, audit, budgets and evaluation around every agent, for every team. That's the platform.</a:t>
-            </a:r>
-          </a:p>
-        </p:txBody>
-      </p:sp>
-      <p:sp>
-        <p:nvSpPr>
-          <p:cNvPr id="8" name="Rounded Rectangle 7"/>
+              <a:t>Positioning: build, run, govern, optimize. The Gartner figure.</a:t>
+            </a:r>
+          </a:p>
+        </p:txBody>
+      </p:sp>
+      <p:sp>
+        <p:nvSpPr>
+          <p:cNvPr id="9" name="Rounded Rectangle 8"/>
           <p:cNvSpPr/>
           <p:nvPr/>
         </p:nvSpPr>
         <p:spPr>
           <a:xfrm>
-            <a:off x="548640" y="2359152"/>
-            <a:ext cx="11091672" cy="804672"/>
+            <a:off x="548640" y="2724912"/>
+            <a:ext cx="11091672" cy="621792"/>
           </a:xfrm>
           <a:prstGeom prst="roundRect">
             <a:avLst>
@@ -11285,14 +12293,14 @@
       </p:sp>
       <p:sp>
         <p:nvSpPr>
-          <p:cNvPr id="9" name="TextBox 8"/>
+          <p:cNvPr id="10" name="TextBox 9"/>
           <p:cNvSpPr txBox="1"/>
           <p:nvPr/>
         </p:nvSpPr>
         <p:spPr>
           <a:xfrm>
-            <a:off x="777240" y="2404872"/>
-            <a:ext cx="3931920" cy="713232"/>
+            <a:off x="777240" y="2770632"/>
+            <a:ext cx="3931920" cy="530352"/>
           </a:xfrm>
           <a:prstGeom prst="rect">
             <a:avLst/>
@@ -11317,21 +12325,21 @@
                 </a:solidFill>
                 <a:latin typeface="Arial"/>
               </a:rPr>
-              <a:t>“Komodor already has Klaudia. Why KAOP?”</a:t>
-            </a:r>
-          </a:p>
-        </p:txBody>
-      </p:sp>
-      <p:sp>
-        <p:nvSpPr>
-          <p:cNvPr id="10" name="TextBox 9"/>
+              <a:t>KAOP docs: security and governance</a:t>
+            </a:r>
+          </a:p>
+        </p:txBody>
+      </p:sp>
+      <p:sp>
+        <p:nvSpPr>
+          <p:cNvPr id="11" name="TextBox 10"/>
           <p:cNvSpPr txBox="1"/>
           <p:nvPr/>
         </p:nvSpPr>
         <p:spPr>
           <a:xfrm>
-            <a:off x="4754880" y="2404872"/>
-            <a:ext cx="6766560" cy="713232"/>
+            <a:off x="4754880" y="2770632"/>
+            <a:ext cx="6766560" cy="530352"/>
           </a:xfrm>
           <a:prstGeom prst="rect">
             <a:avLst/>
@@ -11350,27 +12358,27 @@
               </a:lnSpc>
             </a:pPr>
             <a:r>
-              <a:rPr sz="1400" b="0">
+              <a:rPr sz="1500" b="0">
                 <a:solidFill>
                   <a:srgbClr val="475569"/>
                 </a:solidFill>
                 <a:latin typeface="Arial"/>
               </a:rPr>
-              <a:t>Klaudia is the expertise. KAOP is the operating model that runs it beside your own agents, under one set of rules.</a:t>
-            </a:r>
-          </a:p>
-        </p:txBody>
-      </p:sp>
-      <p:sp>
-        <p:nvSpPr>
-          <p:cNvPr id="11" name="Rounded Rectangle 10"/>
+              <a:t>The six layers, approvals, audit log, Access explorer.</a:t>
+            </a:r>
+          </a:p>
+        </p:txBody>
+      </p:sp>
+      <p:sp>
+        <p:nvSpPr>
+          <p:cNvPr id="12" name="Rounded Rectangle 11"/>
           <p:cNvSpPr/>
           <p:nvPr/>
         </p:nvSpPr>
         <p:spPr>
           <a:xfrm>
-            <a:off x="548640" y="3255264"/>
-            <a:ext cx="11091672" cy="804672"/>
+            <a:off x="548640" y="3438144"/>
+            <a:ext cx="11091672" cy="621792"/>
           </a:xfrm>
           <a:prstGeom prst="roundRect">
             <a:avLst>
@@ -11411,14 +12419,14 @@
       </p:sp>
       <p:sp>
         <p:nvSpPr>
-          <p:cNvPr id="12" name="TextBox 11"/>
+          <p:cNvPr id="13" name="TextBox 12"/>
           <p:cNvSpPr txBox="1"/>
           <p:nvPr/>
         </p:nvSpPr>
         <p:spPr>
           <a:xfrm>
-            <a:off x="777240" y="3300984"/>
-            <a:ext cx="3931920" cy="713232"/>
+            <a:off x="777240" y="3483864"/>
+            <a:ext cx="3931920" cy="530352"/>
           </a:xfrm>
           <a:prstGeom prst="rect">
             <a:avLst/>
@@ -11443,21 +12451,21 @@
                 </a:solidFill>
                 <a:latin typeface="Arial"/>
               </a:rPr>
-              <a:t>“What if the agent is wrong?”</a:t>
-            </a:r>
-          </a:p>
-        </p:txBody>
-      </p:sp>
-      <p:sp>
-        <p:nvSpPr>
-          <p:cNvPr id="13" name="TextBox 12"/>
+              <a:t>KAOP docs: agent catalog</a:t>
+            </a:r>
+          </a:p>
+        </p:txBody>
+      </p:sp>
+      <p:sp>
+        <p:nvSpPr>
+          <p:cNvPr id="14" name="TextBox 13"/>
           <p:cNvSpPr txBox="1"/>
           <p:nvPr/>
         </p:nvSpPr>
         <p:spPr>
           <a:xfrm>
-            <a:off x="4754880" y="3300984"/>
-            <a:ext cx="6766560" cy="713232"/>
+            <a:off x="4754880" y="3483864"/>
+            <a:ext cx="6766560" cy="530352"/>
           </a:xfrm>
           <a:prstGeom prst="rect">
             <a:avLst/>
@@ -11476,27 +12484,27 @@
               </a:lnSpc>
             </a:pPr>
             <a:r>
-              <a:rPr sz="1400" b="0">
+              <a:rPr sz="1500" b="0">
                 <a:solidFill>
                   <a:srgbClr val="475569"/>
                 </a:solidFill>
                 <a:latin typeface="Arial"/>
               </a:rPr>
-              <a:t>It separates what it saw from what it guessed, every change needs a person, and KAOP grades runs over time.</a:t>
-            </a:r>
-          </a:p>
-        </p:txBody>
-      </p:sp>
-      <p:sp>
-        <p:nvSpPr>
-          <p:cNvPr id="14" name="Rounded Rectangle 13"/>
+              <a:t>What each agent reads, changes, and where it stops.</a:t>
+            </a:r>
+          </a:p>
+        </p:txBody>
+      </p:sp>
+      <p:sp>
+        <p:nvSpPr>
+          <p:cNvPr id="15" name="Rounded Rectangle 14"/>
           <p:cNvSpPr/>
           <p:nvPr/>
         </p:nvSpPr>
         <p:spPr>
           <a:xfrm>
             <a:off x="548640" y="4151376"/>
-            <a:ext cx="11091672" cy="804672"/>
+            <a:ext cx="11091672" cy="621792"/>
           </a:xfrm>
           <a:prstGeom prst="roundRect">
             <a:avLst>
@@ -11537,14 +12545,14 @@
       </p:sp>
       <p:sp>
         <p:nvSpPr>
-          <p:cNvPr id="15" name="TextBox 14"/>
+          <p:cNvPr id="16" name="TextBox 15"/>
           <p:cNvSpPr txBox="1"/>
           <p:nvPr/>
         </p:nvSpPr>
         <p:spPr>
           <a:xfrm>
             <a:off x="777240" y="4197096"/>
-            <a:ext cx="3931920" cy="713232"/>
+            <a:ext cx="3931920" cy="530352"/>
           </a:xfrm>
           <a:prstGeom prst="rect">
             <a:avLst/>
@@ -11569,21 +12577,21 @@
                 </a:solidFill>
                 <a:latin typeface="Arial"/>
               </a:rPr>
-              <a:t>“How long does onboarding take?”</a:t>
-            </a:r>
-          </a:p>
-        </p:txBody>
-      </p:sp>
-      <p:sp>
-        <p:nvSpPr>
-          <p:cNvPr id="16" name="TextBox 15"/>
+              <a:t>KAOP docs: incident module</a:t>
+            </a:r>
+          </a:p>
+        </p:txBody>
+      </p:sp>
+      <p:sp>
+        <p:nvSpPr>
+          <p:cNvPr id="17" name="TextBox 16"/>
           <p:cNvSpPr txBox="1"/>
           <p:nvPr/>
         </p:nvSpPr>
         <p:spPr>
           <a:xfrm>
             <a:off x="4754880" y="4197096"/>
-            <a:ext cx="6766560" cy="713232"/>
+            <a:ext cx="6766560" cy="530352"/>
           </a:xfrm>
           <a:prstGeom prst="rect">
             <a:avLst/>
@@ -11602,27 +12610,27 @@
               </a:lnSpc>
             </a:pPr>
             <a:r>
-              <a:rPr sz="1400" b="0">
+              <a:rPr sz="1500" b="0">
                 <a:solidFill>
                   <a:srgbClr val="475569"/>
                 </a:solidFill>
                 <a:latin typeface="Arial"/>
               </a:rPr>
-              <a:t>Catalog agents deploy in minutes. The real time goes into agreeing the workflow, the owner and the guardrails, which is why I'd start with a scoping session.</a:t>
-            </a:r>
-          </a:p>
-        </p:txBody>
-      </p:sp>
-      <p:sp>
-        <p:nvSpPr>
-          <p:cNvPr id="17" name="Rounded Rectangle 16"/>
+              <a:t>The alert-to-remediation workflow.</a:t>
+            </a:r>
+          </a:p>
+        </p:txBody>
+      </p:sp>
+      <p:sp>
+        <p:nvSpPr>
+          <p:cNvPr id="18" name="Rounded Rectangle 17"/>
           <p:cNvSpPr/>
           <p:nvPr/>
         </p:nvSpPr>
         <p:spPr>
           <a:xfrm>
-            <a:off x="548640" y="5047488"/>
-            <a:ext cx="11091672" cy="804672"/>
+            <a:off x="548640" y="4864608"/>
+            <a:ext cx="11091672" cy="621792"/>
           </a:xfrm>
           <a:prstGeom prst="roundRect">
             <a:avLst>
@@ -11663,14 +12671,14 @@
       </p:sp>
       <p:sp>
         <p:nvSpPr>
-          <p:cNvPr id="18" name="TextBox 17"/>
+          <p:cNvPr id="19" name="TextBox 18"/>
           <p:cNvSpPr txBox="1"/>
           <p:nvPr/>
         </p:nvSpPr>
         <p:spPr>
           <a:xfrm>
-            <a:off x="777240" y="5093207"/>
-            <a:ext cx="3931920" cy="713232"/>
+            <a:off x="777240" y="4910328"/>
+            <a:ext cx="3931920" cy="530352"/>
           </a:xfrm>
           <a:prstGeom prst="rect">
             <a:avLst/>
@@ -11695,21 +12703,21 @@
                 </a:solidFill>
                 <a:latin typeface="Arial"/>
               </a:rPr>
-              <a:t>“What does it cost?”</a:t>
-            </a:r>
-          </a:p>
-        </p:txBody>
-      </p:sp>
-      <p:sp>
-        <p:nvSpPr>
-          <p:cNvPr id="19" name="TextBox 18"/>
+              <a:t>This lab</a:t>
+            </a:r>
+          </a:p>
+        </p:txBody>
+      </p:sp>
+      <p:sp>
+        <p:nvSpPr>
+          <p:cNvPr id="20" name="TextBox 19"/>
           <p:cNvSpPr txBox="1"/>
           <p:nvPr/>
         </p:nvSpPr>
         <p:spPr>
           <a:xfrm>
-            <a:off x="4754880" y="5093207"/>
-            <a:ext cx="6766560" cy="713232"/>
+            <a:off x="4754880" y="4910328"/>
+            <a:ext cx="6766560" cy="530352"/>
           </a:xfrm>
           <a:prstGeom prst="rect">
             <a:avLst/>
@@ -11728,13 +12736,81 @@
               </a:lnSpc>
             </a:pPr>
             <a:r>
-              <a:rPr sz="1400" b="0">
+              <a:rPr sz="1500" b="0">
                 <a:solidFill>
                   <a:srgbClr val="475569"/>
                 </a:solidFill>
                 <a:latin typeface="Arial"/>
               </a:rPr>
-              <a:t>Every run shows its cost, and budgets block new runs at a limit. We'd agree a budget in the scoping session and track cost per useful investigation.</a:t>
+              <a:t>A real fault, a real alert, permissions verified, fix measured.</a:t>
+            </a:r>
+          </a:p>
+        </p:txBody>
+      </p:sp>
+      <p:sp>
+        <p:nvSpPr>
+          <p:cNvPr id="21" name="Rounded Rectangle 20"/>
+          <p:cNvSpPr/>
+          <p:nvPr/>
+        </p:nvSpPr>
+        <p:spPr>
+          <a:xfrm>
+            <a:off x="548640" y="5852160"/>
+            <a:ext cx="11091672" cy="603504"/>
+          </a:xfrm>
+          <a:prstGeom prst="roundRect">
+            <a:avLst>
+              <a:gd name="adj" fmla="val 12000"/>
+            </a:avLst>
+          </a:prstGeom>
+          <a:solidFill>
+            <a:srgbClr val="0B1220"/>
+          </a:solidFill>
+          <a:ln>
+            <a:noFill/>
+          </a:ln>
+          <a:effectLst/>
+        </p:spPr>
+        <p:style>
+          <a:lnRef idx="1">
+            <a:schemeClr val="accent1"/>
+          </a:lnRef>
+          <a:fillRef idx="3">
+            <a:schemeClr val="accent1"/>
+          </a:fillRef>
+          <a:effectRef idx="2">
+            <a:schemeClr val="accent1"/>
+          </a:effectRef>
+          <a:fontRef idx="minor">
+            <a:schemeClr val="lt1"/>
+          </a:fontRef>
+        </p:style>
+        <p:txBody>
+          <a:bodyPr rtlCol="0" anchor="ctr" wrap="square" lIns="292608" rIns="73152" tIns="36576" bIns="36576"/>
+          <a:lstStyle/>
+          <a:p>
+            <a:pPr algn="l">
+              <a:lnSpc>
+                <a:spcPct val="110000"/>
+              </a:lnSpc>
+            </a:pPr>
+            <a:r>
+              <a:rPr sz="1200" b="1">
+                <a:solidFill>
+                  <a:srgbClr val="A5B4FC"/>
+                </a:solidFill>
+                <a:latin typeface="Arial"/>
+              </a:rPr>
+              <a:t>APPROACH   </a:t>
+            </a:r>
+            <a:r>
+              <a:rPr sz="1600" b="0">
+                <a:solidFill>
+                  <a:srgbClr val="FFFFFF"/>
+                </a:solidFill>
+                <a:latin typeface="Arial"/>
+              </a:rPr>
+              <a:t>Start from your challenges, prove it on a real incident, then agree the first step together.</a:t>
             </a:r>
           </a:p>
         </p:txBody>
@@ -11838,7 +12914,7 @@
                 </a:solidFill>
                 <a:latin typeface="Arial"/>
               </a:rPr>
-              <a:t>APPENDIX C</a:t>
+              <a:t>APPENDIX B</a:t>
             </a:r>
           </a:p>
         </p:txBody>
@@ -11877,177 +12953,21 @@
                 </a:solidFill>
                 <a:latin typeface="Arial"/>
               </a:rPr>
-              <a:t>Measured results</a:t>
-            </a:r>
-          </a:p>
-        </p:txBody>
-      </p:sp>
-      <p:sp>
-        <p:nvSpPr>
-          <p:cNvPr id="5" name="TextBox 4"/>
-          <p:cNvSpPr txBox="1"/>
-          <p:nvPr/>
-        </p:nvSpPr>
-        <p:spPr>
-          <a:xfrm>
-            <a:off x="548640" y="1371600"/>
-            <a:ext cx="11064240" cy="457200"/>
-          </a:xfrm>
-          <a:prstGeom prst="rect">
-            <a:avLst/>
-          </a:prstGeom>
-          <a:noFill/>
-        </p:spPr>
-        <p:txBody>
-          <a:bodyPr wrap="square" lIns="73152" rIns="73152" tIns="36576" bIns="36576" anchor="t">
-            <a:spAutoFit/>
-          </a:bodyPr>
-          <a:lstStyle/>
-          <a:p>
-            <a:pPr algn="l">
-              <a:lnSpc>
-                <a:spcPct val="110000"/>
-              </a:lnSpc>
-            </a:pPr>
-            <a:r>
-              <a:rPr sz="1700" b="0">
-                <a:solidFill>
-                  <a:srgbClr val="475569"/>
-                </a:solidFill>
-                <a:latin typeface="Arial"/>
-              </a:rPr>
-              <a:t>The same Redis outage, measured both ways.</a:t>
-            </a:r>
-          </a:p>
-        </p:txBody>
-      </p:sp>
-      <p:sp>
-        <p:nvSpPr>
-          <p:cNvPr id="6" name="TextBox 5"/>
-          <p:cNvSpPr txBox="1"/>
-          <p:nvPr/>
-        </p:nvSpPr>
-        <p:spPr>
-          <a:xfrm>
-            <a:off x="777240" y="1965960"/>
-            <a:ext cx="3474720" cy="320040"/>
-          </a:xfrm>
-          <a:prstGeom prst="rect">
-            <a:avLst/>
-          </a:prstGeom>
-          <a:noFill/>
-        </p:spPr>
-        <p:txBody>
-          <a:bodyPr wrap="square" lIns="73152" rIns="73152" tIns="36576" bIns="36576" anchor="ctr">
-            <a:spAutoFit/>
-          </a:bodyPr>
-          <a:lstStyle/>
-          <a:p>
-            <a:pPr algn="l">
-              <a:lnSpc>
-                <a:spcPct val="110000"/>
-              </a:lnSpc>
-            </a:pPr>
-            <a:r>
-              <a:rPr sz="1100" b="1">
-                <a:solidFill>
-                  <a:srgbClr val="94A3B8"/>
-                </a:solidFill>
-                <a:latin typeface="Arial"/>
-              </a:rPr>
-              <a:t/>
-            </a:r>
-          </a:p>
-        </p:txBody>
-      </p:sp>
-      <p:sp>
-        <p:nvSpPr>
-          <p:cNvPr id="7" name="TextBox 6"/>
-          <p:cNvSpPr txBox="1"/>
-          <p:nvPr/>
-        </p:nvSpPr>
-        <p:spPr>
-          <a:xfrm>
-            <a:off x="4343400" y="1965960"/>
-            <a:ext cx="3657600" cy="320040"/>
-          </a:xfrm>
-          <a:prstGeom prst="rect">
-            <a:avLst/>
-          </a:prstGeom>
-          <a:noFill/>
-        </p:spPr>
-        <p:txBody>
-          <a:bodyPr wrap="square" lIns="73152" rIns="73152" tIns="36576" bIns="36576" anchor="ctr">
-            <a:spAutoFit/>
-          </a:bodyPr>
-          <a:lstStyle/>
-          <a:p>
-            <a:pPr algn="l">
-              <a:lnSpc>
-                <a:spcPct val="110000"/>
-              </a:lnSpc>
-            </a:pPr>
-            <a:r>
-              <a:rPr sz="1100" b="1">
-                <a:solidFill>
-                  <a:srgbClr val="94A3B8"/>
-                </a:solidFill>
-                <a:latin typeface="Arial"/>
-              </a:rPr>
-              <a:t>Liveness checks Redis (bad)</a:t>
-            </a:r>
-          </a:p>
-        </p:txBody>
-      </p:sp>
-      <p:sp>
-        <p:nvSpPr>
-          <p:cNvPr id="8" name="TextBox 7"/>
-          <p:cNvSpPr txBox="1"/>
-          <p:nvPr/>
-        </p:nvSpPr>
-        <p:spPr>
-          <a:xfrm>
-            <a:off x="8046720" y="1965960"/>
-            <a:ext cx="3566160" cy="320040"/>
-          </a:xfrm>
-          <a:prstGeom prst="rect">
-            <a:avLst/>
-          </a:prstGeom>
-          <a:noFill/>
-        </p:spPr>
-        <p:txBody>
-          <a:bodyPr wrap="square" lIns="73152" rIns="73152" tIns="36576" bIns="36576" anchor="ctr">
-            <a:spAutoFit/>
-          </a:bodyPr>
-          <a:lstStyle/>
-          <a:p>
-            <a:pPr algn="l">
-              <a:lnSpc>
-                <a:spcPct val="110000"/>
-              </a:lnSpc>
-            </a:pPr>
-            <a:r>
-              <a:rPr sz="1100" b="1">
-                <a:solidFill>
-                  <a:srgbClr val="94A3B8"/>
-                </a:solidFill>
-                <a:latin typeface="Arial"/>
-              </a:rPr>
-              <a:t>Liveness checks the process (fix)</a:t>
-            </a:r>
-          </a:p>
-        </p:txBody>
-      </p:sp>
-      <p:sp>
-        <p:nvSpPr>
-          <p:cNvPr id="9" name="Rounded Rectangle 8"/>
+              <a:t>Common questions</a:t>
+            </a:r>
+          </a:p>
+        </p:txBody>
+      </p:sp>
+      <p:sp>
+        <p:nvSpPr>
+          <p:cNvPr id="5" name="Rounded Rectangle 4"/>
           <p:cNvSpPr/>
           <p:nvPr/>
         </p:nvSpPr>
         <p:spPr>
           <a:xfrm>
-            <a:off x="548640" y="2331720"/>
-            <a:ext cx="11091672" cy="530352"/>
+            <a:off x="548640" y="1463040"/>
+            <a:ext cx="11091672" cy="804672"/>
           </a:xfrm>
           <a:prstGeom prst="roundRect">
             <a:avLst>
@@ -12088,14 +13008,14 @@
       </p:sp>
       <p:sp>
         <p:nvSpPr>
-          <p:cNvPr id="10" name="TextBox 9"/>
+          <p:cNvPr id="6" name="TextBox 5"/>
           <p:cNvSpPr txBox="1"/>
           <p:nvPr/>
         </p:nvSpPr>
         <p:spPr>
           <a:xfrm>
-            <a:off x="777240" y="2350008"/>
-            <a:ext cx="3474720" cy="493776"/>
+            <a:off x="777240" y="1508760"/>
+            <a:ext cx="3931920" cy="713232"/>
           </a:xfrm>
           <a:prstGeom prst="rect">
             <a:avLst/>
@@ -12120,21 +13040,21 @@
                 </a:solidFill>
                 <a:latin typeface="Arial"/>
               </a:rPr>
-              <a:t>Times Kubernetes killed the healthy API</a:t>
-            </a:r>
-          </a:p>
-        </p:txBody>
-      </p:sp>
-      <p:sp>
-        <p:nvSpPr>
-          <p:cNvPr id="11" name="TextBox 10"/>
+              <a:t>“We'll build this ourselves.”</a:t>
+            </a:r>
+          </a:p>
+        </p:txBody>
+      </p:sp>
+      <p:sp>
+        <p:nvSpPr>
+          <p:cNvPr id="7" name="TextBox 6"/>
           <p:cNvSpPr txBox="1"/>
           <p:nvPr/>
         </p:nvSpPr>
         <p:spPr>
           <a:xfrm>
-            <a:off x="4343400" y="2350008"/>
-            <a:ext cx="3657600" cy="493776"/>
+            <a:off x="4754880" y="1508760"/>
+            <a:ext cx="6766560" cy="713232"/>
           </a:xfrm>
           <a:prstGeom prst="rect">
             <a:avLst/>
@@ -12153,66 +13073,27 @@
               </a:lnSpc>
             </a:pPr>
             <a:r>
-              <a:rPr sz="1500" b="0">
-                <a:solidFill>
-                  <a:srgbClr val="B91C1C"/>
-                </a:solidFill>
-                <a:latin typeface="Arial"/>
-              </a:rPr>
-              <a:t>5 in a 5-minute outage</a:t>
-            </a:r>
-          </a:p>
-        </p:txBody>
-      </p:sp>
-      <p:sp>
-        <p:nvSpPr>
-          <p:cNvPr id="12" name="TextBox 11"/>
-          <p:cNvSpPr txBox="1"/>
-          <p:nvPr/>
-        </p:nvSpPr>
-        <p:spPr>
-          <a:xfrm>
-            <a:off x="8046720" y="2350008"/>
-            <a:ext cx="3566160" cy="493776"/>
-          </a:xfrm>
-          <a:prstGeom prst="rect">
-            <a:avLst/>
-          </a:prstGeom>
-          <a:noFill/>
-        </p:spPr>
-        <p:txBody>
-          <a:bodyPr wrap="square" lIns="73152" rIns="73152" tIns="36576" bIns="36576" anchor="ctr">
-            <a:spAutoFit/>
-          </a:bodyPr>
-          <a:lstStyle/>
-          <a:p>
-            <a:pPr algn="l">
-              <a:lnSpc>
-                <a:spcPct val="110000"/>
-              </a:lnSpc>
-            </a:pPr>
-            <a:r>
-              <a:rPr sz="1500" b="0">
-                <a:solidFill>
-                  <a:srgbClr val="0F766E"/>
-                </a:solidFill>
-                <a:latin typeface="Arial"/>
-              </a:rPr>
-              <a:t>0</a:t>
-            </a:r>
-          </a:p>
-        </p:txBody>
-      </p:sp>
-      <p:sp>
-        <p:nvSpPr>
-          <p:cNvPr id="13" name="Rounded Rectangle 12"/>
+              <a:rPr sz="1400" b="0">
+                <a:solidFill>
+                  <a:srgbClr val="475569"/>
+                </a:solidFill>
+                <a:latin typeface="Arial"/>
+              </a:rPr>
+              <a:t>You can build an agent. The hard part is identity, approvals, audit, budgets and evaluation around every agent, for every team. That's the platform.</a:t>
+            </a:r>
+          </a:p>
+        </p:txBody>
+      </p:sp>
+      <p:sp>
+        <p:nvSpPr>
+          <p:cNvPr id="8" name="Rounded Rectangle 7"/>
           <p:cNvSpPr/>
           <p:nvPr/>
         </p:nvSpPr>
         <p:spPr>
           <a:xfrm>
-            <a:off x="548640" y="2935224"/>
-            <a:ext cx="11091672" cy="530352"/>
+            <a:off x="548640" y="2359152"/>
+            <a:ext cx="11091672" cy="804672"/>
           </a:xfrm>
           <a:prstGeom prst="roundRect">
             <a:avLst>
@@ -12253,14 +13134,14 @@
       </p:sp>
       <p:sp>
         <p:nvSpPr>
-          <p:cNvPr id="14" name="TextBox 13"/>
+          <p:cNvPr id="9" name="TextBox 8"/>
           <p:cNvSpPr txBox="1"/>
           <p:nvPr/>
         </p:nvSpPr>
         <p:spPr>
           <a:xfrm>
-            <a:off x="777240" y="2953512"/>
-            <a:ext cx="3474720" cy="493776"/>
+            <a:off x="777240" y="2404872"/>
+            <a:ext cx="3931920" cy="713232"/>
           </a:xfrm>
           <a:prstGeom prst="rect">
             <a:avLst/>
@@ -12285,21 +13166,21 @@
                 </a:solidFill>
                 <a:latin typeface="Arial"/>
               </a:rPr>
-              <a:t>Liveness failures</a:t>
-            </a:r>
-          </a:p>
-        </p:txBody>
-      </p:sp>
-      <p:sp>
-        <p:nvSpPr>
-          <p:cNvPr id="15" name="TextBox 14"/>
+              <a:t>“Komodor already has Klaudia. Why KAOP?”</a:t>
+            </a:r>
+          </a:p>
+        </p:txBody>
+      </p:sp>
+      <p:sp>
+        <p:nvSpPr>
+          <p:cNvPr id="10" name="TextBox 9"/>
           <p:cNvSpPr txBox="1"/>
           <p:nvPr/>
         </p:nvSpPr>
         <p:spPr>
           <a:xfrm>
-            <a:off x="4343400" y="2953512"/>
-            <a:ext cx="3657600" cy="493776"/>
+            <a:off x="4754880" y="2404872"/>
+            <a:ext cx="6766560" cy="713232"/>
           </a:xfrm>
           <a:prstGeom prst="rect">
             <a:avLst/>
@@ -12318,66 +13199,27 @@
               </a:lnSpc>
             </a:pPr>
             <a:r>
-              <a:rPr sz="1500" b="0">
-                <a:solidFill>
-                  <a:srgbClr val="B91C1C"/>
-                </a:solidFill>
-                <a:latin typeface="Arial"/>
-              </a:rPr>
-              <a:t>Yes</a:t>
-            </a:r>
-          </a:p>
-        </p:txBody>
-      </p:sp>
-      <p:sp>
-        <p:nvSpPr>
-          <p:cNvPr id="16" name="TextBox 15"/>
-          <p:cNvSpPr txBox="1"/>
-          <p:nvPr/>
-        </p:nvSpPr>
-        <p:spPr>
-          <a:xfrm>
-            <a:off x="8046720" y="2953512"/>
-            <a:ext cx="3566160" cy="493776"/>
-          </a:xfrm>
-          <a:prstGeom prst="rect">
-            <a:avLst/>
-          </a:prstGeom>
-          <a:noFill/>
-        </p:spPr>
-        <p:txBody>
-          <a:bodyPr wrap="square" lIns="73152" rIns="73152" tIns="36576" bIns="36576" anchor="ctr">
-            <a:spAutoFit/>
-          </a:bodyPr>
-          <a:lstStyle/>
-          <a:p>
-            <a:pPr algn="l">
-              <a:lnSpc>
-                <a:spcPct val="110000"/>
-              </a:lnSpc>
-            </a:pPr>
-            <a:r>
-              <a:rPr sz="1500" b="0">
-                <a:solidFill>
-                  <a:srgbClr val="0F766E"/>
-                </a:solidFill>
-                <a:latin typeface="Arial"/>
-              </a:rPr>
-              <a:t>None</a:t>
-            </a:r>
-          </a:p>
-        </p:txBody>
-      </p:sp>
-      <p:sp>
-        <p:nvSpPr>
-          <p:cNvPr id="17" name="Rounded Rectangle 16"/>
+              <a:rPr sz="1400" b="0">
+                <a:solidFill>
+                  <a:srgbClr val="475569"/>
+                </a:solidFill>
+                <a:latin typeface="Arial"/>
+              </a:rPr>
+              <a:t>Klaudia is Komodor's AI SRE. KAOP is the control center for all your agents: Klaudia-based, Komodor's and your own.</a:t>
+            </a:r>
+          </a:p>
+        </p:txBody>
+      </p:sp>
+      <p:sp>
+        <p:nvSpPr>
+          <p:cNvPr id="11" name="Rounded Rectangle 10"/>
           <p:cNvSpPr/>
           <p:nvPr/>
         </p:nvSpPr>
         <p:spPr>
           <a:xfrm>
-            <a:off x="548640" y="3538728"/>
-            <a:ext cx="11091672" cy="530352"/>
+            <a:off x="548640" y="3255264"/>
+            <a:ext cx="11091672" cy="804672"/>
           </a:xfrm>
           <a:prstGeom prst="roundRect">
             <a:avLst>
@@ -12418,14 +13260,14 @@
       </p:sp>
       <p:sp>
         <p:nvSpPr>
-          <p:cNvPr id="18" name="TextBox 17"/>
+          <p:cNvPr id="12" name="TextBox 11"/>
           <p:cNvSpPr txBox="1"/>
           <p:nvPr/>
         </p:nvSpPr>
         <p:spPr>
           <a:xfrm>
-            <a:off x="777240" y="3557016"/>
-            <a:ext cx="3474720" cy="493776"/>
+            <a:off x="777240" y="3300984"/>
+            <a:ext cx="3931920" cy="713232"/>
           </a:xfrm>
           <a:prstGeom prst="rect">
             <a:avLst/>
@@ -12450,21 +13292,21 @@
                 </a:solidFill>
                 <a:latin typeface="Arial"/>
               </a:rPr>
-              <a:t>Grafana restart alert</a:t>
-            </a:r>
-          </a:p>
-        </p:txBody>
-      </p:sp>
-      <p:sp>
-        <p:nvSpPr>
-          <p:cNvPr id="19" name="TextBox 18"/>
+              <a:t>“What if the agent is wrong?”</a:t>
+            </a:r>
+          </a:p>
+        </p:txBody>
+      </p:sp>
+      <p:sp>
+        <p:nvSpPr>
+          <p:cNvPr id="13" name="TextBox 12"/>
           <p:cNvSpPr txBox="1"/>
           <p:nvPr/>
         </p:nvSpPr>
         <p:spPr>
           <a:xfrm>
-            <a:off x="4343400" y="3557016"/>
-            <a:ext cx="3657600" cy="493776"/>
+            <a:off x="4754880" y="3300984"/>
+            <a:ext cx="6766560" cy="713232"/>
           </a:xfrm>
           <a:prstGeom prst="rect">
             <a:avLst/>
@@ -12483,66 +13325,27 @@
               </a:lnSpc>
             </a:pPr>
             <a:r>
-              <a:rPr sz="1500" b="0">
-                <a:solidFill>
-                  <a:srgbClr val="B91C1C"/>
-                </a:solidFill>
-                <a:latin typeface="Arial"/>
-              </a:rPr>
-              <a:t>Fired at +3 minutes</a:t>
-            </a:r>
-          </a:p>
-        </p:txBody>
-      </p:sp>
-      <p:sp>
-        <p:nvSpPr>
-          <p:cNvPr id="20" name="TextBox 19"/>
-          <p:cNvSpPr txBox="1"/>
-          <p:nvPr/>
-        </p:nvSpPr>
-        <p:spPr>
-          <a:xfrm>
-            <a:off x="8046720" y="3557016"/>
-            <a:ext cx="3566160" cy="493776"/>
-          </a:xfrm>
-          <a:prstGeom prst="rect">
-            <a:avLst/>
-          </a:prstGeom>
-          <a:noFill/>
-        </p:spPr>
-        <p:txBody>
-          <a:bodyPr wrap="square" lIns="73152" rIns="73152" tIns="36576" bIns="36576" anchor="ctr">
-            <a:spAutoFit/>
-          </a:bodyPr>
-          <a:lstStyle/>
-          <a:p>
-            <a:pPr algn="l">
-              <a:lnSpc>
-                <a:spcPct val="110000"/>
-              </a:lnSpc>
-            </a:pPr>
-            <a:r>
-              <a:rPr sz="1500" b="0">
-                <a:solidFill>
-                  <a:srgbClr val="0F766E"/>
-                </a:solidFill>
-                <a:latin typeface="Arial"/>
-              </a:rPr>
-              <a:t>Stayed Normal</a:t>
-            </a:r>
-          </a:p>
-        </p:txBody>
-      </p:sp>
-      <p:sp>
-        <p:nvSpPr>
-          <p:cNvPr id="21" name="Rounded Rectangle 20"/>
+              <a:rPr sz="1400" b="0">
+                <a:solidFill>
+                  <a:srgbClr val="475569"/>
+                </a:solidFill>
+                <a:latin typeface="Arial"/>
+              </a:rPr>
+              <a:t>It separates what it saw from what it guessed, every change needs a person, and KAOP grades runs over time.</a:t>
+            </a:r>
+          </a:p>
+        </p:txBody>
+      </p:sp>
+      <p:sp>
+        <p:nvSpPr>
+          <p:cNvPr id="14" name="Rounded Rectangle 13"/>
           <p:cNvSpPr/>
           <p:nvPr/>
         </p:nvSpPr>
         <p:spPr>
           <a:xfrm>
-            <a:off x="548640" y="4142231"/>
-            <a:ext cx="11091672" cy="530352"/>
+            <a:off x="548640" y="4151376"/>
+            <a:ext cx="11091672" cy="804672"/>
           </a:xfrm>
           <a:prstGeom prst="roundRect">
             <a:avLst>
@@ -12583,14 +13386,14 @@
       </p:sp>
       <p:sp>
         <p:nvSpPr>
-          <p:cNvPr id="22" name="TextBox 21"/>
+          <p:cNvPr id="15" name="TextBox 14"/>
           <p:cNvSpPr txBox="1"/>
           <p:nvPr/>
         </p:nvSpPr>
         <p:spPr>
           <a:xfrm>
-            <a:off x="777240" y="4160519"/>
-            <a:ext cx="3474720" cy="493776"/>
+            <a:off x="777240" y="4197096"/>
+            <a:ext cx="3931920" cy="713232"/>
           </a:xfrm>
           <a:prstGeom prst="rect">
             <a:avLst/>
@@ -12615,21 +13418,21 @@
                 </a:solidFill>
                 <a:latin typeface="Arial"/>
               </a:rPr>
-              <a:t>API back after Redis returned</a:t>
-            </a:r>
-          </a:p>
-        </p:txBody>
-      </p:sp>
-      <p:sp>
-        <p:nvSpPr>
-          <p:cNvPr id="23" name="TextBox 22"/>
+              <a:t>“How long does onboarding take?”</a:t>
+            </a:r>
+          </a:p>
+        </p:txBody>
+      </p:sp>
+      <p:sp>
+        <p:nvSpPr>
+          <p:cNvPr id="16" name="TextBox 15"/>
           <p:cNvSpPr txBox="1"/>
           <p:nvPr/>
         </p:nvSpPr>
         <p:spPr>
           <a:xfrm>
-            <a:off x="4343400" y="4160519"/>
-            <a:ext cx="3657600" cy="493776"/>
+            <a:off x="4754880" y="4197096"/>
+            <a:ext cx="6766560" cy="713232"/>
           </a:xfrm>
           <a:prstGeom prst="rect">
             <a:avLst/>
@@ -12648,27 +13451,75 @@
               </a:lnSpc>
             </a:pPr>
             <a:r>
-              <a:rPr sz="1500" b="0">
-                <a:solidFill>
-                  <a:srgbClr val="B91C1C"/>
-                </a:solidFill>
-                <a:latin typeface="Arial"/>
-              </a:rPr>
-              <a:t>4.8 s (between back-offs)</a:t>
-            </a:r>
-          </a:p>
-        </p:txBody>
-      </p:sp>
-      <p:sp>
-        <p:nvSpPr>
-          <p:cNvPr id="24" name="TextBox 23"/>
+              <a:rPr sz="1400" b="0">
+                <a:solidFill>
+                  <a:srgbClr val="475569"/>
+                </a:solidFill>
+                <a:latin typeface="Arial"/>
+              </a:rPr>
+              <a:t>Catalog agents deploy in minutes. The real time goes into agreeing the workflow, the owner and the guardrails, which is why I'd start with a scoping session.</a:t>
+            </a:r>
+          </a:p>
+        </p:txBody>
+      </p:sp>
+      <p:sp>
+        <p:nvSpPr>
+          <p:cNvPr id="17" name="Rounded Rectangle 16"/>
+          <p:cNvSpPr/>
+          <p:nvPr/>
+        </p:nvSpPr>
+        <p:spPr>
+          <a:xfrm>
+            <a:off x="548640" y="5047488"/>
+            <a:ext cx="11091672" cy="804672"/>
+          </a:xfrm>
+          <a:prstGeom prst="roundRect">
+            <a:avLst>
+              <a:gd name="adj" fmla="val 6000"/>
+            </a:avLst>
+          </a:prstGeom>
+          <a:solidFill>
+            <a:srgbClr val="FFFFFF"/>
+          </a:solidFill>
+          <a:ln w="12700">
+            <a:solidFill>
+              <a:srgbClr val="E2E8F0"/>
+            </a:solidFill>
+          </a:ln>
+          <a:effectLst/>
+        </p:spPr>
+        <p:style>
+          <a:lnRef idx="1">
+            <a:schemeClr val="accent1"/>
+          </a:lnRef>
+          <a:fillRef idx="3">
+            <a:schemeClr val="accent1"/>
+          </a:fillRef>
+          <a:effectRef idx="2">
+            <a:schemeClr val="accent1"/>
+          </a:effectRef>
+          <a:fontRef idx="minor">
+            <a:schemeClr val="lt1"/>
+          </a:fontRef>
+        </p:style>
+        <p:txBody>
+          <a:bodyPr rtlCol="0" anchor="ctr"/>
+          <a:lstStyle/>
+          <a:p>
+            <a:pPr algn="ctr"/>
+          </a:p>
+        </p:txBody>
+      </p:sp>
+      <p:sp>
+        <p:nvSpPr>
+          <p:cNvPr id="18" name="TextBox 17"/>
           <p:cNvSpPr txBox="1"/>
           <p:nvPr/>
         </p:nvSpPr>
         <p:spPr>
           <a:xfrm>
-            <a:off x="8046720" y="4160519"/>
-            <a:ext cx="3566160" cy="493776"/>
+            <a:off x="777240" y="5093207"/>
+            <a:ext cx="3931920" cy="713232"/>
           </a:xfrm>
           <a:prstGeom prst="rect">
             <a:avLst/>
@@ -12687,27 +13538,92 @@
               </a:lnSpc>
             </a:pPr>
             <a:r>
-              <a:rPr sz="1500" b="0">
-                <a:solidFill>
-                  <a:srgbClr val="0F766E"/>
-                </a:solidFill>
-                <a:latin typeface="Arial"/>
-              </a:rPr>
-              <a:t>6.5 s</a:t>
-            </a:r>
-          </a:p>
-        </p:txBody>
-      </p:sp>
-      <p:sp>
-        <p:nvSpPr>
-          <p:cNvPr id="25" name="TextBox 24"/>
+              <a:rPr sz="1500" b="1">
+                <a:solidFill>
+                  <a:srgbClr val="0F172A"/>
+                </a:solidFill>
+                <a:latin typeface="Arial"/>
+              </a:rPr>
+              <a:t>“What does it cost?”</a:t>
+            </a:r>
+          </a:p>
+        </p:txBody>
+      </p:sp>
+      <p:sp>
+        <p:nvSpPr>
+          <p:cNvPr id="19" name="TextBox 18"/>
           <p:cNvSpPr txBox="1"/>
           <p:nvPr/>
         </p:nvSpPr>
         <p:spPr>
           <a:xfrm>
-            <a:off x="548640" y="5897880"/>
-            <a:ext cx="11064240" cy="457200"/>
+            <a:off x="4754880" y="5093207"/>
+            <a:ext cx="6766560" cy="713232"/>
+          </a:xfrm>
+          <a:prstGeom prst="rect">
+            <a:avLst/>
+          </a:prstGeom>
+          <a:noFill/>
+        </p:spPr>
+        <p:txBody>
+          <a:bodyPr wrap="square" lIns="73152" rIns="73152" tIns="36576" bIns="36576" anchor="ctr">
+            <a:spAutoFit/>
+          </a:bodyPr>
+          <a:lstStyle/>
+          <a:p>
+            <a:pPr algn="l">
+              <a:lnSpc>
+                <a:spcPct val="110000"/>
+              </a:lnSpc>
+            </a:pPr>
+            <a:r>
+              <a:rPr sz="1400" b="0">
+                <a:solidFill>
+                  <a:srgbClr val="475569"/>
+                </a:solidFill>
+                <a:latin typeface="Arial"/>
+              </a:rPr>
+              <a:t>Every run shows its cost, and budgets block new runs at a limit. We'd agree a budget in the scoping session and track cost per useful investigation.</a:t>
+            </a:r>
+          </a:p>
+        </p:txBody>
+      </p:sp>
+    </p:spTree>
+  </p:cSld>
+  <p:clrMapOvr>
+    <a:masterClrMapping/>
+  </p:clrMapOvr>
+</p:sld>
+</file>
+
+<file path=ppt/slides/slide17.xml><?xml version="1.0" encoding="utf-8"?>
+<p:sld xmlns:a="http://schemas.openxmlformats.org/drawingml/2006/main" xmlns:p="http://schemas.openxmlformats.org/presentationml/2006/main" xmlns:r="http://schemas.openxmlformats.org/officeDocument/2006/relationships">
+  <p:cSld>
+    <p:bg>
+      <p:bgPr>
+        <a:solidFill>
+          <a:srgbClr val="F8FAFC"/>
+        </a:solidFill>
+        <a:effectLst/>
+      </p:bgPr>
+    </p:bg>
+    <p:spTree>
+      <p:nvGrpSpPr>
+        <p:cNvPr id="1" name=""/>
+        <p:cNvGrpSpPr/>
+        <p:nvPr/>
+      </p:nvGrpSpPr>
+      <p:grpSpPr/>
+      <p:sp>
+        <p:nvSpPr>
+          <p:cNvPr id="2" name="TextBox 1"/>
+          <p:cNvSpPr txBox="1"/>
+          <p:nvPr/>
+        </p:nvSpPr>
+        <p:spPr>
+          <a:xfrm>
+            <a:off x="548640" y="320040"/>
+            <a:ext cx="7315200" cy="274320"/>
           </a:xfrm>
           <a:prstGeom prst="rect">
             <a:avLst/>
@@ -12726,13 +13642,946 @@
               </a:lnSpc>
             </a:pPr>
             <a:r>
+              <a:rPr sz="1000" b="1">
+                <a:solidFill>
+                  <a:srgbClr val="4F46E5"/>
+                </a:solidFill>
+                <a:latin typeface="Arial"/>
+              </a:rPr>
+              <a:t>APPENDIX</a:t>
+            </a:r>
+          </a:p>
+        </p:txBody>
+      </p:sp>
+      <p:sp>
+        <p:nvSpPr>
+          <p:cNvPr id="3" name="TextBox 2"/>
+          <p:cNvSpPr txBox="1"/>
+          <p:nvPr/>
+        </p:nvSpPr>
+        <p:spPr>
+          <a:xfrm>
+            <a:off x="9784080" y="320040"/>
+            <a:ext cx="1828800" cy="274320"/>
+          </a:xfrm>
+          <a:prstGeom prst="rect">
+            <a:avLst/>
+          </a:prstGeom>
+          <a:noFill/>
+        </p:spPr>
+        <p:txBody>
+          <a:bodyPr wrap="square" lIns="73152" rIns="73152" tIns="36576" bIns="36576" anchor="t">
+            <a:spAutoFit/>
+          </a:bodyPr>
+          <a:lstStyle/>
+          <a:p>
+            <a:pPr algn="r">
+              <a:lnSpc>
+                <a:spcPct val="110000"/>
+              </a:lnSpc>
+            </a:pPr>
+            <a:r>
+              <a:rPr sz="1000" b="0">
+                <a:solidFill>
+                  <a:srgbClr val="94A3B8"/>
+                </a:solidFill>
+                <a:latin typeface="Arial"/>
+              </a:rPr>
+              <a:t>APPENDIX C</a:t>
+            </a:r>
+          </a:p>
+        </p:txBody>
+      </p:sp>
+      <p:sp>
+        <p:nvSpPr>
+          <p:cNvPr id="4" name="TextBox 3"/>
+          <p:cNvSpPr txBox="1"/>
+          <p:nvPr/>
+        </p:nvSpPr>
+        <p:spPr>
+          <a:xfrm>
+            <a:off x="548640" y="658368"/>
+            <a:ext cx="11064240" cy="731520"/>
+          </a:xfrm>
+          <a:prstGeom prst="rect">
+            <a:avLst/>
+          </a:prstGeom>
+          <a:noFill/>
+        </p:spPr>
+        <p:txBody>
+          <a:bodyPr wrap="square" lIns="73152" rIns="73152" tIns="36576" bIns="36576" anchor="t">
+            <a:spAutoFit/>
+          </a:bodyPr>
+          <a:lstStyle/>
+          <a:p>
+            <a:pPr algn="l">
+              <a:lnSpc>
+                <a:spcPct val="110000"/>
+              </a:lnSpc>
+            </a:pPr>
+            <a:r>
+              <a:rPr sz="3200" b="1">
+                <a:solidFill>
+                  <a:srgbClr val="0F172A"/>
+                </a:solidFill>
+                <a:latin typeface="Arial"/>
+              </a:rPr>
+              <a:t>Measured results</a:t>
+            </a:r>
+          </a:p>
+        </p:txBody>
+      </p:sp>
+      <p:sp>
+        <p:nvSpPr>
+          <p:cNvPr id="5" name="TextBox 4"/>
+          <p:cNvSpPr txBox="1"/>
+          <p:nvPr/>
+        </p:nvSpPr>
+        <p:spPr>
+          <a:xfrm>
+            <a:off x="548640" y="1371600"/>
+            <a:ext cx="11064240" cy="457200"/>
+          </a:xfrm>
+          <a:prstGeom prst="rect">
+            <a:avLst/>
+          </a:prstGeom>
+          <a:noFill/>
+        </p:spPr>
+        <p:txBody>
+          <a:bodyPr wrap="square" lIns="73152" rIns="73152" tIns="36576" bIns="36576" anchor="t">
+            <a:spAutoFit/>
+          </a:bodyPr>
+          <a:lstStyle/>
+          <a:p>
+            <a:pPr algn="l">
+              <a:lnSpc>
+                <a:spcPct val="110000"/>
+              </a:lnSpc>
+            </a:pPr>
+            <a:r>
+              <a:rPr sz="1700" b="0">
+                <a:solidFill>
+                  <a:srgbClr val="475569"/>
+                </a:solidFill>
+                <a:latin typeface="Arial"/>
+              </a:rPr>
+              <a:t>The same Redis outage, measured both ways.</a:t>
+            </a:r>
+          </a:p>
+        </p:txBody>
+      </p:sp>
+      <p:sp>
+        <p:nvSpPr>
+          <p:cNvPr id="6" name="TextBox 5"/>
+          <p:cNvSpPr txBox="1"/>
+          <p:nvPr/>
+        </p:nvSpPr>
+        <p:spPr>
+          <a:xfrm>
+            <a:off x="777240" y="1965960"/>
+            <a:ext cx="3474720" cy="320040"/>
+          </a:xfrm>
+          <a:prstGeom prst="rect">
+            <a:avLst/>
+          </a:prstGeom>
+          <a:noFill/>
+        </p:spPr>
+        <p:txBody>
+          <a:bodyPr wrap="square" lIns="73152" rIns="73152" tIns="36576" bIns="36576" anchor="ctr">
+            <a:spAutoFit/>
+          </a:bodyPr>
+          <a:lstStyle/>
+          <a:p>
+            <a:pPr algn="l">
+              <a:lnSpc>
+                <a:spcPct val="110000"/>
+              </a:lnSpc>
+            </a:pPr>
+            <a:r>
+              <a:rPr sz="1100" b="1">
+                <a:solidFill>
+                  <a:srgbClr val="94A3B8"/>
+                </a:solidFill>
+                <a:latin typeface="Arial"/>
+              </a:rPr>
+              <a:t/>
+            </a:r>
+          </a:p>
+        </p:txBody>
+      </p:sp>
+      <p:sp>
+        <p:nvSpPr>
+          <p:cNvPr id="7" name="TextBox 6"/>
+          <p:cNvSpPr txBox="1"/>
+          <p:nvPr/>
+        </p:nvSpPr>
+        <p:spPr>
+          <a:xfrm>
+            <a:off x="4343400" y="1965960"/>
+            <a:ext cx="3657600" cy="320040"/>
+          </a:xfrm>
+          <a:prstGeom prst="rect">
+            <a:avLst/>
+          </a:prstGeom>
+          <a:noFill/>
+        </p:spPr>
+        <p:txBody>
+          <a:bodyPr wrap="square" lIns="73152" rIns="73152" tIns="36576" bIns="36576" anchor="ctr">
+            <a:spAutoFit/>
+          </a:bodyPr>
+          <a:lstStyle/>
+          <a:p>
+            <a:pPr algn="l">
+              <a:lnSpc>
+                <a:spcPct val="110000"/>
+              </a:lnSpc>
+            </a:pPr>
+            <a:r>
+              <a:rPr sz="1100" b="1">
+                <a:solidFill>
+                  <a:srgbClr val="94A3B8"/>
+                </a:solidFill>
+                <a:latin typeface="Arial"/>
+              </a:rPr>
+              <a:t>Liveness checks Redis (bad)</a:t>
+            </a:r>
+          </a:p>
+        </p:txBody>
+      </p:sp>
+      <p:sp>
+        <p:nvSpPr>
+          <p:cNvPr id="8" name="TextBox 7"/>
+          <p:cNvSpPr txBox="1"/>
+          <p:nvPr/>
+        </p:nvSpPr>
+        <p:spPr>
+          <a:xfrm>
+            <a:off x="8046720" y="1965960"/>
+            <a:ext cx="3566160" cy="320040"/>
+          </a:xfrm>
+          <a:prstGeom prst="rect">
+            <a:avLst/>
+          </a:prstGeom>
+          <a:noFill/>
+        </p:spPr>
+        <p:txBody>
+          <a:bodyPr wrap="square" lIns="73152" rIns="73152" tIns="36576" bIns="36576" anchor="ctr">
+            <a:spAutoFit/>
+          </a:bodyPr>
+          <a:lstStyle/>
+          <a:p>
+            <a:pPr algn="l">
+              <a:lnSpc>
+                <a:spcPct val="110000"/>
+              </a:lnSpc>
+            </a:pPr>
+            <a:r>
+              <a:rPr sz="1100" b="1">
+                <a:solidFill>
+                  <a:srgbClr val="94A3B8"/>
+                </a:solidFill>
+                <a:latin typeface="Arial"/>
+              </a:rPr>
+              <a:t>Liveness checks the process (fix)</a:t>
+            </a:r>
+          </a:p>
+        </p:txBody>
+      </p:sp>
+      <p:sp>
+        <p:nvSpPr>
+          <p:cNvPr id="9" name="Rounded Rectangle 8"/>
+          <p:cNvSpPr/>
+          <p:nvPr/>
+        </p:nvSpPr>
+        <p:spPr>
+          <a:xfrm>
+            <a:off x="548640" y="2331720"/>
+            <a:ext cx="11091672" cy="530352"/>
+          </a:xfrm>
+          <a:prstGeom prst="roundRect">
+            <a:avLst>
+              <a:gd name="adj" fmla="val 6000"/>
+            </a:avLst>
+          </a:prstGeom>
+          <a:solidFill>
+            <a:srgbClr val="FFFFFF"/>
+          </a:solidFill>
+          <a:ln w="12700">
+            <a:solidFill>
+              <a:srgbClr val="E2E8F0"/>
+            </a:solidFill>
+          </a:ln>
+          <a:effectLst/>
+        </p:spPr>
+        <p:style>
+          <a:lnRef idx="1">
+            <a:schemeClr val="accent1"/>
+          </a:lnRef>
+          <a:fillRef idx="3">
+            <a:schemeClr val="accent1"/>
+          </a:fillRef>
+          <a:effectRef idx="2">
+            <a:schemeClr val="accent1"/>
+          </a:effectRef>
+          <a:fontRef idx="minor">
+            <a:schemeClr val="lt1"/>
+          </a:fontRef>
+        </p:style>
+        <p:txBody>
+          <a:bodyPr rtlCol="0" anchor="ctr"/>
+          <a:lstStyle/>
+          <a:p>
+            <a:pPr algn="ctr"/>
+          </a:p>
+        </p:txBody>
+      </p:sp>
+      <p:sp>
+        <p:nvSpPr>
+          <p:cNvPr id="10" name="TextBox 9"/>
+          <p:cNvSpPr txBox="1"/>
+          <p:nvPr/>
+        </p:nvSpPr>
+        <p:spPr>
+          <a:xfrm>
+            <a:off x="777240" y="2350008"/>
+            <a:ext cx="3474720" cy="493776"/>
+          </a:xfrm>
+          <a:prstGeom prst="rect">
+            <a:avLst/>
+          </a:prstGeom>
+          <a:noFill/>
+        </p:spPr>
+        <p:txBody>
+          <a:bodyPr wrap="square" lIns="73152" rIns="73152" tIns="36576" bIns="36576" anchor="ctr">
+            <a:spAutoFit/>
+          </a:bodyPr>
+          <a:lstStyle/>
+          <a:p>
+            <a:pPr algn="l">
+              <a:lnSpc>
+                <a:spcPct val="110000"/>
+              </a:lnSpc>
+            </a:pPr>
+            <a:r>
+              <a:rPr sz="1500" b="1">
+                <a:solidFill>
+                  <a:srgbClr val="0F172A"/>
+                </a:solidFill>
+                <a:latin typeface="Arial"/>
+              </a:rPr>
+              <a:t>Times Kubernetes killed the healthy API</a:t>
+            </a:r>
+          </a:p>
+        </p:txBody>
+      </p:sp>
+      <p:sp>
+        <p:nvSpPr>
+          <p:cNvPr id="11" name="TextBox 10"/>
+          <p:cNvSpPr txBox="1"/>
+          <p:nvPr/>
+        </p:nvSpPr>
+        <p:spPr>
+          <a:xfrm>
+            <a:off x="4343400" y="2350008"/>
+            <a:ext cx="3657600" cy="493776"/>
+          </a:xfrm>
+          <a:prstGeom prst="rect">
+            <a:avLst/>
+          </a:prstGeom>
+          <a:noFill/>
+        </p:spPr>
+        <p:txBody>
+          <a:bodyPr wrap="square" lIns="73152" rIns="73152" tIns="36576" bIns="36576" anchor="ctr">
+            <a:spAutoFit/>
+          </a:bodyPr>
+          <a:lstStyle/>
+          <a:p>
+            <a:pPr algn="l">
+              <a:lnSpc>
+                <a:spcPct val="110000"/>
+              </a:lnSpc>
+            </a:pPr>
+            <a:r>
+              <a:rPr sz="1500" b="0">
+                <a:solidFill>
+                  <a:srgbClr val="B91C1C"/>
+                </a:solidFill>
+                <a:latin typeface="Arial"/>
+              </a:rPr>
+              <a:t>5 in a 5-minute outage</a:t>
+            </a:r>
+          </a:p>
+        </p:txBody>
+      </p:sp>
+      <p:sp>
+        <p:nvSpPr>
+          <p:cNvPr id="12" name="TextBox 11"/>
+          <p:cNvSpPr txBox="1"/>
+          <p:nvPr/>
+        </p:nvSpPr>
+        <p:spPr>
+          <a:xfrm>
+            <a:off x="8046720" y="2350008"/>
+            <a:ext cx="3566160" cy="493776"/>
+          </a:xfrm>
+          <a:prstGeom prst="rect">
+            <a:avLst/>
+          </a:prstGeom>
+          <a:noFill/>
+        </p:spPr>
+        <p:txBody>
+          <a:bodyPr wrap="square" lIns="73152" rIns="73152" tIns="36576" bIns="36576" anchor="ctr">
+            <a:spAutoFit/>
+          </a:bodyPr>
+          <a:lstStyle/>
+          <a:p>
+            <a:pPr algn="l">
+              <a:lnSpc>
+                <a:spcPct val="110000"/>
+              </a:lnSpc>
+            </a:pPr>
+            <a:r>
+              <a:rPr sz="1500" b="0">
+                <a:solidFill>
+                  <a:srgbClr val="0F766E"/>
+                </a:solidFill>
+                <a:latin typeface="Arial"/>
+              </a:rPr>
+              <a:t>0</a:t>
+            </a:r>
+          </a:p>
+        </p:txBody>
+      </p:sp>
+      <p:sp>
+        <p:nvSpPr>
+          <p:cNvPr id="13" name="Rounded Rectangle 12"/>
+          <p:cNvSpPr/>
+          <p:nvPr/>
+        </p:nvSpPr>
+        <p:spPr>
+          <a:xfrm>
+            <a:off x="548640" y="2935224"/>
+            <a:ext cx="11091672" cy="530352"/>
+          </a:xfrm>
+          <a:prstGeom prst="roundRect">
+            <a:avLst>
+              <a:gd name="adj" fmla="val 6000"/>
+            </a:avLst>
+          </a:prstGeom>
+          <a:solidFill>
+            <a:srgbClr val="FFFFFF"/>
+          </a:solidFill>
+          <a:ln w="12700">
+            <a:solidFill>
+              <a:srgbClr val="E2E8F0"/>
+            </a:solidFill>
+          </a:ln>
+          <a:effectLst/>
+        </p:spPr>
+        <p:style>
+          <a:lnRef idx="1">
+            <a:schemeClr val="accent1"/>
+          </a:lnRef>
+          <a:fillRef idx="3">
+            <a:schemeClr val="accent1"/>
+          </a:fillRef>
+          <a:effectRef idx="2">
+            <a:schemeClr val="accent1"/>
+          </a:effectRef>
+          <a:fontRef idx="minor">
+            <a:schemeClr val="lt1"/>
+          </a:fontRef>
+        </p:style>
+        <p:txBody>
+          <a:bodyPr rtlCol="0" anchor="ctr"/>
+          <a:lstStyle/>
+          <a:p>
+            <a:pPr algn="ctr"/>
+          </a:p>
+        </p:txBody>
+      </p:sp>
+      <p:sp>
+        <p:nvSpPr>
+          <p:cNvPr id="14" name="TextBox 13"/>
+          <p:cNvSpPr txBox="1"/>
+          <p:nvPr/>
+        </p:nvSpPr>
+        <p:spPr>
+          <a:xfrm>
+            <a:off x="777240" y="2953512"/>
+            <a:ext cx="3474720" cy="493776"/>
+          </a:xfrm>
+          <a:prstGeom prst="rect">
+            <a:avLst/>
+          </a:prstGeom>
+          <a:noFill/>
+        </p:spPr>
+        <p:txBody>
+          <a:bodyPr wrap="square" lIns="73152" rIns="73152" tIns="36576" bIns="36576" anchor="ctr">
+            <a:spAutoFit/>
+          </a:bodyPr>
+          <a:lstStyle/>
+          <a:p>
+            <a:pPr algn="l">
+              <a:lnSpc>
+                <a:spcPct val="110000"/>
+              </a:lnSpc>
+            </a:pPr>
+            <a:r>
+              <a:rPr sz="1500" b="1">
+                <a:solidFill>
+                  <a:srgbClr val="0F172A"/>
+                </a:solidFill>
+                <a:latin typeface="Arial"/>
+              </a:rPr>
+              <a:t>Liveness failures</a:t>
+            </a:r>
+          </a:p>
+        </p:txBody>
+      </p:sp>
+      <p:sp>
+        <p:nvSpPr>
+          <p:cNvPr id="15" name="TextBox 14"/>
+          <p:cNvSpPr txBox="1"/>
+          <p:nvPr/>
+        </p:nvSpPr>
+        <p:spPr>
+          <a:xfrm>
+            <a:off x="4343400" y="2953512"/>
+            <a:ext cx="3657600" cy="493776"/>
+          </a:xfrm>
+          <a:prstGeom prst="rect">
+            <a:avLst/>
+          </a:prstGeom>
+          <a:noFill/>
+        </p:spPr>
+        <p:txBody>
+          <a:bodyPr wrap="square" lIns="73152" rIns="73152" tIns="36576" bIns="36576" anchor="ctr">
+            <a:spAutoFit/>
+          </a:bodyPr>
+          <a:lstStyle/>
+          <a:p>
+            <a:pPr algn="l">
+              <a:lnSpc>
+                <a:spcPct val="110000"/>
+              </a:lnSpc>
+            </a:pPr>
+            <a:r>
+              <a:rPr sz="1500" b="0">
+                <a:solidFill>
+                  <a:srgbClr val="B91C1C"/>
+                </a:solidFill>
+                <a:latin typeface="Arial"/>
+              </a:rPr>
+              <a:t>Yes</a:t>
+            </a:r>
+          </a:p>
+        </p:txBody>
+      </p:sp>
+      <p:sp>
+        <p:nvSpPr>
+          <p:cNvPr id="16" name="TextBox 15"/>
+          <p:cNvSpPr txBox="1"/>
+          <p:nvPr/>
+        </p:nvSpPr>
+        <p:spPr>
+          <a:xfrm>
+            <a:off x="8046720" y="2953512"/>
+            <a:ext cx="3566160" cy="493776"/>
+          </a:xfrm>
+          <a:prstGeom prst="rect">
+            <a:avLst/>
+          </a:prstGeom>
+          <a:noFill/>
+        </p:spPr>
+        <p:txBody>
+          <a:bodyPr wrap="square" lIns="73152" rIns="73152" tIns="36576" bIns="36576" anchor="ctr">
+            <a:spAutoFit/>
+          </a:bodyPr>
+          <a:lstStyle/>
+          <a:p>
+            <a:pPr algn="l">
+              <a:lnSpc>
+                <a:spcPct val="110000"/>
+              </a:lnSpc>
+            </a:pPr>
+            <a:r>
+              <a:rPr sz="1500" b="0">
+                <a:solidFill>
+                  <a:srgbClr val="0F766E"/>
+                </a:solidFill>
+                <a:latin typeface="Arial"/>
+              </a:rPr>
+              <a:t>None</a:t>
+            </a:r>
+          </a:p>
+        </p:txBody>
+      </p:sp>
+      <p:sp>
+        <p:nvSpPr>
+          <p:cNvPr id="17" name="Rounded Rectangle 16"/>
+          <p:cNvSpPr/>
+          <p:nvPr/>
+        </p:nvSpPr>
+        <p:spPr>
+          <a:xfrm>
+            <a:off x="548640" y="3538728"/>
+            <a:ext cx="11091672" cy="530352"/>
+          </a:xfrm>
+          <a:prstGeom prst="roundRect">
+            <a:avLst>
+              <a:gd name="adj" fmla="val 6000"/>
+            </a:avLst>
+          </a:prstGeom>
+          <a:solidFill>
+            <a:srgbClr val="FFFFFF"/>
+          </a:solidFill>
+          <a:ln w="12700">
+            <a:solidFill>
+              <a:srgbClr val="E2E8F0"/>
+            </a:solidFill>
+          </a:ln>
+          <a:effectLst/>
+        </p:spPr>
+        <p:style>
+          <a:lnRef idx="1">
+            <a:schemeClr val="accent1"/>
+          </a:lnRef>
+          <a:fillRef idx="3">
+            <a:schemeClr val="accent1"/>
+          </a:fillRef>
+          <a:effectRef idx="2">
+            <a:schemeClr val="accent1"/>
+          </a:effectRef>
+          <a:fontRef idx="minor">
+            <a:schemeClr val="lt1"/>
+          </a:fontRef>
+        </p:style>
+        <p:txBody>
+          <a:bodyPr rtlCol="0" anchor="ctr"/>
+          <a:lstStyle/>
+          <a:p>
+            <a:pPr algn="ctr"/>
+          </a:p>
+        </p:txBody>
+      </p:sp>
+      <p:sp>
+        <p:nvSpPr>
+          <p:cNvPr id="18" name="TextBox 17"/>
+          <p:cNvSpPr txBox="1"/>
+          <p:nvPr/>
+        </p:nvSpPr>
+        <p:spPr>
+          <a:xfrm>
+            <a:off x="777240" y="3557016"/>
+            <a:ext cx="3474720" cy="493776"/>
+          </a:xfrm>
+          <a:prstGeom prst="rect">
+            <a:avLst/>
+          </a:prstGeom>
+          <a:noFill/>
+        </p:spPr>
+        <p:txBody>
+          <a:bodyPr wrap="square" lIns="73152" rIns="73152" tIns="36576" bIns="36576" anchor="ctr">
+            <a:spAutoFit/>
+          </a:bodyPr>
+          <a:lstStyle/>
+          <a:p>
+            <a:pPr algn="l">
+              <a:lnSpc>
+                <a:spcPct val="110000"/>
+              </a:lnSpc>
+            </a:pPr>
+            <a:r>
+              <a:rPr sz="1500" b="1">
+                <a:solidFill>
+                  <a:srgbClr val="0F172A"/>
+                </a:solidFill>
+                <a:latin typeface="Arial"/>
+              </a:rPr>
+              <a:t>Grafana restart alert</a:t>
+            </a:r>
+          </a:p>
+        </p:txBody>
+      </p:sp>
+      <p:sp>
+        <p:nvSpPr>
+          <p:cNvPr id="19" name="TextBox 18"/>
+          <p:cNvSpPr txBox="1"/>
+          <p:nvPr/>
+        </p:nvSpPr>
+        <p:spPr>
+          <a:xfrm>
+            <a:off x="4343400" y="3557016"/>
+            <a:ext cx="3657600" cy="493776"/>
+          </a:xfrm>
+          <a:prstGeom prst="rect">
+            <a:avLst/>
+          </a:prstGeom>
+          <a:noFill/>
+        </p:spPr>
+        <p:txBody>
+          <a:bodyPr wrap="square" lIns="73152" rIns="73152" tIns="36576" bIns="36576" anchor="ctr">
+            <a:spAutoFit/>
+          </a:bodyPr>
+          <a:lstStyle/>
+          <a:p>
+            <a:pPr algn="l">
+              <a:lnSpc>
+                <a:spcPct val="110000"/>
+              </a:lnSpc>
+            </a:pPr>
+            <a:r>
+              <a:rPr sz="1500" b="0">
+                <a:solidFill>
+                  <a:srgbClr val="B91C1C"/>
+                </a:solidFill>
+                <a:latin typeface="Arial"/>
+              </a:rPr>
+              <a:t>Fired at +3 minutes</a:t>
+            </a:r>
+          </a:p>
+        </p:txBody>
+      </p:sp>
+      <p:sp>
+        <p:nvSpPr>
+          <p:cNvPr id="20" name="TextBox 19"/>
+          <p:cNvSpPr txBox="1"/>
+          <p:nvPr/>
+        </p:nvSpPr>
+        <p:spPr>
+          <a:xfrm>
+            <a:off x="8046720" y="3557016"/>
+            <a:ext cx="3566160" cy="493776"/>
+          </a:xfrm>
+          <a:prstGeom prst="rect">
+            <a:avLst/>
+          </a:prstGeom>
+          <a:noFill/>
+        </p:spPr>
+        <p:txBody>
+          <a:bodyPr wrap="square" lIns="73152" rIns="73152" tIns="36576" bIns="36576" anchor="ctr">
+            <a:spAutoFit/>
+          </a:bodyPr>
+          <a:lstStyle/>
+          <a:p>
+            <a:pPr algn="l">
+              <a:lnSpc>
+                <a:spcPct val="110000"/>
+              </a:lnSpc>
+            </a:pPr>
+            <a:r>
+              <a:rPr sz="1500" b="0">
+                <a:solidFill>
+                  <a:srgbClr val="0F766E"/>
+                </a:solidFill>
+                <a:latin typeface="Arial"/>
+              </a:rPr>
+              <a:t>Stayed Normal</a:t>
+            </a:r>
+          </a:p>
+        </p:txBody>
+      </p:sp>
+      <p:sp>
+        <p:nvSpPr>
+          <p:cNvPr id="21" name="Rounded Rectangle 20"/>
+          <p:cNvSpPr/>
+          <p:nvPr/>
+        </p:nvSpPr>
+        <p:spPr>
+          <a:xfrm>
+            <a:off x="548640" y="4142231"/>
+            <a:ext cx="11091672" cy="530352"/>
+          </a:xfrm>
+          <a:prstGeom prst="roundRect">
+            <a:avLst>
+              <a:gd name="adj" fmla="val 6000"/>
+            </a:avLst>
+          </a:prstGeom>
+          <a:solidFill>
+            <a:srgbClr val="FFFFFF"/>
+          </a:solidFill>
+          <a:ln w="12700">
+            <a:solidFill>
+              <a:srgbClr val="E2E8F0"/>
+            </a:solidFill>
+          </a:ln>
+          <a:effectLst/>
+        </p:spPr>
+        <p:style>
+          <a:lnRef idx="1">
+            <a:schemeClr val="accent1"/>
+          </a:lnRef>
+          <a:fillRef idx="3">
+            <a:schemeClr val="accent1"/>
+          </a:fillRef>
+          <a:effectRef idx="2">
+            <a:schemeClr val="accent1"/>
+          </a:effectRef>
+          <a:fontRef idx="minor">
+            <a:schemeClr val="lt1"/>
+          </a:fontRef>
+        </p:style>
+        <p:txBody>
+          <a:bodyPr rtlCol="0" anchor="ctr"/>
+          <a:lstStyle/>
+          <a:p>
+            <a:pPr algn="ctr"/>
+          </a:p>
+        </p:txBody>
+      </p:sp>
+      <p:sp>
+        <p:nvSpPr>
+          <p:cNvPr id="22" name="TextBox 21"/>
+          <p:cNvSpPr txBox="1"/>
+          <p:nvPr/>
+        </p:nvSpPr>
+        <p:spPr>
+          <a:xfrm>
+            <a:off x="777240" y="4160519"/>
+            <a:ext cx="3474720" cy="493776"/>
+          </a:xfrm>
+          <a:prstGeom prst="rect">
+            <a:avLst/>
+          </a:prstGeom>
+          <a:noFill/>
+        </p:spPr>
+        <p:txBody>
+          <a:bodyPr wrap="square" lIns="73152" rIns="73152" tIns="36576" bIns="36576" anchor="ctr">
+            <a:spAutoFit/>
+          </a:bodyPr>
+          <a:lstStyle/>
+          <a:p>
+            <a:pPr algn="l">
+              <a:lnSpc>
+                <a:spcPct val="110000"/>
+              </a:lnSpc>
+            </a:pPr>
+            <a:r>
+              <a:rPr sz="1500" b="1">
+                <a:solidFill>
+                  <a:srgbClr val="0F172A"/>
+                </a:solidFill>
+                <a:latin typeface="Arial"/>
+              </a:rPr>
+              <a:t>API back after Redis returned</a:t>
+            </a:r>
+          </a:p>
+        </p:txBody>
+      </p:sp>
+      <p:sp>
+        <p:nvSpPr>
+          <p:cNvPr id="23" name="TextBox 22"/>
+          <p:cNvSpPr txBox="1"/>
+          <p:nvPr/>
+        </p:nvSpPr>
+        <p:spPr>
+          <a:xfrm>
+            <a:off x="4343400" y="4160519"/>
+            <a:ext cx="3657600" cy="493776"/>
+          </a:xfrm>
+          <a:prstGeom prst="rect">
+            <a:avLst/>
+          </a:prstGeom>
+          <a:noFill/>
+        </p:spPr>
+        <p:txBody>
+          <a:bodyPr wrap="square" lIns="73152" rIns="73152" tIns="36576" bIns="36576" anchor="ctr">
+            <a:spAutoFit/>
+          </a:bodyPr>
+          <a:lstStyle/>
+          <a:p>
+            <a:pPr algn="l">
+              <a:lnSpc>
+                <a:spcPct val="110000"/>
+              </a:lnSpc>
+            </a:pPr>
+            <a:r>
+              <a:rPr sz="1500" b="0">
+                <a:solidFill>
+                  <a:srgbClr val="B91C1C"/>
+                </a:solidFill>
+                <a:latin typeface="Arial"/>
+              </a:rPr>
+              <a:t>4.8 s to 3.6 min (restart back-off)</a:t>
+            </a:r>
+          </a:p>
+        </p:txBody>
+      </p:sp>
+      <p:sp>
+        <p:nvSpPr>
+          <p:cNvPr id="24" name="TextBox 23"/>
+          <p:cNvSpPr txBox="1"/>
+          <p:nvPr/>
+        </p:nvSpPr>
+        <p:spPr>
+          <a:xfrm>
+            <a:off x="8046720" y="4160519"/>
+            <a:ext cx="3566160" cy="493776"/>
+          </a:xfrm>
+          <a:prstGeom prst="rect">
+            <a:avLst/>
+          </a:prstGeom>
+          <a:noFill/>
+        </p:spPr>
+        <p:txBody>
+          <a:bodyPr wrap="square" lIns="73152" rIns="73152" tIns="36576" bIns="36576" anchor="ctr">
+            <a:spAutoFit/>
+          </a:bodyPr>
+          <a:lstStyle/>
+          <a:p>
+            <a:pPr algn="l">
+              <a:lnSpc>
+                <a:spcPct val="110000"/>
+              </a:lnSpc>
+            </a:pPr>
+            <a:r>
+              <a:rPr sz="1500" b="0">
+                <a:solidFill>
+                  <a:srgbClr val="0F766E"/>
+                </a:solidFill>
+                <a:latin typeface="Arial"/>
+              </a:rPr>
+              <a:t>6.5 s</a:t>
+            </a:r>
+          </a:p>
+        </p:txBody>
+      </p:sp>
+      <p:sp>
+        <p:nvSpPr>
+          <p:cNvPr id="25" name="TextBox 24"/>
+          <p:cNvSpPr txBox="1"/>
+          <p:nvPr/>
+        </p:nvSpPr>
+        <p:spPr>
+          <a:xfrm>
+            <a:off x="548640" y="5897880"/>
+            <a:ext cx="11064240" cy="457200"/>
+          </a:xfrm>
+          <a:prstGeom prst="rect">
+            <a:avLst/>
+          </a:prstGeom>
+          <a:noFill/>
+        </p:spPr>
+        <p:txBody>
+          <a:bodyPr wrap="square" lIns="73152" rIns="73152" tIns="36576" bIns="36576" anchor="t">
+            <a:spAutoFit/>
+          </a:bodyPr>
+          <a:lstStyle/>
+          <a:p>
+            <a:pPr algn="l">
+              <a:lnSpc>
+                <a:spcPct val="110000"/>
+              </a:lnSpc>
+            </a:pPr>
+            <a:r>
               <a:rPr sz="1100" b="0">
                 <a:solidFill>
                   <a:srgbClr val="94A3B8"/>
                 </a:solidFill>
                 <a:latin typeface="Arial"/>
               </a:rPr>
-              <a:t>Measured on 2026-10-24 on a single-node kind cluster. With the bad check, recovery time depends on where the restart back-off is when Redis returns (10 s, doubling up to 5 minutes).</a:t>
+              <a:t>Measured on 2026-10-24 and 2026-10-25 on a single-node kind cluster. With the bad check, recovery waits on Kubernetes' restart back-off (10 s, doubling up to 5 minutes), so it depends on how long the outage lasted.</a:t>
             </a:r>
           </a:p>
         </p:txBody>
@@ -12836,7 +14685,7 @@
                 </a:solidFill>
                 <a:latin typeface="Arial"/>
               </a:rPr>
-              <a:t>02 / 12</a:t>
+              <a:t>02 / 13</a:t>
             </a:r>
           </a:p>
         </p:txBody>
@@ -13710,7 +15559,7 @@
                 </a:solidFill>
                 <a:latin typeface="Arial"/>
               </a:rPr>
-              <a:t>03 / 12</a:t>
+              <a:t>03 / 13</a:t>
             </a:r>
           </a:p>
         </p:txBody>
@@ -14950,7 +16799,7 @@
                 </a:solidFill>
                 <a:latin typeface="Arial"/>
               </a:rPr>
-              <a:t>04 / 12</a:t>
+              <a:t>04 / 13</a:t>
             </a:r>
           </a:p>
         </p:txBody>
@@ -15028,7 +16877,7 @@
                 </a:solidFill>
                 <a:latin typeface="Arial"/>
               </a:rPr>
-              <a:t>Every team's agent is a good idea. The risk sits between them.</a:t>
+              <a:t>Each team's agent makes sense on its own. Nobody manages them together.</a:t>
             </a:r>
           </a:p>
         </p:txBody>
@@ -15159,7 +17008,7 @@
                 </a:solidFill>
                 <a:latin typeface="Arial"/>
               </a:rPr>
-              <a:t>NO INVENTORY</a:t>
+              <a:t>WHO OWNS IT?</a:t>
             </a:r>
           </a:p>
         </p:txBody>
@@ -15198,7 +17047,7 @@
                 </a:solidFill>
                 <a:latin typeface="Arial"/>
               </a:rPr>
-              <a:t>Who owns it?</a:t>
+              <a:t>Ownership</a:t>
             </a:r>
           </a:p>
         </p:txBody>
@@ -15368,7 +17217,7 @@
                 </a:solidFill>
                 <a:latin typeface="Arial"/>
               </a:rPr>
-              <a:t>INCONSISTENT ACCESS</a:t>
+              <a:t>WHAT CAN IT TOUCH?</a:t>
             </a:r>
           </a:p>
         </p:txBody>
@@ -15407,7 +17256,7 @@
                 </a:solidFill>
                 <a:latin typeface="Arial"/>
               </a:rPr>
-              <a:t>What can it touch?</a:t>
+              <a:t>Access</a:t>
             </a:r>
           </a:p>
         </p:txBody>
@@ -15577,7 +17426,7 @@
                 </a:solidFill>
                 <a:latin typeface="Arial"/>
               </a:rPr>
-              <a:t>NO SINGLE RECORD</a:t>
+              <a:t>WHAT DID IT DO?</a:t>
             </a:r>
           </a:p>
         </p:txBody>
@@ -15616,7 +17465,7 @@
                 </a:solidFill>
                 <a:latin typeface="Arial"/>
               </a:rPr>
-              <a:t>What did it do?</a:t>
+              <a:t>Auditability</a:t>
             </a:r>
           </a:p>
         </p:txBody>
@@ -15717,13 +17566,13 @@
               <a:t>40%+</a:t>
             </a:r>
             <a:r>
-              <a:rPr sz="1600" b="0">
+              <a:rPr sz="1700" b="1">
                 <a:solidFill>
                   <a:srgbClr val="0F172A"/>
                 </a:solidFill>
                 <a:latin typeface="Arial"/>
               </a:rPr>
-              <a:t>   of agentic AI projects will be cancelled by 2027, says Gartner, for governance, unclear value and cost.</a:t>
+              <a:t>   of agentic AI projects will be canceled by the end of 2027.</a:t>
             </a:r>
           </a:p>
           <a:p>
@@ -15733,13 +17582,13 @@
               </a:lnSpc>
             </a:pPr>
             <a:r>
-              <a:rPr sz="1000" b="0">
-                <a:solidFill>
-                  <a:srgbClr val="94A3B8"/>
-                </a:solidFill>
-                <a:latin typeface="Arial"/>
-              </a:rPr>
-              <a:t>Cited in Komodor's KAOP launch, September 2026</a:t>
+              <a:rPr sz="1200" b="0">
+                <a:solidFill>
+                  <a:srgbClr val="475569"/>
+                </a:solidFill>
+                <a:latin typeface="Arial"/>
+              </a:rPr>
+              <a:t>Escalating costs, unclear business value or inadequate risk controls.  Gartner, Inc., cited in Komodor's KAOP launch.</a:t>
             </a:r>
           </a:p>
         </p:txBody>
@@ -15807,7 +17656,7 @@
                 </a:solidFill>
                 <a:latin typeface="Arial"/>
               </a:rPr>
-              <a:t>Which of these three hurts your team most today?</a:t>
+              <a:t>Ownership, access or auditability: which hurts your team most today?</a:t>
             </a:r>
           </a:p>
         </p:txBody>
@@ -16491,7 +18340,7 @@
                 </a:solidFill>
                 <a:latin typeface="Arial"/>
               </a:rPr>
-              <a:t>05 / 12</a:t>
+              <a:t>05 / 13</a:t>
             </a:r>
           </a:p>
         </p:txBody>
@@ -16569,7 +18418,7 @@
                 </a:solidFill>
                 <a:latin typeface="Arial"/>
               </a:rPr>
-              <a:t>One platform for Komodor's agents and your own.</a:t>
+              <a:t>The context, memory and governance Komodor built for its own agents, ready for yours from day one.</a:t>
             </a:r>
           </a:p>
         </p:txBody>
@@ -16778,7 +18627,7 @@
                 </a:solidFill>
                 <a:latin typeface="Arial"/>
               </a:rPr>
-              <a:t>Komodor-built agents, including Kubernetes RCA from Klaudia. Or import yours.</a:t>
+              <a:t>Pre-built workflows for AI SRE, software ops and cost. 50+ Komodor agents. Or import yours.</a:t>
             </a:r>
           </a:p>
         </p:txBody>
@@ -17418,8 +19267,8 @@
         </p:nvSpPr>
         <p:spPr>
           <a:xfrm>
-            <a:off x="548640" y="5852160"/>
-            <a:ext cx="11091672" cy="603504"/>
+            <a:off x="548640" y="5715000"/>
+            <a:ext cx="11091672" cy="749808"/>
           </a:xfrm>
           <a:prstGeom prst="roundRect">
             <a:avLst>
@@ -17464,16 +19313,43 @@
                 </a:solidFill>
                 <a:latin typeface="Arial"/>
               </a:rPr>
-              <a:t>FOUNDATION   </a:t>
-            </a:r>
-            <a:r>
-              <a:rPr sz="1600" b="0">
+              <a:t>KOMODOR'S AI SRE IN PRODUCTION WITH      </a:t>
+            </a:r>
+            <a:r>
+              <a:rPr sz="2000" b="1">
                 <a:solidFill>
                   <a:srgbClr val="FFFFFF"/>
                 </a:solidFill>
                 <a:latin typeface="Arial"/>
               </a:rPr>
-              <a:t>Klaudia's Kubernetes expertise, packaged as agents your teams deploy in minutes.</a:t>
+              <a:t>NEBIUS        </a:t>
+            </a:r>
+            <a:r>
+              <a:rPr sz="2000" b="1">
+                <a:solidFill>
+                  <a:srgbClr val="FFFFFF"/>
+                </a:solidFill>
+                <a:latin typeface="Arial"/>
+              </a:rPr>
+              <a:t>DELL        </a:t>
+            </a:r>
+            <a:r>
+              <a:rPr sz="2000" b="1">
+                <a:solidFill>
+                  <a:srgbClr val="FFFFFF"/>
+                </a:solidFill>
+                <a:latin typeface="Arial"/>
+              </a:rPr>
+              <a:t>CISCO        </a:t>
+            </a:r>
+            <a:r>
+              <a:rPr sz="2000" b="1">
+                <a:solidFill>
+                  <a:srgbClr val="FFFFFF"/>
+                </a:solidFill>
+                <a:latin typeface="Arial"/>
+              </a:rPr>
+              <a:t>PRUDENTIAL</a:t>
             </a:r>
           </a:p>
         </p:txBody>
@@ -18287,7 +20163,7 @@
                 </a:solidFill>
                 <a:latin typeface="Arial"/>
               </a:rPr>
-              <a:t>06 / 12</a:t>
+              <a:t>06 / 13</a:t>
             </a:r>
           </a:p>
         </p:txBody>
@@ -19950,7 +21826,7 @@
                 </a:solidFill>
                 <a:latin typeface="Arial"/>
               </a:rPr>
-              <a:t>Investigator</a:t>
+              <a:t>Investigators</a:t>
             </a:r>
           </a:p>
           <a:p>
@@ -19969,7 +21845,7 @@
                 </a:solidFill>
                 <a:latin typeface="Arial"/>
               </a:rPr>
-              <a:t>Reads only. No secrets, no writes.</a:t>
+              <a:t>Read only. Kubernetes and the gateway enforce it.</a:t>
             </a:r>
           </a:p>
           <a:p>
@@ -19985,7 +21861,7 @@
                 </a:solidFill>
                 <a:latin typeface="Arial"/>
               </a:rPr>
-              <a:t>GitHub agent</a:t>
+              <a:t>Remediation</a:t>
             </a:r>
           </a:p>
           <a:p>
@@ -20004,7 +21880,7 @@
                 </a:solidFill>
                 <a:latin typeface="Arial"/>
               </a:rPr>
-              <a:t>One PR, after I approve. Never merges.</a:t>
+              <a:t>Proposes fixes. Can't apply them.</a:t>
             </a:r>
           </a:p>
           <a:p>
@@ -20104,7 +21980,7 @@
                 </a:solidFill>
                 <a:latin typeface="Arial"/>
               </a:rPr>
-              <a:t>If I say an agent is read-only, I show what enforces it.</a:t>
+              <a:t>Enforced on every run. Prompts can drift; enforcement doesn't.</a:t>
             </a:r>
           </a:p>
         </p:txBody>
@@ -20388,7 +22264,7 @@
                 </a:solidFill>
                 <a:latin typeface="Arial"/>
               </a:rPr>
-              <a:t>07 / 12</a:t>
+              <a:t>07 / 13</a:t>
             </a:r>
           </a:p>
         </p:txBody>
@@ -21658,7 +23534,7 @@
                 </a:solidFill>
                 <a:latin typeface="Arial"/>
               </a:rPr>
-              <a:t>08 / 12</a:t>
+              <a:t>08 / 13</a:t>
             </a:r>
           </a:p>
         </p:txBody>
@@ -22017,7 +23893,8 @@
                 </a:solidFill>
                 <a:latin typeface="Arial"/>
               </a:rPr>
-              <a:t>K8s RCA + Grafana</a:t>
+              <a:t>K8s RCA + Grafana,
+in parallel</a:t>
             </a:r>
           </a:p>
         </p:txBody>
@@ -22136,8 +24013,8 @@
                 </a:solidFill>
                 <a:latin typeface="Arial"/>
               </a:rPr>
-              <a:t>Decides if a fix
-is needed</a:t>
+              <a:t>Proposes fixes
+with undo</a:t>
             </a:r>
           </a:p>
         </p:txBody>
@@ -22322,7 +24199,7 @@
             </a:avLst>
           </a:prstGeom>
           <a:solidFill>
-            <a:srgbClr val="EEF2FF"/>
+            <a:srgbClr val="FEF2F2"/>
           </a:solidFill>
           <a:ln>
             <a:noFill/>
@@ -22355,11 +24232,11 @@
             <a:r>
               <a:rPr sz="1600" b="1">
                 <a:solidFill>
-                  <a:srgbClr val="4F46E5"/>
-                </a:solidFill>
-                <a:latin typeface="Arial"/>
-              </a:rPr>
-              <a:t>GitHub agent</a:t>
+                  <a:srgbClr val="B91C1C"/>
+                </a:solidFill>
+                <a:latin typeface="Arial"/>
+              </a:rPr>
+              <a:t>Apply</a:t>
             </a:r>
           </a:p>
           <a:p>
@@ -22375,7 +24252,8 @@
                 </a:solidFill>
                 <a:latin typeface="Arial"/>
               </a:rPr>
-              <a:t>Opens one PR</a:t>
+              <a:t>A person today,
+an agent next</a:t>
             </a:r>
           </a:p>
         </p:txBody>
@@ -22537,7 +24415,7 @@
                 </a:solidFill>
                 <a:latin typeface="Arial"/>
               </a:rPr>
-              <a:t>From agent or person</a:t>
+              <a:t>The one-line fix</a:t>
             </a:r>
           </a:p>
         </p:txBody>
@@ -22656,7 +24534,7 @@
                 </a:solidFill>
                 <a:latin typeface="Arial"/>
               </a:rPr>
-              <a:t>Comments</a:t>
+              <a:t>Comments in ~30 s</a:t>
             </a:r>
           </a:p>
         </p:txBody>
@@ -23082,7 +24960,7 @@
                 </a:solidFill>
                 <a:latin typeface="Arial"/>
               </a:rPr>
-              <a:t>No agent changes the running cluster. Fixes go through git and a person.</a:t>
+              <a:t>Agents investigate, propose and review. People approve and change production.</a:t>
             </a:r>
           </a:p>
         </p:txBody>
@@ -23916,7 +25794,7 @@
                 </a:solidFill>
                 <a:latin typeface="Arial"/>
               </a:rPr>
-              <a:t>09 / 12</a:t>
+              <a:t>09 / 13</a:t>
             </a:r>
           </a:p>
         </p:txBody>
@@ -24482,7 +26360,7 @@
                 </a:solidFill>
                 <a:latin typeface="Arial"/>
               </a:rPr>
-              <a:t>Metrics, events,
+              <a:t>Metrics, logs,
 alerts</a:t>
             </a:r>
           </a:p>
@@ -24561,7 +26439,8 @@
                 </a:solidFill>
                 <a:latin typeface="Arial"/>
               </a:rPr>
-              <a:t>Grafana Viewer token</a:t>
+              <a:t>KAOP gateway blocks
+write tools</a:t>
             </a:r>
           </a:p>
         </p:txBody>
@@ -24648,7 +26527,7 @@
                 </a:solidFill>
                 <a:latin typeface="Arial"/>
               </a:rPr>
-              <a:t>Remediation</a:t>
+              <a:t>Orchestrator</a:t>
             </a:r>
           </a:p>
         </p:txBody>
@@ -24687,7 +26566,7 @@
                 </a:solidFill>
                 <a:latin typeface="Arial"/>
               </a:rPr>
-              <a:t>The investigation</a:t>
+              <a:t>Findings</a:t>
             </a:r>
           </a:p>
         </p:txBody>
@@ -24765,7 +26644,8 @@
                 </a:solidFill>
                 <a:latin typeface="Arial"/>
               </a:rPr>
-              <a:t>Holds no credentials</a:t>
+              <a:t>May call only
+allowlisted agents</a:t>
             </a:r>
           </a:p>
         </p:txBody>
@@ -24852,7 +26732,7 @@
                 </a:solidFill>
                 <a:latin typeface="Arial"/>
               </a:rPr>
-              <a:t>GitHub agent</a:t>
+              <a:t>Remediation</a:t>
             </a:r>
           </a:p>
         </p:txBody>
@@ -24891,7 +26771,7 @@
                 </a:solidFill>
                 <a:latin typeface="Arial"/>
               </a:rPr>
-              <a:t>Repository code</a:t>
+              <a:t>The investigation</a:t>
             </a:r>
           </a:p>
         </p:txBody>
@@ -24930,7 +26810,7 @@
                 </a:solidFill>
                 <a:latin typeface="Arial"/>
               </a:rPr>
-              <a:t>One PR, after approval</a:t>
+              <a:t>Nothing</a:t>
             </a:r>
           </a:p>
         </p:txBody>
@@ -24969,8 +26849,7 @@
                 </a:solidFill>
                 <a:latin typeface="Arial"/>
               </a:rPr>
-              <a:t>Approval gate +
-GitHub app scopes</a:t>
+              <a:t>Plan-only by design</a:t>
             </a:r>
           </a:p>
         </p:txBody>

--- a/docs/presentation/KAOP_Customer_Pitch.pptx
+++ b/docs/presentation/KAOP_Customer_Pitch.pptx
@@ -16521,7 +16521,7 @@
         </p:nvSpPr>
         <p:spPr>
           <a:xfrm>
-            <a:off x="7955279" y="2212848"/>
+            <a:off x="7955279" y="2176272"/>
             <a:ext cx="3474720" cy="274320"/>
           </a:xfrm>
           <a:prstGeom prst="rect">
@@ -16554,14 +16554,119 @@
       </p:sp>
       <p:sp>
         <p:nvSpPr>
-          <p:cNvPr id="28" name="TextBox 27"/>
+          <p:cNvPr id="28" name="Rounded Rectangle 27"/>
+          <p:cNvSpPr/>
+          <p:nvPr/>
+        </p:nvSpPr>
+        <p:spPr>
+          <a:xfrm>
+            <a:off x="7909560" y="2523744"/>
+            <a:ext cx="3520440" cy="402336"/>
+          </a:xfrm>
+          <a:prstGeom prst="roundRect">
+            <a:avLst>
+              <a:gd name="adj" fmla="val 20000"/>
+            </a:avLst>
+          </a:prstGeom>
+          <a:solidFill>
+            <a:srgbClr val="1E293B"/>
+          </a:solidFill>
+          <a:ln>
+            <a:noFill/>
+          </a:ln>
+          <a:effectLst/>
+        </p:spPr>
+        <p:style>
+          <a:lnRef idx="1">
+            <a:schemeClr val="accent1"/>
+          </a:lnRef>
+          <a:fillRef idx="3">
+            <a:schemeClr val="accent1"/>
+          </a:fillRef>
+          <a:effectRef idx="2">
+            <a:schemeClr val="accent1"/>
+          </a:effectRef>
+          <a:fontRef idx="minor">
+            <a:schemeClr val="lt1"/>
+          </a:fontRef>
+        </p:style>
+        <p:txBody>
+          <a:bodyPr rtlCol="0" anchor="ctr"/>
+          <a:lstStyle/>
+          <a:p>
+            <a:pPr algn="ctr"/>
+          </a:p>
+        </p:txBody>
+      </p:sp>
+      <p:sp>
+        <p:nvSpPr>
+          <p:cNvPr id="29" name="Rounded Rectangle 28"/>
+          <p:cNvSpPr/>
+          <p:nvPr/>
+        </p:nvSpPr>
+        <p:spPr>
+          <a:xfrm>
+            <a:off x="8001000" y="2587751"/>
+            <a:ext cx="292608" cy="292608"/>
+          </a:xfrm>
+          <a:prstGeom prst="roundRect">
+            <a:avLst>
+              <a:gd name="adj" fmla="val 50000"/>
+            </a:avLst>
+          </a:prstGeom>
+          <a:solidFill>
+            <a:srgbClr val="4F46E5"/>
+          </a:solidFill>
+          <a:ln>
+            <a:noFill/>
+          </a:ln>
+          <a:effectLst/>
+        </p:spPr>
+        <p:style>
+          <a:lnRef idx="1">
+            <a:schemeClr val="accent1"/>
+          </a:lnRef>
+          <a:fillRef idx="3">
+            <a:schemeClr val="accent1"/>
+          </a:fillRef>
+          <a:effectRef idx="2">
+            <a:schemeClr val="accent1"/>
+          </a:effectRef>
+          <a:fontRef idx="minor">
+            <a:schemeClr val="lt1"/>
+          </a:fontRef>
+        </p:style>
+        <p:txBody>
+          <a:bodyPr rtlCol="0" anchor="ctr" wrap="square" lIns="73152" rIns="73152" tIns="36576" bIns="36576"/>
+          <a:lstStyle/>
+          <a:p>
+            <a:pPr algn="ctr">
+              <a:lnSpc>
+                <a:spcPct val="110000"/>
+              </a:lnSpc>
+            </a:pPr>
+            <a:r>
+              <a:rPr sz="1100" b="1">
+                <a:solidFill>
+                  <a:srgbClr val="FFFFFF"/>
+                </a:solidFill>
+                <a:latin typeface="Arial"/>
+              </a:rPr>
+              <a:t>1</a:t>
+            </a:r>
+          </a:p>
+        </p:txBody>
+      </p:sp>
+      <p:sp>
+        <p:nvSpPr>
+          <p:cNvPr id="30" name="TextBox 29"/>
           <p:cNvSpPr txBox="1"/>
           <p:nvPr/>
         </p:nvSpPr>
         <p:spPr>
           <a:xfrm>
-            <a:off x="7955279" y="2606040"/>
-            <a:ext cx="3520440" cy="2926080"/>
+            <a:off x="8366760" y="2551175"/>
+            <a:ext cx="3017520" cy="365760"/>
           </a:xfrm>
           <a:prstGeom prst="rect">
             <a:avLst/>
@@ -16569,133 +16674,776 @@
           <a:noFill/>
         </p:spPr>
         <p:txBody>
-          <a:bodyPr wrap="square" lIns="73152" rIns="73152" tIns="36576" bIns="36576" anchor="t">
+          <a:bodyPr wrap="square" lIns="73152" rIns="73152" tIns="36576" bIns="36576" anchor="ctr">
             <a:spAutoFit/>
           </a:bodyPr>
           <a:lstStyle/>
           <a:p>
             <a:pPr algn="l">
               <a:lnSpc>
-                <a:spcPct val="115000"/>
-              </a:lnSpc>
-            </a:pPr>
-            <a:r>
-              <a:rPr sz="1600" b="1">
-                <a:solidFill>
-                  <a:srgbClr val="5EEAD4"/>
-                </a:solidFill>
-                <a:latin typeface="Arial"/>
-              </a:rPr>
-              <a:t>✓  </a:t>
-            </a:r>
-            <a:r>
-              <a:rPr sz="1600" b="0">
+                <a:spcPct val="110000"/>
+              </a:lnSpc>
+            </a:pPr>
+            <a:r>
+              <a:rPr sz="1400" b="0">
                 <a:solidFill>
                   <a:srgbClr val="FFFFFF"/>
                 </a:solidFill>
                 <a:latin typeface="Arial"/>
               </a:rPr>
-              <a:t>A real alert from Grafana Cloud</a:t>
-            </a:r>
-          </a:p>
+              <a:t>Grafana Cloud fires a real alert</a:t>
+            </a:r>
+          </a:p>
+        </p:txBody>
+      </p:sp>
+      <p:sp>
+        <p:nvSpPr>
+          <p:cNvPr id="31" name="Down Arrow 30"/>
+          <p:cNvSpPr/>
+          <p:nvPr/>
+        </p:nvSpPr>
+        <p:spPr>
+          <a:xfrm>
+            <a:off x="8074152" y="2962656"/>
+            <a:ext cx="219456" cy="155448"/>
+          </a:xfrm>
+          <a:prstGeom prst="downArrow">
+            <a:avLst/>
+          </a:prstGeom>
+          <a:solidFill>
+            <a:srgbClr val="CBD5E1"/>
+          </a:solidFill>
+          <a:ln>
+            <a:noFill/>
+          </a:ln>
+          <a:effectLst/>
+        </p:spPr>
+        <p:style>
+          <a:lnRef idx="1">
+            <a:schemeClr val="accent1"/>
+          </a:lnRef>
+          <a:fillRef idx="3">
+            <a:schemeClr val="accent1"/>
+          </a:fillRef>
+          <a:effectRef idx="2">
+            <a:schemeClr val="accent1"/>
+          </a:effectRef>
+          <a:fontRef idx="minor">
+            <a:schemeClr val="lt1"/>
+          </a:fontRef>
+        </p:style>
+        <p:txBody>
+          <a:bodyPr rtlCol="0" anchor="ctr"/>
+          <a:lstStyle/>
+          <a:p>
+            <a:pPr algn="ctr"/>
+          </a:p>
+        </p:txBody>
+      </p:sp>
+      <p:sp>
+        <p:nvSpPr>
+          <p:cNvPr id="32" name="Rounded Rectangle 31"/>
+          <p:cNvSpPr/>
+          <p:nvPr/>
+        </p:nvSpPr>
+        <p:spPr>
+          <a:xfrm>
+            <a:off x="7909560" y="3145536"/>
+            <a:ext cx="3520440" cy="402336"/>
+          </a:xfrm>
+          <a:prstGeom prst="roundRect">
+            <a:avLst>
+              <a:gd name="adj" fmla="val 20000"/>
+            </a:avLst>
+          </a:prstGeom>
+          <a:solidFill>
+            <a:srgbClr val="1E293B"/>
+          </a:solidFill>
+          <a:ln>
+            <a:noFill/>
+          </a:ln>
+          <a:effectLst/>
+        </p:spPr>
+        <p:style>
+          <a:lnRef idx="1">
+            <a:schemeClr val="accent1"/>
+          </a:lnRef>
+          <a:fillRef idx="3">
+            <a:schemeClr val="accent1"/>
+          </a:fillRef>
+          <a:effectRef idx="2">
+            <a:schemeClr val="accent1"/>
+          </a:effectRef>
+          <a:fontRef idx="minor">
+            <a:schemeClr val="lt1"/>
+          </a:fontRef>
+        </p:style>
+        <p:txBody>
+          <a:bodyPr rtlCol="0" anchor="ctr"/>
+          <a:lstStyle/>
+          <a:p>
+            <a:pPr algn="ctr"/>
+          </a:p>
+        </p:txBody>
+      </p:sp>
+      <p:sp>
+        <p:nvSpPr>
+          <p:cNvPr id="33" name="Rounded Rectangle 32"/>
+          <p:cNvSpPr/>
+          <p:nvPr/>
+        </p:nvSpPr>
+        <p:spPr>
+          <a:xfrm>
+            <a:off x="8001000" y="3209544"/>
+            <a:ext cx="292608" cy="292608"/>
+          </a:xfrm>
+          <a:prstGeom prst="roundRect">
+            <a:avLst>
+              <a:gd name="adj" fmla="val 50000"/>
+            </a:avLst>
+          </a:prstGeom>
+          <a:solidFill>
+            <a:srgbClr val="4F46E5"/>
+          </a:solidFill>
+          <a:ln>
+            <a:noFill/>
+          </a:ln>
+          <a:effectLst/>
+        </p:spPr>
+        <p:style>
+          <a:lnRef idx="1">
+            <a:schemeClr val="accent1"/>
+          </a:lnRef>
+          <a:fillRef idx="3">
+            <a:schemeClr val="accent1"/>
+          </a:fillRef>
+          <a:effectRef idx="2">
+            <a:schemeClr val="accent1"/>
+          </a:effectRef>
+          <a:fontRef idx="minor">
+            <a:schemeClr val="lt1"/>
+          </a:fontRef>
+        </p:style>
+        <p:txBody>
+          <a:bodyPr rtlCol="0" anchor="ctr" wrap="square" lIns="73152" rIns="73152" tIns="36576" bIns="36576"/>
+          <a:lstStyle/>
+          <a:p>
+            <a:pPr algn="ctr">
+              <a:lnSpc>
+                <a:spcPct val="110000"/>
+              </a:lnSpc>
+            </a:pPr>
+            <a:r>
+              <a:rPr sz="1100" b="1">
+                <a:solidFill>
+                  <a:srgbClr val="FFFFFF"/>
+                </a:solidFill>
+                <a:latin typeface="Arial"/>
+              </a:rPr>
+              <a:t>2</a:t>
+            </a:r>
+          </a:p>
+        </p:txBody>
+      </p:sp>
+      <p:sp>
+        <p:nvSpPr>
+          <p:cNvPr id="34" name="TextBox 33"/>
+          <p:cNvSpPr txBox="1"/>
+          <p:nvPr/>
+        </p:nvSpPr>
+        <p:spPr>
+          <a:xfrm>
+            <a:off x="8366760" y="3172968"/>
+            <a:ext cx="3017520" cy="365760"/>
+          </a:xfrm>
+          <a:prstGeom prst="rect">
+            <a:avLst/>
+          </a:prstGeom>
+          <a:noFill/>
+        </p:spPr>
+        <p:txBody>
+          <a:bodyPr wrap="square" lIns="73152" rIns="73152" tIns="36576" bIns="36576" anchor="ctr">
+            <a:spAutoFit/>
+          </a:bodyPr>
+          <a:lstStyle/>
           <a:p>
             <a:pPr algn="l">
               <a:lnSpc>
-                <a:spcPct val="115000"/>
-              </a:lnSpc>
-            </a:pPr>
-            <a:r>
-              <a:rPr sz="1600" b="1">
-                <a:solidFill>
-                  <a:srgbClr val="5EEAD4"/>
-                </a:solidFill>
-                <a:latin typeface="Arial"/>
-              </a:rPr>
-              <a:t>✓  </a:t>
-            </a:r>
-            <a:r>
-              <a:rPr sz="1600" b="0">
+                <a:spcPct val="110000"/>
+              </a:lnSpc>
+            </a:pPr>
+            <a:r>
+              <a:rPr sz="1400" b="0">
                 <a:solidFill>
                   <a:srgbClr val="FFFFFF"/>
                 </a:solidFill>
                 <a:latin typeface="Arial"/>
               </a:rPr>
-              <a:t>Two agents investigating at once</a:t>
-            </a:r>
-          </a:p>
+              <a:t>Two agents investigate at once</a:t>
+            </a:r>
+          </a:p>
+        </p:txBody>
+      </p:sp>
+      <p:sp>
+        <p:nvSpPr>
+          <p:cNvPr id="35" name="Down Arrow 34"/>
+          <p:cNvSpPr/>
+          <p:nvPr/>
+        </p:nvSpPr>
+        <p:spPr>
+          <a:xfrm>
+            <a:off x="8074152" y="3584448"/>
+            <a:ext cx="219456" cy="155448"/>
+          </a:xfrm>
+          <a:prstGeom prst="downArrow">
+            <a:avLst/>
+          </a:prstGeom>
+          <a:solidFill>
+            <a:srgbClr val="CBD5E1"/>
+          </a:solidFill>
+          <a:ln>
+            <a:noFill/>
+          </a:ln>
+          <a:effectLst/>
+        </p:spPr>
+        <p:style>
+          <a:lnRef idx="1">
+            <a:schemeClr val="accent1"/>
+          </a:lnRef>
+          <a:fillRef idx="3">
+            <a:schemeClr val="accent1"/>
+          </a:fillRef>
+          <a:effectRef idx="2">
+            <a:schemeClr val="accent1"/>
+          </a:effectRef>
+          <a:fontRef idx="minor">
+            <a:schemeClr val="lt1"/>
+          </a:fontRef>
+        </p:style>
+        <p:txBody>
+          <a:bodyPr rtlCol="0" anchor="ctr"/>
+          <a:lstStyle/>
+          <a:p>
+            <a:pPr algn="ctr"/>
+          </a:p>
+        </p:txBody>
+      </p:sp>
+      <p:sp>
+        <p:nvSpPr>
+          <p:cNvPr id="36" name="Rounded Rectangle 35"/>
+          <p:cNvSpPr/>
+          <p:nvPr/>
+        </p:nvSpPr>
+        <p:spPr>
+          <a:xfrm>
+            <a:off x="7909560" y="3767328"/>
+            <a:ext cx="3520440" cy="402336"/>
+          </a:xfrm>
+          <a:prstGeom prst="roundRect">
+            <a:avLst>
+              <a:gd name="adj" fmla="val 20000"/>
+            </a:avLst>
+          </a:prstGeom>
+          <a:solidFill>
+            <a:srgbClr val="1E293B"/>
+          </a:solidFill>
+          <a:ln>
+            <a:noFill/>
+          </a:ln>
+          <a:effectLst/>
+        </p:spPr>
+        <p:style>
+          <a:lnRef idx="1">
+            <a:schemeClr val="accent1"/>
+          </a:lnRef>
+          <a:fillRef idx="3">
+            <a:schemeClr val="accent1"/>
+          </a:fillRef>
+          <a:effectRef idx="2">
+            <a:schemeClr val="accent1"/>
+          </a:effectRef>
+          <a:fontRef idx="minor">
+            <a:schemeClr val="lt1"/>
+          </a:fontRef>
+        </p:style>
+        <p:txBody>
+          <a:bodyPr rtlCol="0" anchor="ctr"/>
+          <a:lstStyle/>
+          <a:p>
+            <a:pPr algn="ctr"/>
+          </a:p>
+        </p:txBody>
+      </p:sp>
+      <p:sp>
+        <p:nvSpPr>
+          <p:cNvPr id="37" name="Rounded Rectangle 36"/>
+          <p:cNvSpPr/>
+          <p:nvPr/>
+        </p:nvSpPr>
+        <p:spPr>
+          <a:xfrm>
+            <a:off x="8001000" y="3831336"/>
+            <a:ext cx="292608" cy="292608"/>
+          </a:xfrm>
+          <a:prstGeom prst="roundRect">
+            <a:avLst>
+              <a:gd name="adj" fmla="val 50000"/>
+            </a:avLst>
+          </a:prstGeom>
+          <a:solidFill>
+            <a:srgbClr val="B91C1C"/>
+          </a:solidFill>
+          <a:ln>
+            <a:noFill/>
+          </a:ln>
+          <a:effectLst/>
+        </p:spPr>
+        <p:style>
+          <a:lnRef idx="1">
+            <a:schemeClr val="accent1"/>
+          </a:lnRef>
+          <a:fillRef idx="3">
+            <a:schemeClr val="accent1"/>
+          </a:fillRef>
+          <a:effectRef idx="2">
+            <a:schemeClr val="accent1"/>
+          </a:effectRef>
+          <a:fontRef idx="minor">
+            <a:schemeClr val="lt1"/>
+          </a:fontRef>
+        </p:style>
+        <p:txBody>
+          <a:bodyPr rtlCol="0" anchor="ctr" wrap="square" lIns="73152" rIns="73152" tIns="36576" bIns="36576"/>
+          <a:lstStyle/>
+          <a:p>
+            <a:pPr algn="ctr">
+              <a:lnSpc>
+                <a:spcPct val="110000"/>
+              </a:lnSpc>
+            </a:pPr>
+            <a:r>
+              <a:rPr sz="1100" b="1">
+                <a:solidFill>
+                  <a:srgbClr val="FFFFFF"/>
+                </a:solidFill>
+                <a:latin typeface="Arial"/>
+              </a:rPr>
+              <a:t>3</a:t>
+            </a:r>
+          </a:p>
+        </p:txBody>
+      </p:sp>
+      <p:sp>
+        <p:nvSpPr>
+          <p:cNvPr id="38" name="TextBox 37"/>
+          <p:cNvSpPr txBox="1"/>
+          <p:nvPr/>
+        </p:nvSpPr>
+        <p:spPr>
+          <a:xfrm>
+            <a:off x="8366760" y="3794760"/>
+            <a:ext cx="3017520" cy="365760"/>
+          </a:xfrm>
+          <a:prstGeom prst="rect">
+            <a:avLst/>
+          </a:prstGeom>
+          <a:noFill/>
+        </p:spPr>
+        <p:txBody>
+          <a:bodyPr wrap="square" lIns="73152" rIns="73152" tIns="36576" bIns="36576" anchor="ctr">
+            <a:spAutoFit/>
+          </a:bodyPr>
+          <a:lstStyle/>
           <a:p>
             <a:pPr algn="l">
               <a:lnSpc>
-                <a:spcPct val="115000"/>
-              </a:lnSpc>
-            </a:pPr>
-            <a:r>
-              <a:rPr sz="1600" b="1">
-                <a:solidFill>
-                  <a:srgbClr val="5EEAD4"/>
-                </a:solidFill>
-                <a:latin typeface="Arial"/>
-              </a:rPr>
-              <a:t>✓  </a:t>
-            </a:r>
-            <a:r>
-              <a:rPr sz="1600" b="0">
+                <a:spcPct val="110000"/>
+              </a:lnSpc>
+            </a:pPr>
+            <a:r>
+              <a:rPr sz="1400" b="0">
                 <a:solidFill>
                   <a:srgbClr val="FFFFFF"/>
                 </a:solidFill>
                 <a:latin typeface="Arial"/>
               </a:rPr>
-              <a:t>A person approving the fix</a:t>
-            </a:r>
-          </a:p>
+              <a:t>A person approves the fix</a:t>
+            </a:r>
+          </a:p>
+        </p:txBody>
+      </p:sp>
+      <p:sp>
+        <p:nvSpPr>
+          <p:cNvPr id="39" name="Down Arrow 38"/>
+          <p:cNvSpPr/>
+          <p:nvPr/>
+        </p:nvSpPr>
+        <p:spPr>
+          <a:xfrm>
+            <a:off x="8074152" y="4206240"/>
+            <a:ext cx="219456" cy="155448"/>
+          </a:xfrm>
+          <a:prstGeom prst="downArrow">
+            <a:avLst/>
+          </a:prstGeom>
+          <a:solidFill>
+            <a:srgbClr val="CBD5E1"/>
+          </a:solidFill>
+          <a:ln>
+            <a:noFill/>
+          </a:ln>
+          <a:effectLst/>
+        </p:spPr>
+        <p:style>
+          <a:lnRef idx="1">
+            <a:schemeClr val="accent1"/>
+          </a:lnRef>
+          <a:fillRef idx="3">
+            <a:schemeClr val="accent1"/>
+          </a:fillRef>
+          <a:effectRef idx="2">
+            <a:schemeClr val="accent1"/>
+          </a:effectRef>
+          <a:fontRef idx="minor">
+            <a:schemeClr val="lt1"/>
+          </a:fontRef>
+        </p:style>
+        <p:txBody>
+          <a:bodyPr rtlCol="0" anchor="ctr"/>
+          <a:lstStyle/>
+          <a:p>
+            <a:pPr algn="ctr"/>
+          </a:p>
+        </p:txBody>
+      </p:sp>
+      <p:sp>
+        <p:nvSpPr>
+          <p:cNvPr id="40" name="Rounded Rectangle 39"/>
+          <p:cNvSpPr/>
+          <p:nvPr/>
+        </p:nvSpPr>
+        <p:spPr>
+          <a:xfrm>
+            <a:off x="7909560" y="4389120"/>
+            <a:ext cx="3520440" cy="402336"/>
+          </a:xfrm>
+          <a:prstGeom prst="roundRect">
+            <a:avLst>
+              <a:gd name="adj" fmla="val 20000"/>
+            </a:avLst>
+          </a:prstGeom>
+          <a:solidFill>
+            <a:srgbClr val="1E293B"/>
+          </a:solidFill>
+          <a:ln>
+            <a:noFill/>
+          </a:ln>
+          <a:effectLst/>
+        </p:spPr>
+        <p:style>
+          <a:lnRef idx="1">
+            <a:schemeClr val="accent1"/>
+          </a:lnRef>
+          <a:fillRef idx="3">
+            <a:schemeClr val="accent1"/>
+          </a:fillRef>
+          <a:effectRef idx="2">
+            <a:schemeClr val="accent1"/>
+          </a:effectRef>
+          <a:fontRef idx="minor">
+            <a:schemeClr val="lt1"/>
+          </a:fontRef>
+        </p:style>
+        <p:txBody>
+          <a:bodyPr rtlCol="0" anchor="ctr"/>
+          <a:lstStyle/>
+          <a:p>
+            <a:pPr algn="ctr"/>
+          </a:p>
+        </p:txBody>
+      </p:sp>
+      <p:sp>
+        <p:nvSpPr>
+          <p:cNvPr id="41" name="Rounded Rectangle 40"/>
+          <p:cNvSpPr/>
+          <p:nvPr/>
+        </p:nvSpPr>
+        <p:spPr>
+          <a:xfrm>
+            <a:off x="8001000" y="4453128"/>
+            <a:ext cx="292608" cy="292608"/>
+          </a:xfrm>
+          <a:prstGeom prst="roundRect">
+            <a:avLst>
+              <a:gd name="adj" fmla="val 50000"/>
+            </a:avLst>
+          </a:prstGeom>
+          <a:solidFill>
+            <a:srgbClr val="0F766E"/>
+          </a:solidFill>
+          <a:ln>
+            <a:noFill/>
+          </a:ln>
+          <a:effectLst/>
+        </p:spPr>
+        <p:style>
+          <a:lnRef idx="1">
+            <a:schemeClr val="accent1"/>
+          </a:lnRef>
+          <a:fillRef idx="3">
+            <a:schemeClr val="accent1"/>
+          </a:fillRef>
+          <a:effectRef idx="2">
+            <a:schemeClr val="accent1"/>
+          </a:effectRef>
+          <a:fontRef idx="minor">
+            <a:schemeClr val="lt1"/>
+          </a:fontRef>
+        </p:style>
+        <p:txBody>
+          <a:bodyPr rtlCol="0" anchor="ctr" wrap="square" lIns="73152" rIns="73152" tIns="36576" bIns="36576"/>
+          <a:lstStyle/>
+          <a:p>
+            <a:pPr algn="ctr">
+              <a:lnSpc>
+                <a:spcPct val="110000"/>
+              </a:lnSpc>
+            </a:pPr>
+            <a:r>
+              <a:rPr sz="1100" b="1">
+                <a:solidFill>
+                  <a:srgbClr val="FFFFFF"/>
+                </a:solidFill>
+                <a:latin typeface="Arial"/>
+              </a:rPr>
+              <a:t>4</a:t>
+            </a:r>
+          </a:p>
+        </p:txBody>
+      </p:sp>
+      <p:sp>
+        <p:nvSpPr>
+          <p:cNvPr id="42" name="TextBox 41"/>
+          <p:cNvSpPr txBox="1"/>
+          <p:nvPr/>
+        </p:nvSpPr>
+        <p:spPr>
+          <a:xfrm>
+            <a:off x="8366760" y="4416552"/>
+            <a:ext cx="3017520" cy="365760"/>
+          </a:xfrm>
+          <a:prstGeom prst="rect">
+            <a:avLst/>
+          </a:prstGeom>
+          <a:noFill/>
+        </p:spPr>
+        <p:txBody>
+          <a:bodyPr wrap="square" lIns="73152" rIns="73152" tIns="36576" bIns="36576" anchor="ctr">
+            <a:spAutoFit/>
+          </a:bodyPr>
+          <a:lstStyle/>
           <a:p>
             <a:pPr algn="l">
               <a:lnSpc>
-                <a:spcPct val="115000"/>
-              </a:lnSpc>
-            </a:pPr>
-            <a:r>
-              <a:rPr sz="1600" b="1">
-                <a:solidFill>
-                  <a:srgbClr val="5EEAD4"/>
-                </a:solidFill>
-                <a:latin typeface="Arial"/>
-              </a:rPr>
-              <a:t>✓  </a:t>
-            </a:r>
-            <a:r>
-              <a:rPr sz="1600" b="0">
+                <a:spcPct val="110000"/>
+              </a:lnSpc>
+            </a:pPr>
+            <a:r>
+              <a:rPr sz="1400" b="0">
                 <a:solidFill>
                   <a:srgbClr val="FFFFFF"/>
                 </a:solidFill>
                 <a:latin typeface="Arial"/>
               </a:rPr>
-              <a:t>An AI review of a real pull request</a:t>
-            </a:r>
-          </a:p>
+              <a:t>An agent reviews the fix PR</a:t>
+            </a:r>
+          </a:p>
+        </p:txBody>
+      </p:sp>
+      <p:sp>
+        <p:nvSpPr>
+          <p:cNvPr id="43" name="Down Arrow 42"/>
+          <p:cNvSpPr/>
+          <p:nvPr/>
+        </p:nvSpPr>
+        <p:spPr>
+          <a:xfrm>
+            <a:off x="8074152" y="4828031"/>
+            <a:ext cx="219456" cy="155448"/>
+          </a:xfrm>
+          <a:prstGeom prst="downArrow">
+            <a:avLst/>
+          </a:prstGeom>
+          <a:solidFill>
+            <a:srgbClr val="CBD5E1"/>
+          </a:solidFill>
+          <a:ln>
+            <a:noFill/>
+          </a:ln>
+          <a:effectLst/>
+        </p:spPr>
+        <p:style>
+          <a:lnRef idx="1">
+            <a:schemeClr val="accent1"/>
+          </a:lnRef>
+          <a:fillRef idx="3">
+            <a:schemeClr val="accent1"/>
+          </a:fillRef>
+          <a:effectRef idx="2">
+            <a:schemeClr val="accent1"/>
+          </a:effectRef>
+          <a:fontRef idx="minor">
+            <a:schemeClr val="lt1"/>
+          </a:fontRef>
+        </p:style>
+        <p:txBody>
+          <a:bodyPr rtlCol="0" anchor="ctr"/>
+          <a:lstStyle/>
+          <a:p>
+            <a:pPr algn="ctr"/>
+          </a:p>
+        </p:txBody>
+      </p:sp>
+      <p:sp>
+        <p:nvSpPr>
+          <p:cNvPr id="44" name="Rounded Rectangle 43"/>
+          <p:cNvSpPr/>
+          <p:nvPr/>
+        </p:nvSpPr>
+        <p:spPr>
+          <a:xfrm>
+            <a:off x="7909560" y="5010912"/>
+            <a:ext cx="3520440" cy="402336"/>
+          </a:xfrm>
+          <a:prstGeom prst="roundRect">
+            <a:avLst>
+              <a:gd name="adj" fmla="val 20000"/>
+            </a:avLst>
+          </a:prstGeom>
+          <a:solidFill>
+            <a:srgbClr val="1E293B"/>
+          </a:solidFill>
+          <a:ln>
+            <a:noFill/>
+          </a:ln>
+          <a:effectLst/>
+        </p:spPr>
+        <p:style>
+          <a:lnRef idx="1">
+            <a:schemeClr val="accent1"/>
+          </a:lnRef>
+          <a:fillRef idx="3">
+            <a:schemeClr val="accent1"/>
+          </a:fillRef>
+          <a:effectRef idx="2">
+            <a:schemeClr val="accent1"/>
+          </a:effectRef>
+          <a:fontRef idx="minor">
+            <a:schemeClr val="lt1"/>
+          </a:fontRef>
+        </p:style>
+        <p:txBody>
+          <a:bodyPr rtlCol="0" anchor="ctr"/>
+          <a:lstStyle/>
+          <a:p>
+            <a:pPr algn="ctr"/>
+          </a:p>
+        </p:txBody>
+      </p:sp>
+      <p:sp>
+        <p:nvSpPr>
+          <p:cNvPr id="45" name="Rounded Rectangle 44"/>
+          <p:cNvSpPr/>
+          <p:nvPr/>
+        </p:nvSpPr>
+        <p:spPr>
+          <a:xfrm>
+            <a:off x="8001000" y="5074920"/>
+            <a:ext cx="292608" cy="292608"/>
+          </a:xfrm>
+          <a:prstGeom prst="roundRect">
+            <a:avLst>
+              <a:gd name="adj" fmla="val 50000"/>
+            </a:avLst>
+          </a:prstGeom>
+          <a:solidFill>
+            <a:srgbClr val="0F766E"/>
+          </a:solidFill>
+          <a:ln>
+            <a:noFill/>
+          </a:ln>
+          <a:effectLst/>
+        </p:spPr>
+        <p:style>
+          <a:lnRef idx="1">
+            <a:schemeClr val="accent1"/>
+          </a:lnRef>
+          <a:fillRef idx="3">
+            <a:schemeClr val="accent1"/>
+          </a:fillRef>
+          <a:effectRef idx="2">
+            <a:schemeClr val="accent1"/>
+          </a:effectRef>
+          <a:fontRef idx="minor">
+            <a:schemeClr val="lt1"/>
+          </a:fontRef>
+        </p:style>
+        <p:txBody>
+          <a:bodyPr rtlCol="0" anchor="ctr" wrap="square" lIns="73152" rIns="73152" tIns="36576" bIns="36576"/>
+          <a:lstStyle/>
+          <a:p>
+            <a:pPr algn="ctr">
+              <a:lnSpc>
+                <a:spcPct val="110000"/>
+              </a:lnSpc>
+            </a:pPr>
+            <a:r>
+              <a:rPr sz="1100" b="1">
+                <a:solidFill>
+                  <a:srgbClr val="FFFFFF"/>
+                </a:solidFill>
+                <a:latin typeface="Arial"/>
+              </a:rPr>
+              <a:t>5</a:t>
+            </a:r>
+          </a:p>
+        </p:txBody>
+      </p:sp>
+      <p:sp>
+        <p:nvSpPr>
+          <p:cNvPr id="46" name="TextBox 45"/>
+          <p:cNvSpPr txBox="1"/>
+          <p:nvPr/>
+        </p:nvSpPr>
+        <p:spPr>
+          <a:xfrm>
+            <a:off x="8366760" y="5038344"/>
+            <a:ext cx="3017520" cy="365760"/>
+          </a:xfrm>
+          <a:prstGeom prst="rect">
+            <a:avLst/>
+          </a:prstGeom>
+          <a:noFill/>
+        </p:spPr>
+        <p:txBody>
+          <a:bodyPr wrap="square" lIns="73152" rIns="73152" tIns="36576" bIns="36576" anchor="ctr">
+            <a:spAutoFit/>
+          </a:bodyPr>
+          <a:lstStyle/>
           <a:p>
             <a:pPr algn="l">
               <a:lnSpc>
-                <a:spcPct val="115000"/>
-              </a:lnSpc>
-            </a:pPr>
-            <a:r>
-              <a:rPr sz="1600" b="1">
-                <a:solidFill>
-                  <a:srgbClr val="5EEAD4"/>
-                </a:solidFill>
-                <a:latin typeface="Arial"/>
-              </a:rPr>
-              <a:t>✓  </a:t>
-            </a:r>
-            <a:r>
-              <a:rPr sz="1600" b="0">
+                <a:spcPct val="110000"/>
+              </a:lnSpc>
+            </a:pPr>
+            <a:r>
+              <a:rPr sz="1400" b="0">
                 <a:solidFill>
                   <a:srgbClr val="FFFFFF"/>
                 </a:solidFill>
                 <a:latin typeface="Arial"/>
               </a:rPr>
-              <a:t>The full record of every step</a:t>
+              <a:t>Every step on one record</a:t>
             </a:r>
           </a:p>
         </p:txBody>

--- a/docs/presentation/KAOP_Customer_Pitch.pptx
+++ b/docs/presentation/KAOP_Customer_Pitch.pptx
@@ -20107,716 +20107,6 @@
   <p:clrMapOvr>
     <a:masterClrMapping/>
   </p:clrMapOvr>
-  <p:timing>
-    <p:tnLst>
-      <p:par>
-        <p:cTn id="1" dur="indefinite" restart="never" nodeType="tmRoot">
-          <p:childTnLst>
-            <p:seq concurrent="1" nextAc="seek">
-              <p:cTn id="2" dur="indefinite" nodeType="mainSeq">
-                <p:childTnLst>
-                  <p:par>
-                    <p:cTn id="13" fill="hold">
-                      <p:stCondLst>
-                        <p:cond delay="indefinite"/>
-                      </p:stCondLst>
-                      <p:childTnLst>
-                        <p:par>
-                          <p:cTn id="14" fill="hold">
-                            <p:stCondLst>
-                              <p:cond delay="0"/>
-                            </p:stCondLst>
-                            <p:childTnLst>
-                              <p:par>
-                                <p:cTn id="3" presetID="1" presetClass="entr" presetSubtype="0" fill="hold" nodeType="clickEffect">
-                                  <p:stCondLst>
-                                    <p:cond delay="0"/>
-                                  </p:stCondLst>
-                                  <p:childTnLst>
-                                    <p:set>
-                                      <p:cBhvr>
-                                        <p:cTn id="4" dur="1" fill="hold">
-                                          <p:stCondLst>
-                                            <p:cond delay="0"/>
-                                          </p:stCondLst>
-                                        </p:cTn>
-                                        <p:tgtEl>
-                                          <p:spTgt spid="6"/>
-                                        </p:tgtEl>
-                                        <p:attrNameLst>
-                                          <p:attrName>style.visibility</p:attrName>
-                                        </p:attrNameLst>
-                                      </p:cBhvr>
-                                      <p:to>
-                                        <p:strVal val="visible"/>
-                                      </p:to>
-                                    </p:set>
-                                  </p:childTnLst>
-                                </p:cTn>
-                              </p:par>
-                              <p:par>
-                                <p:cTn id="5" presetID="1" presetClass="entr" presetSubtype="0" fill="hold" nodeType="withEffect">
-                                  <p:stCondLst>
-                                    <p:cond delay="0"/>
-                                  </p:stCondLst>
-                                  <p:childTnLst>
-                                    <p:set>
-                                      <p:cBhvr>
-                                        <p:cTn id="6" dur="1" fill="hold">
-                                          <p:stCondLst>
-                                            <p:cond delay="0"/>
-                                          </p:stCondLst>
-                                        </p:cTn>
-                                        <p:tgtEl>
-                                          <p:spTgt spid="7"/>
-                                        </p:tgtEl>
-                                        <p:attrNameLst>
-                                          <p:attrName>style.visibility</p:attrName>
-                                        </p:attrNameLst>
-                                      </p:cBhvr>
-                                      <p:to>
-                                        <p:strVal val="visible"/>
-                                      </p:to>
-                                    </p:set>
-                                  </p:childTnLst>
-                                </p:cTn>
-                              </p:par>
-                              <p:par>
-                                <p:cTn id="7" presetID="1" presetClass="entr" presetSubtype="0" fill="hold" nodeType="withEffect">
-                                  <p:stCondLst>
-                                    <p:cond delay="0"/>
-                                  </p:stCondLst>
-                                  <p:childTnLst>
-                                    <p:set>
-                                      <p:cBhvr>
-                                        <p:cTn id="8" dur="1" fill="hold">
-                                          <p:stCondLst>
-                                            <p:cond delay="0"/>
-                                          </p:stCondLst>
-                                        </p:cTn>
-                                        <p:tgtEl>
-                                          <p:spTgt spid="8"/>
-                                        </p:tgtEl>
-                                        <p:attrNameLst>
-                                          <p:attrName>style.visibility</p:attrName>
-                                        </p:attrNameLst>
-                                      </p:cBhvr>
-                                      <p:to>
-                                        <p:strVal val="visible"/>
-                                      </p:to>
-                                    </p:set>
-                                  </p:childTnLst>
-                                </p:cTn>
-                              </p:par>
-                              <p:par>
-                                <p:cTn id="9" presetID="1" presetClass="entr" presetSubtype="0" fill="hold" nodeType="withEffect">
-                                  <p:stCondLst>
-                                    <p:cond delay="0"/>
-                                  </p:stCondLst>
-                                  <p:childTnLst>
-                                    <p:set>
-                                      <p:cBhvr>
-                                        <p:cTn id="10" dur="1" fill="hold">
-                                          <p:stCondLst>
-                                            <p:cond delay="0"/>
-                                          </p:stCondLst>
-                                        </p:cTn>
-                                        <p:tgtEl>
-                                          <p:spTgt spid="9"/>
-                                        </p:tgtEl>
-                                        <p:attrNameLst>
-                                          <p:attrName>style.visibility</p:attrName>
-                                        </p:attrNameLst>
-                                      </p:cBhvr>
-                                      <p:to>
-                                        <p:strVal val="visible"/>
-                                      </p:to>
-                                    </p:set>
-                                  </p:childTnLst>
-                                </p:cTn>
-                              </p:par>
-                              <p:par>
-                                <p:cTn id="11" presetID="1" presetClass="entr" presetSubtype="0" fill="hold" nodeType="withEffect">
-                                  <p:stCondLst>
-                                    <p:cond delay="0"/>
-                                  </p:stCondLst>
-                                  <p:childTnLst>
-                                    <p:set>
-                                      <p:cBhvr>
-                                        <p:cTn id="12" dur="1" fill="hold">
-                                          <p:stCondLst>
-                                            <p:cond delay="0"/>
-                                          </p:stCondLst>
-                                        </p:cTn>
-                                        <p:tgtEl>
-                                          <p:spTgt spid="10"/>
-                                        </p:tgtEl>
-                                        <p:attrNameLst>
-                                          <p:attrName>style.visibility</p:attrName>
-                                        </p:attrNameLst>
-                                      </p:cBhvr>
-                                      <p:to>
-                                        <p:strVal val="visible"/>
-                                      </p:to>
-                                    </p:set>
-                                  </p:childTnLst>
-                                </p:cTn>
-                              </p:par>
-                            </p:childTnLst>
-                          </p:cTn>
-                        </p:par>
-                      </p:childTnLst>
-                    </p:cTn>
-                  </p:par>
-                  <p:par>
-                    <p:cTn id="25" fill="hold">
-                      <p:stCondLst>
-                        <p:cond delay="indefinite"/>
-                      </p:stCondLst>
-                      <p:childTnLst>
-                        <p:par>
-                          <p:cTn id="26" fill="hold">
-                            <p:stCondLst>
-                              <p:cond delay="0"/>
-                            </p:stCondLst>
-                            <p:childTnLst>
-                              <p:par>
-                                <p:cTn id="15" presetID="1" presetClass="entr" presetSubtype="0" fill="hold" nodeType="clickEffect">
-                                  <p:stCondLst>
-                                    <p:cond delay="0"/>
-                                  </p:stCondLst>
-                                  <p:childTnLst>
-                                    <p:set>
-                                      <p:cBhvr>
-                                        <p:cTn id="16" dur="1" fill="hold">
-                                          <p:stCondLst>
-                                            <p:cond delay="0"/>
-                                          </p:stCondLst>
-                                        </p:cTn>
-                                        <p:tgtEl>
-                                          <p:spTgt spid="11"/>
-                                        </p:tgtEl>
-                                        <p:attrNameLst>
-                                          <p:attrName>style.visibility</p:attrName>
-                                        </p:attrNameLst>
-                                      </p:cBhvr>
-                                      <p:to>
-                                        <p:strVal val="visible"/>
-                                      </p:to>
-                                    </p:set>
-                                  </p:childTnLst>
-                                </p:cTn>
-                              </p:par>
-                              <p:par>
-                                <p:cTn id="17" presetID="1" presetClass="entr" presetSubtype="0" fill="hold" nodeType="withEffect">
-                                  <p:stCondLst>
-                                    <p:cond delay="0"/>
-                                  </p:stCondLst>
-                                  <p:childTnLst>
-                                    <p:set>
-                                      <p:cBhvr>
-                                        <p:cTn id="18" dur="1" fill="hold">
-                                          <p:stCondLst>
-                                            <p:cond delay="0"/>
-                                          </p:stCondLst>
-                                        </p:cTn>
-                                        <p:tgtEl>
-                                          <p:spTgt spid="12"/>
-                                        </p:tgtEl>
-                                        <p:attrNameLst>
-                                          <p:attrName>style.visibility</p:attrName>
-                                        </p:attrNameLst>
-                                      </p:cBhvr>
-                                      <p:to>
-                                        <p:strVal val="visible"/>
-                                      </p:to>
-                                    </p:set>
-                                  </p:childTnLst>
-                                </p:cTn>
-                              </p:par>
-                              <p:par>
-                                <p:cTn id="19" presetID="1" presetClass="entr" presetSubtype="0" fill="hold" nodeType="withEffect">
-                                  <p:stCondLst>
-                                    <p:cond delay="0"/>
-                                  </p:stCondLst>
-                                  <p:childTnLst>
-                                    <p:set>
-                                      <p:cBhvr>
-                                        <p:cTn id="20" dur="1" fill="hold">
-                                          <p:stCondLst>
-                                            <p:cond delay="0"/>
-                                          </p:stCondLst>
-                                        </p:cTn>
-                                        <p:tgtEl>
-                                          <p:spTgt spid="13"/>
-                                        </p:tgtEl>
-                                        <p:attrNameLst>
-                                          <p:attrName>style.visibility</p:attrName>
-                                        </p:attrNameLst>
-                                      </p:cBhvr>
-                                      <p:to>
-                                        <p:strVal val="visible"/>
-                                      </p:to>
-                                    </p:set>
-                                  </p:childTnLst>
-                                </p:cTn>
-                              </p:par>
-                              <p:par>
-                                <p:cTn id="21" presetID="1" presetClass="entr" presetSubtype="0" fill="hold" nodeType="withEffect">
-                                  <p:stCondLst>
-                                    <p:cond delay="0"/>
-                                  </p:stCondLst>
-                                  <p:childTnLst>
-                                    <p:set>
-                                      <p:cBhvr>
-                                        <p:cTn id="22" dur="1" fill="hold">
-                                          <p:stCondLst>
-                                            <p:cond delay="0"/>
-                                          </p:stCondLst>
-                                        </p:cTn>
-                                        <p:tgtEl>
-                                          <p:spTgt spid="14"/>
-                                        </p:tgtEl>
-                                        <p:attrNameLst>
-                                          <p:attrName>style.visibility</p:attrName>
-                                        </p:attrNameLst>
-                                      </p:cBhvr>
-                                      <p:to>
-                                        <p:strVal val="visible"/>
-                                      </p:to>
-                                    </p:set>
-                                  </p:childTnLst>
-                                </p:cTn>
-                              </p:par>
-                              <p:par>
-                                <p:cTn id="23" presetID="1" presetClass="entr" presetSubtype="0" fill="hold" nodeType="withEffect">
-                                  <p:stCondLst>
-                                    <p:cond delay="0"/>
-                                  </p:stCondLst>
-                                  <p:childTnLst>
-                                    <p:set>
-                                      <p:cBhvr>
-                                        <p:cTn id="24" dur="1" fill="hold">
-                                          <p:stCondLst>
-                                            <p:cond delay="0"/>
-                                          </p:stCondLst>
-                                        </p:cTn>
-                                        <p:tgtEl>
-                                          <p:spTgt spid="15"/>
-                                        </p:tgtEl>
-                                        <p:attrNameLst>
-                                          <p:attrName>style.visibility</p:attrName>
-                                        </p:attrNameLst>
-                                      </p:cBhvr>
-                                      <p:to>
-                                        <p:strVal val="visible"/>
-                                      </p:to>
-                                    </p:set>
-                                  </p:childTnLst>
-                                </p:cTn>
-                              </p:par>
-                            </p:childTnLst>
-                          </p:cTn>
-                        </p:par>
-                      </p:childTnLst>
-                    </p:cTn>
-                  </p:par>
-                  <p:par>
-                    <p:cTn id="37" fill="hold">
-                      <p:stCondLst>
-                        <p:cond delay="indefinite"/>
-                      </p:stCondLst>
-                      <p:childTnLst>
-                        <p:par>
-                          <p:cTn id="38" fill="hold">
-                            <p:stCondLst>
-                              <p:cond delay="0"/>
-                            </p:stCondLst>
-                            <p:childTnLst>
-                              <p:par>
-                                <p:cTn id="27" presetID="1" presetClass="entr" presetSubtype="0" fill="hold" nodeType="clickEffect">
-                                  <p:stCondLst>
-                                    <p:cond delay="0"/>
-                                  </p:stCondLst>
-                                  <p:childTnLst>
-                                    <p:set>
-                                      <p:cBhvr>
-                                        <p:cTn id="28" dur="1" fill="hold">
-                                          <p:stCondLst>
-                                            <p:cond delay="0"/>
-                                          </p:stCondLst>
-                                        </p:cTn>
-                                        <p:tgtEl>
-                                          <p:spTgt spid="16"/>
-                                        </p:tgtEl>
-                                        <p:attrNameLst>
-                                          <p:attrName>style.visibility</p:attrName>
-                                        </p:attrNameLst>
-                                      </p:cBhvr>
-                                      <p:to>
-                                        <p:strVal val="visible"/>
-                                      </p:to>
-                                    </p:set>
-                                  </p:childTnLst>
-                                </p:cTn>
-                              </p:par>
-                              <p:par>
-                                <p:cTn id="29" presetID="1" presetClass="entr" presetSubtype="0" fill="hold" nodeType="withEffect">
-                                  <p:stCondLst>
-                                    <p:cond delay="0"/>
-                                  </p:stCondLst>
-                                  <p:childTnLst>
-                                    <p:set>
-                                      <p:cBhvr>
-                                        <p:cTn id="30" dur="1" fill="hold">
-                                          <p:stCondLst>
-                                            <p:cond delay="0"/>
-                                          </p:stCondLst>
-                                        </p:cTn>
-                                        <p:tgtEl>
-                                          <p:spTgt spid="17"/>
-                                        </p:tgtEl>
-                                        <p:attrNameLst>
-                                          <p:attrName>style.visibility</p:attrName>
-                                        </p:attrNameLst>
-                                      </p:cBhvr>
-                                      <p:to>
-                                        <p:strVal val="visible"/>
-                                      </p:to>
-                                    </p:set>
-                                  </p:childTnLst>
-                                </p:cTn>
-                              </p:par>
-                              <p:par>
-                                <p:cTn id="31" presetID="1" presetClass="entr" presetSubtype="0" fill="hold" nodeType="withEffect">
-                                  <p:stCondLst>
-                                    <p:cond delay="0"/>
-                                  </p:stCondLst>
-                                  <p:childTnLst>
-                                    <p:set>
-                                      <p:cBhvr>
-                                        <p:cTn id="32" dur="1" fill="hold">
-                                          <p:stCondLst>
-                                            <p:cond delay="0"/>
-                                          </p:stCondLst>
-                                        </p:cTn>
-                                        <p:tgtEl>
-                                          <p:spTgt spid="18"/>
-                                        </p:tgtEl>
-                                        <p:attrNameLst>
-                                          <p:attrName>style.visibility</p:attrName>
-                                        </p:attrNameLst>
-                                      </p:cBhvr>
-                                      <p:to>
-                                        <p:strVal val="visible"/>
-                                      </p:to>
-                                    </p:set>
-                                  </p:childTnLst>
-                                </p:cTn>
-                              </p:par>
-                              <p:par>
-                                <p:cTn id="33" presetID="1" presetClass="entr" presetSubtype="0" fill="hold" nodeType="withEffect">
-                                  <p:stCondLst>
-                                    <p:cond delay="0"/>
-                                  </p:stCondLst>
-                                  <p:childTnLst>
-                                    <p:set>
-                                      <p:cBhvr>
-                                        <p:cTn id="34" dur="1" fill="hold">
-                                          <p:stCondLst>
-                                            <p:cond delay="0"/>
-                                          </p:stCondLst>
-                                        </p:cTn>
-                                        <p:tgtEl>
-                                          <p:spTgt spid="19"/>
-                                        </p:tgtEl>
-                                        <p:attrNameLst>
-                                          <p:attrName>style.visibility</p:attrName>
-                                        </p:attrNameLst>
-                                      </p:cBhvr>
-                                      <p:to>
-                                        <p:strVal val="visible"/>
-                                      </p:to>
-                                    </p:set>
-                                  </p:childTnLst>
-                                </p:cTn>
-                              </p:par>
-                              <p:par>
-                                <p:cTn id="35" presetID="1" presetClass="entr" presetSubtype="0" fill="hold" nodeType="withEffect">
-                                  <p:stCondLst>
-                                    <p:cond delay="0"/>
-                                  </p:stCondLst>
-                                  <p:childTnLst>
-                                    <p:set>
-                                      <p:cBhvr>
-                                        <p:cTn id="36" dur="1" fill="hold">
-                                          <p:stCondLst>
-                                            <p:cond delay="0"/>
-                                          </p:stCondLst>
-                                        </p:cTn>
-                                        <p:tgtEl>
-                                          <p:spTgt spid="20"/>
-                                        </p:tgtEl>
-                                        <p:attrNameLst>
-                                          <p:attrName>style.visibility</p:attrName>
-                                        </p:attrNameLst>
-                                      </p:cBhvr>
-                                      <p:to>
-                                        <p:strVal val="visible"/>
-                                      </p:to>
-                                    </p:set>
-                                  </p:childTnLst>
-                                </p:cTn>
-                              </p:par>
-                            </p:childTnLst>
-                          </p:cTn>
-                        </p:par>
-                      </p:childTnLst>
-                    </p:cTn>
-                  </p:par>
-                  <p:par>
-                    <p:cTn id="49" fill="hold">
-                      <p:stCondLst>
-                        <p:cond delay="indefinite"/>
-                      </p:stCondLst>
-                      <p:childTnLst>
-                        <p:par>
-                          <p:cTn id="50" fill="hold">
-                            <p:stCondLst>
-                              <p:cond delay="0"/>
-                            </p:stCondLst>
-                            <p:childTnLst>
-                              <p:par>
-                                <p:cTn id="39" presetID="1" presetClass="entr" presetSubtype="0" fill="hold" nodeType="clickEffect">
-                                  <p:stCondLst>
-                                    <p:cond delay="0"/>
-                                  </p:stCondLst>
-                                  <p:childTnLst>
-                                    <p:set>
-                                      <p:cBhvr>
-                                        <p:cTn id="40" dur="1" fill="hold">
-                                          <p:stCondLst>
-                                            <p:cond delay="0"/>
-                                          </p:stCondLst>
-                                        </p:cTn>
-                                        <p:tgtEl>
-                                          <p:spTgt spid="21"/>
-                                        </p:tgtEl>
-                                        <p:attrNameLst>
-                                          <p:attrName>style.visibility</p:attrName>
-                                        </p:attrNameLst>
-                                      </p:cBhvr>
-                                      <p:to>
-                                        <p:strVal val="visible"/>
-                                      </p:to>
-                                    </p:set>
-                                  </p:childTnLst>
-                                </p:cTn>
-                              </p:par>
-                              <p:par>
-                                <p:cTn id="41" presetID="1" presetClass="entr" presetSubtype="0" fill="hold" nodeType="withEffect">
-                                  <p:stCondLst>
-                                    <p:cond delay="0"/>
-                                  </p:stCondLst>
-                                  <p:childTnLst>
-                                    <p:set>
-                                      <p:cBhvr>
-                                        <p:cTn id="42" dur="1" fill="hold">
-                                          <p:stCondLst>
-                                            <p:cond delay="0"/>
-                                          </p:stCondLst>
-                                        </p:cTn>
-                                        <p:tgtEl>
-                                          <p:spTgt spid="22"/>
-                                        </p:tgtEl>
-                                        <p:attrNameLst>
-                                          <p:attrName>style.visibility</p:attrName>
-                                        </p:attrNameLst>
-                                      </p:cBhvr>
-                                      <p:to>
-                                        <p:strVal val="visible"/>
-                                      </p:to>
-                                    </p:set>
-                                  </p:childTnLst>
-                                </p:cTn>
-                              </p:par>
-                              <p:par>
-                                <p:cTn id="43" presetID="1" presetClass="entr" presetSubtype="0" fill="hold" nodeType="withEffect">
-                                  <p:stCondLst>
-                                    <p:cond delay="0"/>
-                                  </p:stCondLst>
-                                  <p:childTnLst>
-                                    <p:set>
-                                      <p:cBhvr>
-                                        <p:cTn id="44" dur="1" fill="hold">
-                                          <p:stCondLst>
-                                            <p:cond delay="0"/>
-                                          </p:stCondLst>
-                                        </p:cTn>
-                                        <p:tgtEl>
-                                          <p:spTgt spid="23"/>
-                                        </p:tgtEl>
-                                        <p:attrNameLst>
-                                          <p:attrName>style.visibility</p:attrName>
-                                        </p:attrNameLst>
-                                      </p:cBhvr>
-                                      <p:to>
-                                        <p:strVal val="visible"/>
-                                      </p:to>
-                                    </p:set>
-                                  </p:childTnLst>
-                                </p:cTn>
-                              </p:par>
-                              <p:par>
-                                <p:cTn id="45" presetID="1" presetClass="entr" presetSubtype="0" fill="hold" nodeType="withEffect">
-                                  <p:stCondLst>
-                                    <p:cond delay="0"/>
-                                  </p:stCondLst>
-                                  <p:childTnLst>
-                                    <p:set>
-                                      <p:cBhvr>
-                                        <p:cTn id="46" dur="1" fill="hold">
-                                          <p:stCondLst>
-                                            <p:cond delay="0"/>
-                                          </p:stCondLst>
-                                        </p:cTn>
-                                        <p:tgtEl>
-                                          <p:spTgt spid="24"/>
-                                        </p:tgtEl>
-                                        <p:attrNameLst>
-                                          <p:attrName>style.visibility</p:attrName>
-                                        </p:attrNameLst>
-                                      </p:cBhvr>
-                                      <p:to>
-                                        <p:strVal val="visible"/>
-                                      </p:to>
-                                    </p:set>
-                                  </p:childTnLst>
-                                </p:cTn>
-                              </p:par>
-                              <p:par>
-                                <p:cTn id="47" presetID="1" presetClass="entr" presetSubtype="0" fill="hold" nodeType="withEffect">
-                                  <p:stCondLst>
-                                    <p:cond delay="0"/>
-                                  </p:stCondLst>
-                                  <p:childTnLst>
-                                    <p:set>
-                                      <p:cBhvr>
-                                        <p:cTn id="48" dur="1" fill="hold">
-                                          <p:stCondLst>
-                                            <p:cond delay="0"/>
-                                          </p:stCondLst>
-                                        </p:cTn>
-                                        <p:tgtEl>
-                                          <p:spTgt spid="25"/>
-                                        </p:tgtEl>
-                                        <p:attrNameLst>
-                                          <p:attrName>style.visibility</p:attrName>
-                                        </p:attrNameLst>
-                                      </p:cBhvr>
-                                      <p:to>
-                                        <p:strVal val="visible"/>
-                                      </p:to>
-                                    </p:set>
-                                  </p:childTnLst>
-                                </p:cTn>
-                              </p:par>
-                            </p:childTnLst>
-                          </p:cTn>
-                        </p:par>
-                      </p:childTnLst>
-                    </p:cTn>
-                  </p:par>
-                  <p:par>
-                    <p:cTn id="53" fill="hold">
-                      <p:stCondLst>
-                        <p:cond delay="indefinite"/>
-                      </p:stCondLst>
-                      <p:childTnLst>
-                        <p:par>
-                          <p:cTn id="54" fill="hold">
-                            <p:stCondLst>
-                              <p:cond delay="0"/>
-                            </p:stCondLst>
-                            <p:childTnLst>
-                              <p:par>
-                                <p:cTn id="51" presetID="1" presetClass="entr" presetSubtype="0" fill="hold" nodeType="clickEffect">
-                                  <p:stCondLst>
-                                    <p:cond delay="0"/>
-                                  </p:stCondLst>
-                                  <p:childTnLst>
-                                    <p:set>
-                                      <p:cBhvr>
-                                        <p:cTn id="52" dur="1" fill="hold">
-                                          <p:stCondLst>
-                                            <p:cond delay="0"/>
-                                          </p:stCondLst>
-                                        </p:cTn>
-                                        <p:tgtEl>
-                                          <p:spTgt spid="26"/>
-                                        </p:tgtEl>
-                                        <p:attrNameLst>
-                                          <p:attrName>style.visibility</p:attrName>
-                                        </p:attrNameLst>
-                                      </p:cBhvr>
-                                      <p:to>
-                                        <p:strVal val="visible"/>
-                                      </p:to>
-                                    </p:set>
-                                  </p:childTnLst>
-                                </p:cTn>
-                              </p:par>
-                            </p:childTnLst>
-                          </p:cTn>
-                        </p:par>
-                      </p:childTnLst>
-                    </p:cTn>
-                  </p:par>
-                </p:childTnLst>
-              </p:cTn>
-              <p:prevCondLst>
-                <p:cond evt="onPrev" delay="0">
-                  <p:tgtEl>
-                    <p:sldTgt/>
-                  </p:tgtEl>
-                </p:cond>
-              </p:prevCondLst>
-              <p:nextCondLst>
-                <p:cond evt="onNext" delay="0">
-                  <p:tgtEl>
-                    <p:sldTgt/>
-                  </p:tgtEl>
-                </p:cond>
-              </p:nextCondLst>
-            </p:seq>
-          </p:childTnLst>
-        </p:cTn>
-      </p:par>
-    </p:tnLst>
-    <p:bldLst>
-      <p:bldP spid="6" grpId="0" animBg="1"/>
-      <p:bldP spid="7" grpId="0" animBg="1"/>
-      <p:bldP spid="8" grpId="0" animBg="1"/>
-      <p:bldP spid="9" grpId="0" animBg="1"/>
-      <p:bldP spid="10" grpId="0" animBg="1"/>
-      <p:bldP spid="11" grpId="0" animBg="1"/>
-      <p:bldP spid="12" grpId="0" animBg="1"/>
-      <p:bldP spid="13" grpId="0" animBg="1"/>
-      <p:bldP spid="14" grpId="0" animBg="1"/>
-      <p:bldP spid="15" grpId="0" animBg="1"/>
-      <p:bldP spid="16" grpId="0" animBg="1"/>
-      <p:bldP spid="17" grpId="0" animBg="1"/>
-      <p:bldP spid="18" grpId="0" animBg="1"/>
-      <p:bldP spid="19" grpId="0" animBg="1"/>
-      <p:bldP spid="20" grpId="0" animBg="1"/>
-      <p:bldP spid="21" grpId="0" animBg="1"/>
-      <p:bldP spid="22" grpId="0" animBg="1"/>
-      <p:bldP spid="23" grpId="0" animBg="1"/>
-      <p:bldP spid="24" grpId="0" animBg="1"/>
-      <p:bldP spid="25" grpId="0" animBg="1"/>
-      <p:bldP spid="26" grpId="0" animBg="1"/>
-    </p:bldLst>
-  </p:timing>
 </p:sld>
 </file>
 

--- a/docs/presentation/KAOP_Customer_Pitch.pptx
+++ b/docs/presentation/KAOP_Customer_Pitch.pptx
@@ -7102,7 +7102,7 @@
                 </a:solidFill>
                 <a:latin typeface="Arial"/>
               </a:rPr>
-              <a:t>Root cause, confidence and evidence, minutes after the alert.</a:t>
+              <a:t>Root cause and evidence, minutes after the alert.</a:t>
             </a:r>
           </a:p>
         </p:txBody>
@@ -7324,7 +7324,7 @@
                 </a:solidFill>
                 <a:latin typeface="Arial"/>
               </a:rPr>
-              <a:t>The fix, with the command, an undo plan and a check that it worked.</a:t>
+              <a:t>The fix, with undo and a check.</a:t>
             </a:r>
           </a:p>
         </p:txBody>
@@ -7546,7 +7546,7 @@
                 </a:solidFill>
                 <a:latin typeface="Arial"/>
               </a:rPr>
-              <a:t>A person approves; an agent applies it under its own identity.</a:t>
+              <a:t>A person approves. An agent applies.</a:t>
             </a:r>
           </a:p>
         </p:txBody>
@@ -7768,7 +7768,7 @@
                 </a:solidFill>
                 <a:latin typeface="Arial"/>
               </a:rPr>
-              <a:t>Low-risk, reversible fixes run inside guardrails. People review the record.</a:t>
+              <a:t>Low-risk fixes run on their own. People review.</a:t>
             </a:r>
           </a:p>
         </p:txBody>
@@ -19375,7 +19375,7 @@
                 </a:solidFill>
                 <a:latin typeface="Arial"/>
               </a:rPr>
-              <a:t>Pre-built workflows for AI SRE, software ops and cost. 50+ Komodor agents. Or import yours.</a:t>
+              <a:t>50+ ready agents and workflows. Yours get the same controls.</a:t>
             </a:r>
           </a:p>
         </p:txBody>
@@ -19584,7 +19584,7 @@
                 </a:solidFill>
                 <a:latin typeface="Arial"/>
               </a:rPr>
-              <a:t>Alerts, schedules and Slack start runs. Workflows route to specialists.</a:t>
+              <a:t>Alerts start the work. Specialists hand off. One record.</a:t>
             </a:r>
           </a:p>
         </p:txBody>
@@ -19793,7 +19793,7 @@
                 </a:solidFill>
                 <a:latin typeface="Arial"/>
               </a:rPr>
-              <a:t>Identity, default-deny permissions, guardrails, approvals and audit.</a:t>
+              <a:t>Identity, permissions, approvals and audit, on every run.</a:t>
             </a:r>
           </a:p>
         </p:txBody>
@@ -20002,7 +20002,7 @@
                 </a:solidFill>
                 <a:latin typeface="Arial"/>
               </a:rPr>
-              <a:t>Every run's evidence and cost. Evaluations and budgets.</a:t>
+              <a:t>Cost and quality per run. Budgets stop overspend.</a:t>
             </a:r>
           </a:p>
         </p:txBody>
@@ -20331,8 +20331,8 @@
         </p:nvSpPr>
         <p:spPr>
           <a:xfrm>
-            <a:off x="2697480" y="1965960"/>
-            <a:ext cx="2651760" cy="274320"/>
+            <a:off x="3017520" y="1965960"/>
+            <a:ext cx="4572000" cy="274320"/>
           </a:xfrm>
           <a:prstGeom prst="rect">
             <a:avLst/>
@@ -20357,53 +20357,14 @@
                 </a:solidFill>
                 <a:latin typeface="Arial"/>
               </a:rPr>
-              <a:t>ASKS</a:t>
-            </a:r>
-          </a:p>
-        </p:txBody>
-      </p:sp>
-      <p:sp>
-        <p:nvSpPr>
-          <p:cNvPr id="8" name="TextBox 7"/>
-          <p:cNvSpPr txBox="1"/>
-          <p:nvPr/>
-        </p:nvSpPr>
-        <p:spPr>
-          <a:xfrm>
-            <a:off x="5349240" y="1965960"/>
-            <a:ext cx="2743200" cy="274320"/>
-          </a:xfrm>
-          <a:prstGeom prst="rect">
-            <a:avLst/>
-          </a:prstGeom>
-          <a:noFill/>
-        </p:spPr>
-        <p:txBody>
-          <a:bodyPr wrap="square" lIns="73152" rIns="73152" tIns="36576" bIns="36576" anchor="t">
-            <a:spAutoFit/>
-          </a:bodyPr>
-          <a:lstStyle/>
-          <a:p>
-            <a:pPr algn="l">
-              <a:lnSpc>
-                <a:spcPct val="110000"/>
-              </a:lnSpc>
-            </a:pPr>
-            <a:r>
-              <a:rPr sz="1100" b="1">
-                <a:solidFill>
-                  <a:srgbClr val="94A3B8"/>
-                </a:solidFill>
-                <a:latin typeface="Arial"/>
-              </a:rPr>
-              <a:t>STOPS</a:t>
-            </a:r>
-          </a:p>
-        </p:txBody>
-      </p:sp>
-      <p:sp>
-        <p:nvSpPr>
-          <p:cNvPr id="9" name="Rounded Rectangle 8"/>
+              <a:t>WHAT YOU GET</a:t>
+            </a:r>
+          </a:p>
+        </p:txBody>
+      </p:sp>
+      <p:sp>
+        <p:nvSpPr>
+          <p:cNvPr id="8" name="Rounded Rectangle 7"/>
           <p:cNvSpPr/>
           <p:nvPr/>
         </p:nvSpPr>
@@ -20451,7 +20412,7 @@
       </p:sp>
       <p:sp>
         <p:nvSpPr>
-          <p:cNvPr id="10" name="Rounded Rectangle 9"/>
+          <p:cNvPr id="9" name="Rounded Rectangle 8"/>
           <p:cNvSpPr/>
           <p:nvPr/>
         </p:nvSpPr>
@@ -20510,14 +20471,14 @@
       </p:sp>
       <p:sp>
         <p:nvSpPr>
-          <p:cNvPr id="11" name="TextBox 10"/>
+          <p:cNvPr id="10" name="TextBox 9"/>
           <p:cNvSpPr txBox="1"/>
           <p:nvPr/>
         </p:nvSpPr>
         <p:spPr>
           <a:xfrm>
             <a:off x="1024128" y="2322576"/>
-            <a:ext cx="1645920" cy="384048"/>
+            <a:ext cx="1920240" cy="384048"/>
           </a:xfrm>
           <a:prstGeom prst="rect">
             <a:avLst/>
@@ -20549,14 +20510,14 @@
       </p:sp>
       <p:sp>
         <p:nvSpPr>
-          <p:cNvPr id="12" name="TextBox 11"/>
+          <p:cNvPr id="11" name="TextBox 10"/>
           <p:cNvSpPr txBox="1"/>
           <p:nvPr/>
         </p:nvSpPr>
         <p:spPr>
           <a:xfrm>
-            <a:off x="2697480" y="2322576"/>
-            <a:ext cx="2651760" cy="384048"/>
+            <a:off x="3017520" y="2322576"/>
+            <a:ext cx="4983480" cy="384048"/>
           </a:xfrm>
           <a:prstGeom prst="rect">
             <a:avLst/>
@@ -20575,59 +20536,20 @@
               </a:lnSpc>
             </a:pPr>
             <a:r>
-              <a:rPr sz="1450" b="0">
+              <a:rPr sz="1550" b="0">
                 <a:solidFill>
                   <a:srgbClr val="475569"/>
                 </a:solidFill>
                 <a:latin typeface="Arial"/>
               </a:rPr>
-              <a:t>Who is acting?</a:t>
-            </a:r>
-          </a:p>
-        </p:txBody>
-      </p:sp>
-      <p:sp>
-        <p:nvSpPr>
-          <p:cNvPr id="13" name="TextBox 12"/>
-          <p:cNvSpPr txBox="1"/>
-          <p:nvPr/>
-        </p:nvSpPr>
-        <p:spPr>
-          <a:xfrm>
-            <a:off x="5349240" y="2322576"/>
-            <a:ext cx="2697480" cy="384048"/>
-          </a:xfrm>
-          <a:prstGeom prst="rect">
-            <a:avLst/>
-          </a:prstGeom>
-          <a:noFill/>
-        </p:spPr>
-        <p:txBody>
-          <a:bodyPr wrap="square" lIns="73152" rIns="73152" tIns="36576" bIns="36576" anchor="ctr">
-            <a:spAutoFit/>
-          </a:bodyPr>
-          <a:lstStyle/>
-          <a:p>
-            <a:pPr algn="l">
-              <a:lnSpc>
-                <a:spcPct val="110000"/>
-              </a:lnSpc>
-            </a:pPr>
-            <a:r>
-              <a:rPr sz="1450" b="0">
-                <a:solidFill>
-                  <a:srgbClr val="475569"/>
-                </a:solidFill>
-                <a:latin typeface="Arial"/>
-              </a:rPr>
-              <a:t>Unaccountable actions</a:t>
-            </a:r>
-          </a:p>
-        </p:txBody>
-      </p:sp>
-      <p:sp>
-        <p:nvSpPr>
-          <p:cNvPr id="14" name="Rounded Rectangle 13"/>
+              <a:t>Every action has a name on it</a:t>
+            </a:r>
+          </a:p>
+        </p:txBody>
+      </p:sp>
+      <p:sp>
+        <p:nvSpPr>
+          <p:cNvPr id="12" name="Rounded Rectangle 11"/>
           <p:cNvSpPr/>
           <p:nvPr/>
         </p:nvSpPr>
@@ -20675,7 +20597,7 @@
       </p:sp>
       <p:sp>
         <p:nvSpPr>
-          <p:cNvPr id="15" name="Rounded Rectangle 14"/>
+          <p:cNvPr id="13" name="Rounded Rectangle 12"/>
           <p:cNvSpPr/>
           <p:nvPr/>
         </p:nvSpPr>
@@ -20734,14 +20656,14 @@
       </p:sp>
       <p:sp>
         <p:nvSpPr>
-          <p:cNvPr id="16" name="TextBox 15"/>
+          <p:cNvPr id="14" name="TextBox 13"/>
           <p:cNvSpPr txBox="1"/>
           <p:nvPr/>
         </p:nvSpPr>
         <p:spPr>
           <a:xfrm>
             <a:off x="1024128" y="2889504"/>
-            <a:ext cx="1645920" cy="384048"/>
+            <a:ext cx="1920240" cy="384048"/>
           </a:xfrm>
           <a:prstGeom prst="rect">
             <a:avLst/>
@@ -20773,14 +20695,14 @@
       </p:sp>
       <p:sp>
         <p:nvSpPr>
-          <p:cNvPr id="17" name="TextBox 16"/>
+          <p:cNvPr id="15" name="TextBox 14"/>
           <p:cNvSpPr txBox="1"/>
           <p:nvPr/>
         </p:nvSpPr>
         <p:spPr>
           <a:xfrm>
-            <a:off x="2697480" y="2889504"/>
-            <a:ext cx="2651760" cy="384048"/>
+            <a:off x="3017520" y="2889504"/>
+            <a:ext cx="4983480" cy="384048"/>
           </a:xfrm>
           <a:prstGeom prst="rect">
             <a:avLst/>
@@ -20799,59 +20721,20 @@
               </a:lnSpc>
             </a:pPr>
             <a:r>
-              <a:rPr sz="1450" b="0">
+              <a:rPr sz="1550" b="0">
                 <a:solidFill>
                   <a:srgbClr val="475569"/>
                 </a:solidFill>
                 <a:latin typeface="Arial"/>
               </a:rPr>
-              <a:t>Allowed on this?</a:t>
-            </a:r>
-          </a:p>
-        </p:txBody>
-      </p:sp>
-      <p:sp>
-        <p:nvSpPr>
-          <p:cNvPr id="18" name="TextBox 17"/>
-          <p:cNvSpPr txBox="1"/>
-          <p:nvPr/>
-        </p:nvSpPr>
-        <p:spPr>
-          <a:xfrm>
-            <a:off x="5349240" y="2889504"/>
-            <a:ext cx="2697480" cy="384048"/>
-          </a:xfrm>
-          <a:prstGeom prst="rect">
-            <a:avLst/>
-          </a:prstGeom>
-          <a:noFill/>
-        </p:spPr>
-        <p:txBody>
-          <a:bodyPr wrap="square" lIns="73152" rIns="73152" tIns="36576" bIns="36576" anchor="ctr">
-            <a:spAutoFit/>
-          </a:bodyPr>
-          <a:lstStyle/>
-          <a:p>
-            <a:pPr algn="l">
-              <a:lnSpc>
-                <a:spcPct val="110000"/>
-              </a:lnSpc>
-            </a:pPr>
-            <a:r>
-              <a:rPr sz="1450" b="0">
-                <a:solidFill>
-                  <a:srgbClr val="475569"/>
-                </a:solidFill>
-                <a:latin typeface="Arial"/>
-              </a:rPr>
-              <a:t>Reaching beyond the job</a:t>
-            </a:r>
-          </a:p>
-        </p:txBody>
-      </p:sp>
-      <p:sp>
-        <p:nvSpPr>
-          <p:cNvPr id="19" name="Rounded Rectangle 18"/>
+              <a:t>Only the access the job needs</a:t>
+            </a:r>
+          </a:p>
+        </p:txBody>
+      </p:sp>
+      <p:sp>
+        <p:nvSpPr>
+          <p:cNvPr id="16" name="Rounded Rectangle 15"/>
           <p:cNvSpPr/>
           <p:nvPr/>
         </p:nvSpPr>
@@ -20899,7 +20782,7 @@
       </p:sp>
       <p:sp>
         <p:nvSpPr>
-          <p:cNvPr id="20" name="Rounded Rectangle 19"/>
+          <p:cNvPr id="17" name="Rounded Rectangle 16"/>
           <p:cNvSpPr/>
           <p:nvPr/>
         </p:nvSpPr>
@@ -20958,14 +20841,14 @@
       </p:sp>
       <p:sp>
         <p:nvSpPr>
-          <p:cNvPr id="21" name="TextBox 20"/>
+          <p:cNvPr id="18" name="TextBox 17"/>
           <p:cNvSpPr txBox="1"/>
           <p:nvPr/>
         </p:nvSpPr>
         <p:spPr>
           <a:xfrm>
             <a:off x="1024128" y="3456432"/>
-            <a:ext cx="1645920" cy="384048"/>
+            <a:ext cx="1920240" cy="384048"/>
           </a:xfrm>
           <a:prstGeom prst="rect">
             <a:avLst/>
@@ -20997,14 +20880,14 @@
       </p:sp>
       <p:sp>
         <p:nvSpPr>
-          <p:cNvPr id="22" name="TextBox 21"/>
+          <p:cNvPr id="19" name="TextBox 18"/>
           <p:cNvSpPr txBox="1"/>
           <p:nvPr/>
         </p:nvSpPr>
         <p:spPr>
           <a:xfrm>
-            <a:off x="2697480" y="3456432"/>
-            <a:ext cx="2651760" cy="384048"/>
+            <a:off x="3017520" y="3456432"/>
+            <a:ext cx="4983480" cy="384048"/>
           </a:xfrm>
           <a:prstGeom prst="rect">
             <a:avLst/>
@@ -21023,59 +20906,20 @@
               </a:lnSpc>
             </a:pPr>
             <a:r>
-              <a:rPr sz="1450" b="0">
+              <a:rPr sz="1550" b="0">
                 <a:solidFill>
                   <a:srgbClr val="475569"/>
                 </a:solidFill>
                 <a:latin typeface="Arial"/>
               </a:rPr>
-              <a:t>Built to our rules?</a:t>
-            </a:r>
-          </a:p>
-        </p:txBody>
-      </p:sp>
-      <p:sp>
-        <p:nvSpPr>
-          <p:cNvPr id="23" name="TextBox 22"/>
-          <p:cNvSpPr txBox="1"/>
-          <p:nvPr/>
-        </p:nvSpPr>
-        <p:spPr>
-          <a:xfrm>
-            <a:off x="5349240" y="3456432"/>
-            <a:ext cx="2697480" cy="384048"/>
-          </a:xfrm>
-          <a:prstGeom prst="rect">
-            <a:avLst/>
-          </a:prstGeom>
-          <a:noFill/>
-        </p:spPr>
-        <p:txBody>
-          <a:bodyPr wrap="square" lIns="73152" rIns="73152" tIns="36576" bIns="36576" anchor="ctr">
-            <a:spAutoFit/>
-          </a:bodyPr>
-          <a:lstStyle/>
-          <a:p>
-            <a:pPr algn="l">
-              <a:lnSpc>
-                <a:spcPct val="110000"/>
-              </a:lnSpc>
-            </a:pPr>
-            <a:r>
-              <a:rPr sz="1450" b="0">
-                <a:solidFill>
-                  <a:srgbClr val="475569"/>
-                </a:solidFill>
-                <a:latin typeface="Arial"/>
-              </a:rPr>
-              <a:t>Agents with no owner or budget</a:t>
-            </a:r>
-          </a:p>
-        </p:txBody>
-      </p:sp>
-      <p:sp>
-        <p:nvSpPr>
-          <p:cNvPr id="24" name="Rounded Rectangle 23"/>
+              <a:t>No agent ships without an owner</a:t>
+            </a:r>
+          </a:p>
+        </p:txBody>
+      </p:sp>
+      <p:sp>
+        <p:nvSpPr>
+          <p:cNvPr id="20" name="Rounded Rectangle 19"/>
           <p:cNvSpPr/>
           <p:nvPr/>
         </p:nvSpPr>
@@ -21123,7 +20967,7 @@
       </p:sp>
       <p:sp>
         <p:nvSpPr>
-          <p:cNvPr id="25" name="Rounded Rectangle 24"/>
+          <p:cNvPr id="21" name="Rounded Rectangle 20"/>
           <p:cNvSpPr/>
           <p:nvPr/>
         </p:nvSpPr>
@@ -21182,14 +21026,14 @@
       </p:sp>
       <p:sp>
         <p:nvSpPr>
-          <p:cNvPr id="26" name="TextBox 25"/>
+          <p:cNvPr id="22" name="TextBox 21"/>
           <p:cNvSpPr txBox="1"/>
           <p:nvPr/>
         </p:nvSpPr>
         <p:spPr>
           <a:xfrm>
             <a:off x="1024128" y="4023359"/>
-            <a:ext cx="1645920" cy="384048"/>
+            <a:ext cx="1920240" cy="384048"/>
           </a:xfrm>
           <a:prstGeom prst="rect">
             <a:avLst/>
@@ -21221,14 +21065,14 @@
       </p:sp>
       <p:sp>
         <p:nvSpPr>
-          <p:cNvPr id="27" name="TextBox 26"/>
+          <p:cNvPr id="23" name="TextBox 22"/>
           <p:cNvSpPr txBox="1"/>
           <p:nvPr/>
         </p:nvSpPr>
         <p:spPr>
           <a:xfrm>
-            <a:off x="2697480" y="4023359"/>
-            <a:ext cx="2651760" cy="384048"/>
+            <a:off x="3017520" y="4023359"/>
+            <a:ext cx="4983480" cy="384048"/>
           </a:xfrm>
           <a:prstGeom prst="rect">
             <a:avLst/>
@@ -21247,59 +21091,20 @@
               </a:lnSpc>
             </a:pPr>
             <a:r>
-              <a:rPr sz="1450" b="0">
+              <a:rPr sz="1550" b="0">
                 <a:solidFill>
                   <a:srgbClr val="475569"/>
                 </a:solidFill>
                 <a:latin typeface="Arial"/>
               </a:rPr>
-              <a:t>Safe right now?</a:t>
-            </a:r>
-          </a:p>
-        </p:txBody>
-      </p:sp>
-      <p:sp>
-        <p:nvSpPr>
-          <p:cNvPr id="28" name="TextBox 27"/>
-          <p:cNvSpPr txBox="1"/>
-          <p:nvPr/>
-        </p:nvSpPr>
-        <p:spPr>
-          <a:xfrm>
-            <a:off x="5349240" y="4023359"/>
-            <a:ext cx="2697480" cy="384048"/>
-          </a:xfrm>
-          <a:prstGeom prst="rect">
-            <a:avLst/>
-          </a:prstGeom>
-          <a:noFill/>
-        </p:spPr>
-        <p:txBody>
-          <a:bodyPr wrap="square" lIns="73152" rIns="73152" tIns="36576" bIns="36576" anchor="ctr">
-            <a:spAutoFit/>
-          </a:bodyPr>
-          <a:lstStyle/>
-          <a:p>
-            <a:pPr algn="l">
-              <a:lnSpc>
-                <a:spcPct val="110000"/>
-              </a:lnSpc>
-            </a:pPr>
-            <a:r>
-              <a:rPr sz="1450" b="0">
-                <a:solidFill>
-                  <a:srgbClr val="475569"/>
-                </a:solidFill>
-                <a:latin typeface="Arial"/>
-              </a:rPr>
-              <a:t>Destructive tool calls</a:t>
-            </a:r>
-          </a:p>
-        </p:txBody>
-      </p:sp>
-      <p:sp>
-        <p:nvSpPr>
-          <p:cNvPr id="29" name="Rounded Rectangle 28"/>
+              <a:t>Risky calls blocked, every run</a:t>
+            </a:r>
+          </a:p>
+        </p:txBody>
+      </p:sp>
+      <p:sp>
+        <p:nvSpPr>
+          <p:cNvPr id="24" name="Rounded Rectangle 23"/>
           <p:cNvSpPr/>
           <p:nvPr/>
         </p:nvSpPr>
@@ -21347,7 +21152,7 @@
       </p:sp>
       <p:sp>
         <p:nvSpPr>
-          <p:cNvPr id="30" name="Rounded Rectangle 29"/>
+          <p:cNvPr id="25" name="Rounded Rectangle 24"/>
           <p:cNvSpPr/>
           <p:nvPr/>
         </p:nvSpPr>
@@ -21406,14 +21211,14 @@
       </p:sp>
       <p:sp>
         <p:nvSpPr>
-          <p:cNvPr id="31" name="TextBox 30"/>
+          <p:cNvPr id="26" name="TextBox 25"/>
           <p:cNvSpPr txBox="1"/>
           <p:nvPr/>
         </p:nvSpPr>
         <p:spPr>
           <a:xfrm>
             <a:off x="1024128" y="4590288"/>
-            <a:ext cx="1645920" cy="384048"/>
+            <a:ext cx="1920240" cy="384048"/>
           </a:xfrm>
           <a:prstGeom prst="rect">
             <a:avLst/>
@@ -21445,14 +21250,14 @@
       </p:sp>
       <p:sp>
         <p:nvSpPr>
-          <p:cNvPr id="32" name="TextBox 31"/>
+          <p:cNvPr id="27" name="TextBox 26"/>
           <p:cNvSpPr txBox="1"/>
           <p:nvPr/>
         </p:nvSpPr>
         <p:spPr>
           <a:xfrm>
-            <a:off x="2697480" y="4590288"/>
-            <a:ext cx="2651760" cy="384048"/>
+            <a:off x="3017520" y="4590288"/>
+            <a:ext cx="4983480" cy="384048"/>
           </a:xfrm>
           <a:prstGeom prst="rect">
             <a:avLst/>
@@ -21471,59 +21276,20 @@
               </a:lnSpc>
             </a:pPr>
             <a:r>
-              <a:rPr sz="1450" b="0">
+              <a:rPr sz="1550" b="0">
                 <a:solidFill>
                   <a:srgbClr val="475569"/>
                 </a:solidFill>
                 <a:latin typeface="Arial"/>
               </a:rPr>
-              <a:t>Should a person decide?</a:t>
-            </a:r>
-          </a:p>
-        </p:txBody>
-      </p:sp>
-      <p:sp>
-        <p:nvSpPr>
-          <p:cNvPr id="33" name="TextBox 32"/>
-          <p:cNvSpPr txBox="1"/>
-          <p:nvPr/>
-        </p:nvSpPr>
-        <p:spPr>
-          <a:xfrm>
-            <a:off x="5349240" y="4590288"/>
-            <a:ext cx="2697480" cy="384048"/>
-          </a:xfrm>
-          <a:prstGeom prst="rect">
-            <a:avLst/>
-          </a:prstGeom>
-          <a:noFill/>
-        </p:spPr>
-        <p:txBody>
-          <a:bodyPr wrap="square" lIns="73152" rIns="73152" tIns="36576" bIns="36576" anchor="ctr">
-            <a:spAutoFit/>
-          </a:bodyPr>
-          <a:lstStyle/>
-          <a:p>
-            <a:pPr algn="l">
-              <a:lnSpc>
-                <a:spcPct val="110000"/>
-              </a:lnSpc>
-            </a:pPr>
-            <a:r>
-              <a:rPr sz="1450" b="0">
-                <a:solidFill>
-                  <a:srgbClr val="475569"/>
-                </a:solidFill>
-                <a:latin typeface="Arial"/>
-              </a:rPr>
-              <a:t>Irreversible actions alone</a:t>
-            </a:r>
-          </a:p>
-        </p:txBody>
-      </p:sp>
-      <p:sp>
-        <p:nvSpPr>
-          <p:cNvPr id="34" name="Rounded Rectangle 33"/>
+              <a:t>A person decides the irreversible</a:t>
+            </a:r>
+          </a:p>
+        </p:txBody>
+      </p:sp>
+      <p:sp>
+        <p:nvSpPr>
+          <p:cNvPr id="28" name="Rounded Rectangle 27"/>
           <p:cNvSpPr/>
           <p:nvPr/>
         </p:nvSpPr>
@@ -21571,7 +21337,7 @@
       </p:sp>
       <p:sp>
         <p:nvSpPr>
-          <p:cNvPr id="35" name="Rounded Rectangle 34"/>
+          <p:cNvPr id="29" name="Rounded Rectangle 28"/>
           <p:cNvSpPr/>
           <p:nvPr/>
         </p:nvSpPr>
@@ -21630,14 +21396,14 @@
       </p:sp>
       <p:sp>
         <p:nvSpPr>
-          <p:cNvPr id="36" name="TextBox 35"/>
+          <p:cNvPr id="30" name="TextBox 29"/>
           <p:cNvSpPr txBox="1"/>
           <p:nvPr/>
         </p:nvSpPr>
         <p:spPr>
           <a:xfrm>
             <a:off x="1024128" y="5157216"/>
-            <a:ext cx="1645920" cy="384048"/>
+            <a:ext cx="1920240" cy="384048"/>
           </a:xfrm>
           <a:prstGeom prst="rect">
             <a:avLst/>
@@ -21669,14 +21435,14 @@
       </p:sp>
       <p:sp>
         <p:nvSpPr>
-          <p:cNvPr id="37" name="TextBox 36"/>
+          <p:cNvPr id="31" name="TextBox 30"/>
           <p:cNvSpPr txBox="1"/>
           <p:nvPr/>
         </p:nvSpPr>
         <p:spPr>
           <a:xfrm>
-            <a:off x="2697480" y="5157216"/>
-            <a:ext cx="2651760" cy="384048"/>
+            <a:off x="3017520" y="5157216"/>
+            <a:ext cx="4983480" cy="384048"/>
           </a:xfrm>
           <a:prstGeom prst="rect">
             <a:avLst/>
@@ -21695,59 +21461,20 @@
               </a:lnSpc>
             </a:pPr>
             <a:r>
-              <a:rPr sz="1450" b="0">
+              <a:rPr sz="1550" b="0">
                 <a:solidFill>
                   <a:srgbClr val="475569"/>
                 </a:solidFill>
                 <a:latin typeface="Arial"/>
               </a:rPr>
-              <a:t>What happened?</a:t>
-            </a:r>
-          </a:p>
-        </p:txBody>
-      </p:sp>
-      <p:sp>
-        <p:nvSpPr>
-          <p:cNvPr id="38" name="TextBox 37"/>
-          <p:cNvSpPr txBox="1"/>
-          <p:nvPr/>
-        </p:nvSpPr>
-        <p:spPr>
-          <a:xfrm>
-            <a:off x="5349240" y="5157216"/>
-            <a:ext cx="2697480" cy="384048"/>
-          </a:xfrm>
-          <a:prstGeom prst="rect">
-            <a:avLst/>
-          </a:prstGeom>
-          <a:noFill/>
-        </p:spPr>
-        <p:txBody>
-          <a:bodyPr wrap="square" lIns="73152" rIns="73152" tIns="36576" bIns="36576" anchor="ctr">
-            <a:spAutoFit/>
-          </a:bodyPr>
-          <a:lstStyle/>
-          <a:p>
-            <a:pPr algn="l">
-              <a:lnSpc>
-                <a:spcPct val="110000"/>
-              </a:lnSpc>
-            </a:pPr>
-            <a:r>
-              <a:rPr sz="1450" b="0">
-                <a:solidFill>
-                  <a:srgbClr val="475569"/>
-                </a:solidFill>
-                <a:latin typeface="Arial"/>
-              </a:rPr>
-              <a:t>Changes nobody can explain</a:t>
-            </a:r>
-          </a:p>
-        </p:txBody>
-      </p:sp>
-      <p:sp>
-        <p:nvSpPr>
-          <p:cNvPr id="39" name="Rounded Rectangle 38"/>
+              <a:t>Every step on the record</a:t>
+            </a:r>
+          </a:p>
+        </p:txBody>
+      </p:sp>
+      <p:sp>
+        <p:nvSpPr>
+          <p:cNvPr id="32" name="Rounded Rectangle 31"/>
           <p:cNvSpPr/>
           <p:nvPr/>
         </p:nvSpPr>
@@ -21793,7 +21520,7 @@
       </p:sp>
       <p:sp>
         <p:nvSpPr>
-          <p:cNvPr id="40" name="TextBox 39"/>
+          <p:cNvPr id="33" name="TextBox 32"/>
           <p:cNvSpPr txBox="1"/>
           <p:nvPr/>
         </p:nvSpPr>
@@ -21832,7 +21559,7 @@
       </p:sp>
       <p:sp>
         <p:nvSpPr>
-          <p:cNvPr id="41" name="TextBox 40"/>
+          <p:cNvPr id="34" name="TextBox 33"/>
           <p:cNvSpPr txBox="1"/>
           <p:nvPr/>
         </p:nvSpPr>
@@ -21883,7 +21610,7 @@
                 </a:solidFill>
                 <a:latin typeface="Arial"/>
               </a:rPr>
-              <a:t>Read only. Kubernetes and the gateway enforce it.</a:t>
+              <a:t>Read only. Enforced outside the agent.</a:t>
             </a:r>
           </a:p>
           <a:p>
@@ -21957,7 +21684,7 @@
       </p:sp>
       <p:sp>
         <p:nvSpPr>
-          <p:cNvPr id="42" name="Rounded Rectangle 41"/>
+          <p:cNvPr id="35" name="Rounded Rectangle 34"/>
           <p:cNvSpPr/>
           <p:nvPr/>
         </p:nvSpPr>
@@ -22018,7 +21745,7 @@
                 </a:solidFill>
                 <a:latin typeface="Arial"/>
               </a:rPr>
-              <a:t>Enforced on every run. Prompts can drift; enforcement doesn't.</a:t>
+              <a:t>Prompts drift. Enforcement doesn't.</a:t>
             </a:r>
           </a:p>
         </p:txBody>
@@ -22062,7 +21789,7 @@
                                           </p:stCondLst>
                                         </p:cTn>
                                         <p:tgtEl>
-                                          <p:spTgt spid="39"/>
+                                          <p:spTgt spid="32"/>
                                         </p:tgtEl>
                                         <p:attrNameLst>
                                           <p:attrName>style.visibility</p:attrName>
@@ -22089,7 +21816,7 @@
                                           </p:stCondLst>
                                         </p:cTn>
                                         <p:tgtEl>
-                                          <p:spTgt spid="40"/>
+                                          <p:spTgt spid="33"/>
                                         </p:tgtEl>
                                         <p:attrNameLst>
                                           <p:attrName>style.visibility</p:attrName>
@@ -22116,7 +21843,7 @@
                                           </p:stCondLst>
                                         </p:cTn>
                                         <p:tgtEl>
-                                          <p:spTgt spid="41"/>
+                                          <p:spTgt spid="34"/>
                                         </p:tgtEl>
                                         <p:attrNameLst>
                                           <p:attrName>style.visibility</p:attrName>
@@ -22161,7 +21888,7 @@
                                           </p:stCondLst>
                                         </p:cTn>
                                         <p:tgtEl>
-                                          <p:spTgt spid="42"/>
+                                          <p:spTgt spid="35"/>
                                         </p:tgtEl>
                                         <p:attrNameLst>
                                           <p:attrName>style.visibility</p:attrName>
@@ -22202,10 +21929,10 @@
       </p:par>
     </p:tnLst>
     <p:bldLst>
-      <p:bldP spid="39" grpId="0" animBg="1"/>
-      <p:bldP spid="40" grpId="0" animBg="1"/>
-      <p:bldP spid="41" grpId="0" animBg="1"/>
-      <p:bldP spid="42" grpId="0" animBg="1"/>
+      <p:bldP spid="32" grpId="0" animBg="1"/>
+      <p:bldP spid="33" grpId="0" animBg="1"/>
+      <p:bldP spid="34" grpId="0" animBg="1"/>
+      <p:bldP spid="35" grpId="0" animBg="1"/>
     </p:bldLst>
   </p:timing>
 </p:sld>

--- a/docs/presentation/KAOP_Customer_Pitch.pptx
+++ b/docs/presentation/KAOP_Customer_Pitch.pptx
@@ -21645,7 +21645,7 @@
                 </a:solidFill>
                 <a:latin typeface="Arial"/>
               </a:rPr>
-              <a:t>Proposes fixes. Can't apply them.</a:t>
+              <a:t>Proposes fixes. In this lab, a person applies them.</a:t>
             </a:r>
           </a:p>
           <a:p>

--- a/docs/presentation/KAOP_Customer_Pitch.pptx
+++ b/docs/presentation/KAOP_Customer_Pitch.pptx
@@ -13331,7 +13331,7 @@
                 </a:solidFill>
                 <a:latin typeface="Arial"/>
               </a:rPr>
-              <a:t>It separates what it saw from what it guessed, every change needs a person, and KAOP grades runs over time.</a:t>
+              <a:t>It separates what it saw from what it guessed, every change needs a person, and KAOP can grade runs with an evaluator.</a:t>
             </a:r>
           </a:p>
         </p:txBody>
@@ -22068,7 +22068,7 @@
                 </a:solidFill>
                 <a:latin typeface="Arial"/>
               </a:rPr>
-              <a:t>One record from the alert to the merged fix</a:t>
+              <a:t>One record from the alert to the reviewed fix</a:t>
             </a:r>
           </a:p>
         </p:txBody>
@@ -22238,7 +22238,7 @@
                 </a:solidFill>
                 <a:latin typeface="Arial"/>
               </a:rPr>
-              <a:t>Fleet health</a:t>
+              <a:t>Fleet</a:t>
             </a:r>
           </a:p>
         </p:txBody>
@@ -22578,7 +22578,7 @@
                 </a:solidFill>
                 <a:latin typeface="Arial"/>
               </a:rPr>
-              <a:t>Attention</a:t>
+              <a:t>Waiting on you</a:t>
             </a:r>
           </a:p>
         </p:txBody>
@@ -22617,7 +22617,7 @@
                 </a:solidFill>
                 <a:latin typeface="Arial"/>
               </a:rPr>
-              <a:t>Decisions waiting on a person.</a:t>
+              <a:t>Decisions that need a person.</a:t>
             </a:r>
           </a:p>
         </p:txBody>
@@ -22918,7 +22918,7 @@
                 </a:solidFill>
                 <a:latin typeface="Arial"/>
               </a:rPr>
-              <a:t>Spend</a:t>
+              <a:t>Cost</a:t>
             </a:r>
           </a:p>
         </p:txBody>
@@ -22957,7 +22957,7 @@
                 </a:solidFill>
                 <a:latin typeface="Arial"/>
               </a:rPr>
-              <a:t>Cost per agent and team, with budgets.</a:t>
+              <a:t>Cost per agent, with budgets.</a:t>
             </a:r>
           </a:p>
         </p:txBody>
@@ -26204,8 +26204,8 @@
                 </a:solidFill>
                 <a:latin typeface="Arial"/>
               </a:rPr>
-              <a:t>KAOP gateway blocks
-write tools</a:t>
+              <a:t>KAOP gateway allows
+read tools only</a:t>
             </a:r>
           </a:p>
         </p:txBody>

--- a/docs/presentation/KAOP_Customer_Pitch.pptx
+++ b/docs/presentation/KAOP_Customer_Pitch.pptx
@@ -26165,7 +26165,8 @@
                 </a:solidFill>
                 <a:latin typeface="Arial"/>
               </a:rPr>
-              <a:t>Nothing</a:t>
+              <a:t>Nothing but links
+to its evidence</a:t>
             </a:r>
           </a:p>
         </p:txBody>
@@ -26204,8 +26205,8 @@
                 </a:solidFill>
                 <a:latin typeface="Arial"/>
               </a:rPr>
-              <a:t>KAOP gateway allows
-read tools only</a:t>
+              <a:t>KAOP gateway allow
+list: 28 read tools</a:t>
             </a:r>
           </a:p>
         </p:txBody>

--- a/docs/presentation/KAOP_Customer_Pitch.pptx
+++ b/docs/presentation/KAOP_Customer_Pitch.pptx
@@ -14737,7 +14737,7 @@
         </p:nvSpPr>
         <p:spPr>
           <a:xfrm>
-            <a:off x="548640" y="1600200"/>
+            <a:off x="548640" y="1737360"/>
             <a:ext cx="6766560" cy="731520"/>
           </a:xfrm>
           <a:prstGeom prst="rect">
@@ -14776,7 +14776,7 @@
         </p:nvSpPr>
         <p:spPr>
           <a:xfrm>
-            <a:off x="548640" y="2377440"/>
+            <a:off x="548640" y="2514600"/>
             <a:ext cx="6583680" cy="457200"/>
           </a:xfrm>
           <a:prstGeom prst="rect">
@@ -14809,62 +14809,14 @@
       </p:sp>
       <p:sp>
         <p:nvSpPr>
-          <p:cNvPr id="7" name="Rounded Rectangle 6"/>
+          <p:cNvPr id="7" name="Rectangle 6"/>
           <p:cNvSpPr/>
           <p:nvPr/>
         </p:nvSpPr>
         <p:spPr>
           <a:xfrm>
-            <a:off x="548640" y="3246120"/>
-            <a:ext cx="6766560" cy="749808"/>
-          </a:xfrm>
-          <a:prstGeom prst="roundRect">
-            <a:avLst>
-              <a:gd name="adj" fmla="val 6000"/>
-            </a:avLst>
-          </a:prstGeom>
-          <a:solidFill>
-            <a:srgbClr val="FFFFFF"/>
-          </a:solidFill>
-          <a:ln w="12700">
-            <a:solidFill>
-              <a:srgbClr val="E2E8F0"/>
-            </a:solidFill>
-          </a:ln>
-          <a:effectLst/>
-        </p:spPr>
-        <p:style>
-          <a:lnRef idx="1">
-            <a:schemeClr val="accent1"/>
-          </a:lnRef>
-          <a:fillRef idx="3">
-            <a:schemeClr val="accent1"/>
-          </a:fillRef>
-          <a:effectRef idx="2">
-            <a:schemeClr val="accent1"/>
-          </a:effectRef>
-          <a:fontRef idx="minor">
-            <a:schemeClr val="lt1"/>
-          </a:fontRef>
-        </p:style>
-        <p:txBody>
-          <a:bodyPr rtlCol="0" anchor="ctr"/>
-          <a:lstStyle/>
-          <a:p>
-            <a:pPr algn="ctr"/>
-          </a:p>
-        </p:txBody>
-      </p:sp>
-      <p:sp>
-        <p:nvSpPr>
-          <p:cNvPr id="8" name="Rectangle 7"/>
-          <p:cNvSpPr/>
-          <p:nvPr/>
-        </p:nvSpPr>
-        <p:spPr>
-          <a:xfrm>
-            <a:off x="777240" y="3429000"/>
-            <a:ext cx="73152" cy="384048"/>
+            <a:off x="548640" y="3429000"/>
+            <a:ext cx="73152" cy="1188720"/>
           </a:xfrm>
           <a:prstGeom prst="rect">
             <a:avLst/>
@@ -14901,14 +14853,14 @@
       </p:sp>
       <p:sp>
         <p:nvSpPr>
-          <p:cNvPr id="9" name="TextBox 8"/>
+          <p:cNvPr id="8" name="TextBox 7"/>
           <p:cNvSpPr txBox="1"/>
           <p:nvPr/>
         </p:nvSpPr>
         <p:spPr>
           <a:xfrm>
-            <a:off x="960120" y="3319272"/>
-            <a:ext cx="1645920" cy="603504"/>
+            <a:off x="868680" y="3383280"/>
+            <a:ext cx="6309360" cy="1280160"/>
           </a:xfrm>
           <a:prstGeom prst="rect">
             <a:avLst/>
@@ -14916,410 +14868,31 @@
           <a:noFill/>
         </p:spPr>
         <p:txBody>
-          <a:bodyPr wrap="square" lIns="73152" rIns="73152" tIns="36576" bIns="36576" anchor="ctr">
+          <a:bodyPr wrap="square" lIns="73152" rIns="73152" tIns="36576" bIns="36576" anchor="t">
             <a:spAutoFit/>
           </a:bodyPr>
           <a:lstStyle/>
           <a:p>
             <a:pPr algn="l">
               <a:lnSpc>
-                <a:spcPct val="110000"/>
-              </a:lnSpc>
-            </a:pPr>
-            <a:r>
-              <a:rPr sz="1500" b="1">
+                <a:spcPct val="115000"/>
+              </a:lnSpc>
+            </a:pPr>
+            <a:r>
+              <a:rPr sz="2400" b="1">
                 <a:solidFill>
                   <a:srgbClr val="0F172A"/>
                 </a:solidFill>
                 <a:latin typeface="Arial"/>
               </a:rPr>
-              <a:t>Focus</a:t>
-            </a:r>
-          </a:p>
-        </p:txBody>
-      </p:sp>
-      <p:sp>
-        <p:nvSpPr>
-          <p:cNvPr id="10" name="TextBox 9"/>
-          <p:cNvSpPr txBox="1"/>
-          <p:nvPr/>
-        </p:nvSpPr>
-        <p:spPr>
-          <a:xfrm>
-            <a:off x="2606040" y="3319272"/>
-            <a:ext cx="4572000" cy="603504"/>
-          </a:xfrm>
-          <a:prstGeom prst="rect">
-            <a:avLst/>
-          </a:prstGeom>
-          <a:noFill/>
-        </p:spPr>
-        <p:txBody>
-          <a:bodyPr wrap="square" lIns="73152" rIns="73152" tIns="36576" bIns="36576" anchor="ctr">
-            <a:spAutoFit/>
-          </a:bodyPr>
-          <a:lstStyle/>
-          <a:p>
-            <a:pPr algn="l">
-              <a:lnSpc>
-                <a:spcPct val="110000"/>
-              </a:lnSpc>
-            </a:pPr>
-            <a:r>
-              <a:rPr sz="1500" b="0">
-                <a:solidFill>
-                  <a:srgbClr val="475569"/>
-                </a:solidFill>
-                <a:latin typeface="Arial"/>
-              </a:rPr>
-              <a:t>Helping platform teams adopt AI agents safely.</a:t>
-            </a:r>
-          </a:p>
-        </p:txBody>
-      </p:sp>
-      <p:sp>
-        <p:nvSpPr>
-          <p:cNvPr id="11" name="Rounded Rectangle 10"/>
-          <p:cNvSpPr/>
-          <p:nvPr/>
-        </p:nvSpPr>
-        <p:spPr>
-          <a:xfrm>
-            <a:off x="548640" y="4114800"/>
-            <a:ext cx="6766560" cy="749808"/>
-          </a:xfrm>
-          <a:prstGeom prst="roundRect">
-            <a:avLst>
-              <a:gd name="adj" fmla="val 6000"/>
-            </a:avLst>
-          </a:prstGeom>
-          <a:solidFill>
-            <a:srgbClr val="FFFFFF"/>
-          </a:solidFill>
-          <a:ln w="12700">
-            <a:solidFill>
-              <a:srgbClr val="E2E8F0"/>
-            </a:solidFill>
-          </a:ln>
-          <a:effectLst/>
-        </p:spPr>
-        <p:style>
-          <a:lnRef idx="1">
-            <a:schemeClr val="accent1"/>
-          </a:lnRef>
-          <a:fillRef idx="3">
-            <a:schemeClr val="accent1"/>
-          </a:fillRef>
-          <a:effectRef idx="2">
-            <a:schemeClr val="accent1"/>
-          </a:effectRef>
-          <a:fontRef idx="minor">
-            <a:schemeClr val="lt1"/>
-          </a:fontRef>
-        </p:style>
-        <p:txBody>
-          <a:bodyPr rtlCol="0" anchor="ctr"/>
-          <a:lstStyle/>
-          <a:p>
-            <a:pPr algn="ctr"/>
-          </a:p>
-        </p:txBody>
-      </p:sp>
-      <p:sp>
-        <p:nvSpPr>
-          <p:cNvPr id="12" name="Rectangle 11"/>
-          <p:cNvSpPr/>
-          <p:nvPr/>
-        </p:nvSpPr>
-        <p:spPr>
-          <a:xfrm>
-            <a:off x="777240" y="4297680"/>
-            <a:ext cx="73152" cy="384048"/>
-          </a:xfrm>
-          <a:prstGeom prst="rect">
-            <a:avLst/>
-          </a:prstGeom>
-          <a:solidFill>
-            <a:srgbClr val="0F766E"/>
-          </a:solidFill>
-          <a:ln>
-            <a:noFill/>
-          </a:ln>
-          <a:effectLst/>
-        </p:spPr>
-        <p:style>
-          <a:lnRef idx="1">
-            <a:schemeClr val="accent1"/>
-          </a:lnRef>
-          <a:fillRef idx="3">
-            <a:schemeClr val="accent1"/>
-          </a:fillRef>
-          <a:effectRef idx="2">
-            <a:schemeClr val="accent1"/>
-          </a:effectRef>
-          <a:fontRef idx="minor">
-            <a:schemeClr val="lt1"/>
-          </a:fontRef>
-        </p:style>
-        <p:txBody>
-          <a:bodyPr rtlCol="0" anchor="ctr"/>
-          <a:lstStyle/>
-          <a:p>
-            <a:pPr algn="ctr"/>
-          </a:p>
-        </p:txBody>
-      </p:sp>
-      <p:sp>
-        <p:nvSpPr>
-          <p:cNvPr id="13" name="TextBox 12"/>
-          <p:cNvSpPr txBox="1"/>
-          <p:nvPr/>
-        </p:nvSpPr>
-        <p:spPr>
-          <a:xfrm>
-            <a:off x="960120" y="4187952"/>
-            <a:ext cx="1645920" cy="603504"/>
-          </a:xfrm>
-          <a:prstGeom prst="rect">
-            <a:avLst/>
-          </a:prstGeom>
-          <a:noFill/>
-        </p:spPr>
-        <p:txBody>
-          <a:bodyPr wrap="square" lIns="73152" rIns="73152" tIns="36576" bIns="36576" anchor="ctr">
-            <a:spAutoFit/>
-          </a:bodyPr>
-          <a:lstStyle/>
-          <a:p>
-            <a:pPr algn="l">
-              <a:lnSpc>
-                <a:spcPct val="110000"/>
-              </a:lnSpc>
-            </a:pPr>
-            <a:r>
-              <a:rPr sz="1500" b="1">
-                <a:solidFill>
-                  <a:srgbClr val="0F172A"/>
-                </a:solidFill>
-                <a:latin typeface="Arial"/>
-              </a:rPr>
-              <a:t>For today</a:t>
-            </a:r>
-          </a:p>
-        </p:txBody>
-      </p:sp>
-      <p:sp>
-        <p:nvSpPr>
-          <p:cNvPr id="14" name="TextBox 13"/>
-          <p:cNvSpPr txBox="1"/>
-          <p:nvPr/>
-        </p:nvSpPr>
-        <p:spPr>
-          <a:xfrm>
-            <a:off x="2606040" y="4187952"/>
-            <a:ext cx="4572000" cy="603504"/>
-          </a:xfrm>
-          <a:prstGeom prst="rect">
-            <a:avLst/>
-          </a:prstGeom>
-          <a:noFill/>
-        </p:spPr>
-        <p:txBody>
-          <a:bodyPr wrap="square" lIns="73152" rIns="73152" tIns="36576" bIns="36576" anchor="ctr">
-            <a:spAutoFit/>
-          </a:bodyPr>
-          <a:lstStyle/>
-          <a:p>
-            <a:pPr algn="l">
-              <a:lnSpc>
-                <a:spcPct val="110000"/>
-              </a:lnSpc>
-            </a:pPr>
-            <a:r>
-              <a:rPr sz="1500" b="0">
-                <a:solidFill>
-                  <a:srgbClr val="475569"/>
-                </a:solidFill>
-                <a:latin typeface="Arial"/>
-              </a:rPr>
-              <a:t>I built a production-like lab end to end: Kubernetes, Grafana Cloud and KAOP.</a:t>
-            </a:r>
-          </a:p>
-        </p:txBody>
-      </p:sp>
-      <p:sp>
-        <p:nvSpPr>
-          <p:cNvPr id="15" name="Rounded Rectangle 14"/>
-          <p:cNvSpPr/>
-          <p:nvPr/>
-        </p:nvSpPr>
-        <p:spPr>
-          <a:xfrm>
-            <a:off x="548640" y="4983479"/>
-            <a:ext cx="6766560" cy="749808"/>
-          </a:xfrm>
-          <a:prstGeom prst="roundRect">
-            <a:avLst>
-              <a:gd name="adj" fmla="val 6000"/>
-            </a:avLst>
-          </a:prstGeom>
-          <a:solidFill>
-            <a:srgbClr val="FFFFFF"/>
-          </a:solidFill>
-          <a:ln w="12700">
-            <a:solidFill>
-              <a:srgbClr val="E2E8F0"/>
-            </a:solidFill>
-          </a:ln>
-          <a:effectLst/>
-        </p:spPr>
-        <p:style>
-          <a:lnRef idx="1">
-            <a:schemeClr val="accent1"/>
-          </a:lnRef>
-          <a:fillRef idx="3">
-            <a:schemeClr val="accent1"/>
-          </a:fillRef>
-          <a:effectRef idx="2">
-            <a:schemeClr val="accent1"/>
-          </a:effectRef>
-          <a:fontRef idx="minor">
-            <a:schemeClr val="lt1"/>
-          </a:fontRef>
-        </p:style>
-        <p:txBody>
-          <a:bodyPr rtlCol="0" anchor="ctr"/>
-          <a:lstStyle/>
-          <a:p>
-            <a:pPr algn="ctr"/>
-          </a:p>
-        </p:txBody>
-      </p:sp>
-      <p:sp>
-        <p:nvSpPr>
-          <p:cNvPr id="16" name="Rectangle 15"/>
-          <p:cNvSpPr/>
-          <p:nvPr/>
-        </p:nvSpPr>
-        <p:spPr>
-          <a:xfrm>
-            <a:off x="777240" y="5166359"/>
-            <a:ext cx="73152" cy="384048"/>
-          </a:xfrm>
-          <a:prstGeom prst="rect">
-            <a:avLst/>
-          </a:prstGeom>
-          <a:solidFill>
-            <a:srgbClr val="B91C1C"/>
-          </a:solidFill>
-          <a:ln>
-            <a:noFill/>
-          </a:ln>
-          <a:effectLst/>
-        </p:spPr>
-        <p:style>
-          <a:lnRef idx="1">
-            <a:schemeClr val="accent1"/>
-          </a:lnRef>
-          <a:fillRef idx="3">
-            <a:schemeClr val="accent1"/>
-          </a:fillRef>
-          <a:effectRef idx="2">
-            <a:schemeClr val="accent1"/>
-          </a:effectRef>
-          <a:fontRef idx="minor">
-            <a:schemeClr val="lt1"/>
-          </a:fontRef>
-        </p:style>
-        <p:txBody>
-          <a:bodyPr rtlCol="0" anchor="ctr"/>
-          <a:lstStyle/>
-          <a:p>
-            <a:pPr algn="ctr"/>
-          </a:p>
-        </p:txBody>
-      </p:sp>
-      <p:sp>
-        <p:nvSpPr>
-          <p:cNvPr id="17" name="TextBox 16"/>
-          <p:cNvSpPr txBox="1"/>
-          <p:nvPr/>
-        </p:nvSpPr>
-        <p:spPr>
-          <a:xfrm>
-            <a:off x="960120" y="5056631"/>
-            <a:ext cx="1645920" cy="603504"/>
-          </a:xfrm>
-          <a:prstGeom prst="rect">
-            <a:avLst/>
-          </a:prstGeom>
-          <a:noFill/>
-        </p:spPr>
-        <p:txBody>
-          <a:bodyPr wrap="square" lIns="73152" rIns="73152" tIns="36576" bIns="36576" anchor="ctr">
-            <a:spAutoFit/>
-          </a:bodyPr>
-          <a:lstStyle/>
-          <a:p>
-            <a:pPr algn="l">
-              <a:lnSpc>
-                <a:spcPct val="110000"/>
-              </a:lnSpc>
-            </a:pPr>
-            <a:r>
-              <a:rPr sz="1500" b="1">
-                <a:solidFill>
-                  <a:srgbClr val="0F172A"/>
-                </a:solidFill>
-                <a:latin typeface="Arial"/>
-              </a:rPr>
-              <a:t>My rule</a:t>
-            </a:r>
-          </a:p>
-        </p:txBody>
-      </p:sp>
-      <p:sp>
-        <p:nvSpPr>
-          <p:cNvPr id="18" name="TextBox 17"/>
-          <p:cNvSpPr txBox="1"/>
-          <p:nvPr/>
-        </p:nvSpPr>
-        <p:spPr>
-          <a:xfrm>
-            <a:off x="2606040" y="5056631"/>
-            <a:ext cx="4572000" cy="603504"/>
-          </a:xfrm>
-          <a:prstGeom prst="rect">
-            <a:avLst/>
-          </a:prstGeom>
-          <a:noFill/>
-        </p:spPr>
-        <p:txBody>
-          <a:bodyPr wrap="square" lIns="73152" rIns="73152" tIns="36576" bIns="36576" anchor="ctr">
-            <a:spAutoFit/>
-          </a:bodyPr>
-          <a:lstStyle/>
-          <a:p>
-            <a:pPr algn="l">
-              <a:lnSpc>
-                <a:spcPct val="110000"/>
-              </a:lnSpc>
-            </a:pPr>
-            <a:r>
-              <a:rPr sz="1500" b="0">
-                <a:solidFill>
-                  <a:srgbClr val="475569"/>
-                </a:solidFill>
-                <a:latin typeface="Arial"/>
-              </a:rPr>
-              <a:t>Everything you'll see, I tested on that lab first.</a:t>
-            </a:r>
-          </a:p>
-        </p:txBody>
-      </p:sp>
-      <p:sp>
-        <p:nvSpPr>
-          <p:cNvPr id="19" name="Rounded Rectangle 18"/>
+              <a:t>I help platform teams put AI agents into production safely.</a:t>
+            </a:r>
+          </a:p>
+        </p:txBody>
+      </p:sp>
+      <p:sp>
+        <p:nvSpPr>
+          <p:cNvPr id="9" name="Rounded Rectangle 8"/>
           <p:cNvSpPr/>
           <p:nvPr/>
         </p:nvSpPr>
@@ -15365,7 +14938,7 @@
       </p:sp>
       <p:sp>
         <p:nvSpPr>
-          <p:cNvPr id="20" name="TextBox 19"/>
+          <p:cNvPr id="10" name="TextBox 9"/>
           <p:cNvSpPr txBox="1"/>
           <p:nvPr/>
         </p:nvSpPr>
@@ -15397,21 +14970,21 @@
                 </a:solidFill>
                 <a:latin typeface="Arial"/>
               </a:rPr>
-              <a:t>WHAT I CARE ABOUT</a:t>
-            </a:r>
-          </a:p>
-        </p:txBody>
-      </p:sp>
-      <p:sp>
-        <p:nvSpPr>
-          <p:cNvPr id="21" name="TextBox 20"/>
+              <a:t>WHY WE'RE HERE</a:t>
+            </a:r>
+          </a:p>
+        </p:txBody>
+      </p:sp>
+      <p:sp>
+        <p:nvSpPr>
+          <p:cNvPr id="11" name="TextBox 10"/>
           <p:cNvSpPr txBox="1"/>
           <p:nvPr/>
         </p:nvSpPr>
         <p:spPr>
           <a:xfrm>
             <a:off x="7955279" y="2240280"/>
-            <a:ext cx="3474720" cy="3291840"/>
+            <a:ext cx="3474720" cy="1828800"/>
           </a:xfrm>
           <a:prstGeom prst="rect">
             <a:avLst/>
@@ -15429,7 +15002,7 @@
                 <a:spcPct val="115000"/>
               </a:lnSpc>
               <a:spcAft>
-                <a:spcPts val="1200"/>
+                <a:spcPts val="1000"/>
               </a:spcAft>
             </a:pPr>
             <a:r>
@@ -15439,7 +15012,7 @@
                 </a:solidFill>
                 <a:latin typeface="Arial"/>
               </a:rPr>
-              <a:t>Platform teams saying yes to AI agents</a:t>
+              <a:t>Your teams want more AI agents.</a:t>
             </a:r>
           </a:p>
           <a:p>
@@ -15449,13 +15022,96 @@
               </a:lnSpc>
             </a:pPr>
             <a:r>
-              <a:rPr sz="1600" b="0">
+              <a:rPr sz="2000" b="1">
+                <a:solidFill>
+                  <a:srgbClr val="FFFFFF"/>
+                </a:solidFill>
+                <a:latin typeface="Arial"/>
+              </a:rPr>
+              <a:t>You need to stay in control of them.</a:t>
+            </a:r>
+          </a:p>
+        </p:txBody>
+      </p:sp>
+      <p:sp>
+        <p:nvSpPr>
+          <p:cNvPr id="12" name="Rectangle 11"/>
+          <p:cNvSpPr/>
+          <p:nvPr/>
+        </p:nvSpPr>
+        <p:spPr>
+          <a:xfrm>
+            <a:off x="7955279" y="4160520"/>
+            <a:ext cx="3383280" cy="18288"/>
+          </a:xfrm>
+          <a:prstGeom prst="rect">
+            <a:avLst/>
+          </a:prstGeom>
+          <a:solidFill>
+            <a:srgbClr val="CBD5E1"/>
+          </a:solidFill>
+          <a:ln>
+            <a:noFill/>
+          </a:ln>
+          <a:effectLst/>
+        </p:spPr>
+        <p:style>
+          <a:lnRef idx="1">
+            <a:schemeClr val="accent1"/>
+          </a:lnRef>
+          <a:fillRef idx="3">
+            <a:schemeClr val="accent1"/>
+          </a:fillRef>
+          <a:effectRef idx="2">
+            <a:schemeClr val="accent1"/>
+          </a:effectRef>
+          <a:fontRef idx="minor">
+            <a:schemeClr val="lt1"/>
+          </a:fontRef>
+        </p:style>
+        <p:txBody>
+          <a:bodyPr rtlCol="0" anchor="ctr"/>
+          <a:lstStyle/>
+          <a:p>
+            <a:pPr algn="ctr"/>
+          </a:p>
+        </p:txBody>
+      </p:sp>
+      <p:sp>
+        <p:nvSpPr>
+          <p:cNvPr id="13" name="TextBox 12"/>
+          <p:cNvSpPr txBox="1"/>
+          <p:nvPr/>
+        </p:nvSpPr>
+        <p:spPr>
+          <a:xfrm>
+            <a:off x="7955279" y="4343400"/>
+            <a:ext cx="3474720" cy="1188720"/>
+          </a:xfrm>
+          <a:prstGeom prst="rect">
+            <a:avLst/>
+          </a:prstGeom>
+          <a:noFill/>
+        </p:spPr>
+        <p:txBody>
+          <a:bodyPr wrap="square" lIns="73152" rIns="73152" tIns="36576" bIns="36576" anchor="t">
+            <a:spAutoFit/>
+          </a:bodyPr>
+          <a:lstStyle/>
+          <a:p>
+            <a:pPr algn="l">
+              <a:lnSpc>
+                <a:spcPct val="115000"/>
+              </a:lnSpc>
+            </a:pPr>
+            <a:r>
+              <a:rPr sz="1700" b="0">
                 <a:solidFill>
                   <a:srgbClr val="CBD5E1"/>
                 </a:solidFill>
                 <a:latin typeface="Arial"/>
               </a:rPr>
-              <a:t>without losing control of what those agents can touch, or the record of what they did.</a:t>
+              <a:t>Today: KAOP doing both, on a live incident.</a:t>
             </a:r>
           </a:p>
         </p:txBody>
@@ -15928,7 +15584,7 @@
                 </a:solidFill>
                 <a:latin typeface="Arial"/>
               </a:rPr>
-              <a:t>How KAOP addresses them</a:t>
+              <a:t>How KAOP solves them</a:t>
             </a:r>
           </a:p>
         </p:txBody>
@@ -15967,7 +15623,7 @@
                 </a:solidFill>
                 <a:latin typeface="Arial"/>
               </a:rPr>
-              <a:t>Operating model, governance, visibility.</a:t>
+              <a:t>Owners, limits and a record.</a:t>
             </a:r>
           </a:p>
         </p:txBody>
@@ -16560,12 +16216,12 @@
         </p:nvSpPr>
         <p:spPr>
           <a:xfrm>
-            <a:off x="7909560" y="2523744"/>
-            <a:ext cx="3520440" cy="402336"/>
+            <a:off x="7909560" y="2487168"/>
+            <a:ext cx="3520440" cy="530352"/>
           </a:xfrm>
           <a:prstGeom prst="roundRect">
             <a:avLst>
-              <a:gd name="adj" fmla="val 20000"/>
+              <a:gd name="adj" fmla="val 15000"/>
             </a:avLst>
           </a:prstGeom>
           <a:solidFill>
@@ -16606,7 +16262,7 @@
         </p:nvSpPr>
         <p:spPr>
           <a:xfrm>
-            <a:off x="8001000" y="2587751"/>
+            <a:off x="8001000" y="2606040"/>
             <a:ext cx="292608" cy="292608"/>
           </a:xfrm>
           <a:prstGeom prst="roundRect">
@@ -16665,8 +16321,8 @@
         </p:nvSpPr>
         <p:spPr>
           <a:xfrm>
-            <a:off x="8366760" y="2551175"/>
-            <a:ext cx="3017520" cy="365760"/>
+            <a:off x="8366760" y="2505456"/>
+            <a:ext cx="3017520" cy="493776"/>
           </a:xfrm>
           <a:prstGeom prst="rect">
             <a:avLst/>
@@ -16681,79 +16337,51 @@
           <a:p>
             <a:pPr algn="l">
               <a:lnSpc>
-                <a:spcPct val="110000"/>
-              </a:lnSpc>
-            </a:pPr>
-            <a:r>
-              <a:rPr sz="1400" b="0">
+                <a:spcPct val="100000"/>
+              </a:lnSpc>
+            </a:pPr>
+            <a:r>
+              <a:rPr sz="1300" b="1">
                 <a:solidFill>
                   <a:srgbClr val="FFFFFF"/>
                 </a:solidFill>
                 <a:latin typeface="Arial"/>
               </a:rPr>
-              <a:t>Grafana Cloud fires a real alert</a:t>
-            </a:r>
-          </a:p>
-        </p:txBody>
-      </p:sp>
-      <p:sp>
-        <p:nvSpPr>
-          <p:cNvPr id="31" name="Down Arrow 30"/>
+              <a:t>A real alert fires in Grafana</a:t>
+            </a:r>
+          </a:p>
+          <a:p>
+            <a:pPr algn="l">
+              <a:lnSpc>
+                <a:spcPct val="100000"/>
+              </a:lnSpc>
+            </a:pPr>
+            <a:r>
+              <a:rPr sz="1100" b="0">
+                <a:solidFill>
+                  <a:srgbClr val="CBD5E1"/>
+                </a:solidFill>
+                <a:latin typeface="Arial"/>
+              </a:rPr>
+              <a:t>KAOP starts work on its own</a:t>
+            </a:r>
+          </a:p>
+        </p:txBody>
+      </p:sp>
+      <p:sp>
+        <p:nvSpPr>
+          <p:cNvPr id="31" name="Rounded Rectangle 30"/>
           <p:cNvSpPr/>
           <p:nvPr/>
         </p:nvSpPr>
         <p:spPr>
           <a:xfrm>
-            <a:off x="8074152" y="2962656"/>
-            <a:ext cx="219456" cy="155448"/>
-          </a:xfrm>
-          <a:prstGeom prst="downArrow">
-            <a:avLst/>
-          </a:prstGeom>
-          <a:solidFill>
-            <a:srgbClr val="CBD5E1"/>
-          </a:solidFill>
-          <a:ln>
-            <a:noFill/>
-          </a:ln>
-          <a:effectLst/>
-        </p:spPr>
-        <p:style>
-          <a:lnRef idx="1">
-            <a:schemeClr val="accent1"/>
-          </a:lnRef>
-          <a:fillRef idx="3">
-            <a:schemeClr val="accent1"/>
-          </a:fillRef>
-          <a:effectRef idx="2">
-            <a:schemeClr val="accent1"/>
-          </a:effectRef>
-          <a:fontRef idx="minor">
-            <a:schemeClr val="lt1"/>
-          </a:fontRef>
-        </p:style>
-        <p:txBody>
-          <a:bodyPr rtlCol="0" anchor="ctr"/>
-          <a:lstStyle/>
-          <a:p>
-            <a:pPr algn="ctr"/>
-          </a:p>
-        </p:txBody>
-      </p:sp>
-      <p:sp>
-        <p:nvSpPr>
-          <p:cNvPr id="32" name="Rounded Rectangle 31"/>
-          <p:cNvSpPr/>
-          <p:nvPr/>
-        </p:nvSpPr>
-        <p:spPr>
-          <a:xfrm>
-            <a:off x="7909560" y="3145536"/>
-            <a:ext cx="3520440" cy="402336"/>
+            <a:off x="7909560" y="3099816"/>
+            <a:ext cx="3520440" cy="530352"/>
           </a:xfrm>
           <a:prstGeom prst="roundRect">
             <a:avLst>
-              <a:gd name="adj" fmla="val 20000"/>
+              <a:gd name="adj" fmla="val 15000"/>
             </a:avLst>
           </a:prstGeom>
           <a:solidFill>
@@ -16788,13 +16416,13 @@
       </p:sp>
       <p:sp>
         <p:nvSpPr>
-          <p:cNvPr id="33" name="Rounded Rectangle 32"/>
+          <p:cNvPr id="32" name="Rounded Rectangle 31"/>
           <p:cNvSpPr/>
           <p:nvPr/>
         </p:nvSpPr>
         <p:spPr>
           <a:xfrm>
-            <a:off x="8001000" y="3209544"/>
+            <a:off x="8001000" y="3218688"/>
             <a:ext cx="292608" cy="292608"/>
           </a:xfrm>
           <a:prstGeom prst="roundRect">
@@ -16847,14 +16475,14 @@
       </p:sp>
       <p:sp>
         <p:nvSpPr>
-          <p:cNvPr id="34" name="TextBox 33"/>
+          <p:cNvPr id="33" name="TextBox 32"/>
           <p:cNvSpPr txBox="1"/>
           <p:nvPr/>
         </p:nvSpPr>
         <p:spPr>
           <a:xfrm>
-            <a:off x="8366760" y="3172968"/>
-            <a:ext cx="3017520" cy="365760"/>
+            <a:off x="8366760" y="3118104"/>
+            <a:ext cx="3017520" cy="493776"/>
           </a:xfrm>
           <a:prstGeom prst="rect">
             <a:avLst/>
@@ -16869,79 +16497,51 @@
           <a:p>
             <a:pPr algn="l">
               <a:lnSpc>
-                <a:spcPct val="110000"/>
-              </a:lnSpc>
-            </a:pPr>
-            <a:r>
-              <a:rPr sz="1400" b="0">
+                <a:spcPct val="100000"/>
+              </a:lnSpc>
+            </a:pPr>
+            <a:r>
+              <a:rPr sz="1300" b="1">
                 <a:solidFill>
                   <a:srgbClr val="FFFFFF"/>
                 </a:solidFill>
                 <a:latin typeface="Arial"/>
               </a:rPr>
-              <a:t>Two agents investigate at once</a:t>
-            </a:r>
-          </a:p>
-        </p:txBody>
-      </p:sp>
-      <p:sp>
-        <p:nvSpPr>
-          <p:cNvPr id="35" name="Down Arrow 34"/>
+              <a:t>Two agents investigate</a:t>
+            </a:r>
+          </a:p>
+          <a:p>
+            <a:pPr algn="l">
+              <a:lnSpc>
+                <a:spcPct val="100000"/>
+              </a:lnSpc>
+            </a:pPr>
+            <a:r>
+              <a:rPr sz="1100" b="0">
+                <a:solidFill>
+                  <a:srgbClr val="CBD5E1"/>
+                </a:solidFill>
+                <a:latin typeface="Arial"/>
+              </a:rPr>
+              <a:t>Root cause, with the evidence</a:t>
+            </a:r>
+          </a:p>
+        </p:txBody>
+      </p:sp>
+      <p:sp>
+        <p:nvSpPr>
+          <p:cNvPr id="34" name="Rounded Rectangle 33"/>
           <p:cNvSpPr/>
           <p:nvPr/>
         </p:nvSpPr>
         <p:spPr>
           <a:xfrm>
-            <a:off x="8074152" y="3584448"/>
-            <a:ext cx="219456" cy="155448"/>
-          </a:xfrm>
-          <a:prstGeom prst="downArrow">
-            <a:avLst/>
-          </a:prstGeom>
-          <a:solidFill>
-            <a:srgbClr val="CBD5E1"/>
-          </a:solidFill>
-          <a:ln>
-            <a:noFill/>
-          </a:ln>
-          <a:effectLst/>
-        </p:spPr>
-        <p:style>
-          <a:lnRef idx="1">
-            <a:schemeClr val="accent1"/>
-          </a:lnRef>
-          <a:fillRef idx="3">
-            <a:schemeClr val="accent1"/>
-          </a:fillRef>
-          <a:effectRef idx="2">
-            <a:schemeClr val="accent1"/>
-          </a:effectRef>
-          <a:fontRef idx="minor">
-            <a:schemeClr val="lt1"/>
-          </a:fontRef>
-        </p:style>
-        <p:txBody>
-          <a:bodyPr rtlCol="0" anchor="ctr"/>
-          <a:lstStyle/>
-          <a:p>
-            <a:pPr algn="ctr"/>
-          </a:p>
-        </p:txBody>
-      </p:sp>
-      <p:sp>
-        <p:nvSpPr>
-          <p:cNvPr id="36" name="Rounded Rectangle 35"/>
-          <p:cNvSpPr/>
-          <p:nvPr/>
-        </p:nvSpPr>
-        <p:spPr>
-          <a:xfrm>
-            <a:off x="7909560" y="3767328"/>
-            <a:ext cx="3520440" cy="402336"/>
+            <a:off x="7909560" y="3712464"/>
+            <a:ext cx="3520440" cy="530352"/>
           </a:xfrm>
           <a:prstGeom prst="roundRect">
             <a:avLst>
-              <a:gd name="adj" fmla="val 20000"/>
+              <a:gd name="adj" fmla="val 15000"/>
             </a:avLst>
           </a:prstGeom>
           <a:solidFill>
@@ -16976,7 +16576,7 @@
       </p:sp>
       <p:sp>
         <p:nvSpPr>
-          <p:cNvPr id="37" name="Rounded Rectangle 36"/>
+          <p:cNvPr id="35" name="Rounded Rectangle 34"/>
           <p:cNvSpPr/>
           <p:nvPr/>
         </p:nvSpPr>
@@ -17035,14 +16635,14 @@
       </p:sp>
       <p:sp>
         <p:nvSpPr>
-          <p:cNvPr id="38" name="TextBox 37"/>
+          <p:cNvPr id="36" name="TextBox 35"/>
           <p:cNvSpPr txBox="1"/>
           <p:nvPr/>
         </p:nvSpPr>
         <p:spPr>
           <a:xfrm>
-            <a:off x="8366760" y="3794760"/>
-            <a:ext cx="3017520" cy="365760"/>
+            <a:off x="8366760" y="3730752"/>
+            <a:ext cx="3017520" cy="493776"/>
           </a:xfrm>
           <a:prstGeom prst="rect">
             <a:avLst/>
@@ -17057,79 +16657,51 @@
           <a:p>
             <a:pPr algn="l">
               <a:lnSpc>
-                <a:spcPct val="110000"/>
-              </a:lnSpc>
-            </a:pPr>
-            <a:r>
-              <a:rPr sz="1400" b="0">
+                <a:spcPct val="100000"/>
+              </a:lnSpc>
+            </a:pPr>
+            <a:r>
+              <a:rPr sz="1300" b="1">
                 <a:solidFill>
                   <a:srgbClr val="FFFFFF"/>
                 </a:solidFill>
                 <a:latin typeface="Arial"/>
               </a:rPr>
-              <a:t>A person approves the fix</a:t>
-            </a:r>
-          </a:p>
-        </p:txBody>
-      </p:sp>
-      <p:sp>
-        <p:nvSpPr>
-          <p:cNvPr id="39" name="Down Arrow 38"/>
+              <a:t>A person picks the fix</a:t>
+            </a:r>
+          </a:p>
+          <a:p>
+            <a:pPr algn="l">
+              <a:lnSpc>
+                <a:spcPct val="100000"/>
+              </a:lnSpc>
+            </a:pPr>
+            <a:r>
+              <a:rPr sz="1100" b="0">
+                <a:solidFill>
+                  <a:srgbClr val="CBD5E1"/>
+                </a:solidFill>
+                <a:latin typeface="Arial"/>
+              </a:rPr>
+              <a:t>Agents propose. People decide.</a:t>
+            </a:r>
+          </a:p>
+        </p:txBody>
+      </p:sp>
+      <p:sp>
+        <p:nvSpPr>
+          <p:cNvPr id="37" name="Rounded Rectangle 36"/>
           <p:cNvSpPr/>
           <p:nvPr/>
         </p:nvSpPr>
         <p:spPr>
           <a:xfrm>
-            <a:off x="8074152" y="4206240"/>
-            <a:ext cx="219456" cy="155448"/>
-          </a:xfrm>
-          <a:prstGeom prst="downArrow">
-            <a:avLst/>
-          </a:prstGeom>
-          <a:solidFill>
-            <a:srgbClr val="CBD5E1"/>
-          </a:solidFill>
-          <a:ln>
-            <a:noFill/>
-          </a:ln>
-          <a:effectLst/>
-        </p:spPr>
-        <p:style>
-          <a:lnRef idx="1">
-            <a:schemeClr val="accent1"/>
-          </a:lnRef>
-          <a:fillRef idx="3">
-            <a:schemeClr val="accent1"/>
-          </a:fillRef>
-          <a:effectRef idx="2">
-            <a:schemeClr val="accent1"/>
-          </a:effectRef>
-          <a:fontRef idx="minor">
-            <a:schemeClr val="lt1"/>
-          </a:fontRef>
-        </p:style>
-        <p:txBody>
-          <a:bodyPr rtlCol="0" anchor="ctr"/>
-          <a:lstStyle/>
-          <a:p>
-            <a:pPr algn="ctr"/>
-          </a:p>
-        </p:txBody>
-      </p:sp>
-      <p:sp>
-        <p:nvSpPr>
-          <p:cNvPr id="40" name="Rounded Rectangle 39"/>
-          <p:cNvSpPr/>
-          <p:nvPr/>
-        </p:nvSpPr>
-        <p:spPr>
-          <a:xfrm>
-            <a:off x="7909560" y="4389120"/>
-            <a:ext cx="3520440" cy="402336"/>
+            <a:off x="7909560" y="4325112"/>
+            <a:ext cx="3520440" cy="530352"/>
           </a:xfrm>
           <a:prstGeom prst="roundRect">
             <a:avLst>
-              <a:gd name="adj" fmla="val 20000"/>
+              <a:gd name="adj" fmla="val 15000"/>
             </a:avLst>
           </a:prstGeom>
           <a:solidFill>
@@ -17164,13 +16736,13 @@
       </p:sp>
       <p:sp>
         <p:nvSpPr>
-          <p:cNvPr id="41" name="Rounded Rectangle 40"/>
+          <p:cNvPr id="38" name="Rounded Rectangle 37"/>
           <p:cNvSpPr/>
           <p:nvPr/>
         </p:nvSpPr>
         <p:spPr>
           <a:xfrm>
-            <a:off x="8001000" y="4453128"/>
+            <a:off x="8001000" y="4443984"/>
             <a:ext cx="292608" cy="292608"/>
           </a:xfrm>
           <a:prstGeom prst="roundRect">
@@ -17223,14 +16795,14 @@
       </p:sp>
       <p:sp>
         <p:nvSpPr>
-          <p:cNvPr id="42" name="TextBox 41"/>
+          <p:cNvPr id="39" name="TextBox 38"/>
           <p:cNvSpPr txBox="1"/>
           <p:nvPr/>
         </p:nvSpPr>
         <p:spPr>
           <a:xfrm>
-            <a:off x="8366760" y="4416552"/>
-            <a:ext cx="3017520" cy="365760"/>
+            <a:off x="8366760" y="4343400"/>
+            <a:ext cx="3017520" cy="493776"/>
           </a:xfrm>
           <a:prstGeom prst="rect">
             <a:avLst/>
@@ -17245,79 +16817,51 @@
           <a:p>
             <a:pPr algn="l">
               <a:lnSpc>
-                <a:spcPct val="110000"/>
-              </a:lnSpc>
-            </a:pPr>
-            <a:r>
-              <a:rPr sz="1400" b="0">
+                <a:spcPct val="100000"/>
+              </a:lnSpc>
+            </a:pPr>
+            <a:r>
+              <a:rPr sz="1300" b="1">
                 <a:solidFill>
                   <a:srgbClr val="FFFFFF"/>
                 </a:solidFill>
                 <a:latin typeface="Arial"/>
               </a:rPr>
-              <a:t>An agent reviews the fix PR</a:t>
-            </a:r>
-          </a:p>
-        </p:txBody>
-      </p:sp>
-      <p:sp>
-        <p:nvSpPr>
-          <p:cNvPr id="43" name="Down Arrow 42"/>
+              <a:t>An agent reviews the fix</a:t>
+            </a:r>
+          </a:p>
+          <a:p>
+            <a:pPr algn="l">
+              <a:lnSpc>
+                <a:spcPct val="100000"/>
+              </a:lnSpc>
+            </a:pPr>
+            <a:r>
+              <a:rPr sz="1100" b="0">
+                <a:solidFill>
+                  <a:srgbClr val="CBD5E1"/>
+                </a:solidFill>
+                <a:latin typeface="Arial"/>
+              </a:rPr>
+              <a:t>Risky changes caught before merge</a:t>
+            </a:r>
+          </a:p>
+        </p:txBody>
+      </p:sp>
+      <p:sp>
+        <p:nvSpPr>
+          <p:cNvPr id="40" name="Rounded Rectangle 39"/>
           <p:cNvSpPr/>
           <p:nvPr/>
         </p:nvSpPr>
         <p:spPr>
           <a:xfrm>
-            <a:off x="8074152" y="4828031"/>
-            <a:ext cx="219456" cy="155448"/>
-          </a:xfrm>
-          <a:prstGeom prst="downArrow">
-            <a:avLst/>
-          </a:prstGeom>
-          <a:solidFill>
-            <a:srgbClr val="CBD5E1"/>
-          </a:solidFill>
-          <a:ln>
-            <a:noFill/>
-          </a:ln>
-          <a:effectLst/>
-        </p:spPr>
-        <p:style>
-          <a:lnRef idx="1">
-            <a:schemeClr val="accent1"/>
-          </a:lnRef>
-          <a:fillRef idx="3">
-            <a:schemeClr val="accent1"/>
-          </a:fillRef>
-          <a:effectRef idx="2">
-            <a:schemeClr val="accent1"/>
-          </a:effectRef>
-          <a:fontRef idx="minor">
-            <a:schemeClr val="lt1"/>
-          </a:fontRef>
-        </p:style>
-        <p:txBody>
-          <a:bodyPr rtlCol="0" anchor="ctr"/>
-          <a:lstStyle/>
-          <a:p>
-            <a:pPr algn="ctr"/>
-          </a:p>
-        </p:txBody>
-      </p:sp>
-      <p:sp>
-        <p:nvSpPr>
-          <p:cNvPr id="44" name="Rounded Rectangle 43"/>
-          <p:cNvSpPr/>
-          <p:nvPr/>
-        </p:nvSpPr>
-        <p:spPr>
-          <a:xfrm>
-            <a:off x="7909560" y="5010912"/>
-            <a:ext cx="3520440" cy="402336"/>
+            <a:off x="7909560" y="4937760"/>
+            <a:ext cx="3520440" cy="530352"/>
           </a:xfrm>
           <a:prstGeom prst="roundRect">
             <a:avLst>
-              <a:gd name="adj" fmla="val 20000"/>
+              <a:gd name="adj" fmla="val 15000"/>
             </a:avLst>
           </a:prstGeom>
           <a:solidFill>
@@ -17352,13 +16896,13 @@
       </p:sp>
       <p:sp>
         <p:nvSpPr>
-          <p:cNvPr id="45" name="Rounded Rectangle 44"/>
+          <p:cNvPr id="41" name="Rounded Rectangle 40"/>
           <p:cNvSpPr/>
           <p:nvPr/>
         </p:nvSpPr>
         <p:spPr>
           <a:xfrm>
-            <a:off x="8001000" y="5074920"/>
+            <a:off x="8001000" y="5056632"/>
             <a:ext cx="292608" cy="292608"/>
           </a:xfrm>
           <a:prstGeom prst="roundRect">
@@ -17411,14 +16955,14 @@
       </p:sp>
       <p:sp>
         <p:nvSpPr>
-          <p:cNvPr id="46" name="TextBox 45"/>
+          <p:cNvPr id="42" name="TextBox 41"/>
           <p:cNvSpPr txBox="1"/>
           <p:nvPr/>
         </p:nvSpPr>
         <p:spPr>
           <a:xfrm>
-            <a:off x="8366760" y="5038344"/>
-            <a:ext cx="3017520" cy="365760"/>
+            <a:off x="8366760" y="4956048"/>
+            <a:ext cx="3017520" cy="493776"/>
           </a:xfrm>
           <a:prstGeom prst="rect">
             <a:avLst/>
@@ -17433,17 +16977,33 @@
           <a:p>
             <a:pPr algn="l">
               <a:lnSpc>
-                <a:spcPct val="110000"/>
-              </a:lnSpc>
-            </a:pPr>
-            <a:r>
-              <a:rPr sz="1400" b="0">
+                <a:spcPct val="100000"/>
+              </a:lnSpc>
+            </a:pPr>
+            <a:r>
+              <a:rPr sz="1300" b="1">
                 <a:solidFill>
                   <a:srgbClr val="FFFFFF"/>
                 </a:solidFill>
                 <a:latin typeface="Arial"/>
               </a:rPr>
-              <a:t>Every step on one record</a:t>
+              <a:t>One record of every step</a:t>
+            </a:r>
+          </a:p>
+          <a:p>
+            <a:pPr algn="l">
+              <a:lnSpc>
+                <a:spcPct val="100000"/>
+              </a:lnSpc>
+            </a:pPr>
+            <a:r>
+              <a:rPr sz="1100" b="0">
+                <a:solidFill>
+                  <a:srgbClr val="CBD5E1"/>
+                </a:solidFill>
+                <a:latin typeface="Arial"/>
+              </a:rPr>
+              <a:t>Who did what, and what it cost</a:t>
             </a:r>
           </a:p>
         </p:txBody>

--- a/docs/presentation/KAOP_Customer_Pitch.pptx
+++ b/docs/presentation/KAOP_Customer_Pitch.pptx
@@ -14809,14 +14809,62 @@
       </p:sp>
       <p:sp>
         <p:nvSpPr>
-          <p:cNvPr id="7" name="Rectangle 6"/>
+          <p:cNvPr id="7" name="Rounded Rectangle 6"/>
           <p:cNvSpPr/>
           <p:nvPr/>
         </p:nvSpPr>
         <p:spPr>
           <a:xfrm>
             <a:off x="548640" y="3429000"/>
-            <a:ext cx="73152" cy="1188720"/>
+            <a:ext cx="6766560" cy="777240"/>
+          </a:xfrm>
+          <a:prstGeom prst="roundRect">
+            <a:avLst>
+              <a:gd name="adj" fmla="val 6000"/>
+            </a:avLst>
+          </a:prstGeom>
+          <a:solidFill>
+            <a:srgbClr val="FFFFFF"/>
+          </a:solidFill>
+          <a:ln w="12700">
+            <a:solidFill>
+              <a:srgbClr val="E2E8F0"/>
+            </a:solidFill>
+          </a:ln>
+          <a:effectLst/>
+        </p:spPr>
+        <p:style>
+          <a:lnRef idx="1">
+            <a:schemeClr val="accent1"/>
+          </a:lnRef>
+          <a:fillRef idx="3">
+            <a:schemeClr val="accent1"/>
+          </a:fillRef>
+          <a:effectRef idx="2">
+            <a:schemeClr val="accent1"/>
+          </a:effectRef>
+          <a:fontRef idx="minor">
+            <a:schemeClr val="lt1"/>
+          </a:fontRef>
+        </p:style>
+        <p:txBody>
+          <a:bodyPr rtlCol="0" anchor="ctr"/>
+          <a:lstStyle/>
+          <a:p>
+            <a:pPr algn="ctr"/>
+          </a:p>
+        </p:txBody>
+      </p:sp>
+      <p:sp>
+        <p:nvSpPr>
+          <p:cNvPr id="8" name="Rectangle 7"/>
+          <p:cNvSpPr/>
+          <p:nvPr/>
+        </p:nvSpPr>
+        <p:spPr>
+          <a:xfrm>
+            <a:off x="777240" y="3611880"/>
+            <a:ext cx="73152" cy="411480"/>
           </a:xfrm>
           <a:prstGeom prst="rect">
             <a:avLst/>
@@ -14853,14 +14901,14 @@
       </p:sp>
       <p:sp>
         <p:nvSpPr>
-          <p:cNvPr id="8" name="TextBox 7"/>
+          <p:cNvPr id="9" name="TextBox 8"/>
           <p:cNvSpPr txBox="1"/>
           <p:nvPr/>
         </p:nvSpPr>
         <p:spPr>
           <a:xfrm>
-            <a:off x="868680" y="3383280"/>
-            <a:ext cx="6309360" cy="1280160"/>
+            <a:off x="960120" y="3502152"/>
+            <a:ext cx="2377440" cy="630936"/>
           </a:xfrm>
           <a:prstGeom prst="rect">
             <a:avLst/>
@@ -14868,38 +14916,247 @@
           <a:noFill/>
         </p:spPr>
         <p:txBody>
-          <a:bodyPr wrap="square" lIns="73152" rIns="73152" tIns="36576" bIns="36576" anchor="t">
+          <a:bodyPr wrap="square" lIns="73152" rIns="73152" tIns="36576" bIns="36576" anchor="ctr">
             <a:spAutoFit/>
           </a:bodyPr>
           <a:lstStyle/>
           <a:p>
             <a:pPr algn="l">
               <a:lnSpc>
-                <a:spcPct val="115000"/>
-              </a:lnSpc>
-            </a:pPr>
-            <a:r>
-              <a:rPr sz="2400" b="1">
+                <a:spcPct val="110000"/>
+              </a:lnSpc>
+            </a:pPr>
+            <a:r>
+              <a:rPr sz="1600" b="1">
                 <a:solidFill>
                   <a:srgbClr val="0F172A"/>
                 </a:solidFill>
                 <a:latin typeface="Arial"/>
               </a:rPr>
-              <a:t>I help platform teams put AI agents into production safely.</a:t>
-            </a:r>
-          </a:p>
-        </p:txBody>
-      </p:sp>
-      <p:sp>
-        <p:nvSpPr>
-          <p:cNvPr id="9" name="Rounded Rectangle 8"/>
+              <a:t>With your team</a:t>
+            </a:r>
+          </a:p>
+        </p:txBody>
+      </p:sp>
+      <p:sp>
+        <p:nvSpPr>
+          <p:cNvPr id="10" name="TextBox 9"/>
+          <p:cNvSpPr txBox="1"/>
+          <p:nvPr/>
+        </p:nvSpPr>
+        <p:spPr>
+          <a:xfrm>
+            <a:off x="3337560" y="3502152"/>
+            <a:ext cx="3840480" cy="630936"/>
+          </a:xfrm>
+          <a:prstGeom prst="rect">
+            <a:avLst/>
+          </a:prstGeom>
+          <a:noFill/>
+        </p:spPr>
+        <p:txBody>
+          <a:bodyPr wrap="square" lIns="73152" rIns="73152" tIns="36576" bIns="36576" anchor="ctr">
+            <a:spAutoFit/>
+          </a:bodyPr>
+          <a:lstStyle/>
+          <a:p>
+            <a:pPr algn="l">
+              <a:lnSpc>
+                <a:spcPct val="110000"/>
+              </a:lnSpc>
+            </a:pPr>
+            <a:r>
+              <a:rPr sz="1500" b="0">
+                <a:solidFill>
+                  <a:srgbClr val="475569"/>
+                </a:solidFill>
+                <a:latin typeface="Arial"/>
+              </a:rPr>
+              <a:t>From your first agent to production.</a:t>
+            </a:r>
+          </a:p>
+        </p:txBody>
+      </p:sp>
+      <p:sp>
+        <p:nvSpPr>
+          <p:cNvPr id="11" name="Rounded Rectangle 10"/>
           <p:cNvSpPr/>
           <p:nvPr/>
         </p:nvSpPr>
         <p:spPr>
           <a:xfrm>
+            <a:off x="548640" y="4343400"/>
+            <a:ext cx="6766560" cy="777240"/>
+          </a:xfrm>
+          <a:prstGeom prst="roundRect">
+            <a:avLst>
+              <a:gd name="adj" fmla="val 6000"/>
+            </a:avLst>
+          </a:prstGeom>
+          <a:solidFill>
+            <a:srgbClr val="FFFFFF"/>
+          </a:solidFill>
+          <a:ln w="12700">
+            <a:solidFill>
+              <a:srgbClr val="E2E8F0"/>
+            </a:solidFill>
+          </a:ln>
+          <a:effectLst/>
+        </p:spPr>
+        <p:style>
+          <a:lnRef idx="1">
+            <a:schemeClr val="accent1"/>
+          </a:lnRef>
+          <a:fillRef idx="3">
+            <a:schemeClr val="accent1"/>
+          </a:fillRef>
+          <a:effectRef idx="2">
+            <a:schemeClr val="accent1"/>
+          </a:effectRef>
+          <a:fontRef idx="minor">
+            <a:schemeClr val="lt1"/>
+          </a:fontRef>
+        </p:style>
+        <p:txBody>
+          <a:bodyPr rtlCol="0" anchor="ctr"/>
+          <a:lstStyle/>
+          <a:p>
+            <a:pPr algn="ctr"/>
+          </a:p>
+        </p:txBody>
+      </p:sp>
+      <p:sp>
+        <p:nvSpPr>
+          <p:cNvPr id="12" name="Rectangle 11"/>
+          <p:cNvSpPr/>
+          <p:nvPr/>
+        </p:nvSpPr>
+        <p:spPr>
+          <a:xfrm>
+            <a:off x="777240" y="4526280"/>
+            <a:ext cx="73152" cy="411480"/>
+          </a:xfrm>
+          <a:prstGeom prst="rect">
+            <a:avLst/>
+          </a:prstGeom>
+          <a:solidFill>
+            <a:srgbClr val="0F766E"/>
+          </a:solidFill>
+          <a:ln>
+            <a:noFill/>
+          </a:ln>
+          <a:effectLst/>
+        </p:spPr>
+        <p:style>
+          <a:lnRef idx="1">
+            <a:schemeClr val="accent1"/>
+          </a:lnRef>
+          <a:fillRef idx="3">
+            <a:schemeClr val="accent1"/>
+          </a:fillRef>
+          <a:effectRef idx="2">
+            <a:schemeClr val="accent1"/>
+          </a:effectRef>
+          <a:fontRef idx="minor">
+            <a:schemeClr val="lt1"/>
+          </a:fontRef>
+        </p:style>
+        <p:txBody>
+          <a:bodyPr rtlCol="0" anchor="ctr"/>
+          <a:lstStyle/>
+          <a:p>
+            <a:pPr algn="ctr"/>
+          </a:p>
+        </p:txBody>
+      </p:sp>
+      <p:sp>
+        <p:nvSpPr>
+          <p:cNvPr id="13" name="TextBox 12"/>
+          <p:cNvSpPr txBox="1"/>
+          <p:nvPr/>
+        </p:nvSpPr>
+        <p:spPr>
+          <a:xfrm>
+            <a:off x="960120" y="4416552"/>
+            <a:ext cx="2377440" cy="630936"/>
+          </a:xfrm>
+          <a:prstGeom prst="rect">
+            <a:avLst/>
+          </a:prstGeom>
+          <a:noFill/>
+        </p:spPr>
+        <p:txBody>
+          <a:bodyPr wrap="square" lIns="73152" rIns="73152" tIns="36576" bIns="36576" anchor="ctr">
+            <a:spAutoFit/>
+          </a:bodyPr>
+          <a:lstStyle/>
+          <a:p>
+            <a:pPr algn="l">
+              <a:lnSpc>
+                <a:spcPct val="110000"/>
+              </a:lnSpc>
+            </a:pPr>
+            <a:r>
+              <a:rPr sz="1600" b="1">
+                <a:solidFill>
+                  <a:srgbClr val="0F172A"/>
+                </a:solidFill>
+                <a:latin typeface="Arial"/>
+              </a:rPr>
+              <a:t>With our product team</a:t>
+            </a:r>
+          </a:p>
+        </p:txBody>
+      </p:sp>
+      <p:sp>
+        <p:nvSpPr>
+          <p:cNvPr id="14" name="TextBox 13"/>
+          <p:cNvSpPr txBox="1"/>
+          <p:nvPr/>
+        </p:nvSpPr>
+        <p:spPr>
+          <a:xfrm>
+            <a:off x="3337560" y="4416552"/>
+            <a:ext cx="3840480" cy="630936"/>
+          </a:xfrm>
+          <a:prstGeom prst="rect">
+            <a:avLst/>
+          </a:prstGeom>
+          <a:noFill/>
+        </p:spPr>
+        <p:txBody>
+          <a:bodyPr wrap="square" lIns="73152" rIns="73152" tIns="36576" bIns="36576" anchor="ctr">
+            <a:spAutoFit/>
+          </a:bodyPr>
+          <a:lstStyle/>
+          <a:p>
+            <a:pPr algn="l">
+              <a:lnSpc>
+                <a:spcPct val="110000"/>
+              </a:lnSpc>
+            </a:pPr>
+            <a:r>
+              <a:rPr sz="1500" b="0">
+                <a:solidFill>
+                  <a:srgbClr val="475569"/>
+                </a:solidFill>
+                <a:latin typeface="Arial"/>
+              </a:rPr>
+              <a:t>Your feedback shapes what we build next.</a:t>
+            </a:r>
+          </a:p>
+        </p:txBody>
+      </p:sp>
+      <p:sp>
+        <p:nvSpPr>
+          <p:cNvPr id="15" name="Rounded Rectangle 14"/>
+          <p:cNvSpPr/>
+          <p:nvPr/>
+        </p:nvSpPr>
+        <p:spPr>
+          <a:xfrm>
             <a:off x="7680960" y="1600200"/>
-            <a:ext cx="3959352" cy="4069080"/>
+            <a:ext cx="3959352" cy="4206240"/>
           </a:xfrm>
           <a:prstGeom prst="roundRect">
             <a:avLst>
@@ -14938,13 +15195,13 @@
       </p:sp>
       <p:sp>
         <p:nvSpPr>
-          <p:cNvPr id="10" name="TextBox 9"/>
+          <p:cNvPr id="16" name="TextBox 15"/>
           <p:cNvSpPr txBox="1"/>
           <p:nvPr/>
         </p:nvSpPr>
         <p:spPr>
           <a:xfrm>
-            <a:off x="7955279" y="1828800"/>
+            <a:off x="7955279" y="1810512"/>
             <a:ext cx="3474720" cy="274320"/>
           </a:xfrm>
           <a:prstGeom prst="rect">
@@ -14977,14 +15234,14 @@
       </p:sp>
       <p:sp>
         <p:nvSpPr>
-          <p:cNvPr id="11" name="TextBox 10"/>
+          <p:cNvPr id="17" name="TextBox 16"/>
           <p:cNvSpPr txBox="1"/>
           <p:nvPr/>
         </p:nvSpPr>
         <p:spPr>
           <a:xfrm>
-            <a:off x="7955279" y="2240280"/>
-            <a:ext cx="3474720" cy="1828800"/>
+            <a:off x="7955279" y="2148840"/>
+            <a:ext cx="3474720" cy="1005840"/>
           </a:xfrm>
           <a:prstGeom prst="rect">
             <a:avLst/>
@@ -15001,54 +15258,76 @@
               <a:lnSpc>
                 <a:spcPct val="115000"/>
               </a:lnSpc>
-              <a:spcAft>
-                <a:spcPts val="1000"/>
-              </a:spcAft>
-            </a:pPr>
-            <a:r>
-              <a:rPr sz="2000" b="1">
+            </a:pPr>
+            <a:r>
+              <a:rPr sz="1600" b="1">
                 <a:solidFill>
                   <a:srgbClr val="FFFFFF"/>
                 </a:solidFill>
                 <a:latin typeface="Arial"/>
               </a:rPr>
-              <a:t>Your teams want more AI agents.</a:t>
-            </a:r>
-          </a:p>
-          <a:p>
-            <a:pPr algn="l">
-              <a:lnSpc>
-                <a:spcPct val="115000"/>
-              </a:lnSpc>
-            </a:pPr>
-            <a:r>
-              <a:rPr sz="2000" b="1">
-                <a:solidFill>
-                  <a:srgbClr val="FFFFFF"/>
-                </a:solidFill>
-                <a:latin typeface="Arial"/>
-              </a:rPr>
-              <a:t>You need to stay in control of them.</a:t>
-            </a:r>
-          </a:p>
-        </p:txBody>
-      </p:sp>
-      <p:sp>
-        <p:nvSpPr>
-          <p:cNvPr id="12" name="Rectangle 11"/>
+              <a:t>Your teams launch AI agents on their own. Nobody sees them all or sets their limits.</a:t>
+            </a:r>
+          </a:p>
+        </p:txBody>
+      </p:sp>
+      <p:sp>
+        <p:nvSpPr>
+          <p:cNvPr id="18" name="TextBox 17"/>
+          <p:cNvSpPr txBox="1"/>
+          <p:nvPr/>
+        </p:nvSpPr>
+        <p:spPr>
+          <a:xfrm>
+            <a:off x="7955279" y="3291840"/>
+            <a:ext cx="3474720" cy="274320"/>
+          </a:xfrm>
+          <a:prstGeom prst="rect">
+            <a:avLst/>
+          </a:prstGeom>
+          <a:noFill/>
+        </p:spPr>
+        <p:txBody>
+          <a:bodyPr wrap="square" lIns="73152" rIns="73152" tIns="36576" bIns="36576" anchor="t">
+            <a:spAutoFit/>
+          </a:bodyPr>
+          <a:lstStyle/>
+          <a:p>
+            <a:pPr algn="l">
+              <a:lnSpc>
+                <a:spcPct val="110000"/>
+              </a:lnSpc>
+            </a:pPr>
+            <a:r>
+              <a:rPr sz="1100" b="1">
+                <a:solidFill>
+                  <a:srgbClr val="A5B4FC"/>
+                </a:solidFill>
+                <a:latin typeface="Arial"/>
+              </a:rPr>
+              <a:t>WHAT KAOP GIVES YOUR PLATFORM TEAM</a:t>
+            </a:r>
+          </a:p>
+        </p:txBody>
+      </p:sp>
+      <p:sp>
+        <p:nvSpPr>
+          <p:cNvPr id="19" name="Rounded Rectangle 18"/>
           <p:cNvSpPr/>
           <p:nvPr/>
         </p:nvSpPr>
         <p:spPr>
           <a:xfrm>
-            <a:off x="7955279" y="4160520"/>
-            <a:ext cx="3383280" cy="18288"/>
-          </a:xfrm>
-          <a:prstGeom prst="rect">
-            <a:avLst/>
+            <a:off x="7909560" y="3639312"/>
+            <a:ext cx="3520440" cy="420624"/>
+          </a:xfrm>
+          <a:prstGeom prst="roundRect">
+            <a:avLst>
+              <a:gd name="adj" fmla="val 20000"/>
+            </a:avLst>
           </a:prstGeom>
           <a:solidFill>
-            <a:srgbClr val="CBD5E1"/>
+            <a:srgbClr val="1E293B"/>
           </a:solidFill>
           <a:ln>
             <a:noFill/>
@@ -15079,14 +15358,355 @@
       </p:sp>
       <p:sp>
         <p:nvSpPr>
-          <p:cNvPr id="13" name="TextBox 12"/>
+          <p:cNvPr id="20" name="Rectangle 19"/>
+          <p:cNvSpPr/>
+          <p:nvPr/>
+        </p:nvSpPr>
+        <p:spPr>
+          <a:xfrm>
+            <a:off x="8046720" y="3749039"/>
+            <a:ext cx="64008" cy="201168"/>
+          </a:xfrm>
+          <a:prstGeom prst="rect">
+            <a:avLst/>
+          </a:prstGeom>
+          <a:solidFill>
+            <a:srgbClr val="4F46E5"/>
+          </a:solidFill>
+          <a:ln>
+            <a:noFill/>
+          </a:ln>
+          <a:effectLst/>
+        </p:spPr>
+        <p:style>
+          <a:lnRef idx="1">
+            <a:schemeClr val="accent1"/>
+          </a:lnRef>
+          <a:fillRef idx="3">
+            <a:schemeClr val="accent1"/>
+          </a:fillRef>
+          <a:effectRef idx="2">
+            <a:schemeClr val="accent1"/>
+          </a:effectRef>
+          <a:fontRef idx="minor">
+            <a:schemeClr val="lt1"/>
+          </a:fontRef>
+        </p:style>
+        <p:txBody>
+          <a:bodyPr rtlCol="0" anchor="ctr"/>
+          <a:lstStyle/>
+          <a:p>
+            <a:pPr algn="ctr"/>
+          </a:p>
+        </p:txBody>
+      </p:sp>
+      <p:sp>
+        <p:nvSpPr>
+          <p:cNvPr id="21" name="TextBox 20"/>
           <p:cNvSpPr txBox="1"/>
           <p:nvPr/>
         </p:nvSpPr>
         <p:spPr>
           <a:xfrm>
-            <a:off x="7955279" y="4343400"/>
-            <a:ext cx="3474720" cy="1188720"/>
+            <a:off x="8229600" y="3666744"/>
+            <a:ext cx="3108960" cy="365760"/>
+          </a:xfrm>
+          <a:prstGeom prst="rect">
+            <a:avLst/>
+          </a:prstGeom>
+          <a:noFill/>
+        </p:spPr>
+        <p:txBody>
+          <a:bodyPr wrap="square" lIns="73152" rIns="73152" tIns="36576" bIns="36576" anchor="ctr">
+            <a:spAutoFit/>
+          </a:bodyPr>
+          <a:lstStyle/>
+          <a:p>
+            <a:pPr algn="l">
+              <a:lnSpc>
+                <a:spcPct val="110000"/>
+              </a:lnSpc>
+            </a:pPr>
+            <a:r>
+              <a:rPr sz="1400" b="0">
+                <a:solidFill>
+                  <a:srgbClr val="FFFFFF"/>
+                </a:solidFill>
+                <a:latin typeface="Arial"/>
+              </a:rPr>
+              <a:t>One view of every agent</a:t>
+            </a:r>
+          </a:p>
+        </p:txBody>
+      </p:sp>
+      <p:sp>
+        <p:nvSpPr>
+          <p:cNvPr id="22" name="Rounded Rectangle 21"/>
+          <p:cNvSpPr/>
+          <p:nvPr/>
+        </p:nvSpPr>
+        <p:spPr>
+          <a:xfrm>
+            <a:off x="7909560" y="4151376"/>
+            <a:ext cx="3520440" cy="420624"/>
+          </a:xfrm>
+          <a:prstGeom prst="roundRect">
+            <a:avLst>
+              <a:gd name="adj" fmla="val 20000"/>
+            </a:avLst>
+          </a:prstGeom>
+          <a:solidFill>
+            <a:srgbClr val="1E293B"/>
+          </a:solidFill>
+          <a:ln>
+            <a:noFill/>
+          </a:ln>
+          <a:effectLst/>
+        </p:spPr>
+        <p:style>
+          <a:lnRef idx="1">
+            <a:schemeClr val="accent1"/>
+          </a:lnRef>
+          <a:fillRef idx="3">
+            <a:schemeClr val="accent1"/>
+          </a:fillRef>
+          <a:effectRef idx="2">
+            <a:schemeClr val="accent1"/>
+          </a:effectRef>
+          <a:fontRef idx="minor">
+            <a:schemeClr val="lt1"/>
+          </a:fontRef>
+        </p:style>
+        <p:txBody>
+          <a:bodyPr rtlCol="0" anchor="ctr"/>
+          <a:lstStyle/>
+          <a:p>
+            <a:pPr algn="ctr"/>
+          </a:p>
+        </p:txBody>
+      </p:sp>
+      <p:sp>
+        <p:nvSpPr>
+          <p:cNvPr id="23" name="Rectangle 22"/>
+          <p:cNvSpPr/>
+          <p:nvPr/>
+        </p:nvSpPr>
+        <p:spPr>
+          <a:xfrm>
+            <a:off x="8046720" y="4261104"/>
+            <a:ext cx="64008" cy="201168"/>
+          </a:xfrm>
+          <a:prstGeom prst="rect">
+            <a:avLst/>
+          </a:prstGeom>
+          <a:solidFill>
+            <a:srgbClr val="B91C1C"/>
+          </a:solidFill>
+          <a:ln>
+            <a:noFill/>
+          </a:ln>
+          <a:effectLst/>
+        </p:spPr>
+        <p:style>
+          <a:lnRef idx="1">
+            <a:schemeClr val="accent1"/>
+          </a:lnRef>
+          <a:fillRef idx="3">
+            <a:schemeClr val="accent1"/>
+          </a:fillRef>
+          <a:effectRef idx="2">
+            <a:schemeClr val="accent1"/>
+          </a:effectRef>
+          <a:fontRef idx="minor">
+            <a:schemeClr val="lt1"/>
+          </a:fontRef>
+        </p:style>
+        <p:txBody>
+          <a:bodyPr rtlCol="0" anchor="ctr"/>
+          <a:lstStyle/>
+          <a:p>
+            <a:pPr algn="ctr"/>
+          </a:p>
+        </p:txBody>
+      </p:sp>
+      <p:sp>
+        <p:nvSpPr>
+          <p:cNvPr id="24" name="TextBox 23"/>
+          <p:cNvSpPr txBox="1"/>
+          <p:nvPr/>
+        </p:nvSpPr>
+        <p:spPr>
+          <a:xfrm>
+            <a:off x="8229600" y="4178808"/>
+            <a:ext cx="3108960" cy="365760"/>
+          </a:xfrm>
+          <a:prstGeom prst="rect">
+            <a:avLst/>
+          </a:prstGeom>
+          <a:noFill/>
+        </p:spPr>
+        <p:txBody>
+          <a:bodyPr wrap="square" lIns="73152" rIns="73152" tIns="36576" bIns="36576" anchor="ctr">
+            <a:spAutoFit/>
+          </a:bodyPr>
+          <a:lstStyle/>
+          <a:p>
+            <a:pPr algn="l">
+              <a:lnSpc>
+                <a:spcPct val="110000"/>
+              </a:lnSpc>
+            </a:pPr>
+            <a:r>
+              <a:rPr sz="1400" b="0">
+                <a:solidFill>
+                  <a:srgbClr val="FFFFFF"/>
+                </a:solidFill>
+                <a:latin typeface="Arial"/>
+              </a:rPr>
+              <a:t>Limits a system enforces</a:t>
+            </a:r>
+          </a:p>
+        </p:txBody>
+      </p:sp>
+      <p:sp>
+        <p:nvSpPr>
+          <p:cNvPr id="25" name="Rounded Rectangle 24"/>
+          <p:cNvSpPr/>
+          <p:nvPr/>
+        </p:nvSpPr>
+        <p:spPr>
+          <a:xfrm>
+            <a:off x="7909560" y="4663440"/>
+            <a:ext cx="3520440" cy="420624"/>
+          </a:xfrm>
+          <a:prstGeom prst="roundRect">
+            <a:avLst>
+              <a:gd name="adj" fmla="val 20000"/>
+            </a:avLst>
+          </a:prstGeom>
+          <a:solidFill>
+            <a:srgbClr val="1E293B"/>
+          </a:solidFill>
+          <a:ln>
+            <a:noFill/>
+          </a:ln>
+          <a:effectLst/>
+        </p:spPr>
+        <p:style>
+          <a:lnRef idx="1">
+            <a:schemeClr val="accent1"/>
+          </a:lnRef>
+          <a:fillRef idx="3">
+            <a:schemeClr val="accent1"/>
+          </a:fillRef>
+          <a:effectRef idx="2">
+            <a:schemeClr val="accent1"/>
+          </a:effectRef>
+          <a:fontRef idx="minor">
+            <a:schemeClr val="lt1"/>
+          </a:fontRef>
+        </p:style>
+        <p:txBody>
+          <a:bodyPr rtlCol="0" anchor="ctr"/>
+          <a:lstStyle/>
+          <a:p>
+            <a:pPr algn="ctr"/>
+          </a:p>
+        </p:txBody>
+      </p:sp>
+      <p:sp>
+        <p:nvSpPr>
+          <p:cNvPr id="26" name="Rectangle 25"/>
+          <p:cNvSpPr/>
+          <p:nvPr/>
+        </p:nvSpPr>
+        <p:spPr>
+          <a:xfrm>
+            <a:off x="8046720" y="4773168"/>
+            <a:ext cx="64008" cy="201168"/>
+          </a:xfrm>
+          <a:prstGeom prst="rect">
+            <a:avLst/>
+          </a:prstGeom>
+          <a:solidFill>
+            <a:srgbClr val="0F766E"/>
+          </a:solidFill>
+          <a:ln>
+            <a:noFill/>
+          </a:ln>
+          <a:effectLst/>
+        </p:spPr>
+        <p:style>
+          <a:lnRef idx="1">
+            <a:schemeClr val="accent1"/>
+          </a:lnRef>
+          <a:fillRef idx="3">
+            <a:schemeClr val="accent1"/>
+          </a:fillRef>
+          <a:effectRef idx="2">
+            <a:schemeClr val="accent1"/>
+          </a:effectRef>
+          <a:fontRef idx="minor">
+            <a:schemeClr val="lt1"/>
+          </a:fontRef>
+        </p:style>
+        <p:txBody>
+          <a:bodyPr rtlCol="0" anchor="ctr"/>
+          <a:lstStyle/>
+          <a:p>
+            <a:pPr algn="ctr"/>
+          </a:p>
+        </p:txBody>
+      </p:sp>
+      <p:sp>
+        <p:nvSpPr>
+          <p:cNvPr id="27" name="TextBox 26"/>
+          <p:cNvSpPr txBox="1"/>
+          <p:nvPr/>
+        </p:nvSpPr>
+        <p:spPr>
+          <a:xfrm>
+            <a:off x="8229600" y="4690872"/>
+            <a:ext cx="3108960" cy="365760"/>
+          </a:xfrm>
+          <a:prstGeom prst="rect">
+            <a:avLst/>
+          </a:prstGeom>
+          <a:noFill/>
+        </p:spPr>
+        <p:txBody>
+          <a:bodyPr wrap="square" lIns="73152" rIns="73152" tIns="36576" bIns="36576" anchor="ctr">
+            <a:spAutoFit/>
+          </a:bodyPr>
+          <a:lstStyle/>
+          <a:p>
+            <a:pPr algn="l">
+              <a:lnSpc>
+                <a:spcPct val="110000"/>
+              </a:lnSpc>
+            </a:pPr>
+            <a:r>
+              <a:rPr sz="1400" b="0">
+                <a:solidFill>
+                  <a:srgbClr val="FFFFFF"/>
+                </a:solidFill>
+                <a:latin typeface="Arial"/>
+              </a:rPr>
+              <a:t>Agents working as one workflow</a:t>
+            </a:r>
+          </a:p>
+        </p:txBody>
+      </p:sp>
+      <p:sp>
+        <p:nvSpPr>
+          <p:cNvPr id="28" name="TextBox 27"/>
+          <p:cNvSpPr txBox="1"/>
+          <p:nvPr/>
+        </p:nvSpPr>
+        <p:spPr>
+          <a:xfrm>
+            <a:off x="7955279" y="5230368"/>
+            <a:ext cx="3474720" cy="457200"/>
           </a:xfrm>
           <a:prstGeom prst="rect">
             <a:avLst/>
@@ -15101,17 +15721,17 @@
           <a:p>
             <a:pPr algn="l">
               <a:lnSpc>
-                <a:spcPct val="115000"/>
-              </a:lnSpc>
-            </a:pPr>
-            <a:r>
-              <a:rPr sz="1700" b="0">
+                <a:spcPct val="110000"/>
+              </a:lnSpc>
+            </a:pPr>
+            <a:r>
+              <a:rPr sz="1300" b="0">
                 <a:solidFill>
                   <a:srgbClr val="CBD5E1"/>
                 </a:solidFill>
                 <a:latin typeface="Arial"/>
               </a:rPr>
-              <a:t>Today: KAOP doing both, on a live incident.</a:t>
+              <a:t>Live today: a real incident and a real code review.</a:t>
             </a:r>
           </a:p>
         </p:txBody>
@@ -15623,7 +16243,7 @@
                 </a:solidFill>
                 <a:latin typeface="Arial"/>
               </a:rPr>
-              <a:t>Owners, limits and a record.</a:t>
+              <a:t>Visibility, guardrails, workflows.</a:t>
             </a:r>
           </a:p>
         </p:txBody>

--- a/docs/presentation/KAOP_Customer_Pitch.pptx
+++ b/docs/presentation/KAOP_Customer_Pitch.pptx
@@ -9727,7 +9727,7 @@
                 </a:solidFill>
                 <a:latin typeface="Arial"/>
               </a:rPr>
-              <a:t>•  Help with setup and integrations</a:t>
+              <a:t>•  A product engineer, hands-on with setup</a:t>
             </a:r>
           </a:p>
           <a:p>

--- a/docs/presentation/KAOP_Customer_Pitch.pptx
+++ b/docs/presentation/KAOP_Customer_Pitch.pptx
@@ -22,6 +22,7 @@
     <p:sldId id="270" r:id="rId21"/>
     <p:sldId id="271" r:id="rId22"/>
     <p:sldId id="272" r:id="rId23"/>
+    <p:sldId id="273" r:id="rId24"/>
   </p:sldIdLst>
   <p:sldSz cx="12191695" cy="6858000" type="screen4x3"/>
   <p:notesSz cx="6858000" cy="9144000"/>
@@ -11935,6 +11936,45 @@
           </a:p>
         </p:txBody>
       </p:sp>
+      <p:sp>
+        <p:nvSpPr>
+          <p:cNvPr id="8" name="TextBox 7"/>
+          <p:cNvSpPr txBox="1"/>
+          <p:nvPr/>
+        </p:nvSpPr>
+        <p:spPr>
+          <a:xfrm>
+            <a:off x="548640" y="5486400"/>
+            <a:ext cx="7315200" cy="411480"/>
+          </a:xfrm>
+          <a:prstGeom prst="rect">
+            <a:avLst/>
+          </a:prstGeom>
+          <a:noFill/>
+        </p:spPr>
+        <p:txBody>
+          <a:bodyPr wrap="square" lIns="73152" rIns="73152" tIns="36576" bIns="36576" anchor="t">
+            <a:spAutoFit/>
+          </a:bodyPr>
+          <a:lstStyle/>
+          <a:p>
+            <a:pPr algn="l">
+              <a:lnSpc>
+                <a:spcPct val="110000"/>
+              </a:lnSpc>
+            </a:pPr>
+            <a:r>
+              <a:rPr sz="1600" b="0">
+                <a:solidFill>
+                  <a:srgbClr val="CBD5E1"/>
+                </a:solidFill>
+                <a:latin typeface="Arial"/>
+              </a:rPr>
+              <a:t>D   Cost and guardrails, tested</a:t>
+            </a:r>
+          </a:p>
+        </p:txBody>
+      </p:sp>
     </p:spTree>
   </p:cSld>
   <p:clrMapOvr>
@@ -14582,6 +14622,1004 @@
                 <a:latin typeface="Arial"/>
               </a:rPr>
               <a:t>Measured on 2026-10-24 and 2026-10-25 on a single-node kind cluster. With the bad check, recovery waits on Kubernetes' restart back-off (10 s, doubling up to 5 minutes), so it depends on how long the outage lasted.</a:t>
+            </a:r>
+          </a:p>
+        </p:txBody>
+      </p:sp>
+    </p:spTree>
+  </p:cSld>
+  <p:clrMapOvr>
+    <a:masterClrMapping/>
+  </p:clrMapOvr>
+</p:sld>
+</file>
+
+<file path=ppt/slides/slide18.xml><?xml version="1.0" encoding="utf-8"?>
+<p:sld xmlns:a="http://schemas.openxmlformats.org/drawingml/2006/main" xmlns:p="http://schemas.openxmlformats.org/presentationml/2006/main" xmlns:r="http://schemas.openxmlformats.org/officeDocument/2006/relationships">
+  <p:cSld>
+    <p:bg>
+      <p:bgPr>
+        <a:solidFill>
+          <a:srgbClr val="F8FAFC"/>
+        </a:solidFill>
+        <a:effectLst/>
+      </p:bgPr>
+    </p:bg>
+    <p:spTree>
+      <p:nvGrpSpPr>
+        <p:cNvPr id="1" name=""/>
+        <p:cNvGrpSpPr/>
+        <p:nvPr/>
+      </p:nvGrpSpPr>
+      <p:grpSpPr/>
+      <p:sp>
+        <p:nvSpPr>
+          <p:cNvPr id="2" name="TextBox 1"/>
+          <p:cNvSpPr txBox="1"/>
+          <p:nvPr/>
+        </p:nvSpPr>
+        <p:spPr>
+          <a:xfrm>
+            <a:off x="548640" y="320040"/>
+            <a:ext cx="7315200" cy="274320"/>
+          </a:xfrm>
+          <a:prstGeom prst="rect">
+            <a:avLst/>
+          </a:prstGeom>
+          <a:noFill/>
+        </p:spPr>
+        <p:txBody>
+          <a:bodyPr wrap="square" lIns="73152" rIns="73152" tIns="36576" bIns="36576" anchor="t">
+            <a:spAutoFit/>
+          </a:bodyPr>
+          <a:lstStyle/>
+          <a:p>
+            <a:pPr algn="l">
+              <a:lnSpc>
+                <a:spcPct val="110000"/>
+              </a:lnSpc>
+            </a:pPr>
+            <a:r>
+              <a:rPr sz="1000" b="1">
+                <a:solidFill>
+                  <a:srgbClr val="4F46E5"/>
+                </a:solidFill>
+                <a:latin typeface="Arial"/>
+              </a:rPr>
+              <a:t>APPENDIX</a:t>
+            </a:r>
+          </a:p>
+        </p:txBody>
+      </p:sp>
+      <p:sp>
+        <p:nvSpPr>
+          <p:cNvPr id="3" name="TextBox 2"/>
+          <p:cNvSpPr txBox="1"/>
+          <p:nvPr/>
+        </p:nvSpPr>
+        <p:spPr>
+          <a:xfrm>
+            <a:off x="9784080" y="320040"/>
+            <a:ext cx="1828800" cy="274320"/>
+          </a:xfrm>
+          <a:prstGeom prst="rect">
+            <a:avLst/>
+          </a:prstGeom>
+          <a:noFill/>
+        </p:spPr>
+        <p:txBody>
+          <a:bodyPr wrap="square" lIns="73152" rIns="73152" tIns="36576" bIns="36576" anchor="t">
+            <a:spAutoFit/>
+          </a:bodyPr>
+          <a:lstStyle/>
+          <a:p>
+            <a:pPr algn="r">
+              <a:lnSpc>
+                <a:spcPct val="110000"/>
+              </a:lnSpc>
+            </a:pPr>
+            <a:r>
+              <a:rPr sz="1000" b="0">
+                <a:solidFill>
+                  <a:srgbClr val="94A3B8"/>
+                </a:solidFill>
+                <a:latin typeface="Arial"/>
+              </a:rPr>
+              <a:t>APPENDIX D</a:t>
+            </a:r>
+          </a:p>
+        </p:txBody>
+      </p:sp>
+      <p:sp>
+        <p:nvSpPr>
+          <p:cNvPr id="4" name="TextBox 3"/>
+          <p:cNvSpPr txBox="1"/>
+          <p:nvPr/>
+        </p:nvSpPr>
+        <p:spPr>
+          <a:xfrm>
+            <a:off x="548640" y="658368"/>
+            <a:ext cx="11064240" cy="731520"/>
+          </a:xfrm>
+          <a:prstGeom prst="rect">
+            <a:avLst/>
+          </a:prstGeom>
+          <a:noFill/>
+        </p:spPr>
+        <p:txBody>
+          <a:bodyPr wrap="square" lIns="73152" rIns="73152" tIns="36576" bIns="36576" anchor="t">
+            <a:spAutoFit/>
+          </a:bodyPr>
+          <a:lstStyle/>
+          <a:p>
+            <a:pPr algn="l">
+              <a:lnSpc>
+                <a:spcPct val="110000"/>
+              </a:lnSpc>
+            </a:pPr>
+            <a:r>
+              <a:rPr sz="3200" b="1">
+                <a:solidFill>
+                  <a:srgbClr val="0F172A"/>
+                </a:solidFill>
+                <a:latin typeface="Arial"/>
+              </a:rPr>
+              <a:t>Cost and guardrails, tested</a:t>
+            </a:r>
+          </a:p>
+        </p:txBody>
+      </p:sp>
+      <p:sp>
+        <p:nvSpPr>
+          <p:cNvPr id="5" name="TextBox 4"/>
+          <p:cNvSpPr txBox="1"/>
+          <p:nvPr/>
+        </p:nvSpPr>
+        <p:spPr>
+          <a:xfrm>
+            <a:off x="548640" y="1371600"/>
+            <a:ext cx="11064240" cy="457200"/>
+          </a:xfrm>
+          <a:prstGeom prst="rect">
+            <a:avLst/>
+          </a:prstGeom>
+          <a:noFill/>
+        </p:spPr>
+        <p:txBody>
+          <a:bodyPr wrap="square" lIns="73152" rIns="73152" tIns="36576" bIns="36576" anchor="t">
+            <a:spAutoFit/>
+          </a:bodyPr>
+          <a:lstStyle/>
+          <a:p>
+            <a:pPr algn="l">
+              <a:lnSpc>
+                <a:spcPct val="110000"/>
+              </a:lnSpc>
+            </a:pPr>
+            <a:r>
+              <a:rPr sz="1700" b="0">
+                <a:solidFill>
+                  <a:srgbClr val="475569"/>
+                </a:solidFill>
+                <a:latin typeface="Arial"/>
+              </a:rPr>
+              <a:t>Each change made on this lab, then tested with real runs.</a:t>
+            </a:r>
+          </a:p>
+        </p:txBody>
+      </p:sp>
+      <p:sp>
+        <p:nvSpPr>
+          <p:cNvPr id="6" name="TextBox 5"/>
+          <p:cNvSpPr txBox="1"/>
+          <p:nvPr/>
+        </p:nvSpPr>
+        <p:spPr>
+          <a:xfrm>
+            <a:off x="777240" y="1965960"/>
+            <a:ext cx="4206240" cy="320040"/>
+          </a:xfrm>
+          <a:prstGeom prst="rect">
+            <a:avLst/>
+          </a:prstGeom>
+          <a:noFill/>
+        </p:spPr>
+        <p:txBody>
+          <a:bodyPr wrap="square" lIns="73152" rIns="73152" tIns="36576" bIns="36576" anchor="ctr">
+            <a:spAutoFit/>
+          </a:bodyPr>
+          <a:lstStyle/>
+          <a:p>
+            <a:pPr algn="l">
+              <a:lnSpc>
+                <a:spcPct val="105000"/>
+              </a:lnSpc>
+            </a:pPr>
+            <a:r>
+              <a:rPr sz="1100" b="1">
+                <a:solidFill>
+                  <a:srgbClr val="94A3B8"/>
+                </a:solidFill>
+                <a:latin typeface="Arial"/>
+              </a:rPr>
+              <a:t>Change</a:t>
+            </a:r>
+          </a:p>
+        </p:txBody>
+      </p:sp>
+      <p:sp>
+        <p:nvSpPr>
+          <p:cNvPr id="7" name="TextBox 6"/>
+          <p:cNvSpPr txBox="1"/>
+          <p:nvPr/>
+        </p:nvSpPr>
+        <p:spPr>
+          <a:xfrm>
+            <a:off x="5120640" y="1965960"/>
+            <a:ext cx="2834640" cy="320040"/>
+          </a:xfrm>
+          <a:prstGeom prst="rect">
+            <a:avLst/>
+          </a:prstGeom>
+          <a:noFill/>
+        </p:spPr>
+        <p:txBody>
+          <a:bodyPr wrap="square" lIns="73152" rIns="73152" tIns="36576" bIns="36576" anchor="ctr">
+            <a:spAutoFit/>
+          </a:bodyPr>
+          <a:lstStyle/>
+          <a:p>
+            <a:pPr algn="l">
+              <a:lnSpc>
+                <a:spcPct val="105000"/>
+              </a:lnSpc>
+            </a:pPr>
+            <a:r>
+              <a:rPr sz="1100" b="1">
+                <a:solidFill>
+                  <a:srgbClr val="94A3B8"/>
+                </a:solidFill>
+                <a:latin typeface="Arial"/>
+              </a:rPr>
+              <a:t>Test</a:t>
+            </a:r>
+          </a:p>
+        </p:txBody>
+      </p:sp>
+      <p:sp>
+        <p:nvSpPr>
+          <p:cNvPr id="8" name="TextBox 7"/>
+          <p:cNvSpPr txBox="1"/>
+          <p:nvPr/>
+        </p:nvSpPr>
+        <p:spPr>
+          <a:xfrm>
+            <a:off x="8092440" y="1965960"/>
+            <a:ext cx="3474720" cy="320040"/>
+          </a:xfrm>
+          <a:prstGeom prst="rect">
+            <a:avLst/>
+          </a:prstGeom>
+          <a:noFill/>
+        </p:spPr>
+        <p:txBody>
+          <a:bodyPr wrap="square" lIns="73152" rIns="73152" tIns="36576" bIns="36576" anchor="ctr">
+            <a:spAutoFit/>
+          </a:bodyPr>
+          <a:lstStyle/>
+          <a:p>
+            <a:pPr algn="l">
+              <a:lnSpc>
+                <a:spcPct val="105000"/>
+              </a:lnSpc>
+            </a:pPr>
+            <a:r>
+              <a:rPr sz="1100" b="1">
+                <a:solidFill>
+                  <a:srgbClr val="94A3B8"/>
+                </a:solidFill>
+                <a:latin typeface="Arial"/>
+              </a:rPr>
+              <a:t>Result</a:t>
+            </a:r>
+          </a:p>
+        </p:txBody>
+      </p:sp>
+      <p:sp>
+        <p:nvSpPr>
+          <p:cNvPr id="9" name="Rounded Rectangle 8"/>
+          <p:cNvSpPr/>
+          <p:nvPr/>
+        </p:nvSpPr>
+        <p:spPr>
+          <a:xfrm>
+            <a:off x="548640" y="2331720"/>
+            <a:ext cx="11091672" cy="713232"/>
+          </a:xfrm>
+          <a:prstGeom prst="roundRect">
+            <a:avLst>
+              <a:gd name="adj" fmla="val 6000"/>
+            </a:avLst>
+          </a:prstGeom>
+          <a:solidFill>
+            <a:srgbClr val="FFFFFF"/>
+          </a:solidFill>
+          <a:ln w="12700">
+            <a:solidFill>
+              <a:srgbClr val="E2E8F0"/>
+            </a:solidFill>
+          </a:ln>
+          <a:effectLst/>
+        </p:spPr>
+        <p:style>
+          <a:lnRef idx="1">
+            <a:schemeClr val="accent1"/>
+          </a:lnRef>
+          <a:fillRef idx="3">
+            <a:schemeClr val="accent1"/>
+          </a:fillRef>
+          <a:effectRef idx="2">
+            <a:schemeClr val="accent1"/>
+          </a:effectRef>
+          <a:fontRef idx="minor">
+            <a:schemeClr val="lt1"/>
+          </a:fontRef>
+        </p:style>
+        <p:txBody>
+          <a:bodyPr rtlCol="0" anchor="ctr"/>
+          <a:lstStyle/>
+          <a:p>
+            <a:pPr algn="ctr"/>
+          </a:p>
+        </p:txBody>
+      </p:sp>
+      <p:sp>
+        <p:nvSpPr>
+          <p:cNvPr id="10" name="TextBox 9"/>
+          <p:cNvSpPr txBox="1"/>
+          <p:nvPr/>
+        </p:nvSpPr>
+        <p:spPr>
+          <a:xfrm>
+            <a:off x="777240" y="2350008"/>
+            <a:ext cx="4206240" cy="676656"/>
+          </a:xfrm>
+          <a:prstGeom prst="rect">
+            <a:avLst/>
+          </a:prstGeom>
+          <a:noFill/>
+        </p:spPr>
+        <p:txBody>
+          <a:bodyPr wrap="square" lIns="73152" rIns="73152" tIns="36576" bIns="36576" anchor="ctr">
+            <a:spAutoFit/>
+          </a:bodyPr>
+          <a:lstStyle/>
+          <a:p>
+            <a:pPr algn="l">
+              <a:lnSpc>
+                <a:spcPct val="105000"/>
+              </a:lnSpc>
+            </a:pPr>
+            <a:r>
+              <a:rPr sz="1400" b="1">
+                <a:solidFill>
+                  <a:srgbClr val="0F172A"/>
+                </a:solidFill>
+                <a:latin typeface="Arial"/>
+              </a:rPr>
+              <a:t>Grafana agent: only the 28 read tools it needs, plus one standards doc</a:t>
+            </a:r>
+          </a:p>
+        </p:txBody>
+      </p:sp>
+      <p:sp>
+        <p:nvSpPr>
+          <p:cNvPr id="11" name="TextBox 10"/>
+          <p:cNvSpPr txBox="1"/>
+          <p:nvPr/>
+        </p:nvSpPr>
+        <p:spPr>
+          <a:xfrm>
+            <a:off x="5120640" y="2350008"/>
+            <a:ext cx="2834640" cy="676656"/>
+          </a:xfrm>
+          <a:prstGeom prst="rect">
+            <a:avLst/>
+          </a:prstGeom>
+          <a:noFill/>
+        </p:spPr>
+        <p:txBody>
+          <a:bodyPr wrap="square" lIns="73152" rIns="73152" tIns="36576" bIns="36576" anchor="ctr">
+            <a:spAutoFit/>
+          </a:bodyPr>
+          <a:lstStyle/>
+          <a:p>
+            <a:pPr algn="l">
+              <a:lnSpc>
+                <a:spcPct val="105000"/>
+              </a:lnSpc>
+            </a:pPr>
+            <a:r>
+              <a:rPr sz="1400" b="0">
+                <a:solidFill>
+                  <a:srgbClr val="475569"/>
+                </a:solidFill>
+                <a:latin typeface="Arial"/>
+              </a:rPr>
+              <a:t>Same alert, before and after</a:t>
+            </a:r>
+          </a:p>
+        </p:txBody>
+      </p:sp>
+      <p:sp>
+        <p:nvSpPr>
+          <p:cNvPr id="12" name="TextBox 11"/>
+          <p:cNvSpPr txBox="1"/>
+          <p:nvPr/>
+        </p:nvSpPr>
+        <p:spPr>
+          <a:xfrm>
+            <a:off x="8092440" y="2350008"/>
+            <a:ext cx="3474720" cy="676656"/>
+          </a:xfrm>
+          <a:prstGeom prst="rect">
+            <a:avLst/>
+          </a:prstGeom>
+          <a:noFill/>
+        </p:spPr>
+        <p:txBody>
+          <a:bodyPr wrap="square" lIns="73152" rIns="73152" tIns="36576" bIns="36576" anchor="ctr">
+            <a:spAutoFit/>
+          </a:bodyPr>
+          <a:lstStyle/>
+          <a:p>
+            <a:pPr algn="l">
+              <a:lnSpc>
+                <a:spcPct val="105000"/>
+              </a:lnSpc>
+            </a:pPr>
+            <a:r>
+              <a:rPr sz="1400" b="0">
+                <a:solidFill>
+                  <a:srgbClr val="0F766E"/>
+                </a:solidFill>
+                <a:latin typeface="Arial"/>
+              </a:rPr>
+              <a:t>$0.85 → $0.51 a run, 36 → 24 steps, and a better root cause</a:t>
+            </a:r>
+          </a:p>
+        </p:txBody>
+      </p:sp>
+      <p:sp>
+        <p:nvSpPr>
+          <p:cNvPr id="13" name="Rounded Rectangle 12"/>
+          <p:cNvSpPr/>
+          <p:nvPr/>
+        </p:nvSpPr>
+        <p:spPr>
+          <a:xfrm>
+            <a:off x="548640" y="3118103"/>
+            <a:ext cx="11091672" cy="713232"/>
+          </a:xfrm>
+          <a:prstGeom prst="roundRect">
+            <a:avLst>
+              <a:gd name="adj" fmla="val 6000"/>
+            </a:avLst>
+          </a:prstGeom>
+          <a:solidFill>
+            <a:srgbClr val="FFFFFF"/>
+          </a:solidFill>
+          <a:ln w="12700">
+            <a:solidFill>
+              <a:srgbClr val="E2E8F0"/>
+            </a:solidFill>
+          </a:ln>
+          <a:effectLst/>
+        </p:spPr>
+        <p:style>
+          <a:lnRef idx="1">
+            <a:schemeClr val="accent1"/>
+          </a:lnRef>
+          <a:fillRef idx="3">
+            <a:schemeClr val="accent1"/>
+          </a:fillRef>
+          <a:effectRef idx="2">
+            <a:schemeClr val="accent1"/>
+          </a:effectRef>
+          <a:fontRef idx="minor">
+            <a:schemeClr val="lt1"/>
+          </a:fontRef>
+        </p:style>
+        <p:txBody>
+          <a:bodyPr rtlCol="0" anchor="ctr"/>
+          <a:lstStyle/>
+          <a:p>
+            <a:pPr algn="ctr"/>
+          </a:p>
+        </p:txBody>
+      </p:sp>
+      <p:sp>
+        <p:nvSpPr>
+          <p:cNvPr id="14" name="TextBox 13"/>
+          <p:cNvSpPr txBox="1"/>
+          <p:nvPr/>
+        </p:nvSpPr>
+        <p:spPr>
+          <a:xfrm>
+            <a:off x="777240" y="3136391"/>
+            <a:ext cx="4206240" cy="676656"/>
+          </a:xfrm>
+          <a:prstGeom prst="rect">
+            <a:avLst/>
+          </a:prstGeom>
+          <a:noFill/>
+        </p:spPr>
+        <p:txBody>
+          <a:bodyPr wrap="square" lIns="73152" rIns="73152" tIns="36576" bIns="36576" anchor="ctr">
+            <a:spAutoFit/>
+          </a:bodyPr>
+          <a:lstStyle/>
+          <a:p>
+            <a:pPr algn="l">
+              <a:lnSpc>
+                <a:spcPct val="105000"/>
+              </a:lnSpc>
+            </a:pPr>
+            <a:r>
+              <a:rPr sz="1400" b="1">
+                <a:solidFill>
+                  <a:srgbClr val="0F172A"/>
+                </a:solidFill>
+                <a:latin typeface="Arial"/>
+              </a:rPr>
+              <a:t>Workflow budget: $40 a day, blocks new runs</a:t>
+            </a:r>
+          </a:p>
+        </p:txBody>
+      </p:sp>
+      <p:sp>
+        <p:nvSpPr>
+          <p:cNvPr id="15" name="TextBox 14"/>
+          <p:cNvSpPr txBox="1"/>
+          <p:nvPr/>
+        </p:nvSpPr>
+        <p:spPr>
+          <a:xfrm>
+            <a:off x="5120640" y="3136391"/>
+            <a:ext cx="2834640" cy="676656"/>
+          </a:xfrm>
+          <a:prstGeom prst="rect">
+            <a:avLst/>
+          </a:prstGeom>
+          <a:noFill/>
+        </p:spPr>
+        <p:txBody>
+          <a:bodyPr wrap="square" lIns="73152" rIns="73152" tIns="36576" bIns="36576" anchor="ctr">
+            <a:spAutoFit/>
+          </a:bodyPr>
+          <a:lstStyle/>
+          <a:p>
+            <a:pPr algn="l">
+              <a:lnSpc>
+                <a:spcPct val="105000"/>
+              </a:lnSpc>
+            </a:pPr>
+            <a:r>
+              <a:rPr sz="1400" b="0">
+                <a:solidFill>
+                  <a:srgbClr val="475569"/>
+                </a:solidFill>
+                <a:latin typeface="Arial"/>
+              </a:rPr>
+              <a:t>Cap lowered to $0.01, two alerts sent</a:t>
+            </a:r>
+          </a:p>
+        </p:txBody>
+      </p:sp>
+      <p:sp>
+        <p:nvSpPr>
+          <p:cNvPr id="16" name="TextBox 15"/>
+          <p:cNvSpPr txBox="1"/>
+          <p:nvPr/>
+        </p:nvSpPr>
+        <p:spPr>
+          <a:xfrm>
+            <a:off x="8092440" y="3136391"/>
+            <a:ext cx="3474720" cy="676656"/>
+          </a:xfrm>
+          <a:prstGeom prst="rect">
+            <a:avLst/>
+          </a:prstGeom>
+          <a:noFill/>
+        </p:spPr>
+        <p:txBody>
+          <a:bodyPr wrap="square" lIns="73152" rIns="73152" tIns="36576" bIns="36576" anchor="ctr">
+            <a:spAutoFit/>
+          </a:bodyPr>
+          <a:lstStyle/>
+          <a:p>
+            <a:pPr algn="l">
+              <a:lnSpc>
+                <a:spcPct val="105000"/>
+              </a:lnSpc>
+            </a:pPr>
+            <a:r>
+              <a:rPr sz="1400" b="0">
+                <a:solidFill>
+                  <a:srgbClr val="0F766E"/>
+                </a:solidFill>
+                <a:latin typeface="Arial"/>
+              </a:rPr>
+              <a:t>Second alert recorded but not investigated, with the reason</a:t>
+            </a:r>
+          </a:p>
+        </p:txBody>
+      </p:sp>
+      <p:sp>
+        <p:nvSpPr>
+          <p:cNvPr id="17" name="Rounded Rectangle 16"/>
+          <p:cNvSpPr/>
+          <p:nvPr/>
+        </p:nvSpPr>
+        <p:spPr>
+          <a:xfrm>
+            <a:off x="548640" y="3904487"/>
+            <a:ext cx="11091672" cy="713232"/>
+          </a:xfrm>
+          <a:prstGeom prst="roundRect">
+            <a:avLst>
+              <a:gd name="adj" fmla="val 6000"/>
+            </a:avLst>
+          </a:prstGeom>
+          <a:solidFill>
+            <a:srgbClr val="FFFFFF"/>
+          </a:solidFill>
+          <a:ln w="12700">
+            <a:solidFill>
+              <a:srgbClr val="E2E8F0"/>
+            </a:solidFill>
+          </a:ln>
+          <a:effectLst/>
+        </p:spPr>
+        <p:style>
+          <a:lnRef idx="1">
+            <a:schemeClr val="accent1"/>
+          </a:lnRef>
+          <a:fillRef idx="3">
+            <a:schemeClr val="accent1"/>
+          </a:fillRef>
+          <a:effectRef idx="2">
+            <a:schemeClr val="accent1"/>
+          </a:effectRef>
+          <a:fontRef idx="minor">
+            <a:schemeClr val="lt1"/>
+          </a:fontRef>
+        </p:style>
+        <p:txBody>
+          <a:bodyPr rtlCol="0" anchor="ctr"/>
+          <a:lstStyle/>
+          <a:p>
+            <a:pPr algn="ctr"/>
+          </a:p>
+        </p:txBody>
+      </p:sp>
+      <p:sp>
+        <p:nvSpPr>
+          <p:cNvPr id="18" name="TextBox 17"/>
+          <p:cNvSpPr txBox="1"/>
+          <p:nvPr/>
+        </p:nvSpPr>
+        <p:spPr>
+          <a:xfrm>
+            <a:off x="777240" y="3922775"/>
+            <a:ext cx="4206240" cy="676656"/>
+          </a:xfrm>
+          <a:prstGeom prst="rect">
+            <a:avLst/>
+          </a:prstGeom>
+          <a:noFill/>
+        </p:spPr>
+        <p:txBody>
+          <a:bodyPr wrap="square" lIns="73152" rIns="73152" tIns="36576" bIns="36576" anchor="ctr">
+            <a:spAutoFit/>
+          </a:bodyPr>
+          <a:lstStyle/>
+          <a:p>
+            <a:pPr algn="l">
+              <a:lnSpc>
+                <a:spcPct val="105000"/>
+              </a:lnSpc>
+            </a:pPr>
+            <a:r>
+              <a:rPr sz="1400" b="1">
+                <a:solidFill>
+                  <a:srgbClr val="0F172A"/>
+                </a:solidFill>
+                <a:latin typeface="Arial"/>
+              </a:rPr>
+              <a:t>Grafana agent: allow list instead of a deny list</a:t>
+            </a:r>
+          </a:p>
+        </p:txBody>
+      </p:sp>
+      <p:sp>
+        <p:nvSpPr>
+          <p:cNvPr id="19" name="TextBox 18"/>
+          <p:cNvSpPr txBox="1"/>
+          <p:nvPr/>
+        </p:nvSpPr>
+        <p:spPr>
+          <a:xfrm>
+            <a:off x="5120640" y="3922775"/>
+            <a:ext cx="2834640" cy="676656"/>
+          </a:xfrm>
+          <a:prstGeom prst="rect">
+            <a:avLst/>
+          </a:prstGeom>
+          <a:noFill/>
+        </p:spPr>
+        <p:txBody>
+          <a:bodyPr wrap="square" lIns="73152" rIns="73152" tIns="36576" bIns="36576" anchor="ctr">
+            <a:spAutoFit/>
+          </a:bodyPr>
+          <a:lstStyle/>
+          <a:p>
+            <a:pPr algn="l">
+              <a:lnSpc>
+                <a:spcPct val="105000"/>
+              </a:lnSpc>
+            </a:pPr>
+            <a:r>
+              <a:rPr sz="1400" b="0">
+                <a:solidFill>
+                  <a:srgbClr val="475569"/>
+                </a:solidFill>
+                <a:latin typeface="Arial"/>
+              </a:rPr>
+              <a:t>Asked for tools outside the list</a:t>
+            </a:r>
+          </a:p>
+        </p:txBody>
+      </p:sp>
+      <p:sp>
+        <p:nvSpPr>
+          <p:cNvPr id="20" name="TextBox 19"/>
+          <p:cNvSpPr txBox="1"/>
+          <p:nvPr/>
+        </p:nvSpPr>
+        <p:spPr>
+          <a:xfrm>
+            <a:off x="8092440" y="3922775"/>
+            <a:ext cx="3474720" cy="676656"/>
+          </a:xfrm>
+          <a:prstGeom prst="rect">
+            <a:avLst/>
+          </a:prstGeom>
+          <a:noFill/>
+        </p:spPr>
+        <p:txBody>
+          <a:bodyPr wrap="square" lIns="73152" rIns="73152" tIns="36576" bIns="36576" anchor="ctr">
+            <a:spAutoFit/>
+          </a:bodyPr>
+          <a:lstStyle/>
+          <a:p>
+            <a:pPr algn="l">
+              <a:lnSpc>
+                <a:spcPct val="105000"/>
+              </a:lnSpc>
+            </a:pPr>
+            <a:r>
+              <a:rPr sz="1400" b="0">
+                <a:solidFill>
+                  <a:srgbClr val="0F766E"/>
+                </a:solidFill>
+                <a:latin typeface="Arial"/>
+              </a:rPr>
+              <a:t>"Tool not found"</a:t>
+            </a:r>
+          </a:p>
+        </p:txBody>
+      </p:sp>
+      <p:sp>
+        <p:nvSpPr>
+          <p:cNvPr id="21" name="Rounded Rectangle 20"/>
+          <p:cNvSpPr/>
+          <p:nvPr/>
+        </p:nvSpPr>
+        <p:spPr>
+          <a:xfrm>
+            <a:off x="548640" y="4690872"/>
+            <a:ext cx="11091672" cy="713232"/>
+          </a:xfrm>
+          <a:prstGeom prst="roundRect">
+            <a:avLst>
+              <a:gd name="adj" fmla="val 6000"/>
+            </a:avLst>
+          </a:prstGeom>
+          <a:solidFill>
+            <a:srgbClr val="FFFFFF"/>
+          </a:solidFill>
+          <a:ln w="12700">
+            <a:solidFill>
+              <a:srgbClr val="E2E8F0"/>
+            </a:solidFill>
+          </a:ln>
+          <a:effectLst/>
+        </p:spPr>
+        <p:style>
+          <a:lnRef idx="1">
+            <a:schemeClr val="accent1"/>
+          </a:lnRef>
+          <a:fillRef idx="3">
+            <a:schemeClr val="accent1"/>
+          </a:fillRef>
+          <a:effectRef idx="2">
+            <a:schemeClr val="accent1"/>
+          </a:effectRef>
+          <a:fontRef idx="minor">
+            <a:schemeClr val="lt1"/>
+          </a:fontRef>
+        </p:style>
+        <p:txBody>
+          <a:bodyPr rtlCol="0" anchor="ctr"/>
+          <a:lstStyle/>
+          <a:p>
+            <a:pPr algn="ctr"/>
+          </a:p>
+        </p:txBody>
+      </p:sp>
+      <p:sp>
+        <p:nvSpPr>
+          <p:cNvPr id="22" name="TextBox 21"/>
+          <p:cNvSpPr txBox="1"/>
+          <p:nvPr/>
+        </p:nvSpPr>
+        <p:spPr>
+          <a:xfrm>
+            <a:off x="777240" y="4709159"/>
+            <a:ext cx="4206240" cy="676656"/>
+          </a:xfrm>
+          <a:prstGeom prst="rect">
+            <a:avLst/>
+          </a:prstGeom>
+          <a:noFill/>
+        </p:spPr>
+        <p:txBody>
+          <a:bodyPr wrap="square" lIns="73152" rIns="73152" tIns="36576" bIns="36576" anchor="ctr">
+            <a:spAutoFit/>
+          </a:bodyPr>
+          <a:lstStyle/>
+          <a:p>
+            <a:pPr algn="l">
+              <a:lnSpc>
+                <a:spcPct val="105000"/>
+              </a:lnSpc>
+            </a:pPr>
+            <a:r>
+              <a:rPr sz="1400" b="1">
+                <a:solidFill>
+                  <a:srgbClr val="0F172A"/>
+                </a:solidFill>
+                <a:latin typeface="Arial"/>
+              </a:rPr>
+              <a:t>Owner and team label on every agent</a:t>
+            </a:r>
+          </a:p>
+        </p:txBody>
+      </p:sp>
+      <p:sp>
+        <p:nvSpPr>
+          <p:cNvPr id="23" name="TextBox 22"/>
+          <p:cNvSpPr txBox="1"/>
+          <p:nvPr/>
+        </p:nvSpPr>
+        <p:spPr>
+          <a:xfrm>
+            <a:off x="5120640" y="4709159"/>
+            <a:ext cx="2834640" cy="676656"/>
+          </a:xfrm>
+          <a:prstGeom prst="rect">
+            <a:avLst/>
+          </a:prstGeom>
+          <a:noFill/>
+        </p:spPr>
+        <p:txBody>
+          <a:bodyPr wrap="square" lIns="73152" rIns="73152" tIns="36576" bIns="36576" anchor="ctr">
+            <a:spAutoFit/>
+          </a:bodyPr>
+          <a:lstStyle/>
+          <a:p>
+            <a:pPr algn="l">
+              <a:lnSpc>
+                <a:spcPct val="105000"/>
+              </a:lnSpc>
+            </a:pPr>
+            <a:r>
+              <a:rPr sz="1400" b="0">
+                <a:solidFill>
+                  <a:srgbClr val="475569"/>
+                </a:solidFill>
+                <a:latin typeface="Arial"/>
+              </a:rPr>
+              <a:t>Fleet filtered by owner</a:t>
+            </a:r>
+          </a:p>
+        </p:txBody>
+      </p:sp>
+      <p:sp>
+        <p:nvSpPr>
+          <p:cNvPr id="24" name="TextBox 23"/>
+          <p:cNvSpPr txBox="1"/>
+          <p:nvPr/>
+        </p:nvSpPr>
+        <p:spPr>
+          <a:xfrm>
+            <a:off x="8092440" y="4709159"/>
+            <a:ext cx="3474720" cy="676656"/>
+          </a:xfrm>
+          <a:prstGeom prst="rect">
+            <a:avLst/>
+          </a:prstGeom>
+          <a:noFill/>
+        </p:spPr>
+        <p:txBody>
+          <a:bodyPr wrap="square" lIns="73152" rIns="73152" tIns="36576" bIns="36576" anchor="ctr">
+            <a:spAutoFit/>
+          </a:bodyPr>
+          <a:lstStyle/>
+          <a:p>
+            <a:pPr algn="l">
+              <a:lnSpc>
+                <a:spcPct val="105000"/>
+              </a:lnSpc>
+            </a:pPr>
+            <a:r>
+              <a:rPr sz="1400" b="0">
+                <a:solidFill>
+                  <a:srgbClr val="0F766E"/>
+                </a:solidFill>
+                <a:latin typeface="Arial"/>
+              </a:rPr>
+              <a:t>Every agent has an owner to call</a:t>
+            </a:r>
+          </a:p>
+        </p:txBody>
+      </p:sp>
+      <p:sp>
+        <p:nvSpPr>
+          <p:cNvPr id="25" name="TextBox 24"/>
+          <p:cNvSpPr txBox="1"/>
+          <p:nvPr/>
+        </p:nvSpPr>
+        <p:spPr>
+          <a:xfrm>
+            <a:off x="548640" y="5897880"/>
+            <a:ext cx="11064240" cy="457200"/>
+          </a:xfrm>
+          <a:prstGeom prst="rect">
+            <a:avLst/>
+          </a:prstGeom>
+          <a:noFill/>
+        </p:spPr>
+        <p:txBody>
+          <a:bodyPr wrap="square" lIns="73152" rIns="73152" tIns="36576" bIns="36576" anchor="t">
+            <a:spAutoFit/>
+          </a:bodyPr>
+          <a:lstStyle/>
+          <a:p>
+            <a:pPr algn="l">
+              <a:lnSpc>
+                <a:spcPct val="110000"/>
+              </a:lnSpc>
+            </a:pPr>
+            <a:r>
+              <a:rPr sz="1100" b="0">
+                <a:solidFill>
+                  <a:srgbClr val="94A3B8"/>
+                </a:solidFill>
+                <a:latin typeface="Arial"/>
+              </a:rPr>
+              <a:t>Measured on 2026-10-26 (UTC). One run each, so the cost result is a direction, not a benchmark.</a:t>
             </a:r>
           </a:p>
         </p:txBody>
@@ -24285,7 +25323,7 @@
                 </a:solidFill>
                 <a:latin typeface="Arial"/>
               </a:rPr>
-              <a:t>WORKFLOW 2  ·  CODE REVIEW  ·  owned by the app team  ·  starts on any pull request</a:t>
+              <a:t>WORKFLOW 2  ·  CODE REVIEW  ·  owned by platform engineering  ·  starts on any pull request</a:t>
             </a:r>
           </a:p>
         </p:txBody>
@@ -27012,8 +28050,8 @@
         </p:nvSpPr>
         <p:spPr>
           <a:xfrm>
-            <a:off x="548640" y="5532120"/>
-            <a:ext cx="11091672" cy="868680"/>
+            <a:off x="548640" y="5468112"/>
+            <a:ext cx="11091672" cy="1024128"/>
           </a:xfrm>
           <a:prstGeom prst="roundRect">
             <a:avLst>
@@ -27058,7 +28096,7 @@
                 </a:solidFill>
                 <a:latin typeface="Arial"/>
               </a:rPr>
-              <a:t>VERIFIED ON THIS CLUSTER</a:t>
+              <a:t>VERIFIED IN THIS LAB</a:t>
             </a:r>
           </a:p>
           <a:p>
@@ -27068,13 +28106,47 @@
               </a:lnSpc>
             </a:pPr>
             <a:r>
-              <a:rPr sz="1500" b="0">
+              <a:rPr sz="1400" b="1">
                 <a:solidFill>
                   <a:srgbClr val="0F172A"/>
                 </a:solidFill>
                 <a:latin typeface="Arial"/>
               </a:rPr>
-              <a:t>KAOP's agent permissions checked with kubectl: reads pods, events, logs. Denied secrets, exec, delete, patch, scale.</a:t>
+              <a:t>Kubernetes RCA, checked with kubectl: </a:t>
+            </a:r>
+            <a:r>
+              <a:rPr sz="1400" b="0">
+                <a:solidFill>
+                  <a:srgbClr val="0F172A"/>
+                </a:solidFill>
+                <a:latin typeface="Arial"/>
+              </a:rPr>
+              <a:t>reads pods, events, logs. Denied secrets, exec, delete, patch, scale.</a:t>
+            </a:r>
+          </a:p>
+          <a:p>
+            <a:pPr algn="l">
+              <a:lnSpc>
+                <a:spcPct val="110000"/>
+              </a:lnSpc>
+            </a:pPr>
+            <a:r>
+              <a:rPr sz="1400" b="1">
+                <a:solidFill>
+                  <a:srgbClr val="0F172A"/>
+                </a:solidFill>
+                <a:latin typeface="Arial"/>
+              </a:rPr>
+              <a:t>Grafana investigator: </a:t>
+            </a:r>
+            <a:r>
+              <a:rPr sz="1400" b="0">
+                <a:solidFill>
+                  <a:srgbClr val="0F172A"/>
+                </a:solidFill>
+                <a:latin typeface="Arial"/>
+              </a:rPr>
+              <a:t>any tool outside its allow list comes back "Tool not found".</a:t>
             </a:r>
           </a:p>
         </p:txBody>

--- a/docs/presentation/KAOP_Customer_Pitch.pptx
+++ b/docs/presentation/KAOP_Customer_Pitch.pptx
@@ -14934,7 +14934,7 @@
         <p:spPr>
           <a:xfrm>
             <a:off x="548640" y="2331720"/>
-            <a:ext cx="11091672" cy="713232"/>
+            <a:ext cx="11091672" cy="621792"/>
           </a:xfrm>
           <a:prstGeom prst="roundRect">
             <a:avLst>
@@ -14982,7 +14982,7 @@
         <p:spPr>
           <a:xfrm>
             <a:off x="777240" y="2350008"/>
-            <a:ext cx="4206240" cy="676656"/>
+            <a:ext cx="4206240" cy="585216"/>
           </a:xfrm>
           <a:prstGeom prst="rect">
             <a:avLst/>
@@ -15007,7 +15007,7 @@
                 </a:solidFill>
                 <a:latin typeface="Arial"/>
               </a:rPr>
-              <a:t>Grafana agent: only the 28 read tools it needs, plus one standards doc</a:t>
+              <a:t>Grafana agent: only the 28 read tools it needs</a:t>
             </a:r>
           </a:p>
         </p:txBody>
@@ -15021,7 +15021,7 @@
         <p:spPr>
           <a:xfrm>
             <a:off x="5120640" y="2350008"/>
-            <a:ext cx="2834640" cy="676656"/>
+            <a:ext cx="2834640" cy="585216"/>
           </a:xfrm>
           <a:prstGeom prst="rect">
             <a:avLst/>
@@ -15046,7 +15046,7 @@
                 </a:solidFill>
                 <a:latin typeface="Arial"/>
               </a:rPr>
-              <a:t>Same alert, before and after</a:t>
+              <a:t>Same alert, 3–4 runs with and without</a:t>
             </a:r>
           </a:p>
         </p:txBody>
@@ -15060,7 +15060,7 @@
         <p:spPr>
           <a:xfrm>
             <a:off x="8092440" y="2350008"/>
-            <a:ext cx="3474720" cy="676656"/>
+            <a:ext cx="3474720" cy="585216"/>
           </a:xfrm>
           <a:prstGeom prst="rect">
             <a:avLst/>
@@ -15085,7 +15085,7 @@
                 </a:solidFill>
                 <a:latin typeface="Arial"/>
               </a:rPr>
-              <a:t>$0.85 → $0.51 a run, 36 → 24 steps, and a better root cause</a:t>
+              <a:t>About $0.71 → $0.53 a run. Same root cause</a:t>
             </a:r>
           </a:p>
         </p:txBody>
@@ -15098,8 +15098,8 @@
         </p:nvSpPr>
         <p:spPr>
           <a:xfrm>
-            <a:off x="548640" y="3118103"/>
-            <a:ext cx="11091672" cy="713232"/>
+            <a:off x="548640" y="3026663"/>
+            <a:ext cx="11091672" cy="621792"/>
           </a:xfrm>
           <a:prstGeom prst="roundRect">
             <a:avLst>
@@ -15146,8 +15146,8 @@
         </p:nvSpPr>
         <p:spPr>
           <a:xfrm>
-            <a:off x="777240" y="3136391"/>
-            <a:ext cx="4206240" cy="676656"/>
+            <a:off x="777240" y="3044951"/>
+            <a:ext cx="4206240" cy="585216"/>
           </a:xfrm>
           <a:prstGeom prst="rect">
             <a:avLst/>
@@ -15172,7 +15172,7 @@
                 </a:solidFill>
                 <a:latin typeface="Arial"/>
               </a:rPr>
-              <a:t>Workflow budget: $40 a day, blocks new runs</a:t>
+              <a:t>One standards doc for every incident agent</a:t>
             </a:r>
           </a:p>
         </p:txBody>
@@ -15185,8 +15185,8 @@
         </p:nvSpPr>
         <p:spPr>
           <a:xfrm>
-            <a:off x="5120640" y="3136391"/>
-            <a:ext cx="2834640" cy="676656"/>
+            <a:off x="5120640" y="3044951"/>
+            <a:ext cx="2834640" cy="585216"/>
           </a:xfrm>
           <a:prstGeom prst="rect">
             <a:avLst/>
@@ -15211,7 +15211,7 @@
                 </a:solidFill>
                 <a:latin typeface="Arial"/>
               </a:rPr>
-              <a:t>Cap lowered to $0.01, two alerts sent</a:t>
+              <a:t>Same alert, before and after the doc</a:t>
             </a:r>
           </a:p>
         </p:txBody>
@@ -15224,8 +15224,8 @@
         </p:nvSpPr>
         <p:spPr>
           <a:xfrm>
-            <a:off x="8092440" y="3136391"/>
-            <a:ext cx="3474720" cy="676656"/>
+            <a:off x="8092440" y="3044951"/>
+            <a:ext cx="3474720" cy="585216"/>
           </a:xfrm>
           <a:prstGeom prst="rect">
             <a:avLst/>
@@ -15250,7 +15250,7 @@
                 </a:solidFill>
                 <a:latin typeface="Arial"/>
               </a:rPr>
-              <a:t>Second alert recorded but not investigated, with the reason</a:t>
+              <a:t>Every run quotes our rule and runbook. Cost about the same</a:t>
             </a:r>
           </a:p>
         </p:txBody>
@@ -15263,8 +15263,8 @@
         </p:nvSpPr>
         <p:spPr>
           <a:xfrm>
-            <a:off x="548640" y="3904487"/>
-            <a:ext cx="11091672" cy="713232"/>
+            <a:off x="548640" y="3721608"/>
+            <a:ext cx="11091672" cy="621792"/>
           </a:xfrm>
           <a:prstGeom prst="roundRect">
             <a:avLst>
@@ -15311,8 +15311,8 @@
         </p:nvSpPr>
         <p:spPr>
           <a:xfrm>
-            <a:off x="777240" y="3922775"/>
-            <a:ext cx="4206240" cy="676656"/>
+            <a:off x="777240" y="3739896"/>
+            <a:ext cx="4206240" cy="585216"/>
           </a:xfrm>
           <a:prstGeom prst="rect">
             <a:avLst/>
@@ -15337,7 +15337,7 @@
                 </a:solidFill>
                 <a:latin typeface="Arial"/>
               </a:rPr>
-              <a:t>Grafana agent: allow list instead of a deny list</a:t>
+              <a:t>Workflow budget: $40 a day, blocks new runs</a:t>
             </a:r>
           </a:p>
         </p:txBody>
@@ -15350,8 +15350,8 @@
         </p:nvSpPr>
         <p:spPr>
           <a:xfrm>
-            <a:off x="5120640" y="3922775"/>
-            <a:ext cx="2834640" cy="676656"/>
+            <a:off x="5120640" y="3739896"/>
+            <a:ext cx="2834640" cy="585216"/>
           </a:xfrm>
           <a:prstGeom prst="rect">
             <a:avLst/>
@@ -15376,7 +15376,7 @@
                 </a:solidFill>
                 <a:latin typeface="Arial"/>
               </a:rPr>
-              <a:t>Asked for tools outside the list</a:t>
+              <a:t>Cap lowered to $0.01, two alerts sent</a:t>
             </a:r>
           </a:p>
         </p:txBody>
@@ -15389,8 +15389,8 @@
         </p:nvSpPr>
         <p:spPr>
           <a:xfrm>
-            <a:off x="8092440" y="3922775"/>
-            <a:ext cx="3474720" cy="676656"/>
+            <a:off x="8092440" y="3739896"/>
+            <a:ext cx="3474720" cy="585216"/>
           </a:xfrm>
           <a:prstGeom prst="rect">
             <a:avLst/>
@@ -15415,7 +15415,7 @@
                 </a:solidFill>
                 <a:latin typeface="Arial"/>
               </a:rPr>
-              <a:t>"Tool not found"</a:t>
+              <a:t>Second alert recorded but not investigated, with the reason</a:t>
             </a:r>
           </a:p>
         </p:txBody>
@@ -15428,8 +15428,8 @@
         </p:nvSpPr>
         <p:spPr>
           <a:xfrm>
-            <a:off x="548640" y="4690872"/>
-            <a:ext cx="11091672" cy="713232"/>
+            <a:off x="548640" y="4416552"/>
+            <a:ext cx="11091672" cy="621792"/>
           </a:xfrm>
           <a:prstGeom prst="roundRect">
             <a:avLst>
@@ -15476,8 +15476,8 @@
         </p:nvSpPr>
         <p:spPr>
           <a:xfrm>
-            <a:off x="777240" y="4709159"/>
-            <a:ext cx="4206240" cy="676656"/>
+            <a:off x="777240" y="4434840"/>
+            <a:ext cx="4206240" cy="585216"/>
           </a:xfrm>
           <a:prstGeom prst="rect">
             <a:avLst/>
@@ -15502,6 +15502,171 @@
                 </a:solidFill>
                 <a:latin typeface="Arial"/>
               </a:rPr>
+              <a:t>Grafana agent: allow list instead of a deny list</a:t>
+            </a:r>
+          </a:p>
+        </p:txBody>
+      </p:sp>
+      <p:sp>
+        <p:nvSpPr>
+          <p:cNvPr id="23" name="TextBox 22"/>
+          <p:cNvSpPr txBox="1"/>
+          <p:nvPr/>
+        </p:nvSpPr>
+        <p:spPr>
+          <a:xfrm>
+            <a:off x="5120640" y="4434840"/>
+            <a:ext cx="2834640" cy="585216"/>
+          </a:xfrm>
+          <a:prstGeom prst="rect">
+            <a:avLst/>
+          </a:prstGeom>
+          <a:noFill/>
+        </p:spPr>
+        <p:txBody>
+          <a:bodyPr wrap="square" lIns="73152" rIns="73152" tIns="36576" bIns="36576" anchor="ctr">
+            <a:spAutoFit/>
+          </a:bodyPr>
+          <a:lstStyle/>
+          <a:p>
+            <a:pPr algn="l">
+              <a:lnSpc>
+                <a:spcPct val="105000"/>
+              </a:lnSpc>
+            </a:pPr>
+            <a:r>
+              <a:rPr sz="1400" b="0">
+                <a:solidFill>
+                  <a:srgbClr val="475569"/>
+                </a:solidFill>
+                <a:latin typeface="Arial"/>
+              </a:rPr>
+              <a:t>Asked for tools outside the list</a:t>
+            </a:r>
+          </a:p>
+        </p:txBody>
+      </p:sp>
+      <p:sp>
+        <p:nvSpPr>
+          <p:cNvPr id="24" name="TextBox 23"/>
+          <p:cNvSpPr txBox="1"/>
+          <p:nvPr/>
+        </p:nvSpPr>
+        <p:spPr>
+          <a:xfrm>
+            <a:off x="8092440" y="4434840"/>
+            <a:ext cx="3474720" cy="585216"/>
+          </a:xfrm>
+          <a:prstGeom prst="rect">
+            <a:avLst/>
+          </a:prstGeom>
+          <a:noFill/>
+        </p:spPr>
+        <p:txBody>
+          <a:bodyPr wrap="square" lIns="73152" rIns="73152" tIns="36576" bIns="36576" anchor="ctr">
+            <a:spAutoFit/>
+          </a:bodyPr>
+          <a:lstStyle/>
+          <a:p>
+            <a:pPr algn="l">
+              <a:lnSpc>
+                <a:spcPct val="105000"/>
+              </a:lnSpc>
+            </a:pPr>
+            <a:r>
+              <a:rPr sz="1400" b="0">
+                <a:solidFill>
+                  <a:srgbClr val="0F766E"/>
+                </a:solidFill>
+                <a:latin typeface="Arial"/>
+              </a:rPr>
+              <a:t>"Not permitted" / "Tool not found"</a:t>
+            </a:r>
+          </a:p>
+        </p:txBody>
+      </p:sp>
+      <p:sp>
+        <p:nvSpPr>
+          <p:cNvPr id="25" name="Rounded Rectangle 24"/>
+          <p:cNvSpPr/>
+          <p:nvPr/>
+        </p:nvSpPr>
+        <p:spPr>
+          <a:xfrm>
+            <a:off x="548640" y="5111496"/>
+            <a:ext cx="11091672" cy="621792"/>
+          </a:xfrm>
+          <a:prstGeom prst="roundRect">
+            <a:avLst>
+              <a:gd name="adj" fmla="val 6000"/>
+            </a:avLst>
+          </a:prstGeom>
+          <a:solidFill>
+            <a:srgbClr val="FFFFFF"/>
+          </a:solidFill>
+          <a:ln w="12700">
+            <a:solidFill>
+              <a:srgbClr val="E2E8F0"/>
+            </a:solidFill>
+          </a:ln>
+          <a:effectLst/>
+        </p:spPr>
+        <p:style>
+          <a:lnRef idx="1">
+            <a:schemeClr val="accent1"/>
+          </a:lnRef>
+          <a:fillRef idx="3">
+            <a:schemeClr val="accent1"/>
+          </a:fillRef>
+          <a:effectRef idx="2">
+            <a:schemeClr val="accent1"/>
+          </a:effectRef>
+          <a:fontRef idx="minor">
+            <a:schemeClr val="lt1"/>
+          </a:fontRef>
+        </p:style>
+        <p:txBody>
+          <a:bodyPr rtlCol="0" anchor="ctr"/>
+          <a:lstStyle/>
+          <a:p>
+            <a:pPr algn="ctr"/>
+          </a:p>
+        </p:txBody>
+      </p:sp>
+      <p:sp>
+        <p:nvSpPr>
+          <p:cNvPr id="26" name="TextBox 25"/>
+          <p:cNvSpPr txBox="1"/>
+          <p:nvPr/>
+        </p:nvSpPr>
+        <p:spPr>
+          <a:xfrm>
+            <a:off x="777240" y="5129783"/>
+            <a:ext cx="4206240" cy="585216"/>
+          </a:xfrm>
+          <a:prstGeom prst="rect">
+            <a:avLst/>
+          </a:prstGeom>
+          <a:noFill/>
+        </p:spPr>
+        <p:txBody>
+          <a:bodyPr wrap="square" lIns="73152" rIns="73152" tIns="36576" bIns="36576" anchor="ctr">
+            <a:spAutoFit/>
+          </a:bodyPr>
+          <a:lstStyle/>
+          <a:p>
+            <a:pPr algn="l">
+              <a:lnSpc>
+                <a:spcPct val="105000"/>
+              </a:lnSpc>
+            </a:pPr>
+            <a:r>
+              <a:rPr sz="1400" b="1">
+                <a:solidFill>
+                  <a:srgbClr val="0F172A"/>
+                </a:solidFill>
+                <a:latin typeface="Arial"/>
+              </a:rPr>
               <a:t>Owner and team label on every agent</a:t>
             </a:r>
           </a:p>
@@ -15509,14 +15674,14 @@
       </p:sp>
       <p:sp>
         <p:nvSpPr>
-          <p:cNvPr id="23" name="TextBox 22"/>
-          <p:cNvSpPr txBox="1"/>
-          <p:nvPr/>
-        </p:nvSpPr>
-        <p:spPr>
-          <a:xfrm>
-            <a:off x="5120640" y="4709159"/>
-            <a:ext cx="2834640" cy="676656"/>
+          <p:cNvPr id="27" name="TextBox 26"/>
+          <p:cNvSpPr txBox="1"/>
+          <p:nvPr/>
+        </p:nvSpPr>
+        <p:spPr>
+          <a:xfrm>
+            <a:off x="5120640" y="5129783"/>
+            <a:ext cx="2834640" cy="585216"/>
           </a:xfrm>
           <a:prstGeom prst="rect">
             <a:avLst/>
@@ -15548,14 +15713,14 @@
       </p:sp>
       <p:sp>
         <p:nvSpPr>
-          <p:cNvPr id="24" name="TextBox 23"/>
-          <p:cNvSpPr txBox="1"/>
-          <p:nvPr/>
-        </p:nvSpPr>
-        <p:spPr>
-          <a:xfrm>
-            <a:off x="8092440" y="4709159"/>
-            <a:ext cx="3474720" cy="676656"/>
+          <p:cNvPr id="28" name="TextBox 27"/>
+          <p:cNvSpPr txBox="1"/>
+          <p:nvPr/>
+        </p:nvSpPr>
+        <p:spPr>
+          <a:xfrm>
+            <a:off x="8092440" y="5129783"/>
+            <a:ext cx="3474720" cy="585216"/>
           </a:xfrm>
           <a:prstGeom prst="rect">
             <a:avLst/>
@@ -15587,13 +15752,13 @@
       </p:sp>
       <p:sp>
         <p:nvSpPr>
-          <p:cNvPr id="25" name="TextBox 24"/>
-          <p:cNvSpPr txBox="1"/>
-          <p:nvPr/>
-        </p:nvSpPr>
-        <p:spPr>
-          <a:xfrm>
-            <a:off x="548640" y="5897880"/>
+          <p:cNvPr id="29" name="TextBox 28"/>
+          <p:cNvSpPr txBox="1"/>
+          <p:nvPr/>
+        </p:nvSpPr>
+        <p:spPr>
+          <a:xfrm>
+            <a:off x="548640" y="5943600"/>
             <a:ext cx="11064240" cy="457200"/>
           </a:xfrm>
           <a:prstGeom prst="rect">
@@ -15619,7 +15784,7 @@
                 </a:solidFill>
                 <a:latin typeface="Arial"/>
               </a:rPr>
-              <a:t>Measured on 2026-10-26 (UTC). One run each, so the cost result is a direction, not a benchmark.</a:t>
+              <a:t>Measured on 2026-10-25 and 2026-10-26 (UTC). Identical runs vary by about 20 cents, so read the cost result as a direction, not a benchmark.</a:t>
             </a:r>
           </a:p>
         </p:txBody>

--- a/docs/presentation/KAOP_Customer_Pitch.pptx
+++ b/docs/presentation/KAOP_Customer_Pitch.pptx
@@ -20549,7 +20549,7 @@
                 </a:solidFill>
                 <a:latin typeface="Arial"/>
               </a:rPr>
-              <a:t>The context, memory and governance Komodor built for its own agents, ready for yours from day one.</a:t>
+              <a:t>Each problem you have today, and what KAOP does about it.</a:t>
             </a:r>
           </a:p>
         </p:txBody>
@@ -20562,8 +20562,127 @@
         </p:nvSpPr>
         <p:spPr>
           <a:xfrm>
-            <a:off x="548640" y="2057400"/>
-            <a:ext cx="2670048" cy="3291840"/>
+            <a:off x="548640" y="2011680"/>
+            <a:ext cx="2670048" cy="914400"/>
+          </a:xfrm>
+          <a:prstGeom prst="roundRect">
+            <a:avLst>
+              <a:gd name="adj" fmla="val 8000"/>
+            </a:avLst>
+          </a:prstGeom>
+          <a:solidFill>
+            <a:srgbClr val="FEF2F2"/>
+          </a:solidFill>
+          <a:ln>
+            <a:noFill/>
+          </a:ln>
+          <a:effectLst/>
+        </p:spPr>
+        <p:style>
+          <a:lnRef idx="1">
+            <a:schemeClr val="accent1"/>
+          </a:lnRef>
+          <a:fillRef idx="3">
+            <a:schemeClr val="accent1"/>
+          </a:fillRef>
+          <a:effectRef idx="2">
+            <a:schemeClr val="accent1"/>
+          </a:effectRef>
+          <a:fontRef idx="minor">
+            <a:schemeClr val="lt1"/>
+          </a:fontRef>
+        </p:style>
+        <p:txBody>
+          <a:bodyPr rtlCol="0" anchor="t" wrap="square" lIns="73152" rIns="73152" tIns="36576" bIns="36576"/>
+          <a:lstStyle/>
+          <a:p>
+            <a:pPr algn="l">
+              <a:lnSpc>
+                <a:spcPct val="105000"/>
+              </a:lnSpc>
+            </a:pPr>
+            <a:r>
+              <a:rPr sz="1000" b="1">
+                <a:solidFill>
+                  <a:srgbClr val="B91C1C"/>
+                </a:solidFill>
+                <a:latin typeface="Arial"/>
+              </a:rPr>
+              <a:t>TODAY</a:t>
+            </a:r>
+          </a:p>
+          <a:p>
+            <a:pPr algn="l">
+              <a:lnSpc>
+                <a:spcPct val="105000"/>
+              </a:lnSpc>
+            </a:pPr>
+            <a:r>
+              <a:rPr sz="1350" b="0">
+                <a:solidFill>
+                  <a:srgbClr val="0F172A"/>
+                </a:solidFill>
+                <a:latin typeface="Arial"/>
+              </a:rPr>
+              <a:t>Every team builds its agents from scratch.</a:t>
+            </a:r>
+          </a:p>
+        </p:txBody>
+      </p:sp>
+      <p:sp>
+        <p:nvSpPr>
+          <p:cNvPr id="7" name="Down Arrow 6"/>
+          <p:cNvSpPr/>
+          <p:nvPr/>
+        </p:nvSpPr>
+        <p:spPr>
+          <a:xfrm>
+            <a:off x="1737360" y="2990088"/>
+            <a:ext cx="219456" cy="274320"/>
+          </a:xfrm>
+          <a:prstGeom prst="downArrow">
+            <a:avLst/>
+          </a:prstGeom>
+          <a:solidFill>
+            <a:srgbClr val="94A3B8"/>
+          </a:solidFill>
+          <a:ln>
+            <a:noFill/>
+          </a:ln>
+          <a:effectLst/>
+        </p:spPr>
+        <p:style>
+          <a:lnRef idx="1">
+            <a:schemeClr val="accent1"/>
+          </a:lnRef>
+          <a:fillRef idx="3">
+            <a:schemeClr val="accent1"/>
+          </a:fillRef>
+          <a:effectRef idx="2">
+            <a:schemeClr val="accent1"/>
+          </a:effectRef>
+          <a:fontRef idx="minor">
+            <a:schemeClr val="lt1"/>
+          </a:fontRef>
+        </p:style>
+        <p:txBody>
+          <a:bodyPr rtlCol="0" anchor="ctr"/>
+          <a:lstStyle/>
+          <a:p>
+            <a:pPr algn="ctr"/>
+          </a:p>
+        </p:txBody>
+      </p:sp>
+      <p:sp>
+        <p:nvSpPr>
+          <p:cNvPr id="8" name="Rounded Rectangle 7"/>
+          <p:cNvSpPr/>
+          <p:nvPr/>
+        </p:nvSpPr>
+        <p:spPr>
+          <a:xfrm>
+            <a:off x="548640" y="3337560"/>
+            <a:ext cx="2670048" cy="2148840"/>
           </a:xfrm>
           <a:prstGeom prst="roundRect">
             <a:avLst>
@@ -20604,13 +20723,13 @@
       </p:sp>
       <p:sp>
         <p:nvSpPr>
-          <p:cNvPr id="7" name="Rectangle 6"/>
+          <p:cNvPr id="9" name="Rectangle 8"/>
           <p:cNvSpPr/>
           <p:nvPr/>
         </p:nvSpPr>
         <p:spPr>
           <a:xfrm>
-            <a:off x="777240" y="2331720"/>
+            <a:off x="777240" y="3611879"/>
             <a:ext cx="73152" cy="457200"/>
           </a:xfrm>
           <a:prstGeom prst="rect">
@@ -20648,13 +20767,13 @@
       </p:sp>
       <p:sp>
         <p:nvSpPr>
-          <p:cNvPr id="8" name="TextBox 7"/>
+          <p:cNvPr id="10" name="TextBox 9"/>
           <p:cNvSpPr txBox="1"/>
           <p:nvPr/>
         </p:nvSpPr>
         <p:spPr>
           <a:xfrm>
-            <a:off x="932688" y="2258568"/>
+            <a:off x="932688" y="3538728"/>
             <a:ext cx="2121408" cy="274320"/>
           </a:xfrm>
           <a:prstGeom prst="rect">
@@ -20687,13 +20806,13 @@
       </p:sp>
       <p:sp>
         <p:nvSpPr>
-          <p:cNvPr id="9" name="TextBox 8"/>
+          <p:cNvPr id="11" name="TextBox 10"/>
           <p:cNvSpPr txBox="1"/>
           <p:nvPr/>
         </p:nvSpPr>
         <p:spPr>
           <a:xfrm>
-            <a:off x="932688" y="2514600"/>
+            <a:off x="932688" y="3794760"/>
             <a:ext cx="2121408" cy="548640"/>
           </a:xfrm>
           <a:prstGeom prst="rect">
@@ -20713,27 +20832,27 @@
               </a:lnSpc>
             </a:pPr>
             <a:r>
-              <a:rPr sz="1800" b="1">
+              <a:rPr sz="1700" b="1">
                 <a:solidFill>
                   <a:srgbClr val="0F172A"/>
                 </a:solidFill>
                 <a:latin typeface="Arial"/>
               </a:rPr>
-              <a:t>Start ready, or bring your own</a:t>
-            </a:r>
-          </a:p>
-        </p:txBody>
-      </p:sp>
-      <p:sp>
-        <p:nvSpPr>
-          <p:cNvPr id="10" name="TextBox 9"/>
+              <a:t>Start from 50+ ready agents</a:t>
+            </a:r>
+          </a:p>
+        </p:txBody>
+      </p:sp>
+      <p:sp>
+        <p:nvSpPr>
+          <p:cNvPr id="12" name="TextBox 11"/>
           <p:cNvSpPr txBox="1"/>
           <p:nvPr/>
         </p:nvSpPr>
         <p:spPr>
           <a:xfrm>
-            <a:off x="777240" y="3383280"/>
-            <a:ext cx="2258568" cy="1828800"/>
+            <a:off x="777240" y="4526280"/>
+            <a:ext cx="2258568" cy="822960"/>
           </a:xfrm>
           <a:prstGeom prst="rect">
             <a:avLst/>
@@ -20752,27 +20871,146 @@
               </a:lnSpc>
             </a:pPr>
             <a:r>
-              <a:rPr sz="1550" b="0">
+              <a:rPr sz="1450" b="0">
                 <a:solidFill>
                   <a:srgbClr val="475569"/>
                 </a:solidFill>
                 <a:latin typeface="Arial"/>
               </a:rPr>
-              <a:t>50+ ready agents and workflows. Yours get the same controls.</a:t>
-            </a:r>
-          </a:p>
-        </p:txBody>
-      </p:sp>
-      <p:sp>
-        <p:nvSpPr>
-          <p:cNvPr id="11" name="Rounded Rectangle 10"/>
+              <a:t>Or bring your own. Same controls.</a:t>
+            </a:r>
+          </a:p>
+        </p:txBody>
+      </p:sp>
+      <p:sp>
+        <p:nvSpPr>
+          <p:cNvPr id="13" name="Rounded Rectangle 12"/>
           <p:cNvSpPr/>
           <p:nvPr/>
         </p:nvSpPr>
         <p:spPr>
           <a:xfrm>
-            <a:off x="3355848" y="2057400"/>
-            <a:ext cx="2670048" cy="3291840"/>
+            <a:off x="3355848" y="2011680"/>
+            <a:ext cx="2670048" cy="914400"/>
+          </a:xfrm>
+          <a:prstGeom prst="roundRect">
+            <a:avLst>
+              <a:gd name="adj" fmla="val 8000"/>
+            </a:avLst>
+          </a:prstGeom>
+          <a:solidFill>
+            <a:srgbClr val="FEF2F2"/>
+          </a:solidFill>
+          <a:ln>
+            <a:noFill/>
+          </a:ln>
+          <a:effectLst/>
+        </p:spPr>
+        <p:style>
+          <a:lnRef idx="1">
+            <a:schemeClr val="accent1"/>
+          </a:lnRef>
+          <a:fillRef idx="3">
+            <a:schemeClr val="accent1"/>
+          </a:fillRef>
+          <a:effectRef idx="2">
+            <a:schemeClr val="accent1"/>
+          </a:effectRef>
+          <a:fontRef idx="minor">
+            <a:schemeClr val="lt1"/>
+          </a:fontRef>
+        </p:style>
+        <p:txBody>
+          <a:bodyPr rtlCol="0" anchor="t" wrap="square" lIns="73152" rIns="73152" tIns="36576" bIns="36576"/>
+          <a:lstStyle/>
+          <a:p>
+            <a:pPr algn="l">
+              <a:lnSpc>
+                <a:spcPct val="105000"/>
+              </a:lnSpc>
+            </a:pPr>
+            <a:r>
+              <a:rPr sz="1000" b="1">
+                <a:solidFill>
+                  <a:srgbClr val="B91C1C"/>
+                </a:solidFill>
+                <a:latin typeface="Arial"/>
+              </a:rPr>
+              <a:t>TODAY</a:t>
+            </a:r>
+          </a:p>
+          <a:p>
+            <a:pPr algn="l">
+              <a:lnSpc>
+                <a:spcPct val="105000"/>
+              </a:lnSpc>
+            </a:pPr>
+            <a:r>
+              <a:rPr sz="1350" b="0">
+                <a:solidFill>
+                  <a:srgbClr val="0F172A"/>
+                </a:solidFill>
+                <a:latin typeface="Arial"/>
+              </a:rPr>
+              <a:t>Alert, investigation and fix sit in three tools.</a:t>
+            </a:r>
+          </a:p>
+        </p:txBody>
+      </p:sp>
+      <p:sp>
+        <p:nvSpPr>
+          <p:cNvPr id="14" name="Down Arrow 13"/>
+          <p:cNvSpPr/>
+          <p:nvPr/>
+        </p:nvSpPr>
+        <p:spPr>
+          <a:xfrm>
+            <a:off x="4544568" y="2990088"/>
+            <a:ext cx="219456" cy="274320"/>
+          </a:xfrm>
+          <a:prstGeom prst="downArrow">
+            <a:avLst/>
+          </a:prstGeom>
+          <a:solidFill>
+            <a:srgbClr val="94A3B8"/>
+          </a:solidFill>
+          <a:ln>
+            <a:noFill/>
+          </a:ln>
+          <a:effectLst/>
+        </p:spPr>
+        <p:style>
+          <a:lnRef idx="1">
+            <a:schemeClr val="accent1"/>
+          </a:lnRef>
+          <a:fillRef idx="3">
+            <a:schemeClr val="accent1"/>
+          </a:fillRef>
+          <a:effectRef idx="2">
+            <a:schemeClr val="accent1"/>
+          </a:effectRef>
+          <a:fontRef idx="minor">
+            <a:schemeClr val="lt1"/>
+          </a:fontRef>
+        </p:style>
+        <p:txBody>
+          <a:bodyPr rtlCol="0" anchor="ctr"/>
+          <a:lstStyle/>
+          <a:p>
+            <a:pPr algn="ctr"/>
+          </a:p>
+        </p:txBody>
+      </p:sp>
+      <p:sp>
+        <p:nvSpPr>
+          <p:cNvPr id="15" name="Rounded Rectangle 14"/>
+          <p:cNvSpPr/>
+          <p:nvPr/>
+        </p:nvSpPr>
+        <p:spPr>
+          <a:xfrm>
+            <a:off x="3355848" y="3337560"/>
+            <a:ext cx="2670048" cy="2148840"/>
           </a:xfrm>
           <a:prstGeom prst="roundRect">
             <a:avLst>
@@ -20813,13 +21051,13 @@
       </p:sp>
       <p:sp>
         <p:nvSpPr>
-          <p:cNvPr id="12" name="Rectangle 11"/>
+          <p:cNvPr id="16" name="Rectangle 15"/>
           <p:cNvSpPr/>
           <p:nvPr/>
         </p:nvSpPr>
         <p:spPr>
           <a:xfrm>
-            <a:off x="3584448" y="2331720"/>
+            <a:off x="3584448" y="3611879"/>
             <a:ext cx="73152" cy="457200"/>
           </a:xfrm>
           <a:prstGeom prst="rect">
@@ -20857,13 +21095,13 @@
       </p:sp>
       <p:sp>
         <p:nvSpPr>
-          <p:cNvPr id="13" name="TextBox 12"/>
+          <p:cNvPr id="17" name="TextBox 16"/>
           <p:cNvSpPr txBox="1"/>
           <p:nvPr/>
         </p:nvSpPr>
         <p:spPr>
           <a:xfrm>
-            <a:off x="3739896" y="2258568"/>
+            <a:off x="3739896" y="3538728"/>
             <a:ext cx="2121408" cy="274320"/>
           </a:xfrm>
           <a:prstGeom prst="rect">
@@ -20896,13 +21134,13 @@
       </p:sp>
       <p:sp>
         <p:nvSpPr>
-          <p:cNvPr id="14" name="TextBox 13"/>
+          <p:cNvPr id="18" name="TextBox 17"/>
           <p:cNvSpPr txBox="1"/>
           <p:nvPr/>
         </p:nvSpPr>
         <p:spPr>
           <a:xfrm>
-            <a:off x="3739896" y="2514600"/>
+            <a:off x="3739896" y="3794760"/>
             <a:ext cx="2121408" cy="548640"/>
           </a:xfrm>
           <a:prstGeom prst="rect">
@@ -20922,27 +21160,27 @@
               </a:lnSpc>
             </a:pPr>
             <a:r>
-              <a:rPr sz="1800" b="1">
+              <a:rPr sz="1700" b="1">
                 <a:solidFill>
                   <a:srgbClr val="0F172A"/>
                 </a:solidFill>
                 <a:latin typeface="Arial"/>
               </a:rPr>
-              <a:t>Real triggers, real workflows</a:t>
-            </a:r>
-          </a:p>
-        </p:txBody>
-      </p:sp>
-      <p:sp>
-        <p:nvSpPr>
-          <p:cNvPr id="15" name="TextBox 14"/>
+              <a:t>One workflow, one record</a:t>
+            </a:r>
+          </a:p>
+        </p:txBody>
+      </p:sp>
+      <p:sp>
+        <p:nvSpPr>
+          <p:cNvPr id="19" name="TextBox 18"/>
           <p:cNvSpPr txBox="1"/>
           <p:nvPr/>
         </p:nvSpPr>
         <p:spPr>
           <a:xfrm>
-            <a:off x="3584448" y="3383280"/>
-            <a:ext cx="2258568" cy="1828800"/>
+            <a:off x="3584448" y="4526280"/>
+            <a:ext cx="2258568" cy="822960"/>
           </a:xfrm>
           <a:prstGeom prst="rect">
             <a:avLst/>
@@ -20961,27 +21199,146 @@
               </a:lnSpc>
             </a:pPr>
             <a:r>
-              <a:rPr sz="1550" b="0">
+              <a:rPr sz="1450" b="0">
                 <a:solidFill>
                   <a:srgbClr val="475569"/>
                 </a:solidFill>
                 <a:latin typeface="Arial"/>
               </a:rPr>
-              <a:t>Alerts start the work. Specialists hand off. One record.</a:t>
-            </a:r>
-          </a:p>
-        </p:txBody>
-      </p:sp>
-      <p:sp>
-        <p:nvSpPr>
-          <p:cNvPr id="16" name="Rounded Rectangle 15"/>
+              <a:t>Alerts start the work. Agents hand off.</a:t>
+            </a:r>
+          </a:p>
+        </p:txBody>
+      </p:sp>
+      <p:sp>
+        <p:nvSpPr>
+          <p:cNvPr id="20" name="Rounded Rectangle 19"/>
           <p:cNvSpPr/>
           <p:nvPr/>
         </p:nvSpPr>
         <p:spPr>
           <a:xfrm>
-            <a:off x="6163055" y="2057400"/>
-            <a:ext cx="2670048" cy="3291840"/>
+            <a:off x="6163055" y="2011680"/>
+            <a:ext cx="2670048" cy="914400"/>
+          </a:xfrm>
+          <a:prstGeom prst="roundRect">
+            <a:avLst>
+              <a:gd name="adj" fmla="val 8000"/>
+            </a:avLst>
+          </a:prstGeom>
+          <a:solidFill>
+            <a:srgbClr val="FEF2F2"/>
+          </a:solidFill>
+          <a:ln>
+            <a:noFill/>
+          </a:ln>
+          <a:effectLst/>
+        </p:spPr>
+        <p:style>
+          <a:lnRef idx="1">
+            <a:schemeClr val="accent1"/>
+          </a:lnRef>
+          <a:fillRef idx="3">
+            <a:schemeClr val="accent1"/>
+          </a:fillRef>
+          <a:effectRef idx="2">
+            <a:schemeClr val="accent1"/>
+          </a:effectRef>
+          <a:fontRef idx="minor">
+            <a:schemeClr val="lt1"/>
+          </a:fontRef>
+        </p:style>
+        <p:txBody>
+          <a:bodyPr rtlCol="0" anchor="t" wrap="square" lIns="73152" rIns="73152" tIns="36576" bIns="36576"/>
+          <a:lstStyle/>
+          <a:p>
+            <a:pPr algn="l">
+              <a:lnSpc>
+                <a:spcPct val="105000"/>
+              </a:lnSpc>
+            </a:pPr>
+            <a:r>
+              <a:rPr sz="1000" b="1">
+                <a:solidFill>
+                  <a:srgbClr val="B91C1C"/>
+                </a:solidFill>
+                <a:latin typeface="Arial"/>
+              </a:rPr>
+              <a:t>TODAY</a:t>
+            </a:r>
+          </a:p>
+          <a:p>
+            <a:pPr algn="l">
+              <a:lnSpc>
+                <a:spcPct val="105000"/>
+              </a:lnSpc>
+            </a:pPr>
+            <a:r>
+              <a:rPr sz="1350" b="0">
+                <a:solidFill>
+                  <a:srgbClr val="0F172A"/>
+                </a:solidFill>
+                <a:latin typeface="Arial"/>
+              </a:rPr>
+              <a:t>An agent's limits live in its prompt.</a:t>
+            </a:r>
+          </a:p>
+        </p:txBody>
+      </p:sp>
+      <p:sp>
+        <p:nvSpPr>
+          <p:cNvPr id="21" name="Down Arrow 20"/>
+          <p:cNvSpPr/>
+          <p:nvPr/>
+        </p:nvSpPr>
+        <p:spPr>
+          <a:xfrm>
+            <a:off x="7351775" y="2990088"/>
+            <a:ext cx="219456" cy="274320"/>
+          </a:xfrm>
+          <a:prstGeom prst="downArrow">
+            <a:avLst/>
+          </a:prstGeom>
+          <a:solidFill>
+            <a:srgbClr val="94A3B8"/>
+          </a:solidFill>
+          <a:ln>
+            <a:noFill/>
+          </a:ln>
+          <a:effectLst/>
+        </p:spPr>
+        <p:style>
+          <a:lnRef idx="1">
+            <a:schemeClr val="accent1"/>
+          </a:lnRef>
+          <a:fillRef idx="3">
+            <a:schemeClr val="accent1"/>
+          </a:fillRef>
+          <a:effectRef idx="2">
+            <a:schemeClr val="accent1"/>
+          </a:effectRef>
+          <a:fontRef idx="minor">
+            <a:schemeClr val="lt1"/>
+          </a:fontRef>
+        </p:style>
+        <p:txBody>
+          <a:bodyPr rtlCol="0" anchor="ctr"/>
+          <a:lstStyle/>
+          <a:p>
+            <a:pPr algn="ctr"/>
+          </a:p>
+        </p:txBody>
+      </p:sp>
+      <p:sp>
+        <p:nvSpPr>
+          <p:cNvPr id="22" name="Rounded Rectangle 21"/>
+          <p:cNvSpPr/>
+          <p:nvPr/>
+        </p:nvSpPr>
+        <p:spPr>
+          <a:xfrm>
+            <a:off x="6163055" y="3337560"/>
+            <a:ext cx="2670048" cy="2148840"/>
           </a:xfrm>
           <a:prstGeom prst="roundRect">
             <a:avLst>
@@ -21022,13 +21379,13 @@
       </p:sp>
       <p:sp>
         <p:nvSpPr>
-          <p:cNvPr id="17" name="Rectangle 16"/>
+          <p:cNvPr id="23" name="Rectangle 22"/>
           <p:cNvSpPr/>
           <p:nvPr/>
         </p:nvSpPr>
         <p:spPr>
           <a:xfrm>
-            <a:off x="6391655" y="2331720"/>
+            <a:off x="6391655" y="3611879"/>
             <a:ext cx="73152" cy="457200"/>
           </a:xfrm>
           <a:prstGeom prst="rect">
@@ -21066,13 +21423,13 @@
       </p:sp>
       <p:sp>
         <p:nvSpPr>
-          <p:cNvPr id="18" name="TextBox 17"/>
+          <p:cNvPr id="24" name="TextBox 23"/>
           <p:cNvSpPr txBox="1"/>
           <p:nvPr/>
         </p:nvSpPr>
         <p:spPr>
           <a:xfrm>
-            <a:off x="6547103" y="2258568"/>
+            <a:off x="6547103" y="3538728"/>
             <a:ext cx="2121408" cy="274320"/>
           </a:xfrm>
           <a:prstGeom prst="rect">
@@ -21105,13 +21462,13 @@
       </p:sp>
       <p:sp>
         <p:nvSpPr>
-          <p:cNvPr id="19" name="TextBox 18"/>
+          <p:cNvPr id="25" name="TextBox 24"/>
           <p:cNvSpPr txBox="1"/>
           <p:nvPr/>
         </p:nvSpPr>
         <p:spPr>
           <a:xfrm>
-            <a:off x="6547103" y="2514600"/>
+            <a:off x="6547103" y="3794760"/>
             <a:ext cx="2121408" cy="548640"/>
           </a:xfrm>
           <a:prstGeom prst="rect">
@@ -21131,27 +21488,27 @@
               </a:lnSpc>
             </a:pPr>
             <a:r>
-              <a:rPr sz="1800" b="1">
+              <a:rPr sz="1700" b="1">
                 <a:solidFill>
                   <a:srgbClr val="0F172A"/>
                 </a:solidFill>
                 <a:latin typeface="Arial"/>
               </a:rPr>
-              <a:t>Enforced, not instructed</a:t>
-            </a:r>
-          </a:p>
-        </p:txBody>
-      </p:sp>
-      <p:sp>
-        <p:nvSpPr>
-          <p:cNvPr id="20" name="TextBox 19"/>
+              <a:t>Limits the platform enforces</a:t>
+            </a:r>
+          </a:p>
+        </p:txBody>
+      </p:sp>
+      <p:sp>
+        <p:nvSpPr>
+          <p:cNvPr id="26" name="TextBox 25"/>
           <p:cNvSpPr txBox="1"/>
           <p:nvPr/>
         </p:nvSpPr>
         <p:spPr>
           <a:xfrm>
-            <a:off x="6391655" y="3383280"/>
-            <a:ext cx="2258568" cy="1828800"/>
+            <a:off x="6391655" y="4526280"/>
+            <a:ext cx="2258568" cy="822960"/>
           </a:xfrm>
           <a:prstGeom prst="rect">
             <a:avLst/>
@@ -21170,27 +21527,146 @@
               </a:lnSpc>
             </a:pPr>
             <a:r>
-              <a:rPr sz="1550" b="0">
+              <a:rPr sz="1450" b="0">
                 <a:solidFill>
                   <a:srgbClr val="475569"/>
                 </a:solidFill>
                 <a:latin typeface="Arial"/>
               </a:rPr>
-              <a:t>Identity, permissions, approvals and audit, on every run.</a:t>
-            </a:r>
-          </a:p>
-        </p:txBody>
-      </p:sp>
-      <p:sp>
-        <p:nvSpPr>
-          <p:cNvPr id="21" name="Rounded Rectangle 20"/>
+              <a:t>Identity, permissions, approvals and audit.</a:t>
+            </a:r>
+          </a:p>
+        </p:txBody>
+      </p:sp>
+      <p:sp>
+        <p:nvSpPr>
+          <p:cNvPr id="27" name="Rounded Rectangle 26"/>
           <p:cNvSpPr/>
           <p:nvPr/>
         </p:nvSpPr>
         <p:spPr>
           <a:xfrm>
-            <a:off x="8970263" y="2057400"/>
-            <a:ext cx="2670048" cy="3291840"/>
+            <a:off x="8970263" y="2011680"/>
+            <a:ext cx="2670048" cy="914400"/>
+          </a:xfrm>
+          <a:prstGeom prst="roundRect">
+            <a:avLst>
+              <a:gd name="adj" fmla="val 8000"/>
+            </a:avLst>
+          </a:prstGeom>
+          <a:solidFill>
+            <a:srgbClr val="FEF2F2"/>
+          </a:solidFill>
+          <a:ln>
+            <a:noFill/>
+          </a:ln>
+          <a:effectLst/>
+        </p:spPr>
+        <p:style>
+          <a:lnRef idx="1">
+            <a:schemeClr val="accent1"/>
+          </a:lnRef>
+          <a:fillRef idx="3">
+            <a:schemeClr val="accent1"/>
+          </a:fillRef>
+          <a:effectRef idx="2">
+            <a:schemeClr val="accent1"/>
+          </a:effectRef>
+          <a:fontRef idx="minor">
+            <a:schemeClr val="lt1"/>
+          </a:fontRef>
+        </p:style>
+        <p:txBody>
+          <a:bodyPr rtlCol="0" anchor="t" wrap="square" lIns="73152" rIns="73152" tIns="36576" bIns="36576"/>
+          <a:lstStyle/>
+          <a:p>
+            <a:pPr algn="l">
+              <a:lnSpc>
+                <a:spcPct val="105000"/>
+              </a:lnSpc>
+            </a:pPr>
+            <a:r>
+              <a:rPr sz="1000" b="1">
+                <a:solidFill>
+                  <a:srgbClr val="B91C1C"/>
+                </a:solidFill>
+                <a:latin typeface="Arial"/>
+              </a:rPr>
+              <a:t>TODAY</a:t>
+            </a:r>
+          </a:p>
+          <a:p>
+            <a:pPr algn="l">
+              <a:lnSpc>
+                <a:spcPct val="105000"/>
+              </a:lnSpc>
+            </a:pPr>
+            <a:r>
+              <a:rPr sz="1350" b="0">
+                <a:solidFill>
+                  <a:srgbClr val="0F172A"/>
+                </a:solidFill>
+                <a:latin typeface="Arial"/>
+              </a:rPr>
+              <a:t>Nobody knows what agents cost or are worth.</a:t>
+            </a:r>
+          </a:p>
+        </p:txBody>
+      </p:sp>
+      <p:sp>
+        <p:nvSpPr>
+          <p:cNvPr id="28" name="Down Arrow 27"/>
+          <p:cNvSpPr/>
+          <p:nvPr/>
+        </p:nvSpPr>
+        <p:spPr>
+          <a:xfrm>
+            <a:off x="10158984" y="2990088"/>
+            <a:ext cx="219456" cy="274320"/>
+          </a:xfrm>
+          <a:prstGeom prst="downArrow">
+            <a:avLst/>
+          </a:prstGeom>
+          <a:solidFill>
+            <a:srgbClr val="94A3B8"/>
+          </a:solidFill>
+          <a:ln>
+            <a:noFill/>
+          </a:ln>
+          <a:effectLst/>
+        </p:spPr>
+        <p:style>
+          <a:lnRef idx="1">
+            <a:schemeClr val="accent1"/>
+          </a:lnRef>
+          <a:fillRef idx="3">
+            <a:schemeClr val="accent1"/>
+          </a:fillRef>
+          <a:effectRef idx="2">
+            <a:schemeClr val="accent1"/>
+          </a:effectRef>
+          <a:fontRef idx="minor">
+            <a:schemeClr val="lt1"/>
+          </a:fontRef>
+        </p:style>
+        <p:txBody>
+          <a:bodyPr rtlCol="0" anchor="ctr"/>
+          <a:lstStyle/>
+          <a:p>
+            <a:pPr algn="ctr"/>
+          </a:p>
+        </p:txBody>
+      </p:sp>
+      <p:sp>
+        <p:nvSpPr>
+          <p:cNvPr id="29" name="Rounded Rectangle 28"/>
+          <p:cNvSpPr/>
+          <p:nvPr/>
+        </p:nvSpPr>
+        <p:spPr>
+          <a:xfrm>
+            <a:off x="8970263" y="3337560"/>
+            <a:ext cx="2670048" cy="2148840"/>
           </a:xfrm>
           <a:prstGeom prst="roundRect">
             <a:avLst>
@@ -21231,13 +21707,13 @@
       </p:sp>
       <p:sp>
         <p:nvSpPr>
-          <p:cNvPr id="22" name="Rectangle 21"/>
+          <p:cNvPr id="30" name="Rectangle 29"/>
           <p:cNvSpPr/>
           <p:nvPr/>
         </p:nvSpPr>
         <p:spPr>
           <a:xfrm>
-            <a:off x="9198863" y="2331720"/>
+            <a:off x="9198863" y="3611879"/>
             <a:ext cx="73152" cy="457200"/>
           </a:xfrm>
           <a:prstGeom prst="rect">
@@ -21275,13 +21751,13 @@
       </p:sp>
       <p:sp>
         <p:nvSpPr>
-          <p:cNvPr id="23" name="TextBox 22"/>
+          <p:cNvPr id="31" name="TextBox 30"/>
           <p:cNvSpPr txBox="1"/>
           <p:nvPr/>
         </p:nvSpPr>
         <p:spPr>
           <a:xfrm>
-            <a:off x="9354311" y="2258568"/>
+            <a:off x="9354311" y="3538728"/>
             <a:ext cx="2121408" cy="274320"/>
           </a:xfrm>
           <a:prstGeom prst="rect">
@@ -21314,13 +21790,13 @@
       </p:sp>
       <p:sp>
         <p:nvSpPr>
-          <p:cNvPr id="24" name="TextBox 23"/>
+          <p:cNvPr id="32" name="TextBox 31"/>
           <p:cNvSpPr txBox="1"/>
           <p:nvPr/>
         </p:nvSpPr>
         <p:spPr>
           <a:xfrm>
-            <a:off x="9354311" y="2514600"/>
+            <a:off x="9354311" y="3794760"/>
             <a:ext cx="2121408" cy="548640"/>
           </a:xfrm>
           <a:prstGeom prst="rect">
@@ -21340,27 +21816,27 @@
               </a:lnSpc>
             </a:pPr>
             <a:r>
-              <a:rPr sz="1800" b="1">
+              <a:rPr sz="1700" b="1">
                 <a:solidFill>
                   <a:srgbClr val="0F172A"/>
                 </a:solidFill>
                 <a:latin typeface="Arial"/>
               </a:rPr>
-              <a:t>Keep what earns its cost</a:t>
-            </a:r>
-          </a:p>
-        </p:txBody>
-      </p:sp>
-      <p:sp>
-        <p:nvSpPr>
-          <p:cNvPr id="25" name="TextBox 24"/>
+              <a:t>Cost per run, budgets that block</a:t>
+            </a:r>
+          </a:p>
+        </p:txBody>
+      </p:sp>
+      <p:sp>
+        <p:nvSpPr>
+          <p:cNvPr id="33" name="TextBox 32"/>
           <p:cNvSpPr txBox="1"/>
           <p:nvPr/>
         </p:nvSpPr>
         <p:spPr>
           <a:xfrm>
-            <a:off x="9198863" y="3383280"/>
-            <a:ext cx="2258568" cy="1828800"/>
+            <a:off x="9198863" y="4526280"/>
+            <a:ext cx="2258568" cy="822960"/>
           </a:xfrm>
           <a:prstGeom prst="rect">
             <a:avLst/>
@@ -21379,20 +21855,20 @@
               </a:lnSpc>
             </a:pPr>
             <a:r>
-              <a:rPr sz="1550" b="0">
+              <a:rPr sz="1450" b="0">
                 <a:solidFill>
                   <a:srgbClr val="475569"/>
                 </a:solidFill>
                 <a:latin typeface="Arial"/>
               </a:rPr>
-              <a:t>Cost and quality per run. Budgets stop overspend.</a:t>
-            </a:r>
-          </a:p>
-        </p:txBody>
-      </p:sp>
-      <p:sp>
-        <p:nvSpPr>
-          <p:cNvPr id="26" name="Rounded Rectangle 25"/>
+              <a:t>Keep what earns its cost.</a:t>
+            </a:r>
+          </a:p>
+        </p:txBody>
+      </p:sp>
+      <p:sp>
+        <p:nvSpPr>
+          <p:cNvPr id="34" name="Rounded Rectangle 33"/>
           <p:cNvSpPr/>
           <p:nvPr/>
         </p:nvSpPr>

--- a/docs/presentation/KAOP_Customer_Pitch.pptx
+++ b/docs/presentation/KAOP_Customer_Pitch.pptx
@@ -10747,7 +10747,7 @@
                 </a:solidFill>
                 <a:latin typeface="Arial"/>
               </a:rPr>
-              <a:t>Three things to remember</a:t>
+              <a:t>What you saw today</a:t>
             </a:r>
           </a:p>
         </p:txBody>
@@ -10839,13 +10839,29 @@
               </a:lnSpc>
             </a:pPr>
             <a:r>
-              <a:rPr sz="2000" b="0">
+              <a:rPr sz="2000" b="1">
                 <a:solidFill>
                   <a:srgbClr val="FFFFFF"/>
                 </a:solidFill>
                 <a:latin typeface="Arial"/>
               </a:rPr>
-              <a:t>Agents need identities and permissions, not just prompts.</a:t>
+              <a:t>One view of every agent</a:t>
+            </a:r>
+          </a:p>
+          <a:p>
+            <a:pPr algn="l">
+              <a:lnSpc>
+                <a:spcPct val="105000"/>
+              </a:lnSpc>
+            </a:pPr>
+            <a:r>
+              <a:rPr sz="1500" b="0">
+                <a:solidFill>
+                  <a:srgbClr val="CBD5E1"/>
+                </a:solidFill>
+                <a:latin typeface="Arial"/>
+              </a:rPr>
+              <a:t>Who owns it, what it did, what it cost.</a:t>
             </a:r>
           </a:p>
         </p:txBody>
@@ -10937,13 +10953,29 @@
               </a:lnSpc>
             </a:pPr>
             <a:r>
-              <a:rPr sz="2000" b="0">
+              <a:rPr sz="2000" b="1">
                 <a:solidFill>
                   <a:srgbClr val="FFFFFF"/>
                 </a:solidFill>
                 <a:latin typeface="Arial"/>
               </a:rPr>
-              <a:t>Every action needs a boundary and a record.</a:t>
+              <a:t>Limits a system enforces</a:t>
+            </a:r>
+          </a:p>
+          <a:p>
+            <a:pPr algn="l">
+              <a:lnSpc>
+                <a:spcPct val="105000"/>
+              </a:lnSpc>
+            </a:pPr>
+            <a:r>
+              <a:rPr sz="1500" b="0">
+                <a:solidFill>
+                  <a:srgbClr val="CBD5E1"/>
+                </a:solidFill>
+                <a:latin typeface="Arial"/>
+              </a:rPr>
+              <a:t>Kubernetes and KAOP said no. Not a prompt.</a:t>
             </a:r>
           </a:p>
         </p:txBody>
@@ -11035,13 +11067,29 @@
               </a:lnSpc>
             </a:pPr>
             <a:r>
-              <a:rPr sz="2000" b="0">
+              <a:rPr sz="2000" b="1">
                 <a:solidFill>
                   <a:srgbClr val="FFFFFF"/>
                 </a:solidFill>
                 <a:latin typeface="Arial"/>
               </a:rPr>
-              <a:t>Autonomy is earned. Start with one workflow and one owner.</a:t>
+              <a:t>Agents working as one workflow</a:t>
+            </a:r>
+          </a:p>
+          <a:p>
+            <a:pPr algn="l">
+              <a:lnSpc>
+                <a:spcPct val="105000"/>
+              </a:lnSpc>
+            </a:pPr>
+            <a:r>
+              <a:rPr sz="1500" b="0">
+                <a:solidFill>
+                  <a:srgbClr val="CBD5E1"/>
+                </a:solidFill>
+                <a:latin typeface="Arial"/>
+              </a:rPr>
+              <a:t>Alert to reviewed fix, on one record.</a:t>
             </a:r>
           </a:p>
         </p:txBody>
@@ -15172,7 +15220,7 @@
                 </a:solidFill>
                 <a:latin typeface="Arial"/>
               </a:rPr>
-              <a:t>One standards doc for every incident agent</a:t>
+              <a:t>Workflow budget: $40 a day, blocks new runs</a:t>
             </a:r>
           </a:p>
         </p:txBody>
@@ -15211,7 +15259,7 @@
                 </a:solidFill>
                 <a:latin typeface="Arial"/>
               </a:rPr>
-              <a:t>Same alert, before and after the doc</a:t>
+              <a:t>Cap lowered to $0.01, two alerts sent</a:t>
             </a:r>
           </a:p>
         </p:txBody>
@@ -15250,7 +15298,7 @@
                 </a:solidFill>
                 <a:latin typeface="Arial"/>
               </a:rPr>
-              <a:t>Every run quotes our rule and runbook. Cost about the same</a:t>
+              <a:t>Second alert recorded but not investigated, with the reason</a:t>
             </a:r>
           </a:p>
         </p:txBody>
@@ -15337,7 +15385,7 @@
                 </a:solidFill>
                 <a:latin typeface="Arial"/>
               </a:rPr>
-              <a:t>Workflow budget: $40 a day, blocks new runs</a:t>
+              <a:t>Grafana agent: allow list instead of a deny list</a:t>
             </a:r>
           </a:p>
         </p:txBody>
@@ -15376,7 +15424,7 @@
                 </a:solidFill>
                 <a:latin typeface="Arial"/>
               </a:rPr>
-              <a:t>Cap lowered to $0.01, two alerts sent</a:t>
+              <a:t>Asked for tools outside the list</a:t>
             </a:r>
           </a:p>
         </p:txBody>
@@ -15415,7 +15463,7 @@
                 </a:solidFill>
                 <a:latin typeface="Arial"/>
               </a:rPr>
-              <a:t>Second alert recorded but not investigated, with the reason</a:t>
+              <a:t>"Not permitted" / "Tool not found"</a:t>
             </a:r>
           </a:p>
         </p:txBody>
@@ -15502,7 +15550,7 @@
                 </a:solidFill>
                 <a:latin typeface="Arial"/>
               </a:rPr>
-              <a:t>Grafana agent: allow list instead of a deny list</a:t>
+              <a:t>Owner and team label on every agent</a:t>
             </a:r>
           </a:p>
         </p:txBody>
@@ -15541,7 +15589,7 @@
                 </a:solidFill>
                 <a:latin typeface="Arial"/>
               </a:rPr>
-              <a:t>Asked for tools outside the list</a:t>
+              <a:t>Fleet filtered by owner</a:t>
             </a:r>
           </a:p>
         </p:txBody>
@@ -15580,171 +15628,6 @@
                 </a:solidFill>
                 <a:latin typeface="Arial"/>
               </a:rPr>
-              <a:t>"Not permitted" / "Tool not found"</a:t>
-            </a:r>
-          </a:p>
-        </p:txBody>
-      </p:sp>
-      <p:sp>
-        <p:nvSpPr>
-          <p:cNvPr id="25" name="Rounded Rectangle 24"/>
-          <p:cNvSpPr/>
-          <p:nvPr/>
-        </p:nvSpPr>
-        <p:spPr>
-          <a:xfrm>
-            <a:off x="548640" y="5111496"/>
-            <a:ext cx="11091672" cy="621792"/>
-          </a:xfrm>
-          <a:prstGeom prst="roundRect">
-            <a:avLst>
-              <a:gd name="adj" fmla="val 6000"/>
-            </a:avLst>
-          </a:prstGeom>
-          <a:solidFill>
-            <a:srgbClr val="FFFFFF"/>
-          </a:solidFill>
-          <a:ln w="12700">
-            <a:solidFill>
-              <a:srgbClr val="E2E8F0"/>
-            </a:solidFill>
-          </a:ln>
-          <a:effectLst/>
-        </p:spPr>
-        <p:style>
-          <a:lnRef idx="1">
-            <a:schemeClr val="accent1"/>
-          </a:lnRef>
-          <a:fillRef idx="3">
-            <a:schemeClr val="accent1"/>
-          </a:fillRef>
-          <a:effectRef idx="2">
-            <a:schemeClr val="accent1"/>
-          </a:effectRef>
-          <a:fontRef idx="minor">
-            <a:schemeClr val="lt1"/>
-          </a:fontRef>
-        </p:style>
-        <p:txBody>
-          <a:bodyPr rtlCol="0" anchor="ctr"/>
-          <a:lstStyle/>
-          <a:p>
-            <a:pPr algn="ctr"/>
-          </a:p>
-        </p:txBody>
-      </p:sp>
-      <p:sp>
-        <p:nvSpPr>
-          <p:cNvPr id="26" name="TextBox 25"/>
-          <p:cNvSpPr txBox="1"/>
-          <p:nvPr/>
-        </p:nvSpPr>
-        <p:spPr>
-          <a:xfrm>
-            <a:off x="777240" y="5129783"/>
-            <a:ext cx="4206240" cy="585216"/>
-          </a:xfrm>
-          <a:prstGeom prst="rect">
-            <a:avLst/>
-          </a:prstGeom>
-          <a:noFill/>
-        </p:spPr>
-        <p:txBody>
-          <a:bodyPr wrap="square" lIns="73152" rIns="73152" tIns="36576" bIns="36576" anchor="ctr">
-            <a:spAutoFit/>
-          </a:bodyPr>
-          <a:lstStyle/>
-          <a:p>
-            <a:pPr algn="l">
-              <a:lnSpc>
-                <a:spcPct val="105000"/>
-              </a:lnSpc>
-            </a:pPr>
-            <a:r>
-              <a:rPr sz="1400" b="1">
-                <a:solidFill>
-                  <a:srgbClr val="0F172A"/>
-                </a:solidFill>
-                <a:latin typeface="Arial"/>
-              </a:rPr>
-              <a:t>Owner and team label on every agent</a:t>
-            </a:r>
-          </a:p>
-        </p:txBody>
-      </p:sp>
-      <p:sp>
-        <p:nvSpPr>
-          <p:cNvPr id="27" name="TextBox 26"/>
-          <p:cNvSpPr txBox="1"/>
-          <p:nvPr/>
-        </p:nvSpPr>
-        <p:spPr>
-          <a:xfrm>
-            <a:off x="5120640" y="5129783"/>
-            <a:ext cx="2834640" cy="585216"/>
-          </a:xfrm>
-          <a:prstGeom prst="rect">
-            <a:avLst/>
-          </a:prstGeom>
-          <a:noFill/>
-        </p:spPr>
-        <p:txBody>
-          <a:bodyPr wrap="square" lIns="73152" rIns="73152" tIns="36576" bIns="36576" anchor="ctr">
-            <a:spAutoFit/>
-          </a:bodyPr>
-          <a:lstStyle/>
-          <a:p>
-            <a:pPr algn="l">
-              <a:lnSpc>
-                <a:spcPct val="105000"/>
-              </a:lnSpc>
-            </a:pPr>
-            <a:r>
-              <a:rPr sz="1400" b="0">
-                <a:solidFill>
-                  <a:srgbClr val="475569"/>
-                </a:solidFill>
-                <a:latin typeface="Arial"/>
-              </a:rPr>
-              <a:t>Fleet filtered by owner</a:t>
-            </a:r>
-          </a:p>
-        </p:txBody>
-      </p:sp>
-      <p:sp>
-        <p:nvSpPr>
-          <p:cNvPr id="28" name="TextBox 27"/>
-          <p:cNvSpPr txBox="1"/>
-          <p:nvPr/>
-        </p:nvSpPr>
-        <p:spPr>
-          <a:xfrm>
-            <a:off x="8092440" y="5129783"/>
-            <a:ext cx="3474720" cy="585216"/>
-          </a:xfrm>
-          <a:prstGeom prst="rect">
-            <a:avLst/>
-          </a:prstGeom>
-          <a:noFill/>
-        </p:spPr>
-        <p:txBody>
-          <a:bodyPr wrap="square" lIns="73152" rIns="73152" tIns="36576" bIns="36576" anchor="ctr">
-            <a:spAutoFit/>
-          </a:bodyPr>
-          <a:lstStyle/>
-          <a:p>
-            <a:pPr algn="l">
-              <a:lnSpc>
-                <a:spcPct val="105000"/>
-              </a:lnSpc>
-            </a:pPr>
-            <a:r>
-              <a:rPr sz="1400" b="0">
-                <a:solidFill>
-                  <a:srgbClr val="0F766E"/>
-                </a:solidFill>
-                <a:latin typeface="Arial"/>
-              </a:rPr>
               <a:t>Every agent has an owner to call</a:t>
             </a:r>
           </a:p>
@@ -15752,7 +15635,7 @@
       </p:sp>
       <p:sp>
         <p:nvSpPr>
-          <p:cNvPr id="29" name="TextBox 28"/>
+          <p:cNvPr id="25" name="TextBox 24"/>
           <p:cNvSpPr txBox="1"/>
           <p:nvPr/>
         </p:nvSpPr>

--- a/docs/presentation/KAOP_Customer_Pitch.pptx
+++ b/docs/presentation/KAOP_Customer_Pitch.pptx
@@ -15220,7 +15220,7 @@
                 </a:solidFill>
                 <a:latin typeface="Arial"/>
               </a:rPr>
-              <a:t>Workflow budget: $40 a day, blocks new runs</a:t>
+              <a:t>One standards doc for every incident agent</a:t>
             </a:r>
           </a:p>
         </p:txBody>
@@ -15259,7 +15259,7 @@
                 </a:solidFill>
                 <a:latin typeface="Arial"/>
               </a:rPr>
-              <a:t>Cap lowered to $0.01, two alerts sent</a:t>
+              <a:t>Same alert, with and without the doc</a:t>
             </a:r>
           </a:p>
         </p:txBody>
@@ -15298,7 +15298,7 @@
                 </a:solidFill>
                 <a:latin typeface="Arial"/>
               </a:rPr>
-              <a:t>Second alert recorded but not investigated, with the reason</a:t>
+              <a:t>Cause found in 7 of 7 runs, vs 2 of 5 without. Cost about the same</a:t>
             </a:r>
           </a:p>
         </p:txBody>
@@ -15385,7 +15385,7 @@
                 </a:solidFill>
                 <a:latin typeface="Arial"/>
               </a:rPr>
-              <a:t>Grafana agent: allow list instead of a deny list</a:t>
+              <a:t>Workflow budget: $40 a day, blocks new runs</a:t>
             </a:r>
           </a:p>
         </p:txBody>
@@ -15424,7 +15424,7 @@
                 </a:solidFill>
                 <a:latin typeface="Arial"/>
               </a:rPr>
-              <a:t>Asked for tools outside the list</a:t>
+              <a:t>Cap lowered to $0.01, two alerts sent</a:t>
             </a:r>
           </a:p>
         </p:txBody>
@@ -15463,7 +15463,7 @@
                 </a:solidFill>
                 <a:latin typeface="Arial"/>
               </a:rPr>
-              <a:t>"Not permitted" / "Tool not found"</a:t>
+              <a:t>Second alert recorded but not investigated, with the reason</a:t>
             </a:r>
           </a:p>
         </p:txBody>
@@ -15550,7 +15550,7 @@
                 </a:solidFill>
                 <a:latin typeface="Arial"/>
               </a:rPr>
-              <a:t>Owner and team label on every agent</a:t>
+              <a:t>Grafana agent: allow list instead of a deny list</a:t>
             </a:r>
           </a:p>
         </p:txBody>
@@ -15589,7 +15589,7 @@
                 </a:solidFill>
                 <a:latin typeface="Arial"/>
               </a:rPr>
-              <a:t>Fleet filtered by owner</a:t>
+              <a:t>Asked for tools outside the list</a:t>
             </a:r>
           </a:p>
         </p:txBody>
@@ -15628,6 +15628,171 @@
                 </a:solidFill>
                 <a:latin typeface="Arial"/>
               </a:rPr>
+              <a:t>"Not permitted" / "Tool not found"</a:t>
+            </a:r>
+          </a:p>
+        </p:txBody>
+      </p:sp>
+      <p:sp>
+        <p:nvSpPr>
+          <p:cNvPr id="25" name="Rounded Rectangle 24"/>
+          <p:cNvSpPr/>
+          <p:nvPr/>
+        </p:nvSpPr>
+        <p:spPr>
+          <a:xfrm>
+            <a:off x="548640" y="5111496"/>
+            <a:ext cx="11091672" cy="621792"/>
+          </a:xfrm>
+          <a:prstGeom prst="roundRect">
+            <a:avLst>
+              <a:gd name="adj" fmla="val 6000"/>
+            </a:avLst>
+          </a:prstGeom>
+          <a:solidFill>
+            <a:srgbClr val="FFFFFF"/>
+          </a:solidFill>
+          <a:ln w="12700">
+            <a:solidFill>
+              <a:srgbClr val="E2E8F0"/>
+            </a:solidFill>
+          </a:ln>
+          <a:effectLst/>
+        </p:spPr>
+        <p:style>
+          <a:lnRef idx="1">
+            <a:schemeClr val="accent1"/>
+          </a:lnRef>
+          <a:fillRef idx="3">
+            <a:schemeClr val="accent1"/>
+          </a:fillRef>
+          <a:effectRef idx="2">
+            <a:schemeClr val="accent1"/>
+          </a:effectRef>
+          <a:fontRef idx="minor">
+            <a:schemeClr val="lt1"/>
+          </a:fontRef>
+        </p:style>
+        <p:txBody>
+          <a:bodyPr rtlCol="0" anchor="ctr"/>
+          <a:lstStyle/>
+          <a:p>
+            <a:pPr algn="ctr"/>
+          </a:p>
+        </p:txBody>
+      </p:sp>
+      <p:sp>
+        <p:nvSpPr>
+          <p:cNvPr id="26" name="TextBox 25"/>
+          <p:cNvSpPr txBox="1"/>
+          <p:nvPr/>
+        </p:nvSpPr>
+        <p:spPr>
+          <a:xfrm>
+            <a:off x="777240" y="5129783"/>
+            <a:ext cx="4206240" cy="585216"/>
+          </a:xfrm>
+          <a:prstGeom prst="rect">
+            <a:avLst/>
+          </a:prstGeom>
+          <a:noFill/>
+        </p:spPr>
+        <p:txBody>
+          <a:bodyPr wrap="square" lIns="73152" rIns="73152" tIns="36576" bIns="36576" anchor="ctr">
+            <a:spAutoFit/>
+          </a:bodyPr>
+          <a:lstStyle/>
+          <a:p>
+            <a:pPr algn="l">
+              <a:lnSpc>
+                <a:spcPct val="105000"/>
+              </a:lnSpc>
+            </a:pPr>
+            <a:r>
+              <a:rPr sz="1400" b="1">
+                <a:solidFill>
+                  <a:srgbClr val="0F172A"/>
+                </a:solidFill>
+                <a:latin typeface="Arial"/>
+              </a:rPr>
+              <a:t>Owner and team label on every agent</a:t>
+            </a:r>
+          </a:p>
+        </p:txBody>
+      </p:sp>
+      <p:sp>
+        <p:nvSpPr>
+          <p:cNvPr id="27" name="TextBox 26"/>
+          <p:cNvSpPr txBox="1"/>
+          <p:nvPr/>
+        </p:nvSpPr>
+        <p:spPr>
+          <a:xfrm>
+            <a:off x="5120640" y="5129783"/>
+            <a:ext cx="2834640" cy="585216"/>
+          </a:xfrm>
+          <a:prstGeom prst="rect">
+            <a:avLst/>
+          </a:prstGeom>
+          <a:noFill/>
+        </p:spPr>
+        <p:txBody>
+          <a:bodyPr wrap="square" lIns="73152" rIns="73152" tIns="36576" bIns="36576" anchor="ctr">
+            <a:spAutoFit/>
+          </a:bodyPr>
+          <a:lstStyle/>
+          <a:p>
+            <a:pPr algn="l">
+              <a:lnSpc>
+                <a:spcPct val="105000"/>
+              </a:lnSpc>
+            </a:pPr>
+            <a:r>
+              <a:rPr sz="1400" b="0">
+                <a:solidFill>
+                  <a:srgbClr val="475569"/>
+                </a:solidFill>
+                <a:latin typeface="Arial"/>
+              </a:rPr>
+              <a:t>Fleet filtered by owner</a:t>
+            </a:r>
+          </a:p>
+        </p:txBody>
+      </p:sp>
+      <p:sp>
+        <p:nvSpPr>
+          <p:cNvPr id="28" name="TextBox 27"/>
+          <p:cNvSpPr txBox="1"/>
+          <p:nvPr/>
+        </p:nvSpPr>
+        <p:spPr>
+          <a:xfrm>
+            <a:off x="8092440" y="5129783"/>
+            <a:ext cx="3474720" cy="585216"/>
+          </a:xfrm>
+          <a:prstGeom prst="rect">
+            <a:avLst/>
+          </a:prstGeom>
+          <a:noFill/>
+        </p:spPr>
+        <p:txBody>
+          <a:bodyPr wrap="square" lIns="73152" rIns="73152" tIns="36576" bIns="36576" anchor="ctr">
+            <a:spAutoFit/>
+          </a:bodyPr>
+          <a:lstStyle/>
+          <a:p>
+            <a:pPr algn="l">
+              <a:lnSpc>
+                <a:spcPct val="105000"/>
+              </a:lnSpc>
+            </a:pPr>
+            <a:r>
+              <a:rPr sz="1400" b="0">
+                <a:solidFill>
+                  <a:srgbClr val="0F766E"/>
+                </a:solidFill>
+                <a:latin typeface="Arial"/>
+              </a:rPr>
               <a:t>Every agent has an owner to call</a:t>
             </a:r>
           </a:p>
@@ -15635,7 +15800,7 @@
       </p:sp>
       <p:sp>
         <p:nvSpPr>
-          <p:cNvPr id="25" name="TextBox 24"/>
+          <p:cNvPr id="29" name="TextBox 28"/>
           <p:cNvSpPr txBox="1"/>
           <p:nvPr/>
         </p:nvSpPr>

--- a/docs/presentation/KAOP_Customer_Pitch.pptx
+++ b/docs/presentation/KAOP_Customer_Pitch.pptx
@@ -15094,7 +15094,7 @@
                 </a:solidFill>
                 <a:latin typeface="Arial"/>
               </a:rPr>
-              <a:t>Same alert, 3–4 runs with and without</a:t>
+              <a:t>Same alert, 5 runs with and 5 without</a:t>
             </a:r>
           </a:p>
         </p:txBody>
@@ -15133,7 +15133,7 @@
                 </a:solidFill>
                 <a:latin typeface="Arial"/>
               </a:rPr>
-              <a:t>About $0.71 → $0.53 a run. Same root cause</a:t>
+              <a:t>About $0.68 → $0.53 a run. Same root cause</a:t>
             </a:r>
           </a:p>
         </p:txBody>
@@ -15259,7 +15259,7 @@
                 </a:solidFill>
                 <a:latin typeface="Arial"/>
               </a:rPr>
-              <a:t>Same alert, with and without the doc</a:t>
+              <a:t>Same alert, 5 runs without the doc</a:t>
             </a:r>
           </a:p>
         </p:txBody>
@@ -15298,7 +15298,7 @@
                 </a:solidFill>
                 <a:latin typeface="Arial"/>
               </a:rPr>
-              <a:t>Cause found in 7 of 7 runs, vs 2 of 5 without. Cost about the same</a:t>
+              <a:t>Cause found in 10 of 10 runs with it, 1 of 5 without</a:t>
             </a:r>
           </a:p>
         </p:txBody>

--- a/docs/presentation/KAOP_Customer_Pitch.pptx
+++ b/docs/presentation/KAOP_Customer_Pitch.pptx
@@ -23,6 +23,7 @@
     <p:sldId id="271" r:id="rId22"/>
     <p:sldId id="272" r:id="rId23"/>
     <p:sldId id="273" r:id="rId24"/>
+    <p:sldId id="274" r:id="rId25"/>
   </p:sldIdLst>
   <p:sldSz cx="12191695" cy="6858000" type="screen4x3"/>
   <p:notesSz cx="6858000" cy="9144000"/>
@@ -3862,7 +3863,7 @@
                 </a:solidFill>
                 <a:latin typeface="Arial"/>
               </a:rPr>
-              <a:t>10 / 13</a:t>
+              <a:t>10 / 14</a:t>
             </a:r>
           </a:p>
         </p:txBody>
@@ -6803,7 +6804,697 @@
                 </a:solidFill>
                 <a:latin typeface="Arial"/>
               </a:rPr>
-              <a:t>11 / 13</a:t>
+              <a:t>11 / 14</a:t>
+            </a:r>
+          </a:p>
+        </p:txBody>
+      </p:sp>
+      <p:sp>
+        <p:nvSpPr>
+          <p:cNvPr id="4" name="TextBox 3"/>
+          <p:cNvSpPr txBox="1"/>
+          <p:nvPr/>
+        </p:nvSpPr>
+        <p:spPr>
+          <a:xfrm>
+            <a:off x="548640" y="658368"/>
+            <a:ext cx="11064240" cy="731520"/>
+          </a:xfrm>
+          <a:prstGeom prst="rect">
+            <a:avLst/>
+          </a:prstGeom>
+          <a:noFill/>
+        </p:spPr>
+        <p:txBody>
+          <a:bodyPr wrap="square" lIns="73152" rIns="73152" tIns="36576" bIns="36576" anchor="t">
+            <a:spAutoFit/>
+          </a:bodyPr>
+          <a:lstStyle/>
+          <a:p>
+            <a:pPr algn="l">
+              <a:lnSpc>
+                <a:spcPct val="110000"/>
+              </a:lnSpc>
+            </a:pPr>
+            <a:r>
+              <a:rPr sz="3200" b="1">
+                <a:solidFill>
+                  <a:srgbClr val="0F172A"/>
+                </a:solidFill>
+                <a:latin typeface="Arial"/>
+              </a:rPr>
+              <a:t>Succeeded isn't the same as right</a:t>
+            </a:r>
+          </a:p>
+        </p:txBody>
+      </p:sp>
+      <p:sp>
+        <p:nvSpPr>
+          <p:cNvPr id="5" name="TextBox 4"/>
+          <p:cNvSpPr txBox="1"/>
+          <p:nvPr/>
+        </p:nvSpPr>
+        <p:spPr>
+          <a:xfrm>
+            <a:off x="548640" y="1371600"/>
+            <a:ext cx="11064240" cy="457200"/>
+          </a:xfrm>
+          <a:prstGeom prst="rect">
+            <a:avLst/>
+          </a:prstGeom>
+          <a:noFill/>
+        </p:spPr>
+        <p:txBody>
+          <a:bodyPr wrap="square" lIns="73152" rIns="73152" tIns="36576" bIns="36576" anchor="t">
+            <a:spAutoFit/>
+          </a:bodyPr>
+          <a:lstStyle/>
+          <a:p>
+            <a:pPr algn="l">
+              <a:lnSpc>
+                <a:spcPct val="110000"/>
+              </a:lnSpc>
+            </a:pPr>
+            <a:r>
+              <a:rPr sz="1700" b="0">
+                <a:solidFill>
+                  <a:srgbClr val="475569"/>
+                </a:solidFill>
+                <a:latin typeface="Arial"/>
+              </a:rPr>
+              <a:t>I measured the Grafana agent on the same alert, five runs per setup, then improved it.</a:t>
+            </a:r>
+          </a:p>
+        </p:txBody>
+      </p:sp>
+      <p:sp>
+        <p:nvSpPr>
+          <p:cNvPr id="6" name="Rounded Rectangle 5"/>
+          <p:cNvSpPr/>
+          <p:nvPr/>
+        </p:nvSpPr>
+        <p:spPr>
+          <a:xfrm>
+            <a:off x="548640" y="2057400"/>
+            <a:ext cx="5486400" cy="3520440"/>
+          </a:xfrm>
+          <a:prstGeom prst="roundRect">
+            <a:avLst>
+              <a:gd name="adj" fmla="val 6000"/>
+            </a:avLst>
+          </a:prstGeom>
+          <a:solidFill>
+            <a:srgbClr val="E6F6F4"/>
+          </a:solidFill>
+          <a:ln>
+            <a:noFill/>
+          </a:ln>
+          <a:effectLst/>
+        </p:spPr>
+        <p:style>
+          <a:lnRef idx="1">
+            <a:schemeClr val="accent1"/>
+          </a:lnRef>
+          <a:fillRef idx="3">
+            <a:schemeClr val="accent1"/>
+          </a:fillRef>
+          <a:effectRef idx="2">
+            <a:schemeClr val="accent1"/>
+          </a:effectRef>
+          <a:fontRef idx="minor">
+            <a:schemeClr val="lt1"/>
+          </a:fontRef>
+        </p:style>
+        <p:txBody>
+          <a:bodyPr rtlCol="0" anchor="ctr"/>
+          <a:lstStyle/>
+          <a:p>
+            <a:pPr algn="ctr"/>
+          </a:p>
+        </p:txBody>
+      </p:sp>
+      <p:sp>
+        <p:nvSpPr>
+          <p:cNvPr id="7" name="TextBox 6"/>
+          <p:cNvSpPr txBox="1"/>
+          <p:nvPr/>
+        </p:nvSpPr>
+        <p:spPr>
+          <a:xfrm>
+            <a:off x="914400" y="2286000"/>
+            <a:ext cx="4846320" cy="274320"/>
+          </a:xfrm>
+          <a:prstGeom prst="rect">
+            <a:avLst/>
+          </a:prstGeom>
+          <a:noFill/>
+        </p:spPr>
+        <p:txBody>
+          <a:bodyPr wrap="square" lIns="73152" rIns="73152" tIns="36576" bIns="36576" anchor="t">
+            <a:spAutoFit/>
+          </a:bodyPr>
+          <a:lstStyle/>
+          <a:p>
+            <a:pPr algn="l">
+              <a:lnSpc>
+                <a:spcPct val="110000"/>
+              </a:lnSpc>
+            </a:pPr>
+            <a:r>
+              <a:rPr sz="1200" b="1">
+                <a:solidFill>
+                  <a:srgbClr val="0F766E"/>
+                </a:solidFill>
+                <a:latin typeface="Arial"/>
+              </a:rPr>
+              <a:t>OUR RUNBOOK IN KAOP'S KNOWLEDGE BASE</a:t>
+            </a:r>
+          </a:p>
+        </p:txBody>
+      </p:sp>
+      <p:sp>
+        <p:nvSpPr>
+          <p:cNvPr id="8" name="TextBox 7"/>
+          <p:cNvSpPr txBox="1"/>
+          <p:nvPr/>
+        </p:nvSpPr>
+        <p:spPr>
+          <a:xfrm>
+            <a:off x="914400" y="2788920"/>
+            <a:ext cx="4846320" cy="1005840"/>
+          </a:xfrm>
+          <a:prstGeom prst="rect">
+            <a:avLst/>
+          </a:prstGeom>
+          <a:noFill/>
+        </p:spPr>
+        <p:txBody>
+          <a:bodyPr wrap="square" lIns="73152" rIns="73152" tIns="36576" bIns="36576" anchor="ctr">
+            <a:spAutoFit/>
+          </a:bodyPr>
+          <a:lstStyle/>
+          <a:p>
+            <a:pPr algn="l">
+              <a:lnSpc>
+                <a:spcPct val="110000"/>
+              </a:lnSpc>
+            </a:pPr>
+            <a:r>
+              <a:rPr sz="3400" b="1">
+                <a:solidFill>
+                  <a:srgbClr val="475569"/>
+                </a:solidFill>
+                <a:latin typeface="Arial"/>
+              </a:rPr>
+              <a:t>1 of 5</a:t>
+            </a:r>
+            <a:r>
+              <a:rPr sz="3000" b="0">
+                <a:solidFill>
+                  <a:srgbClr val="94A3B8"/>
+                </a:solidFill>
+                <a:latin typeface="Arial"/>
+              </a:rPr>
+              <a:t>   →   </a:t>
+            </a:r>
+            <a:r>
+              <a:rPr sz="4400" b="1">
+                <a:solidFill>
+                  <a:srgbClr val="0F766E"/>
+                </a:solidFill>
+                <a:latin typeface="Arial"/>
+              </a:rPr>
+              <a:t>10 of 10</a:t>
+            </a:r>
+          </a:p>
+        </p:txBody>
+      </p:sp>
+      <p:sp>
+        <p:nvSpPr>
+          <p:cNvPr id="9" name="TextBox 8"/>
+          <p:cNvSpPr txBox="1"/>
+          <p:nvPr/>
+        </p:nvSpPr>
+        <p:spPr>
+          <a:xfrm>
+            <a:off x="914400" y="3840480"/>
+            <a:ext cx="4846320" cy="457200"/>
+          </a:xfrm>
+          <a:prstGeom prst="rect">
+            <a:avLst/>
+          </a:prstGeom>
+          <a:noFill/>
+        </p:spPr>
+        <p:txBody>
+          <a:bodyPr wrap="square" lIns="73152" rIns="73152" tIns="36576" bIns="36576" anchor="t">
+            <a:spAutoFit/>
+          </a:bodyPr>
+          <a:lstStyle/>
+          <a:p>
+            <a:pPr algn="l">
+              <a:lnSpc>
+                <a:spcPct val="110000"/>
+              </a:lnSpc>
+            </a:pPr>
+            <a:r>
+              <a:rPr sz="1800" b="1">
+                <a:solidFill>
+                  <a:srgbClr val="0F172A"/>
+                </a:solidFill>
+                <a:latin typeface="Arial"/>
+              </a:rPr>
+              <a:t>runs that named the real cause</a:t>
+            </a:r>
+          </a:p>
+        </p:txBody>
+      </p:sp>
+      <p:sp>
+        <p:nvSpPr>
+          <p:cNvPr id="10" name="TextBox 9"/>
+          <p:cNvSpPr txBox="1"/>
+          <p:nvPr/>
+        </p:nvSpPr>
+        <p:spPr>
+          <a:xfrm>
+            <a:off x="914400" y="4434840"/>
+            <a:ext cx="4846320" cy="914400"/>
+          </a:xfrm>
+          <a:prstGeom prst="rect">
+            <a:avLst/>
+          </a:prstGeom>
+          <a:noFill/>
+        </p:spPr>
+        <p:txBody>
+          <a:bodyPr wrap="square" lIns="73152" rIns="73152" tIns="36576" bIns="36576" anchor="t">
+            <a:spAutoFit/>
+          </a:bodyPr>
+          <a:lstStyle/>
+          <a:p>
+            <a:pPr algn="l">
+              <a:lnSpc>
+                <a:spcPct val="115000"/>
+              </a:lnSpc>
+            </a:pPr>
+            <a:r>
+              <a:rPr sz="1500" b="0">
+                <a:solidFill>
+                  <a:srgbClr val="475569"/>
+                </a:solidFill>
+                <a:latin typeface="Arial"/>
+              </a:rPr>
+              <a:t>Same alert. One page of our own standards.</a:t>
+            </a:r>
+          </a:p>
+        </p:txBody>
+      </p:sp>
+      <p:sp>
+        <p:nvSpPr>
+          <p:cNvPr id="11" name="Rounded Rectangle 10"/>
+          <p:cNvSpPr/>
+          <p:nvPr/>
+        </p:nvSpPr>
+        <p:spPr>
+          <a:xfrm>
+            <a:off x="6153912" y="2057400"/>
+            <a:ext cx="5486400" cy="3520440"/>
+          </a:xfrm>
+          <a:prstGeom prst="roundRect">
+            <a:avLst>
+              <a:gd name="adj" fmla="val 6000"/>
+            </a:avLst>
+          </a:prstGeom>
+          <a:solidFill>
+            <a:srgbClr val="FFF7E6"/>
+          </a:solidFill>
+          <a:ln>
+            <a:noFill/>
+          </a:ln>
+          <a:effectLst/>
+        </p:spPr>
+        <p:style>
+          <a:lnRef idx="1">
+            <a:schemeClr val="accent1"/>
+          </a:lnRef>
+          <a:fillRef idx="3">
+            <a:schemeClr val="accent1"/>
+          </a:fillRef>
+          <a:effectRef idx="2">
+            <a:schemeClr val="accent1"/>
+          </a:effectRef>
+          <a:fontRef idx="minor">
+            <a:schemeClr val="lt1"/>
+          </a:fontRef>
+        </p:style>
+        <p:txBody>
+          <a:bodyPr rtlCol="0" anchor="ctr"/>
+          <a:lstStyle/>
+          <a:p>
+            <a:pPr algn="ctr"/>
+          </a:p>
+        </p:txBody>
+      </p:sp>
+      <p:sp>
+        <p:nvSpPr>
+          <p:cNvPr id="12" name="TextBox 11"/>
+          <p:cNvSpPr txBox="1"/>
+          <p:nvPr/>
+        </p:nvSpPr>
+        <p:spPr>
+          <a:xfrm>
+            <a:off x="6519672" y="2286000"/>
+            <a:ext cx="4846320" cy="274320"/>
+          </a:xfrm>
+          <a:prstGeom prst="rect">
+            <a:avLst/>
+          </a:prstGeom>
+          <a:noFill/>
+        </p:spPr>
+        <p:txBody>
+          <a:bodyPr wrap="square" lIns="73152" rIns="73152" tIns="36576" bIns="36576" anchor="t">
+            <a:spAutoFit/>
+          </a:bodyPr>
+          <a:lstStyle/>
+          <a:p>
+            <a:pPr algn="l">
+              <a:lnSpc>
+                <a:spcPct val="110000"/>
+              </a:lnSpc>
+            </a:pPr>
+            <a:r>
+              <a:rPr sz="1200" b="1">
+                <a:solidFill>
+                  <a:srgbClr val="B45309"/>
+                </a:solidFill>
+                <a:latin typeface="Arial"/>
+              </a:rPr>
+              <a:t>ONLY THE TOOLS THE JOB NEEDS</a:t>
+            </a:r>
+          </a:p>
+        </p:txBody>
+      </p:sp>
+      <p:sp>
+        <p:nvSpPr>
+          <p:cNvPr id="13" name="TextBox 12"/>
+          <p:cNvSpPr txBox="1"/>
+          <p:nvPr/>
+        </p:nvSpPr>
+        <p:spPr>
+          <a:xfrm>
+            <a:off x="6519672" y="2788920"/>
+            <a:ext cx="4846320" cy="1005840"/>
+          </a:xfrm>
+          <a:prstGeom prst="rect">
+            <a:avLst/>
+          </a:prstGeom>
+          <a:noFill/>
+        </p:spPr>
+        <p:txBody>
+          <a:bodyPr wrap="square" lIns="73152" rIns="73152" tIns="36576" bIns="36576" anchor="ctr">
+            <a:spAutoFit/>
+          </a:bodyPr>
+          <a:lstStyle/>
+          <a:p>
+            <a:pPr algn="l">
+              <a:lnSpc>
+                <a:spcPct val="110000"/>
+              </a:lnSpc>
+            </a:pPr>
+            <a:r>
+              <a:rPr sz="3400" b="1">
+                <a:solidFill>
+                  <a:srgbClr val="475569"/>
+                </a:solidFill>
+                <a:latin typeface="Arial"/>
+              </a:rPr>
+              <a:t>$0.68</a:t>
+            </a:r>
+            <a:r>
+              <a:rPr sz="3000" b="0">
+                <a:solidFill>
+                  <a:srgbClr val="94A3B8"/>
+                </a:solidFill>
+                <a:latin typeface="Arial"/>
+              </a:rPr>
+              <a:t>   →   </a:t>
+            </a:r>
+            <a:r>
+              <a:rPr sz="4400" b="1">
+                <a:solidFill>
+                  <a:srgbClr val="B45309"/>
+                </a:solidFill>
+                <a:latin typeface="Arial"/>
+              </a:rPr>
+              <a:t>$0.53</a:t>
+            </a:r>
+          </a:p>
+        </p:txBody>
+      </p:sp>
+      <p:sp>
+        <p:nvSpPr>
+          <p:cNvPr id="14" name="TextBox 13"/>
+          <p:cNvSpPr txBox="1"/>
+          <p:nvPr/>
+        </p:nvSpPr>
+        <p:spPr>
+          <a:xfrm>
+            <a:off x="6519672" y="3840480"/>
+            <a:ext cx="4846320" cy="457200"/>
+          </a:xfrm>
+          <a:prstGeom prst="rect">
+            <a:avLst/>
+          </a:prstGeom>
+          <a:noFill/>
+        </p:spPr>
+        <p:txBody>
+          <a:bodyPr wrap="square" lIns="73152" rIns="73152" tIns="36576" bIns="36576" anchor="t">
+            <a:spAutoFit/>
+          </a:bodyPr>
+          <a:lstStyle/>
+          <a:p>
+            <a:pPr algn="l">
+              <a:lnSpc>
+                <a:spcPct val="110000"/>
+              </a:lnSpc>
+            </a:pPr>
+            <a:r>
+              <a:rPr sz="1800" b="1">
+                <a:solidFill>
+                  <a:srgbClr val="0F172A"/>
+                </a:solidFill>
+                <a:latin typeface="Arial"/>
+              </a:rPr>
+              <a:t>per run, with the same answer</a:t>
+            </a:r>
+          </a:p>
+        </p:txBody>
+      </p:sp>
+      <p:sp>
+        <p:nvSpPr>
+          <p:cNvPr id="15" name="TextBox 14"/>
+          <p:cNvSpPr txBox="1"/>
+          <p:nvPr/>
+        </p:nvSpPr>
+        <p:spPr>
+          <a:xfrm>
+            <a:off x="6519672" y="4434840"/>
+            <a:ext cx="4846320" cy="914400"/>
+          </a:xfrm>
+          <a:prstGeom prst="rect">
+            <a:avLst/>
+          </a:prstGeom>
+          <a:noFill/>
+        </p:spPr>
+        <p:txBody>
+          <a:bodyPr wrap="square" lIns="73152" rIns="73152" tIns="36576" bIns="36576" anchor="t">
+            <a:spAutoFit/>
+          </a:bodyPr>
+          <a:lstStyle/>
+          <a:p>
+            <a:pPr algn="l">
+              <a:lnSpc>
+                <a:spcPct val="115000"/>
+              </a:lnSpc>
+            </a:pPr>
+            <a:r>
+              <a:rPr sz="1500" b="0">
+                <a:solidFill>
+                  <a:srgbClr val="475569"/>
+                </a:solidFill>
+                <a:latin typeface="Arial"/>
+              </a:rPr>
+              <a:t>28 read tools instead of about 75.</a:t>
+            </a:r>
+          </a:p>
+        </p:txBody>
+      </p:sp>
+      <p:sp>
+        <p:nvSpPr>
+          <p:cNvPr id="16" name="Rounded Rectangle 15"/>
+          <p:cNvSpPr/>
+          <p:nvPr/>
+        </p:nvSpPr>
+        <p:spPr>
+          <a:xfrm>
+            <a:off x="548640" y="5852160"/>
+            <a:ext cx="11091672" cy="603504"/>
+          </a:xfrm>
+          <a:prstGeom prst="roundRect">
+            <a:avLst>
+              <a:gd name="adj" fmla="val 12000"/>
+            </a:avLst>
+          </a:prstGeom>
+          <a:solidFill>
+            <a:srgbClr val="0B1220"/>
+          </a:solidFill>
+          <a:ln>
+            <a:noFill/>
+          </a:ln>
+          <a:effectLst/>
+        </p:spPr>
+        <p:style>
+          <a:lnRef idx="1">
+            <a:schemeClr val="accent1"/>
+          </a:lnRef>
+          <a:fillRef idx="3">
+            <a:schemeClr val="accent1"/>
+          </a:fillRef>
+          <a:effectRef idx="2">
+            <a:schemeClr val="accent1"/>
+          </a:effectRef>
+          <a:fontRef idx="minor">
+            <a:schemeClr val="lt1"/>
+          </a:fontRef>
+        </p:style>
+        <p:txBody>
+          <a:bodyPr rtlCol="0" anchor="ctr" wrap="square" lIns="292608" rIns="73152" tIns="36576" bIns="36576"/>
+          <a:lstStyle/>
+          <a:p>
+            <a:pPr algn="l">
+              <a:lnSpc>
+                <a:spcPct val="110000"/>
+              </a:lnSpc>
+            </a:pPr>
+            <a:r>
+              <a:rPr sz="1200" b="1">
+                <a:solidFill>
+                  <a:srgbClr val="A5B4FC"/>
+                </a:solidFill>
+                <a:latin typeface="Arial"/>
+              </a:rPr>
+              <a:t>NOTICE   </a:t>
+            </a:r>
+            <a:r>
+              <a:rPr sz="1600" b="0">
+                <a:solidFill>
+                  <a:srgbClr val="FFFFFF"/>
+                </a:solidFill>
+                <a:latin typeface="Arial"/>
+              </a:rPr>
+              <a:t>Every run reported success, the wrong ones too. KAOP's evaluations grade the answer.</a:t>
+            </a:r>
+          </a:p>
+        </p:txBody>
+      </p:sp>
+    </p:spTree>
+  </p:cSld>
+  <p:clrMapOvr>
+    <a:masterClrMapping/>
+  </p:clrMapOvr>
+</p:sld>
+</file>
+
+<file path=ppt/slides/slide12.xml><?xml version="1.0" encoding="utf-8"?>
+<p:sld xmlns:a="http://schemas.openxmlformats.org/drawingml/2006/main" xmlns:p="http://schemas.openxmlformats.org/presentationml/2006/main" xmlns:r="http://schemas.openxmlformats.org/officeDocument/2006/relationships">
+  <p:cSld>
+    <p:bg>
+      <p:bgPr>
+        <a:solidFill>
+          <a:srgbClr val="F8FAFC"/>
+        </a:solidFill>
+        <a:effectLst/>
+      </p:bgPr>
+    </p:bg>
+    <p:spTree>
+      <p:nvGrpSpPr>
+        <p:cNvPr id="1" name=""/>
+        <p:cNvGrpSpPr/>
+        <p:nvPr/>
+      </p:nvGrpSpPr>
+      <p:grpSpPr/>
+      <p:sp>
+        <p:nvSpPr>
+          <p:cNvPr id="2" name="TextBox 1"/>
+          <p:cNvSpPr txBox="1"/>
+          <p:nvPr/>
+        </p:nvSpPr>
+        <p:spPr>
+          <a:xfrm>
+            <a:off x="548640" y="320040"/>
+            <a:ext cx="7315200" cy="274320"/>
+          </a:xfrm>
+          <a:prstGeom prst="rect">
+            <a:avLst/>
+          </a:prstGeom>
+          <a:noFill/>
+        </p:spPr>
+        <p:txBody>
+          <a:bodyPr wrap="square" lIns="73152" rIns="73152" tIns="36576" bIns="36576" anchor="t">
+            <a:spAutoFit/>
+          </a:bodyPr>
+          <a:lstStyle/>
+          <a:p>
+            <a:pPr algn="l">
+              <a:lnSpc>
+                <a:spcPct val="110000"/>
+              </a:lnSpc>
+            </a:pPr>
+            <a:r>
+              <a:rPr sz="1000" b="1">
+                <a:solidFill>
+                  <a:srgbClr val="4F46E5"/>
+                </a:solidFill>
+                <a:latin typeface="Arial"/>
+              </a:rPr>
+              <a:t>KAOP  ·  PLATFORM ENGINEERING</a:t>
+            </a:r>
+          </a:p>
+        </p:txBody>
+      </p:sp>
+      <p:sp>
+        <p:nvSpPr>
+          <p:cNvPr id="3" name="TextBox 2"/>
+          <p:cNvSpPr txBox="1"/>
+          <p:nvPr/>
+        </p:nvSpPr>
+        <p:spPr>
+          <a:xfrm>
+            <a:off x="9784080" y="320040"/>
+            <a:ext cx="1828800" cy="274320"/>
+          </a:xfrm>
+          <a:prstGeom prst="rect">
+            <a:avLst/>
+          </a:prstGeom>
+          <a:noFill/>
+        </p:spPr>
+        <p:txBody>
+          <a:bodyPr wrap="square" lIns="73152" rIns="73152" tIns="36576" bIns="36576" anchor="t">
+            <a:spAutoFit/>
+          </a:bodyPr>
+          <a:lstStyle/>
+          <a:p>
+            <a:pPr algn="r">
+              <a:lnSpc>
+                <a:spcPct val="110000"/>
+              </a:lnSpc>
+            </a:pPr>
+            <a:r>
+              <a:rPr sz="1000" b="0">
+                <a:solidFill>
+                  <a:srgbClr val="94A3B8"/>
+                </a:solidFill>
+                <a:latin typeface="Arial"/>
+              </a:rPr>
+              <a:t>12 / 14</a:t>
             </a:r>
           </a:p>
         </p:txBody>
@@ -8560,7 +9251,7 @@
 </p:sld>
 </file>
 
-<file path=ppt/slides/slide12.xml><?xml version="1.0" encoding="utf-8"?>
+<file path=ppt/slides/slide13.xml><?xml version="1.0" encoding="utf-8"?>
 <p:sld xmlns:a="http://schemas.openxmlformats.org/drawingml/2006/main" xmlns:p="http://schemas.openxmlformats.org/presentationml/2006/main" xmlns:r="http://schemas.openxmlformats.org/officeDocument/2006/relationships">
   <p:cSld>
     <p:bg>
@@ -8651,7 +9342,7 @@
                 </a:solidFill>
                 <a:latin typeface="Arial"/>
               </a:rPr>
-              <a:t>12 / 13</a:t>
+              <a:t>13 / 14</a:t>
             </a:r>
           </a:p>
         </p:txBody>
@@ -8938,7 +9629,7 @@
                 </a:solidFill>
                 <a:latin typeface="Arial"/>
               </a:rPr>
-              <a:t>Agree the workflow, the owner, how we measure success, and the guardrails.</a:t>
+              <a:t>Agree the workflow, the owner, the guardrails, and how we measure success.</a:t>
             </a:r>
           </a:p>
         </p:txBody>
@@ -9191,7 +9882,7 @@
                 </a:solidFill>
                 <a:latin typeface="Arial"/>
               </a:rPr>
-              <a:t>One cluster. Read-only. Every change approved by a person.</a:t>
+              <a:t>One cluster, read-only. Plus one agent your teams already run.</a:t>
             </a:r>
           </a:p>
         </p:txBody>
@@ -9444,7 +10135,7 @@
                 </a:solidFill>
                 <a:latin typeface="Arial"/>
               </a:rPr>
-              <a:t>More workflows, teams and autonomy, once the results hold.</a:t>
+              <a:t>More teams and autonomy, then modules like Alert Intelligence or Kubernetes Cost.</a:t>
             </a:r>
           </a:p>
         </p:txBody>
@@ -10617,7 +11308,7 @@
 </p:sld>
 </file>
 
-<file path=ppt/slides/slide13.xml><?xml version="1.0" encoding="utf-8"?>
+<file path=ppt/slides/slide14.xml><?xml version="1.0" encoding="utf-8"?>
 <p:sld xmlns:a="http://schemas.openxmlformats.org/drawingml/2006/main" xmlns:p="http://schemas.openxmlformats.org/presentationml/2006/main" xmlns:r="http://schemas.openxmlformats.org/officeDocument/2006/relationships">
   <p:cSld>
     <p:bg>
@@ -11732,7 +12423,7 @@
 </p:sld>
 </file>
 
-<file path=ppt/slides/slide14.xml><?xml version="1.0" encoding="utf-8"?>
+<file path=ppt/slides/slide15.xml><?xml version="1.0" encoding="utf-8"?>
 <p:sld xmlns:a="http://schemas.openxmlformats.org/drawingml/2006/main" xmlns:p="http://schemas.openxmlformats.org/presentationml/2006/main" xmlns:r="http://schemas.openxmlformats.org/officeDocument/2006/relationships">
   <p:cSld>
     <p:bg>
@@ -12019,886 +12710,6 @@
                 <a:latin typeface="Arial"/>
               </a:rPr>
               <a:t>D   Cost and guardrails, tested</a:t>
-            </a:r>
-          </a:p>
-        </p:txBody>
-      </p:sp>
-    </p:spTree>
-  </p:cSld>
-  <p:clrMapOvr>
-    <a:masterClrMapping/>
-  </p:clrMapOvr>
-</p:sld>
-</file>
-
-<file path=ppt/slides/slide15.xml><?xml version="1.0" encoding="utf-8"?>
-<p:sld xmlns:a="http://schemas.openxmlformats.org/drawingml/2006/main" xmlns:p="http://schemas.openxmlformats.org/presentationml/2006/main" xmlns:r="http://schemas.openxmlformats.org/officeDocument/2006/relationships">
-  <p:cSld>
-    <p:bg>
-      <p:bgPr>
-        <a:solidFill>
-          <a:srgbClr val="F8FAFC"/>
-        </a:solidFill>
-        <a:effectLst/>
-      </p:bgPr>
-    </p:bg>
-    <p:spTree>
-      <p:nvGrpSpPr>
-        <p:cNvPr id="1" name=""/>
-        <p:cNvGrpSpPr/>
-        <p:nvPr/>
-      </p:nvGrpSpPr>
-      <p:grpSpPr/>
-      <p:sp>
-        <p:nvSpPr>
-          <p:cNvPr id="2" name="TextBox 1"/>
-          <p:cNvSpPr txBox="1"/>
-          <p:nvPr/>
-        </p:nvSpPr>
-        <p:spPr>
-          <a:xfrm>
-            <a:off x="548640" y="320040"/>
-            <a:ext cx="7315200" cy="274320"/>
-          </a:xfrm>
-          <a:prstGeom prst="rect">
-            <a:avLst/>
-          </a:prstGeom>
-          <a:noFill/>
-        </p:spPr>
-        <p:txBody>
-          <a:bodyPr wrap="square" lIns="73152" rIns="73152" tIns="36576" bIns="36576" anchor="t">
-            <a:spAutoFit/>
-          </a:bodyPr>
-          <a:lstStyle/>
-          <a:p>
-            <a:pPr algn="l">
-              <a:lnSpc>
-                <a:spcPct val="110000"/>
-              </a:lnSpc>
-            </a:pPr>
-            <a:r>
-              <a:rPr sz="1000" b="1">
-                <a:solidFill>
-                  <a:srgbClr val="4F46E5"/>
-                </a:solidFill>
-                <a:latin typeface="Arial"/>
-              </a:rPr>
-              <a:t>APPENDIX</a:t>
-            </a:r>
-          </a:p>
-        </p:txBody>
-      </p:sp>
-      <p:sp>
-        <p:nvSpPr>
-          <p:cNvPr id="3" name="TextBox 2"/>
-          <p:cNvSpPr txBox="1"/>
-          <p:nvPr/>
-        </p:nvSpPr>
-        <p:spPr>
-          <a:xfrm>
-            <a:off x="9784080" y="320040"/>
-            <a:ext cx="1828800" cy="274320"/>
-          </a:xfrm>
-          <a:prstGeom prst="rect">
-            <a:avLst/>
-          </a:prstGeom>
-          <a:noFill/>
-        </p:spPr>
-        <p:txBody>
-          <a:bodyPr wrap="square" lIns="73152" rIns="73152" tIns="36576" bIns="36576" anchor="t">
-            <a:spAutoFit/>
-          </a:bodyPr>
-          <a:lstStyle/>
-          <a:p>
-            <a:pPr algn="r">
-              <a:lnSpc>
-                <a:spcPct val="110000"/>
-              </a:lnSpc>
-            </a:pPr>
-            <a:r>
-              <a:rPr sz="1000" b="0">
-                <a:solidFill>
-                  <a:srgbClr val="94A3B8"/>
-                </a:solidFill>
-                <a:latin typeface="Arial"/>
-              </a:rPr>
-              <a:t>APPENDIX A</a:t>
-            </a:r>
-          </a:p>
-        </p:txBody>
-      </p:sp>
-      <p:sp>
-        <p:nvSpPr>
-          <p:cNvPr id="4" name="TextBox 3"/>
-          <p:cNvSpPr txBox="1"/>
-          <p:nvPr/>
-        </p:nvSpPr>
-        <p:spPr>
-          <a:xfrm>
-            <a:off x="548640" y="658368"/>
-            <a:ext cx="11064240" cy="731520"/>
-          </a:xfrm>
-          <a:prstGeom prst="rect">
-            <a:avLst/>
-          </a:prstGeom>
-          <a:noFill/>
-        </p:spPr>
-        <p:txBody>
-          <a:bodyPr wrap="square" lIns="73152" rIns="73152" tIns="36576" bIns="36576" anchor="t">
-            <a:spAutoFit/>
-          </a:bodyPr>
-          <a:lstStyle/>
-          <a:p>
-            <a:pPr algn="l">
-              <a:lnSpc>
-                <a:spcPct val="110000"/>
-              </a:lnSpc>
-            </a:pPr>
-            <a:r>
-              <a:rPr sz="3200" b="1">
-                <a:solidFill>
-                  <a:srgbClr val="0F172A"/>
-                </a:solidFill>
-                <a:latin typeface="Arial"/>
-              </a:rPr>
-              <a:t>Sources for this presentation</a:t>
-            </a:r>
-          </a:p>
-        </p:txBody>
-      </p:sp>
-      <p:sp>
-        <p:nvSpPr>
-          <p:cNvPr id="5" name="TextBox 4"/>
-          <p:cNvSpPr txBox="1"/>
-          <p:nvPr/>
-        </p:nvSpPr>
-        <p:spPr>
-          <a:xfrm>
-            <a:off x="548640" y="1371600"/>
-            <a:ext cx="11064240" cy="457200"/>
-          </a:xfrm>
-          <a:prstGeom prst="rect">
-            <a:avLst/>
-          </a:prstGeom>
-          <a:noFill/>
-        </p:spPr>
-        <p:txBody>
-          <a:bodyPr wrap="square" lIns="73152" rIns="73152" tIns="36576" bIns="36576" anchor="t">
-            <a:spAutoFit/>
-          </a:bodyPr>
-          <a:lstStyle/>
-          <a:p>
-            <a:pPr algn="l">
-              <a:lnSpc>
-                <a:spcPct val="110000"/>
-              </a:lnSpc>
-            </a:pPr>
-            <a:r>
-              <a:rPr sz="1700" b="0">
-                <a:solidFill>
-                  <a:srgbClr val="475569"/>
-                </a:solidFill>
-                <a:latin typeface="Arial"/>
-              </a:rPr>
-              <a:t>Every claim traces to Komodor's material or to this lab.</a:t>
-            </a:r>
-          </a:p>
-        </p:txBody>
-      </p:sp>
-      <p:sp>
-        <p:nvSpPr>
-          <p:cNvPr id="6" name="Rounded Rectangle 5"/>
-          <p:cNvSpPr/>
-          <p:nvPr/>
-        </p:nvSpPr>
-        <p:spPr>
-          <a:xfrm>
-            <a:off x="548640" y="2011680"/>
-            <a:ext cx="11091672" cy="621792"/>
-          </a:xfrm>
-          <a:prstGeom prst="roundRect">
-            <a:avLst>
-              <a:gd name="adj" fmla="val 6000"/>
-            </a:avLst>
-          </a:prstGeom>
-          <a:solidFill>
-            <a:srgbClr val="FFFFFF"/>
-          </a:solidFill>
-          <a:ln w="12700">
-            <a:solidFill>
-              <a:srgbClr val="E2E8F0"/>
-            </a:solidFill>
-          </a:ln>
-          <a:effectLst/>
-        </p:spPr>
-        <p:style>
-          <a:lnRef idx="1">
-            <a:schemeClr val="accent1"/>
-          </a:lnRef>
-          <a:fillRef idx="3">
-            <a:schemeClr val="accent1"/>
-          </a:fillRef>
-          <a:effectRef idx="2">
-            <a:schemeClr val="accent1"/>
-          </a:effectRef>
-          <a:fontRef idx="minor">
-            <a:schemeClr val="lt1"/>
-          </a:fontRef>
-        </p:style>
-        <p:txBody>
-          <a:bodyPr rtlCol="0" anchor="ctr"/>
-          <a:lstStyle/>
-          <a:p>
-            <a:pPr algn="ctr"/>
-          </a:p>
-        </p:txBody>
-      </p:sp>
-      <p:sp>
-        <p:nvSpPr>
-          <p:cNvPr id="7" name="TextBox 6"/>
-          <p:cNvSpPr txBox="1"/>
-          <p:nvPr/>
-        </p:nvSpPr>
-        <p:spPr>
-          <a:xfrm>
-            <a:off x="777240" y="2057400"/>
-            <a:ext cx="3931920" cy="530352"/>
-          </a:xfrm>
-          <a:prstGeom prst="rect">
-            <a:avLst/>
-          </a:prstGeom>
-          <a:noFill/>
-        </p:spPr>
-        <p:txBody>
-          <a:bodyPr wrap="square" lIns="73152" rIns="73152" tIns="36576" bIns="36576" anchor="ctr">
-            <a:spAutoFit/>
-          </a:bodyPr>
-          <a:lstStyle/>
-          <a:p>
-            <a:pPr algn="l">
-              <a:lnSpc>
-                <a:spcPct val="110000"/>
-              </a:lnSpc>
-            </a:pPr>
-            <a:r>
-              <a:rPr sz="1500" b="1">
-                <a:solidFill>
-                  <a:srgbClr val="0F172A"/>
-                </a:solidFill>
-                <a:latin typeface="Arial"/>
-              </a:rPr>
-              <a:t>Komodor website and KAOP launch</a:t>
-            </a:r>
-          </a:p>
-        </p:txBody>
-      </p:sp>
-      <p:sp>
-        <p:nvSpPr>
-          <p:cNvPr id="8" name="TextBox 7"/>
-          <p:cNvSpPr txBox="1"/>
-          <p:nvPr/>
-        </p:nvSpPr>
-        <p:spPr>
-          <a:xfrm>
-            <a:off x="4754880" y="2057400"/>
-            <a:ext cx="6766560" cy="530352"/>
-          </a:xfrm>
-          <a:prstGeom prst="rect">
-            <a:avLst/>
-          </a:prstGeom>
-          <a:noFill/>
-        </p:spPr>
-        <p:txBody>
-          <a:bodyPr wrap="square" lIns="73152" rIns="73152" tIns="36576" bIns="36576" anchor="ctr">
-            <a:spAutoFit/>
-          </a:bodyPr>
-          <a:lstStyle/>
-          <a:p>
-            <a:pPr algn="l">
-              <a:lnSpc>
-                <a:spcPct val="110000"/>
-              </a:lnSpc>
-            </a:pPr>
-            <a:r>
-              <a:rPr sz="1500" b="0">
-                <a:solidFill>
-                  <a:srgbClr val="475569"/>
-                </a:solidFill>
-                <a:latin typeface="Arial"/>
-              </a:rPr>
-              <a:t>Positioning: build, run, govern, optimize. The Gartner figure.</a:t>
-            </a:r>
-          </a:p>
-        </p:txBody>
-      </p:sp>
-      <p:sp>
-        <p:nvSpPr>
-          <p:cNvPr id="9" name="Rounded Rectangle 8"/>
-          <p:cNvSpPr/>
-          <p:nvPr/>
-        </p:nvSpPr>
-        <p:spPr>
-          <a:xfrm>
-            <a:off x="548640" y="2724912"/>
-            <a:ext cx="11091672" cy="621792"/>
-          </a:xfrm>
-          <a:prstGeom prst="roundRect">
-            <a:avLst>
-              <a:gd name="adj" fmla="val 6000"/>
-            </a:avLst>
-          </a:prstGeom>
-          <a:solidFill>
-            <a:srgbClr val="FFFFFF"/>
-          </a:solidFill>
-          <a:ln w="12700">
-            <a:solidFill>
-              <a:srgbClr val="E2E8F0"/>
-            </a:solidFill>
-          </a:ln>
-          <a:effectLst/>
-        </p:spPr>
-        <p:style>
-          <a:lnRef idx="1">
-            <a:schemeClr val="accent1"/>
-          </a:lnRef>
-          <a:fillRef idx="3">
-            <a:schemeClr val="accent1"/>
-          </a:fillRef>
-          <a:effectRef idx="2">
-            <a:schemeClr val="accent1"/>
-          </a:effectRef>
-          <a:fontRef idx="minor">
-            <a:schemeClr val="lt1"/>
-          </a:fontRef>
-        </p:style>
-        <p:txBody>
-          <a:bodyPr rtlCol="0" anchor="ctr"/>
-          <a:lstStyle/>
-          <a:p>
-            <a:pPr algn="ctr"/>
-          </a:p>
-        </p:txBody>
-      </p:sp>
-      <p:sp>
-        <p:nvSpPr>
-          <p:cNvPr id="10" name="TextBox 9"/>
-          <p:cNvSpPr txBox="1"/>
-          <p:nvPr/>
-        </p:nvSpPr>
-        <p:spPr>
-          <a:xfrm>
-            <a:off x="777240" y="2770632"/>
-            <a:ext cx="3931920" cy="530352"/>
-          </a:xfrm>
-          <a:prstGeom prst="rect">
-            <a:avLst/>
-          </a:prstGeom>
-          <a:noFill/>
-        </p:spPr>
-        <p:txBody>
-          <a:bodyPr wrap="square" lIns="73152" rIns="73152" tIns="36576" bIns="36576" anchor="ctr">
-            <a:spAutoFit/>
-          </a:bodyPr>
-          <a:lstStyle/>
-          <a:p>
-            <a:pPr algn="l">
-              <a:lnSpc>
-                <a:spcPct val="110000"/>
-              </a:lnSpc>
-            </a:pPr>
-            <a:r>
-              <a:rPr sz="1500" b="1">
-                <a:solidFill>
-                  <a:srgbClr val="0F172A"/>
-                </a:solidFill>
-                <a:latin typeface="Arial"/>
-              </a:rPr>
-              <a:t>KAOP docs: security and governance</a:t>
-            </a:r>
-          </a:p>
-        </p:txBody>
-      </p:sp>
-      <p:sp>
-        <p:nvSpPr>
-          <p:cNvPr id="11" name="TextBox 10"/>
-          <p:cNvSpPr txBox="1"/>
-          <p:nvPr/>
-        </p:nvSpPr>
-        <p:spPr>
-          <a:xfrm>
-            <a:off x="4754880" y="2770632"/>
-            <a:ext cx="6766560" cy="530352"/>
-          </a:xfrm>
-          <a:prstGeom prst="rect">
-            <a:avLst/>
-          </a:prstGeom>
-          <a:noFill/>
-        </p:spPr>
-        <p:txBody>
-          <a:bodyPr wrap="square" lIns="73152" rIns="73152" tIns="36576" bIns="36576" anchor="ctr">
-            <a:spAutoFit/>
-          </a:bodyPr>
-          <a:lstStyle/>
-          <a:p>
-            <a:pPr algn="l">
-              <a:lnSpc>
-                <a:spcPct val="110000"/>
-              </a:lnSpc>
-            </a:pPr>
-            <a:r>
-              <a:rPr sz="1500" b="0">
-                <a:solidFill>
-                  <a:srgbClr val="475569"/>
-                </a:solidFill>
-                <a:latin typeface="Arial"/>
-              </a:rPr>
-              <a:t>The six layers, approvals, audit log, Access explorer.</a:t>
-            </a:r>
-          </a:p>
-        </p:txBody>
-      </p:sp>
-      <p:sp>
-        <p:nvSpPr>
-          <p:cNvPr id="12" name="Rounded Rectangle 11"/>
-          <p:cNvSpPr/>
-          <p:nvPr/>
-        </p:nvSpPr>
-        <p:spPr>
-          <a:xfrm>
-            <a:off x="548640" y="3438144"/>
-            <a:ext cx="11091672" cy="621792"/>
-          </a:xfrm>
-          <a:prstGeom prst="roundRect">
-            <a:avLst>
-              <a:gd name="adj" fmla="val 6000"/>
-            </a:avLst>
-          </a:prstGeom>
-          <a:solidFill>
-            <a:srgbClr val="FFFFFF"/>
-          </a:solidFill>
-          <a:ln w="12700">
-            <a:solidFill>
-              <a:srgbClr val="E2E8F0"/>
-            </a:solidFill>
-          </a:ln>
-          <a:effectLst/>
-        </p:spPr>
-        <p:style>
-          <a:lnRef idx="1">
-            <a:schemeClr val="accent1"/>
-          </a:lnRef>
-          <a:fillRef idx="3">
-            <a:schemeClr val="accent1"/>
-          </a:fillRef>
-          <a:effectRef idx="2">
-            <a:schemeClr val="accent1"/>
-          </a:effectRef>
-          <a:fontRef idx="minor">
-            <a:schemeClr val="lt1"/>
-          </a:fontRef>
-        </p:style>
-        <p:txBody>
-          <a:bodyPr rtlCol="0" anchor="ctr"/>
-          <a:lstStyle/>
-          <a:p>
-            <a:pPr algn="ctr"/>
-          </a:p>
-        </p:txBody>
-      </p:sp>
-      <p:sp>
-        <p:nvSpPr>
-          <p:cNvPr id="13" name="TextBox 12"/>
-          <p:cNvSpPr txBox="1"/>
-          <p:nvPr/>
-        </p:nvSpPr>
-        <p:spPr>
-          <a:xfrm>
-            <a:off x="777240" y="3483864"/>
-            <a:ext cx="3931920" cy="530352"/>
-          </a:xfrm>
-          <a:prstGeom prst="rect">
-            <a:avLst/>
-          </a:prstGeom>
-          <a:noFill/>
-        </p:spPr>
-        <p:txBody>
-          <a:bodyPr wrap="square" lIns="73152" rIns="73152" tIns="36576" bIns="36576" anchor="ctr">
-            <a:spAutoFit/>
-          </a:bodyPr>
-          <a:lstStyle/>
-          <a:p>
-            <a:pPr algn="l">
-              <a:lnSpc>
-                <a:spcPct val="110000"/>
-              </a:lnSpc>
-            </a:pPr>
-            <a:r>
-              <a:rPr sz="1500" b="1">
-                <a:solidFill>
-                  <a:srgbClr val="0F172A"/>
-                </a:solidFill>
-                <a:latin typeface="Arial"/>
-              </a:rPr>
-              <a:t>KAOP docs: agent catalog</a:t>
-            </a:r>
-          </a:p>
-        </p:txBody>
-      </p:sp>
-      <p:sp>
-        <p:nvSpPr>
-          <p:cNvPr id="14" name="TextBox 13"/>
-          <p:cNvSpPr txBox="1"/>
-          <p:nvPr/>
-        </p:nvSpPr>
-        <p:spPr>
-          <a:xfrm>
-            <a:off x="4754880" y="3483864"/>
-            <a:ext cx="6766560" cy="530352"/>
-          </a:xfrm>
-          <a:prstGeom prst="rect">
-            <a:avLst/>
-          </a:prstGeom>
-          <a:noFill/>
-        </p:spPr>
-        <p:txBody>
-          <a:bodyPr wrap="square" lIns="73152" rIns="73152" tIns="36576" bIns="36576" anchor="ctr">
-            <a:spAutoFit/>
-          </a:bodyPr>
-          <a:lstStyle/>
-          <a:p>
-            <a:pPr algn="l">
-              <a:lnSpc>
-                <a:spcPct val="110000"/>
-              </a:lnSpc>
-            </a:pPr>
-            <a:r>
-              <a:rPr sz="1500" b="0">
-                <a:solidFill>
-                  <a:srgbClr val="475569"/>
-                </a:solidFill>
-                <a:latin typeface="Arial"/>
-              </a:rPr>
-              <a:t>What each agent reads, changes, and where it stops.</a:t>
-            </a:r>
-          </a:p>
-        </p:txBody>
-      </p:sp>
-      <p:sp>
-        <p:nvSpPr>
-          <p:cNvPr id="15" name="Rounded Rectangle 14"/>
-          <p:cNvSpPr/>
-          <p:nvPr/>
-        </p:nvSpPr>
-        <p:spPr>
-          <a:xfrm>
-            <a:off x="548640" y="4151376"/>
-            <a:ext cx="11091672" cy="621792"/>
-          </a:xfrm>
-          <a:prstGeom prst="roundRect">
-            <a:avLst>
-              <a:gd name="adj" fmla="val 6000"/>
-            </a:avLst>
-          </a:prstGeom>
-          <a:solidFill>
-            <a:srgbClr val="FFFFFF"/>
-          </a:solidFill>
-          <a:ln w="12700">
-            <a:solidFill>
-              <a:srgbClr val="E2E8F0"/>
-            </a:solidFill>
-          </a:ln>
-          <a:effectLst/>
-        </p:spPr>
-        <p:style>
-          <a:lnRef idx="1">
-            <a:schemeClr val="accent1"/>
-          </a:lnRef>
-          <a:fillRef idx="3">
-            <a:schemeClr val="accent1"/>
-          </a:fillRef>
-          <a:effectRef idx="2">
-            <a:schemeClr val="accent1"/>
-          </a:effectRef>
-          <a:fontRef idx="minor">
-            <a:schemeClr val="lt1"/>
-          </a:fontRef>
-        </p:style>
-        <p:txBody>
-          <a:bodyPr rtlCol="0" anchor="ctr"/>
-          <a:lstStyle/>
-          <a:p>
-            <a:pPr algn="ctr"/>
-          </a:p>
-        </p:txBody>
-      </p:sp>
-      <p:sp>
-        <p:nvSpPr>
-          <p:cNvPr id="16" name="TextBox 15"/>
-          <p:cNvSpPr txBox="1"/>
-          <p:nvPr/>
-        </p:nvSpPr>
-        <p:spPr>
-          <a:xfrm>
-            <a:off x="777240" y="4197096"/>
-            <a:ext cx="3931920" cy="530352"/>
-          </a:xfrm>
-          <a:prstGeom prst="rect">
-            <a:avLst/>
-          </a:prstGeom>
-          <a:noFill/>
-        </p:spPr>
-        <p:txBody>
-          <a:bodyPr wrap="square" lIns="73152" rIns="73152" tIns="36576" bIns="36576" anchor="ctr">
-            <a:spAutoFit/>
-          </a:bodyPr>
-          <a:lstStyle/>
-          <a:p>
-            <a:pPr algn="l">
-              <a:lnSpc>
-                <a:spcPct val="110000"/>
-              </a:lnSpc>
-            </a:pPr>
-            <a:r>
-              <a:rPr sz="1500" b="1">
-                <a:solidFill>
-                  <a:srgbClr val="0F172A"/>
-                </a:solidFill>
-                <a:latin typeface="Arial"/>
-              </a:rPr>
-              <a:t>KAOP docs: incident module</a:t>
-            </a:r>
-          </a:p>
-        </p:txBody>
-      </p:sp>
-      <p:sp>
-        <p:nvSpPr>
-          <p:cNvPr id="17" name="TextBox 16"/>
-          <p:cNvSpPr txBox="1"/>
-          <p:nvPr/>
-        </p:nvSpPr>
-        <p:spPr>
-          <a:xfrm>
-            <a:off x="4754880" y="4197096"/>
-            <a:ext cx="6766560" cy="530352"/>
-          </a:xfrm>
-          <a:prstGeom prst="rect">
-            <a:avLst/>
-          </a:prstGeom>
-          <a:noFill/>
-        </p:spPr>
-        <p:txBody>
-          <a:bodyPr wrap="square" lIns="73152" rIns="73152" tIns="36576" bIns="36576" anchor="ctr">
-            <a:spAutoFit/>
-          </a:bodyPr>
-          <a:lstStyle/>
-          <a:p>
-            <a:pPr algn="l">
-              <a:lnSpc>
-                <a:spcPct val="110000"/>
-              </a:lnSpc>
-            </a:pPr>
-            <a:r>
-              <a:rPr sz="1500" b="0">
-                <a:solidFill>
-                  <a:srgbClr val="475569"/>
-                </a:solidFill>
-                <a:latin typeface="Arial"/>
-              </a:rPr>
-              <a:t>The alert-to-remediation workflow.</a:t>
-            </a:r>
-          </a:p>
-        </p:txBody>
-      </p:sp>
-      <p:sp>
-        <p:nvSpPr>
-          <p:cNvPr id="18" name="Rounded Rectangle 17"/>
-          <p:cNvSpPr/>
-          <p:nvPr/>
-        </p:nvSpPr>
-        <p:spPr>
-          <a:xfrm>
-            <a:off x="548640" y="4864608"/>
-            <a:ext cx="11091672" cy="621792"/>
-          </a:xfrm>
-          <a:prstGeom prst="roundRect">
-            <a:avLst>
-              <a:gd name="adj" fmla="val 6000"/>
-            </a:avLst>
-          </a:prstGeom>
-          <a:solidFill>
-            <a:srgbClr val="FFFFFF"/>
-          </a:solidFill>
-          <a:ln w="12700">
-            <a:solidFill>
-              <a:srgbClr val="E2E8F0"/>
-            </a:solidFill>
-          </a:ln>
-          <a:effectLst/>
-        </p:spPr>
-        <p:style>
-          <a:lnRef idx="1">
-            <a:schemeClr val="accent1"/>
-          </a:lnRef>
-          <a:fillRef idx="3">
-            <a:schemeClr val="accent1"/>
-          </a:fillRef>
-          <a:effectRef idx="2">
-            <a:schemeClr val="accent1"/>
-          </a:effectRef>
-          <a:fontRef idx="minor">
-            <a:schemeClr val="lt1"/>
-          </a:fontRef>
-        </p:style>
-        <p:txBody>
-          <a:bodyPr rtlCol="0" anchor="ctr"/>
-          <a:lstStyle/>
-          <a:p>
-            <a:pPr algn="ctr"/>
-          </a:p>
-        </p:txBody>
-      </p:sp>
-      <p:sp>
-        <p:nvSpPr>
-          <p:cNvPr id="19" name="TextBox 18"/>
-          <p:cNvSpPr txBox="1"/>
-          <p:nvPr/>
-        </p:nvSpPr>
-        <p:spPr>
-          <a:xfrm>
-            <a:off x="777240" y="4910328"/>
-            <a:ext cx="3931920" cy="530352"/>
-          </a:xfrm>
-          <a:prstGeom prst="rect">
-            <a:avLst/>
-          </a:prstGeom>
-          <a:noFill/>
-        </p:spPr>
-        <p:txBody>
-          <a:bodyPr wrap="square" lIns="73152" rIns="73152" tIns="36576" bIns="36576" anchor="ctr">
-            <a:spAutoFit/>
-          </a:bodyPr>
-          <a:lstStyle/>
-          <a:p>
-            <a:pPr algn="l">
-              <a:lnSpc>
-                <a:spcPct val="110000"/>
-              </a:lnSpc>
-            </a:pPr>
-            <a:r>
-              <a:rPr sz="1500" b="1">
-                <a:solidFill>
-                  <a:srgbClr val="0F172A"/>
-                </a:solidFill>
-                <a:latin typeface="Arial"/>
-              </a:rPr>
-              <a:t>This lab</a:t>
-            </a:r>
-          </a:p>
-        </p:txBody>
-      </p:sp>
-      <p:sp>
-        <p:nvSpPr>
-          <p:cNvPr id="20" name="TextBox 19"/>
-          <p:cNvSpPr txBox="1"/>
-          <p:nvPr/>
-        </p:nvSpPr>
-        <p:spPr>
-          <a:xfrm>
-            <a:off x="4754880" y="4910328"/>
-            <a:ext cx="6766560" cy="530352"/>
-          </a:xfrm>
-          <a:prstGeom prst="rect">
-            <a:avLst/>
-          </a:prstGeom>
-          <a:noFill/>
-        </p:spPr>
-        <p:txBody>
-          <a:bodyPr wrap="square" lIns="73152" rIns="73152" tIns="36576" bIns="36576" anchor="ctr">
-            <a:spAutoFit/>
-          </a:bodyPr>
-          <a:lstStyle/>
-          <a:p>
-            <a:pPr algn="l">
-              <a:lnSpc>
-                <a:spcPct val="110000"/>
-              </a:lnSpc>
-            </a:pPr>
-            <a:r>
-              <a:rPr sz="1500" b="0">
-                <a:solidFill>
-                  <a:srgbClr val="475569"/>
-                </a:solidFill>
-                <a:latin typeface="Arial"/>
-              </a:rPr>
-              <a:t>A real fault, a real alert, permissions verified, fix measured.</a:t>
-            </a:r>
-          </a:p>
-        </p:txBody>
-      </p:sp>
-      <p:sp>
-        <p:nvSpPr>
-          <p:cNvPr id="21" name="Rounded Rectangle 20"/>
-          <p:cNvSpPr/>
-          <p:nvPr/>
-        </p:nvSpPr>
-        <p:spPr>
-          <a:xfrm>
-            <a:off x="548640" y="5852160"/>
-            <a:ext cx="11091672" cy="603504"/>
-          </a:xfrm>
-          <a:prstGeom prst="roundRect">
-            <a:avLst>
-              <a:gd name="adj" fmla="val 12000"/>
-            </a:avLst>
-          </a:prstGeom>
-          <a:solidFill>
-            <a:srgbClr val="0B1220"/>
-          </a:solidFill>
-          <a:ln>
-            <a:noFill/>
-          </a:ln>
-          <a:effectLst/>
-        </p:spPr>
-        <p:style>
-          <a:lnRef idx="1">
-            <a:schemeClr val="accent1"/>
-          </a:lnRef>
-          <a:fillRef idx="3">
-            <a:schemeClr val="accent1"/>
-          </a:fillRef>
-          <a:effectRef idx="2">
-            <a:schemeClr val="accent1"/>
-          </a:effectRef>
-          <a:fontRef idx="minor">
-            <a:schemeClr val="lt1"/>
-          </a:fontRef>
-        </p:style>
-        <p:txBody>
-          <a:bodyPr rtlCol="0" anchor="ctr" wrap="square" lIns="292608" rIns="73152" tIns="36576" bIns="36576"/>
-          <a:lstStyle/>
-          <a:p>
-            <a:pPr algn="l">
-              <a:lnSpc>
-                <a:spcPct val="110000"/>
-              </a:lnSpc>
-            </a:pPr>
-            <a:r>
-              <a:rPr sz="1200" b="1">
-                <a:solidFill>
-                  <a:srgbClr val="A5B4FC"/>
-                </a:solidFill>
-                <a:latin typeface="Arial"/>
-              </a:rPr>
-              <a:t>APPROACH   </a:t>
-            </a:r>
-            <a:r>
-              <a:rPr sz="1600" b="0">
-                <a:solidFill>
-                  <a:srgbClr val="FFFFFF"/>
-                </a:solidFill>
-                <a:latin typeface="Arial"/>
-              </a:rPr>
-              <a:t>Start from your challenges, prove it on a real incident, then agree the first step together.</a:t>
             </a:r>
           </a:p>
         </p:txBody>
@@ -13002,7 +12813,7 @@
                 </a:solidFill>
                 <a:latin typeface="Arial"/>
               </a:rPr>
-              <a:t>APPENDIX B</a:t>
+              <a:t>APPENDIX A</a:t>
             </a:r>
           </a:p>
         </p:txBody>
@@ -13041,21 +12852,60 @@
                 </a:solidFill>
                 <a:latin typeface="Arial"/>
               </a:rPr>
-              <a:t>Common questions</a:t>
-            </a:r>
-          </a:p>
-        </p:txBody>
-      </p:sp>
-      <p:sp>
-        <p:nvSpPr>
-          <p:cNvPr id="5" name="Rounded Rectangle 4"/>
+              <a:t>Sources for this presentation</a:t>
+            </a:r>
+          </a:p>
+        </p:txBody>
+      </p:sp>
+      <p:sp>
+        <p:nvSpPr>
+          <p:cNvPr id="5" name="TextBox 4"/>
+          <p:cNvSpPr txBox="1"/>
+          <p:nvPr/>
+        </p:nvSpPr>
+        <p:spPr>
+          <a:xfrm>
+            <a:off x="548640" y="1371600"/>
+            <a:ext cx="11064240" cy="457200"/>
+          </a:xfrm>
+          <a:prstGeom prst="rect">
+            <a:avLst/>
+          </a:prstGeom>
+          <a:noFill/>
+        </p:spPr>
+        <p:txBody>
+          <a:bodyPr wrap="square" lIns="73152" rIns="73152" tIns="36576" bIns="36576" anchor="t">
+            <a:spAutoFit/>
+          </a:bodyPr>
+          <a:lstStyle/>
+          <a:p>
+            <a:pPr algn="l">
+              <a:lnSpc>
+                <a:spcPct val="110000"/>
+              </a:lnSpc>
+            </a:pPr>
+            <a:r>
+              <a:rPr sz="1700" b="0">
+                <a:solidFill>
+                  <a:srgbClr val="475569"/>
+                </a:solidFill>
+                <a:latin typeface="Arial"/>
+              </a:rPr>
+              <a:t>Every claim traces to Komodor's material or to this lab.</a:t>
+            </a:r>
+          </a:p>
+        </p:txBody>
+      </p:sp>
+      <p:sp>
+        <p:nvSpPr>
+          <p:cNvPr id="6" name="Rounded Rectangle 5"/>
           <p:cNvSpPr/>
           <p:nvPr/>
         </p:nvSpPr>
         <p:spPr>
           <a:xfrm>
-            <a:off x="548640" y="1463040"/>
-            <a:ext cx="11091672" cy="804672"/>
+            <a:off x="548640" y="2011680"/>
+            <a:ext cx="11091672" cy="621792"/>
           </a:xfrm>
           <a:prstGeom prst="roundRect">
             <a:avLst>
@@ -13096,14 +12946,14 @@
       </p:sp>
       <p:sp>
         <p:nvSpPr>
-          <p:cNvPr id="6" name="TextBox 5"/>
-          <p:cNvSpPr txBox="1"/>
-          <p:nvPr/>
-        </p:nvSpPr>
-        <p:spPr>
-          <a:xfrm>
-            <a:off x="777240" y="1508760"/>
-            <a:ext cx="3931920" cy="713232"/>
+          <p:cNvPr id="7" name="TextBox 6"/>
+          <p:cNvSpPr txBox="1"/>
+          <p:nvPr/>
+        </p:nvSpPr>
+        <p:spPr>
+          <a:xfrm>
+            <a:off x="777240" y="2057400"/>
+            <a:ext cx="3931920" cy="530352"/>
           </a:xfrm>
           <a:prstGeom prst="rect">
             <a:avLst/>
@@ -13128,21 +12978,21 @@
                 </a:solidFill>
                 <a:latin typeface="Arial"/>
               </a:rPr>
-              <a:t>“We'll build this ourselves.”</a:t>
-            </a:r>
-          </a:p>
-        </p:txBody>
-      </p:sp>
-      <p:sp>
-        <p:nvSpPr>
-          <p:cNvPr id="7" name="TextBox 6"/>
-          <p:cNvSpPr txBox="1"/>
-          <p:nvPr/>
-        </p:nvSpPr>
-        <p:spPr>
-          <a:xfrm>
-            <a:off x="4754880" y="1508760"/>
-            <a:ext cx="6766560" cy="713232"/>
+              <a:t>Komodor website and KAOP launch</a:t>
+            </a:r>
+          </a:p>
+        </p:txBody>
+      </p:sp>
+      <p:sp>
+        <p:nvSpPr>
+          <p:cNvPr id="8" name="TextBox 7"/>
+          <p:cNvSpPr txBox="1"/>
+          <p:nvPr/>
+        </p:nvSpPr>
+        <p:spPr>
+          <a:xfrm>
+            <a:off x="4754880" y="2057400"/>
+            <a:ext cx="6766560" cy="530352"/>
           </a:xfrm>
           <a:prstGeom prst="rect">
             <a:avLst/>
@@ -13161,27 +13011,27 @@
               </a:lnSpc>
             </a:pPr>
             <a:r>
-              <a:rPr sz="1400" b="0">
+              <a:rPr sz="1500" b="0">
                 <a:solidFill>
                   <a:srgbClr val="475569"/>
                 </a:solidFill>
                 <a:latin typeface="Arial"/>
               </a:rPr>
-              <a:t>You can build an agent. The hard part is identity, approvals, audit, budgets and evaluation around every agent, for every team. That's the platform.</a:t>
-            </a:r>
-          </a:p>
-        </p:txBody>
-      </p:sp>
-      <p:sp>
-        <p:nvSpPr>
-          <p:cNvPr id="8" name="Rounded Rectangle 7"/>
+              <a:t>Positioning: build, run, govern, optimize. The Gartner figure.</a:t>
+            </a:r>
+          </a:p>
+        </p:txBody>
+      </p:sp>
+      <p:sp>
+        <p:nvSpPr>
+          <p:cNvPr id="9" name="Rounded Rectangle 8"/>
           <p:cNvSpPr/>
           <p:nvPr/>
         </p:nvSpPr>
         <p:spPr>
           <a:xfrm>
-            <a:off x="548640" y="2359152"/>
-            <a:ext cx="11091672" cy="804672"/>
+            <a:off x="548640" y="2724912"/>
+            <a:ext cx="11091672" cy="621792"/>
           </a:xfrm>
           <a:prstGeom prst="roundRect">
             <a:avLst>
@@ -13222,14 +13072,14 @@
       </p:sp>
       <p:sp>
         <p:nvSpPr>
-          <p:cNvPr id="9" name="TextBox 8"/>
-          <p:cNvSpPr txBox="1"/>
-          <p:nvPr/>
-        </p:nvSpPr>
-        <p:spPr>
-          <a:xfrm>
-            <a:off x="777240" y="2404872"/>
-            <a:ext cx="3931920" cy="713232"/>
+          <p:cNvPr id="10" name="TextBox 9"/>
+          <p:cNvSpPr txBox="1"/>
+          <p:nvPr/>
+        </p:nvSpPr>
+        <p:spPr>
+          <a:xfrm>
+            <a:off x="777240" y="2770632"/>
+            <a:ext cx="3931920" cy="530352"/>
           </a:xfrm>
           <a:prstGeom prst="rect">
             <a:avLst/>
@@ -13254,21 +13104,21 @@
                 </a:solidFill>
                 <a:latin typeface="Arial"/>
               </a:rPr>
-              <a:t>“Komodor already has Klaudia. Why KAOP?”</a:t>
-            </a:r>
-          </a:p>
-        </p:txBody>
-      </p:sp>
-      <p:sp>
-        <p:nvSpPr>
-          <p:cNvPr id="10" name="TextBox 9"/>
-          <p:cNvSpPr txBox="1"/>
-          <p:nvPr/>
-        </p:nvSpPr>
-        <p:spPr>
-          <a:xfrm>
-            <a:off x="4754880" y="2404872"/>
-            <a:ext cx="6766560" cy="713232"/>
+              <a:t>KAOP docs: security and governance</a:t>
+            </a:r>
+          </a:p>
+        </p:txBody>
+      </p:sp>
+      <p:sp>
+        <p:nvSpPr>
+          <p:cNvPr id="11" name="TextBox 10"/>
+          <p:cNvSpPr txBox="1"/>
+          <p:nvPr/>
+        </p:nvSpPr>
+        <p:spPr>
+          <a:xfrm>
+            <a:off x="4754880" y="2770632"/>
+            <a:ext cx="6766560" cy="530352"/>
           </a:xfrm>
           <a:prstGeom prst="rect">
             <a:avLst/>
@@ -13287,27 +13137,27 @@
               </a:lnSpc>
             </a:pPr>
             <a:r>
-              <a:rPr sz="1400" b="0">
+              <a:rPr sz="1500" b="0">
                 <a:solidFill>
                   <a:srgbClr val="475569"/>
                 </a:solidFill>
                 <a:latin typeface="Arial"/>
               </a:rPr>
-              <a:t>Klaudia is Komodor's AI SRE. KAOP is the control center for all your agents: Klaudia-based, Komodor's and your own.</a:t>
-            </a:r>
-          </a:p>
-        </p:txBody>
-      </p:sp>
-      <p:sp>
-        <p:nvSpPr>
-          <p:cNvPr id="11" name="Rounded Rectangle 10"/>
+              <a:t>The six layers, approvals, audit log, Access explorer.</a:t>
+            </a:r>
+          </a:p>
+        </p:txBody>
+      </p:sp>
+      <p:sp>
+        <p:nvSpPr>
+          <p:cNvPr id="12" name="Rounded Rectangle 11"/>
           <p:cNvSpPr/>
           <p:nvPr/>
         </p:nvSpPr>
         <p:spPr>
           <a:xfrm>
-            <a:off x="548640" y="3255264"/>
-            <a:ext cx="11091672" cy="804672"/>
+            <a:off x="548640" y="3438144"/>
+            <a:ext cx="11091672" cy="621792"/>
           </a:xfrm>
           <a:prstGeom prst="roundRect">
             <a:avLst>
@@ -13348,14 +13198,14 @@
       </p:sp>
       <p:sp>
         <p:nvSpPr>
-          <p:cNvPr id="12" name="TextBox 11"/>
-          <p:cNvSpPr txBox="1"/>
-          <p:nvPr/>
-        </p:nvSpPr>
-        <p:spPr>
-          <a:xfrm>
-            <a:off x="777240" y="3300984"/>
-            <a:ext cx="3931920" cy="713232"/>
+          <p:cNvPr id="13" name="TextBox 12"/>
+          <p:cNvSpPr txBox="1"/>
+          <p:nvPr/>
+        </p:nvSpPr>
+        <p:spPr>
+          <a:xfrm>
+            <a:off x="777240" y="3483864"/>
+            <a:ext cx="3931920" cy="530352"/>
           </a:xfrm>
           <a:prstGeom prst="rect">
             <a:avLst/>
@@ -13380,21 +13230,21 @@
                 </a:solidFill>
                 <a:latin typeface="Arial"/>
               </a:rPr>
-              <a:t>“What if the agent is wrong?”</a:t>
-            </a:r>
-          </a:p>
-        </p:txBody>
-      </p:sp>
-      <p:sp>
-        <p:nvSpPr>
-          <p:cNvPr id="13" name="TextBox 12"/>
-          <p:cNvSpPr txBox="1"/>
-          <p:nvPr/>
-        </p:nvSpPr>
-        <p:spPr>
-          <a:xfrm>
-            <a:off x="4754880" y="3300984"/>
-            <a:ext cx="6766560" cy="713232"/>
+              <a:t>KAOP docs: catalog, knowledge base, evaluations</a:t>
+            </a:r>
+          </a:p>
+        </p:txBody>
+      </p:sp>
+      <p:sp>
+        <p:nvSpPr>
+          <p:cNvPr id="14" name="TextBox 13"/>
+          <p:cNvSpPr txBox="1"/>
+          <p:nvPr/>
+        </p:nvSpPr>
+        <p:spPr>
+          <a:xfrm>
+            <a:off x="4754880" y="3483864"/>
+            <a:ext cx="6766560" cy="530352"/>
           </a:xfrm>
           <a:prstGeom prst="rect">
             <a:avLst/>
@@ -13413,27 +13263,27 @@
               </a:lnSpc>
             </a:pPr>
             <a:r>
-              <a:rPr sz="1400" b="0">
+              <a:rPr sz="1500" b="0">
                 <a:solidFill>
                   <a:srgbClr val="475569"/>
                 </a:solidFill>
                 <a:latin typeface="Arial"/>
               </a:rPr>
-              <a:t>It separates what it saw from what it guessed, every change needs a person, and KAOP can grade runs with an evaluator.</a:t>
-            </a:r>
-          </a:p>
-        </p:txBody>
-      </p:sp>
-      <p:sp>
-        <p:nvSpPr>
-          <p:cNvPr id="14" name="Rounded Rectangle 13"/>
+              <a:t>What each agent does, where it stops, and how runs are graded.</a:t>
+            </a:r>
+          </a:p>
+        </p:txBody>
+      </p:sp>
+      <p:sp>
+        <p:nvSpPr>
+          <p:cNvPr id="15" name="Rounded Rectangle 14"/>
           <p:cNvSpPr/>
           <p:nvPr/>
         </p:nvSpPr>
         <p:spPr>
           <a:xfrm>
             <a:off x="548640" y="4151376"/>
-            <a:ext cx="11091672" cy="804672"/>
+            <a:ext cx="11091672" cy="621792"/>
           </a:xfrm>
           <a:prstGeom prst="roundRect">
             <a:avLst>
@@ -13474,14 +13324,14 @@
       </p:sp>
       <p:sp>
         <p:nvSpPr>
-          <p:cNvPr id="15" name="TextBox 14"/>
+          <p:cNvPr id="16" name="TextBox 15"/>
           <p:cNvSpPr txBox="1"/>
           <p:nvPr/>
         </p:nvSpPr>
         <p:spPr>
           <a:xfrm>
             <a:off x="777240" y="4197096"/>
-            <a:ext cx="3931920" cy="713232"/>
+            <a:ext cx="3931920" cy="530352"/>
           </a:xfrm>
           <a:prstGeom prst="rect">
             <a:avLst/>
@@ -13506,21 +13356,21 @@
                 </a:solidFill>
                 <a:latin typeface="Arial"/>
               </a:rPr>
-              <a:t>“How long does onboarding take?”</a:t>
-            </a:r>
-          </a:p>
-        </p:txBody>
-      </p:sp>
-      <p:sp>
-        <p:nvSpPr>
-          <p:cNvPr id="16" name="TextBox 15"/>
+              <a:t>KAOP docs: incident module</a:t>
+            </a:r>
+          </a:p>
+        </p:txBody>
+      </p:sp>
+      <p:sp>
+        <p:nvSpPr>
+          <p:cNvPr id="17" name="TextBox 16"/>
           <p:cNvSpPr txBox="1"/>
           <p:nvPr/>
         </p:nvSpPr>
         <p:spPr>
           <a:xfrm>
             <a:off x="4754880" y="4197096"/>
-            <a:ext cx="6766560" cy="713232"/>
+            <a:ext cx="6766560" cy="530352"/>
           </a:xfrm>
           <a:prstGeom prst="rect">
             <a:avLst/>
@@ -13539,27 +13389,27 @@
               </a:lnSpc>
             </a:pPr>
             <a:r>
-              <a:rPr sz="1400" b="0">
+              <a:rPr sz="1500" b="0">
                 <a:solidFill>
                   <a:srgbClr val="475569"/>
                 </a:solidFill>
                 <a:latin typeface="Arial"/>
               </a:rPr>
-              <a:t>Catalog agents deploy in minutes. The real time goes into agreeing the workflow, the owner and the guardrails, which is why I'd start with a scoping session.</a:t>
-            </a:r>
-          </a:p>
-        </p:txBody>
-      </p:sp>
-      <p:sp>
-        <p:nvSpPr>
-          <p:cNvPr id="17" name="Rounded Rectangle 16"/>
+              <a:t>The alert-to-remediation workflow.</a:t>
+            </a:r>
+          </a:p>
+        </p:txBody>
+      </p:sp>
+      <p:sp>
+        <p:nvSpPr>
+          <p:cNvPr id="18" name="Rounded Rectangle 17"/>
           <p:cNvSpPr/>
           <p:nvPr/>
         </p:nvSpPr>
         <p:spPr>
           <a:xfrm>
-            <a:off x="548640" y="5047488"/>
-            <a:ext cx="11091672" cy="804672"/>
+            <a:off x="548640" y="4864608"/>
+            <a:ext cx="11091672" cy="621792"/>
           </a:xfrm>
           <a:prstGeom prst="roundRect">
             <a:avLst>
@@ -13600,14 +13450,14 @@
       </p:sp>
       <p:sp>
         <p:nvSpPr>
-          <p:cNvPr id="18" name="TextBox 17"/>
-          <p:cNvSpPr txBox="1"/>
-          <p:nvPr/>
-        </p:nvSpPr>
-        <p:spPr>
-          <a:xfrm>
-            <a:off x="777240" y="5093207"/>
-            <a:ext cx="3931920" cy="713232"/>
+          <p:cNvPr id="19" name="TextBox 18"/>
+          <p:cNvSpPr txBox="1"/>
+          <p:nvPr/>
+        </p:nvSpPr>
+        <p:spPr>
+          <a:xfrm>
+            <a:off x="777240" y="4910328"/>
+            <a:ext cx="3931920" cy="530352"/>
           </a:xfrm>
           <a:prstGeom prst="rect">
             <a:avLst/>
@@ -13632,21 +13482,21 @@
                 </a:solidFill>
                 <a:latin typeface="Arial"/>
               </a:rPr>
-              <a:t>“What does it cost?”</a:t>
-            </a:r>
-          </a:p>
-        </p:txBody>
-      </p:sp>
-      <p:sp>
-        <p:nvSpPr>
-          <p:cNvPr id="19" name="TextBox 18"/>
-          <p:cNvSpPr txBox="1"/>
-          <p:nvPr/>
-        </p:nvSpPr>
-        <p:spPr>
-          <a:xfrm>
-            <a:off x="4754880" y="5093207"/>
-            <a:ext cx="6766560" cy="713232"/>
+              <a:t>This lab</a:t>
+            </a:r>
+          </a:p>
+        </p:txBody>
+      </p:sp>
+      <p:sp>
+        <p:nvSpPr>
+          <p:cNvPr id="20" name="TextBox 19"/>
+          <p:cNvSpPr txBox="1"/>
+          <p:nvPr/>
+        </p:nvSpPr>
+        <p:spPr>
+          <a:xfrm>
+            <a:off x="4754880" y="4910328"/>
+            <a:ext cx="6766560" cy="530352"/>
           </a:xfrm>
           <a:prstGeom prst="rect">
             <a:avLst/>
@@ -13665,13 +13515,81 @@
               </a:lnSpc>
             </a:pPr>
             <a:r>
-              <a:rPr sz="1400" b="0">
+              <a:rPr sz="1500" b="0">
                 <a:solidFill>
                   <a:srgbClr val="475569"/>
                 </a:solidFill>
                 <a:latin typeface="Arial"/>
               </a:rPr>
-              <a:t>Every run shows its cost, and budgets block new runs at a limit. We'd agree a budget in the scoping session and track cost per useful investigation.</a:t>
+              <a:t>A real fault, a real alert, permissions verified, fix measured.</a:t>
+            </a:r>
+          </a:p>
+        </p:txBody>
+      </p:sp>
+      <p:sp>
+        <p:nvSpPr>
+          <p:cNvPr id="21" name="Rounded Rectangle 20"/>
+          <p:cNvSpPr/>
+          <p:nvPr/>
+        </p:nvSpPr>
+        <p:spPr>
+          <a:xfrm>
+            <a:off x="548640" y="5852160"/>
+            <a:ext cx="11091672" cy="603504"/>
+          </a:xfrm>
+          <a:prstGeom prst="roundRect">
+            <a:avLst>
+              <a:gd name="adj" fmla="val 12000"/>
+            </a:avLst>
+          </a:prstGeom>
+          <a:solidFill>
+            <a:srgbClr val="0B1220"/>
+          </a:solidFill>
+          <a:ln>
+            <a:noFill/>
+          </a:ln>
+          <a:effectLst/>
+        </p:spPr>
+        <p:style>
+          <a:lnRef idx="1">
+            <a:schemeClr val="accent1"/>
+          </a:lnRef>
+          <a:fillRef idx="3">
+            <a:schemeClr val="accent1"/>
+          </a:fillRef>
+          <a:effectRef idx="2">
+            <a:schemeClr val="accent1"/>
+          </a:effectRef>
+          <a:fontRef idx="minor">
+            <a:schemeClr val="lt1"/>
+          </a:fontRef>
+        </p:style>
+        <p:txBody>
+          <a:bodyPr rtlCol="0" anchor="ctr" wrap="square" lIns="292608" rIns="73152" tIns="36576" bIns="36576"/>
+          <a:lstStyle/>
+          <a:p>
+            <a:pPr algn="l">
+              <a:lnSpc>
+                <a:spcPct val="110000"/>
+              </a:lnSpc>
+            </a:pPr>
+            <a:r>
+              <a:rPr sz="1200" b="1">
+                <a:solidFill>
+                  <a:srgbClr val="A5B4FC"/>
+                </a:solidFill>
+                <a:latin typeface="Arial"/>
+              </a:rPr>
+              <a:t>APPROACH   </a:t>
+            </a:r>
+            <a:r>
+              <a:rPr sz="1600" b="0">
+                <a:solidFill>
+                  <a:srgbClr val="FFFFFF"/>
+                </a:solidFill>
+                <a:latin typeface="Arial"/>
+              </a:rPr>
+              <a:t>Start from your challenges, prove it on a real incident, then agree the first step together.</a:t>
             </a:r>
           </a:p>
         </p:txBody>
@@ -13775,7 +13693,7 @@
                 </a:solidFill>
                 <a:latin typeface="Arial"/>
               </a:rPr>
-              <a:t>APPENDIX C</a:t>
+              <a:t>APPENDIX B</a:t>
             </a:r>
           </a:p>
         </p:txBody>
@@ -13814,177 +13732,21 @@
                 </a:solidFill>
                 <a:latin typeface="Arial"/>
               </a:rPr>
-              <a:t>Measured results</a:t>
-            </a:r>
-          </a:p>
-        </p:txBody>
-      </p:sp>
-      <p:sp>
-        <p:nvSpPr>
-          <p:cNvPr id="5" name="TextBox 4"/>
-          <p:cNvSpPr txBox="1"/>
-          <p:nvPr/>
-        </p:nvSpPr>
-        <p:spPr>
-          <a:xfrm>
-            <a:off x="548640" y="1371600"/>
-            <a:ext cx="11064240" cy="457200"/>
-          </a:xfrm>
-          <a:prstGeom prst="rect">
-            <a:avLst/>
-          </a:prstGeom>
-          <a:noFill/>
-        </p:spPr>
-        <p:txBody>
-          <a:bodyPr wrap="square" lIns="73152" rIns="73152" tIns="36576" bIns="36576" anchor="t">
-            <a:spAutoFit/>
-          </a:bodyPr>
-          <a:lstStyle/>
-          <a:p>
-            <a:pPr algn="l">
-              <a:lnSpc>
-                <a:spcPct val="110000"/>
-              </a:lnSpc>
-            </a:pPr>
-            <a:r>
-              <a:rPr sz="1700" b="0">
-                <a:solidFill>
-                  <a:srgbClr val="475569"/>
-                </a:solidFill>
-                <a:latin typeface="Arial"/>
-              </a:rPr>
-              <a:t>The same Redis outage, measured both ways.</a:t>
-            </a:r>
-          </a:p>
-        </p:txBody>
-      </p:sp>
-      <p:sp>
-        <p:nvSpPr>
-          <p:cNvPr id="6" name="TextBox 5"/>
-          <p:cNvSpPr txBox="1"/>
-          <p:nvPr/>
-        </p:nvSpPr>
-        <p:spPr>
-          <a:xfrm>
-            <a:off x="777240" y="1965960"/>
-            <a:ext cx="3474720" cy="320040"/>
-          </a:xfrm>
-          <a:prstGeom prst="rect">
-            <a:avLst/>
-          </a:prstGeom>
-          <a:noFill/>
-        </p:spPr>
-        <p:txBody>
-          <a:bodyPr wrap="square" lIns="73152" rIns="73152" tIns="36576" bIns="36576" anchor="ctr">
-            <a:spAutoFit/>
-          </a:bodyPr>
-          <a:lstStyle/>
-          <a:p>
-            <a:pPr algn="l">
-              <a:lnSpc>
-                <a:spcPct val="110000"/>
-              </a:lnSpc>
-            </a:pPr>
-            <a:r>
-              <a:rPr sz="1100" b="1">
-                <a:solidFill>
-                  <a:srgbClr val="94A3B8"/>
-                </a:solidFill>
-                <a:latin typeface="Arial"/>
-              </a:rPr>
-              <a:t/>
-            </a:r>
-          </a:p>
-        </p:txBody>
-      </p:sp>
-      <p:sp>
-        <p:nvSpPr>
-          <p:cNvPr id="7" name="TextBox 6"/>
-          <p:cNvSpPr txBox="1"/>
-          <p:nvPr/>
-        </p:nvSpPr>
-        <p:spPr>
-          <a:xfrm>
-            <a:off x="4343400" y="1965960"/>
-            <a:ext cx="3657600" cy="320040"/>
-          </a:xfrm>
-          <a:prstGeom prst="rect">
-            <a:avLst/>
-          </a:prstGeom>
-          <a:noFill/>
-        </p:spPr>
-        <p:txBody>
-          <a:bodyPr wrap="square" lIns="73152" rIns="73152" tIns="36576" bIns="36576" anchor="ctr">
-            <a:spAutoFit/>
-          </a:bodyPr>
-          <a:lstStyle/>
-          <a:p>
-            <a:pPr algn="l">
-              <a:lnSpc>
-                <a:spcPct val="110000"/>
-              </a:lnSpc>
-            </a:pPr>
-            <a:r>
-              <a:rPr sz="1100" b="1">
-                <a:solidFill>
-                  <a:srgbClr val="94A3B8"/>
-                </a:solidFill>
-                <a:latin typeface="Arial"/>
-              </a:rPr>
-              <a:t>Liveness checks Redis (bad)</a:t>
-            </a:r>
-          </a:p>
-        </p:txBody>
-      </p:sp>
-      <p:sp>
-        <p:nvSpPr>
-          <p:cNvPr id="8" name="TextBox 7"/>
-          <p:cNvSpPr txBox="1"/>
-          <p:nvPr/>
-        </p:nvSpPr>
-        <p:spPr>
-          <a:xfrm>
-            <a:off x="8046720" y="1965960"/>
-            <a:ext cx="3566160" cy="320040"/>
-          </a:xfrm>
-          <a:prstGeom prst="rect">
-            <a:avLst/>
-          </a:prstGeom>
-          <a:noFill/>
-        </p:spPr>
-        <p:txBody>
-          <a:bodyPr wrap="square" lIns="73152" rIns="73152" tIns="36576" bIns="36576" anchor="ctr">
-            <a:spAutoFit/>
-          </a:bodyPr>
-          <a:lstStyle/>
-          <a:p>
-            <a:pPr algn="l">
-              <a:lnSpc>
-                <a:spcPct val="110000"/>
-              </a:lnSpc>
-            </a:pPr>
-            <a:r>
-              <a:rPr sz="1100" b="1">
-                <a:solidFill>
-                  <a:srgbClr val="94A3B8"/>
-                </a:solidFill>
-                <a:latin typeface="Arial"/>
-              </a:rPr>
-              <a:t>Liveness checks the process (fix)</a:t>
-            </a:r>
-          </a:p>
-        </p:txBody>
-      </p:sp>
-      <p:sp>
-        <p:nvSpPr>
-          <p:cNvPr id="9" name="Rounded Rectangle 8"/>
+              <a:t>Common questions</a:t>
+            </a:r>
+          </a:p>
+        </p:txBody>
+      </p:sp>
+      <p:sp>
+        <p:nvSpPr>
+          <p:cNvPr id="5" name="Rounded Rectangle 4"/>
           <p:cNvSpPr/>
           <p:nvPr/>
         </p:nvSpPr>
         <p:spPr>
           <a:xfrm>
-            <a:off x="548640" y="2331720"/>
-            <a:ext cx="11091672" cy="530352"/>
+            <a:off x="548640" y="1463040"/>
+            <a:ext cx="11091672" cy="804672"/>
           </a:xfrm>
           <a:prstGeom prst="roundRect">
             <a:avLst>
@@ -14025,14 +13787,14 @@
       </p:sp>
       <p:sp>
         <p:nvSpPr>
-          <p:cNvPr id="10" name="TextBox 9"/>
-          <p:cNvSpPr txBox="1"/>
-          <p:nvPr/>
-        </p:nvSpPr>
-        <p:spPr>
-          <a:xfrm>
-            <a:off x="777240" y="2350008"/>
-            <a:ext cx="3474720" cy="493776"/>
+          <p:cNvPr id="6" name="TextBox 5"/>
+          <p:cNvSpPr txBox="1"/>
+          <p:nvPr/>
+        </p:nvSpPr>
+        <p:spPr>
+          <a:xfrm>
+            <a:off x="777240" y="1508760"/>
+            <a:ext cx="3931920" cy="713232"/>
           </a:xfrm>
           <a:prstGeom prst="rect">
             <a:avLst/>
@@ -14057,21 +13819,21 @@
                 </a:solidFill>
                 <a:latin typeface="Arial"/>
               </a:rPr>
-              <a:t>Times Kubernetes killed the healthy API</a:t>
-            </a:r>
-          </a:p>
-        </p:txBody>
-      </p:sp>
-      <p:sp>
-        <p:nvSpPr>
-          <p:cNvPr id="11" name="TextBox 10"/>
-          <p:cNvSpPr txBox="1"/>
-          <p:nvPr/>
-        </p:nvSpPr>
-        <p:spPr>
-          <a:xfrm>
-            <a:off x="4343400" y="2350008"/>
-            <a:ext cx="3657600" cy="493776"/>
+              <a:t>“We'll build this ourselves.”</a:t>
+            </a:r>
+          </a:p>
+        </p:txBody>
+      </p:sp>
+      <p:sp>
+        <p:nvSpPr>
+          <p:cNvPr id="7" name="TextBox 6"/>
+          <p:cNvSpPr txBox="1"/>
+          <p:nvPr/>
+        </p:nvSpPr>
+        <p:spPr>
+          <a:xfrm>
+            <a:off x="4754880" y="1508760"/>
+            <a:ext cx="6766560" cy="713232"/>
           </a:xfrm>
           <a:prstGeom prst="rect">
             <a:avLst/>
@@ -14090,66 +13852,27 @@
               </a:lnSpc>
             </a:pPr>
             <a:r>
-              <a:rPr sz="1500" b="0">
-                <a:solidFill>
-                  <a:srgbClr val="B91C1C"/>
-                </a:solidFill>
-                <a:latin typeface="Arial"/>
-              </a:rPr>
-              <a:t>5 in a 5-minute outage</a:t>
-            </a:r>
-          </a:p>
-        </p:txBody>
-      </p:sp>
-      <p:sp>
-        <p:nvSpPr>
-          <p:cNvPr id="12" name="TextBox 11"/>
-          <p:cNvSpPr txBox="1"/>
-          <p:nvPr/>
-        </p:nvSpPr>
-        <p:spPr>
-          <a:xfrm>
-            <a:off x="8046720" y="2350008"/>
-            <a:ext cx="3566160" cy="493776"/>
-          </a:xfrm>
-          <a:prstGeom prst="rect">
-            <a:avLst/>
-          </a:prstGeom>
-          <a:noFill/>
-        </p:spPr>
-        <p:txBody>
-          <a:bodyPr wrap="square" lIns="73152" rIns="73152" tIns="36576" bIns="36576" anchor="ctr">
-            <a:spAutoFit/>
-          </a:bodyPr>
-          <a:lstStyle/>
-          <a:p>
-            <a:pPr algn="l">
-              <a:lnSpc>
-                <a:spcPct val="110000"/>
-              </a:lnSpc>
-            </a:pPr>
-            <a:r>
-              <a:rPr sz="1500" b="0">
-                <a:solidFill>
-                  <a:srgbClr val="0F766E"/>
-                </a:solidFill>
-                <a:latin typeface="Arial"/>
-              </a:rPr>
-              <a:t>0</a:t>
-            </a:r>
-          </a:p>
-        </p:txBody>
-      </p:sp>
-      <p:sp>
-        <p:nvSpPr>
-          <p:cNvPr id="13" name="Rounded Rectangle 12"/>
+              <a:rPr sz="1400" b="0">
+                <a:solidFill>
+                  <a:srgbClr val="475569"/>
+                </a:solidFill>
+                <a:latin typeface="Arial"/>
+              </a:rPr>
+              <a:t>You can build an agent. The hard part is identity, approvals, audit, budgets and evaluation around every agent, for every team. That's the platform.</a:t>
+            </a:r>
+          </a:p>
+        </p:txBody>
+      </p:sp>
+      <p:sp>
+        <p:nvSpPr>
+          <p:cNvPr id="8" name="Rounded Rectangle 7"/>
           <p:cNvSpPr/>
           <p:nvPr/>
         </p:nvSpPr>
         <p:spPr>
           <a:xfrm>
-            <a:off x="548640" y="2935224"/>
-            <a:ext cx="11091672" cy="530352"/>
+            <a:off x="548640" y="2359152"/>
+            <a:ext cx="11091672" cy="804672"/>
           </a:xfrm>
           <a:prstGeom prst="roundRect">
             <a:avLst>
@@ -14190,14 +13913,14 @@
       </p:sp>
       <p:sp>
         <p:nvSpPr>
-          <p:cNvPr id="14" name="TextBox 13"/>
-          <p:cNvSpPr txBox="1"/>
-          <p:nvPr/>
-        </p:nvSpPr>
-        <p:spPr>
-          <a:xfrm>
-            <a:off x="777240" y="2953512"/>
-            <a:ext cx="3474720" cy="493776"/>
+          <p:cNvPr id="9" name="TextBox 8"/>
+          <p:cNvSpPr txBox="1"/>
+          <p:nvPr/>
+        </p:nvSpPr>
+        <p:spPr>
+          <a:xfrm>
+            <a:off x="777240" y="2404872"/>
+            <a:ext cx="3931920" cy="713232"/>
           </a:xfrm>
           <a:prstGeom prst="rect">
             <a:avLst/>
@@ -14222,21 +13945,21 @@
                 </a:solidFill>
                 <a:latin typeface="Arial"/>
               </a:rPr>
-              <a:t>Liveness failures</a:t>
-            </a:r>
-          </a:p>
-        </p:txBody>
-      </p:sp>
-      <p:sp>
-        <p:nvSpPr>
-          <p:cNvPr id="15" name="TextBox 14"/>
-          <p:cNvSpPr txBox="1"/>
-          <p:nvPr/>
-        </p:nvSpPr>
-        <p:spPr>
-          <a:xfrm>
-            <a:off x="4343400" y="2953512"/>
-            <a:ext cx="3657600" cy="493776"/>
+              <a:t>“Komodor already has Klaudia. Why KAOP?”</a:t>
+            </a:r>
+          </a:p>
+        </p:txBody>
+      </p:sp>
+      <p:sp>
+        <p:nvSpPr>
+          <p:cNvPr id="10" name="TextBox 9"/>
+          <p:cNvSpPr txBox="1"/>
+          <p:nvPr/>
+        </p:nvSpPr>
+        <p:spPr>
+          <a:xfrm>
+            <a:off x="4754880" y="2404872"/>
+            <a:ext cx="6766560" cy="713232"/>
           </a:xfrm>
           <a:prstGeom prst="rect">
             <a:avLst/>
@@ -14255,66 +13978,27 @@
               </a:lnSpc>
             </a:pPr>
             <a:r>
-              <a:rPr sz="1500" b="0">
-                <a:solidFill>
-                  <a:srgbClr val="B91C1C"/>
-                </a:solidFill>
-                <a:latin typeface="Arial"/>
-              </a:rPr>
-              <a:t>Yes</a:t>
-            </a:r>
-          </a:p>
-        </p:txBody>
-      </p:sp>
-      <p:sp>
-        <p:nvSpPr>
-          <p:cNvPr id="16" name="TextBox 15"/>
-          <p:cNvSpPr txBox="1"/>
-          <p:nvPr/>
-        </p:nvSpPr>
-        <p:spPr>
-          <a:xfrm>
-            <a:off x="8046720" y="2953512"/>
-            <a:ext cx="3566160" cy="493776"/>
-          </a:xfrm>
-          <a:prstGeom prst="rect">
-            <a:avLst/>
-          </a:prstGeom>
-          <a:noFill/>
-        </p:spPr>
-        <p:txBody>
-          <a:bodyPr wrap="square" lIns="73152" rIns="73152" tIns="36576" bIns="36576" anchor="ctr">
-            <a:spAutoFit/>
-          </a:bodyPr>
-          <a:lstStyle/>
-          <a:p>
-            <a:pPr algn="l">
-              <a:lnSpc>
-                <a:spcPct val="110000"/>
-              </a:lnSpc>
-            </a:pPr>
-            <a:r>
-              <a:rPr sz="1500" b="0">
-                <a:solidFill>
-                  <a:srgbClr val="0F766E"/>
-                </a:solidFill>
-                <a:latin typeface="Arial"/>
-              </a:rPr>
-              <a:t>None</a:t>
-            </a:r>
-          </a:p>
-        </p:txBody>
-      </p:sp>
-      <p:sp>
-        <p:nvSpPr>
-          <p:cNvPr id="17" name="Rounded Rectangle 16"/>
+              <a:rPr sz="1400" b="0">
+                <a:solidFill>
+                  <a:srgbClr val="475569"/>
+                </a:solidFill>
+                <a:latin typeface="Arial"/>
+              </a:rPr>
+              <a:t>Klaudia is Komodor's AI SRE. KAOP is the control center for all your agents: Klaudia-based, Komodor's and your own.</a:t>
+            </a:r>
+          </a:p>
+        </p:txBody>
+      </p:sp>
+      <p:sp>
+        <p:nvSpPr>
+          <p:cNvPr id="11" name="Rounded Rectangle 10"/>
           <p:cNvSpPr/>
           <p:nvPr/>
         </p:nvSpPr>
         <p:spPr>
           <a:xfrm>
-            <a:off x="548640" y="3538728"/>
-            <a:ext cx="11091672" cy="530352"/>
+            <a:off x="548640" y="3255264"/>
+            <a:ext cx="11091672" cy="804672"/>
           </a:xfrm>
           <a:prstGeom prst="roundRect">
             <a:avLst>
@@ -14355,14 +14039,14 @@
       </p:sp>
       <p:sp>
         <p:nvSpPr>
-          <p:cNvPr id="18" name="TextBox 17"/>
-          <p:cNvSpPr txBox="1"/>
-          <p:nvPr/>
-        </p:nvSpPr>
-        <p:spPr>
-          <a:xfrm>
-            <a:off x="777240" y="3557016"/>
-            <a:ext cx="3474720" cy="493776"/>
+          <p:cNvPr id="12" name="TextBox 11"/>
+          <p:cNvSpPr txBox="1"/>
+          <p:nvPr/>
+        </p:nvSpPr>
+        <p:spPr>
+          <a:xfrm>
+            <a:off x="777240" y="3300984"/>
+            <a:ext cx="3931920" cy="713232"/>
           </a:xfrm>
           <a:prstGeom prst="rect">
             <a:avLst/>
@@ -14387,21 +14071,21 @@
                 </a:solidFill>
                 <a:latin typeface="Arial"/>
               </a:rPr>
-              <a:t>Grafana restart alert</a:t>
-            </a:r>
-          </a:p>
-        </p:txBody>
-      </p:sp>
-      <p:sp>
-        <p:nvSpPr>
-          <p:cNvPr id="19" name="TextBox 18"/>
-          <p:cNvSpPr txBox="1"/>
-          <p:nvPr/>
-        </p:nvSpPr>
-        <p:spPr>
-          <a:xfrm>
-            <a:off x="4343400" y="3557016"/>
-            <a:ext cx="3657600" cy="493776"/>
+              <a:t>“What if the agent is wrong?”</a:t>
+            </a:r>
+          </a:p>
+        </p:txBody>
+      </p:sp>
+      <p:sp>
+        <p:nvSpPr>
+          <p:cNvPr id="13" name="TextBox 12"/>
+          <p:cNvSpPr txBox="1"/>
+          <p:nvPr/>
+        </p:nvSpPr>
+        <p:spPr>
+          <a:xfrm>
+            <a:off x="4754880" y="3300984"/>
+            <a:ext cx="6766560" cy="713232"/>
           </a:xfrm>
           <a:prstGeom prst="rect">
             <a:avLst/>
@@ -14420,66 +14104,27 @@
               </a:lnSpc>
             </a:pPr>
             <a:r>
-              <a:rPr sz="1500" b="0">
-                <a:solidFill>
-                  <a:srgbClr val="B91C1C"/>
-                </a:solidFill>
-                <a:latin typeface="Arial"/>
-              </a:rPr>
-              <a:t>Fired at +3 minutes</a:t>
-            </a:r>
-          </a:p>
-        </p:txBody>
-      </p:sp>
-      <p:sp>
-        <p:nvSpPr>
-          <p:cNvPr id="20" name="TextBox 19"/>
-          <p:cNvSpPr txBox="1"/>
-          <p:nvPr/>
-        </p:nvSpPr>
-        <p:spPr>
-          <a:xfrm>
-            <a:off x="8046720" y="3557016"/>
-            <a:ext cx="3566160" cy="493776"/>
-          </a:xfrm>
-          <a:prstGeom prst="rect">
-            <a:avLst/>
-          </a:prstGeom>
-          <a:noFill/>
-        </p:spPr>
-        <p:txBody>
-          <a:bodyPr wrap="square" lIns="73152" rIns="73152" tIns="36576" bIns="36576" anchor="ctr">
-            <a:spAutoFit/>
-          </a:bodyPr>
-          <a:lstStyle/>
-          <a:p>
-            <a:pPr algn="l">
-              <a:lnSpc>
-                <a:spcPct val="110000"/>
-              </a:lnSpc>
-            </a:pPr>
-            <a:r>
-              <a:rPr sz="1500" b="0">
-                <a:solidFill>
-                  <a:srgbClr val="0F766E"/>
-                </a:solidFill>
-                <a:latin typeface="Arial"/>
-              </a:rPr>
-              <a:t>Stayed Normal</a:t>
-            </a:r>
-          </a:p>
-        </p:txBody>
-      </p:sp>
-      <p:sp>
-        <p:nvSpPr>
-          <p:cNvPr id="21" name="Rounded Rectangle 20"/>
+              <a:rPr sz="1400" b="0">
+                <a:solidFill>
+                  <a:srgbClr val="475569"/>
+                </a:solidFill>
+                <a:latin typeface="Arial"/>
+              </a:rPr>
+              <a:t>It separates what it saw from what it guessed, every change needs a person, and KAOP can grade runs with an evaluator.</a:t>
+            </a:r>
+          </a:p>
+        </p:txBody>
+      </p:sp>
+      <p:sp>
+        <p:nvSpPr>
+          <p:cNvPr id="14" name="Rounded Rectangle 13"/>
           <p:cNvSpPr/>
           <p:nvPr/>
         </p:nvSpPr>
         <p:spPr>
           <a:xfrm>
-            <a:off x="548640" y="4142231"/>
-            <a:ext cx="11091672" cy="530352"/>
+            <a:off x="548640" y="4151376"/>
+            <a:ext cx="11091672" cy="804672"/>
           </a:xfrm>
           <a:prstGeom prst="roundRect">
             <a:avLst>
@@ -14520,14 +14165,14 @@
       </p:sp>
       <p:sp>
         <p:nvSpPr>
-          <p:cNvPr id="22" name="TextBox 21"/>
-          <p:cNvSpPr txBox="1"/>
-          <p:nvPr/>
-        </p:nvSpPr>
-        <p:spPr>
-          <a:xfrm>
-            <a:off x="777240" y="4160519"/>
-            <a:ext cx="3474720" cy="493776"/>
+          <p:cNvPr id="15" name="TextBox 14"/>
+          <p:cNvSpPr txBox="1"/>
+          <p:nvPr/>
+        </p:nvSpPr>
+        <p:spPr>
+          <a:xfrm>
+            <a:off x="777240" y="4197096"/>
+            <a:ext cx="3931920" cy="713232"/>
           </a:xfrm>
           <a:prstGeom prst="rect">
             <a:avLst/>
@@ -14552,21 +14197,21 @@
                 </a:solidFill>
                 <a:latin typeface="Arial"/>
               </a:rPr>
-              <a:t>API back after Redis returned</a:t>
-            </a:r>
-          </a:p>
-        </p:txBody>
-      </p:sp>
-      <p:sp>
-        <p:nvSpPr>
-          <p:cNvPr id="23" name="TextBox 22"/>
-          <p:cNvSpPr txBox="1"/>
-          <p:nvPr/>
-        </p:nvSpPr>
-        <p:spPr>
-          <a:xfrm>
-            <a:off x="4343400" y="4160519"/>
-            <a:ext cx="3657600" cy="493776"/>
+              <a:t>“How long does onboarding take?”</a:t>
+            </a:r>
+          </a:p>
+        </p:txBody>
+      </p:sp>
+      <p:sp>
+        <p:nvSpPr>
+          <p:cNvPr id="16" name="TextBox 15"/>
+          <p:cNvSpPr txBox="1"/>
+          <p:nvPr/>
+        </p:nvSpPr>
+        <p:spPr>
+          <a:xfrm>
+            <a:off x="4754880" y="4197096"/>
+            <a:ext cx="6766560" cy="713232"/>
           </a:xfrm>
           <a:prstGeom prst="rect">
             <a:avLst/>
@@ -14585,27 +14230,75 @@
               </a:lnSpc>
             </a:pPr>
             <a:r>
-              <a:rPr sz="1500" b="0">
-                <a:solidFill>
-                  <a:srgbClr val="B91C1C"/>
-                </a:solidFill>
-                <a:latin typeface="Arial"/>
-              </a:rPr>
-              <a:t>4.8 s to 3.6 min (restart back-off)</a:t>
-            </a:r>
-          </a:p>
-        </p:txBody>
-      </p:sp>
-      <p:sp>
-        <p:nvSpPr>
-          <p:cNvPr id="24" name="TextBox 23"/>
-          <p:cNvSpPr txBox="1"/>
-          <p:nvPr/>
-        </p:nvSpPr>
-        <p:spPr>
-          <a:xfrm>
-            <a:off x="8046720" y="4160519"/>
-            <a:ext cx="3566160" cy="493776"/>
+              <a:rPr sz="1400" b="0">
+                <a:solidFill>
+                  <a:srgbClr val="475569"/>
+                </a:solidFill>
+                <a:latin typeface="Arial"/>
+              </a:rPr>
+              <a:t>Catalog agents deploy in minutes. The real time goes into agreeing the workflow, the owner and the guardrails, which is why I'd start with a scoping session.</a:t>
+            </a:r>
+          </a:p>
+        </p:txBody>
+      </p:sp>
+      <p:sp>
+        <p:nvSpPr>
+          <p:cNvPr id="17" name="Rounded Rectangle 16"/>
+          <p:cNvSpPr/>
+          <p:nvPr/>
+        </p:nvSpPr>
+        <p:spPr>
+          <a:xfrm>
+            <a:off x="548640" y="5047488"/>
+            <a:ext cx="11091672" cy="804672"/>
+          </a:xfrm>
+          <a:prstGeom prst="roundRect">
+            <a:avLst>
+              <a:gd name="adj" fmla="val 6000"/>
+            </a:avLst>
+          </a:prstGeom>
+          <a:solidFill>
+            <a:srgbClr val="FFFFFF"/>
+          </a:solidFill>
+          <a:ln w="12700">
+            <a:solidFill>
+              <a:srgbClr val="E2E8F0"/>
+            </a:solidFill>
+          </a:ln>
+          <a:effectLst/>
+        </p:spPr>
+        <p:style>
+          <a:lnRef idx="1">
+            <a:schemeClr val="accent1"/>
+          </a:lnRef>
+          <a:fillRef idx="3">
+            <a:schemeClr val="accent1"/>
+          </a:fillRef>
+          <a:effectRef idx="2">
+            <a:schemeClr val="accent1"/>
+          </a:effectRef>
+          <a:fontRef idx="minor">
+            <a:schemeClr val="lt1"/>
+          </a:fontRef>
+        </p:style>
+        <p:txBody>
+          <a:bodyPr rtlCol="0" anchor="ctr"/>
+          <a:lstStyle/>
+          <a:p>
+            <a:pPr algn="ctr"/>
+          </a:p>
+        </p:txBody>
+      </p:sp>
+      <p:sp>
+        <p:nvSpPr>
+          <p:cNvPr id="18" name="TextBox 17"/>
+          <p:cNvSpPr txBox="1"/>
+          <p:nvPr/>
+        </p:nvSpPr>
+        <p:spPr>
+          <a:xfrm>
+            <a:off x="777240" y="5093207"/>
+            <a:ext cx="3931920" cy="713232"/>
           </a:xfrm>
           <a:prstGeom prst="rect">
             <a:avLst/>
@@ -14624,35 +14317,35 @@
               </a:lnSpc>
             </a:pPr>
             <a:r>
-              <a:rPr sz="1500" b="0">
-                <a:solidFill>
-                  <a:srgbClr val="0F766E"/>
-                </a:solidFill>
-                <a:latin typeface="Arial"/>
-              </a:rPr>
-              <a:t>6.5 s</a:t>
-            </a:r>
-          </a:p>
-        </p:txBody>
-      </p:sp>
-      <p:sp>
-        <p:nvSpPr>
-          <p:cNvPr id="25" name="TextBox 24"/>
-          <p:cNvSpPr txBox="1"/>
-          <p:nvPr/>
-        </p:nvSpPr>
-        <p:spPr>
-          <a:xfrm>
-            <a:off x="548640" y="5897880"/>
-            <a:ext cx="11064240" cy="457200"/>
-          </a:xfrm>
-          <a:prstGeom prst="rect">
-            <a:avLst/>
-          </a:prstGeom>
-          <a:noFill/>
-        </p:spPr>
-        <p:txBody>
-          <a:bodyPr wrap="square" lIns="73152" rIns="73152" tIns="36576" bIns="36576" anchor="t">
+              <a:rPr sz="1500" b="1">
+                <a:solidFill>
+                  <a:srgbClr val="0F172A"/>
+                </a:solidFill>
+                <a:latin typeface="Arial"/>
+              </a:rPr>
+              <a:t>“What does it cost?”</a:t>
+            </a:r>
+          </a:p>
+        </p:txBody>
+      </p:sp>
+      <p:sp>
+        <p:nvSpPr>
+          <p:cNvPr id="19" name="TextBox 18"/>
+          <p:cNvSpPr txBox="1"/>
+          <p:nvPr/>
+        </p:nvSpPr>
+        <p:spPr>
+          <a:xfrm>
+            <a:off x="4754880" y="5093207"/>
+            <a:ext cx="6766560" cy="713232"/>
+          </a:xfrm>
+          <a:prstGeom prst="rect">
+            <a:avLst/>
+          </a:prstGeom>
+          <a:noFill/>
+        </p:spPr>
+        <p:txBody>
+          <a:bodyPr wrap="square" lIns="73152" rIns="73152" tIns="36576" bIns="36576" anchor="ctr">
             <a:spAutoFit/>
           </a:bodyPr>
           <a:lstStyle/>
@@ -14663,13 +14356,13 @@
               </a:lnSpc>
             </a:pPr>
             <a:r>
-              <a:rPr sz="1100" b="0">
-                <a:solidFill>
-                  <a:srgbClr val="94A3B8"/>
-                </a:solidFill>
-                <a:latin typeface="Arial"/>
-              </a:rPr>
-              <a:t>Measured on 2026-10-24 and 2026-10-25 on a single-node kind cluster. With the bad check, recovery waits on Kubernetes' restart back-off (10 s, doubling up to 5 minutes), so it depends on how long the outage lasted.</a:t>
+              <a:rPr sz="1400" b="0">
+                <a:solidFill>
+                  <a:srgbClr val="475569"/>
+                </a:solidFill>
+                <a:latin typeface="Arial"/>
+              </a:rPr>
+              <a:t>Every run shows its cost, and budgets block new runs at a limit. We'd agree a budget in the scoping session and track cost per useful investigation.</a:t>
             </a:r>
           </a:p>
         </p:txBody>
@@ -14773,6 +14466,1004 @@
                 </a:solidFill>
                 <a:latin typeface="Arial"/>
               </a:rPr>
+              <a:t>APPENDIX C</a:t>
+            </a:r>
+          </a:p>
+        </p:txBody>
+      </p:sp>
+      <p:sp>
+        <p:nvSpPr>
+          <p:cNvPr id="4" name="TextBox 3"/>
+          <p:cNvSpPr txBox="1"/>
+          <p:nvPr/>
+        </p:nvSpPr>
+        <p:spPr>
+          <a:xfrm>
+            <a:off x="548640" y="658368"/>
+            <a:ext cx="11064240" cy="731520"/>
+          </a:xfrm>
+          <a:prstGeom prst="rect">
+            <a:avLst/>
+          </a:prstGeom>
+          <a:noFill/>
+        </p:spPr>
+        <p:txBody>
+          <a:bodyPr wrap="square" lIns="73152" rIns="73152" tIns="36576" bIns="36576" anchor="t">
+            <a:spAutoFit/>
+          </a:bodyPr>
+          <a:lstStyle/>
+          <a:p>
+            <a:pPr algn="l">
+              <a:lnSpc>
+                <a:spcPct val="110000"/>
+              </a:lnSpc>
+            </a:pPr>
+            <a:r>
+              <a:rPr sz="3200" b="1">
+                <a:solidFill>
+                  <a:srgbClr val="0F172A"/>
+                </a:solidFill>
+                <a:latin typeface="Arial"/>
+              </a:rPr>
+              <a:t>Measured results</a:t>
+            </a:r>
+          </a:p>
+        </p:txBody>
+      </p:sp>
+      <p:sp>
+        <p:nvSpPr>
+          <p:cNvPr id="5" name="TextBox 4"/>
+          <p:cNvSpPr txBox="1"/>
+          <p:nvPr/>
+        </p:nvSpPr>
+        <p:spPr>
+          <a:xfrm>
+            <a:off x="548640" y="1371600"/>
+            <a:ext cx="11064240" cy="457200"/>
+          </a:xfrm>
+          <a:prstGeom prst="rect">
+            <a:avLst/>
+          </a:prstGeom>
+          <a:noFill/>
+        </p:spPr>
+        <p:txBody>
+          <a:bodyPr wrap="square" lIns="73152" rIns="73152" tIns="36576" bIns="36576" anchor="t">
+            <a:spAutoFit/>
+          </a:bodyPr>
+          <a:lstStyle/>
+          <a:p>
+            <a:pPr algn="l">
+              <a:lnSpc>
+                <a:spcPct val="110000"/>
+              </a:lnSpc>
+            </a:pPr>
+            <a:r>
+              <a:rPr sz="1700" b="0">
+                <a:solidFill>
+                  <a:srgbClr val="475569"/>
+                </a:solidFill>
+                <a:latin typeface="Arial"/>
+              </a:rPr>
+              <a:t>The same Redis outage, measured both ways.</a:t>
+            </a:r>
+          </a:p>
+        </p:txBody>
+      </p:sp>
+      <p:sp>
+        <p:nvSpPr>
+          <p:cNvPr id="6" name="TextBox 5"/>
+          <p:cNvSpPr txBox="1"/>
+          <p:nvPr/>
+        </p:nvSpPr>
+        <p:spPr>
+          <a:xfrm>
+            <a:off x="777240" y="1965960"/>
+            <a:ext cx="3474720" cy="320040"/>
+          </a:xfrm>
+          <a:prstGeom prst="rect">
+            <a:avLst/>
+          </a:prstGeom>
+          <a:noFill/>
+        </p:spPr>
+        <p:txBody>
+          <a:bodyPr wrap="square" lIns="73152" rIns="73152" tIns="36576" bIns="36576" anchor="ctr">
+            <a:spAutoFit/>
+          </a:bodyPr>
+          <a:lstStyle/>
+          <a:p>
+            <a:pPr algn="l">
+              <a:lnSpc>
+                <a:spcPct val="110000"/>
+              </a:lnSpc>
+            </a:pPr>
+            <a:r>
+              <a:rPr sz="1100" b="1">
+                <a:solidFill>
+                  <a:srgbClr val="94A3B8"/>
+                </a:solidFill>
+                <a:latin typeface="Arial"/>
+              </a:rPr>
+              <a:t/>
+            </a:r>
+          </a:p>
+        </p:txBody>
+      </p:sp>
+      <p:sp>
+        <p:nvSpPr>
+          <p:cNvPr id="7" name="TextBox 6"/>
+          <p:cNvSpPr txBox="1"/>
+          <p:nvPr/>
+        </p:nvSpPr>
+        <p:spPr>
+          <a:xfrm>
+            <a:off x="4343400" y="1965960"/>
+            <a:ext cx="3657600" cy="320040"/>
+          </a:xfrm>
+          <a:prstGeom prst="rect">
+            <a:avLst/>
+          </a:prstGeom>
+          <a:noFill/>
+        </p:spPr>
+        <p:txBody>
+          <a:bodyPr wrap="square" lIns="73152" rIns="73152" tIns="36576" bIns="36576" anchor="ctr">
+            <a:spAutoFit/>
+          </a:bodyPr>
+          <a:lstStyle/>
+          <a:p>
+            <a:pPr algn="l">
+              <a:lnSpc>
+                <a:spcPct val="110000"/>
+              </a:lnSpc>
+            </a:pPr>
+            <a:r>
+              <a:rPr sz="1100" b="1">
+                <a:solidFill>
+                  <a:srgbClr val="94A3B8"/>
+                </a:solidFill>
+                <a:latin typeface="Arial"/>
+              </a:rPr>
+              <a:t>Liveness checks Redis (bad)</a:t>
+            </a:r>
+          </a:p>
+        </p:txBody>
+      </p:sp>
+      <p:sp>
+        <p:nvSpPr>
+          <p:cNvPr id="8" name="TextBox 7"/>
+          <p:cNvSpPr txBox="1"/>
+          <p:nvPr/>
+        </p:nvSpPr>
+        <p:spPr>
+          <a:xfrm>
+            <a:off x="8046720" y="1965960"/>
+            <a:ext cx="3566160" cy="320040"/>
+          </a:xfrm>
+          <a:prstGeom prst="rect">
+            <a:avLst/>
+          </a:prstGeom>
+          <a:noFill/>
+        </p:spPr>
+        <p:txBody>
+          <a:bodyPr wrap="square" lIns="73152" rIns="73152" tIns="36576" bIns="36576" anchor="ctr">
+            <a:spAutoFit/>
+          </a:bodyPr>
+          <a:lstStyle/>
+          <a:p>
+            <a:pPr algn="l">
+              <a:lnSpc>
+                <a:spcPct val="110000"/>
+              </a:lnSpc>
+            </a:pPr>
+            <a:r>
+              <a:rPr sz="1100" b="1">
+                <a:solidFill>
+                  <a:srgbClr val="94A3B8"/>
+                </a:solidFill>
+                <a:latin typeface="Arial"/>
+              </a:rPr>
+              <a:t>Liveness checks the process (fix)</a:t>
+            </a:r>
+          </a:p>
+        </p:txBody>
+      </p:sp>
+      <p:sp>
+        <p:nvSpPr>
+          <p:cNvPr id="9" name="Rounded Rectangle 8"/>
+          <p:cNvSpPr/>
+          <p:nvPr/>
+        </p:nvSpPr>
+        <p:spPr>
+          <a:xfrm>
+            <a:off x="548640" y="2331720"/>
+            <a:ext cx="11091672" cy="530352"/>
+          </a:xfrm>
+          <a:prstGeom prst="roundRect">
+            <a:avLst>
+              <a:gd name="adj" fmla="val 6000"/>
+            </a:avLst>
+          </a:prstGeom>
+          <a:solidFill>
+            <a:srgbClr val="FFFFFF"/>
+          </a:solidFill>
+          <a:ln w="12700">
+            <a:solidFill>
+              <a:srgbClr val="E2E8F0"/>
+            </a:solidFill>
+          </a:ln>
+          <a:effectLst/>
+        </p:spPr>
+        <p:style>
+          <a:lnRef idx="1">
+            <a:schemeClr val="accent1"/>
+          </a:lnRef>
+          <a:fillRef idx="3">
+            <a:schemeClr val="accent1"/>
+          </a:fillRef>
+          <a:effectRef idx="2">
+            <a:schemeClr val="accent1"/>
+          </a:effectRef>
+          <a:fontRef idx="minor">
+            <a:schemeClr val="lt1"/>
+          </a:fontRef>
+        </p:style>
+        <p:txBody>
+          <a:bodyPr rtlCol="0" anchor="ctr"/>
+          <a:lstStyle/>
+          <a:p>
+            <a:pPr algn="ctr"/>
+          </a:p>
+        </p:txBody>
+      </p:sp>
+      <p:sp>
+        <p:nvSpPr>
+          <p:cNvPr id="10" name="TextBox 9"/>
+          <p:cNvSpPr txBox="1"/>
+          <p:nvPr/>
+        </p:nvSpPr>
+        <p:spPr>
+          <a:xfrm>
+            <a:off x="777240" y="2350008"/>
+            <a:ext cx="3474720" cy="493776"/>
+          </a:xfrm>
+          <a:prstGeom prst="rect">
+            <a:avLst/>
+          </a:prstGeom>
+          <a:noFill/>
+        </p:spPr>
+        <p:txBody>
+          <a:bodyPr wrap="square" lIns="73152" rIns="73152" tIns="36576" bIns="36576" anchor="ctr">
+            <a:spAutoFit/>
+          </a:bodyPr>
+          <a:lstStyle/>
+          <a:p>
+            <a:pPr algn="l">
+              <a:lnSpc>
+                <a:spcPct val="110000"/>
+              </a:lnSpc>
+            </a:pPr>
+            <a:r>
+              <a:rPr sz="1500" b="1">
+                <a:solidFill>
+                  <a:srgbClr val="0F172A"/>
+                </a:solidFill>
+                <a:latin typeface="Arial"/>
+              </a:rPr>
+              <a:t>Times Kubernetes killed the healthy API</a:t>
+            </a:r>
+          </a:p>
+        </p:txBody>
+      </p:sp>
+      <p:sp>
+        <p:nvSpPr>
+          <p:cNvPr id="11" name="TextBox 10"/>
+          <p:cNvSpPr txBox="1"/>
+          <p:nvPr/>
+        </p:nvSpPr>
+        <p:spPr>
+          <a:xfrm>
+            <a:off x="4343400" y="2350008"/>
+            <a:ext cx="3657600" cy="493776"/>
+          </a:xfrm>
+          <a:prstGeom prst="rect">
+            <a:avLst/>
+          </a:prstGeom>
+          <a:noFill/>
+        </p:spPr>
+        <p:txBody>
+          <a:bodyPr wrap="square" lIns="73152" rIns="73152" tIns="36576" bIns="36576" anchor="ctr">
+            <a:spAutoFit/>
+          </a:bodyPr>
+          <a:lstStyle/>
+          <a:p>
+            <a:pPr algn="l">
+              <a:lnSpc>
+                <a:spcPct val="110000"/>
+              </a:lnSpc>
+            </a:pPr>
+            <a:r>
+              <a:rPr sz="1500" b="0">
+                <a:solidFill>
+                  <a:srgbClr val="B91C1C"/>
+                </a:solidFill>
+                <a:latin typeface="Arial"/>
+              </a:rPr>
+              <a:t>5 in a 5-minute outage</a:t>
+            </a:r>
+          </a:p>
+        </p:txBody>
+      </p:sp>
+      <p:sp>
+        <p:nvSpPr>
+          <p:cNvPr id="12" name="TextBox 11"/>
+          <p:cNvSpPr txBox="1"/>
+          <p:nvPr/>
+        </p:nvSpPr>
+        <p:spPr>
+          <a:xfrm>
+            <a:off x="8046720" y="2350008"/>
+            <a:ext cx="3566160" cy="493776"/>
+          </a:xfrm>
+          <a:prstGeom prst="rect">
+            <a:avLst/>
+          </a:prstGeom>
+          <a:noFill/>
+        </p:spPr>
+        <p:txBody>
+          <a:bodyPr wrap="square" lIns="73152" rIns="73152" tIns="36576" bIns="36576" anchor="ctr">
+            <a:spAutoFit/>
+          </a:bodyPr>
+          <a:lstStyle/>
+          <a:p>
+            <a:pPr algn="l">
+              <a:lnSpc>
+                <a:spcPct val="110000"/>
+              </a:lnSpc>
+            </a:pPr>
+            <a:r>
+              <a:rPr sz="1500" b="0">
+                <a:solidFill>
+                  <a:srgbClr val="0F766E"/>
+                </a:solidFill>
+                <a:latin typeface="Arial"/>
+              </a:rPr>
+              <a:t>0</a:t>
+            </a:r>
+          </a:p>
+        </p:txBody>
+      </p:sp>
+      <p:sp>
+        <p:nvSpPr>
+          <p:cNvPr id="13" name="Rounded Rectangle 12"/>
+          <p:cNvSpPr/>
+          <p:nvPr/>
+        </p:nvSpPr>
+        <p:spPr>
+          <a:xfrm>
+            <a:off x="548640" y="2935224"/>
+            <a:ext cx="11091672" cy="530352"/>
+          </a:xfrm>
+          <a:prstGeom prst="roundRect">
+            <a:avLst>
+              <a:gd name="adj" fmla="val 6000"/>
+            </a:avLst>
+          </a:prstGeom>
+          <a:solidFill>
+            <a:srgbClr val="FFFFFF"/>
+          </a:solidFill>
+          <a:ln w="12700">
+            <a:solidFill>
+              <a:srgbClr val="E2E8F0"/>
+            </a:solidFill>
+          </a:ln>
+          <a:effectLst/>
+        </p:spPr>
+        <p:style>
+          <a:lnRef idx="1">
+            <a:schemeClr val="accent1"/>
+          </a:lnRef>
+          <a:fillRef idx="3">
+            <a:schemeClr val="accent1"/>
+          </a:fillRef>
+          <a:effectRef idx="2">
+            <a:schemeClr val="accent1"/>
+          </a:effectRef>
+          <a:fontRef idx="minor">
+            <a:schemeClr val="lt1"/>
+          </a:fontRef>
+        </p:style>
+        <p:txBody>
+          <a:bodyPr rtlCol="0" anchor="ctr"/>
+          <a:lstStyle/>
+          <a:p>
+            <a:pPr algn="ctr"/>
+          </a:p>
+        </p:txBody>
+      </p:sp>
+      <p:sp>
+        <p:nvSpPr>
+          <p:cNvPr id="14" name="TextBox 13"/>
+          <p:cNvSpPr txBox="1"/>
+          <p:nvPr/>
+        </p:nvSpPr>
+        <p:spPr>
+          <a:xfrm>
+            <a:off x="777240" y="2953512"/>
+            <a:ext cx="3474720" cy="493776"/>
+          </a:xfrm>
+          <a:prstGeom prst="rect">
+            <a:avLst/>
+          </a:prstGeom>
+          <a:noFill/>
+        </p:spPr>
+        <p:txBody>
+          <a:bodyPr wrap="square" lIns="73152" rIns="73152" tIns="36576" bIns="36576" anchor="ctr">
+            <a:spAutoFit/>
+          </a:bodyPr>
+          <a:lstStyle/>
+          <a:p>
+            <a:pPr algn="l">
+              <a:lnSpc>
+                <a:spcPct val="110000"/>
+              </a:lnSpc>
+            </a:pPr>
+            <a:r>
+              <a:rPr sz="1500" b="1">
+                <a:solidFill>
+                  <a:srgbClr val="0F172A"/>
+                </a:solidFill>
+                <a:latin typeface="Arial"/>
+              </a:rPr>
+              <a:t>Liveness failures</a:t>
+            </a:r>
+          </a:p>
+        </p:txBody>
+      </p:sp>
+      <p:sp>
+        <p:nvSpPr>
+          <p:cNvPr id="15" name="TextBox 14"/>
+          <p:cNvSpPr txBox="1"/>
+          <p:nvPr/>
+        </p:nvSpPr>
+        <p:spPr>
+          <a:xfrm>
+            <a:off x="4343400" y="2953512"/>
+            <a:ext cx="3657600" cy="493776"/>
+          </a:xfrm>
+          <a:prstGeom prst="rect">
+            <a:avLst/>
+          </a:prstGeom>
+          <a:noFill/>
+        </p:spPr>
+        <p:txBody>
+          <a:bodyPr wrap="square" lIns="73152" rIns="73152" tIns="36576" bIns="36576" anchor="ctr">
+            <a:spAutoFit/>
+          </a:bodyPr>
+          <a:lstStyle/>
+          <a:p>
+            <a:pPr algn="l">
+              <a:lnSpc>
+                <a:spcPct val="110000"/>
+              </a:lnSpc>
+            </a:pPr>
+            <a:r>
+              <a:rPr sz="1500" b="0">
+                <a:solidFill>
+                  <a:srgbClr val="B91C1C"/>
+                </a:solidFill>
+                <a:latin typeface="Arial"/>
+              </a:rPr>
+              <a:t>Yes</a:t>
+            </a:r>
+          </a:p>
+        </p:txBody>
+      </p:sp>
+      <p:sp>
+        <p:nvSpPr>
+          <p:cNvPr id="16" name="TextBox 15"/>
+          <p:cNvSpPr txBox="1"/>
+          <p:nvPr/>
+        </p:nvSpPr>
+        <p:spPr>
+          <a:xfrm>
+            <a:off x="8046720" y="2953512"/>
+            <a:ext cx="3566160" cy="493776"/>
+          </a:xfrm>
+          <a:prstGeom prst="rect">
+            <a:avLst/>
+          </a:prstGeom>
+          <a:noFill/>
+        </p:spPr>
+        <p:txBody>
+          <a:bodyPr wrap="square" lIns="73152" rIns="73152" tIns="36576" bIns="36576" anchor="ctr">
+            <a:spAutoFit/>
+          </a:bodyPr>
+          <a:lstStyle/>
+          <a:p>
+            <a:pPr algn="l">
+              <a:lnSpc>
+                <a:spcPct val="110000"/>
+              </a:lnSpc>
+            </a:pPr>
+            <a:r>
+              <a:rPr sz="1500" b="0">
+                <a:solidFill>
+                  <a:srgbClr val="0F766E"/>
+                </a:solidFill>
+                <a:latin typeface="Arial"/>
+              </a:rPr>
+              <a:t>None</a:t>
+            </a:r>
+          </a:p>
+        </p:txBody>
+      </p:sp>
+      <p:sp>
+        <p:nvSpPr>
+          <p:cNvPr id="17" name="Rounded Rectangle 16"/>
+          <p:cNvSpPr/>
+          <p:nvPr/>
+        </p:nvSpPr>
+        <p:spPr>
+          <a:xfrm>
+            <a:off x="548640" y="3538728"/>
+            <a:ext cx="11091672" cy="530352"/>
+          </a:xfrm>
+          <a:prstGeom prst="roundRect">
+            <a:avLst>
+              <a:gd name="adj" fmla="val 6000"/>
+            </a:avLst>
+          </a:prstGeom>
+          <a:solidFill>
+            <a:srgbClr val="FFFFFF"/>
+          </a:solidFill>
+          <a:ln w="12700">
+            <a:solidFill>
+              <a:srgbClr val="E2E8F0"/>
+            </a:solidFill>
+          </a:ln>
+          <a:effectLst/>
+        </p:spPr>
+        <p:style>
+          <a:lnRef idx="1">
+            <a:schemeClr val="accent1"/>
+          </a:lnRef>
+          <a:fillRef idx="3">
+            <a:schemeClr val="accent1"/>
+          </a:fillRef>
+          <a:effectRef idx="2">
+            <a:schemeClr val="accent1"/>
+          </a:effectRef>
+          <a:fontRef idx="minor">
+            <a:schemeClr val="lt1"/>
+          </a:fontRef>
+        </p:style>
+        <p:txBody>
+          <a:bodyPr rtlCol="0" anchor="ctr"/>
+          <a:lstStyle/>
+          <a:p>
+            <a:pPr algn="ctr"/>
+          </a:p>
+        </p:txBody>
+      </p:sp>
+      <p:sp>
+        <p:nvSpPr>
+          <p:cNvPr id="18" name="TextBox 17"/>
+          <p:cNvSpPr txBox="1"/>
+          <p:nvPr/>
+        </p:nvSpPr>
+        <p:spPr>
+          <a:xfrm>
+            <a:off x="777240" y="3557016"/>
+            <a:ext cx="3474720" cy="493776"/>
+          </a:xfrm>
+          <a:prstGeom prst="rect">
+            <a:avLst/>
+          </a:prstGeom>
+          <a:noFill/>
+        </p:spPr>
+        <p:txBody>
+          <a:bodyPr wrap="square" lIns="73152" rIns="73152" tIns="36576" bIns="36576" anchor="ctr">
+            <a:spAutoFit/>
+          </a:bodyPr>
+          <a:lstStyle/>
+          <a:p>
+            <a:pPr algn="l">
+              <a:lnSpc>
+                <a:spcPct val="110000"/>
+              </a:lnSpc>
+            </a:pPr>
+            <a:r>
+              <a:rPr sz="1500" b="1">
+                <a:solidFill>
+                  <a:srgbClr val="0F172A"/>
+                </a:solidFill>
+                <a:latin typeface="Arial"/>
+              </a:rPr>
+              <a:t>Grafana restart alert</a:t>
+            </a:r>
+          </a:p>
+        </p:txBody>
+      </p:sp>
+      <p:sp>
+        <p:nvSpPr>
+          <p:cNvPr id="19" name="TextBox 18"/>
+          <p:cNvSpPr txBox="1"/>
+          <p:nvPr/>
+        </p:nvSpPr>
+        <p:spPr>
+          <a:xfrm>
+            <a:off x="4343400" y="3557016"/>
+            <a:ext cx="3657600" cy="493776"/>
+          </a:xfrm>
+          <a:prstGeom prst="rect">
+            <a:avLst/>
+          </a:prstGeom>
+          <a:noFill/>
+        </p:spPr>
+        <p:txBody>
+          <a:bodyPr wrap="square" lIns="73152" rIns="73152" tIns="36576" bIns="36576" anchor="ctr">
+            <a:spAutoFit/>
+          </a:bodyPr>
+          <a:lstStyle/>
+          <a:p>
+            <a:pPr algn="l">
+              <a:lnSpc>
+                <a:spcPct val="110000"/>
+              </a:lnSpc>
+            </a:pPr>
+            <a:r>
+              <a:rPr sz="1500" b="0">
+                <a:solidFill>
+                  <a:srgbClr val="B91C1C"/>
+                </a:solidFill>
+                <a:latin typeface="Arial"/>
+              </a:rPr>
+              <a:t>Fired at +3 minutes</a:t>
+            </a:r>
+          </a:p>
+        </p:txBody>
+      </p:sp>
+      <p:sp>
+        <p:nvSpPr>
+          <p:cNvPr id="20" name="TextBox 19"/>
+          <p:cNvSpPr txBox="1"/>
+          <p:nvPr/>
+        </p:nvSpPr>
+        <p:spPr>
+          <a:xfrm>
+            <a:off x="8046720" y="3557016"/>
+            <a:ext cx="3566160" cy="493776"/>
+          </a:xfrm>
+          <a:prstGeom prst="rect">
+            <a:avLst/>
+          </a:prstGeom>
+          <a:noFill/>
+        </p:spPr>
+        <p:txBody>
+          <a:bodyPr wrap="square" lIns="73152" rIns="73152" tIns="36576" bIns="36576" anchor="ctr">
+            <a:spAutoFit/>
+          </a:bodyPr>
+          <a:lstStyle/>
+          <a:p>
+            <a:pPr algn="l">
+              <a:lnSpc>
+                <a:spcPct val="110000"/>
+              </a:lnSpc>
+            </a:pPr>
+            <a:r>
+              <a:rPr sz="1500" b="0">
+                <a:solidFill>
+                  <a:srgbClr val="0F766E"/>
+                </a:solidFill>
+                <a:latin typeface="Arial"/>
+              </a:rPr>
+              <a:t>Stayed Normal</a:t>
+            </a:r>
+          </a:p>
+        </p:txBody>
+      </p:sp>
+      <p:sp>
+        <p:nvSpPr>
+          <p:cNvPr id="21" name="Rounded Rectangle 20"/>
+          <p:cNvSpPr/>
+          <p:nvPr/>
+        </p:nvSpPr>
+        <p:spPr>
+          <a:xfrm>
+            <a:off x="548640" y="4142231"/>
+            <a:ext cx="11091672" cy="530352"/>
+          </a:xfrm>
+          <a:prstGeom prst="roundRect">
+            <a:avLst>
+              <a:gd name="adj" fmla="val 6000"/>
+            </a:avLst>
+          </a:prstGeom>
+          <a:solidFill>
+            <a:srgbClr val="FFFFFF"/>
+          </a:solidFill>
+          <a:ln w="12700">
+            <a:solidFill>
+              <a:srgbClr val="E2E8F0"/>
+            </a:solidFill>
+          </a:ln>
+          <a:effectLst/>
+        </p:spPr>
+        <p:style>
+          <a:lnRef idx="1">
+            <a:schemeClr val="accent1"/>
+          </a:lnRef>
+          <a:fillRef idx="3">
+            <a:schemeClr val="accent1"/>
+          </a:fillRef>
+          <a:effectRef idx="2">
+            <a:schemeClr val="accent1"/>
+          </a:effectRef>
+          <a:fontRef idx="minor">
+            <a:schemeClr val="lt1"/>
+          </a:fontRef>
+        </p:style>
+        <p:txBody>
+          <a:bodyPr rtlCol="0" anchor="ctr"/>
+          <a:lstStyle/>
+          <a:p>
+            <a:pPr algn="ctr"/>
+          </a:p>
+        </p:txBody>
+      </p:sp>
+      <p:sp>
+        <p:nvSpPr>
+          <p:cNvPr id="22" name="TextBox 21"/>
+          <p:cNvSpPr txBox="1"/>
+          <p:nvPr/>
+        </p:nvSpPr>
+        <p:spPr>
+          <a:xfrm>
+            <a:off x="777240" y="4160519"/>
+            <a:ext cx="3474720" cy="493776"/>
+          </a:xfrm>
+          <a:prstGeom prst="rect">
+            <a:avLst/>
+          </a:prstGeom>
+          <a:noFill/>
+        </p:spPr>
+        <p:txBody>
+          <a:bodyPr wrap="square" lIns="73152" rIns="73152" tIns="36576" bIns="36576" anchor="ctr">
+            <a:spAutoFit/>
+          </a:bodyPr>
+          <a:lstStyle/>
+          <a:p>
+            <a:pPr algn="l">
+              <a:lnSpc>
+                <a:spcPct val="110000"/>
+              </a:lnSpc>
+            </a:pPr>
+            <a:r>
+              <a:rPr sz="1500" b="1">
+                <a:solidFill>
+                  <a:srgbClr val="0F172A"/>
+                </a:solidFill>
+                <a:latin typeface="Arial"/>
+              </a:rPr>
+              <a:t>API back after Redis returned</a:t>
+            </a:r>
+          </a:p>
+        </p:txBody>
+      </p:sp>
+      <p:sp>
+        <p:nvSpPr>
+          <p:cNvPr id="23" name="TextBox 22"/>
+          <p:cNvSpPr txBox="1"/>
+          <p:nvPr/>
+        </p:nvSpPr>
+        <p:spPr>
+          <a:xfrm>
+            <a:off x="4343400" y="4160519"/>
+            <a:ext cx="3657600" cy="493776"/>
+          </a:xfrm>
+          <a:prstGeom prst="rect">
+            <a:avLst/>
+          </a:prstGeom>
+          <a:noFill/>
+        </p:spPr>
+        <p:txBody>
+          <a:bodyPr wrap="square" lIns="73152" rIns="73152" tIns="36576" bIns="36576" anchor="ctr">
+            <a:spAutoFit/>
+          </a:bodyPr>
+          <a:lstStyle/>
+          <a:p>
+            <a:pPr algn="l">
+              <a:lnSpc>
+                <a:spcPct val="110000"/>
+              </a:lnSpc>
+            </a:pPr>
+            <a:r>
+              <a:rPr sz="1500" b="0">
+                <a:solidFill>
+                  <a:srgbClr val="B91C1C"/>
+                </a:solidFill>
+                <a:latin typeface="Arial"/>
+              </a:rPr>
+              <a:t>4.8 s to 3.6 min (restart back-off)</a:t>
+            </a:r>
+          </a:p>
+        </p:txBody>
+      </p:sp>
+      <p:sp>
+        <p:nvSpPr>
+          <p:cNvPr id="24" name="TextBox 23"/>
+          <p:cNvSpPr txBox="1"/>
+          <p:nvPr/>
+        </p:nvSpPr>
+        <p:spPr>
+          <a:xfrm>
+            <a:off x="8046720" y="4160519"/>
+            <a:ext cx="3566160" cy="493776"/>
+          </a:xfrm>
+          <a:prstGeom prst="rect">
+            <a:avLst/>
+          </a:prstGeom>
+          <a:noFill/>
+        </p:spPr>
+        <p:txBody>
+          <a:bodyPr wrap="square" lIns="73152" rIns="73152" tIns="36576" bIns="36576" anchor="ctr">
+            <a:spAutoFit/>
+          </a:bodyPr>
+          <a:lstStyle/>
+          <a:p>
+            <a:pPr algn="l">
+              <a:lnSpc>
+                <a:spcPct val="110000"/>
+              </a:lnSpc>
+            </a:pPr>
+            <a:r>
+              <a:rPr sz="1500" b="0">
+                <a:solidFill>
+                  <a:srgbClr val="0F766E"/>
+                </a:solidFill>
+                <a:latin typeface="Arial"/>
+              </a:rPr>
+              <a:t>6.5 s</a:t>
+            </a:r>
+          </a:p>
+        </p:txBody>
+      </p:sp>
+      <p:sp>
+        <p:nvSpPr>
+          <p:cNvPr id="25" name="TextBox 24"/>
+          <p:cNvSpPr txBox="1"/>
+          <p:nvPr/>
+        </p:nvSpPr>
+        <p:spPr>
+          <a:xfrm>
+            <a:off x="548640" y="5897880"/>
+            <a:ext cx="11064240" cy="457200"/>
+          </a:xfrm>
+          <a:prstGeom prst="rect">
+            <a:avLst/>
+          </a:prstGeom>
+          <a:noFill/>
+        </p:spPr>
+        <p:txBody>
+          <a:bodyPr wrap="square" lIns="73152" rIns="73152" tIns="36576" bIns="36576" anchor="t">
+            <a:spAutoFit/>
+          </a:bodyPr>
+          <a:lstStyle/>
+          <a:p>
+            <a:pPr algn="l">
+              <a:lnSpc>
+                <a:spcPct val="110000"/>
+              </a:lnSpc>
+            </a:pPr>
+            <a:r>
+              <a:rPr sz="1100" b="0">
+                <a:solidFill>
+                  <a:srgbClr val="94A3B8"/>
+                </a:solidFill>
+                <a:latin typeface="Arial"/>
+              </a:rPr>
+              <a:t>Measured on 2026-10-24 and 2026-10-25 on a single-node kind cluster. With the bad check, recovery waits on Kubernetes' restart back-off (10 s, doubling up to 5 minutes), so it depends on how long the outage lasted.</a:t>
+            </a:r>
+          </a:p>
+        </p:txBody>
+      </p:sp>
+    </p:spTree>
+  </p:cSld>
+  <p:clrMapOvr>
+    <a:masterClrMapping/>
+  </p:clrMapOvr>
+</p:sld>
+</file>
+
+<file path=ppt/slides/slide19.xml><?xml version="1.0" encoding="utf-8"?>
+<p:sld xmlns:a="http://schemas.openxmlformats.org/drawingml/2006/main" xmlns:p="http://schemas.openxmlformats.org/presentationml/2006/main" xmlns:r="http://schemas.openxmlformats.org/officeDocument/2006/relationships">
+  <p:cSld>
+    <p:bg>
+      <p:bgPr>
+        <a:solidFill>
+          <a:srgbClr val="F8FAFC"/>
+        </a:solidFill>
+        <a:effectLst/>
+      </p:bgPr>
+    </p:bg>
+    <p:spTree>
+      <p:nvGrpSpPr>
+        <p:cNvPr id="1" name=""/>
+        <p:cNvGrpSpPr/>
+        <p:nvPr/>
+      </p:nvGrpSpPr>
+      <p:grpSpPr/>
+      <p:sp>
+        <p:nvSpPr>
+          <p:cNvPr id="2" name="TextBox 1"/>
+          <p:cNvSpPr txBox="1"/>
+          <p:nvPr/>
+        </p:nvSpPr>
+        <p:spPr>
+          <a:xfrm>
+            <a:off x="548640" y="320040"/>
+            <a:ext cx="7315200" cy="274320"/>
+          </a:xfrm>
+          <a:prstGeom prst="rect">
+            <a:avLst/>
+          </a:prstGeom>
+          <a:noFill/>
+        </p:spPr>
+        <p:txBody>
+          <a:bodyPr wrap="square" lIns="73152" rIns="73152" tIns="36576" bIns="36576" anchor="t">
+            <a:spAutoFit/>
+          </a:bodyPr>
+          <a:lstStyle/>
+          <a:p>
+            <a:pPr algn="l">
+              <a:lnSpc>
+                <a:spcPct val="110000"/>
+              </a:lnSpc>
+            </a:pPr>
+            <a:r>
+              <a:rPr sz="1000" b="1">
+                <a:solidFill>
+                  <a:srgbClr val="4F46E5"/>
+                </a:solidFill>
+                <a:latin typeface="Arial"/>
+              </a:rPr>
+              <a:t>APPENDIX</a:t>
+            </a:r>
+          </a:p>
+        </p:txBody>
+      </p:sp>
+      <p:sp>
+        <p:nvSpPr>
+          <p:cNvPr id="3" name="TextBox 2"/>
+          <p:cNvSpPr txBox="1"/>
+          <p:nvPr/>
+        </p:nvSpPr>
+        <p:spPr>
+          <a:xfrm>
+            <a:off x="9784080" y="320040"/>
+            <a:ext cx="1828800" cy="274320"/>
+          </a:xfrm>
+          <a:prstGeom prst="rect">
+            <a:avLst/>
+          </a:prstGeom>
+          <a:noFill/>
+        </p:spPr>
+        <p:txBody>
+          <a:bodyPr wrap="square" lIns="73152" rIns="73152" tIns="36576" bIns="36576" anchor="t">
+            <a:spAutoFit/>
+          </a:bodyPr>
+          <a:lstStyle/>
+          <a:p>
+            <a:pPr algn="r">
+              <a:lnSpc>
+                <a:spcPct val="110000"/>
+              </a:lnSpc>
+            </a:pPr>
+            <a:r>
+              <a:rPr sz="1000" b="0">
+                <a:solidFill>
+                  <a:srgbClr val="94A3B8"/>
+                </a:solidFill>
+                <a:latin typeface="Arial"/>
+              </a:rPr>
               <a:t>APPENDIX D</a:t>
             </a:r>
           </a:p>
@@ -15936,7 +16627,7 @@
                 </a:solidFill>
                 <a:latin typeface="Arial"/>
               </a:rPr>
-              <a:t>02 / 13</a:t>
+              <a:t>02 / 14</a:t>
             </a:r>
           </a:p>
         </p:txBody>
@@ -17086,7 +17777,7 @@
                 </a:solidFill>
                 <a:latin typeface="Arial"/>
               </a:rPr>
-              <a:t>03 / 13</a:t>
+              <a:t>03 / 14</a:t>
             </a:r>
           </a:p>
         </p:txBody>
@@ -17746,7 +18437,7 @@
                 </a:solidFill>
                 <a:latin typeface="Arial"/>
               </a:rPr>
-              <a:t>3 min</a:t>
+              <a:t>4 min</a:t>
             </a:r>
           </a:p>
         </p:txBody>
@@ -17785,7 +18476,7 @@
                 </a:solidFill>
                 <a:latin typeface="Arial"/>
               </a:rPr>
-              <a:t>A first step</a:t>
+              <a:t>Results, then a first step</a:t>
             </a:r>
           </a:p>
         </p:txBody>
@@ -17824,7 +18515,7 @@
                 </a:solidFill>
                 <a:latin typeface="Arial"/>
               </a:rPr>
-              <a:t>Shaped around your team.</a:t>
+              <a:t>What it's worth, and how to start.</a:t>
             </a:r>
           </a:p>
         </p:txBody>
@@ -18978,7 +19669,7 @@
                 </a:solidFill>
                 <a:latin typeface="Arial"/>
               </a:rPr>
-              <a:t>04 / 13</a:t>
+              <a:t>04 / 14</a:t>
             </a:r>
           </a:p>
         </p:txBody>
@@ -20519,7 +21210,7 @@
                 </a:solidFill>
                 <a:latin typeface="Arial"/>
               </a:rPr>
-              <a:t>05 / 13</a:t>
+              <a:t>05 / 14</a:t>
             </a:r>
           </a:p>
         </p:txBody>
@@ -20886,7 +21577,7 @@
                 </a:solidFill>
                 <a:latin typeface="Arial"/>
               </a:rPr>
-              <a:t>Start from 50+ ready agents</a:t>
+              <a:t>50+ ready agents and workflows</a:t>
             </a:r>
           </a:p>
         </p:txBody>
@@ -20925,7 +21616,7 @@
                 </a:solidFill>
                 <a:latin typeface="Arial"/>
               </a:rPr>
-              <a:t>Or bring your own. Same controls.</a:t>
+              <a:t>Or import your own: any framework, same controls.</a:t>
             </a:r>
           </a:p>
         </p:txBody>
@@ -22069,7 +22760,7 @@
                 </a:solidFill>
                 <a:latin typeface="Arial"/>
               </a:rPr>
-              <a:t>KAOP  ·  PLATFORM ENGINEERING</a:t>
+              <a:t>GUARDRAILS  ·  LIMITS A SYSTEM ENFORCES</a:t>
             </a:r>
           </a:p>
         </p:txBody>
@@ -22108,7 +22799,7 @@
                 </a:solidFill>
                 <a:latin typeface="Arial"/>
               </a:rPr>
-              <a:t>06 / 13</a:t>
+              <a:t>06 / 14</a:t>
             </a:r>
           </a:p>
         </p:txBody>
@@ -22186,7 +22877,7 @@
                 </a:solidFill>
                 <a:latin typeface="Arial"/>
               </a:rPr>
-              <a:t>KAOP governs an agent the way it governs a person.</a:t>
+              <a:t>An agent is governed the way a person is, by the same machinery.</a:t>
             </a:r>
           </a:p>
         </p:txBody>
@@ -22634,7 +23325,7 @@
                 </a:solidFill>
                 <a:latin typeface="Arial"/>
               </a:rPr>
-              <a:t>Only the access the job needs</a:t>
+              <a:t>Only what the job needs. Never sees a key</a:t>
             </a:r>
           </a:p>
         </p:txBody>
@@ -22819,7 +23510,7 @@
                 </a:solidFill>
                 <a:latin typeface="Arial"/>
               </a:rPr>
-              <a:t>No agent ships without an owner</a:t>
+              <a:t>Owner, budget and grading, by default</a:t>
             </a:r>
           </a:p>
         </p:txBody>
@@ -23004,7 +23695,7 @@
                 </a:solidFill>
                 <a:latin typeface="Arial"/>
               </a:rPr>
-              <a:t>Risky calls blocked, every run</a:t>
+              <a:t>Risky calls blocked or held, every run</a:t>
             </a:r>
           </a:p>
         </p:txBody>
@@ -23897,7 +24588,7 @@
                 </a:solidFill>
                 <a:latin typeface="Arial"/>
               </a:rPr>
-              <a:t>KAOP  ·  PLATFORM ENGINEERING</a:t>
+              <a:t>VISIBILITY  ·  ONE VIEW OF EVERY AGENT</a:t>
             </a:r>
           </a:p>
         </p:txBody>
@@ -23936,7 +24627,7 @@
                 </a:solidFill>
                 <a:latin typeface="Arial"/>
               </a:rPr>
-              <a:t>07 / 13</a:t>
+              <a:t>07 / 14</a:t>
             </a:r>
           </a:p>
         </p:txBody>
@@ -24485,7 +25176,7 @@
                 </a:solidFill>
                 <a:latin typeface="Arial"/>
               </a:rPr>
-              <a:t>Waiting on you</a:t>
+              <a:t>Attention</a:t>
             </a:r>
           </a:p>
         </p:txBody>
@@ -24524,7 +25215,7 @@
                 </a:solidFill>
                 <a:latin typeface="Arial"/>
               </a:rPr>
-              <a:t>Decisions that need a person.</a:t>
+              <a:t>Every decision waiting on a person.</a:t>
             </a:r>
           </a:p>
         </p:txBody>
@@ -24864,7 +25555,7 @@
                 </a:solidFill>
                 <a:latin typeface="Arial"/>
               </a:rPr>
-              <a:t>Cost per agent, with budgets.</a:t>
+              <a:t>Per run and per agent, with budgets.</a:t>
             </a:r>
           </a:p>
         </p:txBody>
@@ -25167,7 +25858,7 @@
                 </a:solidFill>
                 <a:latin typeface="Arial"/>
               </a:rPr>
-              <a:t>KAOP  ·  PLATFORM ENGINEERING</a:t>
+              <a:t>WORKFLOWS  ·  AGENTS WORKING AS ONE WORKFLOW</a:t>
             </a:r>
           </a:p>
         </p:txBody>
@@ -25206,7 +25897,7 @@
                 </a:solidFill>
                 <a:latin typeface="Arial"/>
               </a:rPr>
-              <a:t>08 / 13</a:t>
+              <a:t>08 / 14</a:t>
             </a:r>
           </a:p>
         </p:txBody>
@@ -25284,7 +25975,7 @@
                 </a:solidFill>
                 <a:latin typeface="Arial"/>
               </a:rPr>
-              <a:t>Built from KAOP catalog agents. No custom code.</a:t>
+              <a:t>KAOP's Production Alert Investigation workflow, from catalog agents. No custom code.</a:t>
             </a:r>
           </a:p>
         </p:txBody>
@@ -27427,7 +28118,7 @@
                 </a:solidFill>
                 <a:latin typeface="Arial"/>
               </a:rPr>
-              <a:t>KAOP  ·  PLATFORM ENGINEERING</a:t>
+              <a:t>GUARDRAILS  ·  THE PROOF</a:t>
             </a:r>
           </a:p>
         </p:txBody>
@@ -27466,7 +28157,7 @@
                 </a:solidFill>
                 <a:latin typeface="Arial"/>
               </a:rPr>
-              <a:t>09 / 13</a:t>
+              <a:t>09 / 14</a:t>
             </a:r>
           </a:p>
         </p:txBody>
@@ -27544,7 +28235,7 @@
                 </a:solidFill>
                 <a:latin typeface="Arial"/>
               </a:rPr>
-              <a:t>Least privilege per agent, enforced outside the agent.</a:t>
+              <a:t>Least privilege per agent, enforced outside the agent. Credentials stay with KAOP.</a:t>
             </a:r>
           </a:p>
         </p:txBody>

--- a/docs/presentation/KAOP_Customer_Pitch.pptx
+++ b/docs/presentation/KAOP_Customer_Pitch.pptx
@@ -3863,7 +3863,7 @@
                 <a:ea typeface="Aptos" pitchFamily="34" charset="-122"/>
                 <a:cs typeface="Aptos" pitchFamily="34" charset="-120"/>
               </a:rPr>
-              <a:t>Which workflow would be worth proving first?</a:t>
+              <a:t>Which workflow would you want to prove first?</a:t>
             </a:r>
             <a:endParaRPr lang="en-US" sz="2500" dirty="0"/>
           </a:p>
@@ -3904,7 +3904,7 @@
                 <a:ea typeface="Aptos" pitchFamily="34" charset="-122"/>
                 <a:cs typeface="Aptos" pitchFamily="34" charset="-120"/>
               </a:rPr>
-              <a:t>And who would lead the scoping session with us?</a:t>
+              <a:t>Who would be the right person to help us scope it?</a:t>
             </a:r>
             <a:endParaRPr lang="en-US" sz="1720" dirty="0"/>
           </a:p>
@@ -4416,7 +4416,7 @@
                 <a:ea typeface="Aptos" pitchFamily="34" charset="-122"/>
                 <a:cs typeface="Aptos" pitchFamily="34" charset="-120"/>
               </a:rPr>
-              <a:t>What would a first pilot need to show you?</a:t>
+              <a:t>What would that first pilot need to prove for you?</a:t>
             </a:r>
             <a:endParaRPr lang="en-US" sz="1700" dirty="0"/>
           </a:p>
@@ -6604,7 +6604,7 @@
                 <a:ea typeface="Aptos" pitchFamily="34" charset="-122"/>
                 <a:cs typeface="Aptos" pitchFamily="34" charset="-120"/>
               </a:rPr>
-              <a:t>Where does agent sprawl hurt your team first?</a:t>
+              <a:t>Where would agent sprawl hurt your team first?</a:t>
             </a:r>
             <a:endParaRPr lang="en-US" sz="3150" dirty="0"/>
           </a:p>
@@ -7046,7 +7046,7 @@
                 <a:ea typeface="Aptos" pitchFamily="34" charset="-122"/>
                 <a:cs typeface="Aptos" pitchFamily="34" charset="-120"/>
               </a:rPr>
-              <a:t>AUTHORITY</a:t>
+              <a:t>ACCESS</a:t>
             </a:r>
             <a:endParaRPr lang="en-US" sz="1230" dirty="0"/>
           </a:p>
@@ -7471,7 +7471,7 @@
                 <a:ea typeface="Aptos" pitchFamily="34" charset="-122"/>
                 <a:cs typeface="Aptos" pitchFamily="34" charset="-120"/>
               </a:rPr>
-              <a:t>Which of these is hardest to manage across your teams today?</a:t>
+              <a:t>Which would be hardest for your team to manage as usage grows?</a:t>
             </a:r>
             <a:endParaRPr lang="en-US" sz="2000" dirty="0"/>
           </a:p>

--- a/docs/presentation/KAOP_Customer_Pitch.pptx
+++ b/docs/presentation/KAOP_Customer_Pitch.pptx
@@ -6687,7 +6687,7 @@
         <p:spPr>
           <a:xfrm>
             <a:off x="676656" y="1938528"/>
-            <a:ext cx="3575304" cy="2468880"/>
+            <a:ext cx="3416469" cy="2468880"/>
           </a:xfrm>
           <a:prstGeom prst="roundRect">
             <a:avLst>
@@ -6695,11 +6695,11 @@
             </a:avLst>
           </a:prstGeom>
           <a:solidFill>
-            <a:srgbClr val="FFFFFF"/>
+            <a:srgbClr val="E3F6F4"/>
           </a:solidFill>
-          <a:ln w="10160">
+          <a:ln w="19050">
             <a:solidFill>
-              <a:srgbClr val="DCE5ED"/>
+              <a:srgbClr val="06AFA5"/>
             </a:solidFill>
             <a:prstDash val="solid"/>
           </a:ln>
@@ -6812,94 +6812,94 @@
             <a:r>
               <a:rPr lang="en-US" sz="1230" b="1" spc="100" kern="0" dirty="0">
                 <a:solidFill>
+                  <a:srgbClr val="05867E"/>
+                </a:solidFill>
+                <a:latin typeface="Aptos" pitchFamily="34" charset="0"/>
+                <a:ea typeface="Aptos" pitchFamily="34" charset="-122"/>
+                <a:cs typeface="Aptos" pitchFamily="34" charset="-120"/>
+              </a:rPr>
+              <a:t>OWNERSHIP</a:t>
+            </a:r>
+            <a:endParaRPr lang="en-US" sz="1230" dirty="0"/>
+          </a:p>
+        </p:txBody>
+      </p:sp>
+      <p:sp>
+        <p:nvSpPr>
+          <p:cNvPr id="12" name="Text 10"/>
+          <p:cNvSpPr/>
+          <p:nvPr/>
+        </p:nvSpPr>
+        <p:spPr>
+          <a:xfrm>
+            <a:off x="896112" y="2788920"/>
+            <a:ext cx="3010069" cy="429768"/>
+          </a:xfrm>
+          <a:prstGeom prst="rect">
+            <a:avLst/>
+          </a:prstGeom>
+          <a:noFill/>
+          <a:ln/>
+        </p:spPr>
+        <p:txBody>
+          <a:bodyPr wrap="square" lIns="254" tIns="254" rIns="254" bIns="254" rtlCol="0" anchor="ctr">
+            <a:normAutofit/>
+          </a:bodyPr>
+          <a:lstStyle/>
+          <a:p>
+            <a:pPr algn="l" indent="0" marL="0">
+              <a:buNone/>
+            </a:pPr>
+            <a:r>
+              <a:rPr lang="en-US" sz="1820" b="1" dirty="0">
+                <a:solidFill>
+                  <a:srgbClr val="132438"/>
+                </a:solidFill>
+                <a:latin typeface="Aptos" pitchFamily="34" charset="0"/>
+                <a:ea typeface="Aptos" pitchFamily="34" charset="-122"/>
+                <a:cs typeface="Aptos" pitchFamily="34" charset="-120"/>
+              </a:rPr>
+              <a:t>WHO OWNS IT?</a:t>
+            </a:r>
+            <a:endParaRPr lang="en-US" sz="1820" dirty="0"/>
+          </a:p>
+        </p:txBody>
+      </p:sp>
+      <p:sp>
+        <p:nvSpPr>
+          <p:cNvPr id="13" name="Text 11"/>
+          <p:cNvSpPr/>
+          <p:nvPr/>
+        </p:nvSpPr>
+        <p:spPr>
+          <a:xfrm>
+            <a:off x="896112" y="3447288"/>
+            <a:ext cx="3010069" cy="530352"/>
+          </a:xfrm>
+          <a:prstGeom prst="rect">
+            <a:avLst/>
+          </a:prstGeom>
+          <a:noFill/>
+          <a:ln/>
+        </p:spPr>
+        <p:txBody>
+          <a:bodyPr wrap="square" lIns="254" tIns="254" rIns="254" bIns="254" rtlCol="0" anchor="t">
+            <a:normAutofit/>
+          </a:bodyPr>
+          <a:lstStyle/>
+          <a:p>
+            <a:pPr algn="l" indent="0" marL="0">
+              <a:buNone/>
+            </a:pPr>
+            <a:r>
+              <a:rPr lang="en-US" sz="1510" dirty="0">
+                <a:solidFill>
                   <a:srgbClr val="536579"/>
                 </a:solidFill>
                 <a:latin typeface="Aptos" pitchFamily="34" charset="0"/>
                 <a:ea typeface="Aptos" pitchFamily="34" charset="-122"/>
                 <a:cs typeface="Aptos" pitchFamily="34" charset="-120"/>
               </a:rPr>
-              <a:t>OWNERSHIP</a:t>
-            </a:r>
-            <a:endParaRPr lang="en-US" sz="1230" dirty="0"/>
-          </a:p>
-        </p:txBody>
-      </p:sp>
-      <p:sp>
-        <p:nvSpPr>
-          <p:cNvPr id="12" name="Text 10"/>
-          <p:cNvSpPr/>
-          <p:nvPr/>
-        </p:nvSpPr>
-        <p:spPr>
-          <a:xfrm>
-            <a:off x="896112" y="2788920"/>
-            <a:ext cx="3154680" cy="429768"/>
-          </a:xfrm>
-          <a:prstGeom prst="rect">
-            <a:avLst/>
-          </a:prstGeom>
-          <a:noFill/>
-          <a:ln/>
-        </p:spPr>
-        <p:txBody>
-          <a:bodyPr wrap="square" lIns="254" tIns="254" rIns="254" bIns="254" rtlCol="0" anchor="ctr">
-            <a:normAutofit/>
-          </a:bodyPr>
-          <a:lstStyle/>
-          <a:p>
-            <a:pPr algn="l" indent="0" marL="0">
-              <a:buNone/>
-            </a:pPr>
-            <a:r>
-              <a:rPr lang="en-US" sz="1820" b="1" dirty="0">
-                <a:solidFill>
-                  <a:srgbClr val="132438"/>
-                </a:solidFill>
-                <a:latin typeface="Aptos" pitchFamily="34" charset="0"/>
-                <a:ea typeface="Aptos" pitchFamily="34" charset="-122"/>
-                <a:cs typeface="Aptos" pitchFamily="34" charset="-120"/>
-              </a:rPr>
-              <a:t>WHO OWNS IT?</a:t>
-            </a:r>
-            <a:endParaRPr lang="en-US" sz="1820" dirty="0"/>
-          </a:p>
-        </p:txBody>
-      </p:sp>
-      <p:sp>
-        <p:nvSpPr>
-          <p:cNvPr id="13" name="Text 11"/>
-          <p:cNvSpPr/>
-          <p:nvPr/>
-        </p:nvSpPr>
-        <p:spPr>
-          <a:xfrm>
-            <a:off x="896112" y="3447288"/>
-            <a:ext cx="3136392" cy="530352"/>
-          </a:xfrm>
-          <a:prstGeom prst="rect">
-            <a:avLst/>
-          </a:prstGeom>
-          <a:noFill/>
-          <a:ln/>
-        </p:spPr>
-        <p:txBody>
-          <a:bodyPr wrap="square" lIns="254" tIns="254" rIns="254" bIns="254" rtlCol="0" anchor="t">
-            <a:normAutofit/>
-          </a:bodyPr>
-          <a:lstStyle/>
-          <a:p>
-            <a:pPr algn="l" indent="0" marL="0">
-              <a:buNone/>
-            </a:pPr>
-            <a:r>
-              <a:rPr lang="en-US" sz="1510" dirty="0">
-                <a:solidFill>
-                  <a:srgbClr val="536579"/>
-                </a:solidFill>
-                <a:latin typeface="Aptos" pitchFamily="34" charset="0"/>
-                <a:ea typeface="Aptos" pitchFamily="34" charset="-122"/>
-                <a:cs typeface="Aptos" pitchFamily="34" charset="-120"/>
-              </a:rPr>
               <a:t>No inventory, no clear owner</a:t>
             </a:r>
             <a:endParaRPr lang="en-US" sz="1510" dirty="0"/>
@@ -6914,8 +6914,8 @@
         </p:nvSpPr>
         <p:spPr>
           <a:xfrm>
-            <a:off x="4517136" y="1938528"/>
-            <a:ext cx="3575304" cy="2468880"/>
+            <a:off x="4372525" y="1938528"/>
+            <a:ext cx="3416469" cy="2468880"/>
           </a:xfrm>
           <a:prstGeom prst="roundRect">
             <a:avLst>
@@ -6923,11 +6923,11 @@
             </a:avLst>
           </a:prstGeom>
           <a:solidFill>
-            <a:srgbClr val="FFFFFF"/>
+            <a:srgbClr val="FDF1DE"/>
           </a:solidFill>
-          <a:ln w="10160">
+          <a:ln w="19050">
             <a:solidFill>
-              <a:srgbClr val="DCE5ED"/>
+              <a:srgbClr val="F4B860"/>
             </a:solidFill>
             <a:prstDash val="solid"/>
           </a:ln>
@@ -6945,7 +6945,7 @@
         </p:nvSpPr>
         <p:spPr>
           <a:xfrm>
-            <a:off x="4727448" y="2212848"/>
+            <a:off x="4582837" y="2212848"/>
             <a:ext cx="402336" cy="402336"/>
           </a:xfrm>
           <a:prstGeom prst="roundRect">
@@ -6978,7 +6978,7 @@
         </p:nvSpPr>
         <p:spPr>
           <a:xfrm>
-            <a:off x="4764024" y="2340864"/>
+            <a:off x="4619413" y="2340864"/>
             <a:ext cx="310896" cy="128016"/>
           </a:xfrm>
           <a:prstGeom prst="rect">
@@ -7019,7 +7019,7 @@
         </p:nvSpPr>
         <p:spPr>
           <a:xfrm>
-            <a:off x="5230368" y="2304288"/>
+            <a:off x="5085757" y="2304288"/>
             <a:ext cx="2633472" cy="201168"/>
           </a:xfrm>
           <a:prstGeom prst="rect">
@@ -7040,94 +7040,94 @@
             <a:r>
               <a:rPr lang="en-US" sz="1230" b="1" spc="100" kern="0" dirty="0">
                 <a:solidFill>
+                  <a:srgbClr val="B7791F"/>
+                </a:solidFill>
+                <a:latin typeface="Aptos" pitchFamily="34" charset="0"/>
+                <a:ea typeface="Aptos" pitchFamily="34" charset="-122"/>
+                <a:cs typeface="Aptos" pitchFamily="34" charset="-120"/>
+              </a:rPr>
+              <a:t>ACCESS</a:t>
+            </a:r>
+            <a:endParaRPr lang="en-US" sz="1230" dirty="0"/>
+          </a:p>
+        </p:txBody>
+      </p:sp>
+      <p:sp>
+        <p:nvSpPr>
+          <p:cNvPr id="18" name="Text 16"/>
+          <p:cNvSpPr/>
+          <p:nvPr/>
+        </p:nvSpPr>
+        <p:spPr>
+          <a:xfrm>
+            <a:off x="4591981" y="2788920"/>
+            <a:ext cx="3010069" cy="429768"/>
+          </a:xfrm>
+          <a:prstGeom prst="rect">
+            <a:avLst/>
+          </a:prstGeom>
+          <a:noFill/>
+          <a:ln/>
+        </p:spPr>
+        <p:txBody>
+          <a:bodyPr wrap="square" lIns="254" tIns="254" rIns="254" bIns="254" rtlCol="0" anchor="ctr">
+            <a:normAutofit/>
+          </a:bodyPr>
+          <a:lstStyle/>
+          <a:p>
+            <a:pPr algn="l" indent="0" marL="0">
+              <a:buNone/>
+            </a:pPr>
+            <a:r>
+              <a:rPr lang="en-US" sz="1820" b="1" dirty="0">
+                <a:solidFill>
+                  <a:srgbClr val="132438"/>
+                </a:solidFill>
+                <a:latin typeface="Aptos" pitchFamily="34" charset="0"/>
+                <a:ea typeface="Aptos" pitchFamily="34" charset="-122"/>
+                <a:cs typeface="Aptos" pitchFamily="34" charset="-120"/>
+              </a:rPr>
+              <a:t>WHAT CAN IT TOUCH?</a:t>
+            </a:r>
+            <a:endParaRPr lang="en-US" sz="1820" dirty="0"/>
+          </a:p>
+        </p:txBody>
+      </p:sp>
+      <p:sp>
+        <p:nvSpPr>
+          <p:cNvPr id="19" name="Text 17"/>
+          <p:cNvSpPr/>
+          <p:nvPr/>
+        </p:nvSpPr>
+        <p:spPr>
+          <a:xfrm>
+            <a:off x="4591981" y="3447288"/>
+            <a:ext cx="3010069" cy="530352"/>
+          </a:xfrm>
+          <a:prstGeom prst="rect">
+            <a:avLst/>
+          </a:prstGeom>
+          <a:noFill/>
+          <a:ln/>
+        </p:spPr>
+        <p:txBody>
+          <a:bodyPr wrap="square" lIns="254" tIns="254" rIns="254" bIns="254" rtlCol="0" anchor="t">
+            <a:normAutofit/>
+          </a:bodyPr>
+          <a:lstStyle/>
+          <a:p>
+            <a:pPr algn="l" indent="0" marL="0">
+              <a:buNone/>
+            </a:pPr>
+            <a:r>
+              <a:rPr lang="en-US" sz="1510" dirty="0">
+                <a:solidFill>
                   <a:srgbClr val="536579"/>
                 </a:solidFill>
                 <a:latin typeface="Aptos" pitchFamily="34" charset="0"/>
                 <a:ea typeface="Aptos" pitchFamily="34" charset="-122"/>
                 <a:cs typeface="Aptos" pitchFamily="34" charset="-120"/>
               </a:rPr>
-              <a:t>ACCESS</a:t>
-            </a:r>
-            <a:endParaRPr lang="en-US" sz="1230" dirty="0"/>
-          </a:p>
-        </p:txBody>
-      </p:sp>
-      <p:sp>
-        <p:nvSpPr>
-          <p:cNvPr id="18" name="Text 16"/>
-          <p:cNvSpPr/>
-          <p:nvPr/>
-        </p:nvSpPr>
-        <p:spPr>
-          <a:xfrm>
-            <a:off x="4736592" y="2788920"/>
-            <a:ext cx="3154680" cy="429768"/>
-          </a:xfrm>
-          <a:prstGeom prst="rect">
-            <a:avLst/>
-          </a:prstGeom>
-          <a:noFill/>
-          <a:ln/>
-        </p:spPr>
-        <p:txBody>
-          <a:bodyPr wrap="square" lIns="254" tIns="254" rIns="254" bIns="254" rtlCol="0" anchor="ctr">
-            <a:normAutofit/>
-          </a:bodyPr>
-          <a:lstStyle/>
-          <a:p>
-            <a:pPr algn="l" indent="0" marL="0">
-              <a:buNone/>
-            </a:pPr>
-            <a:r>
-              <a:rPr lang="en-US" sz="1820" b="1" dirty="0">
-                <a:solidFill>
-                  <a:srgbClr val="132438"/>
-                </a:solidFill>
-                <a:latin typeface="Aptos" pitchFamily="34" charset="0"/>
-                <a:ea typeface="Aptos" pitchFamily="34" charset="-122"/>
-                <a:cs typeface="Aptos" pitchFamily="34" charset="-120"/>
-              </a:rPr>
-              <a:t>WHAT CAN IT TOUCH?</a:t>
-            </a:r>
-            <a:endParaRPr lang="en-US" sz="1820" dirty="0"/>
-          </a:p>
-        </p:txBody>
-      </p:sp>
-      <p:sp>
-        <p:nvSpPr>
-          <p:cNvPr id="19" name="Text 17"/>
-          <p:cNvSpPr/>
-          <p:nvPr/>
-        </p:nvSpPr>
-        <p:spPr>
-          <a:xfrm>
-            <a:off x="4736592" y="3447288"/>
-            <a:ext cx="3136392" cy="530352"/>
-          </a:xfrm>
-          <a:prstGeom prst="rect">
-            <a:avLst/>
-          </a:prstGeom>
-          <a:noFill/>
-          <a:ln/>
-        </p:spPr>
-        <p:txBody>
-          <a:bodyPr wrap="square" lIns="254" tIns="254" rIns="254" bIns="254" rtlCol="0" anchor="t">
-            <a:normAutofit/>
-          </a:bodyPr>
-          <a:lstStyle/>
-          <a:p>
-            <a:pPr algn="l" indent="0" marL="0">
-              <a:buNone/>
-            </a:pPr>
-            <a:r>
-              <a:rPr lang="en-US" sz="1510" dirty="0">
-                <a:solidFill>
-                  <a:srgbClr val="536579"/>
-                </a:solidFill>
-                <a:latin typeface="Aptos" pitchFamily="34" charset="0"/>
-                <a:ea typeface="Aptos" pitchFamily="34" charset="-122"/>
-                <a:cs typeface="Aptos" pitchFamily="34" charset="-120"/>
-              </a:rPr>
               <a:t>Broad tokens, unclear access</a:t>
             </a:r>
             <a:endParaRPr lang="en-US" sz="1510" dirty="0"/>
@@ -7142,8 +7142,8 @@
         </p:nvSpPr>
         <p:spPr>
           <a:xfrm>
-            <a:off x="8357616" y="1938528"/>
-            <a:ext cx="3575304" cy="2468880"/>
+            <a:off x="8068394" y="1938528"/>
+            <a:ext cx="3416469" cy="2468880"/>
           </a:xfrm>
           <a:prstGeom prst="roundRect">
             <a:avLst>
@@ -7151,11 +7151,11 @@
             </a:avLst>
           </a:prstGeom>
           <a:solidFill>
-            <a:srgbClr val="FFFFFF"/>
+            <a:srgbClr val="E8EFFD"/>
           </a:solidFill>
-          <a:ln w="10160">
+          <a:ln w="19050">
             <a:solidFill>
-              <a:srgbClr val="DCE5ED"/>
+              <a:srgbClr val="3B78E7"/>
             </a:solidFill>
             <a:prstDash val="solid"/>
           </a:ln>
@@ -7173,7 +7173,7 @@
         </p:nvSpPr>
         <p:spPr>
           <a:xfrm>
-            <a:off x="8567928" y="2212848"/>
+            <a:off x="8278706" y="2212848"/>
             <a:ext cx="402336" cy="402336"/>
           </a:xfrm>
           <a:prstGeom prst="roundRect">
@@ -7182,11 +7182,11 @@
             </a:avLst>
           </a:prstGeom>
           <a:solidFill>
-            <a:srgbClr val="06AFA5"/>
+            <a:srgbClr val="3B78E7"/>
           </a:solidFill>
           <a:ln w="12700">
             <a:solidFill>
-              <a:srgbClr val="06AFA5">
+              <a:srgbClr val="3B78E7">
                 <a:alpha val="0"/>
               </a:srgbClr>
             </a:solidFill>
@@ -7206,7 +7206,7 @@
         </p:nvSpPr>
         <p:spPr>
           <a:xfrm>
-            <a:off x="8604504" y="2340864"/>
+            <a:off x="8315282" y="2340864"/>
             <a:ext cx="310896" cy="128016"/>
           </a:xfrm>
           <a:prstGeom prst="rect">
@@ -7247,7 +7247,7 @@
         </p:nvSpPr>
         <p:spPr>
           <a:xfrm>
-            <a:off x="9070848" y="2304288"/>
+            <a:off x="8781626" y="2304288"/>
             <a:ext cx="2633472" cy="201168"/>
           </a:xfrm>
           <a:prstGeom prst="rect">
@@ -7268,7 +7268,7 @@
             <a:r>
               <a:rPr lang="en-US" sz="1230" b="1" spc="100" kern="0" dirty="0">
                 <a:solidFill>
-                  <a:srgbClr val="536579"/>
+                  <a:srgbClr val="2F62C4"/>
                 </a:solidFill>
                 <a:latin typeface="Aptos" pitchFamily="34" charset="0"/>
                 <a:ea typeface="Aptos" pitchFamily="34" charset="-122"/>
@@ -7288,8 +7288,8 @@
         </p:nvSpPr>
         <p:spPr>
           <a:xfrm>
-            <a:off x="8577072" y="2788920"/>
-            <a:ext cx="3154680" cy="429768"/>
+            <a:off x="8287850" y="2788920"/>
+            <a:ext cx="3010069" cy="429768"/>
           </a:xfrm>
           <a:prstGeom prst="rect">
             <a:avLst/>
@@ -7329,8 +7329,8 @@
         </p:nvSpPr>
         <p:spPr>
           <a:xfrm>
-            <a:off x="8577072" y="3447288"/>
-            <a:ext cx="3136392" cy="530352"/>
+            <a:off x="8287850" y="3447288"/>
+            <a:ext cx="3010069" cy="530352"/>
           </a:xfrm>
           <a:prstGeom prst="rect">
             <a:avLst/>

--- a/docs/presentation/KAOP_Customer_Pitch.pptx
+++ b/docs/presentation/KAOP_Customer_Pitch.pptx
@@ -6,6 +6,7 @@
   </p:sldMasterIdLst>
   <p:sldIdLst>
     <p:sldId id="256" r:id="rId2"/>
+    <p:sldId id="270" r:id="rId16"/>
     <p:sldId id="257" r:id="rId3"/>
     <p:sldId id="258" r:id="rId4"/>
     <p:sldId id="259" r:id="rId5"/>
@@ -1570,6 +1571,891 @@
 
 <file path=ppt/slides/slide10.xml><?xml version="1.0" encoding="utf-8"?>
 <p:sld xmlns:a="http://schemas.openxmlformats.org/drawingml/2006/main" xmlns:r="http://schemas.openxmlformats.org/officeDocument/2006/relationships" xmlns:p="http://schemas.openxmlformats.org/presentationml/2006/main">
+  <p:cSld name="Slide 9">
+    <p:bg>
+      <p:bgPr>
+        <a:solidFill>
+          <a:srgbClr val="F7F9FC"/>
+        </a:solidFill>
+      </p:bgPr>
+    </p:bg>
+    <p:spTree>
+      <p:nvGrpSpPr>
+        <p:cNvPr id="1" name=""/>
+        <p:cNvGrpSpPr/>
+        <p:nvPr/>
+      </p:nvGrpSpPr>
+      <p:grpSpPr>
+        <a:xfrm>
+          <a:off x="0" y="0"/>
+          <a:ext cx="0" cy="0"/>
+          <a:chOff x="0" y="0"/>
+          <a:chExt cx="0" cy="0"/>
+        </a:xfrm>
+      </p:grpSpPr>
+      <p:sp>
+        <p:nvSpPr>
+          <p:cNvPr id="2" name="Text 0"/>
+          <p:cNvSpPr/>
+          <p:nvPr/>
+        </p:nvSpPr>
+        <p:spPr>
+          <a:xfrm>
+            <a:off x="640080" y="310896"/>
+            <a:ext cx="9144000" cy="219456"/>
+          </a:xfrm>
+          <a:prstGeom prst="rect">
+            <a:avLst/>
+          </a:prstGeom>
+          <a:noFill/>
+          <a:ln/>
+        </p:spPr>
+        <p:txBody>
+          <a:bodyPr wrap="square" lIns="254" tIns="254" rIns="254" bIns="254" rtlCol="0" anchor="ctr">
+            <a:normAutofit/>
+          </a:bodyPr>
+          <a:lstStyle/>
+          <a:p>
+            <a:pPr algn="l" indent="0" marL="0">
+              <a:buNone/>
+            </a:pPr>
+            <a:r>
+              <a:rPr lang="en-US" sz="1050" b="1" spc="240" kern="0" dirty="0">
+                <a:solidFill>
+                  <a:srgbClr val="06AFA5"/>
+                </a:solidFill>
+                <a:latin typeface="Aptos" pitchFamily="34" charset="0"/>
+                <a:ea typeface="Aptos" pitchFamily="34" charset="-122"/>
+                <a:cs typeface="Aptos" pitchFamily="34" charset="-120"/>
+              </a:rPr>
+              <a:t>06 / QUALITY + COST MEASURED HERE</a:t>
+            </a:r>
+            <a:endParaRPr lang="en-US" sz="1050" dirty="0"/>
+          </a:p>
+        </p:txBody>
+      </p:sp>
+      <p:sp>
+        <p:nvSpPr>
+          <p:cNvPr id="3" name="Text 1"/>
+          <p:cNvSpPr/>
+          <p:nvPr/>
+        </p:nvSpPr>
+        <p:spPr>
+          <a:xfrm>
+            <a:off x="10972800" y="292608"/>
+            <a:ext cx="576072" cy="219456"/>
+          </a:xfrm>
+          <a:prstGeom prst="rect">
+            <a:avLst/>
+          </a:prstGeom>
+          <a:noFill/>
+          <a:ln/>
+        </p:spPr>
+        <p:txBody>
+          <a:bodyPr wrap="square" lIns="254" tIns="254" rIns="254" bIns="254" rtlCol="0" anchor="ctr">
+            <a:normAutofit/>
+          </a:bodyPr>
+          <a:lstStyle/>
+          <a:p>
+            <a:pPr algn="r" indent="0" marL="0">
+              <a:buNone/>
+            </a:pPr>
+            <a:r>
+              <a:rPr lang="en-US" sz="1000" dirty="0">
+                <a:solidFill>
+                  <a:srgbClr val="536579"/>
+                </a:solidFill>
+                <a:latin typeface="Aptos" pitchFamily="34" charset="0"/>
+                <a:ea typeface="Aptos" pitchFamily="34" charset="-122"/>
+                <a:cs typeface="Aptos" pitchFamily="34" charset="-120"/>
+              </a:rPr>
+              <a:t>09 / 12</a:t>
+            </a:r>
+            <a:endParaRPr lang="en-US" sz="1000" dirty="0"/>
+          </a:p>
+        </p:txBody>
+      </p:sp>
+      <p:sp>
+        <p:nvSpPr>
+          <p:cNvPr id="4" name="Text 2"/>
+          <p:cNvSpPr/>
+          <p:nvPr/>
+        </p:nvSpPr>
+        <p:spPr>
+          <a:xfrm>
+            <a:off x="640080" y="777240"/>
+            <a:ext cx="10927080" cy="932688"/>
+          </a:xfrm>
+          <a:prstGeom prst="rect">
+            <a:avLst/>
+          </a:prstGeom>
+          <a:noFill/>
+          <a:ln/>
+        </p:spPr>
+        <p:txBody>
+          <a:bodyPr wrap="square" lIns="254" tIns="254" rIns="254" bIns="254" rtlCol="0" anchor="t">
+            <a:normAutofit/>
+          </a:bodyPr>
+          <a:lstStyle/>
+          <a:p>
+            <a:pPr algn="l" indent="0" marL="0">
+              <a:buNone/>
+            </a:pPr>
+            <a:r>
+              <a:rPr lang="en-US" sz="3150" b="1" dirty="0">
+                <a:solidFill>
+                  <a:srgbClr val="132438"/>
+                </a:solidFill>
+                <a:latin typeface="Aptos" pitchFamily="34" charset="0"/>
+                <a:ea typeface="Aptos" pitchFamily="34" charset="-122"/>
+                <a:cs typeface="Aptos" pitchFamily="34" charset="-120"/>
+              </a:rPr>
+              <a:t>A completed run is not a correct run.</a:t>
+            </a:r>
+            <a:endParaRPr lang="en-US" sz="3150" dirty="0"/>
+          </a:p>
+        </p:txBody>
+      </p:sp>
+      <p:sp>
+        <p:nvSpPr>
+          <p:cNvPr id="5" name="Shape 3"/>
+          <p:cNvSpPr/>
+          <p:nvPr/>
+        </p:nvSpPr>
+        <p:spPr>
+          <a:xfrm>
+            <a:off x="640080" y="6327648"/>
+            <a:ext cx="10927080" cy="0"/>
+          </a:xfrm>
+          <a:prstGeom prst="line">
+            <a:avLst/>
+          </a:prstGeom>
+          <a:noFill/>
+          <a:ln w="11430">
+            <a:solidFill>
+              <a:srgbClr val="DCE5ED"/>
+            </a:solidFill>
+            <a:prstDash val="solid"/>
+          </a:ln>
+        </p:spPr>
+        <p:txBody>
+          <a:bodyPr/>
+          <a:p/>
+        </p:txBody>
+      </p:sp>
+      <p:sp>
+        <p:nvSpPr>
+          <p:cNvPr id="6" name="Text 4"/>
+          <p:cNvSpPr/>
+          <p:nvPr/>
+        </p:nvSpPr>
+        <p:spPr>
+          <a:xfrm>
+            <a:off x="640080" y="6419088"/>
+            <a:ext cx="5486400" cy="155448"/>
+          </a:xfrm>
+          <a:prstGeom prst="rect">
+            <a:avLst/>
+          </a:prstGeom>
+          <a:noFill/>
+          <a:ln/>
+        </p:spPr>
+        <p:txBody>
+          <a:bodyPr wrap="square" lIns="254" tIns="254" rIns="254" bIns="254" rtlCol="0" anchor="ctr">
+            <a:normAutofit/>
+          </a:bodyPr>
+          <a:lstStyle/>
+          <a:p>
+            <a:pPr algn="l" indent="0" marL="0">
+              <a:buNone/>
+            </a:pPr>
+            <a:r>
+              <a:rPr lang="en-US" sz="900" spc="120" kern="0" dirty="0">
+                <a:solidFill>
+                  <a:srgbClr val="536579"/>
+                </a:solidFill>
+                <a:latin typeface="Aptos" pitchFamily="34" charset="0"/>
+                <a:ea typeface="Aptos" pitchFamily="34" charset="-122"/>
+                <a:cs typeface="Aptos" pitchFamily="34" charset="-120"/>
+              </a:rPr>
+              <a:t>KAOP  /  CUSTOMER DISCUSSION</a:t>
+            </a:r>
+            <a:endParaRPr lang="en-US" sz="900" dirty="0"/>
+          </a:p>
+        </p:txBody>
+      </p:sp>
+      <p:sp>
+        <p:nvSpPr>
+          <p:cNvPr id="8" name="Shape 6"/>
+          <p:cNvSpPr/>
+          <p:nvPr/>
+        </p:nvSpPr>
+        <p:spPr>
+          <a:xfrm>
+            <a:off x="694944" y="1874520"/>
+            <a:ext cx="5486400" cy="3419856"/>
+          </a:xfrm>
+          <a:prstGeom prst="roundRect">
+            <a:avLst>
+              <a:gd name="adj" fmla="val 5615"/>
+            </a:avLst>
+          </a:prstGeom>
+          <a:solidFill>
+            <a:srgbClr val="FFFFFF"/>
+          </a:solidFill>
+          <a:ln w="10160">
+            <a:solidFill>
+              <a:srgbClr val="DCE5ED"/>
+            </a:solidFill>
+            <a:prstDash val="solid"/>
+          </a:ln>
+        </p:spPr>
+        <p:txBody>
+          <a:bodyPr/>
+          <a:p/>
+        </p:txBody>
+      </p:sp>
+      <p:sp>
+        <p:nvSpPr>
+          <p:cNvPr id="9" name="Text 7"/>
+          <p:cNvSpPr/>
+          <p:nvPr/>
+        </p:nvSpPr>
+        <p:spPr>
+          <a:xfrm>
+            <a:off x="914400" y="2157984"/>
+            <a:ext cx="5029200" cy="228600"/>
+          </a:xfrm>
+          <a:prstGeom prst="rect">
+            <a:avLst/>
+          </a:prstGeom>
+          <a:noFill/>
+          <a:ln/>
+        </p:spPr>
+        <p:txBody>
+          <a:bodyPr wrap="square" lIns="254" tIns="254" rIns="254" bIns="254" rtlCol="0" anchor="ctr">
+            <a:normAutofit/>
+          </a:bodyPr>
+          <a:lstStyle/>
+          <a:p>
+            <a:pPr algn="l" indent="0" marL="0">
+              <a:buNone/>
+            </a:pPr>
+            <a:r>
+              <a:rPr lang="en-US" sz="1200" b="1" spc="130" kern="0" dirty="0">
+                <a:solidFill>
+                  <a:srgbClr val="536579"/>
+                </a:solidFill>
+                <a:latin typeface="Aptos" pitchFamily="34" charset="0"/>
+                <a:ea typeface="Aptos" pitchFamily="34" charset="-122"/>
+                <a:cs typeface="Aptos" pitchFamily="34" charset="-120"/>
+              </a:rPr>
+              <a:t>ANSWER QUALITY</a:t>
+            </a:r>
+            <a:endParaRPr lang="en-US" sz="1200" dirty="0"/>
+          </a:p>
+        </p:txBody>
+      </p:sp>
+      <p:sp>
+        <p:nvSpPr>
+          <p:cNvPr id="10" name="Text 8"/>
+          <p:cNvSpPr/>
+          <p:nvPr/>
+        </p:nvSpPr>
+        <p:spPr>
+          <a:xfrm>
+            <a:off x="923544" y="2706624"/>
+            <a:ext cx="2103120" cy="585216"/>
+          </a:xfrm>
+          <a:prstGeom prst="rect">
+            <a:avLst/>
+          </a:prstGeom>
+          <a:noFill/>
+          <a:ln/>
+        </p:spPr>
+        <p:txBody>
+          <a:bodyPr wrap="square" lIns="254" tIns="254" rIns="254" bIns="254" rtlCol="0" anchor="ctr">
+            <a:normAutofit/>
+          </a:bodyPr>
+          <a:lstStyle/>
+          <a:p>
+            <a:pPr algn="l" indent="0" marL="0">
+              <a:buNone/>
+            </a:pPr>
+            <a:r>
+              <a:rPr lang="en-US" sz="3400" b="1" dirty="0">
+                <a:solidFill>
+                  <a:srgbClr val="C66765"/>
+                </a:solidFill>
+                <a:latin typeface="Aptos" pitchFamily="34" charset="0"/>
+                <a:ea typeface="Aptos" pitchFamily="34" charset="-122"/>
+                <a:cs typeface="Aptos" pitchFamily="34" charset="-120"/>
+              </a:rPr>
+              <a:t>1 of 5</a:t>
+            </a:r>
+            <a:endParaRPr lang="en-US" sz="3400" dirty="0"/>
+          </a:p>
+        </p:txBody>
+      </p:sp>
+      <p:sp>
+        <p:nvSpPr>
+          <p:cNvPr id="11" name="Text 9"/>
+          <p:cNvSpPr/>
+          <p:nvPr/>
+        </p:nvSpPr>
+        <p:spPr>
+          <a:xfrm>
+            <a:off x="2953512" y="2834640"/>
+            <a:ext cx="448056" cy="365760"/>
+          </a:xfrm>
+          <a:prstGeom prst="rect">
+            <a:avLst/>
+          </a:prstGeom>
+          <a:noFill/>
+          <a:ln/>
+        </p:spPr>
+        <p:txBody>
+          <a:bodyPr wrap="square" lIns="254" tIns="254" rIns="254" bIns="254" rtlCol="0" anchor="ctr">
+            <a:normAutofit/>
+          </a:bodyPr>
+          <a:lstStyle/>
+          <a:p>
+            <a:pPr algn="ctr" indent="0" marL="0">
+              <a:buNone/>
+            </a:pPr>
+            <a:r>
+              <a:rPr lang="en-US" sz="2700" b="1" dirty="0">
+                <a:solidFill>
+                  <a:srgbClr val="06AFA5"/>
+                </a:solidFill>
+                <a:latin typeface="Aptos" pitchFamily="34" charset="0"/>
+                <a:ea typeface="Aptos" pitchFamily="34" charset="-122"/>
+                <a:cs typeface="Aptos" pitchFamily="34" charset="-120"/>
+              </a:rPr>
+              <a:t>→</a:t>
+            </a:r>
+            <a:endParaRPr lang="en-US" sz="2700" dirty="0"/>
+          </a:p>
+        </p:txBody>
+      </p:sp>
+      <p:sp>
+        <p:nvSpPr>
+          <p:cNvPr id="12" name="Text 10"/>
+          <p:cNvSpPr/>
+          <p:nvPr/>
+        </p:nvSpPr>
+        <p:spPr>
+          <a:xfrm>
+            <a:off x="3483864" y="2706624"/>
+            <a:ext cx="2377440" cy="585216"/>
+          </a:xfrm>
+          <a:prstGeom prst="rect">
+            <a:avLst/>
+          </a:prstGeom>
+          <a:noFill/>
+          <a:ln/>
+        </p:spPr>
+        <p:txBody>
+          <a:bodyPr wrap="square" lIns="254" tIns="254" rIns="254" bIns="254" rtlCol="0" anchor="ctr">
+            <a:normAutofit/>
+          </a:bodyPr>
+          <a:lstStyle/>
+          <a:p>
+            <a:pPr algn="l" indent="0" marL="0">
+              <a:buNone/>
+            </a:pPr>
+            <a:r>
+              <a:rPr lang="en-US" sz="3400" b="1" dirty="0">
+                <a:solidFill>
+                  <a:srgbClr val="06AFA5"/>
+                </a:solidFill>
+                <a:latin typeface="Aptos" pitchFamily="34" charset="0"/>
+                <a:ea typeface="Aptos" pitchFamily="34" charset="-122"/>
+                <a:cs typeface="Aptos" pitchFamily="34" charset="-120"/>
+              </a:rPr>
+              <a:t>10 of 10</a:t>
+            </a:r>
+            <a:endParaRPr lang="en-US" sz="3400" dirty="0"/>
+          </a:p>
+        </p:txBody>
+      </p:sp>
+      <p:sp>
+        <p:nvSpPr>
+          <p:cNvPr id="13" name="Text 11"/>
+          <p:cNvSpPr/>
+          <p:nvPr/>
+        </p:nvSpPr>
+        <p:spPr>
+          <a:xfrm>
+            <a:off x="914400" y="3456432"/>
+            <a:ext cx="5029200" cy="292608"/>
+          </a:xfrm>
+          <a:prstGeom prst="rect">
+            <a:avLst/>
+          </a:prstGeom>
+          <a:noFill/>
+          <a:ln/>
+        </p:spPr>
+        <p:txBody>
+          <a:bodyPr wrap="square" lIns="254" tIns="254" rIns="254" bIns="254" rtlCol="0" anchor="ctr">
+            <a:normAutofit/>
+          </a:bodyPr>
+          <a:lstStyle/>
+          <a:p>
+            <a:pPr algn="l" indent="0" marL="0">
+              <a:buNone/>
+            </a:pPr>
+            <a:r>
+              <a:rPr lang="en-US" sz="1710" b="1" dirty="0">
+                <a:solidFill>
+                  <a:srgbClr val="132438"/>
+                </a:solidFill>
+                <a:latin typeface="Aptos" pitchFamily="34" charset="0"/>
+                <a:ea typeface="Aptos" pitchFamily="34" charset="-122"/>
+                <a:cs typeface="Aptos" pitchFamily="34" charset="-120"/>
+              </a:rPr>
+              <a:t>Agent found the actual cause</a:t>
+            </a:r>
+            <a:endParaRPr lang="en-US" sz="1710" dirty="0"/>
+          </a:p>
+        </p:txBody>
+      </p:sp>
+      <p:sp>
+        <p:nvSpPr>
+          <p:cNvPr id="14" name="Text 12"/>
+          <p:cNvSpPr/>
+          <p:nvPr/>
+        </p:nvSpPr>
+        <p:spPr>
+          <a:xfrm>
+            <a:off x="914400" y="3959352"/>
+            <a:ext cx="4937760" cy="868680"/>
+          </a:xfrm>
+          <a:prstGeom prst="rect">
+            <a:avLst/>
+          </a:prstGeom>
+          <a:noFill/>
+          <a:ln/>
+        </p:spPr>
+        <p:txBody>
+          <a:bodyPr wrap="square" lIns="254" tIns="254" rIns="254" bIns="254" rtlCol="0" anchor="t">
+            <a:normAutofit/>
+          </a:bodyPr>
+          <a:lstStyle/>
+          <a:p>
+            <a:pPr algn="l" indent="0" marL="0">
+              <a:buNone/>
+            </a:pPr>
+            <a:r>
+              <a:rPr lang="en-US" sz="1460" dirty="0">
+                <a:solidFill>
+                  <a:srgbClr val="536579"/>
+                </a:solidFill>
+                <a:latin typeface="Aptos" pitchFamily="34" charset="0"/>
+                <a:ea typeface="Aptos" pitchFamily="34" charset="-122"/>
+                <a:cs typeface="Aptos" pitchFamily="34" charset="-120"/>
+              </a:rPr>
+              <a:t>Without / with one documented probe standard.</a:t>
+            </a:r>
+            <a:endParaRPr lang="en-US" sz="1460" dirty="0"/>
+          </a:p>
+          <a:p>
+            <a:pPr algn="l" indent="0" marL="0">
+              <a:buNone/>
+            </a:pPr>
+            <a:r>
+              <a:rPr lang="en-US" sz="1460" dirty="0">
+                <a:solidFill>
+                  <a:srgbClr val="536579"/>
+                </a:solidFill>
+                <a:latin typeface="Aptos" pitchFamily="34" charset="0"/>
+                <a:ea typeface="Aptos" pitchFamily="34" charset="-122"/>
+                <a:cs typeface="Aptos" pitchFamily="34" charset="-120"/>
+              </a:rPr>
+              <a:t>Same investigation input; small lab samples.</a:t>
+            </a:r>
+            <a:endParaRPr lang="en-US" sz="1460" dirty="0"/>
+          </a:p>
+        </p:txBody>
+      </p:sp>
+      <p:sp>
+        <p:nvSpPr>
+          <p:cNvPr id="15" name="Shape 13"/>
+          <p:cNvSpPr/>
+          <p:nvPr/>
+        </p:nvSpPr>
+        <p:spPr>
+          <a:xfrm>
+            <a:off x="6391656" y="1874520"/>
+            <a:ext cx="5093208" cy="3419856"/>
+          </a:xfrm>
+          <a:prstGeom prst="roundRect">
+            <a:avLst>
+              <a:gd name="adj" fmla="val 5615"/>
+            </a:avLst>
+          </a:prstGeom>
+          <a:solidFill>
+            <a:srgbClr val="FFFFFF"/>
+          </a:solidFill>
+          <a:ln w="10160">
+            <a:solidFill>
+              <a:srgbClr val="DCE5ED"/>
+            </a:solidFill>
+            <a:prstDash val="solid"/>
+          </a:ln>
+        </p:spPr>
+        <p:txBody>
+          <a:bodyPr/>
+          <a:p/>
+        </p:txBody>
+      </p:sp>
+      <p:sp>
+        <p:nvSpPr>
+          <p:cNvPr id="16" name="Text 14"/>
+          <p:cNvSpPr/>
+          <p:nvPr/>
+        </p:nvSpPr>
+        <p:spPr>
+          <a:xfrm>
+            <a:off x="6601968" y="2157984"/>
+            <a:ext cx="4663440" cy="228600"/>
+          </a:xfrm>
+          <a:prstGeom prst="rect">
+            <a:avLst/>
+          </a:prstGeom>
+          <a:noFill/>
+          <a:ln/>
+        </p:spPr>
+        <p:txBody>
+          <a:bodyPr wrap="square" lIns="254" tIns="254" rIns="254" bIns="254" rtlCol="0" anchor="ctr">
+            <a:normAutofit/>
+          </a:bodyPr>
+          <a:lstStyle/>
+          <a:p>
+            <a:pPr algn="l" indent="0" marL="0">
+              <a:buNone/>
+            </a:pPr>
+            <a:r>
+              <a:rPr lang="en-US" sz="1200" b="1" spc="100" kern="0" dirty="0">
+                <a:solidFill>
+                  <a:srgbClr val="536579"/>
+                </a:solidFill>
+                <a:latin typeface="Aptos" pitchFamily="34" charset="0"/>
+                <a:ea typeface="Aptos" pitchFamily="34" charset="-122"/>
+                <a:cs typeface="Aptos" pitchFamily="34" charset="-120"/>
+              </a:rPr>
+              <a:t>COST OF THE GRAFANA INVESTIGATOR</a:t>
+            </a:r>
+            <a:endParaRPr lang="en-US" sz="1200" dirty="0"/>
+          </a:p>
+        </p:txBody>
+      </p:sp>
+      <p:sp>
+        <p:nvSpPr>
+          <p:cNvPr id="17" name="Text 15"/>
+          <p:cNvSpPr/>
+          <p:nvPr/>
+        </p:nvSpPr>
+        <p:spPr>
+          <a:xfrm>
+            <a:off x="6620256" y="2706624"/>
+            <a:ext cx="1792224" cy="585216"/>
+          </a:xfrm>
+          <a:prstGeom prst="rect">
+            <a:avLst/>
+          </a:prstGeom>
+          <a:noFill/>
+          <a:ln/>
+        </p:spPr>
+        <p:txBody>
+          <a:bodyPr wrap="square" lIns="254" tIns="254" rIns="254" bIns="254" rtlCol="0" anchor="ctr">
+            <a:normAutofit/>
+          </a:bodyPr>
+          <a:lstStyle/>
+          <a:p>
+            <a:pPr algn="l" indent="0" marL="0">
+              <a:buNone/>
+            </a:pPr>
+            <a:r>
+              <a:rPr lang="en-US" sz="3400" b="1" dirty="0">
+                <a:solidFill>
+                  <a:srgbClr val="132438"/>
+                </a:solidFill>
+                <a:latin typeface="Aptos" pitchFamily="34" charset="0"/>
+                <a:ea typeface="Aptos" pitchFamily="34" charset="-122"/>
+                <a:cs typeface="Aptos" pitchFamily="34" charset="-120"/>
+              </a:rPr>
+              <a:t>$0.68</a:t>
+            </a:r>
+            <a:endParaRPr lang="en-US" sz="3400" dirty="0"/>
+          </a:p>
+        </p:txBody>
+      </p:sp>
+      <p:sp>
+        <p:nvSpPr>
+          <p:cNvPr id="18" name="Text 16"/>
+          <p:cNvSpPr/>
+          <p:nvPr/>
+        </p:nvSpPr>
+        <p:spPr>
+          <a:xfrm>
+            <a:off x="8430768" y="2834640"/>
+            <a:ext cx="448056" cy="365760"/>
+          </a:xfrm>
+          <a:prstGeom prst="rect">
+            <a:avLst/>
+          </a:prstGeom>
+          <a:noFill/>
+          <a:ln/>
+        </p:spPr>
+        <p:txBody>
+          <a:bodyPr wrap="square" lIns="254" tIns="254" rIns="254" bIns="254" rtlCol="0" anchor="ctr">
+            <a:normAutofit/>
+          </a:bodyPr>
+          <a:lstStyle/>
+          <a:p>
+            <a:pPr algn="ctr" indent="0" marL="0">
+              <a:buNone/>
+            </a:pPr>
+            <a:r>
+              <a:rPr lang="en-US" sz="2700" b="1" dirty="0">
+                <a:solidFill>
+                  <a:srgbClr val="06AFA5"/>
+                </a:solidFill>
+                <a:latin typeface="Aptos" pitchFamily="34" charset="0"/>
+                <a:ea typeface="Aptos" pitchFamily="34" charset="-122"/>
+                <a:cs typeface="Aptos" pitchFamily="34" charset="-120"/>
+              </a:rPr>
+              <a:t>→</a:t>
+            </a:r>
+            <a:endParaRPr lang="en-US" sz="2700" dirty="0"/>
+          </a:p>
+        </p:txBody>
+      </p:sp>
+      <p:sp>
+        <p:nvSpPr>
+          <p:cNvPr id="19" name="Text 17"/>
+          <p:cNvSpPr/>
+          <p:nvPr/>
+        </p:nvSpPr>
+        <p:spPr>
+          <a:xfrm>
+            <a:off x="8924544" y="2706624"/>
+            <a:ext cx="2103120" cy="585216"/>
+          </a:xfrm>
+          <a:prstGeom prst="rect">
+            <a:avLst/>
+          </a:prstGeom>
+          <a:noFill/>
+          <a:ln/>
+        </p:spPr>
+        <p:txBody>
+          <a:bodyPr wrap="square" lIns="254" tIns="254" rIns="254" bIns="254" rtlCol="0" anchor="ctr">
+            <a:normAutofit/>
+          </a:bodyPr>
+          <a:lstStyle/>
+          <a:p>
+            <a:pPr algn="l" indent="0" marL="0">
+              <a:buNone/>
+            </a:pPr>
+            <a:r>
+              <a:rPr lang="en-US" sz="3400" b="1" dirty="0">
+                <a:solidFill>
+                  <a:srgbClr val="06AFA5"/>
+                </a:solidFill>
+                <a:latin typeface="Aptos" pitchFamily="34" charset="0"/>
+                <a:ea typeface="Aptos" pitchFamily="34" charset="-122"/>
+                <a:cs typeface="Aptos" pitchFamily="34" charset="-120"/>
+              </a:rPr>
+              <a:t>$0.53</a:t>
+            </a:r>
+            <a:endParaRPr lang="en-US" sz="3400" dirty="0"/>
+          </a:p>
+        </p:txBody>
+      </p:sp>
+      <p:sp>
+        <p:nvSpPr>
+          <p:cNvPr id="20" name="Text 18"/>
+          <p:cNvSpPr/>
+          <p:nvPr/>
+        </p:nvSpPr>
+        <p:spPr>
+          <a:xfrm>
+            <a:off x="6611112" y="3456432"/>
+            <a:ext cx="4663440" cy="292608"/>
+          </a:xfrm>
+          <a:prstGeom prst="rect">
+            <a:avLst/>
+          </a:prstGeom>
+          <a:noFill/>
+          <a:ln/>
+        </p:spPr>
+        <p:txBody>
+          <a:bodyPr wrap="square" lIns="254" tIns="254" rIns="254" bIns="254" rtlCol="0" anchor="ctr">
+            <a:normAutofit/>
+          </a:bodyPr>
+          <a:lstStyle/>
+          <a:p>
+            <a:pPr algn="l" indent="0" marL="0">
+              <a:buNone/>
+            </a:pPr>
+            <a:r>
+              <a:rPr lang="en-US" sz="1710" b="1" dirty="0">
+                <a:solidFill>
+                  <a:srgbClr val="132438"/>
+                </a:solidFill>
+                <a:latin typeface="Aptos" pitchFamily="34" charset="0"/>
+                <a:ea typeface="Aptos" pitchFamily="34" charset="-122"/>
+                <a:cs typeface="Aptos" pitchFamily="34" charset="-120"/>
+              </a:rPr>
+              <a:t>Reported average per run</a:t>
+            </a:r>
+            <a:endParaRPr lang="en-US" sz="1710" dirty="0"/>
+          </a:p>
+        </p:txBody>
+      </p:sp>
+      <p:sp>
+        <p:nvSpPr>
+          <p:cNvPr id="21" name="Text 19"/>
+          <p:cNvSpPr/>
+          <p:nvPr/>
+        </p:nvSpPr>
+        <p:spPr>
+          <a:xfrm>
+            <a:off x="6611112" y="3959352"/>
+            <a:ext cx="4572000" cy="868680"/>
+          </a:xfrm>
+          <a:prstGeom prst="rect">
+            <a:avLst/>
+          </a:prstGeom>
+          <a:noFill/>
+          <a:ln/>
+        </p:spPr>
+        <p:txBody>
+          <a:bodyPr wrap="square" lIns="254" tIns="254" rIns="254" bIns="254" rtlCol="0" anchor="t">
+            <a:normAutofit/>
+          </a:bodyPr>
+          <a:lstStyle/>
+          <a:p>
+            <a:pPr algn="l" indent="0" marL="0">
+              <a:buNone/>
+            </a:pPr>
+            <a:r>
+              <a:rPr lang="en-US" sz="1460" dirty="0">
+                <a:solidFill>
+                  <a:srgbClr val="536579"/>
+                </a:solidFill>
+                <a:latin typeface="Aptos" pitchFamily="34" charset="0"/>
+                <a:ea typeface="Aptos" pitchFamily="34" charset="-122"/>
+                <a:cs typeface="Aptos" pitchFamily="34" charset="-120"/>
+              </a:rPr>
+              <a:t>28 read tools versus a broader toolset.</a:t>
+            </a:r>
+            <a:endParaRPr lang="en-US" sz="1460" dirty="0"/>
+          </a:p>
+          <a:p>
+            <a:pPr algn="l" indent="0" marL="0">
+              <a:buNone/>
+            </a:pPr>
+            <a:r>
+              <a:rPr lang="en-US" sz="1460" dirty="0">
+                <a:solidFill>
+                  <a:srgbClr val="536579"/>
+                </a:solidFill>
+                <a:latin typeface="Aptos" pitchFamily="34" charset="0"/>
+                <a:ea typeface="Aptos" pitchFamily="34" charset="-122"/>
+                <a:cs typeface="Aptos" pitchFamily="34" charset="-120"/>
+              </a:rPr>
+              <a:t>Five runs per setup; identical cases vary.</a:t>
+            </a:r>
+            <a:endParaRPr lang="en-US" sz="1460" dirty="0"/>
+          </a:p>
+        </p:txBody>
+      </p:sp>
+      <p:sp>
+        <p:nvSpPr>
+          <p:cNvPr id="22" name="Shape 20"/>
+          <p:cNvSpPr/>
+          <p:nvPr/>
+        </p:nvSpPr>
+        <p:spPr>
+          <a:xfrm>
+            <a:off x="694944" y="5495544"/>
+            <a:ext cx="10789920" cy="438912"/>
+          </a:xfrm>
+          <a:prstGeom prst="roundRect">
+            <a:avLst>
+              <a:gd name="adj" fmla="val 22917"/>
+            </a:avLst>
+          </a:prstGeom>
+          <a:solidFill>
+            <a:srgbClr val="EAF0F5"/>
+          </a:solidFill>
+          <a:ln w="12700">
+            <a:solidFill>
+              <a:srgbClr val="EAF0F5">
+                <a:alpha val="0"/>
+              </a:srgbClr>
+            </a:solidFill>
+            <a:prstDash val="solid"/>
+          </a:ln>
+        </p:spPr>
+        <p:txBody>
+          <a:bodyPr/>
+          <a:p/>
+        </p:txBody>
+      </p:sp>
+      <p:sp>
+        <p:nvSpPr>
+          <p:cNvPr id="23" name="Text 21"/>
+          <p:cNvSpPr/>
+          <p:nvPr/>
+        </p:nvSpPr>
+        <p:spPr>
+          <a:xfrm>
+            <a:off x="914400" y="5614416"/>
+            <a:ext cx="10378440" cy="164592"/>
+          </a:xfrm>
+          <a:prstGeom prst="rect">
+            <a:avLst/>
+          </a:prstGeom>
+          <a:noFill/>
+          <a:ln/>
+        </p:spPr>
+        <p:txBody>
+          <a:bodyPr wrap="square" lIns="254" tIns="254" rIns="254" bIns="254" rtlCol="0" anchor="ctr">
+            <a:normAutofit/>
+          </a:bodyPr>
+          <a:lstStyle/>
+          <a:p>
+            <a:pPr algn="ctr" indent="0" marL="0">
+              <a:buNone/>
+            </a:pPr>
+            <a:r>
+              <a:rPr lang="en-US" sz="1190" dirty="0">
+                <a:solidFill>
+                  <a:srgbClr val="536579"/>
+                </a:solidFill>
+                <a:latin typeface="Aptos" pitchFamily="34" charset="0"/>
+                <a:ea typeface="Aptos" pitchFamily="34" charset="-122"/>
+                <a:cs typeface="Aptos" pitchFamily="34" charset="-120"/>
+              </a:rPr>
+              <a:t>NOT A BENCHMARK: Hosted agent changed version during tests; evaluation must be repeated in the customer environment.</a:t>
+            </a:r>
+            <a:endParaRPr lang="en-US" sz="1190" dirty="0"/>
+          </a:p>
+        </p:txBody>
+      </p:sp>
+    </p:spTree>
+  </p:cSld>
+  <p:clrMapOvr>
+    <a:masterClrMapping/>
+  </p:clrMapOvr>
+</p:sld>
+</file>
+
+<file path=ppt/slides/slide11.xml><?xml version="1.0" encoding="utf-8"?>
+<p:sld xmlns:a="http://schemas.openxmlformats.org/drawingml/2006/main" xmlns:r="http://schemas.openxmlformats.org/officeDocument/2006/relationships" xmlns:p="http://schemas.openxmlformats.org/presentationml/2006/main">
   <p:cSld name="Slide 10">
     <p:bg>
       <p:bgPr>
@@ -3187,7 +4073,7 @@
 </p:sld>
 </file>
 
-<file path=ppt/slides/slide11.xml><?xml version="1.0" encoding="utf-8"?>
+<file path=ppt/slides/slide12.xml><?xml version="1.0" encoding="utf-8"?>
 <p:sld xmlns:a="http://schemas.openxmlformats.org/drawingml/2006/main" xmlns:r="http://schemas.openxmlformats.org/officeDocument/2006/relationships" xmlns:p="http://schemas.openxmlformats.org/presentationml/2006/main">
   <p:cSld name="Slide 11">
     <p:bg>
@@ -3918,7 +4804,7 @@
 </p:sld>
 </file>
 
-<file path=ppt/slides/slide12.xml><?xml version="1.0" encoding="utf-8"?>
+<file path=ppt/slides/slide13.xml><?xml version="1.0" encoding="utf-8"?>
 <p:sld xmlns:a="http://schemas.openxmlformats.org/drawingml/2006/main" xmlns:r="http://schemas.openxmlformats.org/officeDocument/2006/relationships" xmlns:p="http://schemas.openxmlformats.org/presentationml/2006/main">
   <p:cSld name="Slide 12">
     <p:bg>
@@ -4430,7 +5316,7 @@
 </p:sld>
 </file>
 
-<file path=ppt/slides/slide13.xml><?xml version="1.0" encoding="utf-8"?>
+<file path=ppt/slides/slide14.xml><?xml version="1.0" encoding="utf-8"?>
 <p:sld xmlns:a="http://schemas.openxmlformats.org/drawingml/2006/main" xmlns:r="http://schemas.openxmlformats.org/officeDocument/2006/relationships" xmlns:p="http://schemas.openxmlformats.org/presentationml/2006/main">
   <p:cSld name="Slide 13">
     <p:bg>
@@ -5343,7 +6229,7 @@
 </p:sld>
 </file>
 
-<file path=ppt/slides/slide14.xml><?xml version="1.0" encoding="utf-8"?>
+<file path=ppt/slides/slide15.xml><?xml version="1.0" encoding="utf-8"?>
 <p:sld xmlns:a="http://schemas.openxmlformats.org/drawingml/2006/main" xmlns:r="http://schemas.openxmlformats.org/officeDocument/2006/relationships" xmlns:p="http://schemas.openxmlformats.org/presentationml/2006/main">
   <p:cSld name="Slide 14">
     <p:bg>
@@ -6464,6 +7350,1010 @@
 </file>
 
 <file path=ppt/slides/slide2.xml><?xml version="1.0" encoding="utf-8"?>
+<p:sld xmlns:a="http://schemas.openxmlformats.org/drawingml/2006/main" xmlns:p="http://schemas.openxmlformats.org/presentationml/2006/main" xmlns:r="http://schemas.openxmlformats.org/officeDocument/2006/relationships">
+  <p:cSld>
+    <p:bg>
+      <p:bgPr>
+        <a:solidFill>
+          <a:srgbClr val="F7F9FC"/>
+        </a:solidFill>
+      </p:bgPr>
+    </p:bg>
+    <p:spTree>
+      <p:nvGrpSpPr>
+        <p:cNvPr id="1" name=""/>
+        <p:cNvGrpSpPr/>
+        <p:nvPr/>
+      </p:nvGrpSpPr>
+      <p:grpSpPr/>
+      <p:sp>
+        <p:nvSpPr>
+          <p:cNvPr id="2" name="Text 0"/>
+          <p:cNvSpPr/>
+          <p:nvPr/>
+        </p:nvSpPr>
+        <p:spPr>
+          <a:xfrm>
+            <a:off x="640080" y="310896"/>
+            <a:ext cx="9144000" cy="219456"/>
+          </a:xfrm>
+          <a:prstGeom prst="rect">
+            <a:avLst/>
+          </a:prstGeom>
+          <a:noFill/>
+          <a:ln/>
+        </p:spPr>
+        <p:txBody>
+          <a:bodyPr wrap="square" lIns="254" tIns="254" rIns="254" bIns="254" rtlCol="0" anchor="ctr">
+            <a:normAutofit/>
+          </a:bodyPr>
+          <a:lstStyle/>
+          <a:p>
+            <a:pPr algn="l" indent="0" marL="0">
+              <a:buNone/>
+            </a:pPr>
+            <a:r>
+              <a:rPr lang="en-US" sz="1050" b="1" spc="240" kern="0" dirty="0">
+                <a:solidFill>
+                  <a:srgbClr val="06AFA5"/>
+                </a:solidFill>
+                <a:latin typeface="Aptos" pitchFamily="34" charset="0"/>
+                <a:ea typeface="Aptos" pitchFamily="34" charset="-122"/>
+                <a:cs typeface="Aptos" pitchFamily="34" charset="-120"/>
+              </a:rPr>
+              <a:t>INTRODUCTION  /  AGENDA</a:t>
+            </a:r>
+            <a:endParaRPr lang="en-US" sz="1050" dirty="0"/>
+          </a:p>
+        </p:txBody>
+      </p:sp>
+      <p:sp>
+        <p:nvSpPr>
+          <p:cNvPr id="4" name="Text 2"/>
+          <p:cNvSpPr/>
+          <p:nvPr/>
+        </p:nvSpPr>
+        <p:spPr>
+          <a:xfrm>
+            <a:off x="640080" y="777240"/>
+            <a:ext cx="10927080" cy="932688"/>
+          </a:xfrm>
+          <a:prstGeom prst="rect">
+            <a:avLst/>
+          </a:prstGeom>
+          <a:noFill/>
+          <a:ln/>
+        </p:spPr>
+        <p:txBody>
+          <a:bodyPr wrap="square" lIns="254" tIns="254" rIns="254" bIns="254" rtlCol="0" anchor="t">
+            <a:normAutofit/>
+          </a:bodyPr>
+          <a:lstStyle/>
+          <a:p>
+            <a:pPr algn="l" indent="0" marL="0">
+              <a:buNone/>
+            </a:pPr>
+            <a:r>
+              <a:rPr lang="en-US" sz="3150" b="1" dirty="0">
+                <a:solidFill>
+                  <a:srgbClr val="132438"/>
+                </a:solidFill>
+                <a:latin typeface="Aptos" pitchFamily="34" charset="0"/>
+                <a:ea typeface="Aptos" pitchFamily="34" charset="-122"/>
+                <a:cs typeface="Aptos" pitchFamily="34" charset="-120"/>
+              </a:rPr>
+              <a:t>Today: one real incident and a first step.</a:t>
+            </a:r>
+            <a:endParaRPr lang="en-US" sz="3150" dirty="0"/>
+          </a:p>
+        </p:txBody>
+      </p:sp>
+      <p:sp>
+        <p:nvSpPr>
+          <p:cNvPr id="5" name="Shape 3"/>
+          <p:cNvSpPr/>
+          <p:nvPr/>
+        </p:nvSpPr>
+        <p:spPr>
+          <a:xfrm>
+            <a:off x="640080" y="6327648"/>
+            <a:ext cx="10927080" cy="0"/>
+          </a:xfrm>
+          <a:prstGeom prst="line">
+            <a:avLst/>
+          </a:prstGeom>
+          <a:noFill/>
+          <a:ln w="11430">
+            <a:solidFill>
+              <a:srgbClr val="DCE5ED"/>
+            </a:solidFill>
+            <a:prstDash val="solid"/>
+          </a:ln>
+        </p:spPr>
+        <p:txBody>
+          <a:bodyPr/>
+          <a:p/>
+        </p:txBody>
+      </p:sp>
+      <p:sp>
+        <p:nvSpPr>
+          <p:cNvPr id="6" name="Text 4"/>
+          <p:cNvSpPr/>
+          <p:nvPr/>
+        </p:nvSpPr>
+        <p:spPr>
+          <a:xfrm>
+            <a:off x="640080" y="6419088"/>
+            <a:ext cx="5486400" cy="155448"/>
+          </a:xfrm>
+          <a:prstGeom prst="rect">
+            <a:avLst/>
+          </a:prstGeom>
+          <a:noFill/>
+          <a:ln/>
+        </p:spPr>
+        <p:txBody>
+          <a:bodyPr wrap="square" lIns="254" tIns="254" rIns="254" bIns="254" rtlCol="0" anchor="ctr">
+            <a:normAutofit/>
+          </a:bodyPr>
+          <a:lstStyle/>
+          <a:p>
+            <a:pPr algn="l" indent="0" marL="0">
+              <a:buNone/>
+            </a:pPr>
+            <a:r>
+              <a:rPr lang="en-US" sz="900" spc="120" kern="0" dirty="0">
+                <a:solidFill>
+                  <a:srgbClr val="536579"/>
+                </a:solidFill>
+                <a:latin typeface="Aptos" pitchFamily="34" charset="0"/>
+                <a:ea typeface="Aptos" pitchFamily="34" charset="-122"/>
+                <a:cs typeface="Aptos" pitchFamily="34" charset="-120"/>
+              </a:rPr>
+              <a:t>KAOP  /  CUSTOMER DISCUSSION</a:t>
+            </a:r>
+            <a:endParaRPr lang="en-US" sz="900" dirty="0"/>
+          </a:p>
+        </p:txBody>
+      </p:sp>
+      <p:sp>
+        <p:nvSpPr>
+          <p:cNvPr id="7" name="Rounded Rectangle 6"/>
+          <p:cNvSpPr/>
+          <p:nvPr/>
+        </p:nvSpPr>
+        <p:spPr>
+          <a:xfrm>
+            <a:off x="673100" y="1905000"/>
+            <a:ext cx="3683000" cy="3683000"/>
+          </a:xfrm>
+          <a:prstGeom prst="roundRect">
+            <a:avLst>
+              <a:gd name="adj" fmla="val 8000"/>
+            </a:avLst>
+          </a:prstGeom>
+          <a:solidFill>
+            <a:srgbClr val="0C1423"/>
+          </a:solidFill>
+          <a:ln>
+            <a:solidFill>
+              <a:srgbClr val="0C1423"/>
+            </a:solidFill>
+          </a:ln>
+          <a:effectLst/>
+        </p:spPr>
+        <p:style>
+          <a:lnRef idx="1">
+            <a:schemeClr val="accent1"/>
+          </a:lnRef>
+          <a:fillRef idx="3">
+            <a:schemeClr val="accent1"/>
+          </a:fillRef>
+          <a:effectRef idx="2">
+            <a:schemeClr val="accent1"/>
+          </a:effectRef>
+          <a:fontRef idx="minor">
+            <a:schemeClr val="lt1"/>
+          </a:fontRef>
+        </p:style>
+        <p:txBody>
+          <a:bodyPr rtlCol="0" anchor="ctr"/>
+          <a:lstStyle/>
+          <a:p>
+            <a:pPr algn="ctr"/>
+          </a:p>
+        </p:txBody>
+      </p:sp>
+      <p:sp>
+        <p:nvSpPr>
+          <p:cNvPr id="8" name="TextBox 7"/>
+          <p:cNvSpPr txBox="1"/>
+          <p:nvPr/>
+        </p:nvSpPr>
+        <p:spPr>
+          <a:xfrm>
+            <a:off x="952500" y="2184400"/>
+            <a:ext cx="3175000" cy="3175000"/>
+          </a:xfrm>
+          <a:prstGeom prst="rect">
+            <a:avLst/>
+          </a:prstGeom>
+          <a:noFill/>
+        </p:spPr>
+        <p:txBody>
+          <a:bodyPr wrap="square" lIns="0" rIns="0" tIns="0" bIns="0">
+            <a:spAutoFit/>
+          </a:bodyPr>
+          <a:lstStyle/>
+          <a:p>
+            <a:r>
+              <a:rPr sz="1100" b="1">
+                <a:solidFill>
+                  <a:srgbClr val="C6F783"/>
+                </a:solidFill>
+                <a:latin typeface="Aptos"/>
+              </a:rPr>
+              <a:t>YOUR PRESENTER</a:t>
+            </a:r>
+          </a:p>
+          <a:p>
+            <a:pPr>
+              <a:spcBef>
+                <a:spcPts val="600"/>
+              </a:spcBef>
+            </a:pPr>
+            <a:r>
+              <a:rPr sz="2400" b="1">
+                <a:solidFill>
+                  <a:srgbClr val="FFFFFF"/>
+                </a:solidFill>
+                <a:latin typeface="Aptos"/>
+              </a:rPr>
+              <a:t>Echizeni Ikpah</a:t>
+            </a:r>
+          </a:p>
+          <a:p>
+            <a:pPr>
+              <a:spcBef>
+                <a:spcPts val="600"/>
+              </a:spcBef>
+            </a:pPr>
+            <a:r>
+              <a:rPr sz="1400" b="0">
+                <a:solidFill>
+                  <a:srgbClr val="B8C4D6"/>
+                </a:solidFill>
+                <a:latin typeface="Aptos"/>
+              </a:rPr>
+              <a:t>Product Engineer, Komodor</a:t>
+            </a:r>
+          </a:p>
+          <a:p>
+            <a:pPr>
+              <a:spcBef>
+                <a:spcPts val="600"/>
+              </a:spcBef>
+            </a:pPr>
+            <a:r>
+              <a:rPr sz="1400" b="0">
+                <a:solidFill>
+                  <a:srgbClr val="E6ECF4"/>
+                </a:solidFill>
+                <a:latin typeface="Aptos"/>
+              </a:rPr>
+              <a:t>I help teams adopt KAOP: get the first workflow running, measure the results with you, and bring your feedback to our product team.</a:t>
+            </a:r>
+          </a:p>
+        </p:txBody>
+      </p:sp>
+      <p:sp>
+        <p:nvSpPr>
+          <p:cNvPr id="9" name="TextBox 8"/>
+          <p:cNvSpPr txBox="1"/>
+          <p:nvPr/>
+        </p:nvSpPr>
+        <p:spPr>
+          <a:xfrm>
+            <a:off x="952500" y="4978400"/>
+            <a:ext cx="3175000" cy="457200"/>
+          </a:xfrm>
+          <a:prstGeom prst="rect">
+            <a:avLst/>
+          </a:prstGeom>
+          <a:noFill/>
+        </p:spPr>
+        <p:txBody>
+          <a:bodyPr wrap="square" lIns="0" rIns="0" tIns="0" bIns="0">
+            <a:spAutoFit/>
+          </a:bodyPr>
+          <a:lstStyle/>
+          <a:p>
+            <a:r>
+              <a:rPr sz="1300" b="1">
+                <a:solidFill>
+                  <a:srgbClr val="C6F783"/>
+                </a:solidFill>
+                <a:latin typeface="Aptos"/>
+              </a:rPr>
+              <a:t>Please ask questions any time. This is a conversation.</a:t>
+            </a:r>
+          </a:p>
+        </p:txBody>
+      </p:sp>
+      <p:sp>
+        <p:nvSpPr>
+          <p:cNvPr id="10" name="Rounded Rectangle 9"/>
+          <p:cNvSpPr/>
+          <p:nvPr/>
+        </p:nvSpPr>
+        <p:spPr>
+          <a:xfrm>
+            <a:off x="4699000" y="1955800"/>
+            <a:ext cx="406400" cy="406400"/>
+          </a:xfrm>
+          <a:prstGeom prst="roundRect">
+            <a:avLst>
+              <a:gd name="adj" fmla="val 8000"/>
+            </a:avLst>
+          </a:prstGeom>
+          <a:solidFill>
+            <a:srgbClr val="06AFA5"/>
+          </a:solidFill>
+          <a:ln>
+            <a:solidFill>
+              <a:srgbClr val="06AFA5"/>
+            </a:solidFill>
+          </a:ln>
+          <a:effectLst/>
+        </p:spPr>
+        <p:style>
+          <a:lnRef idx="1">
+            <a:schemeClr val="accent1"/>
+          </a:lnRef>
+          <a:fillRef idx="3">
+            <a:schemeClr val="accent1"/>
+          </a:fillRef>
+          <a:effectRef idx="2">
+            <a:schemeClr val="accent1"/>
+          </a:effectRef>
+          <a:fontRef idx="minor">
+            <a:schemeClr val="lt1"/>
+          </a:fontRef>
+        </p:style>
+        <p:txBody>
+          <a:bodyPr rtlCol="0" anchor="ctr"/>
+          <a:lstStyle/>
+          <a:p>
+            <a:pPr algn="ctr"/>
+          </a:p>
+        </p:txBody>
+      </p:sp>
+      <p:sp>
+        <p:nvSpPr>
+          <p:cNvPr id="11" name="TextBox 10"/>
+          <p:cNvSpPr txBox="1"/>
+          <p:nvPr/>
+        </p:nvSpPr>
+        <p:spPr>
+          <a:xfrm>
+            <a:off x="4699000" y="2057400"/>
+            <a:ext cx="406400" cy="228600"/>
+          </a:xfrm>
+          <a:prstGeom prst="rect">
+            <a:avLst/>
+          </a:prstGeom>
+          <a:noFill/>
+        </p:spPr>
+        <p:txBody>
+          <a:bodyPr wrap="square" lIns="0" rIns="0" tIns="0" bIns="0">
+            <a:spAutoFit/>
+          </a:bodyPr>
+          <a:lstStyle/>
+          <a:p>
+            <a:pPr algn="ctr"/>
+            <a:r>
+              <a:rPr sz="1100" b="1">
+                <a:solidFill>
+                  <a:srgbClr val="FFFFFF"/>
+                </a:solidFill>
+                <a:latin typeface="Aptos"/>
+              </a:rPr>
+              <a:t>01</a:t>
+            </a:r>
+          </a:p>
+        </p:txBody>
+      </p:sp>
+      <p:sp>
+        <p:nvSpPr>
+          <p:cNvPr id="12" name="TextBox 11"/>
+          <p:cNvSpPr txBox="1"/>
+          <p:nvPr/>
+        </p:nvSpPr>
+        <p:spPr>
+          <a:xfrm>
+            <a:off x="5308600" y="1905000"/>
+            <a:ext cx="6172200" cy="635000"/>
+          </a:xfrm>
+          <a:prstGeom prst="rect">
+            <a:avLst/>
+          </a:prstGeom>
+          <a:noFill/>
+        </p:spPr>
+        <p:txBody>
+          <a:bodyPr wrap="square" lIns="0" rIns="0" tIns="0" bIns="0">
+            <a:spAutoFit/>
+          </a:bodyPr>
+          <a:lstStyle/>
+          <a:p>
+            <a:r>
+              <a:rPr sz="1700" b="1">
+                <a:solidFill>
+                  <a:srgbClr val="132438"/>
+                </a:solidFill>
+                <a:latin typeface="Aptos"/>
+              </a:rPr>
+              <a:t>Your environment</a:t>
+            </a:r>
+          </a:p>
+          <a:p>
+            <a:pPr>
+              <a:spcBef>
+                <a:spcPts val="600"/>
+              </a:spcBef>
+            </a:pPr>
+            <a:r>
+              <a:rPr sz="1350" b="0">
+                <a:solidFill>
+                  <a:srgbClr val="536579"/>
+                </a:solidFill>
+                <a:latin typeface="Aptos"/>
+              </a:rPr>
+              <a:t>Where agent sprawl would hurt first</a:t>
+            </a:r>
+          </a:p>
+        </p:txBody>
+      </p:sp>
+      <p:sp>
+        <p:nvSpPr>
+          <p:cNvPr id="13" name="Rounded Rectangle 12"/>
+          <p:cNvSpPr/>
+          <p:nvPr/>
+        </p:nvSpPr>
+        <p:spPr>
+          <a:xfrm>
+            <a:off x="4699000" y="2692400"/>
+            <a:ext cx="406400" cy="406400"/>
+          </a:xfrm>
+          <a:prstGeom prst="roundRect">
+            <a:avLst>
+              <a:gd name="adj" fmla="val 8000"/>
+            </a:avLst>
+          </a:prstGeom>
+          <a:solidFill>
+            <a:srgbClr val="06AFA5"/>
+          </a:solidFill>
+          <a:ln>
+            <a:solidFill>
+              <a:srgbClr val="06AFA5"/>
+            </a:solidFill>
+          </a:ln>
+          <a:effectLst/>
+        </p:spPr>
+        <p:style>
+          <a:lnRef idx="1">
+            <a:schemeClr val="accent1"/>
+          </a:lnRef>
+          <a:fillRef idx="3">
+            <a:schemeClr val="accent1"/>
+          </a:fillRef>
+          <a:effectRef idx="2">
+            <a:schemeClr val="accent1"/>
+          </a:effectRef>
+          <a:fontRef idx="minor">
+            <a:schemeClr val="lt1"/>
+          </a:fontRef>
+        </p:style>
+        <p:txBody>
+          <a:bodyPr rtlCol="0" anchor="ctr"/>
+          <a:lstStyle/>
+          <a:p>
+            <a:pPr algn="ctr"/>
+          </a:p>
+        </p:txBody>
+      </p:sp>
+      <p:sp>
+        <p:nvSpPr>
+          <p:cNvPr id="14" name="TextBox 13"/>
+          <p:cNvSpPr txBox="1"/>
+          <p:nvPr/>
+        </p:nvSpPr>
+        <p:spPr>
+          <a:xfrm>
+            <a:off x="4699000" y="2794000"/>
+            <a:ext cx="406400" cy="228600"/>
+          </a:xfrm>
+          <a:prstGeom prst="rect">
+            <a:avLst/>
+          </a:prstGeom>
+          <a:noFill/>
+        </p:spPr>
+        <p:txBody>
+          <a:bodyPr wrap="square" lIns="0" rIns="0" tIns="0" bIns="0">
+            <a:spAutoFit/>
+          </a:bodyPr>
+          <a:lstStyle/>
+          <a:p>
+            <a:pPr algn="ctr"/>
+            <a:r>
+              <a:rPr sz="1100" b="1">
+                <a:solidFill>
+                  <a:srgbClr val="FFFFFF"/>
+                </a:solidFill>
+                <a:latin typeface="Aptos"/>
+              </a:rPr>
+              <a:t>02</a:t>
+            </a:r>
+          </a:p>
+        </p:txBody>
+      </p:sp>
+      <p:sp>
+        <p:nvSpPr>
+          <p:cNvPr id="15" name="TextBox 14"/>
+          <p:cNvSpPr txBox="1"/>
+          <p:nvPr/>
+        </p:nvSpPr>
+        <p:spPr>
+          <a:xfrm>
+            <a:off x="5308600" y="2641600"/>
+            <a:ext cx="6172200" cy="635000"/>
+          </a:xfrm>
+          <a:prstGeom prst="rect">
+            <a:avLst/>
+          </a:prstGeom>
+          <a:noFill/>
+        </p:spPr>
+        <p:txBody>
+          <a:bodyPr wrap="square" lIns="0" rIns="0" tIns="0" bIns="0">
+            <a:spAutoFit/>
+          </a:bodyPr>
+          <a:lstStyle/>
+          <a:p>
+            <a:r>
+              <a:rPr sz="1700" b="1">
+                <a:solidFill>
+                  <a:srgbClr val="132438"/>
+                </a:solidFill>
+                <a:latin typeface="Aptos"/>
+              </a:rPr>
+              <a:t>Why KAOP</a:t>
+            </a:r>
+          </a:p>
+          <a:p>
+            <a:pPr>
+              <a:spcBef>
+                <a:spcPts val="600"/>
+              </a:spcBef>
+            </a:pPr>
+            <a:r>
+              <a:rPr sz="1350" b="0">
+                <a:solidFill>
+                  <a:srgbClr val="536579"/>
+                </a:solidFill>
+                <a:latin typeface="Aptos"/>
+              </a:rPr>
+              <a:t>One view, real limits, work that closes</a:t>
+            </a:r>
+          </a:p>
+        </p:txBody>
+      </p:sp>
+      <p:sp>
+        <p:nvSpPr>
+          <p:cNvPr id="16" name="Rounded Rectangle 15"/>
+          <p:cNvSpPr/>
+          <p:nvPr/>
+        </p:nvSpPr>
+        <p:spPr>
+          <a:xfrm>
+            <a:off x="4699000" y="3429000"/>
+            <a:ext cx="406400" cy="406400"/>
+          </a:xfrm>
+          <a:prstGeom prst="roundRect">
+            <a:avLst>
+              <a:gd name="adj" fmla="val 8000"/>
+            </a:avLst>
+          </a:prstGeom>
+          <a:solidFill>
+            <a:srgbClr val="06AFA5"/>
+          </a:solidFill>
+          <a:ln>
+            <a:solidFill>
+              <a:srgbClr val="06AFA5"/>
+            </a:solidFill>
+          </a:ln>
+          <a:effectLst/>
+        </p:spPr>
+        <p:style>
+          <a:lnRef idx="1">
+            <a:schemeClr val="accent1"/>
+          </a:lnRef>
+          <a:fillRef idx="3">
+            <a:schemeClr val="accent1"/>
+          </a:fillRef>
+          <a:effectRef idx="2">
+            <a:schemeClr val="accent1"/>
+          </a:effectRef>
+          <a:fontRef idx="minor">
+            <a:schemeClr val="lt1"/>
+          </a:fontRef>
+        </p:style>
+        <p:txBody>
+          <a:bodyPr rtlCol="0" anchor="ctr"/>
+          <a:lstStyle/>
+          <a:p>
+            <a:pPr algn="ctr"/>
+          </a:p>
+        </p:txBody>
+      </p:sp>
+      <p:sp>
+        <p:nvSpPr>
+          <p:cNvPr id="17" name="TextBox 16"/>
+          <p:cNvSpPr txBox="1"/>
+          <p:nvPr/>
+        </p:nvSpPr>
+        <p:spPr>
+          <a:xfrm>
+            <a:off x="4699000" y="3530600"/>
+            <a:ext cx="406400" cy="228600"/>
+          </a:xfrm>
+          <a:prstGeom prst="rect">
+            <a:avLst/>
+          </a:prstGeom>
+          <a:noFill/>
+        </p:spPr>
+        <p:txBody>
+          <a:bodyPr wrap="square" lIns="0" rIns="0" tIns="0" bIns="0">
+            <a:spAutoFit/>
+          </a:bodyPr>
+          <a:lstStyle/>
+          <a:p>
+            <a:pPr algn="ctr"/>
+            <a:r>
+              <a:rPr sz="1100" b="1">
+                <a:solidFill>
+                  <a:srgbClr val="FFFFFF"/>
+                </a:solidFill>
+                <a:latin typeface="Aptos"/>
+              </a:rPr>
+              <a:t>03</a:t>
+            </a:r>
+          </a:p>
+        </p:txBody>
+      </p:sp>
+      <p:sp>
+        <p:nvSpPr>
+          <p:cNvPr id="18" name="TextBox 17"/>
+          <p:cNvSpPr txBox="1"/>
+          <p:nvPr/>
+        </p:nvSpPr>
+        <p:spPr>
+          <a:xfrm>
+            <a:off x="5308600" y="3378200"/>
+            <a:ext cx="6172200" cy="635000"/>
+          </a:xfrm>
+          <a:prstGeom prst="rect">
+            <a:avLst/>
+          </a:prstGeom>
+          <a:noFill/>
+        </p:spPr>
+        <p:txBody>
+          <a:bodyPr wrap="square" lIns="0" rIns="0" tIns="0" bIns="0">
+            <a:spAutoFit/>
+          </a:bodyPr>
+          <a:lstStyle/>
+          <a:p>
+            <a:r>
+              <a:rPr sz="1700" b="1">
+                <a:solidFill>
+                  <a:srgbClr val="132438"/>
+                </a:solidFill>
+                <a:latin typeface="Aptos"/>
+              </a:rPr>
+              <a:t>A live incident</a:t>
+            </a:r>
+          </a:p>
+          <a:p>
+            <a:pPr>
+              <a:spcBef>
+                <a:spcPts val="600"/>
+              </a:spcBef>
+            </a:pPr>
+            <a:r>
+              <a:rPr sz="1350" b="0">
+                <a:solidFill>
+                  <a:srgbClr val="536579"/>
+                </a:solidFill>
+                <a:latin typeface="Aptos"/>
+              </a:rPr>
+              <a:t>A real alert, the evidence, a human decision</a:t>
+            </a:r>
+          </a:p>
+        </p:txBody>
+      </p:sp>
+      <p:sp>
+        <p:nvSpPr>
+          <p:cNvPr id="19" name="Rounded Rectangle 18"/>
+          <p:cNvSpPr/>
+          <p:nvPr/>
+        </p:nvSpPr>
+        <p:spPr>
+          <a:xfrm>
+            <a:off x="4699000" y="4165600"/>
+            <a:ext cx="406400" cy="406400"/>
+          </a:xfrm>
+          <a:prstGeom prst="roundRect">
+            <a:avLst>
+              <a:gd name="adj" fmla="val 8000"/>
+            </a:avLst>
+          </a:prstGeom>
+          <a:solidFill>
+            <a:srgbClr val="06AFA5"/>
+          </a:solidFill>
+          <a:ln>
+            <a:solidFill>
+              <a:srgbClr val="06AFA5"/>
+            </a:solidFill>
+          </a:ln>
+          <a:effectLst/>
+        </p:spPr>
+        <p:style>
+          <a:lnRef idx="1">
+            <a:schemeClr val="accent1"/>
+          </a:lnRef>
+          <a:fillRef idx="3">
+            <a:schemeClr val="accent1"/>
+          </a:fillRef>
+          <a:effectRef idx="2">
+            <a:schemeClr val="accent1"/>
+          </a:effectRef>
+          <a:fontRef idx="minor">
+            <a:schemeClr val="lt1"/>
+          </a:fontRef>
+        </p:style>
+        <p:txBody>
+          <a:bodyPr rtlCol="0" anchor="ctr"/>
+          <a:lstStyle/>
+          <a:p>
+            <a:pPr algn="ctr"/>
+          </a:p>
+        </p:txBody>
+      </p:sp>
+      <p:sp>
+        <p:nvSpPr>
+          <p:cNvPr id="20" name="TextBox 19"/>
+          <p:cNvSpPr txBox="1"/>
+          <p:nvPr/>
+        </p:nvSpPr>
+        <p:spPr>
+          <a:xfrm>
+            <a:off x="4699000" y="4267200"/>
+            <a:ext cx="406400" cy="228600"/>
+          </a:xfrm>
+          <a:prstGeom prst="rect">
+            <a:avLst/>
+          </a:prstGeom>
+          <a:noFill/>
+        </p:spPr>
+        <p:txBody>
+          <a:bodyPr wrap="square" lIns="0" rIns="0" tIns="0" bIns="0">
+            <a:spAutoFit/>
+          </a:bodyPr>
+          <a:lstStyle/>
+          <a:p>
+            <a:pPr algn="ctr"/>
+            <a:r>
+              <a:rPr sz="1100" b="1">
+                <a:solidFill>
+                  <a:srgbClr val="FFFFFF"/>
+                </a:solidFill>
+                <a:latin typeface="Aptos"/>
+              </a:rPr>
+              <a:t>04</a:t>
+            </a:r>
+          </a:p>
+        </p:txBody>
+      </p:sp>
+      <p:sp>
+        <p:nvSpPr>
+          <p:cNvPr id="21" name="TextBox 20"/>
+          <p:cNvSpPr txBox="1"/>
+          <p:nvPr/>
+        </p:nvSpPr>
+        <p:spPr>
+          <a:xfrm>
+            <a:off x="5308600" y="4114800"/>
+            <a:ext cx="6172200" cy="635000"/>
+          </a:xfrm>
+          <a:prstGeom prst="rect">
+            <a:avLst/>
+          </a:prstGeom>
+          <a:noFill/>
+        </p:spPr>
+        <p:txBody>
+          <a:bodyPr wrap="square" lIns="0" rIns="0" tIns="0" bIns="0">
+            <a:spAutoFit/>
+          </a:bodyPr>
+          <a:lstStyle/>
+          <a:p>
+            <a:r>
+              <a:rPr sz="1700" b="1">
+                <a:solidFill>
+                  <a:srgbClr val="132438"/>
+                </a:solidFill>
+                <a:latin typeface="Aptos"/>
+              </a:rPr>
+              <a:t>A reviewed fix</a:t>
+            </a:r>
+          </a:p>
+          <a:p>
+            <a:pPr>
+              <a:spcBef>
+                <a:spcPts val="600"/>
+              </a:spcBef>
+            </a:pPr>
+            <a:r>
+              <a:rPr sz="1350" b="0">
+                <a:solidFill>
+                  <a:srgbClr val="536579"/>
+                </a:solidFill>
+                <a:latin typeface="Aptos"/>
+              </a:rPr>
+              <a:t>A separate code reviewer on a real pull request</a:t>
+            </a:r>
+          </a:p>
+        </p:txBody>
+      </p:sp>
+      <p:sp>
+        <p:nvSpPr>
+          <p:cNvPr id="22" name="Rounded Rectangle 21"/>
+          <p:cNvSpPr/>
+          <p:nvPr/>
+        </p:nvSpPr>
+        <p:spPr>
+          <a:xfrm>
+            <a:off x="4699000" y="4902200"/>
+            <a:ext cx="406400" cy="406400"/>
+          </a:xfrm>
+          <a:prstGeom prst="roundRect">
+            <a:avLst>
+              <a:gd name="adj" fmla="val 8000"/>
+            </a:avLst>
+          </a:prstGeom>
+          <a:solidFill>
+            <a:srgbClr val="06AFA5"/>
+          </a:solidFill>
+          <a:ln>
+            <a:solidFill>
+              <a:srgbClr val="06AFA5"/>
+            </a:solidFill>
+          </a:ln>
+          <a:effectLst/>
+        </p:spPr>
+        <p:style>
+          <a:lnRef idx="1">
+            <a:schemeClr val="accent1"/>
+          </a:lnRef>
+          <a:fillRef idx="3">
+            <a:schemeClr val="accent1"/>
+          </a:fillRef>
+          <a:effectRef idx="2">
+            <a:schemeClr val="accent1"/>
+          </a:effectRef>
+          <a:fontRef idx="minor">
+            <a:schemeClr val="lt1"/>
+          </a:fontRef>
+        </p:style>
+        <p:txBody>
+          <a:bodyPr rtlCol="0" anchor="ctr"/>
+          <a:lstStyle/>
+          <a:p>
+            <a:pPr algn="ctr"/>
+          </a:p>
+        </p:txBody>
+      </p:sp>
+      <p:sp>
+        <p:nvSpPr>
+          <p:cNvPr id="23" name="TextBox 22"/>
+          <p:cNvSpPr txBox="1"/>
+          <p:nvPr/>
+        </p:nvSpPr>
+        <p:spPr>
+          <a:xfrm>
+            <a:off x="4699000" y="5003800"/>
+            <a:ext cx="406400" cy="228600"/>
+          </a:xfrm>
+          <a:prstGeom prst="rect">
+            <a:avLst/>
+          </a:prstGeom>
+          <a:noFill/>
+        </p:spPr>
+        <p:txBody>
+          <a:bodyPr wrap="square" lIns="0" rIns="0" tIns="0" bIns="0">
+            <a:spAutoFit/>
+          </a:bodyPr>
+          <a:lstStyle/>
+          <a:p>
+            <a:pPr algn="ctr"/>
+            <a:r>
+              <a:rPr sz="1100" b="1">
+                <a:solidFill>
+                  <a:srgbClr val="FFFFFF"/>
+                </a:solidFill>
+                <a:latin typeface="Aptos"/>
+              </a:rPr>
+              <a:t>05</a:t>
+            </a:r>
+          </a:p>
+        </p:txBody>
+      </p:sp>
+      <p:sp>
+        <p:nvSpPr>
+          <p:cNvPr id="24" name="TextBox 23"/>
+          <p:cNvSpPr txBox="1"/>
+          <p:nvPr/>
+        </p:nvSpPr>
+        <p:spPr>
+          <a:xfrm>
+            <a:off x="5308600" y="4851400"/>
+            <a:ext cx="6172200" cy="635000"/>
+          </a:xfrm>
+          <a:prstGeom prst="rect">
+            <a:avLst/>
+          </a:prstGeom>
+          <a:noFill/>
+        </p:spPr>
+        <p:txBody>
+          <a:bodyPr wrap="square" lIns="0" rIns="0" tIns="0" bIns="0">
+            <a:spAutoFit/>
+          </a:bodyPr>
+          <a:lstStyle/>
+          <a:p>
+            <a:r>
+              <a:rPr sz="1700" b="1">
+                <a:solidFill>
+                  <a:srgbClr val="132438"/>
+                </a:solidFill>
+                <a:latin typeface="Aptos"/>
+              </a:rPr>
+              <a:t>Results and a first step</a:t>
+            </a:r>
+          </a:p>
+          <a:p>
+            <a:pPr>
+              <a:spcBef>
+                <a:spcPts val="600"/>
+              </a:spcBef>
+            </a:pPr>
+            <a:r>
+              <a:rPr sz="1350" b="0">
+                <a:solidFill>
+                  <a:srgbClr val="536579"/>
+                </a:solidFill>
+                <a:latin typeface="Aptos"/>
+              </a:rPr>
+              <a:t>What I measured, and a pilot that fits your team</a:t>
+            </a:r>
+          </a:p>
+        </p:txBody>
+      </p:sp>
+    </p:spTree>
+  </p:cSld>
+  <p:clrMapOvr>
+    <a:masterClrMapping/>
+  </p:clrMapOvr>
+</p:sld>
+</file>
+
+<file path=ppt/slides/slide3.xml><?xml version="1.0" encoding="utf-8"?>
 <p:sld xmlns:a="http://schemas.openxmlformats.org/drawingml/2006/main" xmlns:r="http://schemas.openxmlformats.org/officeDocument/2006/relationships" xmlns:p="http://schemas.openxmlformats.org/presentationml/2006/main">
   <p:cSld name="Slide 2">
     <p:bg>
@@ -7485,7 +9375,7 @@
 </p:sld>
 </file>
 
-<file path=ppt/slides/slide3.xml><?xml version="1.0" encoding="utf-8"?>
+<file path=ppt/slides/slide4.xml><?xml version="1.0" encoding="utf-8"?>
 <p:sld xmlns:a="http://schemas.openxmlformats.org/drawingml/2006/main" xmlns:r="http://schemas.openxmlformats.org/officeDocument/2006/relationships" xmlns:p="http://schemas.openxmlformats.org/presentationml/2006/main">
   <p:cSld name="Slide 3">
     <p:bg>
@@ -8558,7 +10448,7 @@
 </p:sld>
 </file>
 
-<file path=ppt/slides/slide4.xml><?xml version="1.0" encoding="utf-8"?>
+<file path=ppt/slides/slide5.xml><?xml version="1.0" encoding="utf-8"?>
 <p:sld xmlns:a="http://schemas.openxmlformats.org/drawingml/2006/main" xmlns:r="http://schemas.openxmlformats.org/officeDocument/2006/relationships" xmlns:p="http://schemas.openxmlformats.org/presentationml/2006/main">
   <p:cSld name="Slide 4">
     <p:bg>
@@ -10300,7 +12190,7 @@
 </p:sld>
 </file>
 
-<file path=ppt/slides/slide5.xml><?xml version="1.0" encoding="utf-8"?>
+<file path=ppt/slides/slide6.xml><?xml version="1.0" encoding="utf-8"?>
 <p:sld xmlns:a="http://schemas.openxmlformats.org/drawingml/2006/main" xmlns:r="http://schemas.openxmlformats.org/officeDocument/2006/relationships" xmlns:p="http://schemas.openxmlformats.org/presentationml/2006/main">
   <p:cSld name="Slide 5">
     <p:bg>
@@ -11510,7 +13400,7 @@
 </p:sld>
 </file>
 
-<file path=ppt/slides/slide6.xml><?xml version="1.0" encoding="utf-8"?>
+<file path=ppt/slides/slide7.xml><?xml version="1.0" encoding="utf-8"?>
 <p:sld xmlns:a="http://schemas.openxmlformats.org/drawingml/2006/main" xmlns:r="http://schemas.openxmlformats.org/officeDocument/2006/relationships" xmlns:p="http://schemas.openxmlformats.org/presentationml/2006/main">
   <p:cSld name="Slide 6">
     <p:bg>
@@ -13085,7 +14975,7 @@
 </p:sld>
 </file>
 
-<file path=ppt/slides/slide7.xml><?xml version="1.0" encoding="utf-8"?>
+<file path=ppt/slides/slide8.xml><?xml version="1.0" encoding="utf-8"?>
 <p:sld xmlns:a="http://schemas.openxmlformats.org/drawingml/2006/main" xmlns:r="http://schemas.openxmlformats.org/officeDocument/2006/relationships" xmlns:p="http://schemas.openxmlformats.org/presentationml/2006/main">
   <p:cSld name="Slide 7">
     <p:bg>
@@ -14274,7 +16164,7 @@
 </p:sld>
 </file>
 
-<file path=ppt/slides/slide8.xml><?xml version="1.0" encoding="utf-8"?>
+<file path=ppt/slides/slide9.xml><?xml version="1.0" encoding="utf-8"?>
 <p:sld xmlns:a="http://schemas.openxmlformats.org/drawingml/2006/main" xmlns:r="http://schemas.openxmlformats.org/officeDocument/2006/relationships" xmlns:p="http://schemas.openxmlformats.org/presentationml/2006/main">
   <p:cSld name="Slide 8">
     <p:bg>
@@ -15626,891 +17516,6 @@
               <a:t>Fix tested on the same outage: 5 liveness kills in 5 minutes before, 0 after.</a:t>
             </a:r>
             <a:endParaRPr lang="en-US" sz="1420" dirty="0"/>
-          </a:p>
-        </p:txBody>
-      </p:sp>
-    </p:spTree>
-  </p:cSld>
-  <p:clrMapOvr>
-    <a:masterClrMapping/>
-  </p:clrMapOvr>
-</p:sld>
-</file>
-
-<file path=ppt/slides/slide9.xml><?xml version="1.0" encoding="utf-8"?>
-<p:sld xmlns:a="http://schemas.openxmlformats.org/drawingml/2006/main" xmlns:r="http://schemas.openxmlformats.org/officeDocument/2006/relationships" xmlns:p="http://schemas.openxmlformats.org/presentationml/2006/main">
-  <p:cSld name="Slide 9">
-    <p:bg>
-      <p:bgPr>
-        <a:solidFill>
-          <a:srgbClr val="F7F9FC"/>
-        </a:solidFill>
-      </p:bgPr>
-    </p:bg>
-    <p:spTree>
-      <p:nvGrpSpPr>
-        <p:cNvPr id="1" name=""/>
-        <p:cNvGrpSpPr/>
-        <p:nvPr/>
-      </p:nvGrpSpPr>
-      <p:grpSpPr>
-        <a:xfrm>
-          <a:off x="0" y="0"/>
-          <a:ext cx="0" cy="0"/>
-          <a:chOff x="0" y="0"/>
-          <a:chExt cx="0" cy="0"/>
-        </a:xfrm>
-      </p:grpSpPr>
-      <p:sp>
-        <p:nvSpPr>
-          <p:cNvPr id="2" name="Text 0"/>
-          <p:cNvSpPr/>
-          <p:nvPr/>
-        </p:nvSpPr>
-        <p:spPr>
-          <a:xfrm>
-            <a:off x="640080" y="310896"/>
-            <a:ext cx="9144000" cy="219456"/>
-          </a:xfrm>
-          <a:prstGeom prst="rect">
-            <a:avLst/>
-          </a:prstGeom>
-          <a:noFill/>
-          <a:ln/>
-        </p:spPr>
-        <p:txBody>
-          <a:bodyPr wrap="square" lIns="254" tIns="254" rIns="254" bIns="254" rtlCol="0" anchor="ctr">
-            <a:normAutofit/>
-          </a:bodyPr>
-          <a:lstStyle/>
-          <a:p>
-            <a:pPr algn="l" indent="0" marL="0">
-              <a:buNone/>
-            </a:pPr>
-            <a:r>
-              <a:rPr lang="en-US" sz="1050" b="1" spc="240" kern="0" dirty="0">
-                <a:solidFill>
-                  <a:srgbClr val="06AFA5"/>
-                </a:solidFill>
-                <a:latin typeface="Aptos" pitchFamily="34" charset="0"/>
-                <a:ea typeface="Aptos" pitchFamily="34" charset="-122"/>
-                <a:cs typeface="Aptos" pitchFamily="34" charset="-120"/>
-              </a:rPr>
-              <a:t>06 / QUALITY + COST MEASURED HERE</a:t>
-            </a:r>
-            <a:endParaRPr lang="en-US" sz="1050" dirty="0"/>
-          </a:p>
-        </p:txBody>
-      </p:sp>
-      <p:sp>
-        <p:nvSpPr>
-          <p:cNvPr id="3" name="Text 1"/>
-          <p:cNvSpPr/>
-          <p:nvPr/>
-        </p:nvSpPr>
-        <p:spPr>
-          <a:xfrm>
-            <a:off x="10972800" y="292608"/>
-            <a:ext cx="576072" cy="219456"/>
-          </a:xfrm>
-          <a:prstGeom prst="rect">
-            <a:avLst/>
-          </a:prstGeom>
-          <a:noFill/>
-          <a:ln/>
-        </p:spPr>
-        <p:txBody>
-          <a:bodyPr wrap="square" lIns="254" tIns="254" rIns="254" bIns="254" rtlCol="0" anchor="ctr">
-            <a:normAutofit/>
-          </a:bodyPr>
-          <a:lstStyle/>
-          <a:p>
-            <a:pPr algn="r" indent="0" marL="0">
-              <a:buNone/>
-            </a:pPr>
-            <a:r>
-              <a:rPr lang="en-US" sz="1000" dirty="0">
-                <a:solidFill>
-                  <a:srgbClr val="536579"/>
-                </a:solidFill>
-                <a:latin typeface="Aptos" pitchFamily="34" charset="0"/>
-                <a:ea typeface="Aptos" pitchFamily="34" charset="-122"/>
-                <a:cs typeface="Aptos" pitchFamily="34" charset="-120"/>
-              </a:rPr>
-              <a:t>09 / 12</a:t>
-            </a:r>
-            <a:endParaRPr lang="en-US" sz="1000" dirty="0"/>
-          </a:p>
-        </p:txBody>
-      </p:sp>
-      <p:sp>
-        <p:nvSpPr>
-          <p:cNvPr id="4" name="Text 2"/>
-          <p:cNvSpPr/>
-          <p:nvPr/>
-        </p:nvSpPr>
-        <p:spPr>
-          <a:xfrm>
-            <a:off x="640080" y="777240"/>
-            <a:ext cx="10927080" cy="932688"/>
-          </a:xfrm>
-          <a:prstGeom prst="rect">
-            <a:avLst/>
-          </a:prstGeom>
-          <a:noFill/>
-          <a:ln/>
-        </p:spPr>
-        <p:txBody>
-          <a:bodyPr wrap="square" lIns="254" tIns="254" rIns="254" bIns="254" rtlCol="0" anchor="t">
-            <a:normAutofit/>
-          </a:bodyPr>
-          <a:lstStyle/>
-          <a:p>
-            <a:pPr algn="l" indent="0" marL="0">
-              <a:buNone/>
-            </a:pPr>
-            <a:r>
-              <a:rPr lang="en-US" sz="3150" b="1" dirty="0">
-                <a:solidFill>
-                  <a:srgbClr val="132438"/>
-                </a:solidFill>
-                <a:latin typeface="Aptos" pitchFamily="34" charset="0"/>
-                <a:ea typeface="Aptos" pitchFamily="34" charset="-122"/>
-                <a:cs typeface="Aptos" pitchFamily="34" charset="-120"/>
-              </a:rPr>
-              <a:t>A completed run is not a correct run.</a:t>
-            </a:r>
-            <a:endParaRPr lang="en-US" sz="3150" dirty="0"/>
-          </a:p>
-        </p:txBody>
-      </p:sp>
-      <p:sp>
-        <p:nvSpPr>
-          <p:cNvPr id="5" name="Shape 3"/>
-          <p:cNvSpPr/>
-          <p:nvPr/>
-        </p:nvSpPr>
-        <p:spPr>
-          <a:xfrm>
-            <a:off x="640080" y="6327648"/>
-            <a:ext cx="10927080" cy="0"/>
-          </a:xfrm>
-          <a:prstGeom prst="line">
-            <a:avLst/>
-          </a:prstGeom>
-          <a:noFill/>
-          <a:ln w="11430">
-            <a:solidFill>
-              <a:srgbClr val="DCE5ED"/>
-            </a:solidFill>
-            <a:prstDash val="solid"/>
-          </a:ln>
-        </p:spPr>
-        <p:txBody>
-          <a:bodyPr/>
-          <a:p/>
-        </p:txBody>
-      </p:sp>
-      <p:sp>
-        <p:nvSpPr>
-          <p:cNvPr id="6" name="Text 4"/>
-          <p:cNvSpPr/>
-          <p:nvPr/>
-        </p:nvSpPr>
-        <p:spPr>
-          <a:xfrm>
-            <a:off x="640080" y="6419088"/>
-            <a:ext cx="5486400" cy="155448"/>
-          </a:xfrm>
-          <a:prstGeom prst="rect">
-            <a:avLst/>
-          </a:prstGeom>
-          <a:noFill/>
-          <a:ln/>
-        </p:spPr>
-        <p:txBody>
-          <a:bodyPr wrap="square" lIns="254" tIns="254" rIns="254" bIns="254" rtlCol="0" anchor="ctr">
-            <a:normAutofit/>
-          </a:bodyPr>
-          <a:lstStyle/>
-          <a:p>
-            <a:pPr algn="l" indent="0" marL="0">
-              <a:buNone/>
-            </a:pPr>
-            <a:r>
-              <a:rPr lang="en-US" sz="900" spc="120" kern="0" dirty="0">
-                <a:solidFill>
-                  <a:srgbClr val="536579"/>
-                </a:solidFill>
-                <a:latin typeface="Aptos" pitchFamily="34" charset="0"/>
-                <a:ea typeface="Aptos" pitchFamily="34" charset="-122"/>
-                <a:cs typeface="Aptos" pitchFamily="34" charset="-120"/>
-              </a:rPr>
-              <a:t>KAOP  /  CUSTOMER DISCUSSION</a:t>
-            </a:r>
-            <a:endParaRPr lang="en-US" sz="900" dirty="0"/>
-          </a:p>
-        </p:txBody>
-      </p:sp>
-      <p:sp>
-        <p:nvSpPr>
-          <p:cNvPr id="8" name="Shape 6"/>
-          <p:cNvSpPr/>
-          <p:nvPr/>
-        </p:nvSpPr>
-        <p:spPr>
-          <a:xfrm>
-            <a:off x="694944" y="1874520"/>
-            <a:ext cx="5486400" cy="3419856"/>
-          </a:xfrm>
-          <a:prstGeom prst="roundRect">
-            <a:avLst>
-              <a:gd name="adj" fmla="val 5615"/>
-            </a:avLst>
-          </a:prstGeom>
-          <a:solidFill>
-            <a:srgbClr val="FFFFFF"/>
-          </a:solidFill>
-          <a:ln w="10160">
-            <a:solidFill>
-              <a:srgbClr val="DCE5ED"/>
-            </a:solidFill>
-            <a:prstDash val="solid"/>
-          </a:ln>
-        </p:spPr>
-        <p:txBody>
-          <a:bodyPr/>
-          <a:p/>
-        </p:txBody>
-      </p:sp>
-      <p:sp>
-        <p:nvSpPr>
-          <p:cNvPr id="9" name="Text 7"/>
-          <p:cNvSpPr/>
-          <p:nvPr/>
-        </p:nvSpPr>
-        <p:spPr>
-          <a:xfrm>
-            <a:off x="914400" y="2157984"/>
-            <a:ext cx="5029200" cy="228600"/>
-          </a:xfrm>
-          <a:prstGeom prst="rect">
-            <a:avLst/>
-          </a:prstGeom>
-          <a:noFill/>
-          <a:ln/>
-        </p:spPr>
-        <p:txBody>
-          <a:bodyPr wrap="square" lIns="254" tIns="254" rIns="254" bIns="254" rtlCol="0" anchor="ctr">
-            <a:normAutofit/>
-          </a:bodyPr>
-          <a:lstStyle/>
-          <a:p>
-            <a:pPr algn="l" indent="0" marL="0">
-              <a:buNone/>
-            </a:pPr>
-            <a:r>
-              <a:rPr lang="en-US" sz="1200" b="1" spc="130" kern="0" dirty="0">
-                <a:solidFill>
-                  <a:srgbClr val="536579"/>
-                </a:solidFill>
-                <a:latin typeface="Aptos" pitchFamily="34" charset="0"/>
-                <a:ea typeface="Aptos" pitchFamily="34" charset="-122"/>
-                <a:cs typeface="Aptos" pitchFamily="34" charset="-120"/>
-              </a:rPr>
-              <a:t>ANSWER QUALITY</a:t>
-            </a:r>
-            <a:endParaRPr lang="en-US" sz="1200" dirty="0"/>
-          </a:p>
-        </p:txBody>
-      </p:sp>
-      <p:sp>
-        <p:nvSpPr>
-          <p:cNvPr id="10" name="Text 8"/>
-          <p:cNvSpPr/>
-          <p:nvPr/>
-        </p:nvSpPr>
-        <p:spPr>
-          <a:xfrm>
-            <a:off x="923544" y="2706624"/>
-            <a:ext cx="2103120" cy="585216"/>
-          </a:xfrm>
-          <a:prstGeom prst="rect">
-            <a:avLst/>
-          </a:prstGeom>
-          <a:noFill/>
-          <a:ln/>
-        </p:spPr>
-        <p:txBody>
-          <a:bodyPr wrap="square" lIns="254" tIns="254" rIns="254" bIns="254" rtlCol="0" anchor="ctr">
-            <a:normAutofit/>
-          </a:bodyPr>
-          <a:lstStyle/>
-          <a:p>
-            <a:pPr algn="l" indent="0" marL="0">
-              <a:buNone/>
-            </a:pPr>
-            <a:r>
-              <a:rPr lang="en-US" sz="3400" b="1" dirty="0">
-                <a:solidFill>
-                  <a:srgbClr val="C66765"/>
-                </a:solidFill>
-                <a:latin typeface="Aptos" pitchFamily="34" charset="0"/>
-                <a:ea typeface="Aptos" pitchFamily="34" charset="-122"/>
-                <a:cs typeface="Aptos" pitchFamily="34" charset="-120"/>
-              </a:rPr>
-              <a:t>1 of 5</a:t>
-            </a:r>
-            <a:endParaRPr lang="en-US" sz="3400" dirty="0"/>
-          </a:p>
-        </p:txBody>
-      </p:sp>
-      <p:sp>
-        <p:nvSpPr>
-          <p:cNvPr id="11" name="Text 9"/>
-          <p:cNvSpPr/>
-          <p:nvPr/>
-        </p:nvSpPr>
-        <p:spPr>
-          <a:xfrm>
-            <a:off x="2953512" y="2834640"/>
-            <a:ext cx="448056" cy="365760"/>
-          </a:xfrm>
-          <a:prstGeom prst="rect">
-            <a:avLst/>
-          </a:prstGeom>
-          <a:noFill/>
-          <a:ln/>
-        </p:spPr>
-        <p:txBody>
-          <a:bodyPr wrap="square" lIns="254" tIns="254" rIns="254" bIns="254" rtlCol="0" anchor="ctr">
-            <a:normAutofit/>
-          </a:bodyPr>
-          <a:lstStyle/>
-          <a:p>
-            <a:pPr algn="ctr" indent="0" marL="0">
-              <a:buNone/>
-            </a:pPr>
-            <a:r>
-              <a:rPr lang="en-US" sz="2700" b="1" dirty="0">
-                <a:solidFill>
-                  <a:srgbClr val="06AFA5"/>
-                </a:solidFill>
-                <a:latin typeface="Aptos" pitchFamily="34" charset="0"/>
-                <a:ea typeface="Aptos" pitchFamily="34" charset="-122"/>
-                <a:cs typeface="Aptos" pitchFamily="34" charset="-120"/>
-              </a:rPr>
-              <a:t>→</a:t>
-            </a:r>
-            <a:endParaRPr lang="en-US" sz="2700" dirty="0"/>
-          </a:p>
-        </p:txBody>
-      </p:sp>
-      <p:sp>
-        <p:nvSpPr>
-          <p:cNvPr id="12" name="Text 10"/>
-          <p:cNvSpPr/>
-          <p:nvPr/>
-        </p:nvSpPr>
-        <p:spPr>
-          <a:xfrm>
-            <a:off x="3483864" y="2706624"/>
-            <a:ext cx="2377440" cy="585216"/>
-          </a:xfrm>
-          <a:prstGeom prst="rect">
-            <a:avLst/>
-          </a:prstGeom>
-          <a:noFill/>
-          <a:ln/>
-        </p:spPr>
-        <p:txBody>
-          <a:bodyPr wrap="square" lIns="254" tIns="254" rIns="254" bIns="254" rtlCol="0" anchor="ctr">
-            <a:normAutofit/>
-          </a:bodyPr>
-          <a:lstStyle/>
-          <a:p>
-            <a:pPr algn="l" indent="0" marL="0">
-              <a:buNone/>
-            </a:pPr>
-            <a:r>
-              <a:rPr lang="en-US" sz="3400" b="1" dirty="0">
-                <a:solidFill>
-                  <a:srgbClr val="06AFA5"/>
-                </a:solidFill>
-                <a:latin typeface="Aptos" pitchFamily="34" charset="0"/>
-                <a:ea typeface="Aptos" pitchFamily="34" charset="-122"/>
-                <a:cs typeface="Aptos" pitchFamily="34" charset="-120"/>
-              </a:rPr>
-              <a:t>10 of 10</a:t>
-            </a:r>
-            <a:endParaRPr lang="en-US" sz="3400" dirty="0"/>
-          </a:p>
-        </p:txBody>
-      </p:sp>
-      <p:sp>
-        <p:nvSpPr>
-          <p:cNvPr id="13" name="Text 11"/>
-          <p:cNvSpPr/>
-          <p:nvPr/>
-        </p:nvSpPr>
-        <p:spPr>
-          <a:xfrm>
-            <a:off x="914400" y="3456432"/>
-            <a:ext cx="5029200" cy="292608"/>
-          </a:xfrm>
-          <a:prstGeom prst="rect">
-            <a:avLst/>
-          </a:prstGeom>
-          <a:noFill/>
-          <a:ln/>
-        </p:spPr>
-        <p:txBody>
-          <a:bodyPr wrap="square" lIns="254" tIns="254" rIns="254" bIns="254" rtlCol="0" anchor="ctr">
-            <a:normAutofit/>
-          </a:bodyPr>
-          <a:lstStyle/>
-          <a:p>
-            <a:pPr algn="l" indent="0" marL="0">
-              <a:buNone/>
-            </a:pPr>
-            <a:r>
-              <a:rPr lang="en-US" sz="1710" b="1" dirty="0">
-                <a:solidFill>
-                  <a:srgbClr val="132438"/>
-                </a:solidFill>
-                <a:latin typeface="Aptos" pitchFamily="34" charset="0"/>
-                <a:ea typeface="Aptos" pitchFamily="34" charset="-122"/>
-                <a:cs typeface="Aptos" pitchFamily="34" charset="-120"/>
-              </a:rPr>
-              <a:t>Agent found the actual cause</a:t>
-            </a:r>
-            <a:endParaRPr lang="en-US" sz="1710" dirty="0"/>
-          </a:p>
-        </p:txBody>
-      </p:sp>
-      <p:sp>
-        <p:nvSpPr>
-          <p:cNvPr id="14" name="Text 12"/>
-          <p:cNvSpPr/>
-          <p:nvPr/>
-        </p:nvSpPr>
-        <p:spPr>
-          <a:xfrm>
-            <a:off x="914400" y="3959352"/>
-            <a:ext cx="4937760" cy="868680"/>
-          </a:xfrm>
-          <a:prstGeom prst="rect">
-            <a:avLst/>
-          </a:prstGeom>
-          <a:noFill/>
-          <a:ln/>
-        </p:spPr>
-        <p:txBody>
-          <a:bodyPr wrap="square" lIns="254" tIns="254" rIns="254" bIns="254" rtlCol="0" anchor="t">
-            <a:normAutofit/>
-          </a:bodyPr>
-          <a:lstStyle/>
-          <a:p>
-            <a:pPr algn="l" indent="0" marL="0">
-              <a:buNone/>
-            </a:pPr>
-            <a:r>
-              <a:rPr lang="en-US" sz="1460" dirty="0">
-                <a:solidFill>
-                  <a:srgbClr val="536579"/>
-                </a:solidFill>
-                <a:latin typeface="Aptos" pitchFamily="34" charset="0"/>
-                <a:ea typeface="Aptos" pitchFamily="34" charset="-122"/>
-                <a:cs typeface="Aptos" pitchFamily="34" charset="-120"/>
-              </a:rPr>
-              <a:t>Without / with one documented probe standard.</a:t>
-            </a:r>
-            <a:endParaRPr lang="en-US" sz="1460" dirty="0"/>
-          </a:p>
-          <a:p>
-            <a:pPr algn="l" indent="0" marL="0">
-              <a:buNone/>
-            </a:pPr>
-            <a:r>
-              <a:rPr lang="en-US" sz="1460" dirty="0">
-                <a:solidFill>
-                  <a:srgbClr val="536579"/>
-                </a:solidFill>
-                <a:latin typeface="Aptos" pitchFamily="34" charset="0"/>
-                <a:ea typeface="Aptos" pitchFamily="34" charset="-122"/>
-                <a:cs typeface="Aptos" pitchFamily="34" charset="-120"/>
-              </a:rPr>
-              <a:t>Same investigation input; small lab samples.</a:t>
-            </a:r>
-            <a:endParaRPr lang="en-US" sz="1460" dirty="0"/>
-          </a:p>
-        </p:txBody>
-      </p:sp>
-      <p:sp>
-        <p:nvSpPr>
-          <p:cNvPr id="15" name="Shape 13"/>
-          <p:cNvSpPr/>
-          <p:nvPr/>
-        </p:nvSpPr>
-        <p:spPr>
-          <a:xfrm>
-            <a:off x="6391656" y="1874520"/>
-            <a:ext cx="5093208" cy="3419856"/>
-          </a:xfrm>
-          <a:prstGeom prst="roundRect">
-            <a:avLst>
-              <a:gd name="adj" fmla="val 5615"/>
-            </a:avLst>
-          </a:prstGeom>
-          <a:solidFill>
-            <a:srgbClr val="FFFFFF"/>
-          </a:solidFill>
-          <a:ln w="10160">
-            <a:solidFill>
-              <a:srgbClr val="DCE5ED"/>
-            </a:solidFill>
-            <a:prstDash val="solid"/>
-          </a:ln>
-        </p:spPr>
-        <p:txBody>
-          <a:bodyPr/>
-          <a:p/>
-        </p:txBody>
-      </p:sp>
-      <p:sp>
-        <p:nvSpPr>
-          <p:cNvPr id="16" name="Text 14"/>
-          <p:cNvSpPr/>
-          <p:nvPr/>
-        </p:nvSpPr>
-        <p:spPr>
-          <a:xfrm>
-            <a:off x="6601968" y="2157984"/>
-            <a:ext cx="4663440" cy="228600"/>
-          </a:xfrm>
-          <a:prstGeom prst="rect">
-            <a:avLst/>
-          </a:prstGeom>
-          <a:noFill/>
-          <a:ln/>
-        </p:spPr>
-        <p:txBody>
-          <a:bodyPr wrap="square" lIns="254" tIns="254" rIns="254" bIns="254" rtlCol="0" anchor="ctr">
-            <a:normAutofit/>
-          </a:bodyPr>
-          <a:lstStyle/>
-          <a:p>
-            <a:pPr algn="l" indent="0" marL="0">
-              <a:buNone/>
-            </a:pPr>
-            <a:r>
-              <a:rPr lang="en-US" sz="1200" b="1" spc="100" kern="0" dirty="0">
-                <a:solidFill>
-                  <a:srgbClr val="536579"/>
-                </a:solidFill>
-                <a:latin typeface="Aptos" pitchFamily="34" charset="0"/>
-                <a:ea typeface="Aptos" pitchFamily="34" charset="-122"/>
-                <a:cs typeface="Aptos" pitchFamily="34" charset="-120"/>
-              </a:rPr>
-              <a:t>COST OF THE GRAFANA INVESTIGATOR</a:t>
-            </a:r>
-            <a:endParaRPr lang="en-US" sz="1200" dirty="0"/>
-          </a:p>
-        </p:txBody>
-      </p:sp>
-      <p:sp>
-        <p:nvSpPr>
-          <p:cNvPr id="17" name="Text 15"/>
-          <p:cNvSpPr/>
-          <p:nvPr/>
-        </p:nvSpPr>
-        <p:spPr>
-          <a:xfrm>
-            <a:off x="6620256" y="2706624"/>
-            <a:ext cx="1792224" cy="585216"/>
-          </a:xfrm>
-          <a:prstGeom prst="rect">
-            <a:avLst/>
-          </a:prstGeom>
-          <a:noFill/>
-          <a:ln/>
-        </p:spPr>
-        <p:txBody>
-          <a:bodyPr wrap="square" lIns="254" tIns="254" rIns="254" bIns="254" rtlCol="0" anchor="ctr">
-            <a:normAutofit/>
-          </a:bodyPr>
-          <a:lstStyle/>
-          <a:p>
-            <a:pPr algn="l" indent="0" marL="0">
-              <a:buNone/>
-            </a:pPr>
-            <a:r>
-              <a:rPr lang="en-US" sz="3400" b="1" dirty="0">
-                <a:solidFill>
-                  <a:srgbClr val="132438"/>
-                </a:solidFill>
-                <a:latin typeface="Aptos" pitchFamily="34" charset="0"/>
-                <a:ea typeface="Aptos" pitchFamily="34" charset="-122"/>
-                <a:cs typeface="Aptos" pitchFamily="34" charset="-120"/>
-              </a:rPr>
-              <a:t>$0.68</a:t>
-            </a:r>
-            <a:endParaRPr lang="en-US" sz="3400" dirty="0"/>
-          </a:p>
-        </p:txBody>
-      </p:sp>
-      <p:sp>
-        <p:nvSpPr>
-          <p:cNvPr id="18" name="Text 16"/>
-          <p:cNvSpPr/>
-          <p:nvPr/>
-        </p:nvSpPr>
-        <p:spPr>
-          <a:xfrm>
-            <a:off x="8430768" y="2834640"/>
-            <a:ext cx="448056" cy="365760"/>
-          </a:xfrm>
-          <a:prstGeom prst="rect">
-            <a:avLst/>
-          </a:prstGeom>
-          <a:noFill/>
-          <a:ln/>
-        </p:spPr>
-        <p:txBody>
-          <a:bodyPr wrap="square" lIns="254" tIns="254" rIns="254" bIns="254" rtlCol="0" anchor="ctr">
-            <a:normAutofit/>
-          </a:bodyPr>
-          <a:lstStyle/>
-          <a:p>
-            <a:pPr algn="ctr" indent="0" marL="0">
-              <a:buNone/>
-            </a:pPr>
-            <a:r>
-              <a:rPr lang="en-US" sz="2700" b="1" dirty="0">
-                <a:solidFill>
-                  <a:srgbClr val="06AFA5"/>
-                </a:solidFill>
-                <a:latin typeface="Aptos" pitchFamily="34" charset="0"/>
-                <a:ea typeface="Aptos" pitchFamily="34" charset="-122"/>
-                <a:cs typeface="Aptos" pitchFamily="34" charset="-120"/>
-              </a:rPr>
-              <a:t>→</a:t>
-            </a:r>
-            <a:endParaRPr lang="en-US" sz="2700" dirty="0"/>
-          </a:p>
-        </p:txBody>
-      </p:sp>
-      <p:sp>
-        <p:nvSpPr>
-          <p:cNvPr id="19" name="Text 17"/>
-          <p:cNvSpPr/>
-          <p:nvPr/>
-        </p:nvSpPr>
-        <p:spPr>
-          <a:xfrm>
-            <a:off x="8924544" y="2706624"/>
-            <a:ext cx="2103120" cy="585216"/>
-          </a:xfrm>
-          <a:prstGeom prst="rect">
-            <a:avLst/>
-          </a:prstGeom>
-          <a:noFill/>
-          <a:ln/>
-        </p:spPr>
-        <p:txBody>
-          <a:bodyPr wrap="square" lIns="254" tIns="254" rIns="254" bIns="254" rtlCol="0" anchor="ctr">
-            <a:normAutofit/>
-          </a:bodyPr>
-          <a:lstStyle/>
-          <a:p>
-            <a:pPr algn="l" indent="0" marL="0">
-              <a:buNone/>
-            </a:pPr>
-            <a:r>
-              <a:rPr lang="en-US" sz="3400" b="1" dirty="0">
-                <a:solidFill>
-                  <a:srgbClr val="06AFA5"/>
-                </a:solidFill>
-                <a:latin typeface="Aptos" pitchFamily="34" charset="0"/>
-                <a:ea typeface="Aptos" pitchFamily="34" charset="-122"/>
-                <a:cs typeface="Aptos" pitchFamily="34" charset="-120"/>
-              </a:rPr>
-              <a:t>$0.53</a:t>
-            </a:r>
-            <a:endParaRPr lang="en-US" sz="3400" dirty="0"/>
-          </a:p>
-        </p:txBody>
-      </p:sp>
-      <p:sp>
-        <p:nvSpPr>
-          <p:cNvPr id="20" name="Text 18"/>
-          <p:cNvSpPr/>
-          <p:nvPr/>
-        </p:nvSpPr>
-        <p:spPr>
-          <a:xfrm>
-            <a:off x="6611112" y="3456432"/>
-            <a:ext cx="4663440" cy="292608"/>
-          </a:xfrm>
-          <a:prstGeom prst="rect">
-            <a:avLst/>
-          </a:prstGeom>
-          <a:noFill/>
-          <a:ln/>
-        </p:spPr>
-        <p:txBody>
-          <a:bodyPr wrap="square" lIns="254" tIns="254" rIns="254" bIns="254" rtlCol="0" anchor="ctr">
-            <a:normAutofit/>
-          </a:bodyPr>
-          <a:lstStyle/>
-          <a:p>
-            <a:pPr algn="l" indent="0" marL="0">
-              <a:buNone/>
-            </a:pPr>
-            <a:r>
-              <a:rPr lang="en-US" sz="1710" b="1" dirty="0">
-                <a:solidFill>
-                  <a:srgbClr val="132438"/>
-                </a:solidFill>
-                <a:latin typeface="Aptos" pitchFamily="34" charset="0"/>
-                <a:ea typeface="Aptos" pitchFamily="34" charset="-122"/>
-                <a:cs typeface="Aptos" pitchFamily="34" charset="-120"/>
-              </a:rPr>
-              <a:t>Reported average per run</a:t>
-            </a:r>
-            <a:endParaRPr lang="en-US" sz="1710" dirty="0"/>
-          </a:p>
-        </p:txBody>
-      </p:sp>
-      <p:sp>
-        <p:nvSpPr>
-          <p:cNvPr id="21" name="Text 19"/>
-          <p:cNvSpPr/>
-          <p:nvPr/>
-        </p:nvSpPr>
-        <p:spPr>
-          <a:xfrm>
-            <a:off x="6611112" y="3959352"/>
-            <a:ext cx="4572000" cy="868680"/>
-          </a:xfrm>
-          <a:prstGeom prst="rect">
-            <a:avLst/>
-          </a:prstGeom>
-          <a:noFill/>
-          <a:ln/>
-        </p:spPr>
-        <p:txBody>
-          <a:bodyPr wrap="square" lIns="254" tIns="254" rIns="254" bIns="254" rtlCol="0" anchor="t">
-            <a:normAutofit/>
-          </a:bodyPr>
-          <a:lstStyle/>
-          <a:p>
-            <a:pPr algn="l" indent="0" marL="0">
-              <a:buNone/>
-            </a:pPr>
-            <a:r>
-              <a:rPr lang="en-US" sz="1460" dirty="0">
-                <a:solidFill>
-                  <a:srgbClr val="536579"/>
-                </a:solidFill>
-                <a:latin typeface="Aptos" pitchFamily="34" charset="0"/>
-                <a:ea typeface="Aptos" pitchFamily="34" charset="-122"/>
-                <a:cs typeface="Aptos" pitchFamily="34" charset="-120"/>
-              </a:rPr>
-              <a:t>28 read tools versus a broader toolset.</a:t>
-            </a:r>
-            <a:endParaRPr lang="en-US" sz="1460" dirty="0"/>
-          </a:p>
-          <a:p>
-            <a:pPr algn="l" indent="0" marL="0">
-              <a:buNone/>
-            </a:pPr>
-            <a:r>
-              <a:rPr lang="en-US" sz="1460" dirty="0">
-                <a:solidFill>
-                  <a:srgbClr val="536579"/>
-                </a:solidFill>
-                <a:latin typeface="Aptos" pitchFamily="34" charset="0"/>
-                <a:ea typeface="Aptos" pitchFamily="34" charset="-122"/>
-                <a:cs typeface="Aptos" pitchFamily="34" charset="-120"/>
-              </a:rPr>
-              <a:t>Five runs per setup; identical cases vary.</a:t>
-            </a:r>
-            <a:endParaRPr lang="en-US" sz="1460" dirty="0"/>
-          </a:p>
-        </p:txBody>
-      </p:sp>
-      <p:sp>
-        <p:nvSpPr>
-          <p:cNvPr id="22" name="Shape 20"/>
-          <p:cNvSpPr/>
-          <p:nvPr/>
-        </p:nvSpPr>
-        <p:spPr>
-          <a:xfrm>
-            <a:off x="694944" y="5495544"/>
-            <a:ext cx="10789920" cy="438912"/>
-          </a:xfrm>
-          <a:prstGeom prst="roundRect">
-            <a:avLst>
-              <a:gd name="adj" fmla="val 22917"/>
-            </a:avLst>
-          </a:prstGeom>
-          <a:solidFill>
-            <a:srgbClr val="EAF0F5"/>
-          </a:solidFill>
-          <a:ln w="12700">
-            <a:solidFill>
-              <a:srgbClr val="EAF0F5">
-                <a:alpha val="0"/>
-              </a:srgbClr>
-            </a:solidFill>
-            <a:prstDash val="solid"/>
-          </a:ln>
-        </p:spPr>
-        <p:txBody>
-          <a:bodyPr/>
-          <a:p/>
-        </p:txBody>
-      </p:sp>
-      <p:sp>
-        <p:nvSpPr>
-          <p:cNvPr id="23" name="Text 21"/>
-          <p:cNvSpPr/>
-          <p:nvPr/>
-        </p:nvSpPr>
-        <p:spPr>
-          <a:xfrm>
-            <a:off x="914400" y="5614416"/>
-            <a:ext cx="10378440" cy="164592"/>
-          </a:xfrm>
-          <a:prstGeom prst="rect">
-            <a:avLst/>
-          </a:prstGeom>
-          <a:noFill/>
-          <a:ln/>
-        </p:spPr>
-        <p:txBody>
-          <a:bodyPr wrap="square" lIns="254" tIns="254" rIns="254" bIns="254" rtlCol="0" anchor="ctr">
-            <a:normAutofit/>
-          </a:bodyPr>
-          <a:lstStyle/>
-          <a:p>
-            <a:pPr algn="ctr" indent="0" marL="0">
-              <a:buNone/>
-            </a:pPr>
-            <a:r>
-              <a:rPr lang="en-US" sz="1190" dirty="0">
-                <a:solidFill>
-                  <a:srgbClr val="536579"/>
-                </a:solidFill>
-                <a:latin typeface="Aptos" pitchFamily="34" charset="0"/>
-                <a:ea typeface="Aptos" pitchFamily="34" charset="-122"/>
-                <a:cs typeface="Aptos" pitchFamily="34" charset="-120"/>
-              </a:rPr>
-              <a:t>NOT A BENCHMARK: Hosted agent changed version during tests; evaluation must be repeated in the customer environment.</a:t>
-            </a:r>
-            <a:endParaRPr lang="en-US" sz="1190" dirty="0"/>
           </a:p>
         </p:txBody>
       </p:sp>

--- a/docs/presentation/KAOP_Customer_Pitch.pptx
+++ b/docs/presentation/KAOP_Customer_Pitch.pptx
@@ -7635,13 +7635,61 @@
               </a:spcBef>
             </a:pPr>
             <a:r>
+              <a:rPr sz="1400" b="1">
+                <a:solidFill>
+                  <a:srgbClr val="E6ECF4"/>
+                </a:solidFill>
+                <a:latin typeface="Aptos"/>
+              </a:rPr>
+              <a:t>I help teams adopt KAOP:</a:t>
+            </a:r>
+          </a:p>
+          <a:p>
+            <a:pPr>
+              <a:spcBef>
+                <a:spcPts val="600"/>
+              </a:spcBef>
+            </a:pPr>
+            <a:r>
               <a:rPr sz="1400" b="0">
                 <a:solidFill>
                   <a:srgbClr val="E6ECF4"/>
                 </a:solidFill>
                 <a:latin typeface="Aptos"/>
               </a:rPr>
-              <a:t>I help teams adopt KAOP: get the first workflow running, measure the results with you, and bring your feedback to our product team.</a:t>
+              <a:t>•  Get the first workflow running</a:t>
+            </a:r>
+          </a:p>
+          <a:p>
+            <a:pPr>
+              <a:spcBef>
+                <a:spcPts val="600"/>
+              </a:spcBef>
+            </a:pPr>
+            <a:r>
+              <a:rPr sz="1400" b="0">
+                <a:solidFill>
+                  <a:srgbClr val="E6ECF4"/>
+                </a:solidFill>
+                <a:latin typeface="Aptos"/>
+              </a:rPr>
+              <a:t>•  Measure the results with you</a:t>
+            </a:r>
+          </a:p>
+          <a:p>
+            <a:pPr>
+              <a:spcBef>
+                <a:spcPts val="600"/>
+              </a:spcBef>
+            </a:pPr>
+            <a:r>
+              <a:rPr sz="1400" b="0">
+                <a:solidFill>
+                  <a:srgbClr val="E6ECF4"/>
+                </a:solidFill>
+                <a:latin typeface="Aptos"/>
+              </a:rPr>
+              <a:t>•  Bring your feedback to Product</a:t>
             </a:r>
           </a:p>
         </p:txBody>

--- a/docs/presentation/KAOP_Customer_Pitch.pptx
+++ b/docs/presentation/KAOP_Customer_Pitch.pptx
@@ -10720,7 +10720,7 @@
         <p:spPr>
           <a:xfrm>
             <a:off x="658368" y="1856232"/>
-            <a:ext cx="10863072" cy="1536192"/>
+            <a:ext cx="10863072" cy="1676400"/>
           </a:xfrm>
           <a:prstGeom prst="roundRect">
             <a:avLst>
@@ -11458,8 +11458,8 @@
         </p:nvSpPr>
         <p:spPr>
           <a:xfrm>
-            <a:off x="658368" y="3675888"/>
-            <a:ext cx="10863072" cy="1508760"/>
+            <a:off x="658368" y="3853688"/>
+            <a:ext cx="10863072" cy="1676400"/>
           </a:xfrm>
           <a:prstGeom prst="roundRect">
             <a:avLst>
@@ -11489,7 +11489,7 @@
         </p:nvSpPr>
         <p:spPr>
           <a:xfrm>
-            <a:off x="877824" y="3849624"/>
+            <a:off x="877824" y="4027424"/>
             <a:ext cx="2980944" cy="292608"/>
           </a:xfrm>
           <a:prstGeom prst="roundRect">
@@ -11522,7 +11522,7 @@
         </p:nvSpPr>
         <p:spPr>
           <a:xfrm>
-            <a:off x="969264" y="3904488"/>
+            <a:off x="969264" y="4082288"/>
             <a:ext cx="2798064" cy="173736"/>
           </a:xfrm>
           <a:prstGeom prst="rect">
@@ -11563,7 +11563,7 @@
         </p:nvSpPr>
         <p:spPr>
           <a:xfrm>
-            <a:off x="950976" y="4315968"/>
+            <a:off x="950976" y="4493768"/>
             <a:ext cx="2194560" cy="630936"/>
           </a:xfrm>
           <a:prstGeom prst="roundRect">
@@ -11596,7 +11596,7 @@
         </p:nvSpPr>
         <p:spPr>
           <a:xfrm>
-            <a:off x="1042416" y="4434840"/>
+            <a:off x="1042416" y="4612640"/>
             <a:ext cx="2011680" cy="210312"/>
           </a:xfrm>
           <a:prstGeom prst="rect">
@@ -11637,7 +11637,7 @@
         </p:nvSpPr>
         <p:spPr>
           <a:xfrm>
-            <a:off x="1042416" y="4690872"/>
+            <a:off x="1042416" y="4868672"/>
             <a:ext cx="2020824" cy="146304"/>
           </a:xfrm>
           <a:prstGeom prst="rect">
@@ -11678,7 +11678,7 @@
         </p:nvSpPr>
         <p:spPr>
           <a:xfrm>
-            <a:off x="3172968" y="4617720"/>
+            <a:off x="3172968" y="4795520"/>
             <a:ext cx="256032" cy="0"/>
           </a:xfrm>
           <a:prstGeom prst="line">
@@ -11705,7 +11705,7 @@
         </p:nvSpPr>
         <p:spPr>
           <a:xfrm>
-            <a:off x="3319272" y="4530852"/>
+            <a:off x="3319272" y="4708652"/>
             <a:ext cx="146304" cy="173736"/>
           </a:xfrm>
           <a:prstGeom prst="chevron">
@@ -11736,7 +11736,7 @@
         </p:nvSpPr>
         <p:spPr>
           <a:xfrm>
-            <a:off x="3547872" y="4315968"/>
+            <a:off x="3547872" y="4493768"/>
             <a:ext cx="2194560" cy="630936"/>
           </a:xfrm>
           <a:prstGeom prst="roundRect">
@@ -11769,7 +11769,7 @@
         </p:nvSpPr>
         <p:spPr>
           <a:xfrm>
-            <a:off x="3639312" y="4434840"/>
+            <a:off x="3639312" y="4612640"/>
             <a:ext cx="2011680" cy="210312"/>
           </a:xfrm>
           <a:prstGeom prst="rect">
@@ -11810,7 +11810,7 @@
         </p:nvSpPr>
         <p:spPr>
           <a:xfrm>
-            <a:off x="3639312" y="4690872"/>
+            <a:off x="3639312" y="4868672"/>
             <a:ext cx="2020824" cy="146304"/>
           </a:xfrm>
           <a:prstGeom prst="rect">
@@ -11851,7 +11851,7 @@
         </p:nvSpPr>
         <p:spPr>
           <a:xfrm>
-            <a:off x="5769864" y="4617720"/>
+            <a:off x="5769864" y="4795520"/>
             <a:ext cx="256032" cy="0"/>
           </a:xfrm>
           <a:prstGeom prst="line">
@@ -11878,7 +11878,7 @@
         </p:nvSpPr>
         <p:spPr>
           <a:xfrm>
-            <a:off x="5916168" y="4530852"/>
+            <a:off x="5916168" y="4708652"/>
             <a:ext cx="146304" cy="173736"/>
           </a:xfrm>
           <a:prstGeom prst="chevron">
@@ -11909,7 +11909,7 @@
         </p:nvSpPr>
         <p:spPr>
           <a:xfrm>
-            <a:off x="6144768" y="4315968"/>
+            <a:off x="6144768" y="4493768"/>
             <a:ext cx="2194560" cy="630936"/>
           </a:xfrm>
           <a:prstGeom prst="roundRect">
@@ -11942,7 +11942,7 @@
         </p:nvSpPr>
         <p:spPr>
           <a:xfrm>
-            <a:off x="6236208" y="4434840"/>
+            <a:off x="6236208" y="4612640"/>
             <a:ext cx="2011680" cy="210312"/>
           </a:xfrm>
           <a:prstGeom prst="rect">
@@ -11983,7 +11983,7 @@
         </p:nvSpPr>
         <p:spPr>
           <a:xfrm>
-            <a:off x="6236208" y="4690872"/>
+            <a:off x="6236208" y="4868672"/>
             <a:ext cx="2020824" cy="146304"/>
           </a:xfrm>
           <a:prstGeom prst="rect">
@@ -12024,7 +12024,7 @@
         </p:nvSpPr>
         <p:spPr>
           <a:xfrm>
-            <a:off x="8366760" y="4617720"/>
+            <a:off x="8366760" y="4795520"/>
             <a:ext cx="256032" cy="0"/>
           </a:xfrm>
           <a:prstGeom prst="line">
@@ -12051,7 +12051,7 @@
         </p:nvSpPr>
         <p:spPr>
           <a:xfrm>
-            <a:off x="8513064" y="4530852"/>
+            <a:off x="8513064" y="4708652"/>
             <a:ext cx="146304" cy="173736"/>
           </a:xfrm>
           <a:prstGeom prst="chevron">
@@ -12082,7 +12082,7 @@
         </p:nvSpPr>
         <p:spPr>
           <a:xfrm>
-            <a:off x="8741664" y="4315968"/>
+            <a:off x="8741664" y="4493768"/>
             <a:ext cx="2194560" cy="630936"/>
           </a:xfrm>
           <a:prstGeom prst="roundRect">
@@ -12115,7 +12115,7 @@
         </p:nvSpPr>
         <p:spPr>
           <a:xfrm>
-            <a:off x="8833104" y="4434840"/>
+            <a:off x="8833104" y="4612640"/>
             <a:ext cx="2011680" cy="210312"/>
           </a:xfrm>
           <a:prstGeom prst="rect">
@@ -12156,7 +12156,7 @@
         </p:nvSpPr>
         <p:spPr>
           <a:xfrm>
-            <a:off x="8833104" y="4690872"/>
+            <a:off x="8833104" y="4868672"/>
             <a:ext cx="2020824" cy="146304"/>
           </a:xfrm>
           <a:prstGeom prst="rect">
@@ -12197,7 +12197,7 @@
         </p:nvSpPr>
         <p:spPr>
           <a:xfrm>
-            <a:off x="722376" y="5614416"/>
+            <a:off x="722376" y="5867400"/>
             <a:ext cx="10607040" cy="320040"/>
           </a:xfrm>
           <a:prstGeom prst="rect">
@@ -12227,6 +12227,1085 @@
               <a:t>The PR review does not auto-start from the incident. The two workflows have separate triggers and privileges.</a:t>
             </a:r>
             <a:endParaRPr lang="en-US" sz="1420" dirty="0"/>
+          </a:p>
+        </p:txBody>
+      </p:sp>
+      <p:sp>
+        <p:nvSpPr>
+          <p:cNvPr id="51" name="Rounded Rectangle 50"/>
+          <p:cNvSpPr/>
+          <p:nvPr/>
+        </p:nvSpPr>
+        <p:spPr>
+          <a:xfrm>
+            <a:off x="952500" y="3200400"/>
+            <a:ext cx="1137920" cy="203200"/>
+          </a:xfrm>
+          <a:prstGeom prst="roundRect">
+            <a:avLst>
+              <a:gd name="adj" fmla="val 50000"/>
+            </a:avLst>
+          </a:prstGeom>
+          <a:solidFill>
+            <a:srgbClr val="FDF1DE"/>
+          </a:solidFill>
+          <a:ln>
+            <a:solidFill>
+              <a:srgbClr val="FDF1DE"/>
+            </a:solidFill>
+          </a:ln>
+          <a:effectLst/>
+        </p:spPr>
+        <p:style>
+          <a:lnRef idx="1">
+            <a:schemeClr val="accent1"/>
+          </a:lnRef>
+          <a:fillRef idx="3">
+            <a:schemeClr val="accent1"/>
+          </a:fillRef>
+          <a:effectRef idx="2">
+            <a:schemeClr val="accent1"/>
+          </a:effectRef>
+          <a:fontRef idx="minor">
+            <a:schemeClr val="lt1"/>
+          </a:fontRef>
+        </p:style>
+        <p:txBody>
+          <a:bodyPr rtlCol="0" anchor="ctr"/>
+          <a:lstStyle/>
+          <a:p>
+            <a:pPr algn="ctr"/>
+          </a:p>
+        </p:txBody>
+      </p:sp>
+      <p:sp>
+        <p:nvSpPr>
+          <p:cNvPr id="52" name="TextBox 51"/>
+          <p:cNvSpPr txBox="1"/>
+          <p:nvPr/>
+        </p:nvSpPr>
+        <p:spPr>
+          <a:xfrm>
+            <a:off x="952500" y="3232150"/>
+            <a:ext cx="1137920" cy="152400"/>
+          </a:xfrm>
+          <a:prstGeom prst="rect">
+            <a:avLst/>
+          </a:prstGeom>
+          <a:noFill/>
+        </p:spPr>
+        <p:txBody>
+          <a:bodyPr wrap="square" lIns="0" rIns="0" tIns="0" bIns="0">
+            <a:spAutoFit/>
+          </a:bodyPr>
+          <a:lstStyle/>
+          <a:p>
+            <a:pPr algn="ctr"/>
+            <a:r>
+              <a:rPr sz="850" b="1">
+                <a:solidFill>
+                  <a:srgbClr val="B7791F"/>
+                </a:solidFill>
+                <a:latin typeface="Aptos"/>
+              </a:rPr>
+              <a:t>Grafana Cloud</a:t>
+            </a:r>
+          </a:p>
+        </p:txBody>
+      </p:sp>
+      <p:sp>
+        <p:nvSpPr>
+          <p:cNvPr id="53" name="Rounded Rectangle 52"/>
+          <p:cNvSpPr/>
+          <p:nvPr/>
+        </p:nvSpPr>
+        <p:spPr>
+          <a:xfrm>
+            <a:off x="3543300" y="3200400"/>
+            <a:ext cx="429259" cy="203200"/>
+          </a:xfrm>
+          <a:prstGeom prst="roundRect">
+            <a:avLst>
+              <a:gd name="adj" fmla="val 50000"/>
+            </a:avLst>
+          </a:prstGeom>
+          <a:solidFill>
+            <a:srgbClr val="E3F6F4"/>
+          </a:solidFill>
+          <a:ln>
+            <a:solidFill>
+              <a:srgbClr val="E3F6F4"/>
+            </a:solidFill>
+          </a:ln>
+          <a:effectLst/>
+        </p:spPr>
+        <p:style>
+          <a:lnRef idx="1">
+            <a:schemeClr val="accent1"/>
+          </a:lnRef>
+          <a:fillRef idx="3">
+            <a:schemeClr val="accent1"/>
+          </a:fillRef>
+          <a:effectRef idx="2">
+            <a:schemeClr val="accent1"/>
+          </a:effectRef>
+          <a:fontRef idx="minor">
+            <a:schemeClr val="lt1"/>
+          </a:fontRef>
+        </p:style>
+        <p:txBody>
+          <a:bodyPr rtlCol="0" anchor="ctr"/>
+          <a:lstStyle/>
+          <a:p>
+            <a:pPr algn="ctr"/>
+          </a:p>
+        </p:txBody>
+      </p:sp>
+      <p:sp>
+        <p:nvSpPr>
+          <p:cNvPr id="54" name="TextBox 53"/>
+          <p:cNvSpPr txBox="1"/>
+          <p:nvPr/>
+        </p:nvSpPr>
+        <p:spPr>
+          <a:xfrm>
+            <a:off x="3543300" y="3232150"/>
+            <a:ext cx="429259" cy="152400"/>
+          </a:xfrm>
+          <a:prstGeom prst="rect">
+            <a:avLst/>
+          </a:prstGeom>
+          <a:noFill/>
+        </p:spPr>
+        <p:txBody>
+          <a:bodyPr wrap="square" lIns="0" rIns="0" tIns="0" bIns="0">
+            <a:spAutoFit/>
+          </a:bodyPr>
+          <a:lstStyle/>
+          <a:p>
+            <a:pPr algn="ctr"/>
+            <a:r>
+              <a:rPr sz="850" b="1">
+                <a:solidFill>
+                  <a:srgbClr val="05867E"/>
+                </a:solidFill>
+                <a:latin typeface="Aptos"/>
+              </a:rPr>
+              <a:t>KAOP</a:t>
+            </a:r>
+          </a:p>
+        </p:txBody>
+      </p:sp>
+      <p:sp>
+        <p:nvSpPr>
+          <p:cNvPr id="55" name="Rounded Rectangle 54"/>
+          <p:cNvSpPr/>
+          <p:nvPr/>
+        </p:nvSpPr>
+        <p:spPr>
+          <a:xfrm>
+            <a:off x="4036060" y="3200400"/>
+            <a:ext cx="1059180" cy="203200"/>
+          </a:xfrm>
+          <a:prstGeom prst="roundRect">
+            <a:avLst>
+              <a:gd name="adj" fmla="val 50000"/>
+            </a:avLst>
+          </a:prstGeom>
+          <a:solidFill>
+            <a:srgbClr val="E8EFFD"/>
+          </a:solidFill>
+          <a:ln>
+            <a:solidFill>
+              <a:srgbClr val="E8EFFD"/>
+            </a:solidFill>
+          </a:ln>
+          <a:effectLst/>
+        </p:spPr>
+        <p:style>
+          <a:lnRef idx="1">
+            <a:schemeClr val="accent1"/>
+          </a:lnRef>
+          <a:fillRef idx="3">
+            <a:schemeClr val="accent1"/>
+          </a:fillRef>
+          <a:effectRef idx="2">
+            <a:schemeClr val="accent1"/>
+          </a:effectRef>
+          <a:fontRef idx="minor">
+            <a:schemeClr val="lt1"/>
+          </a:fontRef>
+        </p:style>
+        <p:txBody>
+          <a:bodyPr rtlCol="0" anchor="ctr"/>
+          <a:lstStyle/>
+          <a:p>
+            <a:pPr algn="ctr"/>
+          </a:p>
+        </p:txBody>
+      </p:sp>
+      <p:sp>
+        <p:nvSpPr>
+          <p:cNvPr id="56" name="TextBox 55"/>
+          <p:cNvSpPr txBox="1"/>
+          <p:nvPr/>
+        </p:nvSpPr>
+        <p:spPr>
+          <a:xfrm>
+            <a:off x="4036060" y="3232150"/>
+            <a:ext cx="1059180" cy="152400"/>
+          </a:xfrm>
+          <a:prstGeom prst="rect">
+            <a:avLst/>
+          </a:prstGeom>
+          <a:noFill/>
+        </p:spPr>
+        <p:txBody>
+          <a:bodyPr wrap="square" lIns="0" rIns="0" tIns="0" bIns="0">
+            <a:spAutoFit/>
+          </a:bodyPr>
+          <a:lstStyle/>
+          <a:p>
+            <a:pPr algn="ctr"/>
+            <a:r>
+              <a:rPr sz="850" b="1">
+                <a:solidFill>
+                  <a:srgbClr val="2F62C4"/>
+                </a:solidFill>
+                <a:latin typeface="Aptos"/>
+              </a:rPr>
+              <a:t>Your cluster</a:t>
+            </a:r>
+          </a:p>
+        </p:txBody>
+      </p:sp>
+      <p:sp>
+        <p:nvSpPr>
+          <p:cNvPr id="57" name="Rounded Rectangle 56"/>
+          <p:cNvSpPr/>
+          <p:nvPr/>
+        </p:nvSpPr>
+        <p:spPr>
+          <a:xfrm>
+            <a:off x="6146800" y="3200400"/>
+            <a:ext cx="429259" cy="203200"/>
+          </a:xfrm>
+          <a:prstGeom prst="roundRect">
+            <a:avLst>
+              <a:gd name="adj" fmla="val 50000"/>
+            </a:avLst>
+          </a:prstGeom>
+          <a:solidFill>
+            <a:srgbClr val="E3F6F4"/>
+          </a:solidFill>
+          <a:ln>
+            <a:solidFill>
+              <a:srgbClr val="E3F6F4"/>
+            </a:solidFill>
+          </a:ln>
+          <a:effectLst/>
+        </p:spPr>
+        <p:style>
+          <a:lnRef idx="1">
+            <a:schemeClr val="accent1"/>
+          </a:lnRef>
+          <a:fillRef idx="3">
+            <a:schemeClr val="accent1"/>
+          </a:fillRef>
+          <a:effectRef idx="2">
+            <a:schemeClr val="accent1"/>
+          </a:effectRef>
+          <a:fontRef idx="minor">
+            <a:schemeClr val="lt1"/>
+          </a:fontRef>
+        </p:style>
+        <p:txBody>
+          <a:bodyPr rtlCol="0" anchor="ctr"/>
+          <a:lstStyle/>
+          <a:p>
+            <a:pPr algn="ctr"/>
+          </a:p>
+        </p:txBody>
+      </p:sp>
+      <p:sp>
+        <p:nvSpPr>
+          <p:cNvPr id="58" name="TextBox 57"/>
+          <p:cNvSpPr txBox="1"/>
+          <p:nvPr/>
+        </p:nvSpPr>
+        <p:spPr>
+          <a:xfrm>
+            <a:off x="6146800" y="3232150"/>
+            <a:ext cx="429259" cy="152400"/>
+          </a:xfrm>
+          <a:prstGeom prst="rect">
+            <a:avLst/>
+          </a:prstGeom>
+          <a:noFill/>
+        </p:spPr>
+        <p:txBody>
+          <a:bodyPr wrap="square" lIns="0" rIns="0" tIns="0" bIns="0">
+            <a:spAutoFit/>
+          </a:bodyPr>
+          <a:lstStyle/>
+          <a:p>
+            <a:pPr algn="ctr"/>
+            <a:r>
+              <a:rPr sz="850" b="1">
+                <a:solidFill>
+                  <a:srgbClr val="05867E"/>
+                </a:solidFill>
+                <a:latin typeface="Aptos"/>
+              </a:rPr>
+              <a:t>KAOP</a:t>
+            </a:r>
+          </a:p>
+        </p:txBody>
+      </p:sp>
+      <p:sp>
+        <p:nvSpPr>
+          <p:cNvPr id="59" name="Rounded Rectangle 58"/>
+          <p:cNvSpPr/>
+          <p:nvPr/>
+        </p:nvSpPr>
+        <p:spPr>
+          <a:xfrm>
+            <a:off x="8737600" y="3200400"/>
+            <a:ext cx="350520" cy="203200"/>
+          </a:xfrm>
+          <a:prstGeom prst="roundRect">
+            <a:avLst>
+              <a:gd name="adj" fmla="val 50000"/>
+            </a:avLst>
+          </a:prstGeom>
+          <a:solidFill>
+            <a:srgbClr val="F3EAFB"/>
+          </a:solidFill>
+          <a:ln>
+            <a:solidFill>
+              <a:srgbClr val="F3EAFB"/>
+            </a:solidFill>
+          </a:ln>
+          <a:effectLst/>
+        </p:spPr>
+        <p:style>
+          <a:lnRef idx="1">
+            <a:schemeClr val="accent1"/>
+          </a:lnRef>
+          <a:fillRef idx="3">
+            <a:schemeClr val="accent1"/>
+          </a:fillRef>
+          <a:effectRef idx="2">
+            <a:schemeClr val="accent1"/>
+          </a:effectRef>
+          <a:fontRef idx="minor">
+            <a:schemeClr val="lt1"/>
+          </a:fontRef>
+        </p:style>
+        <p:txBody>
+          <a:bodyPr rtlCol="0" anchor="ctr"/>
+          <a:lstStyle/>
+          <a:p>
+            <a:pPr algn="ctr"/>
+          </a:p>
+        </p:txBody>
+      </p:sp>
+      <p:sp>
+        <p:nvSpPr>
+          <p:cNvPr id="60" name="TextBox 59"/>
+          <p:cNvSpPr txBox="1"/>
+          <p:nvPr/>
+        </p:nvSpPr>
+        <p:spPr>
+          <a:xfrm>
+            <a:off x="8737600" y="3232150"/>
+            <a:ext cx="350520" cy="152400"/>
+          </a:xfrm>
+          <a:prstGeom prst="rect">
+            <a:avLst/>
+          </a:prstGeom>
+          <a:noFill/>
+        </p:spPr>
+        <p:txBody>
+          <a:bodyPr wrap="square" lIns="0" rIns="0" tIns="0" bIns="0">
+            <a:spAutoFit/>
+          </a:bodyPr>
+          <a:lstStyle/>
+          <a:p>
+            <a:pPr algn="ctr"/>
+            <a:r>
+              <a:rPr sz="850" b="1">
+                <a:solidFill>
+                  <a:srgbClr val="7A3FB0"/>
+                </a:solidFill>
+                <a:latin typeface="Aptos"/>
+              </a:rPr>
+              <a:t>You</a:t>
+            </a:r>
+          </a:p>
+        </p:txBody>
+      </p:sp>
+      <p:sp>
+        <p:nvSpPr>
+          <p:cNvPr id="61" name="Rounded Rectangle 60"/>
+          <p:cNvSpPr/>
+          <p:nvPr/>
+        </p:nvSpPr>
+        <p:spPr>
+          <a:xfrm>
+            <a:off x="9151620" y="3200400"/>
+            <a:ext cx="429259" cy="203200"/>
+          </a:xfrm>
+          <a:prstGeom prst="roundRect">
+            <a:avLst>
+              <a:gd name="adj" fmla="val 50000"/>
+            </a:avLst>
+          </a:prstGeom>
+          <a:solidFill>
+            <a:srgbClr val="E3F6F4"/>
+          </a:solidFill>
+          <a:ln>
+            <a:solidFill>
+              <a:srgbClr val="E3F6F4"/>
+            </a:solidFill>
+          </a:ln>
+          <a:effectLst/>
+        </p:spPr>
+        <p:style>
+          <a:lnRef idx="1">
+            <a:schemeClr val="accent1"/>
+          </a:lnRef>
+          <a:fillRef idx="3">
+            <a:schemeClr val="accent1"/>
+          </a:fillRef>
+          <a:effectRef idx="2">
+            <a:schemeClr val="accent1"/>
+          </a:effectRef>
+          <a:fontRef idx="minor">
+            <a:schemeClr val="lt1"/>
+          </a:fontRef>
+        </p:style>
+        <p:txBody>
+          <a:bodyPr rtlCol="0" anchor="ctr"/>
+          <a:lstStyle/>
+          <a:p>
+            <a:pPr algn="ctr"/>
+          </a:p>
+        </p:txBody>
+      </p:sp>
+      <p:sp>
+        <p:nvSpPr>
+          <p:cNvPr id="62" name="TextBox 61"/>
+          <p:cNvSpPr txBox="1"/>
+          <p:nvPr/>
+        </p:nvSpPr>
+        <p:spPr>
+          <a:xfrm>
+            <a:off x="9151620" y="3232150"/>
+            <a:ext cx="429259" cy="152400"/>
+          </a:xfrm>
+          <a:prstGeom prst="rect">
+            <a:avLst/>
+          </a:prstGeom>
+          <a:noFill/>
+        </p:spPr>
+        <p:txBody>
+          <a:bodyPr wrap="square" lIns="0" rIns="0" tIns="0" bIns="0">
+            <a:spAutoFit/>
+          </a:bodyPr>
+          <a:lstStyle/>
+          <a:p>
+            <a:pPr algn="ctr"/>
+            <a:r>
+              <a:rPr sz="850" b="1">
+                <a:solidFill>
+                  <a:srgbClr val="05867E"/>
+                </a:solidFill>
+                <a:latin typeface="Aptos"/>
+              </a:rPr>
+              <a:t>KAOP</a:t>
+            </a:r>
+          </a:p>
+        </p:txBody>
+      </p:sp>
+      <p:sp>
+        <p:nvSpPr>
+          <p:cNvPr id="63" name="Rounded Rectangle 62"/>
+          <p:cNvSpPr/>
+          <p:nvPr/>
+        </p:nvSpPr>
+        <p:spPr>
+          <a:xfrm>
+            <a:off x="952500" y="5207000"/>
+            <a:ext cx="350520" cy="203200"/>
+          </a:xfrm>
+          <a:prstGeom prst="roundRect">
+            <a:avLst>
+              <a:gd name="adj" fmla="val 50000"/>
+            </a:avLst>
+          </a:prstGeom>
+          <a:solidFill>
+            <a:srgbClr val="F3EAFB"/>
+          </a:solidFill>
+          <a:ln>
+            <a:solidFill>
+              <a:srgbClr val="F3EAFB"/>
+            </a:solidFill>
+          </a:ln>
+          <a:effectLst/>
+        </p:spPr>
+        <p:style>
+          <a:lnRef idx="1">
+            <a:schemeClr val="accent1"/>
+          </a:lnRef>
+          <a:fillRef idx="3">
+            <a:schemeClr val="accent1"/>
+          </a:fillRef>
+          <a:effectRef idx="2">
+            <a:schemeClr val="accent1"/>
+          </a:effectRef>
+          <a:fontRef idx="minor">
+            <a:schemeClr val="lt1"/>
+          </a:fontRef>
+        </p:style>
+        <p:txBody>
+          <a:bodyPr rtlCol="0" anchor="ctr"/>
+          <a:lstStyle/>
+          <a:p>
+            <a:pPr algn="ctr"/>
+          </a:p>
+        </p:txBody>
+      </p:sp>
+      <p:sp>
+        <p:nvSpPr>
+          <p:cNvPr id="64" name="TextBox 63"/>
+          <p:cNvSpPr txBox="1"/>
+          <p:nvPr/>
+        </p:nvSpPr>
+        <p:spPr>
+          <a:xfrm>
+            <a:off x="952500" y="5238750"/>
+            <a:ext cx="350520" cy="152400"/>
+          </a:xfrm>
+          <a:prstGeom prst="rect">
+            <a:avLst/>
+          </a:prstGeom>
+          <a:noFill/>
+        </p:spPr>
+        <p:txBody>
+          <a:bodyPr wrap="square" lIns="0" rIns="0" tIns="0" bIns="0">
+            <a:spAutoFit/>
+          </a:bodyPr>
+          <a:lstStyle/>
+          <a:p>
+            <a:pPr algn="ctr"/>
+            <a:r>
+              <a:rPr sz="850" b="1">
+                <a:solidFill>
+                  <a:srgbClr val="7A3FB0"/>
+                </a:solidFill>
+                <a:latin typeface="Aptos"/>
+              </a:rPr>
+              <a:t>You</a:t>
+            </a:r>
+          </a:p>
+        </p:txBody>
+      </p:sp>
+      <p:sp>
+        <p:nvSpPr>
+          <p:cNvPr id="65" name="Rounded Rectangle 64"/>
+          <p:cNvSpPr/>
+          <p:nvPr/>
+        </p:nvSpPr>
+        <p:spPr>
+          <a:xfrm>
+            <a:off x="1366520" y="5207000"/>
+            <a:ext cx="586740" cy="203200"/>
+          </a:xfrm>
+          <a:prstGeom prst="roundRect">
+            <a:avLst>
+              <a:gd name="adj" fmla="val 50000"/>
+            </a:avLst>
+          </a:prstGeom>
+          <a:solidFill>
+            <a:srgbClr val="EEF0F3"/>
+          </a:solidFill>
+          <a:ln>
+            <a:solidFill>
+              <a:srgbClr val="EEF0F3"/>
+            </a:solidFill>
+          </a:ln>
+          <a:effectLst/>
+        </p:spPr>
+        <p:style>
+          <a:lnRef idx="1">
+            <a:schemeClr val="accent1"/>
+          </a:lnRef>
+          <a:fillRef idx="3">
+            <a:schemeClr val="accent1"/>
+          </a:fillRef>
+          <a:effectRef idx="2">
+            <a:schemeClr val="accent1"/>
+          </a:effectRef>
+          <a:fontRef idx="minor">
+            <a:schemeClr val="lt1"/>
+          </a:fontRef>
+        </p:style>
+        <p:txBody>
+          <a:bodyPr rtlCol="0" anchor="ctr"/>
+          <a:lstStyle/>
+          <a:p>
+            <a:pPr algn="ctr"/>
+          </a:p>
+        </p:txBody>
+      </p:sp>
+      <p:sp>
+        <p:nvSpPr>
+          <p:cNvPr id="66" name="TextBox 65"/>
+          <p:cNvSpPr txBox="1"/>
+          <p:nvPr/>
+        </p:nvSpPr>
+        <p:spPr>
+          <a:xfrm>
+            <a:off x="1366520" y="5238750"/>
+            <a:ext cx="586740" cy="152400"/>
+          </a:xfrm>
+          <a:prstGeom prst="rect">
+            <a:avLst/>
+          </a:prstGeom>
+          <a:noFill/>
+        </p:spPr>
+        <p:txBody>
+          <a:bodyPr wrap="square" lIns="0" rIns="0" tIns="0" bIns="0">
+            <a:spAutoFit/>
+          </a:bodyPr>
+          <a:lstStyle/>
+          <a:p>
+            <a:pPr algn="ctr"/>
+            <a:r>
+              <a:rPr sz="850" b="1">
+                <a:solidFill>
+                  <a:srgbClr val="3D4A5C"/>
+                </a:solidFill>
+                <a:latin typeface="Aptos"/>
+              </a:rPr>
+              <a:t>GitHub</a:t>
+            </a:r>
+          </a:p>
+        </p:txBody>
+      </p:sp>
+      <p:sp>
+        <p:nvSpPr>
+          <p:cNvPr id="67" name="Rounded Rectangle 66"/>
+          <p:cNvSpPr/>
+          <p:nvPr/>
+        </p:nvSpPr>
+        <p:spPr>
+          <a:xfrm>
+            <a:off x="3543300" y="5207000"/>
+            <a:ext cx="429259" cy="203200"/>
+          </a:xfrm>
+          <a:prstGeom prst="roundRect">
+            <a:avLst>
+              <a:gd name="adj" fmla="val 50000"/>
+            </a:avLst>
+          </a:prstGeom>
+          <a:solidFill>
+            <a:srgbClr val="E3F6F4"/>
+          </a:solidFill>
+          <a:ln>
+            <a:solidFill>
+              <a:srgbClr val="E3F6F4"/>
+            </a:solidFill>
+          </a:ln>
+          <a:effectLst/>
+        </p:spPr>
+        <p:style>
+          <a:lnRef idx="1">
+            <a:schemeClr val="accent1"/>
+          </a:lnRef>
+          <a:fillRef idx="3">
+            <a:schemeClr val="accent1"/>
+          </a:fillRef>
+          <a:effectRef idx="2">
+            <a:schemeClr val="accent1"/>
+          </a:effectRef>
+          <a:fontRef idx="minor">
+            <a:schemeClr val="lt1"/>
+          </a:fontRef>
+        </p:style>
+        <p:txBody>
+          <a:bodyPr rtlCol="0" anchor="ctr"/>
+          <a:lstStyle/>
+          <a:p>
+            <a:pPr algn="ctr"/>
+          </a:p>
+        </p:txBody>
+      </p:sp>
+      <p:sp>
+        <p:nvSpPr>
+          <p:cNvPr id="68" name="TextBox 67"/>
+          <p:cNvSpPr txBox="1"/>
+          <p:nvPr/>
+        </p:nvSpPr>
+        <p:spPr>
+          <a:xfrm>
+            <a:off x="3543300" y="5238750"/>
+            <a:ext cx="429259" cy="152400"/>
+          </a:xfrm>
+          <a:prstGeom prst="rect">
+            <a:avLst/>
+          </a:prstGeom>
+          <a:noFill/>
+        </p:spPr>
+        <p:txBody>
+          <a:bodyPr wrap="square" lIns="0" rIns="0" tIns="0" bIns="0">
+            <a:spAutoFit/>
+          </a:bodyPr>
+          <a:lstStyle/>
+          <a:p>
+            <a:pPr algn="ctr"/>
+            <a:r>
+              <a:rPr sz="850" b="1">
+                <a:solidFill>
+                  <a:srgbClr val="05867E"/>
+                </a:solidFill>
+                <a:latin typeface="Aptos"/>
+              </a:rPr>
+              <a:t>KAOP</a:t>
+            </a:r>
+          </a:p>
+        </p:txBody>
+      </p:sp>
+      <p:sp>
+        <p:nvSpPr>
+          <p:cNvPr id="69" name="Rounded Rectangle 68"/>
+          <p:cNvSpPr/>
+          <p:nvPr/>
+        </p:nvSpPr>
+        <p:spPr>
+          <a:xfrm>
+            <a:off x="4036060" y="5207000"/>
+            <a:ext cx="586740" cy="203200"/>
+          </a:xfrm>
+          <a:prstGeom prst="roundRect">
+            <a:avLst>
+              <a:gd name="adj" fmla="val 50000"/>
+            </a:avLst>
+          </a:prstGeom>
+          <a:solidFill>
+            <a:srgbClr val="EEF0F3"/>
+          </a:solidFill>
+          <a:ln>
+            <a:solidFill>
+              <a:srgbClr val="EEF0F3"/>
+            </a:solidFill>
+          </a:ln>
+          <a:effectLst/>
+        </p:spPr>
+        <p:style>
+          <a:lnRef idx="1">
+            <a:schemeClr val="accent1"/>
+          </a:lnRef>
+          <a:fillRef idx="3">
+            <a:schemeClr val="accent1"/>
+          </a:fillRef>
+          <a:effectRef idx="2">
+            <a:schemeClr val="accent1"/>
+          </a:effectRef>
+          <a:fontRef idx="minor">
+            <a:schemeClr val="lt1"/>
+          </a:fontRef>
+        </p:style>
+        <p:txBody>
+          <a:bodyPr rtlCol="0" anchor="ctr"/>
+          <a:lstStyle/>
+          <a:p>
+            <a:pPr algn="ctr"/>
+          </a:p>
+        </p:txBody>
+      </p:sp>
+      <p:sp>
+        <p:nvSpPr>
+          <p:cNvPr id="70" name="TextBox 69"/>
+          <p:cNvSpPr txBox="1"/>
+          <p:nvPr/>
+        </p:nvSpPr>
+        <p:spPr>
+          <a:xfrm>
+            <a:off x="4036060" y="5238750"/>
+            <a:ext cx="586740" cy="152400"/>
+          </a:xfrm>
+          <a:prstGeom prst="rect">
+            <a:avLst/>
+          </a:prstGeom>
+          <a:noFill/>
+        </p:spPr>
+        <p:txBody>
+          <a:bodyPr wrap="square" lIns="0" rIns="0" tIns="0" bIns="0">
+            <a:spAutoFit/>
+          </a:bodyPr>
+          <a:lstStyle/>
+          <a:p>
+            <a:pPr algn="ctr"/>
+            <a:r>
+              <a:rPr sz="850" b="1">
+                <a:solidFill>
+                  <a:srgbClr val="3D4A5C"/>
+                </a:solidFill>
+                <a:latin typeface="Aptos"/>
+              </a:rPr>
+              <a:t>GitHub</a:t>
+            </a:r>
+          </a:p>
+        </p:txBody>
+      </p:sp>
+      <p:sp>
+        <p:nvSpPr>
+          <p:cNvPr id="71" name="Rounded Rectangle 70"/>
+          <p:cNvSpPr/>
+          <p:nvPr/>
+        </p:nvSpPr>
+        <p:spPr>
+          <a:xfrm>
+            <a:off x="6146800" y="5207000"/>
+            <a:ext cx="350520" cy="203200"/>
+          </a:xfrm>
+          <a:prstGeom prst="roundRect">
+            <a:avLst>
+              <a:gd name="adj" fmla="val 50000"/>
+            </a:avLst>
+          </a:prstGeom>
+          <a:solidFill>
+            <a:srgbClr val="F3EAFB"/>
+          </a:solidFill>
+          <a:ln>
+            <a:solidFill>
+              <a:srgbClr val="F3EAFB"/>
+            </a:solidFill>
+          </a:ln>
+          <a:effectLst/>
+        </p:spPr>
+        <p:style>
+          <a:lnRef idx="1">
+            <a:schemeClr val="accent1"/>
+          </a:lnRef>
+          <a:fillRef idx="3">
+            <a:schemeClr val="accent1"/>
+          </a:fillRef>
+          <a:effectRef idx="2">
+            <a:schemeClr val="accent1"/>
+          </a:effectRef>
+          <a:fontRef idx="minor">
+            <a:schemeClr val="lt1"/>
+          </a:fontRef>
+        </p:style>
+        <p:txBody>
+          <a:bodyPr rtlCol="0" anchor="ctr"/>
+          <a:lstStyle/>
+          <a:p>
+            <a:pPr algn="ctr"/>
+          </a:p>
+        </p:txBody>
+      </p:sp>
+      <p:sp>
+        <p:nvSpPr>
+          <p:cNvPr id="72" name="TextBox 71"/>
+          <p:cNvSpPr txBox="1"/>
+          <p:nvPr/>
+        </p:nvSpPr>
+        <p:spPr>
+          <a:xfrm>
+            <a:off x="6146800" y="5238750"/>
+            <a:ext cx="350520" cy="152400"/>
+          </a:xfrm>
+          <a:prstGeom prst="rect">
+            <a:avLst/>
+          </a:prstGeom>
+          <a:noFill/>
+        </p:spPr>
+        <p:txBody>
+          <a:bodyPr wrap="square" lIns="0" rIns="0" tIns="0" bIns="0">
+            <a:spAutoFit/>
+          </a:bodyPr>
+          <a:lstStyle/>
+          <a:p>
+            <a:pPr algn="ctr"/>
+            <a:r>
+              <a:rPr sz="850" b="1">
+                <a:solidFill>
+                  <a:srgbClr val="7A3FB0"/>
+                </a:solidFill>
+                <a:latin typeface="Aptos"/>
+              </a:rPr>
+              <a:t>You</a:t>
+            </a:r>
+          </a:p>
+        </p:txBody>
+      </p:sp>
+      <p:sp>
+        <p:nvSpPr>
+          <p:cNvPr id="73" name="Rounded Rectangle 72"/>
+          <p:cNvSpPr/>
+          <p:nvPr/>
+        </p:nvSpPr>
+        <p:spPr>
+          <a:xfrm>
+            <a:off x="6560820" y="5207000"/>
+            <a:ext cx="586740" cy="203200"/>
+          </a:xfrm>
+          <a:prstGeom prst="roundRect">
+            <a:avLst>
+              <a:gd name="adj" fmla="val 50000"/>
+            </a:avLst>
+          </a:prstGeom>
+          <a:solidFill>
+            <a:srgbClr val="EEF0F3"/>
+          </a:solidFill>
+          <a:ln>
+            <a:solidFill>
+              <a:srgbClr val="EEF0F3"/>
+            </a:solidFill>
+          </a:ln>
+          <a:effectLst/>
+        </p:spPr>
+        <p:style>
+          <a:lnRef idx="1">
+            <a:schemeClr val="accent1"/>
+          </a:lnRef>
+          <a:fillRef idx="3">
+            <a:schemeClr val="accent1"/>
+          </a:fillRef>
+          <a:effectRef idx="2">
+            <a:schemeClr val="accent1"/>
+          </a:effectRef>
+          <a:fontRef idx="minor">
+            <a:schemeClr val="lt1"/>
+          </a:fontRef>
+        </p:style>
+        <p:txBody>
+          <a:bodyPr rtlCol="0" anchor="ctr"/>
+          <a:lstStyle/>
+          <a:p>
+            <a:pPr algn="ctr"/>
+          </a:p>
+        </p:txBody>
+      </p:sp>
+      <p:sp>
+        <p:nvSpPr>
+          <p:cNvPr id="74" name="TextBox 73"/>
+          <p:cNvSpPr txBox="1"/>
+          <p:nvPr/>
+        </p:nvSpPr>
+        <p:spPr>
+          <a:xfrm>
+            <a:off x="6560820" y="5238750"/>
+            <a:ext cx="586740" cy="152400"/>
+          </a:xfrm>
+          <a:prstGeom prst="rect">
+            <a:avLst/>
+          </a:prstGeom>
+          <a:noFill/>
+        </p:spPr>
+        <p:txBody>
+          <a:bodyPr wrap="square" lIns="0" rIns="0" tIns="0" bIns="0">
+            <a:spAutoFit/>
+          </a:bodyPr>
+          <a:lstStyle/>
+          <a:p>
+            <a:pPr algn="ctr"/>
+            <a:r>
+              <a:rPr sz="850" b="1">
+                <a:solidFill>
+                  <a:srgbClr val="3D4A5C"/>
+                </a:solidFill>
+                <a:latin typeface="Aptos"/>
+              </a:rPr>
+              <a:t>GitHub</a:t>
+            </a:r>
+          </a:p>
+        </p:txBody>
+      </p:sp>
+      <p:sp>
+        <p:nvSpPr>
+          <p:cNvPr id="75" name="Rounded Rectangle 74"/>
+          <p:cNvSpPr/>
+          <p:nvPr/>
+        </p:nvSpPr>
+        <p:spPr>
+          <a:xfrm>
+            <a:off x="8737600" y="5207000"/>
+            <a:ext cx="1059180" cy="203200"/>
+          </a:xfrm>
+          <a:prstGeom prst="roundRect">
+            <a:avLst>
+              <a:gd name="adj" fmla="val 50000"/>
+            </a:avLst>
+          </a:prstGeom>
+          <a:solidFill>
+            <a:srgbClr val="E8EFFD"/>
+          </a:solidFill>
+          <a:ln>
+            <a:solidFill>
+              <a:srgbClr val="E8EFFD"/>
+            </a:solidFill>
+          </a:ln>
+          <a:effectLst/>
+        </p:spPr>
+        <p:style>
+          <a:lnRef idx="1">
+            <a:schemeClr val="accent1"/>
+          </a:lnRef>
+          <a:fillRef idx="3">
+            <a:schemeClr val="accent1"/>
+          </a:fillRef>
+          <a:effectRef idx="2">
+            <a:schemeClr val="accent1"/>
+          </a:effectRef>
+          <a:fontRef idx="minor">
+            <a:schemeClr val="lt1"/>
+          </a:fontRef>
+        </p:style>
+        <p:txBody>
+          <a:bodyPr rtlCol="0" anchor="ctr"/>
+          <a:lstStyle/>
+          <a:p>
+            <a:pPr algn="ctr"/>
+          </a:p>
+        </p:txBody>
+      </p:sp>
+      <p:sp>
+        <p:nvSpPr>
+          <p:cNvPr id="76" name="TextBox 75"/>
+          <p:cNvSpPr txBox="1"/>
+          <p:nvPr/>
+        </p:nvSpPr>
+        <p:spPr>
+          <a:xfrm>
+            <a:off x="8737600" y="5238750"/>
+            <a:ext cx="1059180" cy="152400"/>
+          </a:xfrm>
+          <a:prstGeom prst="rect">
+            <a:avLst/>
+          </a:prstGeom>
+          <a:noFill/>
+        </p:spPr>
+        <p:txBody>
+          <a:bodyPr wrap="square" lIns="0" rIns="0" tIns="0" bIns="0">
+            <a:spAutoFit/>
+          </a:bodyPr>
+          <a:lstStyle/>
+          <a:p>
+            <a:pPr algn="ctr"/>
+            <a:r>
+              <a:rPr sz="850" b="1">
+                <a:solidFill>
+                  <a:srgbClr val="2F62C4"/>
+                </a:solidFill>
+                <a:latin typeface="Aptos"/>
+              </a:rPr>
+              <a:t>Your cluster</a:t>
+            </a:r>
           </a:p>
         </p:txBody>
       </p:sp>

--- a/docs/presentation/KAOP_Customer_Pitch.pptx
+++ b/docs/presentation/KAOP_Customer_Pitch.pptx
@@ -9646,8 +9646,8 @@
         </p:nvSpPr>
         <p:spPr>
           <a:xfrm>
-            <a:off x="694944" y="1984248"/>
-            <a:ext cx="3529584" cy="2715768"/>
+            <a:off x="635000" y="1984248"/>
+            <a:ext cx="3454400" cy="2260600"/>
           </a:xfrm>
           <a:prstGeom prst="roundRect">
             <a:avLst>
@@ -9677,8 +9677,8 @@
         </p:nvSpPr>
         <p:spPr>
           <a:xfrm>
-            <a:off x="914400" y="2212848"/>
-            <a:ext cx="1280160" cy="466344"/>
+            <a:off x="854456" y="2212848"/>
+            <a:ext cx="3022600" cy="466344"/>
           </a:xfrm>
           <a:prstGeom prst="rect">
             <a:avLst/>
@@ -9718,8 +9718,8 @@
         </p:nvSpPr>
         <p:spPr>
           <a:xfrm>
-            <a:off x="914400" y="2843784"/>
-            <a:ext cx="3108960" cy="356616"/>
+            <a:off x="854456" y="2843784"/>
+            <a:ext cx="3022600" cy="356616"/>
           </a:xfrm>
           <a:prstGeom prst="rect">
             <a:avLst/>
@@ -9759,8 +9759,8 @@
         </p:nvSpPr>
         <p:spPr>
           <a:xfrm>
-            <a:off x="914400" y="3493008"/>
-            <a:ext cx="2999232" cy="786384"/>
+            <a:off x="854456" y="3493008"/>
+            <a:ext cx="3022600" cy="786384"/>
           </a:xfrm>
           <a:prstGeom prst="rect">
             <a:avLst/>
@@ -9817,8 +9817,8 @@
         </p:nvSpPr>
         <p:spPr>
           <a:xfrm>
-            <a:off x="4535424" y="1984248"/>
-            <a:ext cx="3529584" cy="2715768"/>
+            <a:off x="4368800" y="1984248"/>
+            <a:ext cx="3454400" cy="2260600"/>
           </a:xfrm>
           <a:prstGeom prst="roundRect">
             <a:avLst>
@@ -9848,8 +9848,8 @@
         </p:nvSpPr>
         <p:spPr>
           <a:xfrm>
-            <a:off x="4754880" y="2212848"/>
-            <a:ext cx="1280160" cy="466344"/>
+            <a:off x="4588256" y="2212848"/>
+            <a:ext cx="3022600" cy="466344"/>
           </a:xfrm>
           <a:prstGeom prst="rect">
             <a:avLst/>
@@ -9889,8 +9889,8 @@
         </p:nvSpPr>
         <p:spPr>
           <a:xfrm>
-            <a:off x="4754880" y="2843784"/>
-            <a:ext cx="3108960" cy="356616"/>
+            <a:off x="4588256" y="2843784"/>
+            <a:ext cx="3022600" cy="356616"/>
           </a:xfrm>
           <a:prstGeom prst="rect">
             <a:avLst/>
@@ -9930,8 +9930,8 @@
         </p:nvSpPr>
         <p:spPr>
           <a:xfrm>
-            <a:off x="4754880" y="3493008"/>
-            <a:ext cx="2999232" cy="786384"/>
+            <a:off x="4588256" y="3493008"/>
+            <a:ext cx="3022600" cy="786384"/>
           </a:xfrm>
           <a:prstGeom prst="rect">
             <a:avLst/>
@@ -9988,8 +9988,8 @@
         </p:nvSpPr>
         <p:spPr>
           <a:xfrm>
-            <a:off x="8375904" y="1984248"/>
-            <a:ext cx="3529584" cy="2715768"/>
+            <a:off x="8102600" y="1984248"/>
+            <a:ext cx="3454400" cy="2260600"/>
           </a:xfrm>
           <a:prstGeom prst="roundRect">
             <a:avLst>
@@ -10019,8 +10019,8 @@
         </p:nvSpPr>
         <p:spPr>
           <a:xfrm>
-            <a:off x="8595360" y="2212848"/>
-            <a:ext cx="1280160" cy="466344"/>
+            <a:off x="8322056" y="2212848"/>
+            <a:ext cx="3022600" cy="466344"/>
           </a:xfrm>
           <a:prstGeom prst="rect">
             <a:avLst/>
@@ -10060,8 +10060,8 @@
         </p:nvSpPr>
         <p:spPr>
           <a:xfrm>
-            <a:off x="8595360" y="2843784"/>
-            <a:ext cx="3108960" cy="356616"/>
+            <a:off x="8322056" y="2843784"/>
+            <a:ext cx="3022600" cy="356616"/>
           </a:xfrm>
           <a:prstGeom prst="rect">
             <a:avLst/>
@@ -10101,8 +10101,8 @@
         </p:nvSpPr>
         <p:spPr>
           <a:xfrm>
-            <a:off x="8595360" y="3493008"/>
-            <a:ext cx="2999232" cy="786384"/>
+            <a:off x="8322056" y="3493008"/>
+            <a:ext cx="3022600" cy="786384"/>
           </a:xfrm>
           <a:prstGeom prst="rect">
             <a:avLst/>
@@ -10153,338 +10153,388 @@
       </p:sp>
       <p:sp>
         <p:nvSpPr>
-          <p:cNvPr id="20" name="Text 18"/>
-          <p:cNvSpPr/>
-          <p:nvPr/>
-        </p:nvSpPr>
-        <p:spPr>
-          <a:xfrm>
-            <a:off x="777240" y="5056632"/>
-            <a:ext cx="5157216" cy="274320"/>
-          </a:xfrm>
-          <a:prstGeom prst="rect">
-            <a:avLst/>
-          </a:prstGeom>
-          <a:noFill/>
-          <a:ln/>
-        </p:spPr>
-        <p:txBody>
-          <a:bodyPr wrap="square" lIns="254" tIns="254" rIns="254" bIns="254" rtlCol="0" anchor="ctr">
-            <a:normAutofit/>
-          </a:bodyPr>
-          <a:lstStyle/>
-          <a:p>
-            <a:pPr algn="l" indent="0" marL="0">
-              <a:buNone/>
-            </a:pPr>
-            <a:r>
-              <a:rPr lang="en-US" sz="1640" b="1" dirty="0">
-                <a:solidFill>
-                  <a:srgbClr val="132438"/>
-                </a:solidFill>
-                <a:latin typeface="Aptos" pitchFamily="34" charset="0"/>
-                <a:ea typeface="Aptos" pitchFamily="34" charset="-122"/>
-                <a:cs typeface="Aptos" pitchFamily="34" charset="-120"/>
-              </a:rPr>
-              <a:t>Built on KAOP’s shared operating model</a:t>
-            </a:r>
-            <a:endParaRPr lang="en-US" sz="1640" dirty="0"/>
-          </a:p>
-        </p:txBody>
-      </p:sp>
-      <p:sp>
-        <p:nvSpPr>
-          <p:cNvPr id="21" name="Shape 19"/>
-          <p:cNvSpPr/>
-          <p:nvPr/>
-        </p:nvSpPr>
-        <p:spPr>
-          <a:xfrm>
-            <a:off x="5760720" y="4965192"/>
-            <a:ext cx="1298448" cy="347472"/>
+          <p:cNvPr id="20" name="Rounded Rectangle 19"/>
+          <p:cNvSpPr/>
+          <p:nvPr/>
+        </p:nvSpPr>
+        <p:spPr>
+          <a:xfrm>
+            <a:off x="635000" y="4470400"/>
+            <a:ext cx="10922000" cy="1625600"/>
           </a:xfrm>
           <a:prstGeom prst="roundRect">
             <a:avLst>
-              <a:gd name="adj" fmla="val 39474"/>
+              <a:gd name="adj" fmla="val 8000"/>
             </a:avLst>
           </a:prstGeom>
           <a:solidFill>
-            <a:srgbClr val="EAF0F5"/>
+            <a:srgbClr val="0C1423"/>
           </a:solidFill>
-          <a:ln w="12700">
+          <a:ln>
             <a:solidFill>
-              <a:srgbClr val="EAF0F5">
-                <a:alpha val="0"/>
-              </a:srgbClr>
+              <a:srgbClr val="0C1423"/>
             </a:solidFill>
-            <a:prstDash val="solid"/>
           </a:ln>
-        </p:spPr>
-        <p:txBody>
-          <a:bodyPr/>
-          <a:p/>
-        </p:txBody>
-      </p:sp>
-      <p:sp>
-        <p:nvSpPr>
-          <p:cNvPr id="22" name="Text 20"/>
-          <p:cNvSpPr/>
-          <p:nvPr/>
-        </p:nvSpPr>
-        <p:spPr>
-          <a:xfrm>
-            <a:off x="5870448" y="5038344"/>
-            <a:ext cx="1078992" cy="173736"/>
-          </a:xfrm>
-          <a:prstGeom prst="rect">
-            <a:avLst/>
-          </a:prstGeom>
-          <a:noFill/>
-          <a:ln/>
-        </p:spPr>
-        <p:txBody>
-          <a:bodyPr wrap="square" lIns="254" tIns="254" rIns="254" bIns="254" rtlCol="0" anchor="ctr">
-            <a:normAutofit/>
-          </a:bodyPr>
-          <a:lstStyle/>
-          <a:p>
-            <a:pPr algn="ctr" indent="0" marL="0">
-              <a:buNone/>
-            </a:pPr>
-            <a:r>
-              <a:rPr lang="en-US" sz="1130" b="1" dirty="0">
-                <a:solidFill>
-                  <a:srgbClr val="132438"/>
-                </a:solidFill>
-                <a:latin typeface="Aptos" pitchFamily="34" charset="0"/>
-                <a:ea typeface="Aptos" pitchFamily="34" charset="-122"/>
-                <a:cs typeface="Aptos" pitchFamily="34" charset="-120"/>
+          <a:effectLst/>
+        </p:spPr>
+        <p:style>
+          <a:lnRef idx="1">
+            <a:schemeClr val="accent1"/>
+          </a:lnRef>
+          <a:fillRef idx="3">
+            <a:schemeClr val="accent1"/>
+          </a:fillRef>
+          <a:effectRef idx="2">
+            <a:schemeClr val="accent1"/>
+          </a:effectRef>
+          <a:fontRef idx="minor">
+            <a:schemeClr val="lt1"/>
+          </a:fontRef>
+        </p:style>
+        <p:txBody>
+          <a:bodyPr rtlCol="0" anchor="ctr"/>
+          <a:lstStyle/>
+          <a:p>
+            <a:pPr algn="ctr"/>
+          </a:p>
+        </p:txBody>
+      </p:sp>
+      <p:sp>
+        <p:nvSpPr>
+          <p:cNvPr id="21" name="TextBox 20"/>
+          <p:cNvSpPr txBox="1"/>
+          <p:nvPr/>
+        </p:nvSpPr>
+        <p:spPr>
+          <a:xfrm>
+            <a:off x="914400" y="4648200"/>
+            <a:ext cx="6350000" cy="203200"/>
+          </a:xfrm>
+          <a:prstGeom prst="rect">
+            <a:avLst/>
+          </a:prstGeom>
+          <a:noFill/>
+        </p:spPr>
+        <p:txBody>
+          <a:bodyPr wrap="square" lIns="0" rIns="0" tIns="0" bIns="0">
+            <a:spAutoFit/>
+          </a:bodyPr>
+          <a:lstStyle/>
+          <a:p>
+            <a:r>
+              <a:rPr sz="1050" b="1">
+                <a:solidFill>
+                  <a:srgbClr val="C6F783"/>
+                </a:solidFill>
+                <a:latin typeface="Aptos"/>
+              </a:rPr>
+              <a:t>THE FOUNDATION: KAOP'S OPERATING MODEL</a:t>
+            </a:r>
+          </a:p>
+        </p:txBody>
+      </p:sp>
+      <p:sp>
+        <p:nvSpPr>
+          <p:cNvPr id="22" name="TextBox 21"/>
+          <p:cNvSpPr txBox="1"/>
+          <p:nvPr/>
+        </p:nvSpPr>
+        <p:spPr>
+          <a:xfrm>
+            <a:off x="914400" y="5029200"/>
+            <a:ext cx="2286000" cy="889000"/>
+          </a:xfrm>
+          <a:prstGeom prst="rect">
+            <a:avLst/>
+          </a:prstGeom>
+          <a:noFill/>
+        </p:spPr>
+        <p:txBody>
+          <a:bodyPr wrap="square" lIns="0" rIns="0" tIns="0" bIns="0">
+            <a:spAutoFit/>
+          </a:bodyPr>
+          <a:lstStyle/>
+          <a:p>
+            <a:r>
+              <a:rPr sz="2200" b="1">
+                <a:solidFill>
+                  <a:srgbClr val="FFFFFF"/>
+                </a:solidFill>
+                <a:latin typeface="Aptos"/>
               </a:rPr>
               <a:t>BUILD</a:t>
             </a:r>
-            <a:endParaRPr lang="en-US" sz="1130" dirty="0"/>
-          </a:p>
-        </p:txBody>
-      </p:sp>
-      <p:sp>
-        <p:nvSpPr>
-          <p:cNvPr id="23" name="Shape 21"/>
-          <p:cNvSpPr/>
-          <p:nvPr/>
-        </p:nvSpPr>
-        <p:spPr>
-          <a:xfrm>
-            <a:off x="7168896" y="4965192"/>
-            <a:ext cx="1298448" cy="347472"/>
-          </a:xfrm>
-          <a:prstGeom prst="roundRect">
-            <a:avLst>
-              <a:gd name="adj" fmla="val 39474"/>
-            </a:avLst>
-          </a:prstGeom>
-          <a:solidFill>
-            <a:srgbClr val="EAF0F5"/>
-          </a:solidFill>
-          <a:ln w="12700">
-            <a:solidFill>
-              <a:srgbClr val="EAF0F5">
-                <a:alpha val="0"/>
-              </a:srgbClr>
-            </a:solidFill>
-            <a:prstDash val="solid"/>
-          </a:ln>
-        </p:spPr>
-        <p:txBody>
-          <a:bodyPr/>
-          <a:p/>
-        </p:txBody>
-      </p:sp>
-      <p:sp>
-        <p:nvSpPr>
-          <p:cNvPr id="24" name="Text 22"/>
-          <p:cNvSpPr/>
-          <p:nvPr/>
-        </p:nvSpPr>
-        <p:spPr>
-          <a:xfrm>
-            <a:off x="7278624" y="5038344"/>
-            <a:ext cx="1078992" cy="173736"/>
-          </a:xfrm>
-          <a:prstGeom prst="rect">
-            <a:avLst/>
-          </a:prstGeom>
-          <a:noFill/>
-          <a:ln/>
-        </p:spPr>
-        <p:txBody>
-          <a:bodyPr wrap="square" lIns="254" tIns="254" rIns="254" bIns="254" rtlCol="0" anchor="ctr">
-            <a:normAutofit/>
-          </a:bodyPr>
-          <a:lstStyle/>
-          <a:p>
-            <a:pPr algn="ctr" indent="0" marL="0">
-              <a:buNone/>
-            </a:pPr>
-            <a:r>
-              <a:rPr lang="en-US" sz="1130" b="1" dirty="0">
-                <a:solidFill>
-                  <a:srgbClr val="132438"/>
-                </a:solidFill>
-                <a:latin typeface="Aptos" pitchFamily="34" charset="0"/>
-                <a:ea typeface="Aptos" pitchFamily="34" charset="-122"/>
-                <a:cs typeface="Aptos" pitchFamily="34" charset="-120"/>
+          </a:p>
+          <a:p>
+            <a:pPr>
+              <a:spcBef>
+                <a:spcPts val="600"/>
+              </a:spcBef>
+            </a:pPr>
+            <a:r>
+              <a:rPr sz="1200" b="0">
+                <a:solidFill>
+                  <a:srgbClr val="B8C4D6"/>
+                </a:solidFill>
+                <a:latin typeface="Aptos"/>
+              </a:rPr>
+              <a:t>Catalog agents, imports, or your own</a:t>
+            </a:r>
+          </a:p>
+        </p:txBody>
+      </p:sp>
+      <p:sp>
+        <p:nvSpPr>
+          <p:cNvPr id="23" name="TextBox 22"/>
+          <p:cNvSpPr txBox="1"/>
+          <p:nvPr/>
+        </p:nvSpPr>
+        <p:spPr>
+          <a:xfrm>
+            <a:off x="3505200" y="5029200"/>
+            <a:ext cx="2286000" cy="889000"/>
+          </a:xfrm>
+          <a:prstGeom prst="rect">
+            <a:avLst/>
+          </a:prstGeom>
+          <a:noFill/>
+        </p:spPr>
+        <p:txBody>
+          <a:bodyPr wrap="square" lIns="0" rIns="0" tIns="0" bIns="0">
+            <a:spAutoFit/>
+          </a:bodyPr>
+          <a:lstStyle/>
+          <a:p>
+            <a:r>
+              <a:rPr sz="2200" b="1">
+                <a:solidFill>
+                  <a:srgbClr val="FFFFFF"/>
+                </a:solidFill>
+                <a:latin typeface="Aptos"/>
               </a:rPr>
               <a:t>RUN</a:t>
             </a:r>
-            <a:endParaRPr lang="en-US" sz="1130" dirty="0"/>
-          </a:p>
-        </p:txBody>
-      </p:sp>
-      <p:sp>
-        <p:nvSpPr>
-          <p:cNvPr id="25" name="Shape 23"/>
-          <p:cNvSpPr/>
-          <p:nvPr/>
-        </p:nvSpPr>
-        <p:spPr>
-          <a:xfrm>
-            <a:off x="8577072" y="4965192"/>
-            <a:ext cx="1298448" cy="347472"/>
-          </a:xfrm>
-          <a:prstGeom prst="roundRect">
-            <a:avLst>
-              <a:gd name="adj" fmla="val 39474"/>
-            </a:avLst>
-          </a:prstGeom>
-          <a:solidFill>
-            <a:srgbClr val="06AFA5"/>
-          </a:solidFill>
-          <a:ln w="12700">
-            <a:solidFill>
-              <a:srgbClr val="06AFA5">
-                <a:alpha val="0"/>
-              </a:srgbClr>
-            </a:solidFill>
-            <a:prstDash val="solid"/>
-          </a:ln>
-        </p:spPr>
-        <p:txBody>
-          <a:bodyPr/>
-          <a:p/>
-        </p:txBody>
-      </p:sp>
-      <p:sp>
-        <p:nvSpPr>
-          <p:cNvPr id="26" name="Text 24"/>
-          <p:cNvSpPr/>
-          <p:nvPr/>
-        </p:nvSpPr>
-        <p:spPr>
-          <a:xfrm>
-            <a:off x="8686800" y="5038344"/>
-            <a:ext cx="1078992" cy="173736"/>
-          </a:xfrm>
-          <a:prstGeom prst="rect">
-            <a:avLst/>
-          </a:prstGeom>
-          <a:noFill/>
-          <a:ln/>
-        </p:spPr>
-        <p:txBody>
-          <a:bodyPr wrap="square" lIns="254" tIns="254" rIns="254" bIns="254" rtlCol="0" anchor="ctr">
-            <a:normAutofit/>
-          </a:bodyPr>
-          <a:lstStyle/>
-          <a:p>
-            <a:pPr algn="ctr" indent="0" marL="0">
-              <a:buNone/>
-            </a:pPr>
-            <a:r>
-              <a:rPr lang="en-US" sz="1130" b="1" dirty="0">
+          </a:p>
+          <a:p>
+            <a:pPr>
+              <a:spcBef>
+                <a:spcPts val="600"/>
+              </a:spcBef>
+            </a:pPr>
+            <a:r>
+              <a:rPr sz="1200" b="0">
+                <a:solidFill>
+                  <a:srgbClr val="B8C4D6"/>
+                </a:solidFill>
+                <a:latin typeface="Aptos"/>
+              </a:rPr>
+              <a:t>Workflows, triggers, approvals</a:t>
+            </a:r>
+          </a:p>
+        </p:txBody>
+      </p:sp>
+      <p:sp>
+        <p:nvSpPr>
+          <p:cNvPr id="24" name="TextBox 23"/>
+          <p:cNvSpPr txBox="1"/>
+          <p:nvPr/>
+        </p:nvSpPr>
+        <p:spPr>
+          <a:xfrm>
+            <a:off x="3175000" y="5080000"/>
+            <a:ext cx="254000" cy="304800"/>
+          </a:xfrm>
+          <a:prstGeom prst="rect">
+            <a:avLst/>
+          </a:prstGeom>
+          <a:noFill/>
+        </p:spPr>
+        <p:txBody>
+          <a:bodyPr wrap="square" lIns="0" rIns="0" tIns="0" bIns="0">
+            <a:spAutoFit/>
+          </a:bodyPr>
+          <a:lstStyle/>
+          <a:p>
+            <a:pPr algn="ctr"/>
+            <a:r>
+              <a:rPr sz="2200" b="1">
+                <a:solidFill>
+                  <a:srgbClr val="06AFA5"/>
+                </a:solidFill>
+                <a:latin typeface="Aptos"/>
+              </a:rPr>
+              <a:t>›</a:t>
+            </a:r>
+          </a:p>
+        </p:txBody>
+      </p:sp>
+      <p:sp>
+        <p:nvSpPr>
+          <p:cNvPr id="25" name="TextBox 24"/>
+          <p:cNvSpPr txBox="1"/>
+          <p:nvPr/>
+        </p:nvSpPr>
+        <p:spPr>
+          <a:xfrm>
+            <a:off x="6096000" y="5029200"/>
+            <a:ext cx="2286000" cy="889000"/>
+          </a:xfrm>
+          <a:prstGeom prst="rect">
+            <a:avLst/>
+          </a:prstGeom>
+          <a:noFill/>
+        </p:spPr>
+        <p:txBody>
+          <a:bodyPr wrap="square" lIns="0" rIns="0" tIns="0" bIns="0">
+            <a:spAutoFit/>
+          </a:bodyPr>
+          <a:lstStyle/>
+          <a:p>
+            <a:r>
+              <a:rPr sz="2200" b="1">
                 <a:solidFill>
                   <a:srgbClr val="FFFFFF"/>
                 </a:solidFill>
-                <a:latin typeface="Aptos" pitchFamily="34" charset="0"/>
-                <a:ea typeface="Aptos" pitchFamily="34" charset="-122"/>
-                <a:cs typeface="Aptos" pitchFamily="34" charset="-120"/>
+                <a:latin typeface="Aptos"/>
               </a:rPr>
               <a:t>GOVERN</a:t>
             </a:r>
-            <a:endParaRPr lang="en-US" sz="1130" dirty="0"/>
-          </a:p>
-        </p:txBody>
-      </p:sp>
-      <p:sp>
-        <p:nvSpPr>
-          <p:cNvPr id="27" name="Shape 25"/>
-          <p:cNvSpPr/>
-          <p:nvPr/>
-        </p:nvSpPr>
-        <p:spPr>
-          <a:xfrm>
-            <a:off x="9985248" y="4965192"/>
-            <a:ext cx="1298448" cy="347472"/>
-          </a:xfrm>
-          <a:prstGeom prst="roundRect">
-            <a:avLst>
-              <a:gd name="adj" fmla="val 39474"/>
-            </a:avLst>
-          </a:prstGeom>
-          <a:solidFill>
-            <a:srgbClr val="EAF0F5"/>
-          </a:solidFill>
-          <a:ln w="12700">
-            <a:solidFill>
-              <a:srgbClr val="EAF0F5">
-                <a:alpha val="0"/>
-              </a:srgbClr>
-            </a:solidFill>
-            <a:prstDash val="solid"/>
-          </a:ln>
-        </p:spPr>
-        <p:txBody>
-          <a:bodyPr/>
-          <a:p/>
-        </p:txBody>
-      </p:sp>
-      <p:sp>
-        <p:nvSpPr>
-          <p:cNvPr id="28" name="Text 26"/>
-          <p:cNvSpPr/>
-          <p:nvPr/>
-        </p:nvSpPr>
-        <p:spPr>
-          <a:xfrm>
-            <a:off x="10094976" y="5038344"/>
-            <a:ext cx="1078992" cy="173736"/>
-          </a:xfrm>
-          <a:prstGeom prst="rect">
-            <a:avLst/>
-          </a:prstGeom>
-          <a:noFill/>
-          <a:ln/>
-        </p:spPr>
-        <p:txBody>
-          <a:bodyPr wrap="square" lIns="254" tIns="254" rIns="254" bIns="254" rtlCol="0" anchor="ctr">
-            <a:normAutofit/>
-          </a:bodyPr>
-          <a:lstStyle/>
-          <a:p>
-            <a:pPr algn="ctr" indent="0" marL="0">
-              <a:buNone/>
-            </a:pPr>
-            <a:r>
-              <a:rPr lang="en-US" sz="1130" b="1" dirty="0">
-                <a:solidFill>
-                  <a:srgbClr val="132438"/>
-                </a:solidFill>
-                <a:latin typeface="Aptos" pitchFamily="34" charset="0"/>
-                <a:ea typeface="Aptos" pitchFamily="34" charset="-122"/>
-                <a:cs typeface="Aptos" pitchFamily="34" charset="-120"/>
+          </a:p>
+          <a:p>
+            <a:pPr>
+              <a:spcBef>
+                <a:spcPts val="600"/>
+              </a:spcBef>
+            </a:pPr>
+            <a:r>
+              <a:rPr sz="1200" b="0">
+                <a:solidFill>
+                  <a:srgbClr val="B8C4D6"/>
+                </a:solidFill>
+                <a:latin typeface="Aptos"/>
+              </a:rPr>
+              <a:t>Identity, limits, audit trail</a:t>
+            </a:r>
+          </a:p>
+        </p:txBody>
+      </p:sp>
+      <p:sp>
+        <p:nvSpPr>
+          <p:cNvPr id="26" name="TextBox 25"/>
+          <p:cNvSpPr txBox="1"/>
+          <p:nvPr/>
+        </p:nvSpPr>
+        <p:spPr>
+          <a:xfrm>
+            <a:off x="5765800" y="5080000"/>
+            <a:ext cx="254000" cy="304800"/>
+          </a:xfrm>
+          <a:prstGeom prst="rect">
+            <a:avLst/>
+          </a:prstGeom>
+          <a:noFill/>
+        </p:spPr>
+        <p:txBody>
+          <a:bodyPr wrap="square" lIns="0" rIns="0" tIns="0" bIns="0">
+            <a:spAutoFit/>
+          </a:bodyPr>
+          <a:lstStyle/>
+          <a:p>
+            <a:pPr algn="ctr"/>
+            <a:r>
+              <a:rPr sz="2200" b="1">
+                <a:solidFill>
+                  <a:srgbClr val="06AFA5"/>
+                </a:solidFill>
+                <a:latin typeface="Aptos"/>
+              </a:rPr>
+              <a:t>›</a:t>
+            </a:r>
+          </a:p>
+        </p:txBody>
+      </p:sp>
+      <p:sp>
+        <p:nvSpPr>
+          <p:cNvPr id="27" name="TextBox 26"/>
+          <p:cNvSpPr txBox="1"/>
+          <p:nvPr/>
+        </p:nvSpPr>
+        <p:spPr>
+          <a:xfrm>
+            <a:off x="8686800" y="5029200"/>
+            <a:ext cx="2286000" cy="889000"/>
+          </a:xfrm>
+          <a:prstGeom prst="rect">
+            <a:avLst/>
+          </a:prstGeom>
+          <a:noFill/>
+        </p:spPr>
+        <p:txBody>
+          <a:bodyPr wrap="square" lIns="0" rIns="0" tIns="0" bIns="0">
+            <a:spAutoFit/>
+          </a:bodyPr>
+          <a:lstStyle/>
+          <a:p>
+            <a:r>
+              <a:rPr sz="2200" b="1">
+                <a:solidFill>
+                  <a:srgbClr val="FFFFFF"/>
+                </a:solidFill>
+                <a:latin typeface="Aptos"/>
               </a:rPr>
               <a:t>OPTIMIZE</a:t>
             </a:r>
-            <a:endParaRPr lang="en-US" sz="1130" dirty="0"/>
+          </a:p>
+          <a:p>
+            <a:pPr>
+              <a:spcBef>
+                <a:spcPts val="600"/>
+              </a:spcBef>
+            </a:pPr>
+            <a:r>
+              <a:rPr sz="1200" b="0">
+                <a:solidFill>
+                  <a:srgbClr val="B8C4D6"/>
+                </a:solidFill>
+                <a:latin typeface="Aptos"/>
+              </a:rPr>
+              <a:t>Cost, quality, evaluations</a:t>
+            </a:r>
+          </a:p>
+        </p:txBody>
+      </p:sp>
+      <p:sp>
+        <p:nvSpPr>
+          <p:cNvPr id="28" name="TextBox 27"/>
+          <p:cNvSpPr txBox="1"/>
+          <p:nvPr/>
+        </p:nvSpPr>
+        <p:spPr>
+          <a:xfrm>
+            <a:off x="8356600" y="5080000"/>
+            <a:ext cx="254000" cy="304800"/>
+          </a:xfrm>
+          <a:prstGeom prst="rect">
+            <a:avLst/>
+          </a:prstGeom>
+          <a:noFill/>
+        </p:spPr>
+        <p:txBody>
+          <a:bodyPr wrap="square" lIns="0" rIns="0" tIns="0" bIns="0">
+            <a:spAutoFit/>
+          </a:bodyPr>
+          <a:lstStyle/>
+          <a:p>
+            <a:pPr algn="ctr"/>
+            <a:r>
+              <a:rPr sz="2200" b="1">
+                <a:solidFill>
+                  <a:srgbClr val="06AFA5"/>
+                </a:solidFill>
+                <a:latin typeface="Aptos"/>
+              </a:rPr>
+              <a:t>›</a:t>
+            </a:r>
           </a:p>
         </p:txBody>
       </p:sp>
